--- a/investor-pitch/Datre_Corporation_Investor_Pitch.pptx
+++ b/investor-pitch/Datre_Corporation_Investor_Pitch.pptx
@@ -6808,8 +6808,8 @@
         </p:nvSpPr>
         <p:spPr>
           <a:xfrm>
-            <a:off x="7132320" y="2286000"/>
-            <a:ext cx="4236415" cy="274320"/>
+            <a:off x="7132320" y="2240280"/>
+            <a:ext cx="4236415" cy="237744"/>
           </a:xfrm>
           <a:prstGeom prst="rect">
             <a:avLst/>
@@ -6825,7 +6825,7 @@
               <a:buNone/>
             </a:pPr>
             <a:r>
-              <a:rPr lang="en-US" sz="1050" b="1" dirty="0">
+              <a:rPr lang="en-US" sz="1000" b="1" dirty="0">
                 <a:solidFill>
                   <a:srgbClr val="1C1F26"/>
                 </a:solidFill>
@@ -6835,7 +6835,7 @@
               </a:rPr>
               <a:t>Recurring audit qualification</a:t>
             </a:r>
-            <a:endParaRPr lang="en-US" sz="1050" dirty="0"/>
+            <a:endParaRPr lang="en-US" sz="1000" dirty="0"/>
           </a:p>
         </p:txBody>
       </p:sp>
@@ -6847,8 +6847,8 @@
         </p:nvSpPr>
         <p:spPr>
           <a:xfrm>
-            <a:off x="7132320" y="2551176"/>
-            <a:ext cx="4236415" cy="822960"/>
+            <a:off x="7132320" y="2478024"/>
+            <a:ext cx="4236415" cy="640080"/>
           </a:xfrm>
           <a:prstGeom prst="rect">
             <a:avLst/>
@@ -6862,12 +6862,12 @@
           <a:p>
             <a:pPr indent="0" marL="0">
               <a:lnSpc>
-                <a:spcPct val="115000"/>
+                <a:spcPct val="105000"/>
               </a:lnSpc>
               <a:buNone/>
             </a:pPr>
             <a:r>
-              <a:rPr lang="en-US" sz="930" dirty="0">
+              <a:rPr lang="en-US" sz="880" dirty="0">
                 <a:solidFill>
                   <a:srgbClr val="3A4553"/>
                 </a:solidFill>
@@ -6875,9 +6875,9 @@
                 <a:ea typeface="Calibri" pitchFamily="34" charset="-122"/>
                 <a:cs typeface="Calibri" pitchFamily="34" charset="-120"/>
               </a:rPr>
-              <a:t>Auditors have repeatedly qualified their opinion for non-ascertainment of employee benefit liability via actuarial valuation (Ind AS 19) — a fixable compliance gap, open across multiple years.</a:t>
-            </a:r>
-            <a:endParaRPr lang="en-US" sz="930" dirty="0"/>
+              <a:t>Auditors have repeatedly qualified their opinion for non-ascertainment of employee benefit liability via actuarial valuation (Ind AS 19) — a fixable gap, open across multiple years.</a:t>
+            </a:r>
+            <a:endParaRPr lang="en-US" sz="880" dirty="0"/>
           </a:p>
         </p:txBody>
       </p:sp>
@@ -6889,8 +6889,8 @@
         </p:nvSpPr>
         <p:spPr>
           <a:xfrm>
-            <a:off x="7132320" y="3456432"/>
-            <a:ext cx="4236415" cy="274320"/>
+            <a:off x="7132320" y="3200400"/>
+            <a:ext cx="4236415" cy="237744"/>
           </a:xfrm>
           <a:prstGeom prst="rect">
             <a:avLst/>
@@ -6906,7 +6906,7 @@
               <a:buNone/>
             </a:pPr>
             <a:r>
-              <a:rPr lang="en-US" sz="1050" b="1" dirty="0">
+              <a:rPr lang="en-US" sz="1000" b="1" dirty="0">
                 <a:solidFill>
                   <a:srgbClr val="1C1F26"/>
                 </a:solidFill>
@@ -6916,7 +6916,7 @@
               </a:rPr>
               <a:t>Negative net worth</a:t>
             </a:r>
-            <a:endParaRPr lang="en-US" sz="1050" dirty="0"/>
+            <a:endParaRPr lang="en-US" sz="1000" dirty="0"/>
           </a:p>
         </p:txBody>
       </p:sp>
@@ -6928,8 +6928,8 @@
         </p:nvSpPr>
         <p:spPr>
           <a:xfrm>
-            <a:off x="7132320" y="3721608"/>
-            <a:ext cx="4236415" cy="822960"/>
+            <a:off x="7132320" y="3438144"/>
+            <a:ext cx="4236415" cy="640080"/>
           </a:xfrm>
           <a:prstGeom prst="rect">
             <a:avLst/>
@@ -6943,12 +6943,12 @@
           <a:p>
             <a:pPr indent="0" marL="0">
               <a:lnSpc>
-                <a:spcPct val="115000"/>
+                <a:spcPct val="105000"/>
               </a:lnSpc>
               <a:buNone/>
             </a:pPr>
             <a:r>
-              <a:rPr lang="en-US" sz="930" dirty="0">
+              <a:rPr lang="en-US" sz="880" dirty="0">
                 <a:solidFill>
                   <a:srgbClr val="3A4553"/>
                 </a:solidFill>
@@ -6958,7 +6958,7 @@
               </a:rPr>
               <a:t>Priority for any capital structure discussion: equity infusion or a faster retained-earnings build is needed to turn net worth positive.</a:t>
             </a:r>
-            <a:endParaRPr lang="en-US" sz="930" dirty="0"/>
+            <a:endParaRPr lang="en-US" sz="880" dirty="0"/>
           </a:p>
         </p:txBody>
       </p:sp>
@@ -6970,8 +6970,8 @@
         </p:nvSpPr>
         <p:spPr>
           <a:xfrm>
-            <a:off x="7132320" y="4626864"/>
-            <a:ext cx="4236415" cy="274320"/>
+            <a:off x="7132320" y="4160520"/>
+            <a:ext cx="4236415" cy="237744"/>
           </a:xfrm>
           <a:prstGeom prst="rect">
             <a:avLst/>
@@ -6987,7 +6987,7 @@
               <a:buNone/>
             </a:pPr>
             <a:r>
-              <a:rPr lang="en-US" sz="1050" b="1" dirty="0">
+              <a:rPr lang="en-US" sz="1000" b="1" dirty="0">
                 <a:solidFill>
                   <a:srgbClr val="1C1F26"/>
                 </a:solidFill>
@@ -6997,7 +6997,7 @@
               </a:rPr>
               <a:t>Related-party disclosure</a:t>
             </a:r>
-            <a:endParaRPr lang="en-US" sz="1050" dirty="0"/>
+            <a:endParaRPr lang="en-US" sz="1000" dirty="0"/>
           </a:p>
         </p:txBody>
       </p:sp>
@@ -7009,8 +7009,8 @@
         </p:nvSpPr>
         <p:spPr>
           <a:xfrm>
-            <a:off x="7132320" y="4892040"/>
-            <a:ext cx="4236415" cy="822960"/>
+            <a:off x="7132320" y="4398264"/>
+            <a:ext cx="4236415" cy="640080"/>
           </a:xfrm>
           <a:prstGeom prst="rect">
             <a:avLst/>
@@ -7024,12 +7024,12 @@
           <a:p>
             <a:pPr indent="0" marL="0">
               <a:lnSpc>
-                <a:spcPct val="115000"/>
+                <a:spcPct val="105000"/>
               </a:lnSpc>
               <a:buNone/>
             </a:pPr>
             <a:r>
-              <a:rPr lang="en-US" sz="930" dirty="0">
+              <a:rPr lang="en-US" sz="880" dirty="0">
                 <a:solidFill>
                   <a:srgbClr val="3A4553"/>
                 </a:solidFill>
@@ -7039,13 +7039,94 @@
               </a:rPr>
               <a:t>No related-party transaction or promoter-loan disclosure was found in the materials reviewed — request full disclosure before finalizing terms.</a:t>
             </a:r>
-            <a:endParaRPr lang="en-US" sz="930" dirty="0"/>
+            <a:endParaRPr lang="en-US" sz="880" dirty="0"/>
           </a:p>
         </p:txBody>
       </p:sp>
       <p:sp>
         <p:nvSpPr>
           <p:cNvPr id="15" name="Text 12"/>
+          <p:cNvSpPr/>
+          <p:nvPr/>
+        </p:nvSpPr>
+        <p:spPr>
+          <a:xfrm>
+            <a:off x="7132320" y="5120640"/>
+            <a:ext cx="4236415" cy="237744"/>
+          </a:xfrm>
+          <a:prstGeom prst="rect">
+            <a:avLst/>
+          </a:prstGeom>
+          <a:noFill/>
+          <a:ln/>
+        </p:spPr>
+        <p:txBody>
+          <a:bodyPr wrap="square" lIns="0" tIns="0" rIns="0" bIns="0" rtlCol="0" anchor="ctr"/>
+          <a:lstStyle/>
+          <a:p>
+            <a:pPr indent="0" marL="0">
+              <a:buNone/>
+            </a:pPr>
+            <a:r>
+              <a:rPr lang="en-US" sz="1000" b="1" dirty="0">
+                <a:solidFill>
+                  <a:srgbClr val="1C1F26"/>
+                </a:solidFill>
+                <a:latin typeface="Calibri" pitchFamily="34" charset="0"/>
+                <a:ea typeface="Calibri" pitchFamily="34" charset="-122"/>
+                <a:cs typeface="Calibri" pitchFamily="34" charset="-120"/>
+              </a:rPr>
+              <a:t>Historical restructuring reference</a:t>
+            </a:r>
+            <a:endParaRPr lang="en-US" sz="1000" dirty="0"/>
+          </a:p>
+        </p:txBody>
+      </p:sp>
+      <p:sp>
+        <p:nvSpPr>
+          <p:cNvPr id="16" name="Text 13"/>
+          <p:cNvSpPr/>
+          <p:nvPr/>
+        </p:nvSpPr>
+        <p:spPr>
+          <a:xfrm>
+            <a:off x="7132320" y="5358384"/>
+            <a:ext cx="4236415" cy="640080"/>
+          </a:xfrm>
+          <a:prstGeom prst="rect">
+            <a:avLst/>
+          </a:prstGeom>
+          <a:noFill/>
+          <a:ln/>
+        </p:spPr>
+        <p:txBody>
+          <a:bodyPr wrap="square" lIns="0" tIns="0" rIns="0" bIns="0" rtlCol="0" anchor="ctr"/>
+          <a:lstStyle/>
+          <a:p>
+            <a:pPr indent="0" marL="0">
+              <a:lnSpc>
+                <a:spcPct val="105000"/>
+              </a:lnSpc>
+              <a:buNone/>
+            </a:pPr>
+            <a:r>
+              <a:rPr lang="en-US" sz="880" dirty="0">
+                <a:solidFill>
+                  <a:srgbClr val="3A4553"/>
+                </a:solidFill>
+                <a:latin typeface="Calibri" pitchFamily="34" charset="0"/>
+                <a:ea typeface="Calibri" pitchFamily="34" charset="-122"/>
+                <a:cs typeface="Calibri" pitchFamily="34" charset="-120"/>
+              </a:rPr>
+              <a:t>One internal document is titled with reference to “post-NCLT” status. No case details, dates or resolution terms were available for verification — confirm and disclose before external circulation.</a:t>
+            </a:r>
+            <a:endParaRPr lang="en-US" sz="880" dirty="0"/>
+          </a:p>
+        </p:txBody>
+      </p:sp>
+      <p:sp>
+        <p:nvSpPr>
+          <p:cNvPr id="17" name="Text 14"/>
           <p:cNvSpPr/>
           <p:nvPr/>
         </p:nvSpPr>
@@ -7084,7 +7165,7 @@
       </p:sp>
       <p:sp>
         <p:nvSpPr>
-          <p:cNvPr id="16" name="Text 13"/>
+          <p:cNvPr id="18" name="Text 15"/>
           <p:cNvSpPr/>
           <p:nvPr/>
         </p:nvSpPr>
@@ -7523,7 +7604,7 @@
                 <a:ea typeface="Calibri" pitchFamily="34" charset="-122"/>
                 <a:cs typeface="Calibri" pitchFamily="34" charset="-120"/>
               </a:rPr>
-              <a:t>A genuine counter-example: an independent, growing account since FY22-23, still small but expanding into FY26-27</a:t>
+              <a:t>Formalized via NDA/exclusive tie-up alongside Tega in Mining — a real second leg, growing since FY22-23, though still small next to Tega/Escorts</a:t>
             </a:r>
             <a:endParaRPr lang="en-US" sz="980" dirty="0"/>
           </a:p>
@@ -8643,58 +8724,1692 @@
           </a:p>
         </p:txBody>
       </p:sp>
-      <p:sp>
-        <p:nvSpPr>
-          <p:cNvPr id="4" name="Shape 2"/>
-          <p:cNvSpPr/>
-          <p:nvPr/>
-        </p:nvSpPr>
-        <p:spPr>
-          <a:xfrm>
-            <a:off x="548640" y="1828800"/>
-            <a:ext cx="11094415" cy="1417320"/>
-          </a:xfrm>
-          <a:prstGeom prst="roundRect">
-            <a:avLst>
-              <a:gd name="adj" fmla="val 5161"/>
-            </a:avLst>
-          </a:prstGeom>
-          <a:solidFill>
-            <a:srgbClr val="262B34"/>
-          </a:solidFill>
-          <a:ln/>
-        </p:spPr>
-      </p:sp>
-      <p:sp>
-        <p:nvSpPr>
-          <p:cNvPr id="5" name="Shape 3"/>
-          <p:cNvSpPr/>
-          <p:nvPr/>
-        </p:nvSpPr>
-        <p:spPr>
-          <a:xfrm>
-            <a:off x="777240" y="2057400"/>
-            <a:ext cx="146304" cy="146304"/>
-          </a:xfrm>
-          <a:prstGeom prst="ellipse">
-            <a:avLst/>
-          </a:prstGeom>
-          <a:solidFill>
-            <a:srgbClr val="B8453F"/>
-          </a:solidFill>
-          <a:ln/>
-        </p:spPr>
-      </p:sp>
-      <p:sp>
-        <p:nvSpPr>
-          <p:cNvPr id="6" name="Text 4"/>
-          <p:cNvSpPr/>
-          <p:nvPr/>
-        </p:nvSpPr>
-        <p:spPr>
-          <a:xfrm>
-            <a:off x="1051560" y="1965960"/>
-            <a:ext cx="2286000" cy="320040"/>
+      <p:graphicFrame>
+        <p:nvGraphicFramePr>
+          <p:cNvPr id="17" name="Table 0"/>
+          <p:cNvGraphicFramePr>
+            <a:graphicFrameLocks noGrp="1"/>
+          </p:cNvGraphicFramePr>
+          <p:nvPr>
+            <p:extLst>
+              <p:ext uri="{D42A27DB-BD31-4B8C-83A1-F6EECF244321}">
+                <p14:modId xmlns:p14="http://schemas.microsoft.com/office/powerpoint/2010/main" val="1579011935"/>
+              </p:ext>
+            </p:extLst>
+          </p:nvPr>
+        </p:nvGraphicFramePr>
+        <p:xfrm>
+          <a:off x="548640" y="1783080"/>
+          <a:ext cx="11094415" cy="914400"/>
+        </p:xfrm>
+        <a:graphic>
+          <a:graphicData uri="http://schemas.openxmlformats.org/drawingml/2006/table">
+            <a:tbl>
+              <a:tblPr/>
+              <a:tblGrid>
+                <a:gridCol w="1691640"/>
+                <a:gridCol w="2148840"/>
+                <a:gridCol w="3657600"/>
+                <a:gridCol w="3593592"/>
+              </a:tblGrid>
+              <a:tr h="676656">
+                <a:tc>
+                  <a:txBody>
+                    <a:bodyPr/>
+                    <a:lstStyle/>
+                    <a:p>
+                      <a:pPr algn="l" indent="0" marL="0">
+                        <a:buNone/>
+                      </a:pPr>
+                      <a:r>
+                        <a:rPr lang="en-US" sz="1000" b="1" dirty="0">
+                          <a:solidFill>
+                            <a:srgbClr val="FFFFFF"/>
+                          </a:solidFill>
+                          <a:latin typeface="Calibri" pitchFamily="34" charset="0"/>
+                          <a:ea typeface="Calibri" pitchFamily="34" charset="-122"/>
+                          <a:cs typeface="Calibri" pitchFamily="34" charset="-120"/>
+                        </a:rPr>
+                        <a:t>Partner</a:t>
+                      </a:r>
+                      <a:endParaRPr lang="en-US" sz="1000" dirty="0">
+                        <a:latin typeface="Calibri" charset="0"/>
+                        <a:ea typeface="Calibri" charset="0"/>
+                        <a:cs typeface="Calibri" charset="0"/>
+                      </a:endParaRPr>
+                    </a:p>
+                  </a:txBody>
+                  <a:tcPr marL="114300" marR="114300" marT="63500" marB="63500" anchor="ctr">
+                    <a:lnL w="6350" cap="flat" cmpd="sng" algn="ctr">
+                      <a:solidFill>
+                        <a:srgbClr val="3A4553"/>
+                      </a:solidFill>
+                      <a:prstDash val="solid"/>
+                      <a:round/>
+                      <a:headEnd type="none" w="med" len="med"/>
+                      <a:tailEnd type="none" w="med" len="med"/>
+                    </a:lnL>
+                    <a:lnR w="6350" cap="flat" cmpd="sng" algn="ctr">
+                      <a:solidFill>
+                        <a:srgbClr val="3A4553"/>
+                      </a:solidFill>
+                      <a:prstDash val="solid"/>
+                      <a:round/>
+                      <a:headEnd type="none" w="med" len="med"/>
+                      <a:tailEnd type="none" w="med" len="med"/>
+                    </a:lnR>
+                    <a:lnT w="6350" cap="flat" cmpd="sng" algn="ctr">
+                      <a:solidFill>
+                        <a:srgbClr val="3A4553"/>
+                      </a:solidFill>
+                      <a:prstDash val="solid"/>
+                      <a:round/>
+                      <a:headEnd type="none" w="med" len="med"/>
+                      <a:tailEnd type="none" w="med" len="med"/>
+                    </a:lnT>
+                    <a:lnB w="6350" cap="flat" cmpd="sng" algn="ctr">
+                      <a:solidFill>
+                        <a:srgbClr val="3A4553"/>
+                      </a:solidFill>
+                      <a:prstDash val="solid"/>
+                      <a:round/>
+                      <a:headEnd type="none" w="med" len="med"/>
+                      <a:tailEnd type="none" w="med" len="med"/>
+                    </a:lnB>
+                    <a:solidFill>
+                      <a:srgbClr val="262B34"/>
+                    </a:solidFill>
+                  </a:tcPr>
+                </a:tc>
+                <a:tc>
+                  <a:txBody>
+                    <a:bodyPr/>
+                    <a:lstStyle/>
+                    <a:p>
+                      <a:pPr algn="l" indent="0" marL="0">
+                        <a:buNone/>
+                      </a:pPr>
+                      <a:r>
+                        <a:rPr lang="en-US" sz="1000" b="1" dirty="0">
+                          <a:solidFill>
+                            <a:srgbClr val="FFFFFF"/>
+                          </a:solidFill>
+                          <a:latin typeface="Calibri" pitchFamily="34" charset="0"/>
+                          <a:ea typeface="Calibri" pitchFamily="34" charset="-122"/>
+                          <a:cs typeface="Calibri" pitchFamily="34" charset="-120"/>
+                        </a:rPr>
+                        <a:t>Geography · Sector</a:t>
+                      </a:r>
+                      <a:endParaRPr lang="en-US" sz="1000" dirty="0">
+                        <a:latin typeface="Calibri" charset="0"/>
+                        <a:ea typeface="Calibri" charset="0"/>
+                        <a:cs typeface="Calibri" charset="0"/>
+                      </a:endParaRPr>
+                    </a:p>
+                  </a:txBody>
+                  <a:tcPr marL="114300" marR="114300" marT="63500" marB="63500" anchor="ctr">
+                    <a:lnL w="6350" cap="flat" cmpd="sng" algn="ctr">
+                      <a:solidFill>
+                        <a:srgbClr val="3A4553"/>
+                      </a:solidFill>
+                      <a:prstDash val="solid"/>
+                      <a:round/>
+                      <a:headEnd type="none" w="med" len="med"/>
+                      <a:tailEnd type="none" w="med" len="med"/>
+                    </a:lnL>
+                    <a:lnR w="6350" cap="flat" cmpd="sng" algn="ctr">
+                      <a:solidFill>
+                        <a:srgbClr val="3A4553"/>
+                      </a:solidFill>
+                      <a:prstDash val="solid"/>
+                      <a:round/>
+                      <a:headEnd type="none" w="med" len="med"/>
+                      <a:tailEnd type="none" w="med" len="med"/>
+                    </a:lnR>
+                    <a:lnT w="6350" cap="flat" cmpd="sng" algn="ctr">
+                      <a:solidFill>
+                        <a:srgbClr val="3A4553"/>
+                      </a:solidFill>
+                      <a:prstDash val="solid"/>
+                      <a:round/>
+                      <a:headEnd type="none" w="med" len="med"/>
+                      <a:tailEnd type="none" w="med" len="med"/>
+                    </a:lnT>
+                    <a:lnB w="6350" cap="flat" cmpd="sng" algn="ctr">
+                      <a:solidFill>
+                        <a:srgbClr val="3A4553"/>
+                      </a:solidFill>
+                      <a:prstDash val="solid"/>
+                      <a:round/>
+                      <a:headEnd type="none" w="med" len="med"/>
+                      <a:tailEnd type="none" w="med" len="med"/>
+                    </a:lnB>
+                    <a:solidFill>
+                      <a:srgbClr val="262B34"/>
+                    </a:solidFill>
+                  </a:tcPr>
+                </a:tc>
+                <a:tc>
+                  <a:txBody>
+                    <a:bodyPr/>
+                    <a:lstStyle/>
+                    <a:p>
+                      <a:pPr algn="l" indent="0" marL="0">
+                        <a:buNone/>
+                      </a:pPr>
+                      <a:r>
+                        <a:rPr lang="en-US" sz="1000" b="1" dirty="0">
+                          <a:solidFill>
+                            <a:srgbClr val="FFFFFF"/>
+                          </a:solidFill>
+                          <a:latin typeface="Calibri" pitchFamily="34" charset="0"/>
+                          <a:ea typeface="Calibri" pitchFamily="34" charset="-122"/>
+                          <a:cs typeface="Calibri" pitchFamily="34" charset="-120"/>
+                        </a:rPr>
+                        <a:t>Status</a:t>
+                      </a:r>
+                      <a:endParaRPr lang="en-US" sz="1000" dirty="0">
+                        <a:latin typeface="Calibri" charset="0"/>
+                        <a:ea typeface="Calibri" charset="0"/>
+                        <a:cs typeface="Calibri" charset="0"/>
+                      </a:endParaRPr>
+                    </a:p>
+                  </a:txBody>
+                  <a:tcPr marL="114300" marR="114300" marT="63500" marB="63500" anchor="ctr">
+                    <a:lnL w="6350" cap="flat" cmpd="sng" algn="ctr">
+                      <a:solidFill>
+                        <a:srgbClr val="3A4553"/>
+                      </a:solidFill>
+                      <a:prstDash val="solid"/>
+                      <a:round/>
+                      <a:headEnd type="none" w="med" len="med"/>
+                      <a:tailEnd type="none" w="med" len="med"/>
+                    </a:lnL>
+                    <a:lnR w="6350" cap="flat" cmpd="sng" algn="ctr">
+                      <a:solidFill>
+                        <a:srgbClr val="3A4553"/>
+                      </a:solidFill>
+                      <a:prstDash val="solid"/>
+                      <a:round/>
+                      <a:headEnd type="none" w="med" len="med"/>
+                      <a:tailEnd type="none" w="med" len="med"/>
+                    </a:lnR>
+                    <a:lnT w="6350" cap="flat" cmpd="sng" algn="ctr">
+                      <a:solidFill>
+                        <a:srgbClr val="3A4553"/>
+                      </a:solidFill>
+                      <a:prstDash val="solid"/>
+                      <a:round/>
+                      <a:headEnd type="none" w="med" len="med"/>
+                      <a:tailEnd type="none" w="med" len="med"/>
+                    </a:lnT>
+                    <a:lnB w="6350" cap="flat" cmpd="sng" algn="ctr">
+                      <a:solidFill>
+                        <a:srgbClr val="3A4553"/>
+                      </a:solidFill>
+                      <a:prstDash val="solid"/>
+                      <a:round/>
+                      <a:headEnd type="none" w="med" len="med"/>
+                      <a:tailEnd type="none" w="med" len="med"/>
+                    </a:lnB>
+                    <a:solidFill>
+                      <a:srgbClr val="262B34"/>
+                    </a:solidFill>
+                  </a:tcPr>
+                </a:tc>
+                <a:tc>
+                  <a:txBody>
+                    <a:bodyPr/>
+                    <a:lstStyle/>
+                    <a:p>
+                      <a:pPr algn="l" indent="0" marL="0">
+                        <a:buNone/>
+                      </a:pPr>
+                      <a:r>
+                        <a:rPr lang="en-US" sz="1000" b="1" dirty="0">
+                          <a:solidFill>
+                            <a:srgbClr val="FFFFFF"/>
+                          </a:solidFill>
+                          <a:latin typeface="Calibri" pitchFamily="34" charset="0"/>
+                          <a:ea typeface="Calibri" pitchFamily="34" charset="-122"/>
+                          <a:cs typeface="Calibri" pitchFamily="34" charset="-120"/>
+                        </a:rPr>
+                        <a:t>Diligence note</a:t>
+                      </a:r>
+                      <a:endParaRPr lang="en-US" sz="1000" dirty="0">
+                        <a:latin typeface="Calibri" charset="0"/>
+                        <a:ea typeface="Calibri" charset="0"/>
+                        <a:cs typeface="Calibri" charset="0"/>
+                      </a:endParaRPr>
+                    </a:p>
+                  </a:txBody>
+                  <a:tcPr marL="114300" marR="114300" marT="63500" marB="63500" anchor="ctr">
+                    <a:lnL w="6350" cap="flat" cmpd="sng" algn="ctr">
+                      <a:solidFill>
+                        <a:srgbClr val="3A4553"/>
+                      </a:solidFill>
+                      <a:prstDash val="solid"/>
+                      <a:round/>
+                      <a:headEnd type="none" w="med" len="med"/>
+                      <a:tailEnd type="none" w="med" len="med"/>
+                    </a:lnL>
+                    <a:lnR w="6350" cap="flat" cmpd="sng" algn="ctr">
+                      <a:solidFill>
+                        <a:srgbClr val="3A4553"/>
+                      </a:solidFill>
+                      <a:prstDash val="solid"/>
+                      <a:round/>
+                      <a:headEnd type="none" w="med" len="med"/>
+                      <a:tailEnd type="none" w="med" len="med"/>
+                    </a:lnR>
+                    <a:lnT w="6350" cap="flat" cmpd="sng" algn="ctr">
+                      <a:solidFill>
+                        <a:srgbClr val="3A4553"/>
+                      </a:solidFill>
+                      <a:prstDash val="solid"/>
+                      <a:round/>
+                      <a:headEnd type="none" w="med" len="med"/>
+                      <a:tailEnd type="none" w="med" len="med"/>
+                    </a:lnT>
+                    <a:lnB w="6350" cap="flat" cmpd="sng" algn="ctr">
+                      <a:solidFill>
+                        <a:srgbClr val="3A4553"/>
+                      </a:solidFill>
+                      <a:prstDash val="solid"/>
+                      <a:round/>
+                      <a:headEnd type="none" w="med" len="med"/>
+                      <a:tailEnd type="none" w="med" len="med"/>
+                    </a:lnB>
+                    <a:solidFill>
+                      <a:srgbClr val="262B34"/>
+                    </a:solidFill>
+                  </a:tcPr>
+                </a:tc>
+              </a:tr>
+              <a:tr h="676656">
+                <a:tc>
+                  <a:txBody>
+                    <a:bodyPr/>
+                    <a:lstStyle/>
+                    <a:p>
+                      <a:pPr algn="l" indent="0" marL="0">
+                        <a:buNone/>
+                      </a:pPr>
+                      <a:r>
+                        <a:rPr lang="en-US" sz="1050" b="1" dirty="0">
+                          <a:solidFill>
+                            <a:srgbClr val="FFFFFF"/>
+                          </a:solidFill>
+                          <a:latin typeface="Cambria" pitchFamily="34" charset="0"/>
+                          <a:ea typeface="Cambria" pitchFamily="34" charset="-122"/>
+                          <a:cs typeface="Cambria" pitchFamily="34" charset="-120"/>
+                        </a:rPr>
+                        <a:t>Komatsu</a:t>
+                      </a:r>
+                      <a:endParaRPr lang="en-US" sz="1050" dirty="0">
+                        <a:latin typeface="Cambria" charset="0"/>
+                        <a:ea typeface="Cambria" charset="0"/>
+                        <a:cs typeface="Cambria" charset="0"/>
+                      </a:endParaRPr>
+                    </a:p>
+                  </a:txBody>
+                  <a:tcPr marL="114300" marR="114300" marT="63500" marB="63500" anchor="ctr">
+                    <a:lnL w="6350" cap="flat" cmpd="sng" algn="ctr">
+                      <a:solidFill>
+                        <a:srgbClr val="3A4553"/>
+                      </a:solidFill>
+                      <a:prstDash val="solid"/>
+                      <a:round/>
+                      <a:headEnd type="none" w="med" len="med"/>
+                      <a:tailEnd type="none" w="med" len="med"/>
+                    </a:lnL>
+                    <a:lnR w="6350" cap="flat" cmpd="sng" algn="ctr">
+                      <a:solidFill>
+                        <a:srgbClr val="3A4553"/>
+                      </a:solidFill>
+                      <a:prstDash val="solid"/>
+                      <a:round/>
+                      <a:headEnd type="none" w="med" len="med"/>
+                      <a:tailEnd type="none" w="med" len="med"/>
+                    </a:lnR>
+                    <a:lnT w="6350" cap="flat" cmpd="sng" algn="ctr">
+                      <a:solidFill>
+                        <a:srgbClr val="3A4553"/>
+                      </a:solidFill>
+                      <a:prstDash val="solid"/>
+                      <a:round/>
+                      <a:headEnd type="none" w="med" len="med"/>
+                      <a:tailEnd type="none" w="med" len="med"/>
+                    </a:lnT>
+                    <a:lnB w="6350" cap="flat" cmpd="sng" algn="ctr">
+                      <a:solidFill>
+                        <a:srgbClr val="3A4553"/>
+                      </a:solidFill>
+                      <a:prstDash val="solid"/>
+                      <a:round/>
+                      <a:headEnd type="none" w="med" len="med"/>
+                      <a:tailEnd type="none" w="med" len="med"/>
+                    </a:lnB>
+                    <a:solidFill>
+                      <a:srgbClr val="262B34"/>
+                    </a:solidFill>
+                  </a:tcPr>
+                </a:tc>
+                <a:tc>
+                  <a:txBody>
+                    <a:bodyPr/>
+                    <a:lstStyle/>
+                    <a:p>
+                      <a:pPr algn="l" indent="0" marL="0">
+                        <a:buNone/>
+                      </a:pPr>
+                      <a:r>
+                        <a:rPr lang="en-US" sz="900" i="1" dirty="0">
+                          <a:solidFill>
+                            <a:srgbClr val="9AA2AD"/>
+                          </a:solidFill>
+                          <a:latin typeface="Calibri" pitchFamily="34" charset="0"/>
+                          <a:ea typeface="Calibri" pitchFamily="34" charset="-122"/>
+                          <a:cs typeface="Calibri" pitchFamily="34" charset="-120"/>
+                        </a:rPr>
+                        <a:t>Himi Plant, Japan · via Uchimura</a:t>
+                      </a:r>
+                      <a:endParaRPr lang="en-US" sz="900" dirty="0">
+                        <a:latin typeface="Calibri" charset="0"/>
+                        <a:ea typeface="Calibri" charset="0"/>
+                        <a:cs typeface="Calibri" charset="0"/>
+                      </a:endParaRPr>
+                    </a:p>
+                  </a:txBody>
+                  <a:tcPr marL="114300" marR="114300" marT="63500" marB="63500" anchor="ctr">
+                    <a:lnL w="6350" cap="flat" cmpd="sng" algn="ctr">
+                      <a:solidFill>
+                        <a:srgbClr val="3A4553"/>
+                      </a:solidFill>
+                      <a:prstDash val="solid"/>
+                      <a:round/>
+                      <a:headEnd type="none" w="med" len="med"/>
+                      <a:tailEnd type="none" w="med" len="med"/>
+                    </a:lnL>
+                    <a:lnR w="6350" cap="flat" cmpd="sng" algn="ctr">
+                      <a:solidFill>
+                        <a:srgbClr val="3A4553"/>
+                      </a:solidFill>
+                      <a:prstDash val="solid"/>
+                      <a:round/>
+                      <a:headEnd type="none" w="med" len="med"/>
+                      <a:tailEnd type="none" w="med" len="med"/>
+                    </a:lnR>
+                    <a:lnT w="6350" cap="flat" cmpd="sng" algn="ctr">
+                      <a:solidFill>
+                        <a:srgbClr val="3A4553"/>
+                      </a:solidFill>
+                      <a:prstDash val="solid"/>
+                      <a:round/>
+                      <a:headEnd type="none" w="med" len="med"/>
+                      <a:tailEnd type="none" w="med" len="med"/>
+                    </a:lnT>
+                    <a:lnB w="6350" cap="flat" cmpd="sng" algn="ctr">
+                      <a:solidFill>
+                        <a:srgbClr val="3A4553"/>
+                      </a:solidFill>
+                      <a:prstDash val="solid"/>
+                      <a:round/>
+                      <a:headEnd type="none" w="med" len="med"/>
+                      <a:tailEnd type="none" w="med" len="med"/>
+                    </a:lnB>
+                    <a:solidFill>
+                      <a:srgbClr val="262B34"/>
+                    </a:solidFill>
+                  </a:tcPr>
+                </a:tc>
+                <a:tc>
+                  <a:txBody>
+                    <a:bodyPr/>
+                    <a:lstStyle/>
+                    <a:p>
+                      <a:pPr algn="l" indent="0" marL="0">
+                        <a:buNone/>
+                      </a:pPr>
+                      <a:r>
+                        <a:rPr lang="en-US" sz="930" dirty="0">
+                          <a:solidFill>
+                            <a:srgbClr val="CBD3DC"/>
+                          </a:solidFill>
+                          <a:latin typeface="Calibri" pitchFamily="34" charset="0"/>
+                          <a:ea typeface="Calibri" pitchFamily="34" charset="-122"/>
+                          <a:cs typeface="Calibri" pitchFamily="34" charset="-120"/>
+                        </a:rPr>
+                        <a:t>5 running idler part numbers, 3 under RFQ. Contribution ₹68-114/kg — highest in the portfolio.</a:t>
+                      </a:r>
+                      <a:endParaRPr lang="en-US" sz="930" dirty="0">
+                        <a:latin typeface="Calibri" charset="0"/>
+                        <a:ea typeface="Calibri" charset="0"/>
+                        <a:cs typeface="Calibri" charset="0"/>
+                      </a:endParaRPr>
+                    </a:p>
+                  </a:txBody>
+                  <a:tcPr marL="114300" marR="114300" marT="63500" marB="63500" anchor="ctr">
+                    <a:lnL w="6350" cap="flat" cmpd="sng" algn="ctr">
+                      <a:solidFill>
+                        <a:srgbClr val="3A4553"/>
+                      </a:solidFill>
+                      <a:prstDash val="solid"/>
+                      <a:round/>
+                      <a:headEnd type="none" w="med" len="med"/>
+                      <a:tailEnd type="none" w="med" len="med"/>
+                    </a:lnL>
+                    <a:lnR w="6350" cap="flat" cmpd="sng" algn="ctr">
+                      <a:solidFill>
+                        <a:srgbClr val="3A4553"/>
+                      </a:solidFill>
+                      <a:prstDash val="solid"/>
+                      <a:round/>
+                      <a:headEnd type="none" w="med" len="med"/>
+                      <a:tailEnd type="none" w="med" len="med"/>
+                    </a:lnR>
+                    <a:lnT w="6350" cap="flat" cmpd="sng" algn="ctr">
+                      <a:solidFill>
+                        <a:srgbClr val="3A4553"/>
+                      </a:solidFill>
+                      <a:prstDash val="solid"/>
+                      <a:round/>
+                      <a:headEnd type="none" w="med" len="med"/>
+                      <a:tailEnd type="none" w="med" len="med"/>
+                    </a:lnT>
+                    <a:lnB w="6350" cap="flat" cmpd="sng" algn="ctr">
+                      <a:solidFill>
+                        <a:srgbClr val="3A4553"/>
+                      </a:solidFill>
+                      <a:prstDash val="solid"/>
+                      <a:round/>
+                      <a:headEnd type="none" w="med" len="med"/>
+                      <a:tailEnd type="none" w="med" len="med"/>
+                    </a:lnB>
+                    <a:solidFill>
+                      <a:srgbClr val="262B34"/>
+                    </a:solidFill>
+                  </a:tcPr>
+                </a:tc>
+                <a:tc>
+                  <a:txBody>
+                    <a:bodyPr/>
+                    <a:lstStyle/>
+                    <a:p>
+                      <a:pPr algn="l" indent="0" marL="0">
+                        <a:buNone/>
+                      </a:pPr>
+                      <a:r>
+                        <a:rPr lang="en-US" sz="900" dirty="0">
+                          <a:solidFill>
+                            <a:srgbClr val="B8453F"/>
+                          </a:solidFill>
+                          <a:latin typeface="Calibri" pitchFamily="34" charset="0"/>
+                          <a:ea typeface="Calibri" pitchFamily="34" charset="-122"/>
+                          <a:cs typeface="Calibri" pitchFamily="34" charset="-120"/>
+                        </a:rPr>
+                        <a:t>Open first-article nonconformity (Mar 2026, part 17M3053110). Quality must close before further progress.</a:t>
+                      </a:r>
+                      <a:endParaRPr lang="en-US" sz="900" dirty="0">
+                        <a:latin typeface="Calibri" charset="0"/>
+                        <a:ea typeface="Calibri" charset="0"/>
+                        <a:cs typeface="Calibri" charset="0"/>
+                      </a:endParaRPr>
+                    </a:p>
+                  </a:txBody>
+                  <a:tcPr marL="114300" marR="114300" marT="63500" marB="63500" anchor="ctr">
+                    <a:lnL w="6350" cap="flat" cmpd="sng" algn="ctr">
+                      <a:solidFill>
+                        <a:srgbClr val="3A4553"/>
+                      </a:solidFill>
+                      <a:prstDash val="solid"/>
+                      <a:round/>
+                      <a:headEnd type="none" w="med" len="med"/>
+                      <a:tailEnd type="none" w="med" len="med"/>
+                    </a:lnL>
+                    <a:lnR w="6350" cap="flat" cmpd="sng" algn="ctr">
+                      <a:solidFill>
+                        <a:srgbClr val="3A4553"/>
+                      </a:solidFill>
+                      <a:prstDash val="solid"/>
+                      <a:round/>
+                      <a:headEnd type="none" w="med" len="med"/>
+                      <a:tailEnd type="none" w="med" len="med"/>
+                    </a:lnR>
+                    <a:lnT w="6350" cap="flat" cmpd="sng" algn="ctr">
+                      <a:solidFill>
+                        <a:srgbClr val="3A4553"/>
+                      </a:solidFill>
+                      <a:prstDash val="solid"/>
+                      <a:round/>
+                      <a:headEnd type="none" w="med" len="med"/>
+                      <a:tailEnd type="none" w="med" len="med"/>
+                    </a:lnT>
+                    <a:lnB w="6350" cap="flat" cmpd="sng" algn="ctr">
+                      <a:solidFill>
+                        <a:srgbClr val="3A4553"/>
+                      </a:solidFill>
+                      <a:prstDash val="solid"/>
+                      <a:round/>
+                      <a:headEnd type="none" w="med" len="med"/>
+                      <a:tailEnd type="none" w="med" len="med"/>
+                    </a:lnB>
+                    <a:solidFill>
+                      <a:srgbClr val="262B34"/>
+                    </a:solidFill>
+                  </a:tcPr>
+                </a:tc>
+              </a:tr>
+              <a:tr h="676656">
+                <a:tc>
+                  <a:txBody>
+                    <a:bodyPr/>
+                    <a:lstStyle/>
+                    <a:p>
+                      <a:pPr algn="l" indent="0" marL="0">
+                        <a:buNone/>
+                      </a:pPr>
+                      <a:r>
+                        <a:rPr lang="en-US" sz="1050" b="1" dirty="0">
+                          <a:solidFill>
+                            <a:srgbClr val="FFFFFF"/>
+                          </a:solidFill>
+                          <a:latin typeface="Cambria" pitchFamily="34" charset="0"/>
+                          <a:ea typeface="Cambria" pitchFamily="34" charset="-122"/>
+                          <a:cs typeface="Cambria" pitchFamily="34" charset="-120"/>
+                        </a:rPr>
+                        <a:t>Thejo Engineering</a:t>
+                      </a:r>
+                      <a:endParaRPr lang="en-US" sz="1050" dirty="0">
+                        <a:latin typeface="Cambria" charset="0"/>
+                        <a:ea typeface="Cambria" charset="0"/>
+                        <a:cs typeface="Cambria" charset="0"/>
+                      </a:endParaRPr>
+                    </a:p>
+                  </a:txBody>
+                  <a:tcPr marL="114300" marR="114300" marT="63500" marB="63500" anchor="ctr">
+                    <a:lnL w="6350" cap="flat" cmpd="sng" algn="ctr">
+                      <a:solidFill>
+                        <a:srgbClr val="3A4553"/>
+                      </a:solidFill>
+                      <a:prstDash val="solid"/>
+                      <a:round/>
+                      <a:headEnd type="none" w="med" len="med"/>
+                      <a:tailEnd type="none" w="med" len="med"/>
+                    </a:lnL>
+                    <a:lnR w="6350" cap="flat" cmpd="sng" algn="ctr">
+                      <a:solidFill>
+                        <a:srgbClr val="3A4553"/>
+                      </a:solidFill>
+                      <a:prstDash val="solid"/>
+                      <a:round/>
+                      <a:headEnd type="none" w="med" len="med"/>
+                      <a:tailEnd type="none" w="med" len="med"/>
+                    </a:lnR>
+                    <a:lnT w="6350" cap="flat" cmpd="sng" algn="ctr">
+                      <a:solidFill>
+                        <a:srgbClr val="3A4553"/>
+                      </a:solidFill>
+                      <a:prstDash val="solid"/>
+                      <a:round/>
+                      <a:headEnd type="none" w="med" len="med"/>
+                      <a:tailEnd type="none" w="med" len="med"/>
+                    </a:lnT>
+                    <a:lnB w="6350" cap="flat" cmpd="sng" algn="ctr">
+                      <a:solidFill>
+                        <a:srgbClr val="3A4553"/>
+                      </a:solidFill>
+                      <a:prstDash val="solid"/>
+                      <a:round/>
+                      <a:headEnd type="none" w="med" len="med"/>
+                      <a:tailEnd type="none" w="med" len="med"/>
+                    </a:lnB>
+                    <a:solidFill>
+                      <a:srgbClr val="262B34"/>
+                    </a:solidFill>
+                  </a:tcPr>
+                </a:tc>
+                <a:tc>
+                  <a:txBody>
+                    <a:bodyPr/>
+                    <a:lstStyle/>
+                    <a:p>
+                      <a:pPr algn="l" indent="0" marL="0">
+                        <a:buNone/>
+                      </a:pPr>
+                      <a:r>
+                        <a:rPr lang="en-US" sz="900" i="1" dirty="0">
+                          <a:solidFill>
+                            <a:srgbClr val="9AA2AD"/>
+                          </a:solidFill>
+                          <a:latin typeface="Calibri" pitchFamily="34" charset="0"/>
+                          <a:ea typeface="Calibri" pitchFamily="34" charset="-122"/>
+                          <a:cs typeface="Calibri" pitchFamily="34" charset="-120"/>
+                        </a:rPr>
+                        <a:t>India · mining wear parts</a:t>
+                      </a:r>
+                      <a:endParaRPr lang="en-US" sz="900" dirty="0">
+                        <a:latin typeface="Calibri" charset="0"/>
+                        <a:ea typeface="Calibri" charset="0"/>
+                        <a:cs typeface="Calibri" charset="0"/>
+                      </a:endParaRPr>
+                    </a:p>
+                  </a:txBody>
+                  <a:tcPr marL="114300" marR="114300" marT="63500" marB="63500" anchor="ctr">
+                    <a:lnL w="6350" cap="flat" cmpd="sng" algn="ctr">
+                      <a:solidFill>
+                        <a:srgbClr val="3A4553"/>
+                      </a:solidFill>
+                      <a:prstDash val="solid"/>
+                      <a:round/>
+                      <a:headEnd type="none" w="med" len="med"/>
+                      <a:tailEnd type="none" w="med" len="med"/>
+                    </a:lnL>
+                    <a:lnR w="6350" cap="flat" cmpd="sng" algn="ctr">
+                      <a:solidFill>
+                        <a:srgbClr val="3A4553"/>
+                      </a:solidFill>
+                      <a:prstDash val="solid"/>
+                      <a:round/>
+                      <a:headEnd type="none" w="med" len="med"/>
+                      <a:tailEnd type="none" w="med" len="med"/>
+                    </a:lnR>
+                    <a:lnT w="6350" cap="flat" cmpd="sng" algn="ctr">
+                      <a:solidFill>
+                        <a:srgbClr val="3A4553"/>
+                      </a:solidFill>
+                      <a:prstDash val="solid"/>
+                      <a:round/>
+                      <a:headEnd type="none" w="med" len="med"/>
+                      <a:tailEnd type="none" w="med" len="med"/>
+                    </a:lnT>
+                    <a:lnB w="6350" cap="flat" cmpd="sng" algn="ctr">
+                      <a:solidFill>
+                        <a:srgbClr val="3A4553"/>
+                      </a:solidFill>
+                      <a:prstDash val="solid"/>
+                      <a:round/>
+                      <a:headEnd type="none" w="med" len="med"/>
+                      <a:tailEnd type="none" w="med" len="med"/>
+                    </a:lnB>
+                    <a:solidFill>
+                      <a:srgbClr val="262B34"/>
+                    </a:solidFill>
+                  </a:tcPr>
+                </a:tc>
+                <a:tc>
+                  <a:txBody>
+                    <a:bodyPr/>
+                    <a:lstStyle/>
+                    <a:p>
+                      <a:pPr algn="l" indent="0" marL="0">
+                        <a:buNone/>
+                      </a:pPr>
+                      <a:r>
+                        <a:rPr lang="en-US" sz="930" dirty="0">
+                          <a:solidFill>
+                            <a:srgbClr val="CBD3DC"/>
+                          </a:solidFill>
+                          <a:latin typeface="Calibri" pitchFamily="34" charset="0"/>
+                          <a:ea typeface="Calibri" pitchFamily="34" charset="-122"/>
+                          <a:cs typeface="Calibri" pitchFamily="34" charset="-120"/>
+                        </a:rPr>
+                        <a:t>NDA/exclusive tie-up alongside Tega. Live, growing account since FY22-23; order volumes rising into FY26-27.</a:t>
+                      </a:r>
+                      <a:endParaRPr lang="en-US" sz="930" dirty="0">
+                        <a:latin typeface="Calibri" charset="0"/>
+                        <a:ea typeface="Calibri" charset="0"/>
+                        <a:cs typeface="Calibri" charset="0"/>
+                      </a:endParaRPr>
+                    </a:p>
+                  </a:txBody>
+                  <a:tcPr marL="114300" marR="114300" marT="63500" marB="63500" anchor="ctr">
+                    <a:lnL w="6350" cap="flat" cmpd="sng" algn="ctr">
+                      <a:solidFill>
+                        <a:srgbClr val="3A4553"/>
+                      </a:solidFill>
+                      <a:prstDash val="solid"/>
+                      <a:round/>
+                      <a:headEnd type="none" w="med" len="med"/>
+                      <a:tailEnd type="none" w="med" len="med"/>
+                    </a:lnL>
+                    <a:lnR w="6350" cap="flat" cmpd="sng" algn="ctr">
+                      <a:solidFill>
+                        <a:srgbClr val="3A4553"/>
+                      </a:solidFill>
+                      <a:prstDash val="solid"/>
+                      <a:round/>
+                      <a:headEnd type="none" w="med" len="med"/>
+                      <a:tailEnd type="none" w="med" len="med"/>
+                    </a:lnR>
+                    <a:lnT w="6350" cap="flat" cmpd="sng" algn="ctr">
+                      <a:solidFill>
+                        <a:srgbClr val="3A4553"/>
+                      </a:solidFill>
+                      <a:prstDash val="solid"/>
+                      <a:round/>
+                      <a:headEnd type="none" w="med" len="med"/>
+                      <a:tailEnd type="none" w="med" len="med"/>
+                    </a:lnT>
+                    <a:lnB w="6350" cap="flat" cmpd="sng" algn="ctr">
+                      <a:solidFill>
+                        <a:srgbClr val="3A4553"/>
+                      </a:solidFill>
+                      <a:prstDash val="solid"/>
+                      <a:round/>
+                      <a:headEnd type="none" w="med" len="med"/>
+                      <a:tailEnd type="none" w="med" len="med"/>
+                    </a:lnB>
+                    <a:solidFill>
+                      <a:srgbClr val="262B34"/>
+                    </a:solidFill>
+                  </a:tcPr>
+                </a:tc>
+                <a:tc>
+                  <a:txBody>
+                    <a:bodyPr/>
+                    <a:lstStyle/>
+                    <a:p>
+                      <a:pPr algn="l" indent="0" marL="0">
+                        <a:buNone/>
+                      </a:pPr>
+                      <a:r>
+                        <a:rPr lang="en-US" sz="900" dirty="0">
+                          <a:solidFill>
+                            <a:srgbClr val="3F8F5F"/>
+                          </a:solidFill>
+                          <a:latin typeface="Calibri" pitchFamily="34" charset="0"/>
+                          <a:ea typeface="Calibri" pitchFamily="34" charset="-122"/>
+                          <a:cs typeface="Calibri" pitchFamily="34" charset="-120"/>
+                        </a:rPr>
+                        <a:t>Small next to Tega/Escorts — the clearest active diversification story today.</a:t>
+                      </a:r>
+                      <a:endParaRPr lang="en-US" sz="900" dirty="0">
+                        <a:latin typeface="Calibri" charset="0"/>
+                        <a:ea typeface="Calibri" charset="0"/>
+                        <a:cs typeface="Calibri" charset="0"/>
+                      </a:endParaRPr>
+                    </a:p>
+                  </a:txBody>
+                  <a:tcPr marL="114300" marR="114300" marT="63500" marB="63500" anchor="ctr">
+                    <a:lnL w="6350" cap="flat" cmpd="sng" algn="ctr">
+                      <a:solidFill>
+                        <a:srgbClr val="3A4553"/>
+                      </a:solidFill>
+                      <a:prstDash val="solid"/>
+                      <a:round/>
+                      <a:headEnd type="none" w="med" len="med"/>
+                      <a:tailEnd type="none" w="med" len="med"/>
+                    </a:lnL>
+                    <a:lnR w="6350" cap="flat" cmpd="sng" algn="ctr">
+                      <a:solidFill>
+                        <a:srgbClr val="3A4553"/>
+                      </a:solidFill>
+                      <a:prstDash val="solid"/>
+                      <a:round/>
+                      <a:headEnd type="none" w="med" len="med"/>
+                      <a:tailEnd type="none" w="med" len="med"/>
+                    </a:lnR>
+                    <a:lnT w="6350" cap="flat" cmpd="sng" algn="ctr">
+                      <a:solidFill>
+                        <a:srgbClr val="3A4553"/>
+                      </a:solidFill>
+                      <a:prstDash val="solid"/>
+                      <a:round/>
+                      <a:headEnd type="none" w="med" len="med"/>
+                      <a:tailEnd type="none" w="med" len="med"/>
+                    </a:lnT>
+                    <a:lnB w="6350" cap="flat" cmpd="sng" algn="ctr">
+                      <a:solidFill>
+                        <a:srgbClr val="3A4553"/>
+                      </a:solidFill>
+                      <a:prstDash val="solid"/>
+                      <a:round/>
+                      <a:headEnd type="none" w="med" len="med"/>
+                      <a:tailEnd type="none" w="med" len="med"/>
+                    </a:lnB>
+                    <a:solidFill>
+                      <a:srgbClr val="262B34"/>
+                    </a:solidFill>
+                  </a:tcPr>
+                </a:tc>
+              </a:tr>
+              <a:tr h="676656">
+                <a:tc>
+                  <a:txBody>
+                    <a:bodyPr/>
+                    <a:lstStyle/>
+                    <a:p>
+                      <a:pPr algn="l" indent="0" marL="0">
+                        <a:buNone/>
+                      </a:pPr>
+                      <a:r>
+                        <a:rPr lang="en-US" sz="1050" b="1" dirty="0">
+                          <a:solidFill>
+                            <a:srgbClr val="FFFFFF"/>
+                          </a:solidFill>
+                          <a:latin typeface="Cambria" pitchFamily="34" charset="0"/>
+                          <a:ea typeface="Cambria" pitchFamily="34" charset="-122"/>
+                          <a:cs typeface="Cambria" pitchFamily="34" charset="-120"/>
+                        </a:rPr>
+                        <a:t>Henseley Industries</a:t>
+                      </a:r>
+                      <a:endParaRPr lang="en-US" sz="1050" dirty="0">
+                        <a:latin typeface="Cambria" charset="0"/>
+                        <a:ea typeface="Cambria" charset="0"/>
+                        <a:cs typeface="Cambria" charset="0"/>
+                      </a:endParaRPr>
+                    </a:p>
+                  </a:txBody>
+                  <a:tcPr marL="114300" marR="114300" marT="63500" marB="63500" anchor="ctr">
+                    <a:lnL w="6350" cap="flat" cmpd="sng" algn="ctr">
+                      <a:solidFill>
+                        <a:srgbClr val="3A4553"/>
+                      </a:solidFill>
+                      <a:prstDash val="solid"/>
+                      <a:round/>
+                      <a:headEnd type="none" w="med" len="med"/>
+                      <a:tailEnd type="none" w="med" len="med"/>
+                    </a:lnL>
+                    <a:lnR w="6350" cap="flat" cmpd="sng" algn="ctr">
+                      <a:solidFill>
+                        <a:srgbClr val="3A4553"/>
+                      </a:solidFill>
+                      <a:prstDash val="solid"/>
+                      <a:round/>
+                      <a:headEnd type="none" w="med" len="med"/>
+                      <a:tailEnd type="none" w="med" len="med"/>
+                    </a:lnR>
+                    <a:lnT w="6350" cap="flat" cmpd="sng" algn="ctr">
+                      <a:solidFill>
+                        <a:srgbClr val="3A4553"/>
+                      </a:solidFill>
+                      <a:prstDash val="solid"/>
+                      <a:round/>
+                      <a:headEnd type="none" w="med" len="med"/>
+                      <a:tailEnd type="none" w="med" len="med"/>
+                    </a:lnT>
+                    <a:lnB w="6350" cap="flat" cmpd="sng" algn="ctr">
+                      <a:solidFill>
+                        <a:srgbClr val="3A4553"/>
+                      </a:solidFill>
+                      <a:prstDash val="solid"/>
+                      <a:round/>
+                      <a:headEnd type="none" w="med" len="med"/>
+                      <a:tailEnd type="none" w="med" len="med"/>
+                    </a:lnB>
+                    <a:solidFill>
+                      <a:srgbClr val="262B34"/>
+                    </a:solidFill>
+                  </a:tcPr>
+                </a:tc>
+                <a:tc>
+                  <a:txBody>
+                    <a:bodyPr/>
+                    <a:lstStyle/>
+                    <a:p>
+                      <a:pPr algn="l" indent="0" marL="0">
+                        <a:buNone/>
+                      </a:pPr>
+                      <a:r>
+                        <a:rPr lang="en-US" sz="900" i="1" dirty="0">
+                          <a:solidFill>
+                            <a:srgbClr val="9AA2AD"/>
+                          </a:solidFill>
+                          <a:latin typeface="Calibri" pitchFamily="34" charset="0"/>
+                          <a:ea typeface="Calibri" pitchFamily="34" charset="-122"/>
+                          <a:cs typeface="Calibri" pitchFamily="34" charset="-120"/>
+                        </a:rPr>
+                        <a:t>USA · construction, HEMM</a:t>
+                      </a:r>
+                      <a:endParaRPr lang="en-US" sz="900" dirty="0">
+                        <a:latin typeface="Calibri" charset="0"/>
+                        <a:ea typeface="Calibri" charset="0"/>
+                        <a:cs typeface="Calibri" charset="0"/>
+                      </a:endParaRPr>
+                    </a:p>
+                  </a:txBody>
+                  <a:tcPr marL="114300" marR="114300" marT="63500" marB="63500" anchor="ctr">
+                    <a:lnL w="6350" cap="flat" cmpd="sng" algn="ctr">
+                      <a:solidFill>
+                        <a:srgbClr val="3A4553"/>
+                      </a:solidFill>
+                      <a:prstDash val="solid"/>
+                      <a:round/>
+                      <a:headEnd type="none" w="med" len="med"/>
+                      <a:tailEnd type="none" w="med" len="med"/>
+                    </a:lnL>
+                    <a:lnR w="6350" cap="flat" cmpd="sng" algn="ctr">
+                      <a:solidFill>
+                        <a:srgbClr val="3A4553"/>
+                      </a:solidFill>
+                      <a:prstDash val="solid"/>
+                      <a:round/>
+                      <a:headEnd type="none" w="med" len="med"/>
+                      <a:tailEnd type="none" w="med" len="med"/>
+                    </a:lnR>
+                    <a:lnT w="6350" cap="flat" cmpd="sng" algn="ctr">
+                      <a:solidFill>
+                        <a:srgbClr val="3A4553"/>
+                      </a:solidFill>
+                      <a:prstDash val="solid"/>
+                      <a:round/>
+                      <a:headEnd type="none" w="med" len="med"/>
+                      <a:tailEnd type="none" w="med" len="med"/>
+                    </a:lnT>
+                    <a:lnB w="6350" cap="flat" cmpd="sng" algn="ctr">
+                      <a:solidFill>
+                        <a:srgbClr val="3A4553"/>
+                      </a:solidFill>
+                      <a:prstDash val="solid"/>
+                      <a:round/>
+                      <a:headEnd type="none" w="med" len="med"/>
+                      <a:tailEnd type="none" w="med" len="med"/>
+                    </a:lnB>
+                    <a:solidFill>
+                      <a:srgbClr val="262B34"/>
+                    </a:solidFill>
+                  </a:tcPr>
+                </a:tc>
+                <a:tc>
+                  <a:txBody>
+                    <a:bodyPr/>
+                    <a:lstStyle/>
+                    <a:p>
+                      <a:pPr algn="l" indent="0" marL="0">
+                        <a:buNone/>
+                      </a:pPr>
+                      <a:r>
+                        <a:rPr lang="en-US" sz="930" dirty="0">
+                          <a:solidFill>
+                            <a:srgbClr val="CBD3DC"/>
+                          </a:solidFill>
+                          <a:latin typeface="Calibri" pitchFamily="34" charset="0"/>
+                          <a:ea typeface="Calibri" pitchFamily="34" charset="-122"/>
+                          <a:cs typeface="Calibri" pitchFamily="34" charset="-120"/>
+                        </a:rPr>
+                        <a:t>Export tie-up under NDA; initial trial in progress.</a:t>
+                      </a:r>
+                      <a:endParaRPr lang="en-US" sz="930" dirty="0">
+                        <a:latin typeface="Calibri" charset="0"/>
+                        <a:ea typeface="Calibri" charset="0"/>
+                        <a:cs typeface="Calibri" charset="0"/>
+                      </a:endParaRPr>
+                    </a:p>
+                  </a:txBody>
+                  <a:tcPr marL="114300" marR="114300" marT="63500" marB="63500" anchor="ctr">
+                    <a:lnL w="6350" cap="flat" cmpd="sng" algn="ctr">
+                      <a:solidFill>
+                        <a:srgbClr val="3A4553"/>
+                      </a:solidFill>
+                      <a:prstDash val="solid"/>
+                      <a:round/>
+                      <a:headEnd type="none" w="med" len="med"/>
+                      <a:tailEnd type="none" w="med" len="med"/>
+                    </a:lnL>
+                    <a:lnR w="6350" cap="flat" cmpd="sng" algn="ctr">
+                      <a:solidFill>
+                        <a:srgbClr val="3A4553"/>
+                      </a:solidFill>
+                      <a:prstDash val="solid"/>
+                      <a:round/>
+                      <a:headEnd type="none" w="med" len="med"/>
+                      <a:tailEnd type="none" w="med" len="med"/>
+                    </a:lnR>
+                    <a:lnT w="6350" cap="flat" cmpd="sng" algn="ctr">
+                      <a:solidFill>
+                        <a:srgbClr val="3A4553"/>
+                      </a:solidFill>
+                      <a:prstDash val="solid"/>
+                      <a:round/>
+                      <a:headEnd type="none" w="med" len="med"/>
+                      <a:tailEnd type="none" w="med" len="med"/>
+                    </a:lnT>
+                    <a:lnB w="6350" cap="flat" cmpd="sng" algn="ctr">
+                      <a:solidFill>
+                        <a:srgbClr val="3A4553"/>
+                      </a:solidFill>
+                      <a:prstDash val="solid"/>
+                      <a:round/>
+                      <a:headEnd type="none" w="med" len="med"/>
+                      <a:tailEnd type="none" w="med" len="med"/>
+                    </a:lnB>
+                    <a:solidFill>
+                      <a:srgbClr val="262B34"/>
+                    </a:solidFill>
+                  </a:tcPr>
+                </a:tc>
+                <a:tc>
+                  <a:txBody>
+                    <a:bodyPr/>
+                    <a:lstStyle/>
+                    <a:p>
+                      <a:pPr algn="l" indent="0" marL="0">
+                        <a:buNone/>
+                      </a:pPr>
+                      <a:r>
+                        <a:rPr lang="en-US" sz="900" dirty="0">
+                          <a:solidFill>
+                            <a:srgbClr val="B8453F"/>
+                          </a:solidFill>
+                          <a:latin typeface="Calibri" pitchFamily="34" charset="0"/>
+                          <a:ea typeface="Calibri" pitchFamily="34" charset="-122"/>
+                          <a:cs typeface="Calibri" pitchFamily="34" charset="-120"/>
+                        </a:rPr>
+                        <a:t>Earlier sample batches failed on impact properties; corrective re-heat-treatment applied. Not yet a qualified supply line.</a:t>
+                      </a:r>
+                      <a:endParaRPr lang="en-US" sz="900" dirty="0">
+                        <a:latin typeface="Calibri" charset="0"/>
+                        <a:ea typeface="Calibri" charset="0"/>
+                        <a:cs typeface="Calibri" charset="0"/>
+                      </a:endParaRPr>
+                    </a:p>
+                  </a:txBody>
+                  <a:tcPr marL="114300" marR="114300" marT="63500" marB="63500" anchor="ctr">
+                    <a:lnL w="6350" cap="flat" cmpd="sng" algn="ctr">
+                      <a:solidFill>
+                        <a:srgbClr val="3A4553"/>
+                      </a:solidFill>
+                      <a:prstDash val="solid"/>
+                      <a:round/>
+                      <a:headEnd type="none" w="med" len="med"/>
+                      <a:tailEnd type="none" w="med" len="med"/>
+                    </a:lnL>
+                    <a:lnR w="6350" cap="flat" cmpd="sng" algn="ctr">
+                      <a:solidFill>
+                        <a:srgbClr val="3A4553"/>
+                      </a:solidFill>
+                      <a:prstDash val="solid"/>
+                      <a:round/>
+                      <a:headEnd type="none" w="med" len="med"/>
+                      <a:tailEnd type="none" w="med" len="med"/>
+                    </a:lnR>
+                    <a:lnT w="6350" cap="flat" cmpd="sng" algn="ctr">
+                      <a:solidFill>
+                        <a:srgbClr val="3A4553"/>
+                      </a:solidFill>
+                      <a:prstDash val="solid"/>
+                      <a:round/>
+                      <a:headEnd type="none" w="med" len="med"/>
+                      <a:tailEnd type="none" w="med" len="med"/>
+                    </a:lnT>
+                    <a:lnB w="6350" cap="flat" cmpd="sng" algn="ctr">
+                      <a:solidFill>
+                        <a:srgbClr val="3A4553"/>
+                      </a:solidFill>
+                      <a:prstDash val="solid"/>
+                      <a:round/>
+                      <a:headEnd type="none" w="med" len="med"/>
+                      <a:tailEnd type="none" w="med" len="med"/>
+                    </a:lnB>
+                    <a:solidFill>
+                      <a:srgbClr val="262B34"/>
+                    </a:solidFill>
+                  </a:tcPr>
+                </a:tc>
+              </a:tr>
+              <a:tr h="676656">
+                <a:tc>
+                  <a:txBody>
+                    <a:bodyPr/>
+                    <a:lstStyle/>
+                    <a:p>
+                      <a:pPr algn="l" indent="0" marL="0">
+                        <a:buNone/>
+                      </a:pPr>
+                      <a:r>
+                        <a:rPr lang="en-US" sz="1050" b="1" dirty="0">
+                          <a:solidFill>
+                            <a:srgbClr val="FFFFFF"/>
+                          </a:solidFill>
+                          <a:latin typeface="Cambria" pitchFamily="34" charset="0"/>
+                          <a:ea typeface="Cambria" pitchFamily="34" charset="-122"/>
+                          <a:cs typeface="Cambria" pitchFamily="34" charset="-120"/>
+                        </a:rPr>
+                        <a:t>Knorr-Bremse</a:t>
+                      </a:r>
+                      <a:endParaRPr lang="en-US" sz="1050" dirty="0">
+                        <a:latin typeface="Cambria" charset="0"/>
+                        <a:ea typeface="Cambria" charset="0"/>
+                        <a:cs typeface="Cambria" charset="0"/>
+                      </a:endParaRPr>
+                    </a:p>
+                  </a:txBody>
+                  <a:tcPr marL="114300" marR="114300" marT="63500" marB="63500" anchor="ctr">
+                    <a:lnL w="6350" cap="flat" cmpd="sng" algn="ctr">
+                      <a:solidFill>
+                        <a:srgbClr val="3A4553"/>
+                      </a:solidFill>
+                      <a:prstDash val="solid"/>
+                      <a:round/>
+                      <a:headEnd type="none" w="med" len="med"/>
+                      <a:tailEnd type="none" w="med" len="med"/>
+                    </a:lnL>
+                    <a:lnR w="6350" cap="flat" cmpd="sng" algn="ctr">
+                      <a:solidFill>
+                        <a:srgbClr val="3A4553"/>
+                      </a:solidFill>
+                      <a:prstDash val="solid"/>
+                      <a:round/>
+                      <a:headEnd type="none" w="med" len="med"/>
+                      <a:tailEnd type="none" w="med" len="med"/>
+                    </a:lnR>
+                    <a:lnT w="6350" cap="flat" cmpd="sng" algn="ctr">
+                      <a:solidFill>
+                        <a:srgbClr val="3A4553"/>
+                      </a:solidFill>
+                      <a:prstDash val="solid"/>
+                      <a:round/>
+                      <a:headEnd type="none" w="med" len="med"/>
+                      <a:tailEnd type="none" w="med" len="med"/>
+                    </a:lnT>
+                    <a:lnB w="6350" cap="flat" cmpd="sng" algn="ctr">
+                      <a:solidFill>
+                        <a:srgbClr val="3A4553"/>
+                      </a:solidFill>
+                      <a:prstDash val="solid"/>
+                      <a:round/>
+                      <a:headEnd type="none" w="med" len="med"/>
+                      <a:tailEnd type="none" w="med" len="med"/>
+                    </a:lnB>
+                    <a:solidFill>
+                      <a:srgbClr val="262B34"/>
+                    </a:solidFill>
+                  </a:tcPr>
+                </a:tc>
+                <a:tc>
+                  <a:txBody>
+                    <a:bodyPr/>
+                    <a:lstStyle/>
+                    <a:p>
+                      <a:pPr algn="l" indent="0" marL="0">
+                        <a:buNone/>
+                      </a:pPr>
+                      <a:r>
+                        <a:rPr lang="en-US" sz="900" i="1" dirty="0">
+                          <a:solidFill>
+                            <a:srgbClr val="9AA2AD"/>
+                          </a:solidFill>
+                          <a:latin typeface="Calibri" pitchFamily="34" charset="0"/>
+                          <a:ea typeface="Calibri" pitchFamily="34" charset="-122"/>
+                          <a:cs typeface="Calibri" pitchFamily="34" charset="-120"/>
+                        </a:rPr>
+                        <a:t>Germany · railway components</a:t>
+                      </a:r>
+                      <a:endParaRPr lang="en-US" sz="900" dirty="0">
+                        <a:latin typeface="Calibri" charset="0"/>
+                        <a:ea typeface="Calibri" charset="0"/>
+                        <a:cs typeface="Calibri" charset="0"/>
+                      </a:endParaRPr>
+                    </a:p>
+                  </a:txBody>
+                  <a:tcPr marL="114300" marR="114300" marT="63500" marB="63500" anchor="ctr">
+                    <a:lnL w="6350" cap="flat" cmpd="sng" algn="ctr">
+                      <a:solidFill>
+                        <a:srgbClr val="3A4553"/>
+                      </a:solidFill>
+                      <a:prstDash val="solid"/>
+                      <a:round/>
+                      <a:headEnd type="none" w="med" len="med"/>
+                      <a:tailEnd type="none" w="med" len="med"/>
+                    </a:lnL>
+                    <a:lnR w="6350" cap="flat" cmpd="sng" algn="ctr">
+                      <a:solidFill>
+                        <a:srgbClr val="3A4553"/>
+                      </a:solidFill>
+                      <a:prstDash val="solid"/>
+                      <a:round/>
+                      <a:headEnd type="none" w="med" len="med"/>
+                      <a:tailEnd type="none" w="med" len="med"/>
+                    </a:lnR>
+                    <a:lnT w="6350" cap="flat" cmpd="sng" algn="ctr">
+                      <a:solidFill>
+                        <a:srgbClr val="3A4553"/>
+                      </a:solidFill>
+                      <a:prstDash val="solid"/>
+                      <a:round/>
+                      <a:headEnd type="none" w="med" len="med"/>
+                      <a:tailEnd type="none" w="med" len="med"/>
+                    </a:lnT>
+                    <a:lnB w="6350" cap="flat" cmpd="sng" algn="ctr">
+                      <a:solidFill>
+                        <a:srgbClr val="3A4553"/>
+                      </a:solidFill>
+                      <a:prstDash val="solid"/>
+                      <a:round/>
+                      <a:headEnd type="none" w="med" len="med"/>
+                      <a:tailEnd type="none" w="med" len="med"/>
+                    </a:lnB>
+                    <a:solidFill>
+                      <a:srgbClr val="262B34"/>
+                    </a:solidFill>
+                  </a:tcPr>
+                </a:tc>
+                <a:tc>
+                  <a:txBody>
+                    <a:bodyPr/>
+                    <a:lstStyle/>
+                    <a:p>
+                      <a:pPr algn="l" indent="0" marL="0">
+                        <a:buNone/>
+                      </a:pPr>
+                      <a:r>
+                        <a:rPr lang="en-US" sz="930" dirty="0">
+                          <a:solidFill>
+                            <a:srgbClr val="CBD3DC"/>
+                          </a:solidFill>
+                          <a:latin typeface="Calibri" pitchFamily="34" charset="0"/>
+                          <a:ea typeface="Calibri" pitchFamily="34" charset="-122"/>
+                          <a:cs typeface="Calibri" pitchFamily="34" charset="-120"/>
+                        </a:rPr>
+                        <a:t>Agreement in progress, per company materials.</a:t>
+                      </a:r>
+                      <a:endParaRPr lang="en-US" sz="930" dirty="0">
+                        <a:latin typeface="Calibri" charset="0"/>
+                        <a:ea typeface="Calibri" charset="0"/>
+                        <a:cs typeface="Calibri" charset="0"/>
+                      </a:endParaRPr>
+                    </a:p>
+                  </a:txBody>
+                  <a:tcPr marL="114300" marR="114300" marT="63500" marB="63500" anchor="ctr">
+                    <a:lnL w="6350" cap="flat" cmpd="sng" algn="ctr">
+                      <a:solidFill>
+                        <a:srgbClr val="3A4553"/>
+                      </a:solidFill>
+                      <a:prstDash val="solid"/>
+                      <a:round/>
+                      <a:headEnd type="none" w="med" len="med"/>
+                      <a:tailEnd type="none" w="med" len="med"/>
+                    </a:lnL>
+                    <a:lnR w="6350" cap="flat" cmpd="sng" algn="ctr">
+                      <a:solidFill>
+                        <a:srgbClr val="3A4553"/>
+                      </a:solidFill>
+                      <a:prstDash val="solid"/>
+                      <a:round/>
+                      <a:headEnd type="none" w="med" len="med"/>
+                      <a:tailEnd type="none" w="med" len="med"/>
+                    </a:lnR>
+                    <a:lnT w="6350" cap="flat" cmpd="sng" algn="ctr">
+                      <a:solidFill>
+                        <a:srgbClr val="3A4553"/>
+                      </a:solidFill>
+                      <a:prstDash val="solid"/>
+                      <a:round/>
+                      <a:headEnd type="none" w="med" len="med"/>
+                      <a:tailEnd type="none" w="med" len="med"/>
+                    </a:lnT>
+                    <a:lnB w="6350" cap="flat" cmpd="sng" algn="ctr">
+                      <a:solidFill>
+                        <a:srgbClr val="3A4553"/>
+                      </a:solidFill>
+                      <a:prstDash val="solid"/>
+                      <a:round/>
+                      <a:headEnd type="none" w="med" len="med"/>
+                      <a:tailEnd type="none" w="med" len="med"/>
+                    </a:lnB>
+                    <a:solidFill>
+                      <a:srgbClr val="262B34"/>
+                    </a:solidFill>
+                  </a:tcPr>
+                </a:tc>
+                <a:tc>
+                  <a:txBody>
+                    <a:bodyPr/>
+                    <a:lstStyle/>
+                    <a:p>
+                      <a:pPr algn="l" indent="0" marL="0">
+                        <a:buNone/>
+                      </a:pPr>
+                      <a:r>
+                        <a:rPr lang="en-US" sz="900" dirty="0">
+                          <a:solidFill>
+                            <a:srgbClr val="E8B84B"/>
+                          </a:solidFill>
+                          <a:latin typeface="Calibri" pitchFamily="34" charset="0"/>
+                          <a:ea typeface="Calibri" pitchFamily="34" charset="-122"/>
+                          <a:cs typeface="Calibri" pitchFamily="34" charset="-120"/>
+                        </a:rPr>
+                        <a:t>Early-stage; no order or trial data available to independently size this.</a:t>
+                      </a:r>
+                      <a:endParaRPr lang="en-US" sz="900" dirty="0">
+                        <a:latin typeface="Calibri" charset="0"/>
+                        <a:ea typeface="Calibri" charset="0"/>
+                        <a:cs typeface="Calibri" charset="0"/>
+                      </a:endParaRPr>
+                    </a:p>
+                  </a:txBody>
+                  <a:tcPr marL="114300" marR="114300" marT="63500" marB="63500" anchor="ctr">
+                    <a:lnL w="6350" cap="flat" cmpd="sng" algn="ctr">
+                      <a:solidFill>
+                        <a:srgbClr val="3A4553"/>
+                      </a:solidFill>
+                      <a:prstDash val="solid"/>
+                      <a:round/>
+                      <a:headEnd type="none" w="med" len="med"/>
+                      <a:tailEnd type="none" w="med" len="med"/>
+                    </a:lnL>
+                    <a:lnR w="6350" cap="flat" cmpd="sng" algn="ctr">
+                      <a:solidFill>
+                        <a:srgbClr val="3A4553"/>
+                      </a:solidFill>
+                      <a:prstDash val="solid"/>
+                      <a:round/>
+                      <a:headEnd type="none" w="med" len="med"/>
+                      <a:tailEnd type="none" w="med" len="med"/>
+                    </a:lnR>
+                    <a:lnT w="6350" cap="flat" cmpd="sng" algn="ctr">
+                      <a:solidFill>
+                        <a:srgbClr val="3A4553"/>
+                      </a:solidFill>
+                      <a:prstDash val="solid"/>
+                      <a:round/>
+                      <a:headEnd type="none" w="med" len="med"/>
+                      <a:tailEnd type="none" w="med" len="med"/>
+                    </a:lnT>
+                    <a:lnB w="6350" cap="flat" cmpd="sng" algn="ctr">
+                      <a:solidFill>
+                        <a:srgbClr val="3A4553"/>
+                      </a:solidFill>
+                      <a:prstDash val="solid"/>
+                      <a:round/>
+                      <a:headEnd type="none" w="med" len="med"/>
+                      <a:tailEnd type="none" w="med" len="med"/>
+                    </a:lnB>
+                    <a:solidFill>
+                      <a:srgbClr val="262B34"/>
+                    </a:solidFill>
+                  </a:tcPr>
+                </a:tc>
+              </a:tr>
+              <a:tr h="676656">
+                <a:tc>
+                  <a:txBody>
+                    <a:bodyPr/>
+                    <a:lstStyle/>
+                    <a:p>
+                      <a:pPr algn="l" indent="0" marL="0">
+                        <a:buNone/>
+                      </a:pPr>
+                      <a:r>
+                        <a:rPr lang="en-US" sz="1050" b="1" dirty="0">
+                          <a:solidFill>
+                            <a:srgbClr val="FFFFFF"/>
+                          </a:solidFill>
+                          <a:latin typeface="Cambria" pitchFamily="34" charset="0"/>
+                          <a:ea typeface="Cambria" pitchFamily="34" charset="-122"/>
+                          <a:cs typeface="Cambria" pitchFamily="34" charset="-120"/>
+                        </a:rPr>
+                        <a:t>Strato</a:t>
+                      </a:r>
+                      <a:endParaRPr lang="en-US" sz="1050" dirty="0">
+                        <a:latin typeface="Cambria" charset="0"/>
+                        <a:ea typeface="Cambria" charset="0"/>
+                        <a:cs typeface="Cambria" charset="0"/>
+                      </a:endParaRPr>
+                    </a:p>
+                  </a:txBody>
+                  <a:tcPr marL="114300" marR="114300" marT="63500" marB="63500" anchor="ctr">
+                    <a:lnL w="6350" cap="flat" cmpd="sng" algn="ctr">
+                      <a:solidFill>
+                        <a:srgbClr val="3A4553"/>
+                      </a:solidFill>
+                      <a:prstDash val="solid"/>
+                      <a:round/>
+                      <a:headEnd type="none" w="med" len="med"/>
+                      <a:tailEnd type="none" w="med" len="med"/>
+                    </a:lnL>
+                    <a:lnR w="6350" cap="flat" cmpd="sng" algn="ctr">
+                      <a:solidFill>
+                        <a:srgbClr val="3A4553"/>
+                      </a:solidFill>
+                      <a:prstDash val="solid"/>
+                      <a:round/>
+                      <a:headEnd type="none" w="med" len="med"/>
+                      <a:tailEnd type="none" w="med" len="med"/>
+                    </a:lnR>
+                    <a:lnT w="6350" cap="flat" cmpd="sng" algn="ctr">
+                      <a:solidFill>
+                        <a:srgbClr val="3A4553"/>
+                      </a:solidFill>
+                      <a:prstDash val="solid"/>
+                      <a:round/>
+                      <a:headEnd type="none" w="med" len="med"/>
+                      <a:tailEnd type="none" w="med" len="med"/>
+                    </a:lnT>
+                    <a:lnB w="6350" cap="flat" cmpd="sng" algn="ctr">
+                      <a:solidFill>
+                        <a:srgbClr val="3A4553"/>
+                      </a:solidFill>
+                      <a:prstDash val="solid"/>
+                      <a:round/>
+                      <a:headEnd type="none" w="med" len="med"/>
+                      <a:tailEnd type="none" w="med" len="med"/>
+                    </a:lnB>
+                    <a:solidFill>
+                      <a:srgbClr val="262B34"/>
+                    </a:solidFill>
+                  </a:tcPr>
+                </a:tc>
+                <a:tc>
+                  <a:txBody>
+                    <a:bodyPr/>
+                    <a:lstStyle/>
+                    <a:p>
+                      <a:pPr algn="l" indent="0" marL="0">
+                        <a:buNone/>
+                      </a:pPr>
+                      <a:r>
+                        <a:rPr lang="en-US" sz="900" i="1" dirty="0">
+                          <a:solidFill>
+                            <a:srgbClr val="9AA2AD"/>
+                          </a:solidFill>
+                          <a:latin typeface="Calibri" pitchFamily="34" charset="0"/>
+                          <a:ea typeface="Calibri" pitchFamily="34" charset="-122"/>
+                          <a:cs typeface="Calibri" pitchFamily="34" charset="-120"/>
+                        </a:rPr>
+                        <a:t>USA · railway components</a:t>
+                      </a:r>
+                      <a:endParaRPr lang="en-US" sz="900" dirty="0">
+                        <a:latin typeface="Calibri" charset="0"/>
+                        <a:ea typeface="Calibri" charset="0"/>
+                        <a:cs typeface="Calibri" charset="0"/>
+                      </a:endParaRPr>
+                    </a:p>
+                  </a:txBody>
+                  <a:tcPr marL="114300" marR="114300" marT="63500" marB="63500" anchor="ctr">
+                    <a:lnL w="6350" cap="flat" cmpd="sng" algn="ctr">
+                      <a:solidFill>
+                        <a:srgbClr val="3A4553"/>
+                      </a:solidFill>
+                      <a:prstDash val="solid"/>
+                      <a:round/>
+                      <a:headEnd type="none" w="med" len="med"/>
+                      <a:tailEnd type="none" w="med" len="med"/>
+                    </a:lnL>
+                    <a:lnR w="6350" cap="flat" cmpd="sng" algn="ctr">
+                      <a:solidFill>
+                        <a:srgbClr val="3A4553"/>
+                      </a:solidFill>
+                      <a:prstDash val="solid"/>
+                      <a:round/>
+                      <a:headEnd type="none" w="med" len="med"/>
+                      <a:tailEnd type="none" w="med" len="med"/>
+                    </a:lnR>
+                    <a:lnT w="6350" cap="flat" cmpd="sng" algn="ctr">
+                      <a:solidFill>
+                        <a:srgbClr val="3A4553"/>
+                      </a:solidFill>
+                      <a:prstDash val="solid"/>
+                      <a:round/>
+                      <a:headEnd type="none" w="med" len="med"/>
+                      <a:tailEnd type="none" w="med" len="med"/>
+                    </a:lnT>
+                    <a:lnB w="6350" cap="flat" cmpd="sng" algn="ctr">
+                      <a:solidFill>
+                        <a:srgbClr val="3A4553"/>
+                      </a:solidFill>
+                      <a:prstDash val="solid"/>
+                      <a:round/>
+                      <a:headEnd type="none" w="med" len="med"/>
+                      <a:tailEnd type="none" w="med" len="med"/>
+                    </a:lnB>
+                    <a:solidFill>
+                      <a:srgbClr val="262B34"/>
+                    </a:solidFill>
+                  </a:tcPr>
+                </a:tc>
+                <a:tc>
+                  <a:txBody>
+                    <a:bodyPr/>
+                    <a:lstStyle/>
+                    <a:p>
+                      <a:pPr algn="l" indent="0" marL="0">
+                        <a:buNone/>
+                      </a:pPr>
+                      <a:r>
+                        <a:rPr lang="en-US" sz="930" dirty="0">
+                          <a:solidFill>
+                            <a:srgbClr val="CBD3DC"/>
+                          </a:solidFill>
+                          <a:latin typeface="Calibri" pitchFamily="34" charset="0"/>
+                          <a:ea typeface="Calibri" pitchFamily="34" charset="-122"/>
+                          <a:cs typeface="Calibri" pitchFamily="34" charset="-120"/>
+                        </a:rPr>
+                        <a:t>Agreement in progress, per company materials.</a:t>
+                      </a:r>
+                      <a:endParaRPr lang="en-US" sz="930" dirty="0">
+                        <a:latin typeface="Calibri" charset="0"/>
+                        <a:ea typeface="Calibri" charset="0"/>
+                        <a:cs typeface="Calibri" charset="0"/>
+                      </a:endParaRPr>
+                    </a:p>
+                  </a:txBody>
+                  <a:tcPr marL="114300" marR="114300" marT="63500" marB="63500" anchor="ctr">
+                    <a:lnL w="6350" cap="flat" cmpd="sng" algn="ctr">
+                      <a:solidFill>
+                        <a:srgbClr val="3A4553"/>
+                      </a:solidFill>
+                      <a:prstDash val="solid"/>
+                      <a:round/>
+                      <a:headEnd type="none" w="med" len="med"/>
+                      <a:tailEnd type="none" w="med" len="med"/>
+                    </a:lnL>
+                    <a:lnR w="6350" cap="flat" cmpd="sng" algn="ctr">
+                      <a:solidFill>
+                        <a:srgbClr val="3A4553"/>
+                      </a:solidFill>
+                      <a:prstDash val="solid"/>
+                      <a:round/>
+                      <a:headEnd type="none" w="med" len="med"/>
+                      <a:tailEnd type="none" w="med" len="med"/>
+                    </a:lnR>
+                    <a:lnT w="6350" cap="flat" cmpd="sng" algn="ctr">
+                      <a:solidFill>
+                        <a:srgbClr val="3A4553"/>
+                      </a:solidFill>
+                      <a:prstDash val="solid"/>
+                      <a:round/>
+                      <a:headEnd type="none" w="med" len="med"/>
+                      <a:tailEnd type="none" w="med" len="med"/>
+                    </a:lnT>
+                    <a:lnB w="6350" cap="flat" cmpd="sng" algn="ctr">
+                      <a:solidFill>
+                        <a:srgbClr val="3A4553"/>
+                      </a:solidFill>
+                      <a:prstDash val="solid"/>
+                      <a:round/>
+                      <a:headEnd type="none" w="med" len="med"/>
+                      <a:tailEnd type="none" w="med" len="med"/>
+                    </a:lnB>
+                    <a:solidFill>
+                      <a:srgbClr val="262B34"/>
+                    </a:solidFill>
+                  </a:tcPr>
+                </a:tc>
+                <a:tc>
+                  <a:txBody>
+                    <a:bodyPr/>
+                    <a:lstStyle/>
+                    <a:p>
+                      <a:pPr algn="l" indent="0" marL="0">
+                        <a:buNone/>
+                      </a:pPr>
+                      <a:r>
+                        <a:rPr lang="en-US" sz="900" dirty="0">
+                          <a:solidFill>
+                            <a:srgbClr val="E8B84B"/>
+                          </a:solidFill>
+                          <a:latin typeface="Calibri" pitchFamily="34" charset="0"/>
+                          <a:ea typeface="Calibri" pitchFamily="34" charset="-122"/>
+                          <a:cs typeface="Calibri" pitchFamily="34" charset="-120"/>
+                        </a:rPr>
+                        <a:t>Early-stage; no order or trial data available to independently size this.</a:t>
+                      </a:r>
+                      <a:endParaRPr lang="en-US" sz="900" dirty="0">
+                        <a:latin typeface="Calibri" charset="0"/>
+                        <a:ea typeface="Calibri" charset="0"/>
+                        <a:cs typeface="Calibri" charset="0"/>
+                      </a:endParaRPr>
+                    </a:p>
+                  </a:txBody>
+                  <a:tcPr marL="114300" marR="114300" marT="63500" marB="63500" anchor="ctr">
+                    <a:lnL w="6350" cap="flat" cmpd="sng" algn="ctr">
+                      <a:solidFill>
+                        <a:srgbClr val="3A4553"/>
+                      </a:solidFill>
+                      <a:prstDash val="solid"/>
+                      <a:round/>
+                      <a:headEnd type="none" w="med" len="med"/>
+                      <a:tailEnd type="none" w="med" len="med"/>
+                    </a:lnL>
+                    <a:lnR w="6350" cap="flat" cmpd="sng" algn="ctr">
+                      <a:solidFill>
+                        <a:srgbClr val="3A4553"/>
+                      </a:solidFill>
+                      <a:prstDash val="solid"/>
+                      <a:round/>
+                      <a:headEnd type="none" w="med" len="med"/>
+                      <a:tailEnd type="none" w="med" len="med"/>
+                    </a:lnR>
+                    <a:lnT w="6350" cap="flat" cmpd="sng" algn="ctr">
+                      <a:solidFill>
+                        <a:srgbClr val="3A4553"/>
+                      </a:solidFill>
+                      <a:prstDash val="solid"/>
+                      <a:round/>
+                      <a:headEnd type="none" w="med" len="med"/>
+                      <a:tailEnd type="none" w="med" len="med"/>
+                    </a:lnT>
+                    <a:lnB w="6350" cap="flat" cmpd="sng" algn="ctr">
+                      <a:solidFill>
+                        <a:srgbClr val="3A4553"/>
+                      </a:solidFill>
+                      <a:prstDash val="solid"/>
+                      <a:round/>
+                      <a:headEnd type="none" w="med" len="med"/>
+                      <a:tailEnd type="none" w="med" len="med"/>
+                    </a:lnB>
+                    <a:solidFill>
+                      <a:srgbClr val="262B34"/>
+                    </a:solidFill>
+                  </a:tcPr>
+                </a:tc>
+              </a:tr>
+            </a:tbl>
+          </a:graphicData>
+        </a:graphic>
+      </p:graphicFrame>
+      <p:sp>
+        <p:nvSpPr>
+          <p:cNvPr id="5" name="Text 2"/>
+          <p:cNvSpPr/>
+          <p:nvPr/>
+        </p:nvSpPr>
+        <p:spPr>
+          <a:xfrm>
+            <a:off x="548640" y="5989320"/>
+            <a:ext cx="11094415" cy="365760"/>
           </a:xfrm>
           <a:prstGeom prst="rect">
             <a:avLst/>
@@ -8710,563 +10425,23 @@
               <a:buNone/>
             </a:pPr>
             <a:r>
-              <a:rPr lang="en-US" sz="1400" b="1" dirty="0">
-                <a:solidFill>
-                  <a:srgbClr val="FFFFFF"/>
-                </a:solidFill>
-                <a:latin typeface="Cambria" pitchFamily="34" charset="0"/>
-                <a:ea typeface="Cambria" pitchFamily="34" charset="-122"/>
-                <a:cs typeface="Cambria" pitchFamily="34" charset="-120"/>
-              </a:rPr>
-              <a:t>Komatsu</a:t>
-            </a:r>
-            <a:endParaRPr lang="en-US" sz="1400" dirty="0"/>
-          </a:p>
-        </p:txBody>
-      </p:sp>
-      <p:sp>
-        <p:nvSpPr>
-          <p:cNvPr id="7" name="Text 5"/>
-          <p:cNvSpPr/>
-          <p:nvPr/>
-        </p:nvSpPr>
-        <p:spPr>
-          <a:xfrm>
-            <a:off x="1051560" y="2286000"/>
-            <a:ext cx="2286000" cy="731520"/>
-          </a:xfrm>
-          <a:prstGeom prst="rect">
-            <a:avLst/>
-          </a:prstGeom>
-          <a:noFill/>
-          <a:ln/>
-        </p:spPr>
-        <p:txBody>
-          <a:bodyPr wrap="square" lIns="0" tIns="0" rIns="0" bIns="0" rtlCol="0" anchor="ctr"/>
-          <a:lstStyle/>
-          <a:p>
-            <a:pPr indent="0" marL="0">
-              <a:lnSpc>
-                <a:spcPct val="110000"/>
-              </a:lnSpc>
-              <a:buNone/>
-            </a:pPr>
-            <a:r>
-              <a:rPr lang="en-US" sz="900" i="1" dirty="0">
-                <a:solidFill>
-                  <a:srgbClr val="9AA2AD"/>
-                </a:solidFill>
-                <a:latin typeface="Calibri" pitchFamily="34" charset="0"/>
-                <a:ea typeface="Calibri" pitchFamily="34" charset="-122"/>
-                <a:cs typeface="Calibri" pitchFamily="34" charset="-120"/>
-              </a:rPr>
-              <a:t>Himi Plant, Japan (via Uchimura)</a:t>
-            </a:r>
-            <a:endParaRPr lang="en-US" sz="900" dirty="0"/>
-          </a:p>
-        </p:txBody>
-      </p:sp>
-      <p:sp>
-        <p:nvSpPr>
-          <p:cNvPr id="8" name="Text 6"/>
-          <p:cNvSpPr/>
-          <p:nvPr/>
-        </p:nvSpPr>
-        <p:spPr>
-          <a:xfrm>
-            <a:off x="3566160" y="1965960"/>
-            <a:ext cx="4206240" cy="1143000"/>
-          </a:xfrm>
-          <a:prstGeom prst="rect">
-            <a:avLst/>
-          </a:prstGeom>
-          <a:noFill/>
-          <a:ln/>
-        </p:spPr>
-        <p:txBody>
-          <a:bodyPr wrap="square" lIns="0" tIns="0" rIns="0" bIns="0" rtlCol="0" anchor="ctr"/>
-          <a:lstStyle/>
-          <a:p>
-            <a:pPr indent="0" marL="0">
-              <a:lnSpc>
-                <a:spcPct val="115000"/>
-              </a:lnSpc>
-              <a:buNone/>
-            </a:pPr>
-            <a:r>
-              <a:rPr lang="en-US" sz="970" dirty="0">
-                <a:solidFill>
-                  <a:srgbClr val="CBD3DC"/>
-                </a:solidFill>
-                <a:latin typeface="Calibri" pitchFamily="34" charset="0"/>
-                <a:ea typeface="Calibri" pitchFamily="34" charset="-122"/>
-                <a:cs typeface="Calibri" pitchFamily="34" charset="-120"/>
-              </a:rPr>
-              <a:t>5 running idler part numbers, 3 more under RFQ. Contribution ₹68-114/kg — the highest in the portfolio.</a:t>
-            </a:r>
-            <a:endParaRPr lang="en-US" sz="970" dirty="0"/>
-          </a:p>
-        </p:txBody>
-      </p:sp>
-      <p:sp>
-        <p:nvSpPr>
-          <p:cNvPr id="9" name="Text 7"/>
-          <p:cNvSpPr/>
-          <p:nvPr/>
-        </p:nvSpPr>
-        <p:spPr>
-          <a:xfrm>
-            <a:off x="8001000" y="1965960"/>
-            <a:ext cx="3413455" cy="1143000"/>
-          </a:xfrm>
-          <a:prstGeom prst="rect">
-            <a:avLst/>
-          </a:prstGeom>
-          <a:noFill/>
-          <a:ln/>
-        </p:spPr>
-        <p:txBody>
-          <a:bodyPr wrap="square" lIns="0" tIns="0" rIns="0" bIns="0" rtlCol="0" anchor="ctr"/>
-          <a:lstStyle/>
-          <a:p>
-            <a:pPr indent="0" marL="0">
-              <a:lnSpc>
-                <a:spcPct val="115000"/>
-              </a:lnSpc>
-              <a:buNone/>
-            </a:pPr>
-            <a:r>
-              <a:rPr lang="en-US" sz="930" dirty="0">
-                <a:solidFill>
-                  <a:srgbClr val="E8B84B"/>
-                </a:solidFill>
-                <a:latin typeface="Calibri" pitchFamily="34" charset="0"/>
-                <a:ea typeface="Calibri" pitchFamily="34" charset="-122"/>
-                <a:cs typeface="Calibri" pitchFamily="34" charset="-120"/>
-              </a:rPr>
-              <a:t>An open first-article nonconformity (Mar 2026, part 17M3053110) is unresolved. Management's own view: quality must close before any further commercial progress.</a:t>
-            </a:r>
-            <a:endParaRPr lang="en-US" sz="930" dirty="0"/>
-          </a:p>
-        </p:txBody>
-      </p:sp>
-      <p:sp>
-        <p:nvSpPr>
-          <p:cNvPr id="10" name="Shape 8"/>
-          <p:cNvSpPr/>
-          <p:nvPr/>
-        </p:nvSpPr>
-        <p:spPr>
-          <a:xfrm>
-            <a:off x="548640" y="3429000"/>
-            <a:ext cx="11094415" cy="1417320"/>
-          </a:xfrm>
-          <a:prstGeom prst="roundRect">
-            <a:avLst>
-              <a:gd name="adj" fmla="val 5161"/>
-            </a:avLst>
-          </a:prstGeom>
-          <a:solidFill>
-            <a:srgbClr val="262B34"/>
-          </a:solidFill>
-          <a:ln/>
-        </p:spPr>
-      </p:sp>
-      <p:sp>
-        <p:nvSpPr>
-          <p:cNvPr id="11" name="Shape 9"/>
-          <p:cNvSpPr/>
-          <p:nvPr/>
-        </p:nvSpPr>
-        <p:spPr>
-          <a:xfrm>
-            <a:off x="777240" y="3657600"/>
-            <a:ext cx="146304" cy="146304"/>
-          </a:xfrm>
-          <a:prstGeom prst="ellipse">
-            <a:avLst/>
-          </a:prstGeom>
-          <a:solidFill>
-            <a:srgbClr val="3F8F5F"/>
-          </a:solidFill>
-          <a:ln/>
-        </p:spPr>
-      </p:sp>
-      <p:sp>
-        <p:nvSpPr>
-          <p:cNvPr id="12" name="Text 10"/>
-          <p:cNvSpPr/>
-          <p:nvPr/>
-        </p:nvSpPr>
-        <p:spPr>
-          <a:xfrm>
-            <a:off x="1051560" y="3566160"/>
-            <a:ext cx="2286000" cy="320040"/>
-          </a:xfrm>
-          <a:prstGeom prst="rect">
-            <a:avLst/>
-          </a:prstGeom>
-          <a:noFill/>
-          <a:ln/>
-        </p:spPr>
-        <p:txBody>
-          <a:bodyPr wrap="square" lIns="0" tIns="0" rIns="0" bIns="0" rtlCol="0" anchor="ctr"/>
-          <a:lstStyle/>
-          <a:p>
-            <a:pPr indent="0" marL="0">
-              <a:buNone/>
-            </a:pPr>
-            <a:r>
-              <a:rPr lang="en-US" sz="1400" b="1" dirty="0">
-                <a:solidFill>
-                  <a:srgbClr val="FFFFFF"/>
-                </a:solidFill>
-                <a:latin typeface="Cambria" pitchFamily="34" charset="0"/>
-                <a:ea typeface="Cambria" pitchFamily="34" charset="-122"/>
-                <a:cs typeface="Cambria" pitchFamily="34" charset="-120"/>
-              </a:rPr>
-              <a:t>Thejo Engineering</a:t>
-            </a:r>
-            <a:endParaRPr lang="en-US" sz="1400" dirty="0"/>
-          </a:p>
-        </p:txBody>
-      </p:sp>
-      <p:sp>
-        <p:nvSpPr>
-          <p:cNvPr id="13" name="Text 11"/>
-          <p:cNvSpPr/>
-          <p:nvPr/>
-        </p:nvSpPr>
-        <p:spPr>
-          <a:xfrm>
-            <a:off x="1051560" y="3886200"/>
-            <a:ext cx="2286000" cy="731520"/>
-          </a:xfrm>
-          <a:prstGeom prst="rect">
-            <a:avLst/>
-          </a:prstGeom>
-          <a:noFill/>
-          <a:ln/>
-        </p:spPr>
-        <p:txBody>
-          <a:bodyPr wrap="square" lIns="0" tIns="0" rIns="0" bIns="0" rtlCol="0" anchor="ctr"/>
-          <a:lstStyle/>
-          <a:p>
-            <a:pPr indent="0" marL="0">
-              <a:lnSpc>
-                <a:spcPct val="110000"/>
-              </a:lnSpc>
-              <a:buNone/>
-            </a:pPr>
-            <a:r>
-              <a:rPr lang="en-US" sz="900" i="1" dirty="0">
-                <a:solidFill>
-                  <a:srgbClr val="9AA2AD"/>
-                </a:solidFill>
-                <a:latin typeface="Calibri" pitchFamily="34" charset="0"/>
-                <a:ea typeface="Calibri" pitchFamily="34" charset="-122"/>
-                <a:cs typeface="Calibri" pitchFamily="34" charset="-120"/>
-              </a:rPr>
-              <a:t>India — mining wear parts</a:t>
-            </a:r>
-            <a:endParaRPr lang="en-US" sz="900" dirty="0"/>
-          </a:p>
-        </p:txBody>
-      </p:sp>
-      <p:sp>
-        <p:nvSpPr>
-          <p:cNvPr id="14" name="Text 12"/>
-          <p:cNvSpPr/>
-          <p:nvPr/>
-        </p:nvSpPr>
-        <p:spPr>
-          <a:xfrm>
-            <a:off x="3566160" y="3566160"/>
-            <a:ext cx="4206240" cy="1143000"/>
-          </a:xfrm>
-          <a:prstGeom prst="rect">
-            <a:avLst/>
-          </a:prstGeom>
-          <a:noFill/>
-          <a:ln/>
-        </p:spPr>
-        <p:txBody>
-          <a:bodyPr wrap="square" lIns="0" tIns="0" rIns="0" bIns="0" rtlCol="0" anchor="ctr"/>
-          <a:lstStyle/>
-          <a:p>
-            <a:pPr indent="0" marL="0">
-              <a:lnSpc>
-                <a:spcPct val="115000"/>
-              </a:lnSpc>
-              <a:buNone/>
-            </a:pPr>
-            <a:r>
-              <a:rPr lang="en-US" sz="970" dirty="0">
-                <a:solidFill>
-                  <a:srgbClr val="CBD3DC"/>
-                </a:solidFill>
-                <a:latin typeface="Calibri" pitchFamily="34" charset="0"/>
-                <a:ea typeface="Calibri" pitchFamily="34" charset="-122"/>
-                <a:cs typeface="Calibri" pitchFamily="34" charset="-120"/>
-              </a:rPr>
-              <a:t>Live, growing account since FY22-23 (Chrome-Moly liner plates, lifter bars); order volumes visibly increasing into FY26-27.</a:t>
-            </a:r>
-            <a:endParaRPr lang="en-US" sz="970" dirty="0"/>
-          </a:p>
-        </p:txBody>
-      </p:sp>
-      <p:sp>
-        <p:nvSpPr>
-          <p:cNvPr id="15" name="Text 13"/>
-          <p:cNvSpPr/>
-          <p:nvPr/>
-        </p:nvSpPr>
-        <p:spPr>
-          <a:xfrm>
-            <a:off x="8001000" y="3566160"/>
-            <a:ext cx="3413455" cy="1143000"/>
-          </a:xfrm>
-          <a:prstGeom prst="rect">
-            <a:avLst/>
-          </a:prstGeom>
-          <a:noFill/>
-          <a:ln/>
-        </p:spPr>
-        <p:txBody>
-          <a:bodyPr wrap="square" lIns="0" tIns="0" rIns="0" bIns="0" rtlCol="0" anchor="ctr"/>
-          <a:lstStyle/>
-          <a:p>
-            <a:pPr indent="0" marL="0">
-              <a:lnSpc>
-                <a:spcPct val="115000"/>
-              </a:lnSpc>
-              <a:buNone/>
-            </a:pPr>
-            <a:r>
-              <a:rPr lang="en-US" sz="930" dirty="0">
-                <a:solidFill>
-                  <a:srgbClr val="E8B84B"/>
-                </a:solidFill>
-                <a:latin typeface="Calibri" pitchFamily="34" charset="0"/>
-                <a:ea typeface="Calibri" pitchFamily="34" charset="-122"/>
-                <a:cs typeface="Calibri" pitchFamily="34" charset="-120"/>
-              </a:rPr>
-              <a:t>Small relative to Tega/Escorts today — the clearest active diversification story, but early.</a:t>
-            </a:r>
-            <a:endParaRPr lang="en-US" sz="930" dirty="0"/>
-          </a:p>
-        </p:txBody>
-      </p:sp>
-      <p:sp>
-        <p:nvSpPr>
-          <p:cNvPr id="16" name="Shape 14"/>
-          <p:cNvSpPr/>
-          <p:nvPr/>
-        </p:nvSpPr>
-        <p:spPr>
-          <a:xfrm>
-            <a:off x="548640" y="5029200"/>
-            <a:ext cx="11094415" cy="1417320"/>
-          </a:xfrm>
-          <a:prstGeom prst="roundRect">
-            <a:avLst>
-              <a:gd name="adj" fmla="val 5161"/>
-            </a:avLst>
-          </a:prstGeom>
-          <a:solidFill>
-            <a:srgbClr val="262B34"/>
-          </a:solidFill>
-          <a:ln/>
-        </p:spPr>
-      </p:sp>
-      <p:sp>
-        <p:nvSpPr>
-          <p:cNvPr id="17" name="Shape 15"/>
-          <p:cNvSpPr/>
-          <p:nvPr/>
-        </p:nvSpPr>
-        <p:spPr>
-          <a:xfrm>
-            <a:off x="777240" y="5257800"/>
-            <a:ext cx="146304" cy="146304"/>
-          </a:xfrm>
-          <a:prstGeom prst="ellipse">
-            <a:avLst/>
-          </a:prstGeom>
-          <a:solidFill>
-            <a:srgbClr val="E8B84B"/>
-          </a:solidFill>
-          <a:ln/>
-        </p:spPr>
-      </p:sp>
-      <p:sp>
-        <p:nvSpPr>
-          <p:cNvPr id="18" name="Text 16"/>
-          <p:cNvSpPr/>
-          <p:nvPr/>
-        </p:nvSpPr>
-        <p:spPr>
-          <a:xfrm>
-            <a:off x="1051560" y="5166360"/>
-            <a:ext cx="2286000" cy="320040"/>
-          </a:xfrm>
-          <a:prstGeom prst="rect">
-            <a:avLst/>
-          </a:prstGeom>
-          <a:noFill/>
-          <a:ln/>
-        </p:spPr>
-        <p:txBody>
-          <a:bodyPr wrap="square" lIns="0" tIns="0" rIns="0" bIns="0" rtlCol="0" anchor="ctr"/>
-          <a:lstStyle/>
-          <a:p>
-            <a:pPr indent="0" marL="0">
-              <a:buNone/>
-            </a:pPr>
-            <a:r>
-              <a:rPr lang="en-US" sz="1400" b="1" dirty="0">
-                <a:solidFill>
-                  <a:srgbClr val="FFFFFF"/>
-                </a:solidFill>
-                <a:latin typeface="Cambria" pitchFamily="34" charset="0"/>
-                <a:ea typeface="Cambria" pitchFamily="34" charset="-122"/>
-                <a:cs typeface="Cambria" pitchFamily="34" charset="-120"/>
-              </a:rPr>
-              <a:t>US &amp; Japan HEMM OEMs</a:t>
-            </a:r>
-            <a:endParaRPr lang="en-US" sz="1400" dirty="0"/>
-          </a:p>
-        </p:txBody>
-      </p:sp>
-      <p:sp>
-        <p:nvSpPr>
-          <p:cNvPr id="19" name="Text 17"/>
-          <p:cNvSpPr/>
-          <p:nvPr/>
-        </p:nvSpPr>
-        <p:spPr>
-          <a:xfrm>
-            <a:off x="1051560" y="5486400"/>
-            <a:ext cx="2286000" cy="731520"/>
-          </a:xfrm>
-          <a:prstGeom prst="rect">
-            <a:avLst/>
-          </a:prstGeom>
-          <a:noFill/>
-          <a:ln/>
-        </p:spPr>
-        <p:txBody>
-          <a:bodyPr wrap="square" lIns="0" tIns="0" rIns="0" bIns="0" rtlCol="0" anchor="ctr"/>
-          <a:lstStyle/>
-          <a:p>
-            <a:pPr indent="0" marL="0">
-              <a:lnSpc>
-                <a:spcPct val="110000"/>
-              </a:lnSpc>
-              <a:buNone/>
-            </a:pPr>
-            <a:r>
-              <a:rPr lang="en-US" sz="900" i="1" dirty="0">
-                <a:solidFill>
-                  <a:srgbClr val="9AA2AD"/>
-                </a:solidFill>
-                <a:latin typeface="Calibri" pitchFamily="34" charset="0"/>
-                <a:ea typeface="Calibri" pitchFamily="34" charset="-122"/>
-                <a:cs typeface="Calibri" pitchFamily="34" charset="-120"/>
-              </a:rPr>
-              <a:t>Construction equipment</a:t>
-            </a:r>
-            <a:endParaRPr lang="en-US" sz="900" dirty="0"/>
-          </a:p>
-        </p:txBody>
-      </p:sp>
-      <p:sp>
-        <p:nvSpPr>
-          <p:cNvPr id="20" name="Text 18"/>
-          <p:cNvSpPr/>
-          <p:nvPr/>
-        </p:nvSpPr>
-        <p:spPr>
-          <a:xfrm>
-            <a:off x="3566160" y="5166360"/>
-            <a:ext cx="4206240" cy="1143000"/>
-          </a:xfrm>
-          <a:prstGeom prst="rect">
-            <a:avLst/>
-          </a:prstGeom>
-          <a:noFill/>
-          <a:ln/>
-        </p:spPr>
-        <p:txBody>
-          <a:bodyPr wrap="square" lIns="0" tIns="0" rIns="0" bIns="0" rtlCol="0" anchor="ctr"/>
-          <a:lstStyle/>
-          <a:p>
-            <a:pPr indent="0" marL="0">
-              <a:lnSpc>
-                <a:spcPct val="115000"/>
-              </a:lnSpc>
-              <a:buNone/>
-            </a:pPr>
-            <a:r>
-              <a:rPr lang="en-US" sz="970" dirty="0">
-                <a:solidFill>
-                  <a:srgbClr val="CBD3DC"/>
-                </a:solidFill>
-                <a:latin typeface="Calibri" pitchFamily="34" charset="0"/>
-                <a:ea typeface="Calibri" pitchFamily="34" charset="-122"/>
-                <a:cs typeface="Calibri" pitchFamily="34" charset="-120"/>
-              </a:rPr>
-              <a:t>Passed pilot-lot quality assessments per internal reporting.</a:t>
-            </a:r>
-            <a:endParaRPr lang="en-US" sz="970" dirty="0"/>
-          </a:p>
-        </p:txBody>
-      </p:sp>
-      <p:sp>
-        <p:nvSpPr>
-          <p:cNvPr id="21" name="Text 19"/>
-          <p:cNvSpPr/>
-          <p:nvPr/>
-        </p:nvSpPr>
-        <p:spPr>
-          <a:xfrm>
-            <a:off x="8001000" y="5166360"/>
-            <a:ext cx="3413455" cy="1143000"/>
-          </a:xfrm>
-          <a:prstGeom prst="rect">
-            <a:avLst/>
-          </a:prstGeom>
-          <a:noFill/>
-          <a:ln/>
-        </p:spPr>
-        <p:txBody>
-          <a:bodyPr wrap="square" lIns="0" tIns="0" rIns="0" bIns="0" rtlCol="0" anchor="ctr"/>
-          <a:lstStyle/>
-          <a:p>
-            <a:pPr indent="0" marL="0">
-              <a:lnSpc>
-                <a:spcPct val="115000"/>
-              </a:lnSpc>
-              <a:buNone/>
-            </a:pPr>
-            <a:r>
-              <a:rPr lang="en-US" sz="930" dirty="0">
-                <a:solidFill>
-                  <a:srgbClr val="E8B84B"/>
-                </a:solidFill>
-                <a:latin typeface="Calibri" pitchFamily="34" charset="0"/>
-                <a:ea typeface="Calibri" pitchFamily="34" charset="-122"/>
-                <a:cs typeface="Calibri" pitchFamily="34" charset="-120"/>
-              </a:rPr>
-              <a:t>Not yet independently confirmed against audited order data — treat as pipeline, not booked business.</a:t>
-            </a:r>
-            <a:endParaRPr lang="en-US" sz="930" dirty="0"/>
-          </a:p>
-        </p:txBody>
-      </p:sp>
-      <p:sp>
-        <p:nvSpPr>
-          <p:cNvPr id="22" name="Text 20"/>
+              <a:rPr lang="en-US" sz="800" i="1" dirty="0">
+                <a:solidFill>
+                  <a:srgbClr val="7A828E"/>
+                </a:solidFill>
+                <a:latin typeface="Calibri" pitchFamily="34" charset="0"/>
+                <a:ea typeface="Calibri" pitchFamily="34" charset="-122"/>
+                <a:cs typeface="Calibri" pitchFamily="34" charset="-120"/>
+              </a:rPr>
+              <a:t>“Diligence note” column reflects gaps and open items found during review, not management's own characterization of these relationships.</a:t>
+            </a:r>
+            <a:endParaRPr lang="en-US" sz="800" dirty="0"/>
+          </a:p>
+        </p:txBody>
+      </p:sp>
+      <p:sp>
+        <p:nvSpPr>
+          <p:cNvPr id="6" name="Text 3"/>
           <p:cNvSpPr/>
           <p:nvPr/>
         </p:nvSpPr>
@@ -9305,7 +10480,7 @@
       </p:sp>
       <p:sp>
         <p:nvSpPr>
-          <p:cNvPr id="23" name="Text 21"/>
+          <p:cNvPr id="7" name="Text 4"/>
           <p:cNvSpPr/>
           <p:nvPr/>
         </p:nvSpPr>
@@ -20994,7 +22169,7 @@
                 <a:ea typeface="Cambria" pitchFamily="34" charset="-122"/>
                 <a:cs typeface="Cambria" pitchFamily="34" charset="-120"/>
               </a:rPr>
-              <a:t>77-85%</a:t>
+              <a:t>60-85%</a:t>
             </a:r>
             <a:endParaRPr lang="en-US" sz="1900" dirty="0"/>
           </a:p>
@@ -21036,7 +22211,7 @@
                 <a:ea typeface="Calibri" pitchFamily="34" charset="-122"/>
                 <a:cs typeface="Calibri" pitchFamily="34" charset="-120"/>
               </a:rPr>
-              <a:t>Recent capacity utilization (Aug 2025 study)</a:t>
+              <a:t>Reported inconsistently across company materials, 2024-25</a:t>
             </a:r>
             <a:endParaRPr lang="en-US" sz="930" dirty="0"/>
           </a:p>

--- a/investor-pitch/Datre_Corporation_Investor_Pitch.pptx
+++ b/investor-pitch/Datre_Corporation_Investor_Pitch.pptx
@@ -26,9 +26,10 @@
     <p:sldId id="274" r:id="rId20"/>
     <p:sldId id="275" r:id="rId21"/>
     <p:sldId id="276" r:id="rId22"/>
+    <p:sldId id="277" r:id="rId23"/>
   </p:sldIdLst>
   <p:notesMasterIdLst>
-    <p:notesMasterId r:id="rId23"/>
+    <p:notesMasterId r:id="rId24"/>
   </p:notesMasterIdLst>
   <p:sldSz cx="12191695" cy="6858000"/>
   <p:notesSz cx="6858000" cy="12191695"/>
@@ -1100,9 +1101,9 @@
           </c:dLbls>
           <c:cat>
             <c:multiLvlStrRef>
-              <c:f>Sheet1!$A$2:$A$4</c:f>
+              <c:f>Sheet1!$A$2:$A$5</c:f>
               <c:multiLvlStrCache>
-                <c:ptCount val="3"/>
+                <c:ptCount val="4"/>
                 <c:lvl>
                   <c:pt idx="0">
                     <c:v>FY22</c:v>
@@ -1113,24 +1114,30 @@
                   <c:pt idx="2">
                     <c:v>FY24</c:v>
                   </c:pt>
+                  <c:pt idx="3">
+                    <c:v>FY25</c:v>
+                  </c:pt>
                 </c:lvl>
               </c:multiLvlStrCache>
             </c:multiLvlStrRef>
           </c:cat>
           <c:val>
             <c:numRef>
-              <c:f>Sheet1!$B$2:$B$4</c:f>
+              <c:f>Sheet1!$B$2:$B$5</c:f>
               <c:numCache>
                 <c:formatCode>General</c:formatCode>
-                <c:ptCount val="3"/>
+                <c:ptCount val="4"/>
                 <c:pt idx="0">
                   <c:v>-5.94</c:v>
                 </c:pt>
                 <c:pt idx="1">
-                  <c:v>-4.47</c:v>
+                  <c:v>-4.46</c:v>
                 </c:pt>
                 <c:pt idx="2">
-                  <c:v>-3.02</c:v>
+                  <c:v>-2.92</c:v>
+                </c:pt>
+                <c:pt idx="3">
+                  <c:v>-1.54</c:v>
                 </c:pt>
               </c:numCache>
             </c:numRef>
@@ -3746,6 +3753,94 @@
             <a:fld id="{F7021451-1387-4CA6-816F-3879F97B5CBC}" type="slidenum">
               <a:rPr lang="en-US"/>
               <a:t>21</a:t>
+            </a:fld>
+            <a:endParaRPr lang="en-US"/>
+          </a:p>
+        </p:txBody>
+      </p:sp>
+    </p:spTree>
+    <p:extLst>
+      <p:ext uri="{BB962C8B-B14F-4D97-AF65-F5344CB8AC3E}">
+        <p14:creationId xmlns:p14="http://schemas.microsoft.com/office/powerpoint/2010/main" val="1024086991"/>
+      </p:ext>
+    </p:extLst>
+  </p:cSld>
+  <p:clrMapOvr>
+    <a:masterClrMapping/>
+  </p:clrMapOvr>
+</p:notes>
+</file>
+
+<file path=ppt/notesSlides/notesSlide22.xml><?xml version="1.0" encoding="utf-8"?>
+<p:notes xmlns:a="http://schemas.openxmlformats.org/drawingml/2006/main" xmlns:r="http://schemas.openxmlformats.org/officeDocument/2006/relationships" xmlns:p="http://schemas.openxmlformats.org/presentationml/2006/main">
+  <p:cSld>
+    <p:spTree>
+      <p:nvGrpSpPr>
+        <p:cNvPr id="1" name=""/>
+        <p:cNvGrpSpPr/>
+        <p:nvPr/>
+      </p:nvGrpSpPr>
+      <p:grpSpPr>
+        <a:xfrm>
+          <a:off x="0" y="0"/>
+          <a:ext cx="0" cy="0"/>
+          <a:chOff x="0" y="0"/>
+          <a:chExt cx="0" cy="0"/>
+        </a:xfrm>
+      </p:grpSpPr>
+      <p:sp>
+        <p:nvSpPr>
+          <p:cNvPr id="2" name="Slide Image Placeholder 1"/>
+          <p:cNvSpPr>
+            <a:spLocks noGrp="1" noRot="1" noChangeAspect="1"/>
+          </p:cNvSpPr>
+          <p:nvPr>
+            <p:ph type="sldImg"/>
+          </p:nvPr>
+        </p:nvSpPr>
+        <p:spPr/>
+      </p:sp>
+      <p:sp>
+        <p:nvSpPr>
+          <p:cNvPr id="3" name="Notes Placeholder 2"/>
+          <p:cNvSpPr>
+            <a:spLocks noGrp="1"/>
+          </p:cNvSpPr>
+          <p:nvPr>
+            <p:ph type="body" idx="1"/>
+          </p:nvPr>
+        </p:nvSpPr>
+        <p:spPr/>
+        <p:txBody>
+          <a:bodyPr/>
+          <a:lstStyle/>
+          <a:p>
+            <a:r>
+              <a:rPr lang="en-US" dirty="0"/>
+              <a:t/>
+            </a:r>
+            <a:endParaRPr lang="en-US" dirty="0"/>
+          </a:p>
+        </p:txBody>
+      </p:sp>
+      <p:sp>
+        <p:nvSpPr>
+          <p:cNvPr id="4" name="Slide Number Placeholder 3"/>
+          <p:cNvSpPr>
+            <a:spLocks noGrp="1"/>
+          </p:cNvSpPr>
+          <p:nvPr>
+            <p:ph type="sldNum" sz="quarter" idx="10"/>
+          </p:nvPr>
+        </p:nvSpPr>
+        <p:spPr/>
+        <p:txBody>
+          <a:bodyPr/>
+          <a:lstStyle/>
+          <a:p>
+            <a:fld id="{F7021451-1387-4CA6-816F-3879F97B5CBC}" type="slidenum">
+              <a:rPr lang="en-US"/>
+              <a:t>22</a:t>
             </a:fld>
             <a:endParaRPr lang="en-US"/>
           </a:p>
@@ -6636,7 +6731,7 @@
                 <a:ea typeface="Cambria" pitchFamily="34" charset="-122"/>
                 <a:cs typeface="Cambria" pitchFamily="34" charset="-120"/>
               </a:rPr>
-              <a:t>Net worth is still negative, despite three profit years</a:t>
+              <a:t>Net worth is negative, but closing fast — not yet at zero</a:t>
             </a:r>
             <a:endParaRPr lang="en-US" sz="3000" dirty="0"/>
           </a:p>
@@ -6667,7 +6762,7 @@
         <p:spPr>
           <a:xfrm>
             <a:off x="548640" y="5074920"/>
-            <a:ext cx="6035040" cy="822960"/>
+            <a:ext cx="6035040" cy="960120"/>
           </a:xfrm>
           <a:prstGeom prst="rect">
             <a:avLst/>
@@ -6694,7 +6789,7 @@
                 <a:ea typeface="Calibri" pitchFamily="34" charset="-122"/>
                 <a:cs typeface="Calibri" pitchFamily="34" charset="-120"/>
               </a:rPr>
-              <a:t>Total liabilities have exceeded total assets in every audited year available (FY22-24). The gap is narrowing at ~₹1.4-1.5 Cr/yr, roughly the pace of recent net profit — but FY26-27's slower start (slide 11) puts that trajectory at risk.</a:t>
+              <a:t>Total liabilities have exceeded total assets in every audited year available (FY22-25) — but the gap has narrowed every year, from -₹5.94 Cr to -₹1.54 Cr, roughly tracking net profit. At the FY24-25 pace (~₹1.4 Cr/yr), FY26 crosses to positive — but FY26-27's slower start (slide 11) puts that timeline at risk. See slide 13 for the fuller trend.</a:t>
             </a:r>
             <a:endParaRPr lang="en-US" sz="1000" dirty="0"/>
           </a:p>
@@ -6708,7 +6803,7 @@
         </p:nvSpPr>
         <p:spPr>
           <a:xfrm>
-            <a:off x="548640" y="5897880"/>
+            <a:off x="548640" y="6080760"/>
             <a:ext cx="6035040" cy="274320"/>
           </a:xfrm>
           <a:prstGeom prst="rect">
@@ -6733,7 +6828,7 @@
                 <a:ea typeface="Calibri" pitchFamily="34" charset="-122"/>
                 <a:cs typeface="Calibri" pitchFamily="34" charset="-120"/>
               </a:rPr>
-              <a:t>Source: audited balance sheets, FY22-FY24.</a:t>
+              <a:t>Source: audited balance sheets, FY22-FY25.</a:t>
             </a:r>
             <a:endParaRPr lang="en-US" sz="800" dirty="0"/>
           </a:p>
@@ -6914,7 +7009,7 @@
                 <a:ea typeface="Calibri" pitchFamily="34" charset="-122"/>
                 <a:cs typeface="Calibri" pitchFamily="34" charset="-120"/>
               </a:rPr>
-              <a:t>Negative net worth</a:t>
+              <a:t>Negative net worth, narrowing</a:t>
             </a:r>
             <a:endParaRPr lang="en-US" sz="1000" dirty="0"/>
           </a:p>
@@ -6956,7 +7051,7 @@
                 <a:ea typeface="Calibri" pitchFamily="34" charset="-122"/>
                 <a:cs typeface="Calibri" pitchFamily="34" charset="-120"/>
               </a:rPr>
-              <a:t>Priority for any capital structure discussion: equity infusion or a faster retained-earnings build is needed to turn net worth positive.</a:t>
+              <a:t>-₹1.54 Cr as of FY25, down from -₹5.94 Cr in FY22. Genuine progress, but still a priority for any capital structure discussion.</a:t>
             </a:r>
             <a:endParaRPr lang="en-US" sz="880" dirty="0"/>
           </a:p>
@@ -6995,7 +7090,7 @@
                 <a:ea typeface="Calibri" pitchFamily="34" charset="-122"/>
                 <a:cs typeface="Calibri" pitchFamily="34" charset="-120"/>
               </a:rPr>
-              <a:t>Related-party disclosure</a:t>
+              <a:t>Ownership &amp; related-party funding</a:t>
             </a:r>
             <a:endParaRPr lang="en-US" sz="1000" dirty="0"/>
           </a:p>
@@ -7037,7 +7132,7 @@
                 <a:ea typeface="Calibri" pitchFamily="34" charset="-122"/>
                 <a:cs typeface="Calibri" pitchFamily="34" charset="-120"/>
               </a:rPr>
-              <a:t>No related-party transaction or promoter-loan disclosure was found in the materials reviewed — request full disclosure before finalizing terms.</a:t>
+              <a:t>99.88% held by Sarvagah Engineering Pvt Ltd. A flat ₹12.90 Cr unsecured, 0%-interest convertible debenture is unchanged for 2+ years — confirm counterparty and conversion terms.</a:t>
             </a:r>
             <a:endParaRPr lang="en-US" sz="880" dirty="0"/>
           </a:p>
@@ -7267,7 +7362,7 @@
                 <a:ea typeface="Calibri" pitchFamily="34" charset="-122"/>
                 <a:cs typeface="Calibri" pitchFamily="34" charset="-120"/>
               </a:rPr>
-              <a:t>CRITICAL ANALYSIS — CONCENTRATION RISK</a:t>
+              <a:t>THE PROGRESS CASE</a:t>
             </a:r>
             <a:endParaRPr lang="en-US" sz="1100" dirty="0"/>
           </a:p>
@@ -7306,38 +7401,44 @@
                 <a:ea typeface="Cambria" pitchFamily="34" charset="-122"/>
                 <a:cs typeface="Cambria" pitchFamily="34" charset="-120"/>
               </a:rPr>
-              <a:t>Two customers now drive roughly 80% of contribution</a:t>
+              <a:t>Four numbers that show this is a multi-year rebuild, not one good year</a:t>
             </a:r>
             <a:endParaRPr lang="en-US" sz="3000" dirty="0"/>
           </a:p>
         </p:txBody>
       </p:sp>
-      <p:graphicFrame>
-        <p:nvGraphicFramePr>
-          <p:cNvPr id="4" name="Chart 0" descr=""/>
-          <p:cNvGraphicFramePr/>
-          <p:nvPr/>
-        </p:nvGraphicFramePr>
-        <p:xfrm>
-          <a:off x="548640" y="1737360"/>
-          <a:ext cx="6126480" cy="3200400"/>
-        </p:xfrm>
-        <a:graphic xmlns:a="http://schemas.openxmlformats.org/drawingml/2006/main">
-          <a:graphicData uri="http://schemas.openxmlformats.org/drawingml/2006/chart">
-            <c:chart xmlns:c="http://schemas.openxmlformats.org/drawingml/2006/chart" r:id="rId1"/>
-          </a:graphicData>
-        </a:graphic>
-      </p:graphicFrame>
-      <p:sp>
-        <p:nvSpPr>
-          <p:cNvPr id="5" name="Text 2"/>
-          <p:cNvSpPr/>
-          <p:nvPr/>
-        </p:nvSpPr>
-        <p:spPr>
-          <a:xfrm>
-            <a:off x="548640" y="5074920"/>
-            <a:ext cx="6126480" cy="457200"/>
+      <p:sp>
+        <p:nvSpPr>
+          <p:cNvPr id="4" name="Shape 2"/>
+          <p:cNvSpPr/>
+          <p:nvPr/>
+        </p:nvSpPr>
+        <p:spPr>
+          <a:xfrm>
+            <a:off x="548640" y="1737360"/>
+            <a:ext cx="2567864" cy="1600200"/>
+          </a:xfrm>
+          <a:prstGeom prst="roundRect">
+            <a:avLst>
+              <a:gd name="adj" fmla="val 4571"/>
+            </a:avLst>
+          </a:prstGeom>
+          <a:solidFill>
+            <a:srgbClr val="EDF5EF"/>
+          </a:solidFill>
+          <a:ln/>
+        </p:spPr>
+      </p:sp>
+      <p:sp>
+        <p:nvSpPr>
+          <p:cNvPr id="5" name="Text 3"/>
+          <p:cNvSpPr/>
+          <p:nvPr/>
+        </p:nvSpPr>
+        <p:spPr>
+          <a:xfrm>
+            <a:off x="713232" y="1874520"/>
+            <a:ext cx="2238680" cy="502920"/>
           </a:xfrm>
           <a:prstGeom prst="rect">
             <a:avLst/>
@@ -7353,69 +7454,30 @@
               <a:buNone/>
             </a:pPr>
             <a:r>
-              <a:rPr lang="en-US" sz="800" i="1" dirty="0">
-                <a:solidFill>
-                  <a:srgbClr val="6B7684"/>
-                </a:solidFill>
-                <a:latin typeface="Calibri" pitchFamily="34" charset="0"/>
-                <a:ea typeface="Calibri" pitchFamily="34" charset="-122"/>
-                <a:cs typeface="Calibri" pitchFamily="34" charset="-120"/>
-              </a:rPr>
-              <a:t>Source: company financial statements &amp; internal analysis, FY21-FY24 actuals, FY26 management projection.</a:t>
-            </a:r>
-            <a:endParaRPr lang="en-US" sz="800" dirty="0"/>
-          </a:p>
-        </p:txBody>
-      </p:sp>
-      <p:sp>
-        <p:nvSpPr>
-          <p:cNvPr id="6" name="Text 3"/>
-          <p:cNvSpPr/>
-          <p:nvPr/>
-        </p:nvSpPr>
-        <p:spPr>
-          <a:xfrm>
-            <a:off x="6949440" y="1737360"/>
-            <a:ext cx="4693615" cy="365760"/>
-          </a:xfrm>
-          <a:prstGeom prst="rect">
-            <a:avLst/>
-          </a:prstGeom>
-          <a:noFill/>
-          <a:ln/>
-        </p:spPr>
-        <p:txBody>
-          <a:bodyPr wrap="square" lIns="0" tIns="0" rIns="0" bIns="0" rtlCol="0" anchor="ctr"/>
-          <a:lstStyle/>
-          <a:p>
-            <a:pPr indent="0" marL="0">
-              <a:buNone/>
-            </a:pPr>
-            <a:r>
-              <a:rPr lang="en-US" sz="1600" b="1" dirty="0">
-                <a:solidFill>
-                  <a:srgbClr val="1C1F26"/>
+              <a:rPr lang="en-US" sz="2400" b="1" dirty="0">
+                <a:solidFill>
+                  <a:srgbClr val="3F8F5F"/>
                 </a:solidFill>
                 <a:latin typeface="Cambria" pitchFamily="34" charset="0"/>
                 <a:ea typeface="Cambria" pitchFamily="34" charset="-122"/>
                 <a:cs typeface="Cambria" pitchFamily="34" charset="-120"/>
               </a:rPr>
-              <a:t>~80%</a:t>
-            </a:r>
-            <a:endParaRPr lang="en-US" sz="1600" dirty="0"/>
-          </a:p>
-        </p:txBody>
-      </p:sp>
-      <p:sp>
-        <p:nvSpPr>
-          <p:cNvPr id="7" name="Text 4"/>
-          <p:cNvSpPr/>
-          <p:nvPr/>
-        </p:nvSpPr>
-        <p:spPr>
-          <a:xfrm>
-            <a:off x="6949440" y="2103120"/>
-            <a:ext cx="4693615" cy="822960"/>
+              <a:t>~24%</a:t>
+            </a:r>
+            <a:endParaRPr lang="en-US" sz="2400" dirty="0"/>
+          </a:p>
+        </p:txBody>
+      </p:sp>
+      <p:sp>
+        <p:nvSpPr>
+          <p:cNvPr id="6" name="Text 4"/>
+          <p:cNvSpPr/>
+          <p:nvPr/>
+        </p:nvSpPr>
+        <p:spPr>
+          <a:xfrm>
+            <a:off x="713232" y="2395728"/>
+            <a:ext cx="2238680" cy="502920"/>
           </a:xfrm>
           <a:prstGeom prst="rect">
             <a:avLst/>
@@ -7429,12 +7491,54 @@
           <a:p>
             <a:pPr indent="0" marL="0">
               <a:lnSpc>
-                <a:spcPct val="115000"/>
+                <a:spcPct val="105000"/>
               </a:lnSpc>
               <a:buNone/>
             </a:pPr>
             <a:r>
-              <a:rPr lang="en-US" sz="980" dirty="0">
+              <a:rPr lang="en-US" sz="1030" b="1" dirty="0">
+                <a:solidFill>
+                  <a:srgbClr val="1C1F26"/>
+                </a:solidFill>
+                <a:latin typeface="Calibri" pitchFamily="34" charset="0"/>
+                <a:ea typeface="Calibri" pitchFamily="34" charset="-122"/>
+                <a:cs typeface="Calibri" pitchFamily="34" charset="-120"/>
+              </a:rPr>
+              <a:t>Revenue CAGR, FY21 trough to FY25-26</a:t>
+            </a:r>
+            <a:endParaRPr lang="en-US" sz="1030" dirty="0"/>
+          </a:p>
+        </p:txBody>
+      </p:sp>
+      <p:sp>
+        <p:nvSpPr>
+          <p:cNvPr id="7" name="Text 5"/>
+          <p:cNvSpPr/>
+          <p:nvPr/>
+        </p:nvSpPr>
+        <p:spPr>
+          <a:xfrm>
+            <a:off x="713232" y="2889504"/>
+            <a:ext cx="2238680" cy="411480"/>
+          </a:xfrm>
+          <a:prstGeom prst="rect">
+            <a:avLst/>
+          </a:prstGeom>
+          <a:noFill/>
+          <a:ln/>
+        </p:spPr>
+        <p:txBody>
+          <a:bodyPr wrap="square" lIns="0" tIns="0" rIns="0" bIns="0" rtlCol="0" anchor="ctr"/>
+          <a:lstStyle/>
+          <a:p>
+            <a:pPr indent="0" marL="0">
+              <a:lnSpc>
+                <a:spcPct val="105000"/>
+              </a:lnSpc>
+              <a:buNone/>
+            </a:pPr>
+            <a:r>
+              <a:rPr lang="en-US" sz="900" dirty="0">
                 <a:solidFill>
                   <a:srgbClr val="3A4553"/>
                 </a:solidFill>
@@ -7442,22 +7546,44 @@
                 <a:ea typeface="Calibri" pitchFamily="34" charset="-122"/>
                 <a:cs typeface="Calibri" pitchFamily="34" charset="-120"/>
               </a:rPr>
-              <a:t>Tega + Escorts share of contribution — the deep OEM integration that is also the single largest risk on this deck</a:t>
-            </a:r>
-            <a:endParaRPr lang="en-US" sz="980" dirty="0"/>
-          </a:p>
-        </p:txBody>
-      </p:sp>
-      <p:sp>
-        <p:nvSpPr>
-          <p:cNvPr id="8" name="Text 5"/>
-          <p:cNvSpPr/>
-          <p:nvPr/>
-        </p:nvSpPr>
-        <p:spPr>
-          <a:xfrm>
-            <a:off x="6949440" y="3108960"/>
-            <a:ext cx="4693615" cy="365760"/>
+              <a:t>₹8.5 Cr → ₹24.9 Cr over 5 years</a:t>
+            </a:r>
+            <a:endParaRPr lang="en-US" sz="900" dirty="0"/>
+          </a:p>
+        </p:txBody>
+      </p:sp>
+      <p:sp>
+        <p:nvSpPr>
+          <p:cNvPr id="8" name="Shape 6"/>
+          <p:cNvSpPr/>
+          <p:nvPr/>
+        </p:nvSpPr>
+        <p:spPr>
+          <a:xfrm>
+            <a:off x="3390824" y="1737360"/>
+            <a:ext cx="2567864" cy="1600200"/>
+          </a:xfrm>
+          <a:prstGeom prst="roundRect">
+            <a:avLst>
+              <a:gd name="adj" fmla="val 4571"/>
+            </a:avLst>
+          </a:prstGeom>
+          <a:solidFill>
+            <a:srgbClr val="EDF5EF"/>
+          </a:solidFill>
+          <a:ln/>
+        </p:spPr>
+      </p:sp>
+      <p:sp>
+        <p:nvSpPr>
+          <p:cNvPr id="9" name="Text 7"/>
+          <p:cNvSpPr/>
+          <p:nvPr/>
+        </p:nvSpPr>
+        <p:spPr>
+          <a:xfrm>
+            <a:off x="3555416" y="1874520"/>
+            <a:ext cx="2238680" cy="502920"/>
           </a:xfrm>
           <a:prstGeom prst="rect">
             <a:avLst/>
@@ -7473,30 +7599,30 @@
               <a:buNone/>
             </a:pPr>
             <a:r>
-              <a:rPr lang="en-US" sz="1600" b="1" dirty="0">
-                <a:solidFill>
-                  <a:srgbClr val="1C1F26"/>
+              <a:rPr lang="en-US" sz="2400" b="1" dirty="0">
+                <a:solidFill>
+                  <a:srgbClr val="3F8F5F"/>
                 </a:solidFill>
                 <a:latin typeface="Cambria" pitchFamily="34" charset="0"/>
                 <a:ea typeface="Cambria" pitchFamily="34" charset="-122"/>
                 <a:cs typeface="Cambria" pitchFamily="34" charset="-120"/>
               </a:rPr>
-              <a:t>₹9.0 → ₹7.5 Cr</a:t>
-            </a:r>
-            <a:endParaRPr lang="en-US" sz="1600" dirty="0"/>
-          </a:p>
-        </p:txBody>
-      </p:sp>
-      <p:sp>
-        <p:nvSpPr>
-          <p:cNvPr id="9" name="Text 6"/>
-          <p:cNvSpPr/>
-          <p:nvPr/>
-        </p:nvSpPr>
-        <p:spPr>
-          <a:xfrm>
-            <a:off x="6949440" y="3474720"/>
-            <a:ext cx="4693615" cy="822960"/>
+              <a:t>₹4.4 Cr</a:t>
+            </a:r>
+            <a:endParaRPr lang="en-US" sz="2400" dirty="0"/>
+          </a:p>
+        </p:txBody>
+      </p:sp>
+      <p:sp>
+        <p:nvSpPr>
+          <p:cNvPr id="10" name="Text 8"/>
+          <p:cNvSpPr/>
+          <p:nvPr/>
+        </p:nvSpPr>
+        <p:spPr>
+          <a:xfrm>
+            <a:off x="3555416" y="2395728"/>
+            <a:ext cx="2238680" cy="502920"/>
           </a:xfrm>
           <a:prstGeom prst="rect">
             <a:avLst/>
@@ -7510,12 +7636,54 @@
           <a:p>
             <a:pPr indent="0" marL="0">
               <a:lnSpc>
-                <a:spcPct val="115000"/>
+                <a:spcPct val="105000"/>
               </a:lnSpc>
               <a:buNone/>
             </a:pPr>
             <a:r>
-              <a:rPr lang="en-US" sz="980" dirty="0">
+              <a:rPr lang="en-US" sz="1030" b="1" dirty="0">
+                <a:solidFill>
+                  <a:srgbClr val="1C1F26"/>
+                </a:solidFill>
+                <a:latin typeface="Calibri" pitchFamily="34" charset="0"/>
+                <a:ea typeface="Calibri" pitchFamily="34" charset="-122"/>
+                <a:cs typeface="Calibri" pitchFamily="34" charset="-120"/>
+              </a:rPr>
+              <a:t>Net worth recovered, FY22 to FY25</a:t>
+            </a:r>
+            <a:endParaRPr lang="en-US" sz="1030" dirty="0"/>
+          </a:p>
+        </p:txBody>
+      </p:sp>
+      <p:sp>
+        <p:nvSpPr>
+          <p:cNvPr id="11" name="Text 9"/>
+          <p:cNvSpPr/>
+          <p:nvPr/>
+        </p:nvSpPr>
+        <p:spPr>
+          <a:xfrm>
+            <a:off x="3555416" y="2889504"/>
+            <a:ext cx="2238680" cy="411480"/>
+          </a:xfrm>
+          <a:prstGeom prst="rect">
+            <a:avLst/>
+          </a:prstGeom>
+          <a:noFill/>
+          <a:ln/>
+        </p:spPr>
+        <p:txBody>
+          <a:bodyPr wrap="square" lIns="0" tIns="0" rIns="0" bIns="0" rtlCol="0" anchor="ctr"/>
+          <a:lstStyle/>
+          <a:p>
+            <a:pPr indent="0" marL="0">
+              <a:lnSpc>
+                <a:spcPct val="105000"/>
+              </a:lnSpc>
+              <a:buNone/>
+            </a:pPr>
+            <a:r>
+              <a:rPr lang="en-US" sz="900" dirty="0">
                 <a:solidFill>
                   <a:srgbClr val="3A4553"/>
                 </a:solidFill>
@@ -7523,22 +7691,44 @@
                 <a:ea typeface="Calibri" pitchFamily="34" charset="-122"/>
                 <a:cs typeface="Calibri" pitchFamily="34" charset="-120"/>
               </a:rPr>
-              <a:t>Tega's small-casting orders declined YoY, FY23-24 to FY24-25</a:t>
-            </a:r>
-            <a:endParaRPr lang="en-US" sz="980" dirty="0"/>
-          </a:p>
-        </p:txBody>
-      </p:sp>
-      <p:sp>
-        <p:nvSpPr>
-          <p:cNvPr id="10" name="Text 7"/>
-          <p:cNvSpPr/>
-          <p:nvPr/>
-        </p:nvSpPr>
-        <p:spPr>
-          <a:xfrm>
-            <a:off x="6949440" y="4480560"/>
-            <a:ext cx="4693615" cy="365760"/>
+              <a:t>-₹5.94 Cr → -₹1.54 Cr, narrower every year</a:t>
+            </a:r>
+            <a:endParaRPr lang="en-US" sz="900" dirty="0"/>
+          </a:p>
+        </p:txBody>
+      </p:sp>
+      <p:sp>
+        <p:nvSpPr>
+          <p:cNvPr id="12" name="Shape 10"/>
+          <p:cNvSpPr/>
+          <p:nvPr/>
+        </p:nvSpPr>
+        <p:spPr>
+          <a:xfrm>
+            <a:off x="6233008" y="1737360"/>
+            <a:ext cx="2567864" cy="1600200"/>
+          </a:xfrm>
+          <a:prstGeom prst="roundRect">
+            <a:avLst>
+              <a:gd name="adj" fmla="val 4571"/>
+            </a:avLst>
+          </a:prstGeom>
+          <a:solidFill>
+            <a:srgbClr val="EDF5EF"/>
+          </a:solidFill>
+          <a:ln/>
+        </p:spPr>
+      </p:sp>
+      <p:sp>
+        <p:nvSpPr>
+          <p:cNvPr id="13" name="Text 11"/>
+          <p:cNvSpPr/>
+          <p:nvPr/>
+        </p:nvSpPr>
+        <p:spPr>
+          <a:xfrm>
+            <a:off x="6397600" y="1874520"/>
+            <a:ext cx="2238680" cy="502920"/>
           </a:xfrm>
           <a:prstGeom prst="rect">
             <a:avLst/>
@@ -7554,30 +7744,30 @@
               <a:buNone/>
             </a:pPr>
             <a:r>
-              <a:rPr lang="en-US" sz="1600" b="1" dirty="0">
-                <a:solidFill>
-                  <a:srgbClr val="1C1F26"/>
+              <a:rPr lang="en-US" sz="2400" b="1" dirty="0">
+                <a:solidFill>
+                  <a:srgbClr val="3F8F5F"/>
                 </a:solidFill>
                 <a:latin typeface="Cambria" pitchFamily="34" charset="0"/>
                 <a:ea typeface="Cambria" pitchFamily="34" charset="-122"/>
                 <a:cs typeface="Cambria" pitchFamily="34" charset="-120"/>
               </a:rPr>
-              <a:t>Thejo Engineering</a:t>
-            </a:r>
-            <a:endParaRPr lang="en-US" sz="1600" dirty="0"/>
-          </a:p>
-        </p:txBody>
-      </p:sp>
-      <p:sp>
-        <p:nvSpPr>
-          <p:cNvPr id="11" name="Text 8"/>
-          <p:cNvSpPr/>
-          <p:nvPr/>
-        </p:nvSpPr>
-        <p:spPr>
-          <a:xfrm>
-            <a:off x="6949440" y="4846320"/>
-            <a:ext cx="4693615" cy="822960"/>
+              <a:t>+45%</a:t>
+            </a:r>
+            <a:endParaRPr lang="en-US" sz="2400" dirty="0"/>
+          </a:p>
+        </p:txBody>
+      </p:sp>
+      <p:sp>
+        <p:nvSpPr>
+          <p:cNvPr id="14" name="Text 12"/>
+          <p:cNvSpPr/>
+          <p:nvPr/>
+        </p:nvSpPr>
+        <p:spPr>
+          <a:xfrm>
+            <a:off x="6397600" y="2395728"/>
+            <a:ext cx="2238680" cy="502920"/>
           </a:xfrm>
           <a:prstGeom prst="rect">
             <a:avLst/>
@@ -7591,12 +7781,54 @@
           <a:p>
             <a:pPr indent="0" marL="0">
               <a:lnSpc>
-                <a:spcPct val="115000"/>
+                <a:spcPct val="105000"/>
               </a:lnSpc>
               <a:buNone/>
             </a:pPr>
             <a:r>
-              <a:rPr lang="en-US" sz="980" dirty="0">
+              <a:rPr lang="en-US" sz="1030" b="1" dirty="0">
+                <a:solidFill>
+                  <a:srgbClr val="1C1F26"/>
+                </a:solidFill>
+                <a:latin typeface="Calibri" pitchFamily="34" charset="0"/>
+                <a:ea typeface="Calibri" pitchFamily="34" charset="-122"/>
+                <a:cs typeface="Calibri" pitchFamily="34" charset="-120"/>
+              </a:rPr>
+              <a:t>Tega contribution/kg, FY22-23 to FY25-26</a:t>
+            </a:r>
+            <a:endParaRPr lang="en-US" sz="1030" dirty="0"/>
+          </a:p>
+        </p:txBody>
+      </p:sp>
+      <p:sp>
+        <p:nvSpPr>
+          <p:cNvPr id="15" name="Text 13"/>
+          <p:cNvSpPr/>
+          <p:nvPr/>
+        </p:nvSpPr>
+        <p:spPr>
+          <a:xfrm>
+            <a:off x="6397600" y="2889504"/>
+            <a:ext cx="2238680" cy="411480"/>
+          </a:xfrm>
+          <a:prstGeom prst="rect">
+            <a:avLst/>
+          </a:prstGeom>
+          <a:noFill/>
+          <a:ln/>
+        </p:spPr>
+        <p:txBody>
+          <a:bodyPr wrap="square" lIns="0" tIns="0" rIns="0" bIns="0" rtlCol="0" anchor="ctr"/>
+          <a:lstStyle/>
+          <a:p>
+            <a:pPr indent="0" marL="0">
+              <a:lnSpc>
+                <a:spcPct val="105000"/>
+              </a:lnSpc>
+              <a:buNone/>
+            </a:pPr>
+            <a:r>
+              <a:rPr lang="en-US" sz="900" dirty="0">
                 <a:solidFill>
                   <a:srgbClr val="3A4553"/>
                 </a:solidFill>
@@ -7604,15 +7836,444 @@
                 <a:ea typeface="Calibri" pitchFamily="34" charset="-122"/>
                 <a:cs typeface="Calibri" pitchFamily="34" charset="-120"/>
               </a:rPr>
-              <a:t>Formalized via NDA/exclusive tie-up alongside Tega in Mining — a real second leg, growing since FY22-23, though still small next to Tega/Escorts</a:t>
-            </a:r>
-            <a:endParaRPr lang="en-US" sz="980" dirty="0"/>
-          </a:p>
-        </p:txBody>
-      </p:sp>
-      <p:sp>
-        <p:nvSpPr>
-          <p:cNvPr id="12" name="Text 9"/>
+              <a:t>~₹40/kg → ~₹59/kg average</a:t>
+            </a:r>
+            <a:endParaRPr lang="en-US" sz="900" dirty="0"/>
+          </a:p>
+        </p:txBody>
+      </p:sp>
+      <p:sp>
+        <p:nvSpPr>
+          <p:cNvPr id="16" name="Shape 14"/>
+          <p:cNvSpPr/>
+          <p:nvPr/>
+        </p:nvSpPr>
+        <p:spPr>
+          <a:xfrm>
+            <a:off x="9075191" y="1737360"/>
+            <a:ext cx="2567864" cy="1600200"/>
+          </a:xfrm>
+          <a:prstGeom prst="roundRect">
+            <a:avLst>
+              <a:gd name="adj" fmla="val 4571"/>
+            </a:avLst>
+          </a:prstGeom>
+          <a:solidFill>
+            <a:srgbClr val="EDF5EF"/>
+          </a:solidFill>
+          <a:ln/>
+        </p:spPr>
+      </p:sp>
+      <p:sp>
+        <p:nvSpPr>
+          <p:cNvPr id="17" name="Text 15"/>
+          <p:cNvSpPr/>
+          <p:nvPr/>
+        </p:nvSpPr>
+        <p:spPr>
+          <a:xfrm>
+            <a:off x="9239783" y="1874520"/>
+            <a:ext cx="2238680" cy="502920"/>
+          </a:xfrm>
+          <a:prstGeom prst="rect">
+            <a:avLst/>
+          </a:prstGeom>
+          <a:noFill/>
+          <a:ln/>
+        </p:spPr>
+        <p:txBody>
+          <a:bodyPr wrap="square" lIns="0" tIns="0" rIns="0" bIns="0" rtlCol="0" anchor="ctr"/>
+          <a:lstStyle/>
+          <a:p>
+            <a:pPr indent="0" marL="0">
+              <a:buNone/>
+            </a:pPr>
+            <a:r>
+              <a:rPr lang="en-US" sz="2400" b="1" dirty="0">
+                <a:solidFill>
+                  <a:srgbClr val="3F8F5F"/>
+                </a:solidFill>
+                <a:latin typeface="Cambria" pitchFamily="34" charset="0"/>
+                <a:ea typeface="Cambria" pitchFamily="34" charset="-122"/>
+                <a:cs typeface="Cambria" pitchFamily="34" charset="-120"/>
+              </a:rPr>
+              <a:t>8+ yrs</a:t>
+            </a:r>
+            <a:endParaRPr lang="en-US" sz="2400" dirty="0"/>
+          </a:p>
+        </p:txBody>
+      </p:sp>
+      <p:sp>
+        <p:nvSpPr>
+          <p:cNvPr id="18" name="Text 16"/>
+          <p:cNvSpPr/>
+          <p:nvPr/>
+        </p:nvSpPr>
+        <p:spPr>
+          <a:xfrm>
+            <a:off x="9239783" y="2395728"/>
+            <a:ext cx="2238680" cy="502920"/>
+          </a:xfrm>
+          <a:prstGeom prst="rect">
+            <a:avLst/>
+          </a:prstGeom>
+          <a:noFill/>
+          <a:ln/>
+        </p:spPr>
+        <p:txBody>
+          <a:bodyPr wrap="square" lIns="0" tIns="0" rIns="0" bIns="0" rtlCol="0" anchor="ctr"/>
+          <a:lstStyle/>
+          <a:p>
+            <a:pPr indent="0" marL="0">
+              <a:lnSpc>
+                <a:spcPct val="105000"/>
+              </a:lnSpc>
+              <a:buNone/>
+            </a:pPr>
+            <a:r>
+              <a:rPr lang="en-US" sz="1030" b="1" dirty="0">
+                <a:solidFill>
+                  <a:srgbClr val="1C1F26"/>
+                </a:solidFill>
+                <a:latin typeface="Calibri" pitchFamily="34" charset="0"/>
+                <a:ea typeface="Calibri" pitchFamily="34" charset="-122"/>
+                <a:cs typeface="Calibri" pitchFamily="34" charset="-120"/>
+              </a:rPr>
+              <a:t>Tenure of several anchor accounts</a:t>
+            </a:r>
+            <a:endParaRPr lang="en-US" sz="1030" dirty="0"/>
+          </a:p>
+        </p:txBody>
+      </p:sp>
+      <p:sp>
+        <p:nvSpPr>
+          <p:cNvPr id="19" name="Text 17"/>
+          <p:cNvSpPr/>
+          <p:nvPr/>
+        </p:nvSpPr>
+        <p:spPr>
+          <a:xfrm>
+            <a:off x="9239783" y="2889504"/>
+            <a:ext cx="2238680" cy="411480"/>
+          </a:xfrm>
+          <a:prstGeom prst="rect">
+            <a:avLst/>
+          </a:prstGeom>
+          <a:noFill/>
+          <a:ln/>
+        </p:spPr>
+        <p:txBody>
+          <a:bodyPr wrap="square" lIns="0" tIns="0" rIns="0" bIns="0" rtlCol="0" anchor="ctr"/>
+          <a:lstStyle/>
+          <a:p>
+            <a:pPr indent="0" marL="0">
+              <a:lnSpc>
+                <a:spcPct val="105000"/>
+              </a:lnSpc>
+              <a:buNone/>
+            </a:pPr>
+            <a:r>
+              <a:rPr lang="en-US" sz="900" dirty="0">
+                <a:solidFill>
+                  <a:srgbClr val="3A4553"/>
+                </a:solidFill>
+                <a:latin typeface="Calibri" pitchFamily="34" charset="0"/>
+                <a:ea typeface="Calibri" pitchFamily="34" charset="-122"/>
+                <a:cs typeface="Calibri" pitchFamily="34" charset="-120"/>
+              </a:rPr>
+              <a:t>BEML, Escort, Tega, Tata Metaliks tracked since FY17-18</a:t>
+            </a:r>
+            <a:endParaRPr lang="en-US" sz="900" dirty="0"/>
+          </a:p>
+        </p:txBody>
+      </p:sp>
+      <p:sp>
+        <p:nvSpPr>
+          <p:cNvPr id="20" name="Shape 18"/>
+          <p:cNvSpPr/>
+          <p:nvPr/>
+        </p:nvSpPr>
+        <p:spPr>
+          <a:xfrm>
+            <a:off x="548640" y="3611880"/>
+            <a:ext cx="5364328" cy="2331720"/>
+          </a:xfrm>
+          <a:prstGeom prst="roundRect">
+            <a:avLst>
+              <a:gd name="adj" fmla="val 3137"/>
+            </a:avLst>
+          </a:prstGeom>
+          <a:solidFill>
+            <a:srgbClr val="F4F5F7"/>
+          </a:solidFill>
+          <a:ln/>
+        </p:spPr>
+      </p:sp>
+      <p:sp>
+        <p:nvSpPr>
+          <p:cNvPr id="21" name="Text 19"/>
+          <p:cNvSpPr/>
+          <p:nvPr/>
+        </p:nvSpPr>
+        <p:spPr>
+          <a:xfrm>
+            <a:off x="804672" y="3794760"/>
+            <a:ext cx="4852264" cy="274320"/>
+          </a:xfrm>
+          <a:prstGeom prst="rect">
+            <a:avLst/>
+          </a:prstGeom>
+          <a:noFill/>
+          <a:ln/>
+        </p:spPr>
+        <p:txBody>
+          <a:bodyPr wrap="square" lIns="0" tIns="0" rIns="0" bIns="0" rtlCol="0" anchor="ctr"/>
+          <a:lstStyle/>
+          <a:p>
+            <a:pPr indent="0" marL="0">
+              <a:buNone/>
+            </a:pPr>
+            <a:r>
+              <a:rPr lang="en-US" sz="1000" b="1" spc="100" kern="0" dirty="0">
+                <a:solidFill>
+                  <a:srgbClr val="3F8F5F"/>
+                </a:solidFill>
+                <a:latin typeface="Calibri" pitchFamily="34" charset="0"/>
+                <a:ea typeface="Calibri" pitchFamily="34" charset="-122"/>
+                <a:cs typeface="Calibri" pitchFamily="34" charset="-120"/>
+              </a:rPr>
+              <a:t>BALANCE SHEET: ON PACE TO CROSS ZERO</a:t>
+            </a:r>
+            <a:endParaRPr lang="en-US" sz="1000" dirty="0"/>
+          </a:p>
+        </p:txBody>
+      </p:sp>
+      <p:sp>
+        <p:nvSpPr>
+          <p:cNvPr id="22" name="Text 20"/>
+          <p:cNvSpPr/>
+          <p:nvPr/>
+        </p:nvSpPr>
+        <p:spPr>
+          <a:xfrm>
+            <a:off x="804672" y="4096512"/>
+            <a:ext cx="4852264" cy="1737360"/>
+          </a:xfrm>
+          <a:prstGeom prst="rect">
+            <a:avLst/>
+          </a:prstGeom>
+          <a:noFill/>
+          <a:ln/>
+        </p:spPr>
+        <p:txBody>
+          <a:bodyPr wrap="square" lIns="0" tIns="0" rIns="0" bIns="0" rtlCol="0" anchor="ctr"/>
+          <a:lstStyle/>
+          <a:p>
+            <a:pPr indent="0" marL="0">
+              <a:lnSpc>
+                <a:spcPct val="120000"/>
+              </a:lnSpc>
+              <a:buNone/>
+            </a:pPr>
+            <a:r>
+              <a:rPr lang="en-US" sz="1000" dirty="0">
+                <a:solidFill>
+                  <a:srgbClr val="1C1F26"/>
+                </a:solidFill>
+                <a:latin typeface="Calibri" pitchFamily="34" charset="0"/>
+                <a:ea typeface="Calibri" pitchFamily="34" charset="-122"/>
+                <a:cs typeface="Calibri" pitchFamily="34" charset="-120"/>
+              </a:rPr>
+              <a:t>Net worth has improved in every audited year since FY22 — not a one-off recovery. At the FY24-25 pace (~₹1.4 Cr/yr), the company crosses into positive net worth around FY26. That is a real, trackable milestone: the moment Datre stops being balance-sheet-insolvent on paper, four years after the Covid-era trough.</a:t>
+            </a:r>
+            <a:endParaRPr lang="en-US" sz="1000" dirty="0"/>
+          </a:p>
+        </p:txBody>
+      </p:sp>
+      <p:sp>
+        <p:nvSpPr>
+          <p:cNvPr id="23" name="Shape 21"/>
+          <p:cNvSpPr/>
+          <p:nvPr/>
+        </p:nvSpPr>
+        <p:spPr>
+          <a:xfrm>
+            <a:off x="6278728" y="3611880"/>
+            <a:ext cx="5364328" cy="2331720"/>
+          </a:xfrm>
+          <a:prstGeom prst="roundRect">
+            <a:avLst>
+              <a:gd name="adj" fmla="val 3137"/>
+            </a:avLst>
+          </a:prstGeom>
+          <a:solidFill>
+            <a:srgbClr val="F4F5F7"/>
+          </a:solidFill>
+          <a:ln/>
+        </p:spPr>
+      </p:sp>
+      <p:sp>
+        <p:nvSpPr>
+          <p:cNvPr id="24" name="Text 22"/>
+          <p:cNvSpPr/>
+          <p:nvPr/>
+        </p:nvSpPr>
+        <p:spPr>
+          <a:xfrm>
+            <a:off x="6534760" y="3794760"/>
+            <a:ext cx="4852264" cy="274320"/>
+          </a:xfrm>
+          <a:prstGeom prst="rect">
+            <a:avLst/>
+          </a:prstGeom>
+          <a:noFill/>
+          <a:ln/>
+        </p:spPr>
+        <p:txBody>
+          <a:bodyPr wrap="square" lIns="0" tIns="0" rIns="0" bIns="0" rtlCol="0" anchor="ctr"/>
+          <a:lstStyle/>
+          <a:p>
+            <a:pPr indent="0" marL="0">
+              <a:buNone/>
+            </a:pPr>
+            <a:r>
+              <a:rPr lang="en-US" sz="1000" b="1" spc="100" kern="0" dirty="0">
+                <a:solidFill>
+                  <a:srgbClr val="3F8F5F"/>
+                </a:solidFill>
+                <a:latin typeface="Calibri" pitchFamily="34" charset="0"/>
+                <a:ea typeface="Calibri" pitchFamily="34" charset="-122"/>
+                <a:cs typeface="Calibri" pitchFamily="34" charset="-120"/>
+              </a:rPr>
+              <a:t>NOT JUST A GOOD YEAR — A REBUILT CUSTOMER BASE</a:t>
+            </a:r>
+            <a:endParaRPr lang="en-US" sz="1000" dirty="0"/>
+          </a:p>
+        </p:txBody>
+      </p:sp>
+      <p:sp>
+        <p:nvSpPr>
+          <p:cNvPr id="25" name="Text 23"/>
+          <p:cNvSpPr/>
+          <p:nvPr/>
+        </p:nvSpPr>
+        <p:spPr>
+          <a:xfrm>
+            <a:off x="6534760" y="4096512"/>
+            <a:ext cx="4852264" cy="1737360"/>
+          </a:xfrm>
+          <a:prstGeom prst="rect">
+            <a:avLst/>
+          </a:prstGeom>
+          <a:noFill/>
+          <a:ln/>
+        </p:spPr>
+        <p:txBody>
+          <a:bodyPr wrap="square" lIns="0" tIns="0" rIns="0" bIns="0" rtlCol="0" anchor="ctr"/>
+          <a:lstStyle/>
+          <a:p>
+            <a:pPr indent="0" marL="0">
+              <a:lnSpc>
+                <a:spcPct val="120000"/>
+              </a:lnSpc>
+              <a:buNone/>
+            </a:pPr>
+            <a:r>
+              <a:rPr lang="en-US" sz="1000" dirty="0">
+                <a:solidFill>
+                  <a:srgbClr val="1C1F26"/>
+                </a:solidFill>
+                <a:latin typeface="Calibri" pitchFamily="34" charset="0"/>
+                <a:ea typeface="Calibri" pitchFamily="34" charset="-122"/>
+                <a:cs typeface="Calibri" pitchFamily="34" charset="-120"/>
+              </a:rPr>
+              <a:t>Internal contribution records track named OEM accounts — BEML, Escort, Tega, Bhushan/Tata Steel, IISCO, Metco, Neo Metaliks, Paharpur, Tata Metaliks — back to FY2017-18. The current profitability isn't built on a handful of one-off wins; it sits on relationships that have held, and in Tega's case deepened, across an 8-year span that includes the FY21 near-failure.</a:t>
+            </a:r>
+            <a:endParaRPr lang="en-US" sz="1000" dirty="0"/>
+          </a:p>
+        </p:txBody>
+      </p:sp>
+      <p:sp>
+        <p:nvSpPr>
+          <p:cNvPr id="26" name="Text 24"/>
+          <p:cNvSpPr/>
+          <p:nvPr/>
+        </p:nvSpPr>
+        <p:spPr>
+          <a:xfrm>
+            <a:off x="548640" y="6108192"/>
+            <a:ext cx="11094415" cy="320040"/>
+          </a:xfrm>
+          <a:prstGeom prst="rect">
+            <a:avLst/>
+          </a:prstGeom>
+          <a:noFill/>
+          <a:ln/>
+        </p:spPr>
+        <p:txBody>
+          <a:bodyPr wrap="square" lIns="0" tIns="0" rIns="0" bIns="0" rtlCol="0" anchor="ctr"/>
+          <a:lstStyle/>
+          <a:p>
+            <a:pPr indent="0" marL="0">
+              <a:buNone/>
+            </a:pPr>
+            <a:r>
+              <a:rPr lang="en-US" sz="900" i="1" dirty="0">
+                <a:solidFill>
+                  <a:srgbClr val="6B7684"/>
+                </a:solidFill>
+                <a:latin typeface="Calibri" pitchFamily="34" charset="0"/>
+                <a:ea typeface="Calibri" pitchFamily="34" charset="-122"/>
+                <a:cs typeface="Calibri" pitchFamily="34" charset="-120"/>
+              </a:rPr>
+              <a:t>Read alongside slides 12-14: the progress is real and multi-year, but customer concentration, quality trend and the FY26-27 slowdown are real too. Both things are true at once.</a:t>
+            </a:r>
+            <a:endParaRPr lang="en-US" sz="900" dirty="0"/>
+          </a:p>
+        </p:txBody>
+      </p:sp>
+      <p:sp>
+        <p:nvSpPr>
+          <p:cNvPr id="27" name="Text 25"/>
+          <p:cNvSpPr/>
+          <p:nvPr/>
+        </p:nvSpPr>
+        <p:spPr>
+          <a:xfrm>
+            <a:off x="548640" y="6400800"/>
+            <a:ext cx="11094415" cy="256032"/>
+          </a:xfrm>
+          <a:prstGeom prst="rect">
+            <a:avLst/>
+          </a:prstGeom>
+          <a:noFill/>
+          <a:ln/>
+        </p:spPr>
+        <p:txBody>
+          <a:bodyPr wrap="square" lIns="0" tIns="0" rIns="0" bIns="0" rtlCol="0" anchor="ctr"/>
+          <a:lstStyle/>
+          <a:p>
+            <a:pPr indent="0" marL="0">
+              <a:buNone/>
+            </a:pPr>
+            <a:r>
+              <a:rPr lang="en-US" sz="750" i="1" dirty="0">
+                <a:solidFill>
+                  <a:srgbClr val="6B7684"/>
+                </a:solidFill>
+                <a:latin typeface="Calibri" pitchFamily="34" charset="0"/>
+                <a:ea typeface="Calibri" pitchFamily="34" charset="-122"/>
+                <a:cs typeface="Calibri" pitchFamily="34" charset="-120"/>
+              </a:rPr>
+              <a:t>Source: audited balance sheets FY22-FY25; internal contribution-tracking records, FY2017-18 through FY2025-26; Aug 2025 order-book analysis (Tega ₹/kg).</a:t>
+            </a:r>
+            <a:endParaRPr lang="en-US" sz="750" dirty="0"/>
+          </a:p>
+        </p:txBody>
+      </p:sp>
+      <p:sp>
+        <p:nvSpPr>
+          <p:cNvPr id="28" name="Text 26"/>
           <p:cNvSpPr/>
           <p:nvPr/>
         </p:nvSpPr>
@@ -7651,7 +8312,7 @@
       </p:sp>
       <p:sp>
         <p:nvSpPr>
-          <p:cNvPr id="13" name="Text 10"/>
+          <p:cNvPr id="29" name="Text 27"/>
           <p:cNvSpPr/>
           <p:nvPr/>
         </p:nvSpPr>
@@ -7753,7 +8414,7 @@
                 <a:ea typeface="Calibri" pitchFamily="34" charset="-122"/>
                 <a:cs typeface="Calibri" pitchFamily="34" charset="-120"/>
               </a:rPr>
-              <a:t>CRITICAL ANALYSIS — OPERATIONS</a:t>
+              <a:t>CRITICAL ANALYSIS — CONCENTRATION RISK</a:t>
             </a:r>
             <a:endParaRPr lang="en-US" sz="1100" dirty="0"/>
           </a:p>
@@ -7792,7 +8453,7 @@
                 <a:ea typeface="Cambria" pitchFamily="34" charset="-122"/>
                 <a:cs typeface="Cambria" pitchFamily="34" charset="-120"/>
               </a:rPr>
-              <a:t>Rejection rate has trended the wrong way for four periods</a:t>
+              <a:t>Two customers now drive roughly 80% of contribution</a:t>
             </a:r>
             <a:endParaRPr lang="en-US" sz="3000" dirty="0"/>
           </a:p>
@@ -7806,7 +8467,7 @@
         </p:nvGraphicFramePr>
         <p:xfrm>
           <a:off x="548640" y="1737360"/>
-          <a:ext cx="7315200" cy="3566160"/>
+          <a:ext cx="6126480" cy="3200400"/>
         </p:xfrm>
         <a:graphic xmlns:a="http://schemas.openxmlformats.org/drawingml/2006/main">
           <a:graphicData uri="http://schemas.openxmlformats.org/drawingml/2006/chart">
@@ -7822,8 +8483,8 @@
         </p:nvSpPr>
         <p:spPr>
           <a:xfrm>
-            <a:off x="548640" y="5394960"/>
-            <a:ext cx="7315200" cy="365760"/>
+            <a:off x="548640" y="5074920"/>
+            <a:ext cx="6126480" cy="457200"/>
           </a:xfrm>
           <a:prstGeom prst="rect">
             <a:avLst/>
@@ -7847,7 +8508,7 @@
                 <a:ea typeface="Calibri" pitchFamily="34" charset="-122"/>
                 <a:cs typeface="Calibri" pitchFamily="34" charset="-120"/>
               </a:rPr>
-              <a:t>Source: management MIS, production &amp; rejection registers, FY22-23 through FY26-27 (4 months).</a:t>
+              <a:t>Source: company financial statements &amp; internal analysis, FY21-FY24 actuals, FY26 management projection.</a:t>
             </a:r>
             <a:endParaRPr lang="en-US" sz="800" dirty="0"/>
           </a:p>
@@ -7855,36 +8516,14 @@
       </p:sp>
       <p:sp>
         <p:nvSpPr>
-          <p:cNvPr id="6" name="Shape 3"/>
-          <p:cNvSpPr/>
-          <p:nvPr/>
-        </p:nvSpPr>
-        <p:spPr>
-          <a:xfrm>
-            <a:off x="8138160" y="1737360"/>
-            <a:ext cx="3504895" cy="4023360"/>
-          </a:xfrm>
-          <a:prstGeom prst="roundRect">
-            <a:avLst>
-              <a:gd name="adj" fmla="val 2087"/>
-            </a:avLst>
-          </a:prstGeom>
-          <a:solidFill>
-            <a:srgbClr val="F4F5F7"/>
-          </a:solidFill>
-          <a:ln/>
-        </p:spPr>
-      </p:sp>
-      <p:sp>
-        <p:nvSpPr>
-          <p:cNvPr id="7" name="Text 4"/>
-          <p:cNvSpPr/>
-          <p:nvPr/>
-        </p:nvSpPr>
-        <p:spPr>
-          <a:xfrm>
-            <a:off x="8366760" y="1920240"/>
-            <a:ext cx="3047695" cy="274320"/>
+          <p:cNvPr id="6" name="Text 3"/>
+          <p:cNvSpPr/>
+          <p:nvPr/>
+        </p:nvSpPr>
+        <p:spPr>
+          <a:xfrm>
+            <a:off x="6949440" y="1737360"/>
+            <a:ext cx="4693615" cy="365760"/>
           </a:xfrm>
           <a:prstGeom prst="rect">
             <a:avLst/>
@@ -7900,108 +8539,30 @@
               <a:buNone/>
             </a:pPr>
             <a:r>
-              <a:rPr lang="en-US" sz="1000" b="1" spc="100" kern="0" dirty="0">
-                <a:solidFill>
-                  <a:srgbClr val="D9622B"/>
-                </a:solidFill>
-                <a:latin typeface="Calibri" pitchFamily="34" charset="0"/>
-                <a:ea typeface="Calibri" pitchFamily="34" charset="-122"/>
-                <a:cs typeface="Calibri" pitchFamily="34" charset="-120"/>
-              </a:rPr>
-              <a:t>ALSO RISING</a:t>
-            </a:r>
-            <a:endParaRPr lang="en-US" sz="1000" dirty="0"/>
-          </a:p>
-        </p:txBody>
-      </p:sp>
-      <p:sp>
-        <p:nvSpPr>
-          <p:cNvPr id="8" name="Text 5"/>
-          <p:cNvSpPr/>
-          <p:nvPr/>
-        </p:nvSpPr>
-        <p:spPr>
-          <a:xfrm>
-            <a:off x="8366760" y="2212848"/>
-            <a:ext cx="3047695" cy="274320"/>
-          </a:xfrm>
-          <a:prstGeom prst="rect">
-            <a:avLst/>
-          </a:prstGeom>
-          <a:noFill/>
-          <a:ln/>
-        </p:spPr>
-        <p:txBody>
-          <a:bodyPr wrap="square" lIns="0" tIns="0" rIns="0" bIns="0" rtlCol="0" anchor="ctr"/>
-          <a:lstStyle/>
-          <a:p>
-            <a:pPr indent="0" marL="0">
-              <a:buNone/>
-            </a:pPr>
-            <a:r>
-              <a:rPr lang="en-US" sz="1100" b="1" dirty="0">
+              <a:rPr lang="en-US" sz="1600" b="1" dirty="0">
                 <a:solidFill>
                   <a:srgbClr val="1C1F26"/>
-                </a:solidFill>
-                <a:latin typeface="Calibri" pitchFamily="34" charset="0"/>
-                <a:ea typeface="Calibri" pitchFamily="34" charset="-122"/>
-                <a:cs typeface="Calibri" pitchFamily="34" charset="-120"/>
-              </a:rPr>
-              <a:t>Fixed costs as % of net sales</a:t>
-            </a:r>
-            <a:endParaRPr lang="en-US" sz="1100" dirty="0"/>
-          </a:p>
-        </p:txBody>
-      </p:sp>
-      <p:sp>
-        <p:nvSpPr>
-          <p:cNvPr id="9" name="Text 6"/>
-          <p:cNvSpPr/>
-          <p:nvPr/>
-        </p:nvSpPr>
-        <p:spPr>
-          <a:xfrm>
-            <a:off x="8366760" y="2487168"/>
-            <a:ext cx="3047695" cy="365760"/>
-          </a:xfrm>
-          <a:prstGeom prst="rect">
-            <a:avLst/>
-          </a:prstGeom>
-          <a:noFill/>
-          <a:ln/>
-        </p:spPr>
-        <p:txBody>
-          <a:bodyPr wrap="square" lIns="0" tIns="0" rIns="0" bIns="0" rtlCol="0" anchor="ctr"/>
-          <a:lstStyle/>
-          <a:p>
-            <a:pPr indent="0" marL="0">
-              <a:buNone/>
-            </a:pPr>
-            <a:r>
-              <a:rPr lang="en-US" sz="1700" b="1" dirty="0">
-                <a:solidFill>
-                  <a:srgbClr val="B8453F"/>
                 </a:solidFill>
                 <a:latin typeface="Cambria" pitchFamily="34" charset="0"/>
                 <a:ea typeface="Cambria" pitchFamily="34" charset="-122"/>
                 <a:cs typeface="Cambria" pitchFamily="34" charset="-120"/>
               </a:rPr>
-              <a:t>16.06%  →  17.09%</a:t>
-            </a:r>
-            <a:endParaRPr lang="en-US" sz="1700" dirty="0"/>
-          </a:p>
-        </p:txBody>
-      </p:sp>
-      <p:sp>
-        <p:nvSpPr>
-          <p:cNvPr id="10" name="Text 7"/>
-          <p:cNvSpPr/>
-          <p:nvPr/>
-        </p:nvSpPr>
-        <p:spPr>
-          <a:xfrm>
-            <a:off x="8366760" y="2880360"/>
-            <a:ext cx="3047695" cy="457200"/>
+              <a:t>~80%</a:t>
+            </a:r>
+            <a:endParaRPr lang="en-US" sz="1600" dirty="0"/>
+          </a:p>
+        </p:txBody>
+      </p:sp>
+      <p:sp>
+        <p:nvSpPr>
+          <p:cNvPr id="7" name="Text 4"/>
+          <p:cNvSpPr/>
+          <p:nvPr/>
+        </p:nvSpPr>
+        <p:spPr>
+          <a:xfrm>
+            <a:off x="6949440" y="2103120"/>
+            <a:ext cx="4693615" cy="822960"/>
           </a:xfrm>
           <a:prstGeom prst="rect">
             <a:avLst/>
@@ -8015,12 +8576,12 @@
           <a:p>
             <a:pPr indent="0" marL="0">
               <a:lnSpc>
-                <a:spcPct val="110000"/>
+                <a:spcPct val="115000"/>
               </a:lnSpc>
               <a:buNone/>
             </a:pPr>
             <a:r>
-              <a:rPr lang="en-US" sz="930" dirty="0">
+              <a:rPr lang="en-US" sz="980" dirty="0">
                 <a:solidFill>
                   <a:srgbClr val="3A4553"/>
                 </a:solidFill>
@@ -8028,45 +8589,61 @@
                 <a:ea typeface="Calibri" pitchFamily="34" charset="-122"/>
                 <a:cs typeface="Calibri" pitchFamily="34" charset="-120"/>
               </a:rPr>
-              <a:t>FY23-24 to FY24-25 — rose even in the year sales dipped.</a:t>
-            </a:r>
-            <a:endParaRPr lang="en-US" sz="930" dirty="0"/>
-          </a:p>
-        </p:txBody>
-      </p:sp>
-      <p:sp>
-        <p:nvSpPr>
-          <p:cNvPr id="11" name="Shape 8"/>
-          <p:cNvSpPr/>
-          <p:nvPr/>
-        </p:nvSpPr>
-        <p:spPr>
-          <a:xfrm>
-            <a:off x="8366760" y="3520440"/>
-            <a:ext cx="3047695" cy="0"/>
-          </a:xfrm>
-          <a:prstGeom prst="line">
-            <a:avLst/>
-          </a:prstGeom>
-          <a:noFill/>
-          <a:ln w="12700">
-            <a:solidFill>
-              <a:srgbClr val="E1E4E9"/>
-            </a:solidFill>
-            <a:prstDash val="solid"/>
-          </a:ln>
-        </p:spPr>
-      </p:sp>
-      <p:sp>
-        <p:nvSpPr>
-          <p:cNvPr id="12" name="Text 9"/>
-          <p:cNvSpPr/>
-          <p:nvPr/>
-        </p:nvSpPr>
-        <p:spPr>
-          <a:xfrm>
-            <a:off x="8366760" y="3703320"/>
-            <a:ext cx="3047695" cy="1920240"/>
+              <a:t>Tega + Escorts share of contribution — the deep OEM integration that is also the single largest risk on this deck</a:t>
+            </a:r>
+            <a:endParaRPr lang="en-US" sz="980" dirty="0"/>
+          </a:p>
+        </p:txBody>
+      </p:sp>
+      <p:sp>
+        <p:nvSpPr>
+          <p:cNvPr id="8" name="Text 5"/>
+          <p:cNvSpPr/>
+          <p:nvPr/>
+        </p:nvSpPr>
+        <p:spPr>
+          <a:xfrm>
+            <a:off x="6949440" y="3108960"/>
+            <a:ext cx="4693615" cy="365760"/>
+          </a:xfrm>
+          <a:prstGeom prst="rect">
+            <a:avLst/>
+          </a:prstGeom>
+          <a:noFill/>
+          <a:ln/>
+        </p:spPr>
+        <p:txBody>
+          <a:bodyPr wrap="square" lIns="0" tIns="0" rIns="0" bIns="0" rtlCol="0" anchor="ctr"/>
+          <a:lstStyle/>
+          <a:p>
+            <a:pPr indent="0" marL="0">
+              <a:buNone/>
+            </a:pPr>
+            <a:r>
+              <a:rPr lang="en-US" sz="1600" b="1" dirty="0">
+                <a:solidFill>
+                  <a:srgbClr val="1C1F26"/>
+                </a:solidFill>
+                <a:latin typeface="Cambria" pitchFamily="34" charset="0"/>
+                <a:ea typeface="Cambria" pitchFamily="34" charset="-122"/>
+                <a:cs typeface="Cambria" pitchFamily="34" charset="-120"/>
+              </a:rPr>
+              <a:t>₹9.0 → ₹7.5 Cr</a:t>
+            </a:r>
+            <a:endParaRPr lang="en-US" sz="1600" dirty="0"/>
+          </a:p>
+        </p:txBody>
+      </p:sp>
+      <p:sp>
+        <p:nvSpPr>
+          <p:cNvPr id="9" name="Text 6"/>
+          <p:cNvSpPr/>
+          <p:nvPr/>
+        </p:nvSpPr>
+        <p:spPr>
+          <a:xfrm>
+            <a:off x="6949440" y="3474720"/>
+            <a:ext cx="4693615" cy="822960"/>
           </a:xfrm>
           <a:prstGeom prst="rect">
             <a:avLst/>
@@ -8080,28 +8657,109 @@
           <a:p>
             <a:pPr indent="0" marL="0">
               <a:lnSpc>
-                <a:spcPct val="120000"/>
+                <a:spcPct val="115000"/>
               </a:lnSpc>
               <a:buNone/>
             </a:pPr>
             <a:r>
-              <a:rPr lang="en-US" sz="1000" dirty="0">
+              <a:rPr lang="en-US" sz="980" dirty="0">
+                <a:solidFill>
+                  <a:srgbClr val="3A4553"/>
+                </a:solidFill>
+                <a:latin typeface="Calibri" pitchFamily="34" charset="0"/>
+                <a:ea typeface="Calibri" pitchFamily="34" charset="-122"/>
+                <a:cs typeface="Calibri" pitchFamily="34" charset="-120"/>
+              </a:rPr>
+              <a:t>Tega's small-casting orders declined YoY, FY23-24 to FY24-25</a:t>
+            </a:r>
+            <a:endParaRPr lang="en-US" sz="980" dirty="0"/>
+          </a:p>
+        </p:txBody>
+      </p:sp>
+      <p:sp>
+        <p:nvSpPr>
+          <p:cNvPr id="10" name="Text 7"/>
+          <p:cNvSpPr/>
+          <p:nvPr/>
+        </p:nvSpPr>
+        <p:spPr>
+          <a:xfrm>
+            <a:off x="6949440" y="4480560"/>
+            <a:ext cx="4693615" cy="365760"/>
+          </a:xfrm>
+          <a:prstGeom prst="rect">
+            <a:avLst/>
+          </a:prstGeom>
+          <a:noFill/>
+          <a:ln/>
+        </p:spPr>
+        <p:txBody>
+          <a:bodyPr wrap="square" lIns="0" tIns="0" rIns="0" bIns="0" rtlCol="0" anchor="ctr"/>
+          <a:lstStyle/>
+          <a:p>
+            <a:pPr indent="0" marL="0">
+              <a:buNone/>
+            </a:pPr>
+            <a:r>
+              <a:rPr lang="en-US" sz="1600" b="1" dirty="0">
                 <a:solidFill>
                   <a:srgbClr val="1C1F26"/>
                 </a:solidFill>
-                <a:latin typeface="Calibri" pitchFamily="34" charset="0"/>
-                <a:ea typeface="Calibri" pitchFamily="34" charset="-122"/>
-                <a:cs typeface="Calibri" pitchFamily="34" charset="-120"/>
-              </a:rPr>
-              <a:t>This is not a one-off spike — it is the same quality-control theme recurring across three fiscal years despite a well-equipped testing lab (slide 8). It belongs on the same diligence list as the customer-concentration risk.</a:t>
-            </a:r>
-            <a:endParaRPr lang="en-US" sz="1000" dirty="0"/>
-          </a:p>
-        </p:txBody>
-      </p:sp>
-      <p:sp>
-        <p:nvSpPr>
-          <p:cNvPr id="13" name="Text 10"/>
+                <a:latin typeface="Cambria" pitchFamily="34" charset="0"/>
+                <a:ea typeface="Cambria" pitchFamily="34" charset="-122"/>
+                <a:cs typeface="Cambria" pitchFamily="34" charset="-120"/>
+              </a:rPr>
+              <a:t>Thejo Engineering</a:t>
+            </a:r>
+            <a:endParaRPr lang="en-US" sz="1600" dirty="0"/>
+          </a:p>
+        </p:txBody>
+      </p:sp>
+      <p:sp>
+        <p:nvSpPr>
+          <p:cNvPr id="11" name="Text 8"/>
+          <p:cNvSpPr/>
+          <p:nvPr/>
+        </p:nvSpPr>
+        <p:spPr>
+          <a:xfrm>
+            <a:off x="6949440" y="4846320"/>
+            <a:ext cx="4693615" cy="822960"/>
+          </a:xfrm>
+          <a:prstGeom prst="rect">
+            <a:avLst/>
+          </a:prstGeom>
+          <a:noFill/>
+          <a:ln/>
+        </p:spPr>
+        <p:txBody>
+          <a:bodyPr wrap="square" lIns="0" tIns="0" rIns="0" bIns="0" rtlCol="0" anchor="ctr"/>
+          <a:lstStyle/>
+          <a:p>
+            <a:pPr indent="0" marL="0">
+              <a:lnSpc>
+                <a:spcPct val="115000"/>
+              </a:lnSpc>
+              <a:buNone/>
+            </a:pPr>
+            <a:r>
+              <a:rPr lang="en-US" sz="980" dirty="0">
+                <a:solidFill>
+                  <a:srgbClr val="3A4553"/>
+                </a:solidFill>
+                <a:latin typeface="Calibri" pitchFamily="34" charset="0"/>
+                <a:ea typeface="Calibri" pitchFamily="34" charset="-122"/>
+                <a:cs typeface="Calibri" pitchFamily="34" charset="-120"/>
+              </a:rPr>
+              <a:t>Formalized via NDA/exclusive tie-up alongside Tega in Mining — a real second leg, growing since FY22-23, though still small next to Tega/Escorts</a:t>
+            </a:r>
+            <a:endParaRPr lang="en-US" sz="980" dirty="0"/>
+          </a:p>
+        </p:txBody>
+      </p:sp>
+      <p:sp>
+        <p:nvSpPr>
+          <p:cNvPr id="12" name="Text 9"/>
           <p:cNvSpPr/>
           <p:nvPr/>
         </p:nvSpPr>
@@ -8140,7 +8798,7 @@
       </p:sp>
       <p:sp>
         <p:nvSpPr>
-          <p:cNvPr id="14" name="Text 11"/>
+          <p:cNvPr id="13" name="Text 10"/>
           <p:cNvSpPr/>
           <p:nvPr/>
         </p:nvSpPr>
@@ -8242,6 +8900,495 @@
                 <a:ea typeface="Calibri" pitchFamily="34" charset="-122"/>
                 <a:cs typeface="Calibri" pitchFamily="34" charset="-120"/>
               </a:rPr>
+              <a:t>CRITICAL ANALYSIS — OPERATIONS</a:t>
+            </a:r>
+            <a:endParaRPr lang="en-US" sz="1100" dirty="0"/>
+          </a:p>
+        </p:txBody>
+      </p:sp>
+      <p:sp>
+        <p:nvSpPr>
+          <p:cNvPr id="3" name="Text 1"/>
+          <p:cNvSpPr/>
+          <p:nvPr/>
+        </p:nvSpPr>
+        <p:spPr>
+          <a:xfrm>
+            <a:off x="548640" y="841248"/>
+            <a:ext cx="11094415" cy="685800"/>
+          </a:xfrm>
+          <a:prstGeom prst="rect">
+            <a:avLst/>
+          </a:prstGeom>
+          <a:noFill/>
+          <a:ln/>
+        </p:spPr>
+        <p:txBody>
+          <a:bodyPr wrap="square" lIns="0" tIns="0" rIns="0" bIns="0" rtlCol="0" anchor="ctr"/>
+          <a:lstStyle/>
+          <a:p>
+            <a:pPr algn="l" indent="0" marL="0">
+              <a:buNone/>
+            </a:pPr>
+            <a:r>
+              <a:rPr lang="en-US" sz="3000" b="1" dirty="0">
+                <a:solidFill>
+                  <a:srgbClr val="1C1F26"/>
+                </a:solidFill>
+                <a:latin typeface="Cambria" pitchFamily="34" charset="0"/>
+                <a:ea typeface="Cambria" pitchFamily="34" charset="-122"/>
+                <a:cs typeface="Cambria" pitchFamily="34" charset="-120"/>
+              </a:rPr>
+              <a:t>Rejection rate has trended the wrong way for four periods</a:t>
+            </a:r>
+            <a:endParaRPr lang="en-US" sz="3000" dirty="0"/>
+          </a:p>
+        </p:txBody>
+      </p:sp>
+      <p:graphicFrame>
+        <p:nvGraphicFramePr>
+          <p:cNvPr id="4" name="Chart 0" descr=""/>
+          <p:cNvGraphicFramePr/>
+          <p:nvPr/>
+        </p:nvGraphicFramePr>
+        <p:xfrm>
+          <a:off x="548640" y="1737360"/>
+          <a:ext cx="7315200" cy="3566160"/>
+        </p:xfrm>
+        <a:graphic xmlns:a="http://schemas.openxmlformats.org/drawingml/2006/main">
+          <a:graphicData uri="http://schemas.openxmlformats.org/drawingml/2006/chart">
+            <c:chart xmlns:c="http://schemas.openxmlformats.org/drawingml/2006/chart" r:id="rId1"/>
+          </a:graphicData>
+        </a:graphic>
+      </p:graphicFrame>
+      <p:sp>
+        <p:nvSpPr>
+          <p:cNvPr id="5" name="Text 2"/>
+          <p:cNvSpPr/>
+          <p:nvPr/>
+        </p:nvSpPr>
+        <p:spPr>
+          <a:xfrm>
+            <a:off x="548640" y="5394960"/>
+            <a:ext cx="7315200" cy="365760"/>
+          </a:xfrm>
+          <a:prstGeom prst="rect">
+            <a:avLst/>
+          </a:prstGeom>
+          <a:noFill/>
+          <a:ln/>
+        </p:spPr>
+        <p:txBody>
+          <a:bodyPr wrap="square" lIns="0" tIns="0" rIns="0" bIns="0" rtlCol="0" anchor="ctr"/>
+          <a:lstStyle/>
+          <a:p>
+            <a:pPr indent="0" marL="0">
+              <a:buNone/>
+            </a:pPr>
+            <a:r>
+              <a:rPr lang="en-US" sz="800" i="1" dirty="0">
+                <a:solidFill>
+                  <a:srgbClr val="6B7684"/>
+                </a:solidFill>
+                <a:latin typeface="Calibri" pitchFamily="34" charset="0"/>
+                <a:ea typeface="Calibri" pitchFamily="34" charset="-122"/>
+                <a:cs typeface="Calibri" pitchFamily="34" charset="-120"/>
+              </a:rPr>
+              <a:t>Source: management MIS, production &amp; rejection registers, FY22-23 through FY26-27 (4 months).</a:t>
+            </a:r>
+            <a:endParaRPr lang="en-US" sz="800" dirty="0"/>
+          </a:p>
+        </p:txBody>
+      </p:sp>
+      <p:sp>
+        <p:nvSpPr>
+          <p:cNvPr id="6" name="Shape 3"/>
+          <p:cNvSpPr/>
+          <p:nvPr/>
+        </p:nvSpPr>
+        <p:spPr>
+          <a:xfrm>
+            <a:off x="8138160" y="1737360"/>
+            <a:ext cx="3504895" cy="4023360"/>
+          </a:xfrm>
+          <a:prstGeom prst="roundRect">
+            <a:avLst>
+              <a:gd name="adj" fmla="val 2087"/>
+            </a:avLst>
+          </a:prstGeom>
+          <a:solidFill>
+            <a:srgbClr val="F4F5F7"/>
+          </a:solidFill>
+          <a:ln/>
+        </p:spPr>
+      </p:sp>
+      <p:sp>
+        <p:nvSpPr>
+          <p:cNvPr id="7" name="Text 4"/>
+          <p:cNvSpPr/>
+          <p:nvPr/>
+        </p:nvSpPr>
+        <p:spPr>
+          <a:xfrm>
+            <a:off x="8366760" y="1920240"/>
+            <a:ext cx="3047695" cy="274320"/>
+          </a:xfrm>
+          <a:prstGeom prst="rect">
+            <a:avLst/>
+          </a:prstGeom>
+          <a:noFill/>
+          <a:ln/>
+        </p:spPr>
+        <p:txBody>
+          <a:bodyPr wrap="square" lIns="0" tIns="0" rIns="0" bIns="0" rtlCol="0" anchor="ctr"/>
+          <a:lstStyle/>
+          <a:p>
+            <a:pPr indent="0" marL="0">
+              <a:buNone/>
+            </a:pPr>
+            <a:r>
+              <a:rPr lang="en-US" sz="1000" b="1" spc="100" kern="0" dirty="0">
+                <a:solidFill>
+                  <a:srgbClr val="D9622B"/>
+                </a:solidFill>
+                <a:latin typeface="Calibri" pitchFamily="34" charset="0"/>
+                <a:ea typeface="Calibri" pitchFamily="34" charset="-122"/>
+                <a:cs typeface="Calibri" pitchFamily="34" charset="-120"/>
+              </a:rPr>
+              <a:t>ALSO RISING</a:t>
+            </a:r>
+            <a:endParaRPr lang="en-US" sz="1000" dirty="0"/>
+          </a:p>
+        </p:txBody>
+      </p:sp>
+      <p:sp>
+        <p:nvSpPr>
+          <p:cNvPr id="8" name="Text 5"/>
+          <p:cNvSpPr/>
+          <p:nvPr/>
+        </p:nvSpPr>
+        <p:spPr>
+          <a:xfrm>
+            <a:off x="8366760" y="2212848"/>
+            <a:ext cx="3047695" cy="274320"/>
+          </a:xfrm>
+          <a:prstGeom prst="rect">
+            <a:avLst/>
+          </a:prstGeom>
+          <a:noFill/>
+          <a:ln/>
+        </p:spPr>
+        <p:txBody>
+          <a:bodyPr wrap="square" lIns="0" tIns="0" rIns="0" bIns="0" rtlCol="0" anchor="ctr"/>
+          <a:lstStyle/>
+          <a:p>
+            <a:pPr indent="0" marL="0">
+              <a:buNone/>
+            </a:pPr>
+            <a:r>
+              <a:rPr lang="en-US" sz="1100" b="1" dirty="0">
+                <a:solidFill>
+                  <a:srgbClr val="1C1F26"/>
+                </a:solidFill>
+                <a:latin typeface="Calibri" pitchFamily="34" charset="0"/>
+                <a:ea typeface="Calibri" pitchFamily="34" charset="-122"/>
+                <a:cs typeface="Calibri" pitchFamily="34" charset="-120"/>
+              </a:rPr>
+              <a:t>Fixed costs as % of net sales</a:t>
+            </a:r>
+            <a:endParaRPr lang="en-US" sz="1100" dirty="0"/>
+          </a:p>
+        </p:txBody>
+      </p:sp>
+      <p:sp>
+        <p:nvSpPr>
+          <p:cNvPr id="9" name="Text 6"/>
+          <p:cNvSpPr/>
+          <p:nvPr/>
+        </p:nvSpPr>
+        <p:spPr>
+          <a:xfrm>
+            <a:off x="8366760" y="2487168"/>
+            <a:ext cx="3047695" cy="365760"/>
+          </a:xfrm>
+          <a:prstGeom prst="rect">
+            <a:avLst/>
+          </a:prstGeom>
+          <a:noFill/>
+          <a:ln/>
+        </p:spPr>
+        <p:txBody>
+          <a:bodyPr wrap="square" lIns="0" tIns="0" rIns="0" bIns="0" rtlCol="0" anchor="ctr"/>
+          <a:lstStyle/>
+          <a:p>
+            <a:pPr indent="0" marL="0">
+              <a:buNone/>
+            </a:pPr>
+            <a:r>
+              <a:rPr lang="en-US" sz="1700" b="1" dirty="0">
+                <a:solidFill>
+                  <a:srgbClr val="B8453F"/>
+                </a:solidFill>
+                <a:latin typeface="Cambria" pitchFamily="34" charset="0"/>
+                <a:ea typeface="Cambria" pitchFamily="34" charset="-122"/>
+                <a:cs typeface="Cambria" pitchFamily="34" charset="-120"/>
+              </a:rPr>
+              <a:t>16.06%  →  17.09%</a:t>
+            </a:r>
+            <a:endParaRPr lang="en-US" sz="1700" dirty="0"/>
+          </a:p>
+        </p:txBody>
+      </p:sp>
+      <p:sp>
+        <p:nvSpPr>
+          <p:cNvPr id="10" name="Text 7"/>
+          <p:cNvSpPr/>
+          <p:nvPr/>
+        </p:nvSpPr>
+        <p:spPr>
+          <a:xfrm>
+            <a:off x="8366760" y="2880360"/>
+            <a:ext cx="3047695" cy="457200"/>
+          </a:xfrm>
+          <a:prstGeom prst="rect">
+            <a:avLst/>
+          </a:prstGeom>
+          <a:noFill/>
+          <a:ln/>
+        </p:spPr>
+        <p:txBody>
+          <a:bodyPr wrap="square" lIns="0" tIns="0" rIns="0" bIns="0" rtlCol="0" anchor="ctr"/>
+          <a:lstStyle/>
+          <a:p>
+            <a:pPr indent="0" marL="0">
+              <a:lnSpc>
+                <a:spcPct val="110000"/>
+              </a:lnSpc>
+              <a:buNone/>
+            </a:pPr>
+            <a:r>
+              <a:rPr lang="en-US" sz="930" dirty="0">
+                <a:solidFill>
+                  <a:srgbClr val="3A4553"/>
+                </a:solidFill>
+                <a:latin typeface="Calibri" pitchFamily="34" charset="0"/>
+                <a:ea typeface="Calibri" pitchFamily="34" charset="-122"/>
+                <a:cs typeface="Calibri" pitchFamily="34" charset="-120"/>
+              </a:rPr>
+              <a:t>FY23-24 to FY24-25 — rose even in the year sales dipped.</a:t>
+            </a:r>
+            <a:endParaRPr lang="en-US" sz="930" dirty="0"/>
+          </a:p>
+        </p:txBody>
+      </p:sp>
+      <p:sp>
+        <p:nvSpPr>
+          <p:cNvPr id="11" name="Shape 8"/>
+          <p:cNvSpPr/>
+          <p:nvPr/>
+        </p:nvSpPr>
+        <p:spPr>
+          <a:xfrm>
+            <a:off x="8366760" y="3520440"/>
+            <a:ext cx="3047695" cy="0"/>
+          </a:xfrm>
+          <a:prstGeom prst="line">
+            <a:avLst/>
+          </a:prstGeom>
+          <a:noFill/>
+          <a:ln w="12700">
+            <a:solidFill>
+              <a:srgbClr val="E1E4E9"/>
+            </a:solidFill>
+            <a:prstDash val="solid"/>
+          </a:ln>
+        </p:spPr>
+      </p:sp>
+      <p:sp>
+        <p:nvSpPr>
+          <p:cNvPr id="12" name="Text 9"/>
+          <p:cNvSpPr/>
+          <p:nvPr/>
+        </p:nvSpPr>
+        <p:spPr>
+          <a:xfrm>
+            <a:off x="8366760" y="3703320"/>
+            <a:ext cx="3047695" cy="1920240"/>
+          </a:xfrm>
+          <a:prstGeom prst="rect">
+            <a:avLst/>
+          </a:prstGeom>
+          <a:noFill/>
+          <a:ln/>
+        </p:spPr>
+        <p:txBody>
+          <a:bodyPr wrap="square" lIns="0" tIns="0" rIns="0" bIns="0" rtlCol="0" anchor="ctr"/>
+          <a:lstStyle/>
+          <a:p>
+            <a:pPr indent="0" marL="0">
+              <a:lnSpc>
+                <a:spcPct val="120000"/>
+              </a:lnSpc>
+              <a:buNone/>
+            </a:pPr>
+            <a:r>
+              <a:rPr lang="en-US" sz="1000" dirty="0">
+                <a:solidFill>
+                  <a:srgbClr val="1C1F26"/>
+                </a:solidFill>
+                <a:latin typeface="Calibri" pitchFamily="34" charset="0"/>
+                <a:ea typeface="Calibri" pitchFamily="34" charset="-122"/>
+                <a:cs typeface="Calibri" pitchFamily="34" charset="-120"/>
+              </a:rPr>
+              <a:t>This is not a one-off spike — it is the same quality-control theme recurring across three fiscal years despite a well-equipped testing lab (slide 8). It belongs on the same diligence list as the customer-concentration risk.</a:t>
+            </a:r>
+            <a:endParaRPr lang="en-US" sz="1000" dirty="0"/>
+          </a:p>
+        </p:txBody>
+      </p:sp>
+      <p:sp>
+        <p:nvSpPr>
+          <p:cNvPr id="13" name="Text 10"/>
+          <p:cNvSpPr/>
+          <p:nvPr/>
+        </p:nvSpPr>
+        <p:spPr>
+          <a:xfrm>
+            <a:off x="548640" y="6473952"/>
+            <a:ext cx="11094415" cy="274320"/>
+          </a:xfrm>
+          <a:prstGeom prst="rect">
+            <a:avLst/>
+          </a:prstGeom>
+          <a:noFill/>
+          <a:ln/>
+        </p:spPr>
+        <p:txBody>
+          <a:bodyPr wrap="square" lIns="0" tIns="0" rIns="0" bIns="0" rtlCol="0" anchor="ctr"/>
+          <a:lstStyle/>
+          <a:p>
+            <a:pPr algn="l" indent="0" marL="0">
+              <a:buNone/>
+            </a:pPr>
+            <a:r>
+              <a:rPr lang="en-US" sz="800" dirty="0">
+                <a:solidFill>
+                  <a:srgbClr val="9AA2AD"/>
+                </a:solidFill>
+                <a:latin typeface="Calibri" pitchFamily="34" charset="0"/>
+                <a:ea typeface="Calibri" pitchFamily="34" charset="-122"/>
+                <a:cs typeface="Calibri" pitchFamily="34" charset="-120"/>
+              </a:rPr>
+              <a:t>DATRE CORPORATION LIMITED  |  CONFIDENTIAL — PREPARED FOR INVESTOR DISCUSSION</a:t>
+            </a:r>
+            <a:endParaRPr lang="en-US" sz="800" dirty="0"/>
+          </a:p>
+        </p:txBody>
+      </p:sp>
+      <p:sp>
+        <p:nvSpPr>
+          <p:cNvPr id="14" name="Text 11"/>
+          <p:cNvSpPr/>
+          <p:nvPr/>
+        </p:nvSpPr>
+        <p:spPr>
+          <a:xfrm>
+            <a:off x="11277295" y="6473952"/>
+            <a:ext cx="457200" cy="274320"/>
+          </a:xfrm>
+          <a:prstGeom prst="rect">
+            <a:avLst/>
+          </a:prstGeom>
+          <a:noFill/>
+          <a:ln/>
+        </p:spPr>
+        <p:txBody>
+          <a:bodyPr wrap="square" lIns="0" tIns="0" rIns="0" bIns="0" rtlCol="0" anchor="ctr"/>
+          <a:lstStyle/>
+          <a:p>
+            <a:pPr algn="r" indent="0" marL="0">
+              <a:buNone/>
+            </a:pPr>
+            <a:r>
+              <a:rPr lang="en-US" sz="800" dirty="0">
+                <a:solidFill>
+                  <a:srgbClr val="9AA2AD"/>
+                </a:solidFill>
+                <a:latin typeface="Calibri" pitchFamily="34" charset="0"/>
+                <a:ea typeface="Calibri" pitchFamily="34" charset="-122"/>
+                <a:cs typeface="Calibri" pitchFamily="34" charset="-120"/>
+              </a:rPr>
+              <a:t>15</a:t>
+            </a:r>
+            <a:endParaRPr lang="en-US" sz="800" dirty="0"/>
+          </a:p>
+        </p:txBody>
+      </p:sp>
+    </p:spTree>
+  </p:cSld>
+  <p:clrMapOvr>
+    <a:masterClrMapping/>
+  </p:clrMapOvr>
+</p:sld>
+</file>
+
+<file path=ppt/slides/slide16.xml><?xml version="1.0" encoding="utf-8"?>
+<p:sld xmlns:a="http://schemas.openxmlformats.org/drawingml/2006/main" xmlns:r="http://schemas.openxmlformats.org/officeDocument/2006/relationships" xmlns:p="http://schemas.openxmlformats.org/presentationml/2006/main">
+  <p:cSld name="Slide 16">
+    <p:bg>
+      <p:bgPr>
+        <a:solidFill>
+          <a:srgbClr val="FFFFFF"/>
+        </a:solidFill>
+      </p:bgPr>
+    </p:bg>
+    <p:spTree>
+      <p:nvGrpSpPr>
+        <p:cNvPr id="1" name=""/>
+        <p:cNvGrpSpPr/>
+        <p:nvPr/>
+      </p:nvGrpSpPr>
+      <p:grpSpPr>
+        <a:xfrm>
+          <a:off x="0" y="0"/>
+          <a:ext cx="0" cy="0"/>
+          <a:chOff x="0" y="0"/>
+          <a:chExt cx="0" cy="0"/>
+        </a:xfrm>
+      </p:grpSpPr>
+      <p:sp>
+        <p:nvSpPr>
+          <p:cNvPr id="2" name="Text 0"/>
+          <p:cNvSpPr/>
+          <p:nvPr/>
+        </p:nvSpPr>
+        <p:spPr>
+          <a:xfrm>
+            <a:off x="548640" y="457200"/>
+            <a:ext cx="4572000" cy="274320"/>
+          </a:xfrm>
+          <a:prstGeom prst="rect">
+            <a:avLst/>
+          </a:prstGeom>
+          <a:noFill/>
+          <a:ln/>
+        </p:spPr>
+        <p:txBody>
+          <a:bodyPr wrap="square" lIns="0" tIns="0" rIns="0" bIns="0" rtlCol="0" anchor="ctr"/>
+          <a:lstStyle/>
+          <a:p>
+            <a:pPr indent="0" marL="0">
+              <a:buNone/>
+            </a:pPr>
+            <a:r>
+              <a:rPr lang="en-US" sz="1100" b="1" spc="200" kern="0" dirty="0">
+                <a:solidFill>
+                  <a:srgbClr val="D9622B"/>
+                </a:solidFill>
+                <a:latin typeface="Calibri" pitchFamily="34" charset="0"/>
+                <a:ea typeface="Calibri" pitchFamily="34" charset="-122"/>
+                <a:cs typeface="Calibri" pitchFamily="34" charset="-120"/>
+              </a:rPr>
               <a:t>MARGIN UPSIDE</a:t>
             </a:r>
             <a:endParaRPr lang="en-US" sz="1100" dirty="0"/>
@@ -8608,7 +9755,7 @@
                 <a:ea typeface="Calibri" pitchFamily="34" charset="-122"/>
                 <a:cs typeface="Calibri" pitchFamily="34" charset="-120"/>
               </a:rPr>
-              <a:t>15</a:t>
+              <a:t>16</a:t>
             </a:r>
             <a:endParaRPr lang="en-US" sz="800" dirty="0"/>
           </a:p>
@@ -8622,9 +9769,9 @@
 </p:sld>
 </file>
 
-<file path=ppt/slides/slide16.xml><?xml version="1.0" encoding="utf-8"?>
+<file path=ppt/slides/slide17.xml><?xml version="1.0" encoding="utf-8"?>
 <p:sld xmlns:a="http://schemas.openxmlformats.org/drawingml/2006/main" xmlns:r="http://schemas.openxmlformats.org/officeDocument/2006/relationships" xmlns:p="http://schemas.openxmlformats.org/presentationml/2006/main">
-  <p:cSld name="Slide 16">
+  <p:cSld name="Slide 17">
     <p:bg>
       <p:bgPr>
         <a:solidFill>
@@ -8726,7 +9873,7 @@
       </p:sp>
       <p:graphicFrame>
         <p:nvGraphicFramePr>
-          <p:cNvPr id="17" name="Table 0"/>
+          <p:cNvPr id="18" name="Table 0"/>
           <p:cNvGraphicFramePr>
             <a:graphicFrameLocks noGrp="1"/>
           </p:cNvGraphicFramePr>
@@ -10511,7 +11658,7 @@
                 <a:ea typeface="Calibri" pitchFamily="34" charset="-122"/>
                 <a:cs typeface="Calibri" pitchFamily="34" charset="-120"/>
               </a:rPr>
-              <a:t>16</a:t>
+              <a:t>17</a:t>
             </a:r>
             <a:endParaRPr lang="en-US" sz="800" dirty="0"/>
           </a:p>
@@ -10525,9 +11672,9 @@
 </p:sld>
 </file>
 
-<file path=ppt/slides/slide17.xml><?xml version="1.0" encoding="utf-8"?>
+<file path=ppt/slides/slide18.xml><?xml version="1.0" encoding="utf-8"?>
 <p:sld xmlns:a="http://schemas.openxmlformats.org/drawingml/2006/main" xmlns:r="http://schemas.openxmlformats.org/officeDocument/2006/relationships" xmlns:p="http://schemas.openxmlformats.org/presentationml/2006/main">
-  <p:cSld name="Slide 17">
+  <p:cSld name="Slide 18">
     <p:bg>
       <p:bgPr>
         <a:solidFill>
@@ -10629,7 +11776,7 @@
       </p:sp>
       <p:graphicFrame>
         <p:nvGraphicFramePr>
-          <p:cNvPr id="18" name="Table 0"/>
+          <p:cNvPr id="19" name="Table 0"/>
           <p:cNvGraphicFramePr>
             <a:graphicFrameLocks noGrp="1"/>
           </p:cNvGraphicFramePr>
@@ -13549,758 +14696,6 @@
                 <a:ea typeface="Calibri" pitchFamily="34" charset="-122"/>
                 <a:cs typeface="Calibri" pitchFamily="34" charset="-120"/>
               </a:rPr>
-              <a:t>17</a:t>
-            </a:r>
-            <a:endParaRPr lang="en-US" sz="800" dirty="0"/>
-          </a:p>
-        </p:txBody>
-      </p:sp>
-    </p:spTree>
-  </p:cSld>
-  <p:clrMapOvr>
-    <a:masterClrMapping/>
-  </p:clrMapOvr>
-</p:sld>
-</file>
-
-<file path=ppt/slides/slide18.xml><?xml version="1.0" encoding="utf-8"?>
-<p:sld xmlns:a="http://schemas.openxmlformats.org/drawingml/2006/main" xmlns:r="http://schemas.openxmlformats.org/officeDocument/2006/relationships" xmlns:p="http://schemas.openxmlformats.org/presentationml/2006/main">
-  <p:cSld name="Slide 18">
-    <p:bg>
-      <p:bgPr>
-        <a:solidFill>
-          <a:srgbClr val="FFFFFF"/>
-        </a:solidFill>
-      </p:bgPr>
-    </p:bg>
-    <p:spTree>
-      <p:nvGrpSpPr>
-        <p:cNvPr id="1" name=""/>
-        <p:cNvGrpSpPr/>
-        <p:nvPr/>
-      </p:nvGrpSpPr>
-      <p:grpSpPr>
-        <a:xfrm>
-          <a:off x="0" y="0"/>
-          <a:ext cx="0" cy="0"/>
-          <a:chOff x="0" y="0"/>
-          <a:chExt cx="0" cy="0"/>
-        </a:xfrm>
-      </p:grpSpPr>
-      <p:sp>
-        <p:nvSpPr>
-          <p:cNvPr id="2" name="Text 0"/>
-          <p:cNvSpPr/>
-          <p:nvPr/>
-        </p:nvSpPr>
-        <p:spPr>
-          <a:xfrm>
-            <a:off x="548640" y="457200"/>
-            <a:ext cx="4572000" cy="274320"/>
-          </a:xfrm>
-          <a:prstGeom prst="rect">
-            <a:avLst/>
-          </a:prstGeom>
-          <a:noFill/>
-          <a:ln/>
-        </p:spPr>
-        <p:txBody>
-          <a:bodyPr wrap="square" lIns="0" tIns="0" rIns="0" bIns="0" rtlCol="0" anchor="ctr"/>
-          <a:lstStyle/>
-          <a:p>
-            <a:pPr indent="0" marL="0">
-              <a:buNone/>
-            </a:pPr>
-            <a:r>
-              <a:rPr lang="en-US" sz="1100" b="1" spc="200" kern="0" dirty="0">
-                <a:solidFill>
-                  <a:srgbClr val="D9622B"/>
-                </a:solidFill>
-                <a:latin typeface="Calibri" pitchFamily="34" charset="0"/>
-                <a:ea typeface="Calibri" pitchFamily="34" charset="-122"/>
-                <a:cs typeface="Calibri" pitchFamily="34" charset="-120"/>
-              </a:rPr>
-              <a:t>MARKET CONTEXT</a:t>
-            </a:r>
-            <a:endParaRPr lang="en-US" sz="1100" dirty="0"/>
-          </a:p>
-        </p:txBody>
-      </p:sp>
-      <p:sp>
-        <p:nvSpPr>
-          <p:cNvPr id="3" name="Text 1"/>
-          <p:cNvSpPr/>
-          <p:nvPr/>
-        </p:nvSpPr>
-        <p:spPr>
-          <a:xfrm>
-            <a:off x="548640" y="841248"/>
-            <a:ext cx="11094415" cy="685800"/>
-          </a:xfrm>
-          <a:prstGeom prst="rect">
-            <a:avLst/>
-          </a:prstGeom>
-          <a:noFill/>
-          <a:ln/>
-        </p:spPr>
-        <p:txBody>
-          <a:bodyPr wrap="square" lIns="0" tIns="0" rIns="0" bIns="0" rtlCol="0" anchor="ctr"/>
-          <a:lstStyle/>
-          <a:p>
-            <a:pPr algn="l" indent="0" marL="0">
-              <a:buNone/>
-            </a:pPr>
-            <a:r>
-              <a:rPr lang="en-US" sz="3000" b="1" dirty="0">
-                <a:solidFill>
-                  <a:srgbClr val="1C1F26"/>
-                </a:solidFill>
-                <a:latin typeface="Cambria" pitchFamily="34" charset="0"/>
-                <a:ea typeface="Cambria" pitchFamily="34" charset="-122"/>
-                <a:cs typeface="Cambria" pitchFamily="34" charset="-120"/>
-              </a:rPr>
-              <a:t>Why the mining-liner franchise matters — and its limits</a:t>
-            </a:r>
-            <a:endParaRPr lang="en-US" sz="3000" dirty="0"/>
-          </a:p>
-        </p:txBody>
-      </p:sp>
-      <p:sp>
-        <p:nvSpPr>
-          <p:cNvPr id="4" name="Shape 2"/>
-          <p:cNvSpPr/>
-          <p:nvPr/>
-        </p:nvSpPr>
-        <p:spPr>
-          <a:xfrm>
-            <a:off x="548640" y="1783080"/>
-            <a:ext cx="2567864" cy="1554480"/>
-          </a:xfrm>
-          <a:prstGeom prst="roundRect">
-            <a:avLst>
-              <a:gd name="adj" fmla="val 4706"/>
-            </a:avLst>
-          </a:prstGeom>
-          <a:solidFill>
-            <a:srgbClr val="F4F5F7"/>
-          </a:solidFill>
-          <a:ln/>
-        </p:spPr>
-      </p:sp>
-      <p:sp>
-        <p:nvSpPr>
-          <p:cNvPr id="5" name="Text 3"/>
-          <p:cNvSpPr/>
-          <p:nvPr/>
-        </p:nvSpPr>
-        <p:spPr>
-          <a:xfrm>
-            <a:off x="713232" y="1938528"/>
-            <a:ext cx="2238680" cy="502920"/>
-          </a:xfrm>
-          <a:prstGeom prst="rect">
-            <a:avLst/>
-          </a:prstGeom>
-          <a:noFill/>
-          <a:ln/>
-        </p:spPr>
-        <p:txBody>
-          <a:bodyPr wrap="square" lIns="0" tIns="0" rIns="0" bIns="0" rtlCol="0" anchor="ctr"/>
-          <a:lstStyle/>
-          <a:p>
-            <a:pPr indent="0" marL="0">
-              <a:buNone/>
-            </a:pPr>
-            <a:r>
-              <a:rPr lang="en-US" sz="2100" b="1" dirty="0">
-                <a:solidFill>
-                  <a:srgbClr val="D9622B"/>
-                </a:solidFill>
-                <a:latin typeface="Cambria" pitchFamily="34" charset="0"/>
-                <a:ea typeface="Cambria" pitchFamily="34" charset="-122"/>
-                <a:cs typeface="Cambria" pitchFamily="34" charset="-120"/>
-              </a:rPr>
-              <a:t>~3 MTPA</a:t>
-            </a:r>
-            <a:endParaRPr lang="en-US" sz="2100" dirty="0"/>
-          </a:p>
-        </p:txBody>
-      </p:sp>
-      <p:sp>
-        <p:nvSpPr>
-          <p:cNvPr id="6" name="Text 4"/>
-          <p:cNvSpPr/>
-          <p:nvPr/>
-        </p:nvSpPr>
-        <p:spPr>
-          <a:xfrm>
-            <a:off x="713232" y="2450592"/>
-            <a:ext cx="2238680" cy="822960"/>
-          </a:xfrm>
-          <a:prstGeom prst="rect">
-            <a:avLst/>
-          </a:prstGeom>
-          <a:noFill/>
-          <a:ln/>
-        </p:spPr>
-        <p:txBody>
-          <a:bodyPr wrap="square" lIns="0" tIns="0" rIns="0" bIns="0" rtlCol="0" anchor="ctr"/>
-          <a:lstStyle/>
-          <a:p>
-            <a:pPr indent="0" marL="0">
-              <a:lnSpc>
-                <a:spcPct val="112000"/>
-              </a:lnSpc>
-              <a:buNone/>
-            </a:pPr>
-            <a:r>
-              <a:rPr lang="en-US" sz="930" dirty="0">
-                <a:solidFill>
-                  <a:srgbClr val="3A4553"/>
-                </a:solidFill>
-                <a:latin typeface="Calibri" pitchFamily="34" charset="0"/>
-                <a:ea typeface="Calibri" pitchFamily="34" charset="-122"/>
-                <a:cs typeface="Calibri" pitchFamily="34" charset="-120"/>
-              </a:rPr>
-              <a:t>Global high-chrome mill internals (HCMI) consumption</a:t>
-            </a:r>
-            <a:endParaRPr lang="en-US" sz="930" dirty="0"/>
-          </a:p>
-        </p:txBody>
-      </p:sp>
-      <p:sp>
-        <p:nvSpPr>
-          <p:cNvPr id="7" name="Shape 5"/>
-          <p:cNvSpPr/>
-          <p:nvPr/>
-        </p:nvSpPr>
-        <p:spPr>
-          <a:xfrm>
-            <a:off x="3390824" y="1783080"/>
-            <a:ext cx="2567864" cy="1554480"/>
-          </a:xfrm>
-          <a:prstGeom prst="roundRect">
-            <a:avLst>
-              <a:gd name="adj" fmla="val 4706"/>
-            </a:avLst>
-          </a:prstGeom>
-          <a:solidFill>
-            <a:srgbClr val="F4F5F7"/>
-          </a:solidFill>
-          <a:ln/>
-        </p:spPr>
-      </p:sp>
-      <p:sp>
-        <p:nvSpPr>
-          <p:cNvPr id="8" name="Text 6"/>
-          <p:cNvSpPr/>
-          <p:nvPr/>
-        </p:nvSpPr>
-        <p:spPr>
-          <a:xfrm>
-            <a:off x="3555416" y="1938528"/>
-            <a:ext cx="2238680" cy="502920"/>
-          </a:xfrm>
-          <a:prstGeom prst="rect">
-            <a:avLst/>
-          </a:prstGeom>
-          <a:noFill/>
-          <a:ln/>
-        </p:spPr>
-        <p:txBody>
-          <a:bodyPr wrap="square" lIns="0" tIns="0" rIns="0" bIns="0" rtlCol="0" anchor="ctr"/>
-          <a:lstStyle/>
-          <a:p>
-            <a:pPr indent="0" marL="0">
-              <a:buNone/>
-            </a:pPr>
-            <a:r>
-              <a:rPr lang="en-US" sz="2100" b="1" dirty="0">
-                <a:solidFill>
-                  <a:srgbClr val="D9622B"/>
-                </a:solidFill>
-                <a:latin typeface="Cambria" pitchFamily="34" charset="0"/>
-                <a:ea typeface="Cambria" pitchFamily="34" charset="-122"/>
-                <a:cs typeface="Cambria" pitchFamily="34" charset="-120"/>
-              </a:rPr>
-              <a:t>85-90%</a:t>
-            </a:r>
-            <a:endParaRPr lang="en-US" sz="2100" dirty="0"/>
-          </a:p>
-        </p:txBody>
-      </p:sp>
-      <p:sp>
-        <p:nvSpPr>
-          <p:cNvPr id="9" name="Text 7"/>
-          <p:cNvSpPr/>
-          <p:nvPr/>
-        </p:nvSpPr>
-        <p:spPr>
-          <a:xfrm>
-            <a:off x="3555416" y="2450592"/>
-            <a:ext cx="2238680" cy="822960"/>
-          </a:xfrm>
-          <a:prstGeom prst="rect">
-            <a:avLst/>
-          </a:prstGeom>
-          <a:noFill/>
-          <a:ln/>
-        </p:spPr>
-        <p:txBody>
-          <a:bodyPr wrap="square" lIns="0" tIns="0" rIns="0" bIns="0" rtlCol="0" anchor="ctr"/>
-          <a:lstStyle/>
-          <a:p>
-            <a:pPr indent="0" marL="0">
-              <a:lnSpc>
-                <a:spcPct val="112000"/>
-              </a:lnSpc>
-              <a:buNone/>
-            </a:pPr>
-            <a:r>
-              <a:rPr lang="en-US" sz="930" dirty="0">
-                <a:solidFill>
-                  <a:srgbClr val="3A4553"/>
-                </a:solidFill>
-                <a:latin typeface="Calibri" pitchFamily="34" charset="0"/>
-                <a:ea typeface="Calibri" pitchFamily="34" charset="-122"/>
-                <a:cs typeface="Calibri" pitchFamily="34" charset="-120"/>
-              </a:rPr>
-              <a:t>Of HCMI demand is replacement, not new capacity — structurally steady</a:t>
-            </a:r>
-            <a:endParaRPr lang="en-US" sz="930" dirty="0"/>
-          </a:p>
-        </p:txBody>
-      </p:sp>
-      <p:sp>
-        <p:nvSpPr>
-          <p:cNvPr id="10" name="Shape 8"/>
-          <p:cNvSpPr/>
-          <p:nvPr/>
-        </p:nvSpPr>
-        <p:spPr>
-          <a:xfrm>
-            <a:off x="6233008" y="1783080"/>
-            <a:ext cx="2567864" cy="1554480"/>
-          </a:xfrm>
-          <a:prstGeom prst="roundRect">
-            <a:avLst>
-              <a:gd name="adj" fmla="val 4706"/>
-            </a:avLst>
-          </a:prstGeom>
-          <a:solidFill>
-            <a:srgbClr val="F4F5F7"/>
-          </a:solidFill>
-          <a:ln/>
-        </p:spPr>
-      </p:sp>
-      <p:sp>
-        <p:nvSpPr>
-          <p:cNvPr id="11" name="Text 9"/>
-          <p:cNvSpPr/>
-          <p:nvPr/>
-        </p:nvSpPr>
-        <p:spPr>
-          <a:xfrm>
-            <a:off x="6397600" y="1938528"/>
-            <a:ext cx="2238680" cy="502920"/>
-          </a:xfrm>
-          <a:prstGeom prst="rect">
-            <a:avLst/>
-          </a:prstGeom>
-          <a:noFill/>
-          <a:ln/>
-        </p:spPr>
-        <p:txBody>
-          <a:bodyPr wrap="square" lIns="0" tIns="0" rIns="0" bIns="0" rtlCol="0" anchor="ctr"/>
-          <a:lstStyle/>
-          <a:p>
-            <a:pPr indent="0" marL="0">
-              <a:buNone/>
-            </a:pPr>
-            <a:r>
-              <a:rPr lang="en-US" sz="2100" b="1" dirty="0">
-                <a:solidFill>
-                  <a:srgbClr val="D9622B"/>
-                </a:solidFill>
-                <a:latin typeface="Cambria" pitchFamily="34" charset="0"/>
-                <a:ea typeface="Cambria" pitchFamily="34" charset="-122"/>
-                <a:cs typeface="Cambria" pitchFamily="34" charset="-120"/>
-              </a:rPr>
-              <a:t>~1.5 MTPA</a:t>
-            </a:r>
-            <a:endParaRPr lang="en-US" sz="2100" dirty="0"/>
-          </a:p>
-        </p:txBody>
-      </p:sp>
-      <p:sp>
-        <p:nvSpPr>
-          <p:cNvPr id="12" name="Text 10"/>
-          <p:cNvSpPr/>
-          <p:nvPr/>
-        </p:nvSpPr>
-        <p:spPr>
-          <a:xfrm>
-            <a:off x="6397600" y="2450592"/>
-            <a:ext cx="2238680" cy="822960"/>
-          </a:xfrm>
-          <a:prstGeom prst="rect">
-            <a:avLst/>
-          </a:prstGeom>
-          <a:noFill/>
-          <a:ln/>
-        </p:spPr>
-        <p:txBody>
-          <a:bodyPr wrap="square" lIns="0" tIns="0" rIns="0" bIns="0" rtlCol="0" anchor="ctr"/>
-          <a:lstStyle/>
-          <a:p>
-            <a:pPr indent="0" marL="0">
-              <a:lnSpc>
-                <a:spcPct val="112000"/>
-              </a:lnSpc>
-              <a:buNone/>
-            </a:pPr>
-            <a:r>
-              <a:rPr lang="en-US" sz="930" dirty="0">
-                <a:solidFill>
-                  <a:srgbClr val="3A4553"/>
-                </a:solidFill>
-                <a:latin typeface="Calibri" pitchFamily="34" charset="0"/>
-                <a:ea typeface="Calibri" pitchFamily="34" charset="-122"/>
-                <a:cs typeface="Calibri" pitchFamily="34" charset="-120"/>
-              </a:rPr>
-              <a:t>Conversion opportunity from forged media to HCMI (3x the cement segment)</a:t>
-            </a:r>
-            <a:endParaRPr lang="en-US" sz="930" dirty="0"/>
-          </a:p>
-        </p:txBody>
-      </p:sp>
-      <p:sp>
-        <p:nvSpPr>
-          <p:cNvPr id="13" name="Shape 11"/>
-          <p:cNvSpPr/>
-          <p:nvPr/>
-        </p:nvSpPr>
-        <p:spPr>
-          <a:xfrm>
-            <a:off x="9075191" y="1783080"/>
-            <a:ext cx="2567864" cy="1554480"/>
-          </a:xfrm>
-          <a:prstGeom prst="roundRect">
-            <a:avLst>
-              <a:gd name="adj" fmla="val 4706"/>
-            </a:avLst>
-          </a:prstGeom>
-          <a:solidFill>
-            <a:srgbClr val="F4F5F7"/>
-          </a:solidFill>
-          <a:ln/>
-        </p:spPr>
-      </p:sp>
-      <p:sp>
-        <p:nvSpPr>
-          <p:cNvPr id="14" name="Text 12"/>
-          <p:cNvSpPr/>
-          <p:nvPr/>
-        </p:nvSpPr>
-        <p:spPr>
-          <a:xfrm>
-            <a:off x="9239783" y="1938528"/>
-            <a:ext cx="2238680" cy="502920"/>
-          </a:xfrm>
-          <a:prstGeom prst="rect">
-            <a:avLst/>
-          </a:prstGeom>
-          <a:noFill/>
-          <a:ln/>
-        </p:spPr>
-        <p:txBody>
-          <a:bodyPr wrap="square" lIns="0" tIns="0" rIns="0" bIns="0" rtlCol="0" anchor="ctr"/>
-          <a:lstStyle/>
-          <a:p>
-            <a:pPr indent="0" marL="0">
-              <a:buNone/>
-            </a:pPr>
-            <a:r>
-              <a:rPr lang="en-US" sz="2100" b="1" dirty="0">
-                <a:solidFill>
-                  <a:srgbClr val="D9622B"/>
-                </a:solidFill>
-                <a:latin typeface="Cambria" pitchFamily="34" charset="0"/>
-                <a:ea typeface="Cambria" pitchFamily="34" charset="-122"/>
-                <a:cs typeface="Cambria" pitchFamily="34" charset="-120"/>
-              </a:rPr>
-              <a:t>~90%</a:t>
-            </a:r>
-            <a:endParaRPr lang="en-US" sz="2100" dirty="0"/>
-          </a:p>
-        </p:txBody>
-      </p:sp>
-      <p:sp>
-        <p:nvSpPr>
-          <p:cNvPr id="15" name="Text 13"/>
-          <p:cNvSpPr/>
-          <p:nvPr/>
-        </p:nvSpPr>
-        <p:spPr>
-          <a:xfrm>
-            <a:off x="9239783" y="2450592"/>
-            <a:ext cx="2238680" cy="822960"/>
-          </a:xfrm>
-          <a:prstGeom prst="rect">
-            <a:avLst/>
-          </a:prstGeom>
-          <a:noFill/>
-          <a:ln/>
-        </p:spPr>
-        <p:txBody>
-          <a:bodyPr wrap="square" lIns="0" tIns="0" rIns="0" bIns="0" rtlCol="0" anchor="ctr"/>
-          <a:lstStyle/>
-          <a:p>
-            <a:pPr indent="0" marL="0">
-              <a:lnSpc>
-                <a:spcPct val="112000"/>
-              </a:lnSpc>
-              <a:buNone/>
-            </a:pPr>
-            <a:r>
-              <a:rPr lang="en-US" sz="930" dirty="0">
-                <a:solidFill>
-                  <a:srgbClr val="3A4553"/>
-                </a:solidFill>
-                <a:latin typeface="Calibri" pitchFamily="34" charset="0"/>
-                <a:ea typeface="Calibri" pitchFamily="34" charset="-122"/>
-                <a:cs typeface="Calibri" pitchFamily="34" charset="-120"/>
-              </a:rPr>
-              <a:t>Combined share held by the two global HCMI leaders (AIA Engineering, Magotteaux)</a:t>
-            </a:r>
-            <a:endParaRPr lang="en-US" sz="930" dirty="0"/>
-          </a:p>
-        </p:txBody>
-      </p:sp>
-      <p:sp>
-        <p:nvSpPr>
-          <p:cNvPr id="16" name="Shape 14"/>
-          <p:cNvSpPr/>
-          <p:nvPr/>
-        </p:nvSpPr>
-        <p:spPr>
-          <a:xfrm>
-            <a:off x="548640" y="3657600"/>
-            <a:ext cx="11094415" cy="2377440"/>
-          </a:xfrm>
-          <a:prstGeom prst="roundRect">
-            <a:avLst>
-              <a:gd name="adj" fmla="val 3077"/>
-            </a:avLst>
-          </a:prstGeom>
-          <a:solidFill>
-            <a:srgbClr val="F4F5F7"/>
-          </a:solidFill>
-          <a:ln/>
-        </p:spPr>
-      </p:sp>
-      <p:sp>
-        <p:nvSpPr>
-          <p:cNvPr id="17" name="Text 15"/>
-          <p:cNvSpPr/>
-          <p:nvPr/>
-        </p:nvSpPr>
-        <p:spPr>
-          <a:xfrm>
-            <a:off x="822960" y="3858768"/>
-            <a:ext cx="10545775" cy="274320"/>
-          </a:xfrm>
-          <a:prstGeom prst="rect">
-            <a:avLst/>
-          </a:prstGeom>
-          <a:noFill/>
-          <a:ln/>
-        </p:spPr>
-        <p:txBody>
-          <a:bodyPr wrap="square" lIns="0" tIns="0" rIns="0" bIns="0" rtlCol="0" anchor="ctr"/>
-          <a:lstStyle/>
-          <a:p>
-            <a:pPr indent="0" marL="0">
-              <a:buNone/>
-            </a:pPr>
-            <a:r>
-              <a:rPr lang="en-US" sz="1050" b="1" spc="100" kern="0" dirty="0">
-                <a:solidFill>
-                  <a:srgbClr val="D9622B"/>
-                </a:solidFill>
-                <a:latin typeface="Calibri" pitchFamily="34" charset="0"/>
-                <a:ea typeface="Calibri" pitchFamily="34" charset="-122"/>
-                <a:cs typeface="Calibri" pitchFamily="34" charset="-120"/>
-              </a:rPr>
-              <a:t>HOW DATRE ACTUALLY SITS IN THIS MARKET</a:t>
-            </a:r>
-            <a:endParaRPr lang="en-US" sz="1050" dirty="0"/>
-          </a:p>
-        </p:txBody>
-      </p:sp>
-      <p:sp>
-        <p:nvSpPr>
-          <p:cNvPr id="18" name="Text 16"/>
-          <p:cNvSpPr/>
-          <p:nvPr/>
-        </p:nvSpPr>
-        <p:spPr>
-          <a:xfrm>
-            <a:off x="822960" y="4187952"/>
-            <a:ext cx="10545775" cy="1737360"/>
-          </a:xfrm>
-          <a:prstGeom prst="rect">
-            <a:avLst/>
-          </a:prstGeom>
-          <a:noFill/>
-          <a:ln/>
-        </p:spPr>
-        <p:txBody>
-          <a:bodyPr wrap="square" lIns="0" tIns="0" rIns="0" bIns="0" rtlCol="0" anchor="ctr"/>
-          <a:lstStyle/>
-          <a:p>
-            <a:pPr marL="342900" indent="-342900">
-              <a:lnSpc>
-                <a:spcPct val="115000"/>
-              </a:lnSpc>
-              <a:spcAft>
-                <a:spcPts val="800"/>
-              </a:spcAft>
-              <a:buSzPct val="100000"/>
-              <a:buChar char="•"/>
-            </a:pPr>
-            <a:r>
-              <a:rPr lang="en-US" sz="1030" dirty="0">
-                <a:solidFill>
-                  <a:srgbClr val="1C1F26"/>
-                </a:solidFill>
-                <a:latin typeface="Calibri" pitchFamily="34" charset="0"/>
-                <a:ea typeface="Calibri" pitchFamily="34" charset="-122"/>
-                <a:cs typeface="Calibri" pitchFamily="34" charset="-120"/>
-              </a:rPr>
-              <a:t>Datre is not a branded participant in the ~3 MTPA global HCMI market — it is a qualified casting sub-supplier to Tega, which itself competes against AIA Engineering and Magotteaux.</a:t>
-            </a:r>
-            <a:endParaRPr lang="en-US" sz="1030" dirty="0"/>
-          </a:p>
-          <a:p>
-            <a:pPr marL="342900" indent="-342900">
-              <a:lnSpc>
-                <a:spcPct val="115000"/>
-              </a:lnSpc>
-              <a:spcAft>
-                <a:spcPts val="800"/>
-              </a:spcAft>
-              <a:buSzPct val="100000"/>
-              <a:buChar char="•"/>
-            </a:pPr>
-            <a:r>
-              <a:rPr lang="en-US" sz="1030" dirty="0">
-                <a:solidFill>
-                  <a:srgbClr val="1C1F26"/>
-                </a:solidFill>
-                <a:latin typeface="Calibri" pitchFamily="34" charset="0"/>
-                <a:ea typeface="Calibri" pitchFamily="34" charset="-122"/>
-                <a:cs typeface="Calibri" pitchFamily="34" charset="-120"/>
-              </a:rPr>
-              <a:t>The replacement-driven, non-cyclical demand pattern is a genuine tailwind for Tega's own volumes — and, through the Tega relationship, for Datre's order flow. It does not, by itself, diversify Datre's customer concentration.</a:t>
-            </a:r>
-            <a:endParaRPr lang="en-US" sz="1030" dirty="0"/>
-          </a:p>
-          <a:p>
-            <a:pPr marL="342900" indent="-342900">
-              <a:lnSpc>
-                <a:spcPct val="115000"/>
-              </a:lnSpc>
-              <a:buSzPct val="100000"/>
-              <a:buChar char="•"/>
-            </a:pPr>
-            <a:r>
-              <a:rPr lang="en-US" sz="1030" dirty="0">
-                <a:solidFill>
-                  <a:srgbClr val="1C1F26"/>
-                </a:solidFill>
-                <a:latin typeface="Calibri" pitchFamily="34" charset="0"/>
-                <a:ea typeface="Calibri" pitchFamily="34" charset="-122"/>
-                <a:cs typeface="Calibri" pitchFamily="34" charset="-120"/>
-              </a:rPr>
-              <a:t>High entry barriers cut both ways: they protect Datre's niche position as a qualified supplier, but also cap how much of the value chain's economics a sub-tier caster can capture.</a:t>
-            </a:r>
-            <a:endParaRPr lang="en-US" sz="1030" dirty="0"/>
-          </a:p>
-        </p:txBody>
-      </p:sp>
-      <p:sp>
-        <p:nvSpPr>
-          <p:cNvPr id="19" name="Text 17"/>
-          <p:cNvSpPr/>
-          <p:nvPr/>
-        </p:nvSpPr>
-        <p:spPr>
-          <a:xfrm>
-            <a:off x="548640" y="6473952"/>
-            <a:ext cx="11094415" cy="274320"/>
-          </a:xfrm>
-          <a:prstGeom prst="rect">
-            <a:avLst/>
-          </a:prstGeom>
-          <a:noFill/>
-          <a:ln/>
-        </p:spPr>
-        <p:txBody>
-          <a:bodyPr wrap="square" lIns="0" tIns="0" rIns="0" bIns="0" rtlCol="0" anchor="ctr"/>
-          <a:lstStyle/>
-          <a:p>
-            <a:pPr algn="l" indent="0" marL="0">
-              <a:buNone/>
-            </a:pPr>
-            <a:r>
-              <a:rPr lang="en-US" sz="800" dirty="0">
-                <a:solidFill>
-                  <a:srgbClr val="9AA2AD"/>
-                </a:solidFill>
-                <a:latin typeface="Calibri" pitchFamily="34" charset="0"/>
-                <a:ea typeface="Calibri" pitchFamily="34" charset="-122"/>
-                <a:cs typeface="Calibri" pitchFamily="34" charset="-120"/>
-              </a:rPr>
-              <a:t>DATRE CORPORATION LIMITED  |  CONFIDENTIAL — PREPARED FOR INVESTOR DISCUSSION</a:t>
-            </a:r>
-            <a:endParaRPr lang="en-US" sz="800" dirty="0"/>
-          </a:p>
-        </p:txBody>
-      </p:sp>
-      <p:sp>
-        <p:nvSpPr>
-          <p:cNvPr id="20" name="Text 18"/>
-          <p:cNvSpPr/>
-          <p:nvPr/>
-        </p:nvSpPr>
-        <p:spPr>
-          <a:xfrm>
-            <a:off x="11277295" y="6473952"/>
-            <a:ext cx="457200" cy="274320"/>
-          </a:xfrm>
-          <a:prstGeom prst="rect">
-            <a:avLst/>
-          </a:prstGeom>
-          <a:noFill/>
-          <a:ln/>
-        </p:spPr>
-        <p:txBody>
-          <a:bodyPr wrap="square" lIns="0" tIns="0" rIns="0" bIns="0" rtlCol="0" anchor="ctr"/>
-          <a:lstStyle/>
-          <a:p>
-            <a:pPr algn="r" indent="0" marL="0">
-              <a:buNone/>
-            </a:pPr>
-            <a:r>
-              <a:rPr lang="en-US" sz="800" dirty="0">
-                <a:solidFill>
-                  <a:srgbClr val="9AA2AD"/>
-                </a:solidFill>
-                <a:latin typeface="Calibri" pitchFamily="34" charset="0"/>
-                <a:ea typeface="Calibri" pitchFamily="34" charset="-122"/>
-                <a:cs typeface="Calibri" pitchFamily="34" charset="-120"/>
-              </a:rPr>
               <a:t>18</a:t>
             </a:r>
             <a:endParaRPr lang="en-US" sz="800" dirty="0"/>
@@ -14372,7 +14767,7 @@
                 <a:ea typeface="Calibri" pitchFamily="34" charset="-122"/>
                 <a:cs typeface="Calibri" pitchFamily="34" charset="-120"/>
               </a:rPr>
-              <a:t>CRITICAL ANALYSIS — SUMMARY</a:t>
+              <a:t>MARKET CONTEXT</a:t>
             </a:r>
             <a:endParaRPr lang="en-US" sz="1100" dirty="0"/>
           </a:p>
@@ -14411,7 +14806,7 @@
                 <a:ea typeface="Cambria" pitchFamily="34" charset="-122"/>
                 <a:cs typeface="Cambria" pitchFamily="34" charset="-120"/>
               </a:rPr>
-              <a:t>SWOT: the honest scorecard</a:t>
+              <a:t>Why the mining-liner franchise matters — and its limits</a:t>
             </a:r>
             <a:endParaRPr lang="en-US" sz="3000" dirty="0"/>
           </a:p>
@@ -14425,16 +14820,16 @@
         </p:nvSpPr>
         <p:spPr>
           <a:xfrm>
-            <a:off x="548640" y="1737360"/>
-            <a:ext cx="5387188" cy="2148840"/>
+            <a:off x="548640" y="1783080"/>
+            <a:ext cx="2567864" cy="1554480"/>
           </a:xfrm>
           <a:prstGeom prst="roundRect">
             <a:avLst>
-              <a:gd name="adj" fmla="val 3404"/>
+              <a:gd name="adj" fmla="val 4706"/>
             </a:avLst>
           </a:prstGeom>
           <a:solidFill>
-            <a:srgbClr val="EDF5EF"/>
+            <a:srgbClr val="F4F5F7"/>
           </a:solidFill>
           <a:ln/>
         </p:spPr>
@@ -14447,8 +14842,8 @@
         </p:nvSpPr>
         <p:spPr>
           <a:xfrm>
-            <a:off x="804672" y="1901952"/>
-            <a:ext cx="4875124" cy="274320"/>
+            <a:off x="713232" y="1938528"/>
+            <a:ext cx="2238680" cy="502920"/>
           </a:xfrm>
           <a:prstGeom prst="rect">
             <a:avLst/>
@@ -14464,17 +14859,17 @@
               <a:buNone/>
             </a:pPr>
             <a:r>
-              <a:rPr lang="en-US" sz="1150" b="1" spc="150" kern="0" dirty="0">
-                <a:solidFill>
-                  <a:srgbClr val="3F8F5F"/>
-                </a:solidFill>
-                <a:latin typeface="Calibri" pitchFamily="34" charset="0"/>
-                <a:ea typeface="Calibri" pitchFamily="34" charset="-122"/>
-                <a:cs typeface="Calibri" pitchFamily="34" charset="-120"/>
-              </a:rPr>
-              <a:t>STRENGTHS</a:t>
-            </a:r>
-            <a:endParaRPr lang="en-US" sz="1150" dirty="0"/>
+              <a:rPr lang="en-US" sz="2100" b="1" dirty="0">
+                <a:solidFill>
+                  <a:srgbClr val="D9622B"/>
+                </a:solidFill>
+                <a:latin typeface="Cambria" pitchFamily="34" charset="0"/>
+                <a:ea typeface="Cambria" pitchFamily="34" charset="-122"/>
+                <a:cs typeface="Cambria" pitchFamily="34" charset="-120"/>
+              </a:rPr>
+              <a:t>~3 MTPA</a:t>
+            </a:r>
+            <a:endParaRPr lang="en-US" sz="2100" dirty="0"/>
           </a:p>
         </p:txBody>
       </p:sp>
@@ -14486,8 +14881,420 @@
         </p:nvSpPr>
         <p:spPr>
           <a:xfrm>
-            <a:off x="804672" y="2212848"/>
-            <a:ext cx="4875124" cy="1554480"/>
+            <a:off x="713232" y="2450592"/>
+            <a:ext cx="2238680" cy="822960"/>
+          </a:xfrm>
+          <a:prstGeom prst="rect">
+            <a:avLst/>
+          </a:prstGeom>
+          <a:noFill/>
+          <a:ln/>
+        </p:spPr>
+        <p:txBody>
+          <a:bodyPr wrap="square" lIns="0" tIns="0" rIns="0" bIns="0" rtlCol="0" anchor="ctr"/>
+          <a:lstStyle/>
+          <a:p>
+            <a:pPr indent="0" marL="0">
+              <a:lnSpc>
+                <a:spcPct val="112000"/>
+              </a:lnSpc>
+              <a:buNone/>
+            </a:pPr>
+            <a:r>
+              <a:rPr lang="en-US" sz="930" dirty="0">
+                <a:solidFill>
+                  <a:srgbClr val="3A4553"/>
+                </a:solidFill>
+                <a:latin typeface="Calibri" pitchFamily="34" charset="0"/>
+                <a:ea typeface="Calibri" pitchFamily="34" charset="-122"/>
+                <a:cs typeface="Calibri" pitchFamily="34" charset="-120"/>
+              </a:rPr>
+              <a:t>Global high-chrome mill internals (HCMI) consumption</a:t>
+            </a:r>
+            <a:endParaRPr lang="en-US" sz="930" dirty="0"/>
+          </a:p>
+        </p:txBody>
+      </p:sp>
+      <p:sp>
+        <p:nvSpPr>
+          <p:cNvPr id="7" name="Shape 5"/>
+          <p:cNvSpPr/>
+          <p:nvPr/>
+        </p:nvSpPr>
+        <p:spPr>
+          <a:xfrm>
+            <a:off x="3390824" y="1783080"/>
+            <a:ext cx="2567864" cy="1554480"/>
+          </a:xfrm>
+          <a:prstGeom prst="roundRect">
+            <a:avLst>
+              <a:gd name="adj" fmla="val 4706"/>
+            </a:avLst>
+          </a:prstGeom>
+          <a:solidFill>
+            <a:srgbClr val="F4F5F7"/>
+          </a:solidFill>
+          <a:ln/>
+        </p:spPr>
+      </p:sp>
+      <p:sp>
+        <p:nvSpPr>
+          <p:cNvPr id="8" name="Text 6"/>
+          <p:cNvSpPr/>
+          <p:nvPr/>
+        </p:nvSpPr>
+        <p:spPr>
+          <a:xfrm>
+            <a:off x="3555416" y="1938528"/>
+            <a:ext cx="2238680" cy="502920"/>
+          </a:xfrm>
+          <a:prstGeom prst="rect">
+            <a:avLst/>
+          </a:prstGeom>
+          <a:noFill/>
+          <a:ln/>
+        </p:spPr>
+        <p:txBody>
+          <a:bodyPr wrap="square" lIns="0" tIns="0" rIns="0" bIns="0" rtlCol="0" anchor="ctr"/>
+          <a:lstStyle/>
+          <a:p>
+            <a:pPr indent="0" marL="0">
+              <a:buNone/>
+            </a:pPr>
+            <a:r>
+              <a:rPr lang="en-US" sz="2100" b="1" dirty="0">
+                <a:solidFill>
+                  <a:srgbClr val="D9622B"/>
+                </a:solidFill>
+                <a:latin typeface="Cambria" pitchFamily="34" charset="0"/>
+                <a:ea typeface="Cambria" pitchFamily="34" charset="-122"/>
+                <a:cs typeface="Cambria" pitchFamily="34" charset="-120"/>
+              </a:rPr>
+              <a:t>85-90%</a:t>
+            </a:r>
+            <a:endParaRPr lang="en-US" sz="2100" dirty="0"/>
+          </a:p>
+        </p:txBody>
+      </p:sp>
+      <p:sp>
+        <p:nvSpPr>
+          <p:cNvPr id="9" name="Text 7"/>
+          <p:cNvSpPr/>
+          <p:nvPr/>
+        </p:nvSpPr>
+        <p:spPr>
+          <a:xfrm>
+            <a:off x="3555416" y="2450592"/>
+            <a:ext cx="2238680" cy="822960"/>
+          </a:xfrm>
+          <a:prstGeom prst="rect">
+            <a:avLst/>
+          </a:prstGeom>
+          <a:noFill/>
+          <a:ln/>
+        </p:spPr>
+        <p:txBody>
+          <a:bodyPr wrap="square" lIns="0" tIns="0" rIns="0" bIns="0" rtlCol="0" anchor="ctr"/>
+          <a:lstStyle/>
+          <a:p>
+            <a:pPr indent="0" marL="0">
+              <a:lnSpc>
+                <a:spcPct val="112000"/>
+              </a:lnSpc>
+              <a:buNone/>
+            </a:pPr>
+            <a:r>
+              <a:rPr lang="en-US" sz="930" dirty="0">
+                <a:solidFill>
+                  <a:srgbClr val="3A4553"/>
+                </a:solidFill>
+                <a:latin typeface="Calibri" pitchFamily="34" charset="0"/>
+                <a:ea typeface="Calibri" pitchFamily="34" charset="-122"/>
+                <a:cs typeface="Calibri" pitchFamily="34" charset="-120"/>
+              </a:rPr>
+              <a:t>Of HCMI demand is replacement, not new capacity — structurally steady</a:t>
+            </a:r>
+            <a:endParaRPr lang="en-US" sz="930" dirty="0"/>
+          </a:p>
+        </p:txBody>
+      </p:sp>
+      <p:sp>
+        <p:nvSpPr>
+          <p:cNvPr id="10" name="Shape 8"/>
+          <p:cNvSpPr/>
+          <p:nvPr/>
+        </p:nvSpPr>
+        <p:spPr>
+          <a:xfrm>
+            <a:off x="6233008" y="1783080"/>
+            <a:ext cx="2567864" cy="1554480"/>
+          </a:xfrm>
+          <a:prstGeom prst="roundRect">
+            <a:avLst>
+              <a:gd name="adj" fmla="val 4706"/>
+            </a:avLst>
+          </a:prstGeom>
+          <a:solidFill>
+            <a:srgbClr val="F4F5F7"/>
+          </a:solidFill>
+          <a:ln/>
+        </p:spPr>
+      </p:sp>
+      <p:sp>
+        <p:nvSpPr>
+          <p:cNvPr id="11" name="Text 9"/>
+          <p:cNvSpPr/>
+          <p:nvPr/>
+        </p:nvSpPr>
+        <p:spPr>
+          <a:xfrm>
+            <a:off x="6397600" y="1938528"/>
+            <a:ext cx="2238680" cy="502920"/>
+          </a:xfrm>
+          <a:prstGeom prst="rect">
+            <a:avLst/>
+          </a:prstGeom>
+          <a:noFill/>
+          <a:ln/>
+        </p:spPr>
+        <p:txBody>
+          <a:bodyPr wrap="square" lIns="0" tIns="0" rIns="0" bIns="0" rtlCol="0" anchor="ctr"/>
+          <a:lstStyle/>
+          <a:p>
+            <a:pPr indent="0" marL="0">
+              <a:buNone/>
+            </a:pPr>
+            <a:r>
+              <a:rPr lang="en-US" sz="2100" b="1" dirty="0">
+                <a:solidFill>
+                  <a:srgbClr val="D9622B"/>
+                </a:solidFill>
+                <a:latin typeface="Cambria" pitchFamily="34" charset="0"/>
+                <a:ea typeface="Cambria" pitchFamily="34" charset="-122"/>
+                <a:cs typeface="Cambria" pitchFamily="34" charset="-120"/>
+              </a:rPr>
+              <a:t>~1.5 MTPA</a:t>
+            </a:r>
+            <a:endParaRPr lang="en-US" sz="2100" dirty="0"/>
+          </a:p>
+        </p:txBody>
+      </p:sp>
+      <p:sp>
+        <p:nvSpPr>
+          <p:cNvPr id="12" name="Text 10"/>
+          <p:cNvSpPr/>
+          <p:nvPr/>
+        </p:nvSpPr>
+        <p:spPr>
+          <a:xfrm>
+            <a:off x="6397600" y="2450592"/>
+            <a:ext cx="2238680" cy="822960"/>
+          </a:xfrm>
+          <a:prstGeom prst="rect">
+            <a:avLst/>
+          </a:prstGeom>
+          <a:noFill/>
+          <a:ln/>
+        </p:spPr>
+        <p:txBody>
+          <a:bodyPr wrap="square" lIns="0" tIns="0" rIns="0" bIns="0" rtlCol="0" anchor="ctr"/>
+          <a:lstStyle/>
+          <a:p>
+            <a:pPr indent="0" marL="0">
+              <a:lnSpc>
+                <a:spcPct val="112000"/>
+              </a:lnSpc>
+              <a:buNone/>
+            </a:pPr>
+            <a:r>
+              <a:rPr lang="en-US" sz="930" dirty="0">
+                <a:solidFill>
+                  <a:srgbClr val="3A4553"/>
+                </a:solidFill>
+                <a:latin typeface="Calibri" pitchFamily="34" charset="0"/>
+                <a:ea typeface="Calibri" pitchFamily="34" charset="-122"/>
+                <a:cs typeface="Calibri" pitchFamily="34" charset="-120"/>
+              </a:rPr>
+              <a:t>Conversion opportunity from forged media to HCMI (3x the cement segment)</a:t>
+            </a:r>
+            <a:endParaRPr lang="en-US" sz="930" dirty="0"/>
+          </a:p>
+        </p:txBody>
+      </p:sp>
+      <p:sp>
+        <p:nvSpPr>
+          <p:cNvPr id="13" name="Shape 11"/>
+          <p:cNvSpPr/>
+          <p:nvPr/>
+        </p:nvSpPr>
+        <p:spPr>
+          <a:xfrm>
+            <a:off x="9075191" y="1783080"/>
+            <a:ext cx="2567864" cy="1554480"/>
+          </a:xfrm>
+          <a:prstGeom prst="roundRect">
+            <a:avLst>
+              <a:gd name="adj" fmla="val 4706"/>
+            </a:avLst>
+          </a:prstGeom>
+          <a:solidFill>
+            <a:srgbClr val="F4F5F7"/>
+          </a:solidFill>
+          <a:ln/>
+        </p:spPr>
+      </p:sp>
+      <p:sp>
+        <p:nvSpPr>
+          <p:cNvPr id="14" name="Text 12"/>
+          <p:cNvSpPr/>
+          <p:nvPr/>
+        </p:nvSpPr>
+        <p:spPr>
+          <a:xfrm>
+            <a:off x="9239783" y="1938528"/>
+            <a:ext cx="2238680" cy="502920"/>
+          </a:xfrm>
+          <a:prstGeom prst="rect">
+            <a:avLst/>
+          </a:prstGeom>
+          <a:noFill/>
+          <a:ln/>
+        </p:spPr>
+        <p:txBody>
+          <a:bodyPr wrap="square" lIns="0" tIns="0" rIns="0" bIns="0" rtlCol="0" anchor="ctr"/>
+          <a:lstStyle/>
+          <a:p>
+            <a:pPr indent="0" marL="0">
+              <a:buNone/>
+            </a:pPr>
+            <a:r>
+              <a:rPr lang="en-US" sz="2100" b="1" dirty="0">
+                <a:solidFill>
+                  <a:srgbClr val="D9622B"/>
+                </a:solidFill>
+                <a:latin typeface="Cambria" pitchFamily="34" charset="0"/>
+                <a:ea typeface="Cambria" pitchFamily="34" charset="-122"/>
+                <a:cs typeface="Cambria" pitchFamily="34" charset="-120"/>
+              </a:rPr>
+              <a:t>~90%</a:t>
+            </a:r>
+            <a:endParaRPr lang="en-US" sz="2100" dirty="0"/>
+          </a:p>
+        </p:txBody>
+      </p:sp>
+      <p:sp>
+        <p:nvSpPr>
+          <p:cNvPr id="15" name="Text 13"/>
+          <p:cNvSpPr/>
+          <p:nvPr/>
+        </p:nvSpPr>
+        <p:spPr>
+          <a:xfrm>
+            <a:off x="9239783" y="2450592"/>
+            <a:ext cx="2238680" cy="822960"/>
+          </a:xfrm>
+          <a:prstGeom prst="rect">
+            <a:avLst/>
+          </a:prstGeom>
+          <a:noFill/>
+          <a:ln/>
+        </p:spPr>
+        <p:txBody>
+          <a:bodyPr wrap="square" lIns="0" tIns="0" rIns="0" bIns="0" rtlCol="0" anchor="ctr"/>
+          <a:lstStyle/>
+          <a:p>
+            <a:pPr indent="0" marL="0">
+              <a:lnSpc>
+                <a:spcPct val="112000"/>
+              </a:lnSpc>
+              <a:buNone/>
+            </a:pPr>
+            <a:r>
+              <a:rPr lang="en-US" sz="930" dirty="0">
+                <a:solidFill>
+                  <a:srgbClr val="3A4553"/>
+                </a:solidFill>
+                <a:latin typeface="Calibri" pitchFamily="34" charset="0"/>
+                <a:ea typeface="Calibri" pitchFamily="34" charset="-122"/>
+                <a:cs typeface="Calibri" pitchFamily="34" charset="-120"/>
+              </a:rPr>
+              <a:t>Combined share held by the two global HCMI leaders (AIA Engineering, Magotteaux)</a:t>
+            </a:r>
+            <a:endParaRPr lang="en-US" sz="930" dirty="0"/>
+          </a:p>
+        </p:txBody>
+      </p:sp>
+      <p:sp>
+        <p:nvSpPr>
+          <p:cNvPr id="16" name="Shape 14"/>
+          <p:cNvSpPr/>
+          <p:nvPr/>
+        </p:nvSpPr>
+        <p:spPr>
+          <a:xfrm>
+            <a:off x="548640" y="3657600"/>
+            <a:ext cx="11094415" cy="2377440"/>
+          </a:xfrm>
+          <a:prstGeom prst="roundRect">
+            <a:avLst>
+              <a:gd name="adj" fmla="val 3077"/>
+            </a:avLst>
+          </a:prstGeom>
+          <a:solidFill>
+            <a:srgbClr val="F4F5F7"/>
+          </a:solidFill>
+          <a:ln/>
+        </p:spPr>
+      </p:sp>
+      <p:sp>
+        <p:nvSpPr>
+          <p:cNvPr id="17" name="Text 15"/>
+          <p:cNvSpPr/>
+          <p:nvPr/>
+        </p:nvSpPr>
+        <p:spPr>
+          <a:xfrm>
+            <a:off x="822960" y="3858768"/>
+            <a:ext cx="10545775" cy="274320"/>
+          </a:xfrm>
+          <a:prstGeom prst="rect">
+            <a:avLst/>
+          </a:prstGeom>
+          <a:noFill/>
+          <a:ln/>
+        </p:spPr>
+        <p:txBody>
+          <a:bodyPr wrap="square" lIns="0" tIns="0" rIns="0" bIns="0" rtlCol="0" anchor="ctr"/>
+          <a:lstStyle/>
+          <a:p>
+            <a:pPr indent="0" marL="0">
+              <a:buNone/>
+            </a:pPr>
+            <a:r>
+              <a:rPr lang="en-US" sz="1050" b="1" spc="100" kern="0" dirty="0">
+                <a:solidFill>
+                  <a:srgbClr val="D9622B"/>
+                </a:solidFill>
+                <a:latin typeface="Calibri" pitchFamily="34" charset="0"/>
+                <a:ea typeface="Calibri" pitchFamily="34" charset="-122"/>
+                <a:cs typeface="Calibri" pitchFamily="34" charset="-120"/>
+              </a:rPr>
+              <a:t>HOW DATRE ACTUALLY SITS IN THIS MARKET</a:t>
+            </a:r>
+            <a:endParaRPr lang="en-US" sz="1050" dirty="0"/>
+          </a:p>
+        </p:txBody>
+      </p:sp>
+      <p:sp>
+        <p:nvSpPr>
+          <p:cNvPr id="18" name="Text 16"/>
+          <p:cNvSpPr/>
+          <p:nvPr/>
+        </p:nvSpPr>
+        <p:spPr>
+          <a:xfrm>
+            <a:off x="822960" y="4187952"/>
+            <a:ext cx="10545775" cy="1737360"/>
           </a:xfrm>
           <a:prstGeom prst="rect">
             <a:avLst/>
@@ -14501,16 +15308,16 @@
           <a:p>
             <a:pPr marL="342900" indent="-342900">
               <a:lnSpc>
-                <a:spcPct val="105000"/>
+                <a:spcPct val="115000"/>
               </a:lnSpc>
               <a:spcAft>
-                <a:spcPts val="500"/>
+                <a:spcPts val="800"/>
               </a:spcAft>
               <a:buSzPct val="100000"/>
               <a:buChar char="•"/>
             </a:pPr>
             <a:r>
-              <a:rPr lang="en-US" sz="960" dirty="0">
+              <a:rPr lang="en-US" sz="1030" dirty="0">
                 <a:solidFill>
                   <a:srgbClr val="1C1F26"/>
                 </a:solidFill>
@@ -14518,23 +15325,23 @@
                 <a:ea typeface="Calibri" pitchFamily="34" charset="-122"/>
                 <a:cs typeface="Calibri" pitchFamily="34" charset="-120"/>
               </a:rPr>
-              <a:t>Three consecutive audited profit years (FY23-25)</a:t>
-            </a:r>
-            <a:endParaRPr lang="en-US" sz="960" dirty="0"/>
+              <a:t>Datre is not a branded participant in the ~3 MTPA global HCMI market — it is a qualified casting sub-supplier to Tega, which itself competes against AIA Engineering and Magotteaux.</a:t>
+            </a:r>
+            <a:endParaRPr lang="en-US" sz="1030" dirty="0"/>
           </a:p>
           <a:p>
             <a:pPr marL="342900" indent="-342900">
               <a:lnSpc>
-                <a:spcPct val="105000"/>
+                <a:spcPct val="115000"/>
               </a:lnSpc>
               <a:spcAft>
-                <a:spcPts val="500"/>
+                <a:spcPts val="800"/>
               </a:spcAft>
               <a:buSzPct val="100000"/>
               <a:buChar char="•"/>
             </a:pPr>
             <a:r>
-              <a:rPr lang="en-US" sz="960" dirty="0">
+              <a:rPr lang="en-US" sz="1030" dirty="0">
                 <a:solidFill>
                   <a:srgbClr val="1C1F26"/>
                 </a:solidFill>
@@ -14542,23 +15349,20 @@
                 <a:ea typeface="Calibri" pitchFamily="34" charset="-122"/>
                 <a:cs typeface="Calibri" pitchFamily="34" charset="-120"/>
               </a:rPr>
-              <a:t>Defensible heat-treatment IP moat</a:t>
-            </a:r>
-            <a:endParaRPr lang="en-US" sz="960" dirty="0"/>
+              <a:t>The replacement-driven, non-cyclical demand pattern is a genuine tailwind for Tega's own volumes — and, through the Tega relationship, for Datre's order flow. It does not, by itself, diversify Datre's customer concentration.</a:t>
+            </a:r>
+            <a:endParaRPr lang="en-US" sz="1030" dirty="0"/>
           </a:p>
           <a:p>
             <a:pPr marL="342900" indent="-342900">
               <a:lnSpc>
-                <a:spcPct val="105000"/>
+                <a:spcPct val="115000"/>
               </a:lnSpc>
-              <a:spcAft>
-                <a:spcPts val="500"/>
-              </a:spcAft>
               <a:buSzPct val="100000"/>
               <a:buChar char="•"/>
             </a:pPr>
             <a:r>
-              <a:rPr lang="en-US" sz="960" dirty="0">
+              <a:rPr lang="en-US" sz="1030" dirty="0">
                 <a:solidFill>
                   <a:srgbClr val="1C1F26"/>
                 </a:solidFill>
@@ -14566,576 +15370,15 @@
                 <a:ea typeface="Calibri" pitchFamily="34" charset="-122"/>
                 <a:cs typeface="Calibri" pitchFamily="34" charset="-120"/>
               </a:rPr>
-              <a:t>Tier-1 OEM integration incl. Komatsu-qualified</a:t>
-            </a:r>
-            <a:endParaRPr lang="en-US" sz="960" dirty="0"/>
-          </a:p>
-          <a:p>
-            <a:pPr marL="342900" indent="-342900">
-              <a:lnSpc>
-                <a:spcPct val="105000"/>
-              </a:lnSpc>
-              <a:spcAft>
-                <a:spcPts val="500"/>
-              </a:spcAft>
-              <a:buSzPct val="100000"/>
-              <a:buChar char="•"/>
-            </a:pPr>
-            <a:r>
-              <a:rPr lang="en-US" sz="960" dirty="0">
-                <a:solidFill>
-                  <a:srgbClr val="1C1F26"/>
-                </a:solidFill>
-                <a:latin typeface="Calibri" pitchFamily="34" charset="0"/>
-                <a:ea typeface="Calibri" pitchFamily="34" charset="-122"/>
-                <a:cs typeface="Calibri" pitchFamily="34" charset="-120"/>
-              </a:rPr>
-              <a:t>Operationally debt-free; ISO 9001:2015 / RDSO 'A' / ZED Gold</a:t>
-            </a:r>
-            <a:endParaRPr lang="en-US" sz="960" dirty="0"/>
-          </a:p>
-        </p:txBody>
-      </p:sp>
-      <p:sp>
-        <p:nvSpPr>
-          <p:cNvPr id="7" name="Shape 5"/>
-          <p:cNvSpPr/>
-          <p:nvPr/>
-        </p:nvSpPr>
-        <p:spPr>
-          <a:xfrm>
-            <a:off x="6255868" y="1737360"/>
-            <a:ext cx="5387188" cy="2148840"/>
-          </a:xfrm>
-          <a:prstGeom prst="roundRect">
-            <a:avLst>
-              <a:gd name="adj" fmla="val 3404"/>
-            </a:avLst>
-          </a:prstGeom>
-          <a:solidFill>
-            <a:srgbClr val="FBEEEC"/>
-          </a:solidFill>
-          <a:ln/>
-        </p:spPr>
-      </p:sp>
-      <p:sp>
-        <p:nvSpPr>
-          <p:cNvPr id="8" name="Text 6"/>
-          <p:cNvSpPr/>
-          <p:nvPr/>
-        </p:nvSpPr>
-        <p:spPr>
-          <a:xfrm>
-            <a:off x="6511900" y="1901952"/>
-            <a:ext cx="4875124" cy="274320"/>
-          </a:xfrm>
-          <a:prstGeom prst="rect">
-            <a:avLst/>
-          </a:prstGeom>
-          <a:noFill/>
-          <a:ln/>
-        </p:spPr>
-        <p:txBody>
-          <a:bodyPr wrap="square" lIns="0" tIns="0" rIns="0" bIns="0" rtlCol="0" anchor="ctr"/>
-          <a:lstStyle/>
-          <a:p>
-            <a:pPr indent="0" marL="0">
-              <a:buNone/>
-            </a:pPr>
-            <a:r>
-              <a:rPr lang="en-US" sz="1150" b="1" spc="150" kern="0" dirty="0">
-                <a:solidFill>
-                  <a:srgbClr val="B8453F"/>
-                </a:solidFill>
-                <a:latin typeface="Calibri" pitchFamily="34" charset="0"/>
-                <a:ea typeface="Calibri" pitchFamily="34" charset="-122"/>
-                <a:cs typeface="Calibri" pitchFamily="34" charset="-120"/>
-              </a:rPr>
-              <a:t>WEAKNESSES</a:t>
-            </a:r>
-            <a:endParaRPr lang="en-US" sz="1150" dirty="0"/>
-          </a:p>
-        </p:txBody>
-      </p:sp>
-      <p:sp>
-        <p:nvSpPr>
-          <p:cNvPr id="9" name="Text 7"/>
-          <p:cNvSpPr/>
-          <p:nvPr/>
-        </p:nvSpPr>
-        <p:spPr>
-          <a:xfrm>
-            <a:off x="6511900" y="2212848"/>
-            <a:ext cx="4875124" cy="1554480"/>
-          </a:xfrm>
-          <a:prstGeom prst="rect">
-            <a:avLst/>
-          </a:prstGeom>
-          <a:noFill/>
-          <a:ln/>
-        </p:spPr>
-        <p:txBody>
-          <a:bodyPr wrap="square" lIns="0" tIns="0" rIns="0" bIns="0" rtlCol="0" anchor="ctr"/>
-          <a:lstStyle/>
-          <a:p>
-            <a:pPr marL="342900" indent="-342900">
-              <a:lnSpc>
-                <a:spcPct val="105000"/>
-              </a:lnSpc>
-              <a:spcAft>
-                <a:spcPts val="500"/>
-              </a:spcAft>
-              <a:buSzPct val="100000"/>
-              <a:buChar char="•"/>
-            </a:pPr>
-            <a:r>
-              <a:rPr lang="en-US" sz="960" dirty="0">
-                <a:solidFill>
-                  <a:srgbClr val="1C1F26"/>
-                </a:solidFill>
-                <a:latin typeface="Calibri" pitchFamily="34" charset="0"/>
-                <a:ea typeface="Calibri" pitchFamily="34" charset="-122"/>
-                <a:cs typeface="Calibri" pitchFamily="34" charset="-120"/>
-              </a:rPr>
-              <a:t>Negative net worth (-₹3.0 Cr, FY24)</a:t>
-            </a:r>
-            <a:endParaRPr lang="en-US" sz="960" dirty="0"/>
-          </a:p>
-          <a:p>
-            <a:pPr marL="342900" indent="-342900">
-              <a:lnSpc>
-                <a:spcPct val="105000"/>
-              </a:lnSpc>
-              <a:spcAft>
-                <a:spcPts val="500"/>
-              </a:spcAft>
-              <a:buSzPct val="100000"/>
-              <a:buChar char="•"/>
-            </a:pPr>
-            <a:r>
-              <a:rPr lang="en-US" sz="960" dirty="0">
-                <a:solidFill>
-                  <a:srgbClr val="1C1F26"/>
-                </a:solidFill>
-                <a:latin typeface="Calibri" pitchFamily="34" charset="0"/>
-                <a:ea typeface="Calibri" pitchFamily="34" charset="-122"/>
-                <a:cs typeface="Calibri" pitchFamily="34" charset="-120"/>
-              </a:rPr>
-              <a:t>~80% of contribution from 2 customers</a:t>
-            </a:r>
-            <a:endParaRPr lang="en-US" sz="960" dirty="0"/>
-          </a:p>
-          <a:p>
-            <a:pPr marL="342900" indent="-342900">
-              <a:lnSpc>
-                <a:spcPct val="105000"/>
-              </a:lnSpc>
-              <a:spcAft>
-                <a:spcPts val="500"/>
-              </a:spcAft>
-              <a:buSzPct val="100000"/>
-              <a:buChar char="•"/>
-            </a:pPr>
-            <a:r>
-              <a:rPr lang="en-US" sz="960" dirty="0">
-                <a:solidFill>
-                  <a:srgbClr val="1C1F26"/>
-                </a:solidFill>
-                <a:latin typeface="Calibri" pitchFamily="34" charset="0"/>
-                <a:ea typeface="Calibri" pitchFamily="34" charset="-122"/>
-                <a:cs typeface="Calibri" pitchFamily="34" charset="-120"/>
-              </a:rPr>
-              <a:t>Rejection rate at 10.1%, worst on record</a:t>
-            </a:r>
-            <a:endParaRPr lang="en-US" sz="960" dirty="0"/>
-          </a:p>
-          <a:p>
-            <a:pPr marL="342900" indent="-342900">
-              <a:lnSpc>
-                <a:spcPct val="105000"/>
-              </a:lnSpc>
-              <a:spcAft>
-                <a:spcPts val="500"/>
-              </a:spcAft>
-              <a:buSzPct val="100000"/>
-              <a:buChar char="•"/>
-            </a:pPr>
-            <a:r>
-              <a:rPr lang="en-US" sz="960" dirty="0">
-                <a:solidFill>
-                  <a:srgbClr val="1C1F26"/>
-                </a:solidFill>
-                <a:latin typeface="Calibri" pitchFamily="34" charset="0"/>
-                <a:ea typeface="Calibri" pitchFamily="34" charset="-122"/>
-                <a:cs typeface="Calibri" pitchFamily="34" charset="-120"/>
-              </a:rPr>
-              <a:t>Recurring auditor qualification; sub-scale vs. peer median</a:t>
-            </a:r>
-            <a:endParaRPr lang="en-US" sz="960" dirty="0"/>
-          </a:p>
-        </p:txBody>
-      </p:sp>
-      <p:sp>
-        <p:nvSpPr>
-          <p:cNvPr id="10" name="Shape 8"/>
-          <p:cNvSpPr/>
-          <p:nvPr/>
-        </p:nvSpPr>
-        <p:spPr>
-          <a:xfrm>
-            <a:off x="548640" y="4114800"/>
-            <a:ext cx="5387188" cy="2148840"/>
-          </a:xfrm>
-          <a:prstGeom prst="roundRect">
-            <a:avLst>
-              <a:gd name="adj" fmla="val 3404"/>
-            </a:avLst>
-          </a:prstGeom>
-          <a:solidFill>
-            <a:srgbClr val="FCEFE6"/>
-          </a:solidFill>
-          <a:ln/>
-        </p:spPr>
-      </p:sp>
-      <p:sp>
-        <p:nvSpPr>
-          <p:cNvPr id="11" name="Text 9"/>
-          <p:cNvSpPr/>
-          <p:nvPr/>
-        </p:nvSpPr>
-        <p:spPr>
-          <a:xfrm>
-            <a:off x="804672" y="4279392"/>
-            <a:ext cx="4875124" cy="274320"/>
-          </a:xfrm>
-          <a:prstGeom prst="rect">
-            <a:avLst/>
-          </a:prstGeom>
-          <a:noFill/>
-          <a:ln/>
-        </p:spPr>
-        <p:txBody>
-          <a:bodyPr wrap="square" lIns="0" tIns="0" rIns="0" bIns="0" rtlCol="0" anchor="ctr"/>
-          <a:lstStyle/>
-          <a:p>
-            <a:pPr indent="0" marL="0">
-              <a:buNone/>
-            </a:pPr>
-            <a:r>
-              <a:rPr lang="en-US" sz="1150" b="1" spc="150" kern="0" dirty="0">
-                <a:solidFill>
-                  <a:srgbClr val="D9622B"/>
-                </a:solidFill>
-                <a:latin typeface="Calibri" pitchFamily="34" charset="0"/>
-                <a:ea typeface="Calibri" pitchFamily="34" charset="-122"/>
-                <a:cs typeface="Calibri" pitchFamily="34" charset="-120"/>
-              </a:rPr>
-              <a:t>OPPORTUNITIES</a:t>
-            </a:r>
-            <a:endParaRPr lang="en-US" sz="1150" dirty="0"/>
-          </a:p>
-        </p:txBody>
-      </p:sp>
-      <p:sp>
-        <p:nvSpPr>
-          <p:cNvPr id="12" name="Text 10"/>
-          <p:cNvSpPr/>
-          <p:nvPr/>
-        </p:nvSpPr>
-        <p:spPr>
-          <a:xfrm>
-            <a:off x="804672" y="4590288"/>
-            <a:ext cx="4875124" cy="1554480"/>
-          </a:xfrm>
-          <a:prstGeom prst="rect">
-            <a:avLst/>
-          </a:prstGeom>
-          <a:noFill/>
-          <a:ln/>
-        </p:spPr>
-        <p:txBody>
-          <a:bodyPr wrap="square" lIns="0" tIns="0" rIns="0" bIns="0" rtlCol="0" anchor="ctr"/>
-          <a:lstStyle/>
-          <a:p>
-            <a:pPr marL="342900" indent="-342900">
-              <a:lnSpc>
-                <a:spcPct val="105000"/>
-              </a:lnSpc>
-              <a:spcAft>
-                <a:spcPts val="500"/>
-              </a:spcAft>
-              <a:buSzPct val="100000"/>
-              <a:buChar char="•"/>
-            </a:pPr>
-            <a:r>
-              <a:rPr lang="en-US" sz="960" dirty="0">
-                <a:solidFill>
-                  <a:srgbClr val="1C1F26"/>
-                </a:solidFill>
-                <a:latin typeface="Calibri" pitchFamily="34" charset="0"/>
-                <a:ea typeface="Calibri" pitchFamily="34" charset="-122"/>
-                <a:cs typeface="Calibri" pitchFamily="34" charset="-120"/>
-              </a:rPr>
-              <a:t>Komatsu global qualification (pending quality closure)</a:t>
-            </a:r>
-            <a:endParaRPr lang="en-US" sz="960" dirty="0"/>
-          </a:p>
-          <a:p>
-            <a:pPr marL="342900" indent="-342900">
-              <a:lnSpc>
-                <a:spcPct val="105000"/>
-              </a:lnSpc>
-              <a:spcAft>
-                <a:spcPts val="500"/>
-              </a:spcAft>
-              <a:buSzPct val="100000"/>
-              <a:buChar char="•"/>
-            </a:pPr>
-            <a:r>
-              <a:rPr lang="en-US" sz="960" dirty="0">
-                <a:solidFill>
-                  <a:srgbClr val="1C1F26"/>
-                </a:solidFill>
-                <a:latin typeface="Calibri" pitchFamily="34" charset="0"/>
-                <a:ea typeface="Calibri" pitchFamily="34" charset="-122"/>
-                <a:cs typeface="Calibri" pitchFamily="34" charset="-120"/>
-              </a:rPr>
-              <a:t>Thejo Engineering diversification, actively growing</a:t>
-            </a:r>
-            <a:endParaRPr lang="en-US" sz="960" dirty="0"/>
-          </a:p>
-          <a:p>
-            <a:pPr marL="342900" indent="-342900">
-              <a:lnSpc>
-                <a:spcPct val="105000"/>
-              </a:lnSpc>
-              <a:spcAft>
-                <a:spcPts val="500"/>
-              </a:spcAft>
-              <a:buSzPct val="100000"/>
-              <a:buChar char="•"/>
-            </a:pPr>
-            <a:r>
-              <a:rPr lang="en-US" sz="960" dirty="0">
-                <a:solidFill>
-                  <a:srgbClr val="1C1F26"/>
-                </a:solidFill>
-                <a:latin typeface="Calibri" pitchFamily="34" charset="0"/>
-                <a:ea typeface="Calibri" pitchFamily="34" charset="-122"/>
-                <a:cs typeface="Calibri" pitchFamily="34" charset="-120"/>
-              </a:rPr>
-              <a:t>15-23% capacity headroom without capex</a:t>
-            </a:r>
-            <a:endParaRPr lang="en-US" sz="960" dirty="0"/>
-          </a:p>
-          <a:p>
-            <a:pPr marL="342900" indent="-342900">
-              <a:lnSpc>
-                <a:spcPct val="105000"/>
-              </a:lnSpc>
-              <a:spcAft>
-                <a:spcPts val="500"/>
-              </a:spcAft>
-              <a:buSzPct val="100000"/>
-              <a:buChar char="•"/>
-            </a:pPr>
-            <a:r>
-              <a:rPr lang="en-US" sz="960" dirty="0">
-                <a:solidFill>
-                  <a:srgbClr val="1C1F26"/>
-                </a:solidFill>
-                <a:latin typeface="Calibri" pitchFamily="34" charset="0"/>
-                <a:ea typeface="Calibri" pitchFamily="34" charset="-122"/>
-                <a:cs typeface="Calibri" pitchFamily="34" charset="-120"/>
-              </a:rPr>
-              <a:t>Margin upside toward peer best-in-class (7-8% net)</a:t>
-            </a:r>
-            <a:endParaRPr lang="en-US" sz="960" dirty="0"/>
-          </a:p>
-        </p:txBody>
-      </p:sp>
-      <p:sp>
-        <p:nvSpPr>
-          <p:cNvPr id="13" name="Shape 11"/>
-          <p:cNvSpPr/>
-          <p:nvPr/>
-        </p:nvSpPr>
-        <p:spPr>
-          <a:xfrm>
-            <a:off x="6255868" y="4114800"/>
-            <a:ext cx="5387188" cy="2148840"/>
-          </a:xfrm>
-          <a:prstGeom prst="roundRect">
-            <a:avLst>
-              <a:gd name="adj" fmla="val 3404"/>
-            </a:avLst>
-          </a:prstGeom>
-          <a:solidFill>
-            <a:srgbClr val="F4F5F7"/>
-          </a:solidFill>
-          <a:ln/>
-        </p:spPr>
-      </p:sp>
-      <p:sp>
-        <p:nvSpPr>
-          <p:cNvPr id="14" name="Text 12"/>
-          <p:cNvSpPr/>
-          <p:nvPr/>
-        </p:nvSpPr>
-        <p:spPr>
-          <a:xfrm>
-            <a:off x="6511900" y="4279392"/>
-            <a:ext cx="4875124" cy="274320"/>
-          </a:xfrm>
-          <a:prstGeom prst="rect">
-            <a:avLst/>
-          </a:prstGeom>
-          <a:noFill/>
-          <a:ln/>
-        </p:spPr>
-        <p:txBody>
-          <a:bodyPr wrap="square" lIns="0" tIns="0" rIns="0" bIns="0" rtlCol="0" anchor="ctr"/>
-          <a:lstStyle/>
-          <a:p>
-            <a:pPr indent="0" marL="0">
-              <a:buNone/>
-            </a:pPr>
-            <a:r>
-              <a:rPr lang="en-US" sz="1150" b="1" spc="150" kern="0" dirty="0">
-                <a:solidFill>
-                  <a:srgbClr val="3A4553"/>
-                </a:solidFill>
-                <a:latin typeface="Calibri" pitchFamily="34" charset="0"/>
-                <a:ea typeface="Calibri" pitchFamily="34" charset="-122"/>
-                <a:cs typeface="Calibri" pitchFamily="34" charset="-120"/>
-              </a:rPr>
-              <a:t>THREATS</a:t>
-            </a:r>
-            <a:endParaRPr lang="en-US" sz="1150" dirty="0"/>
-          </a:p>
-        </p:txBody>
-      </p:sp>
-      <p:sp>
-        <p:nvSpPr>
-          <p:cNvPr id="15" name="Text 13"/>
-          <p:cNvSpPr/>
-          <p:nvPr/>
-        </p:nvSpPr>
-        <p:spPr>
-          <a:xfrm>
-            <a:off x="6511900" y="4590288"/>
-            <a:ext cx="4875124" cy="1554480"/>
-          </a:xfrm>
-          <a:prstGeom prst="rect">
-            <a:avLst/>
-          </a:prstGeom>
-          <a:noFill/>
-          <a:ln/>
-        </p:spPr>
-        <p:txBody>
-          <a:bodyPr wrap="square" lIns="0" tIns="0" rIns="0" bIns="0" rtlCol="0" anchor="ctr"/>
-          <a:lstStyle/>
-          <a:p>
-            <a:pPr marL="342900" indent="-342900">
-              <a:lnSpc>
-                <a:spcPct val="105000"/>
-              </a:lnSpc>
-              <a:spcAft>
-                <a:spcPts val="500"/>
-              </a:spcAft>
-              <a:buSzPct val="100000"/>
-              <a:buChar char="•"/>
-            </a:pPr>
-            <a:r>
-              <a:rPr lang="en-US" sz="960" dirty="0">
-                <a:solidFill>
-                  <a:srgbClr val="1C1F26"/>
-                </a:solidFill>
-                <a:latin typeface="Calibri" pitchFamily="34" charset="0"/>
-                <a:ea typeface="Calibri" pitchFamily="34" charset="-122"/>
-                <a:cs typeface="Calibri" pitchFamily="34" charset="-120"/>
-              </a:rPr>
-              <a:t>Tega/Escorts concentration; Tega small-order decline</a:t>
-            </a:r>
-            <a:endParaRPr lang="en-US" sz="960" dirty="0"/>
-          </a:p>
-          <a:p>
-            <a:pPr marL="342900" indent="-342900">
-              <a:lnSpc>
-                <a:spcPct val="105000"/>
-              </a:lnSpc>
-              <a:spcAft>
-                <a:spcPts val="500"/>
-              </a:spcAft>
-              <a:buSzPct val="100000"/>
-              <a:buChar char="•"/>
-            </a:pPr>
-            <a:r>
-              <a:rPr lang="en-US" sz="960" dirty="0">
-                <a:solidFill>
-                  <a:srgbClr val="1C1F26"/>
-                </a:solidFill>
-                <a:latin typeface="Calibri" pitchFamily="34" charset="0"/>
-                <a:ea typeface="Calibri" pitchFamily="34" charset="-122"/>
-                <a:cs typeface="Calibri" pitchFamily="34" charset="-120"/>
-              </a:rPr>
-              <a:t>Q1 FY26-27 demand air-pocket, cause unconfirmed</a:t>
-            </a:r>
-            <a:endParaRPr lang="en-US" sz="960" dirty="0"/>
-          </a:p>
-          <a:p>
-            <a:pPr marL="342900" indent="-342900">
-              <a:lnSpc>
-                <a:spcPct val="105000"/>
-              </a:lnSpc>
-              <a:spcAft>
-                <a:spcPts val="500"/>
-              </a:spcAft>
-              <a:buSzPct val="100000"/>
-              <a:buChar char="•"/>
-            </a:pPr>
-            <a:r>
-              <a:rPr lang="en-US" sz="960" dirty="0">
-                <a:solidFill>
-                  <a:srgbClr val="1C1F26"/>
-                </a:solidFill>
-                <a:latin typeface="Calibri" pitchFamily="34" charset="0"/>
-                <a:ea typeface="Calibri" pitchFamily="34" charset="-122"/>
-                <a:cs typeface="Calibri" pitchFamily="34" charset="-120"/>
-              </a:rPr>
-              <a:t>Steel/ferrochrome price volatility</a:t>
-            </a:r>
-            <a:endParaRPr lang="en-US" sz="960" dirty="0"/>
-          </a:p>
-          <a:p>
-            <a:pPr marL="342900" indent="-342900">
-              <a:lnSpc>
-                <a:spcPct val="105000"/>
-              </a:lnSpc>
-              <a:spcAft>
-                <a:spcPts val="500"/>
-              </a:spcAft>
-              <a:buSzPct val="100000"/>
-              <a:buChar char="•"/>
-            </a:pPr>
-            <a:r>
-              <a:rPr lang="en-US" sz="960" dirty="0">
-                <a:solidFill>
-                  <a:srgbClr val="1C1F26"/>
-                </a:solidFill>
-                <a:latin typeface="Calibri" pitchFamily="34" charset="0"/>
-                <a:ea typeface="Calibri" pitchFamily="34" charset="-122"/>
-                <a:cs typeface="Calibri" pitchFamily="34" charset="-120"/>
-              </a:rPr>
-              <a:t>Open Komatsu first-article nonconformity</a:t>
-            </a:r>
-            <a:endParaRPr lang="en-US" sz="960" dirty="0"/>
-          </a:p>
-        </p:txBody>
-      </p:sp>
-      <p:sp>
-        <p:nvSpPr>
-          <p:cNvPr id="16" name="Text 14"/>
+              <a:t>High entry barriers cut both ways: they protect Datre's niche position as a qualified supplier, but also cap how much of the value chain's economics a sub-tier caster can capture.</a:t>
+            </a:r>
+            <a:endParaRPr lang="en-US" sz="1030" dirty="0"/>
+          </a:p>
+        </p:txBody>
+      </p:sp>
+      <p:sp>
+        <p:nvSpPr>
+          <p:cNvPr id="19" name="Text 17"/>
           <p:cNvSpPr/>
           <p:nvPr/>
         </p:nvSpPr>
@@ -15174,7 +15417,7 @@
       </p:sp>
       <p:sp>
         <p:nvSpPr>
-          <p:cNvPr id="17" name="Text 15"/>
+          <p:cNvPr id="20" name="Text 18"/>
           <p:cNvSpPr/>
           <p:nvPr/>
         </p:nvSpPr>
@@ -16419,7 +16662,7 @@
     <p:bg>
       <p:bgPr>
         <a:solidFill>
-          <a:srgbClr val="1C1F26"/>
+          <a:srgbClr val="FFFFFF"/>
         </a:solidFill>
       </p:bgPr>
     </p:bg>
@@ -16470,7 +16713,7 @@
                 <a:ea typeface="Calibri" pitchFamily="34" charset="-122"/>
                 <a:cs typeface="Calibri" pitchFamily="34" charset="-120"/>
               </a:rPr>
-              <a:t>INVESTMENT CONSIDERATIONS</a:t>
+              <a:t>CRITICAL ANALYSIS — SUMMARY</a:t>
             </a:r>
             <a:endParaRPr lang="en-US" sz="1100" dirty="0"/>
           </a:p>
@@ -16503,13 +16746,13 @@
             <a:r>
               <a:rPr lang="en-US" sz="3000" b="1" dirty="0">
                 <a:solidFill>
-                  <a:srgbClr val="FFFFFF"/>
+                  <a:srgbClr val="1C1F26"/>
                 </a:solidFill>
                 <a:latin typeface="Cambria" pitchFamily="34" charset="0"/>
                 <a:ea typeface="Cambria" pitchFamily="34" charset="-122"/>
                 <a:cs typeface="Cambria" pitchFamily="34" charset="-120"/>
               </a:rPr>
-              <a:t>A framework for the ask — terms to be finalized with management</a:t>
+              <a:t>SWOT: the honest scorecard</a:t>
             </a:r>
             <a:endParaRPr lang="en-US" sz="3000" dirty="0"/>
           </a:p>
@@ -16523,16 +16766,16 @@
         </p:nvSpPr>
         <p:spPr>
           <a:xfrm>
-            <a:off x="548640" y="1783080"/>
-            <a:ext cx="11094415" cy="685800"/>
+            <a:off x="548640" y="1737360"/>
+            <a:ext cx="5387188" cy="2148840"/>
           </a:xfrm>
           <a:prstGeom prst="roundRect">
             <a:avLst>
-              <a:gd name="adj" fmla="val 8000"/>
+              <a:gd name="adj" fmla="val 3404"/>
             </a:avLst>
           </a:prstGeom>
           <a:solidFill>
-            <a:srgbClr val="262B34"/>
+            <a:srgbClr val="EDF5EF"/>
           </a:solidFill>
           <a:ln/>
         </p:spPr>
@@ -16545,8 +16788,8 @@
         </p:nvSpPr>
         <p:spPr>
           <a:xfrm>
-            <a:off x="777240" y="1783080"/>
-            <a:ext cx="10637215" cy="685800"/>
+            <a:off x="804672" y="1901952"/>
+            <a:ext cx="4875124" cy="274320"/>
           </a:xfrm>
           <a:prstGeom prst="rect">
             <a:avLst/>
@@ -16559,95 +16802,173 @@
           <a:lstStyle/>
           <a:p>
             <a:pPr indent="0" marL="0">
+              <a:buNone/>
+            </a:pPr>
+            <a:r>
+              <a:rPr lang="en-US" sz="1150" b="1" spc="150" kern="0" dirty="0">
+                <a:solidFill>
+                  <a:srgbClr val="3F8F5F"/>
+                </a:solidFill>
+                <a:latin typeface="Calibri" pitchFamily="34" charset="0"/>
+                <a:ea typeface="Calibri" pitchFamily="34" charset="-122"/>
+                <a:cs typeface="Calibri" pitchFamily="34" charset="-120"/>
+              </a:rPr>
+              <a:t>STRENGTHS</a:t>
+            </a:r>
+            <a:endParaRPr lang="en-US" sz="1150" dirty="0"/>
+          </a:p>
+        </p:txBody>
+      </p:sp>
+      <p:sp>
+        <p:nvSpPr>
+          <p:cNvPr id="6" name="Text 4"/>
+          <p:cNvSpPr/>
+          <p:nvPr/>
+        </p:nvSpPr>
+        <p:spPr>
+          <a:xfrm>
+            <a:off x="804672" y="2212848"/>
+            <a:ext cx="4875124" cy="1554480"/>
+          </a:xfrm>
+          <a:prstGeom prst="rect">
+            <a:avLst/>
+          </a:prstGeom>
+          <a:noFill/>
+          <a:ln/>
+        </p:spPr>
+        <p:txBody>
+          <a:bodyPr wrap="square" lIns="0" tIns="0" rIns="0" bIns="0" rtlCol="0" anchor="ctr"/>
+          <a:lstStyle/>
+          <a:p>
+            <a:pPr marL="342900" indent="-342900">
               <a:lnSpc>
-                <a:spcPct val="110000"/>
+                <a:spcPct val="105000"/>
               </a:lnSpc>
-              <a:buNone/>
-            </a:pPr>
-            <a:r>
-              <a:rPr lang="en-US" sz="1030" i="1" dirty="0">
-                <a:solidFill>
-                  <a:srgbClr val="E8B84B"/>
-                </a:solidFill>
-                <a:latin typeface="Calibri" pitchFamily="34" charset="0"/>
-                <a:ea typeface="Calibri" pitchFamily="34" charset="-122"/>
-                <a:cs typeface="Calibri" pitchFamily="34" charset="-120"/>
-              </a:rPr>
-              <a:t>The materials reviewed do not specify a funding quantum, instrument, valuation or use-of-proceeds. What follows is a suggested framework, derived from the financial and operational analysis in this deck — not a management-approved ask.</a:t>
-            </a:r>
-            <a:endParaRPr lang="en-US" sz="1030" dirty="0"/>
-          </a:p>
-        </p:txBody>
-      </p:sp>
-      <p:sp>
-        <p:nvSpPr>
-          <p:cNvPr id="6" name="Shape 4"/>
-          <p:cNvSpPr/>
-          <p:nvPr/>
-        </p:nvSpPr>
-        <p:spPr>
-          <a:xfrm>
-            <a:off x="548640" y="2788920"/>
-            <a:ext cx="457200" cy="457200"/>
-          </a:xfrm>
-          <a:prstGeom prst="ellipse">
-            <a:avLst/>
+              <a:spcAft>
+                <a:spcPts val="500"/>
+              </a:spcAft>
+              <a:buSzPct val="100000"/>
+              <a:buChar char="•"/>
+            </a:pPr>
+            <a:r>
+              <a:rPr lang="en-US" sz="960" dirty="0">
+                <a:solidFill>
+                  <a:srgbClr val="1C1F26"/>
+                </a:solidFill>
+                <a:latin typeface="Calibri" pitchFamily="34" charset="0"/>
+                <a:ea typeface="Calibri" pitchFamily="34" charset="-122"/>
+                <a:cs typeface="Calibri" pitchFamily="34" charset="-120"/>
+              </a:rPr>
+              <a:t>Three consecutive audited profit years (FY23-25)</a:t>
+            </a:r>
+            <a:endParaRPr lang="en-US" sz="960" dirty="0"/>
+          </a:p>
+          <a:p>
+            <a:pPr marL="342900" indent="-342900">
+              <a:lnSpc>
+                <a:spcPct val="105000"/>
+              </a:lnSpc>
+              <a:spcAft>
+                <a:spcPts val="500"/>
+              </a:spcAft>
+              <a:buSzPct val="100000"/>
+              <a:buChar char="•"/>
+            </a:pPr>
+            <a:r>
+              <a:rPr lang="en-US" sz="960" dirty="0">
+                <a:solidFill>
+                  <a:srgbClr val="1C1F26"/>
+                </a:solidFill>
+                <a:latin typeface="Calibri" pitchFamily="34" charset="0"/>
+                <a:ea typeface="Calibri" pitchFamily="34" charset="-122"/>
+                <a:cs typeface="Calibri" pitchFamily="34" charset="-120"/>
+              </a:rPr>
+              <a:t>Defensible heat-treatment IP moat</a:t>
+            </a:r>
+            <a:endParaRPr lang="en-US" sz="960" dirty="0"/>
+          </a:p>
+          <a:p>
+            <a:pPr marL="342900" indent="-342900">
+              <a:lnSpc>
+                <a:spcPct val="105000"/>
+              </a:lnSpc>
+              <a:spcAft>
+                <a:spcPts val="500"/>
+              </a:spcAft>
+              <a:buSzPct val="100000"/>
+              <a:buChar char="•"/>
+            </a:pPr>
+            <a:r>
+              <a:rPr lang="en-US" sz="960" dirty="0">
+                <a:solidFill>
+                  <a:srgbClr val="1C1F26"/>
+                </a:solidFill>
+                <a:latin typeface="Calibri" pitchFamily="34" charset="0"/>
+                <a:ea typeface="Calibri" pitchFamily="34" charset="-122"/>
+                <a:cs typeface="Calibri" pitchFamily="34" charset="-120"/>
+              </a:rPr>
+              <a:t>Tier-1 OEM integration incl. Komatsu-qualified</a:t>
+            </a:r>
+            <a:endParaRPr lang="en-US" sz="960" dirty="0"/>
+          </a:p>
+          <a:p>
+            <a:pPr marL="342900" indent="-342900">
+              <a:lnSpc>
+                <a:spcPct val="105000"/>
+              </a:lnSpc>
+              <a:spcAft>
+                <a:spcPts val="500"/>
+              </a:spcAft>
+              <a:buSzPct val="100000"/>
+              <a:buChar char="•"/>
+            </a:pPr>
+            <a:r>
+              <a:rPr lang="en-US" sz="960" dirty="0">
+                <a:solidFill>
+                  <a:srgbClr val="1C1F26"/>
+                </a:solidFill>
+                <a:latin typeface="Calibri" pitchFamily="34" charset="0"/>
+                <a:ea typeface="Calibri" pitchFamily="34" charset="-122"/>
+                <a:cs typeface="Calibri" pitchFamily="34" charset="-120"/>
+              </a:rPr>
+              <a:t>Operationally debt-free; ISO 9001:2015 / RDSO 'A' / ZED Gold</a:t>
+            </a:r>
+            <a:endParaRPr lang="en-US" sz="960" dirty="0"/>
+          </a:p>
+        </p:txBody>
+      </p:sp>
+      <p:sp>
+        <p:nvSpPr>
+          <p:cNvPr id="7" name="Shape 5"/>
+          <p:cNvSpPr/>
+          <p:nvPr/>
+        </p:nvSpPr>
+        <p:spPr>
+          <a:xfrm>
+            <a:off x="6255868" y="1737360"/>
+            <a:ext cx="5387188" cy="2148840"/>
+          </a:xfrm>
+          <a:prstGeom prst="roundRect">
+            <a:avLst>
+              <a:gd name="adj" fmla="val 3404"/>
+            </a:avLst>
           </a:prstGeom>
           <a:solidFill>
-            <a:srgbClr val="D9622B"/>
+            <a:srgbClr val="FBEEEC"/>
           </a:solidFill>
           <a:ln/>
         </p:spPr>
       </p:sp>
       <p:sp>
         <p:nvSpPr>
-          <p:cNvPr id="7" name="Text 5"/>
-          <p:cNvSpPr/>
-          <p:nvPr/>
-        </p:nvSpPr>
-        <p:spPr>
-          <a:xfrm>
-            <a:off x="548640" y="2788920"/>
-            <a:ext cx="457200" cy="457200"/>
-          </a:xfrm>
-          <a:prstGeom prst="rect">
-            <a:avLst/>
-          </a:prstGeom>
-          <a:noFill/>
-          <a:ln/>
-        </p:spPr>
-        <p:txBody>
-          <a:bodyPr wrap="square" lIns="0" tIns="0" rIns="0" bIns="0" rtlCol="0" anchor="ctr"/>
-          <a:lstStyle/>
-          <a:p>
-            <a:pPr algn="ctr" indent="0" marL="0">
-              <a:buNone/>
-            </a:pPr>
-            <a:r>
-              <a:rPr lang="en-US" sz="1300" b="1" dirty="0">
-                <a:solidFill>
-                  <a:srgbClr val="FFFFFF"/>
-                </a:solidFill>
-                <a:latin typeface="Calibri" pitchFamily="34" charset="0"/>
-                <a:ea typeface="Calibri" pitchFamily="34" charset="-122"/>
-                <a:cs typeface="Calibri" pitchFamily="34" charset="-120"/>
-              </a:rPr>
-              <a:t>1</a:t>
-            </a:r>
-            <a:endParaRPr lang="en-US" sz="1300" dirty="0"/>
-          </a:p>
-        </p:txBody>
-      </p:sp>
-      <p:sp>
-        <p:nvSpPr>
           <p:cNvPr id="8" name="Text 6"/>
           <p:cNvSpPr/>
           <p:nvPr/>
         </p:nvSpPr>
         <p:spPr>
           <a:xfrm>
-            <a:off x="1234440" y="2770632"/>
-            <a:ext cx="2926080" cy="502920"/>
+            <a:off x="6511900" y="1901952"/>
+            <a:ext cx="4875124" cy="274320"/>
           </a:xfrm>
           <a:prstGeom prst="rect">
             <a:avLst/>
@@ -16660,137 +16981,352 @@
           <a:lstStyle/>
           <a:p>
             <a:pPr indent="0" marL="0">
+              <a:buNone/>
+            </a:pPr>
+            <a:r>
+              <a:rPr lang="en-US" sz="1150" b="1" spc="150" kern="0" dirty="0">
+                <a:solidFill>
+                  <a:srgbClr val="B8453F"/>
+                </a:solidFill>
+                <a:latin typeface="Calibri" pitchFamily="34" charset="0"/>
+                <a:ea typeface="Calibri" pitchFamily="34" charset="-122"/>
+                <a:cs typeface="Calibri" pitchFamily="34" charset="-120"/>
+              </a:rPr>
+              <a:t>WEAKNESSES</a:t>
+            </a:r>
+            <a:endParaRPr lang="en-US" sz="1150" dirty="0"/>
+          </a:p>
+        </p:txBody>
+      </p:sp>
+      <p:sp>
+        <p:nvSpPr>
+          <p:cNvPr id="9" name="Text 7"/>
+          <p:cNvSpPr/>
+          <p:nvPr/>
+        </p:nvSpPr>
+        <p:spPr>
+          <a:xfrm>
+            <a:off x="6511900" y="2212848"/>
+            <a:ext cx="4875124" cy="1554480"/>
+          </a:xfrm>
+          <a:prstGeom prst="rect">
+            <a:avLst/>
+          </a:prstGeom>
+          <a:noFill/>
+          <a:ln/>
+        </p:spPr>
+        <p:txBody>
+          <a:bodyPr wrap="square" lIns="0" tIns="0" rIns="0" bIns="0" rtlCol="0" anchor="ctr"/>
+          <a:lstStyle/>
+          <a:p>
+            <a:pPr marL="342900" indent="-342900">
               <a:lnSpc>
-                <a:spcPct val="100000"/>
+                <a:spcPct val="105000"/>
               </a:lnSpc>
-              <a:buNone/>
-            </a:pPr>
-            <a:r>
-              <a:rPr lang="en-US" sz="1300" b="1" dirty="0">
-                <a:solidFill>
-                  <a:srgbClr val="FFFFFF"/>
-                </a:solidFill>
-                <a:latin typeface="Calibri" pitchFamily="34" charset="0"/>
-                <a:ea typeface="Calibri" pitchFamily="34" charset="-122"/>
-                <a:cs typeface="Calibri" pitchFamily="34" charset="-120"/>
-              </a:rPr>
-              <a:t>Balance-sheet repair</a:t>
-            </a:r>
-            <a:endParaRPr lang="en-US" sz="1300" dirty="0"/>
-          </a:p>
-        </p:txBody>
-      </p:sp>
-      <p:sp>
-        <p:nvSpPr>
-          <p:cNvPr id="9" name="Text 7"/>
-          <p:cNvSpPr/>
-          <p:nvPr/>
-        </p:nvSpPr>
-        <p:spPr>
-          <a:xfrm>
-            <a:off x="4297680" y="2743200"/>
-            <a:ext cx="7345375" cy="731520"/>
-          </a:xfrm>
-          <a:prstGeom prst="rect">
-            <a:avLst/>
-          </a:prstGeom>
-          <a:noFill/>
-          <a:ln/>
-        </p:spPr>
-        <p:txBody>
-          <a:bodyPr wrap="square" lIns="0" tIns="0" rIns="0" bIns="0" rtlCol="0" anchor="t"/>
+              <a:spcAft>
+                <a:spcPts val="500"/>
+              </a:spcAft>
+              <a:buSzPct val="100000"/>
+              <a:buChar char="•"/>
+            </a:pPr>
+            <a:r>
+              <a:rPr lang="en-US" sz="960" dirty="0">
+                <a:solidFill>
+                  <a:srgbClr val="1C1F26"/>
+                </a:solidFill>
+                <a:latin typeface="Calibri" pitchFamily="34" charset="0"/>
+                <a:ea typeface="Calibri" pitchFamily="34" charset="-122"/>
+                <a:cs typeface="Calibri" pitchFamily="34" charset="-120"/>
+              </a:rPr>
+              <a:t>Negative net worth (-₹3.0 Cr, FY24)</a:t>
+            </a:r>
+            <a:endParaRPr lang="en-US" sz="960" dirty="0"/>
+          </a:p>
+          <a:p>
+            <a:pPr marL="342900" indent="-342900">
+              <a:lnSpc>
+                <a:spcPct val="105000"/>
+              </a:lnSpc>
+              <a:spcAft>
+                <a:spcPts val="500"/>
+              </a:spcAft>
+              <a:buSzPct val="100000"/>
+              <a:buChar char="•"/>
+            </a:pPr>
+            <a:r>
+              <a:rPr lang="en-US" sz="960" dirty="0">
+                <a:solidFill>
+                  <a:srgbClr val="1C1F26"/>
+                </a:solidFill>
+                <a:latin typeface="Calibri" pitchFamily="34" charset="0"/>
+                <a:ea typeface="Calibri" pitchFamily="34" charset="-122"/>
+                <a:cs typeface="Calibri" pitchFamily="34" charset="-120"/>
+              </a:rPr>
+              <a:t>~80% of contribution from 2 customers</a:t>
+            </a:r>
+            <a:endParaRPr lang="en-US" sz="960" dirty="0"/>
+          </a:p>
+          <a:p>
+            <a:pPr marL="342900" indent="-342900">
+              <a:lnSpc>
+                <a:spcPct val="105000"/>
+              </a:lnSpc>
+              <a:spcAft>
+                <a:spcPts val="500"/>
+              </a:spcAft>
+              <a:buSzPct val="100000"/>
+              <a:buChar char="•"/>
+            </a:pPr>
+            <a:r>
+              <a:rPr lang="en-US" sz="960" dirty="0">
+                <a:solidFill>
+                  <a:srgbClr val="1C1F26"/>
+                </a:solidFill>
+                <a:latin typeface="Calibri" pitchFamily="34" charset="0"/>
+                <a:ea typeface="Calibri" pitchFamily="34" charset="-122"/>
+                <a:cs typeface="Calibri" pitchFamily="34" charset="-120"/>
+              </a:rPr>
+              <a:t>Rejection rate at 10.1%, worst on record</a:t>
+            </a:r>
+            <a:endParaRPr lang="en-US" sz="960" dirty="0"/>
+          </a:p>
+          <a:p>
+            <a:pPr marL="342900" indent="-342900">
+              <a:lnSpc>
+                <a:spcPct val="105000"/>
+              </a:lnSpc>
+              <a:spcAft>
+                <a:spcPts val="500"/>
+              </a:spcAft>
+              <a:buSzPct val="100000"/>
+              <a:buChar char="•"/>
+            </a:pPr>
+            <a:r>
+              <a:rPr lang="en-US" sz="960" dirty="0">
+                <a:solidFill>
+                  <a:srgbClr val="1C1F26"/>
+                </a:solidFill>
+                <a:latin typeface="Calibri" pitchFamily="34" charset="0"/>
+                <a:ea typeface="Calibri" pitchFamily="34" charset="-122"/>
+                <a:cs typeface="Calibri" pitchFamily="34" charset="-120"/>
+              </a:rPr>
+              <a:t>Recurring auditor qualification; sub-scale vs. peer median</a:t>
+            </a:r>
+            <a:endParaRPr lang="en-US" sz="960" dirty="0"/>
+          </a:p>
+        </p:txBody>
+      </p:sp>
+      <p:sp>
+        <p:nvSpPr>
+          <p:cNvPr id="10" name="Shape 8"/>
+          <p:cNvSpPr/>
+          <p:nvPr/>
+        </p:nvSpPr>
+        <p:spPr>
+          <a:xfrm>
+            <a:off x="548640" y="4114800"/>
+            <a:ext cx="5387188" cy="2148840"/>
+          </a:xfrm>
+          <a:prstGeom prst="roundRect">
+            <a:avLst>
+              <a:gd name="adj" fmla="val 3404"/>
+            </a:avLst>
+          </a:prstGeom>
+          <a:solidFill>
+            <a:srgbClr val="FCEFE6"/>
+          </a:solidFill>
+          <a:ln/>
+        </p:spPr>
+      </p:sp>
+      <p:sp>
+        <p:nvSpPr>
+          <p:cNvPr id="11" name="Text 9"/>
+          <p:cNvSpPr/>
+          <p:nvPr/>
+        </p:nvSpPr>
+        <p:spPr>
+          <a:xfrm>
+            <a:off x="804672" y="4279392"/>
+            <a:ext cx="4875124" cy="274320"/>
+          </a:xfrm>
+          <a:prstGeom prst="rect">
+            <a:avLst/>
+          </a:prstGeom>
+          <a:noFill/>
+          <a:ln/>
+        </p:spPr>
+        <p:txBody>
+          <a:bodyPr wrap="square" lIns="0" tIns="0" rIns="0" bIns="0" rtlCol="0" anchor="ctr"/>
           <a:lstStyle/>
           <a:p>
             <a:pPr indent="0" marL="0">
+              <a:buNone/>
+            </a:pPr>
+            <a:r>
+              <a:rPr lang="en-US" sz="1150" b="1" spc="150" kern="0" dirty="0">
+                <a:solidFill>
+                  <a:srgbClr val="D9622B"/>
+                </a:solidFill>
+                <a:latin typeface="Calibri" pitchFamily="34" charset="0"/>
+                <a:ea typeface="Calibri" pitchFamily="34" charset="-122"/>
+                <a:cs typeface="Calibri" pitchFamily="34" charset="-120"/>
+              </a:rPr>
+              <a:t>OPPORTUNITIES</a:t>
+            </a:r>
+            <a:endParaRPr lang="en-US" sz="1150" dirty="0"/>
+          </a:p>
+        </p:txBody>
+      </p:sp>
+      <p:sp>
+        <p:nvSpPr>
+          <p:cNvPr id="12" name="Text 10"/>
+          <p:cNvSpPr/>
+          <p:nvPr/>
+        </p:nvSpPr>
+        <p:spPr>
+          <a:xfrm>
+            <a:off x="804672" y="4590288"/>
+            <a:ext cx="4875124" cy="1554480"/>
+          </a:xfrm>
+          <a:prstGeom prst="rect">
+            <a:avLst/>
+          </a:prstGeom>
+          <a:noFill/>
+          <a:ln/>
+        </p:spPr>
+        <p:txBody>
+          <a:bodyPr wrap="square" lIns="0" tIns="0" rIns="0" bIns="0" rtlCol="0" anchor="ctr"/>
+          <a:lstStyle/>
+          <a:p>
+            <a:pPr marL="342900" indent="-342900">
               <a:lnSpc>
-                <a:spcPct val="115000"/>
+                <a:spcPct val="105000"/>
               </a:lnSpc>
-              <a:buNone/>
-            </a:pPr>
-            <a:r>
-              <a:rPr lang="en-US" sz="1030" dirty="0">
-                <a:solidFill>
-                  <a:srgbClr val="CBD3DC"/>
-                </a:solidFill>
-                <a:latin typeface="Calibri" pitchFamily="34" charset="0"/>
-                <a:ea typeface="Calibri" pitchFamily="34" charset="-122"/>
-                <a:cs typeface="Calibri" pitchFamily="34" charset="-120"/>
-              </a:rPr>
-              <a:t>Equity infusion or a structured plan to accelerate net worth from -₹3.0 Cr to positive, rather than relying solely on ~₹1.4 Cr/yr retained earnings.</a:t>
-            </a:r>
-            <a:endParaRPr lang="en-US" sz="1030" dirty="0"/>
-          </a:p>
-        </p:txBody>
-      </p:sp>
-      <p:sp>
-        <p:nvSpPr>
-          <p:cNvPr id="10" name="Shape 8"/>
-          <p:cNvSpPr/>
-          <p:nvPr/>
-        </p:nvSpPr>
-        <p:spPr>
-          <a:xfrm>
-            <a:off x="548640" y="3840480"/>
-            <a:ext cx="457200" cy="457200"/>
-          </a:xfrm>
-          <a:prstGeom prst="ellipse">
-            <a:avLst/>
+              <a:spcAft>
+                <a:spcPts val="500"/>
+              </a:spcAft>
+              <a:buSzPct val="100000"/>
+              <a:buChar char="•"/>
+            </a:pPr>
+            <a:r>
+              <a:rPr lang="en-US" sz="960" dirty="0">
+                <a:solidFill>
+                  <a:srgbClr val="1C1F26"/>
+                </a:solidFill>
+                <a:latin typeface="Calibri" pitchFamily="34" charset="0"/>
+                <a:ea typeface="Calibri" pitchFamily="34" charset="-122"/>
+                <a:cs typeface="Calibri" pitchFamily="34" charset="-120"/>
+              </a:rPr>
+              <a:t>Komatsu global qualification (pending quality closure)</a:t>
+            </a:r>
+            <a:endParaRPr lang="en-US" sz="960" dirty="0"/>
+          </a:p>
+          <a:p>
+            <a:pPr marL="342900" indent="-342900">
+              <a:lnSpc>
+                <a:spcPct val="105000"/>
+              </a:lnSpc>
+              <a:spcAft>
+                <a:spcPts val="500"/>
+              </a:spcAft>
+              <a:buSzPct val="100000"/>
+              <a:buChar char="•"/>
+            </a:pPr>
+            <a:r>
+              <a:rPr lang="en-US" sz="960" dirty="0">
+                <a:solidFill>
+                  <a:srgbClr val="1C1F26"/>
+                </a:solidFill>
+                <a:latin typeface="Calibri" pitchFamily="34" charset="0"/>
+                <a:ea typeface="Calibri" pitchFamily="34" charset="-122"/>
+                <a:cs typeface="Calibri" pitchFamily="34" charset="-120"/>
+              </a:rPr>
+              <a:t>Thejo Engineering diversification, actively growing</a:t>
+            </a:r>
+            <a:endParaRPr lang="en-US" sz="960" dirty="0"/>
+          </a:p>
+          <a:p>
+            <a:pPr marL="342900" indent="-342900">
+              <a:lnSpc>
+                <a:spcPct val="105000"/>
+              </a:lnSpc>
+              <a:spcAft>
+                <a:spcPts val="500"/>
+              </a:spcAft>
+              <a:buSzPct val="100000"/>
+              <a:buChar char="•"/>
+            </a:pPr>
+            <a:r>
+              <a:rPr lang="en-US" sz="960" dirty="0">
+                <a:solidFill>
+                  <a:srgbClr val="1C1F26"/>
+                </a:solidFill>
+                <a:latin typeface="Calibri" pitchFamily="34" charset="0"/>
+                <a:ea typeface="Calibri" pitchFamily="34" charset="-122"/>
+                <a:cs typeface="Calibri" pitchFamily="34" charset="-120"/>
+              </a:rPr>
+              <a:t>15-23% capacity headroom without capex</a:t>
+            </a:r>
+            <a:endParaRPr lang="en-US" sz="960" dirty="0"/>
+          </a:p>
+          <a:p>
+            <a:pPr marL="342900" indent="-342900">
+              <a:lnSpc>
+                <a:spcPct val="105000"/>
+              </a:lnSpc>
+              <a:spcAft>
+                <a:spcPts val="500"/>
+              </a:spcAft>
+              <a:buSzPct val="100000"/>
+              <a:buChar char="•"/>
+            </a:pPr>
+            <a:r>
+              <a:rPr lang="en-US" sz="960" dirty="0">
+                <a:solidFill>
+                  <a:srgbClr val="1C1F26"/>
+                </a:solidFill>
+                <a:latin typeface="Calibri" pitchFamily="34" charset="0"/>
+                <a:ea typeface="Calibri" pitchFamily="34" charset="-122"/>
+                <a:cs typeface="Calibri" pitchFamily="34" charset="-120"/>
+              </a:rPr>
+              <a:t>Margin upside toward peer best-in-class (7-8% net)</a:t>
+            </a:r>
+            <a:endParaRPr lang="en-US" sz="960" dirty="0"/>
+          </a:p>
+        </p:txBody>
+      </p:sp>
+      <p:sp>
+        <p:nvSpPr>
+          <p:cNvPr id="13" name="Shape 11"/>
+          <p:cNvSpPr/>
+          <p:nvPr/>
+        </p:nvSpPr>
+        <p:spPr>
+          <a:xfrm>
+            <a:off x="6255868" y="4114800"/>
+            <a:ext cx="5387188" cy="2148840"/>
+          </a:xfrm>
+          <a:prstGeom prst="roundRect">
+            <a:avLst>
+              <a:gd name="adj" fmla="val 3404"/>
+            </a:avLst>
           </a:prstGeom>
           <a:solidFill>
-            <a:srgbClr val="D9622B"/>
+            <a:srgbClr val="F4F5F7"/>
           </a:solidFill>
           <a:ln/>
         </p:spPr>
       </p:sp>
       <p:sp>
         <p:nvSpPr>
-          <p:cNvPr id="11" name="Text 9"/>
-          <p:cNvSpPr/>
-          <p:nvPr/>
-        </p:nvSpPr>
-        <p:spPr>
-          <a:xfrm>
-            <a:off x="548640" y="3840480"/>
-            <a:ext cx="457200" cy="457200"/>
-          </a:xfrm>
-          <a:prstGeom prst="rect">
-            <a:avLst/>
-          </a:prstGeom>
-          <a:noFill/>
-          <a:ln/>
-        </p:spPr>
-        <p:txBody>
-          <a:bodyPr wrap="square" lIns="0" tIns="0" rIns="0" bIns="0" rtlCol="0" anchor="ctr"/>
-          <a:lstStyle/>
-          <a:p>
-            <a:pPr algn="ctr" indent="0" marL="0">
-              <a:buNone/>
-            </a:pPr>
-            <a:r>
-              <a:rPr lang="en-US" sz="1300" b="1" dirty="0">
-                <a:solidFill>
-                  <a:srgbClr val="FFFFFF"/>
-                </a:solidFill>
-                <a:latin typeface="Calibri" pitchFamily="34" charset="0"/>
-                <a:ea typeface="Calibri" pitchFamily="34" charset="-122"/>
-                <a:cs typeface="Calibri" pitchFamily="34" charset="-120"/>
-              </a:rPr>
-              <a:t>2</a:t>
-            </a:r>
-            <a:endParaRPr lang="en-US" sz="1300" dirty="0"/>
-          </a:p>
-        </p:txBody>
-      </p:sp>
-      <p:sp>
-        <p:nvSpPr>
-          <p:cNvPr id="12" name="Text 10"/>
-          <p:cNvSpPr/>
-          <p:nvPr/>
-        </p:nvSpPr>
-        <p:spPr>
-          <a:xfrm>
-            <a:off x="1234440" y="3822192"/>
-            <a:ext cx="2926080" cy="502920"/>
+          <p:cNvPr id="14" name="Text 12"/>
+          <p:cNvSpPr/>
+          <p:nvPr/>
+        </p:nvSpPr>
+        <p:spPr>
+          <a:xfrm>
+            <a:off x="6511900" y="4279392"/>
+            <a:ext cx="4875124" cy="274320"/>
           </a:xfrm>
           <a:prstGeom prst="rect">
             <a:avLst/>
@@ -16803,256 +17339,144 @@
           <a:lstStyle/>
           <a:p>
             <a:pPr indent="0" marL="0">
+              <a:buNone/>
+            </a:pPr>
+            <a:r>
+              <a:rPr lang="en-US" sz="1150" b="1" spc="150" kern="0" dirty="0">
+                <a:solidFill>
+                  <a:srgbClr val="3A4553"/>
+                </a:solidFill>
+                <a:latin typeface="Calibri" pitchFamily="34" charset="0"/>
+                <a:ea typeface="Calibri" pitchFamily="34" charset="-122"/>
+                <a:cs typeface="Calibri" pitchFamily="34" charset="-120"/>
+              </a:rPr>
+              <a:t>THREATS</a:t>
+            </a:r>
+            <a:endParaRPr lang="en-US" sz="1150" dirty="0"/>
+          </a:p>
+        </p:txBody>
+      </p:sp>
+      <p:sp>
+        <p:nvSpPr>
+          <p:cNvPr id="15" name="Text 13"/>
+          <p:cNvSpPr/>
+          <p:nvPr/>
+        </p:nvSpPr>
+        <p:spPr>
+          <a:xfrm>
+            <a:off x="6511900" y="4590288"/>
+            <a:ext cx="4875124" cy="1554480"/>
+          </a:xfrm>
+          <a:prstGeom prst="rect">
+            <a:avLst/>
+          </a:prstGeom>
+          <a:noFill/>
+          <a:ln/>
+        </p:spPr>
+        <p:txBody>
+          <a:bodyPr wrap="square" lIns="0" tIns="0" rIns="0" bIns="0" rtlCol="0" anchor="ctr"/>
+          <a:lstStyle/>
+          <a:p>
+            <a:pPr marL="342900" indent="-342900">
               <a:lnSpc>
-                <a:spcPct val="100000"/>
+                <a:spcPct val="105000"/>
               </a:lnSpc>
-              <a:buNone/>
-            </a:pPr>
-            <a:r>
-              <a:rPr lang="en-US" sz="1300" b="1" dirty="0">
-                <a:solidFill>
-                  <a:srgbClr val="FFFFFF"/>
-                </a:solidFill>
-                <a:latin typeface="Calibri" pitchFamily="34" charset="0"/>
-                <a:ea typeface="Calibri" pitchFamily="34" charset="-122"/>
-                <a:cs typeface="Calibri" pitchFamily="34" charset="-120"/>
-              </a:rPr>
-              <a:t>Working-capital bridge</a:t>
-            </a:r>
-            <a:endParaRPr lang="en-US" sz="1300" dirty="0"/>
-          </a:p>
-        </p:txBody>
-      </p:sp>
-      <p:sp>
-        <p:nvSpPr>
-          <p:cNvPr id="13" name="Text 11"/>
-          <p:cNvSpPr/>
-          <p:nvPr/>
-        </p:nvSpPr>
-        <p:spPr>
-          <a:xfrm>
-            <a:off x="4297680" y="3794760"/>
-            <a:ext cx="7345375" cy="731520"/>
-          </a:xfrm>
-          <a:prstGeom prst="rect">
-            <a:avLst/>
-          </a:prstGeom>
-          <a:noFill/>
-          <a:ln/>
-        </p:spPr>
-        <p:txBody>
-          <a:bodyPr wrap="square" lIns="0" tIns="0" rIns="0" bIns="0" rtlCol="0" anchor="t"/>
-          <a:lstStyle/>
-          <a:p>
-            <a:pPr indent="0" marL="0">
+              <a:spcAft>
+                <a:spcPts val="500"/>
+              </a:spcAft>
+              <a:buSzPct val="100000"/>
+              <a:buChar char="•"/>
+            </a:pPr>
+            <a:r>
+              <a:rPr lang="en-US" sz="960" dirty="0">
+                <a:solidFill>
+                  <a:srgbClr val="1C1F26"/>
+                </a:solidFill>
+                <a:latin typeface="Calibri" pitchFamily="34" charset="0"/>
+                <a:ea typeface="Calibri" pitchFamily="34" charset="-122"/>
+                <a:cs typeface="Calibri" pitchFamily="34" charset="-120"/>
+              </a:rPr>
+              <a:t>Tega/Escorts concentration; Tega small-order decline</a:t>
+            </a:r>
+            <a:endParaRPr lang="en-US" sz="960" dirty="0"/>
+          </a:p>
+          <a:p>
+            <a:pPr marL="342900" indent="-342900">
               <a:lnSpc>
-                <a:spcPct val="115000"/>
+                <a:spcPct val="105000"/>
               </a:lnSpc>
-              <a:buNone/>
-            </a:pPr>
-            <a:r>
-              <a:rPr lang="en-US" sz="1030" dirty="0">
-                <a:solidFill>
-                  <a:srgbClr val="CBD3DC"/>
-                </a:solidFill>
-                <a:latin typeface="Calibri" pitchFamily="34" charset="0"/>
-                <a:ea typeface="Calibri" pitchFamily="34" charset="-122"/>
-                <a:cs typeface="Calibri" pitchFamily="34" charset="-120"/>
-              </a:rPr>
-              <a:t>Support the Tega/Escorts receivable cycle at the ₹25-30 Cr revenue range Datre has now demonstrated it can reach.</a:t>
-            </a:r>
-            <a:endParaRPr lang="en-US" sz="1030" dirty="0"/>
-          </a:p>
-        </p:txBody>
-      </p:sp>
-      <p:sp>
-        <p:nvSpPr>
-          <p:cNvPr id="14" name="Shape 12"/>
-          <p:cNvSpPr/>
-          <p:nvPr/>
-        </p:nvSpPr>
-        <p:spPr>
-          <a:xfrm>
-            <a:off x="548640" y="4892040"/>
-            <a:ext cx="457200" cy="457200"/>
-          </a:xfrm>
-          <a:prstGeom prst="ellipse">
-            <a:avLst/>
-          </a:prstGeom>
-          <a:solidFill>
-            <a:srgbClr val="D9622B"/>
-          </a:solidFill>
-          <a:ln/>
-        </p:spPr>
-      </p:sp>
-      <p:sp>
-        <p:nvSpPr>
-          <p:cNvPr id="15" name="Text 13"/>
-          <p:cNvSpPr/>
-          <p:nvPr/>
-        </p:nvSpPr>
-        <p:spPr>
-          <a:xfrm>
-            <a:off x="548640" y="4892040"/>
-            <a:ext cx="457200" cy="457200"/>
-          </a:xfrm>
-          <a:prstGeom prst="rect">
-            <a:avLst/>
-          </a:prstGeom>
-          <a:noFill/>
-          <a:ln/>
-        </p:spPr>
-        <p:txBody>
-          <a:bodyPr wrap="square" lIns="0" tIns="0" rIns="0" bIns="0" rtlCol="0" anchor="ctr"/>
-          <a:lstStyle/>
-          <a:p>
-            <a:pPr algn="ctr" indent="0" marL="0">
-              <a:buNone/>
-            </a:pPr>
-            <a:r>
-              <a:rPr lang="en-US" sz="1300" b="1" dirty="0">
-                <a:solidFill>
-                  <a:srgbClr val="FFFFFF"/>
-                </a:solidFill>
-                <a:latin typeface="Calibri" pitchFamily="34" charset="0"/>
-                <a:ea typeface="Calibri" pitchFamily="34" charset="-122"/>
-                <a:cs typeface="Calibri" pitchFamily="34" charset="-120"/>
-              </a:rPr>
-              <a:t>3</a:t>
-            </a:r>
-            <a:endParaRPr lang="en-US" sz="1300" dirty="0"/>
+              <a:spcAft>
+                <a:spcPts val="500"/>
+              </a:spcAft>
+              <a:buSzPct val="100000"/>
+              <a:buChar char="•"/>
+            </a:pPr>
+            <a:r>
+              <a:rPr lang="en-US" sz="960" dirty="0">
+                <a:solidFill>
+                  <a:srgbClr val="1C1F26"/>
+                </a:solidFill>
+                <a:latin typeface="Calibri" pitchFamily="34" charset="0"/>
+                <a:ea typeface="Calibri" pitchFamily="34" charset="-122"/>
+                <a:cs typeface="Calibri" pitchFamily="34" charset="-120"/>
+              </a:rPr>
+              <a:t>Q1 FY26-27 demand air-pocket, cause unconfirmed</a:t>
+            </a:r>
+            <a:endParaRPr lang="en-US" sz="960" dirty="0"/>
+          </a:p>
+          <a:p>
+            <a:pPr marL="342900" indent="-342900">
+              <a:lnSpc>
+                <a:spcPct val="105000"/>
+              </a:lnSpc>
+              <a:spcAft>
+                <a:spcPts val="500"/>
+              </a:spcAft>
+              <a:buSzPct val="100000"/>
+              <a:buChar char="•"/>
+            </a:pPr>
+            <a:r>
+              <a:rPr lang="en-US" sz="960" dirty="0">
+                <a:solidFill>
+                  <a:srgbClr val="1C1F26"/>
+                </a:solidFill>
+                <a:latin typeface="Calibri" pitchFamily="34" charset="0"/>
+                <a:ea typeface="Calibri" pitchFamily="34" charset="-122"/>
+                <a:cs typeface="Calibri" pitchFamily="34" charset="-120"/>
+              </a:rPr>
+              <a:t>Steel/ferrochrome price volatility</a:t>
+            </a:r>
+            <a:endParaRPr lang="en-US" sz="960" dirty="0"/>
+          </a:p>
+          <a:p>
+            <a:pPr marL="342900" indent="-342900">
+              <a:lnSpc>
+                <a:spcPct val="105000"/>
+              </a:lnSpc>
+              <a:spcAft>
+                <a:spcPts val="500"/>
+              </a:spcAft>
+              <a:buSzPct val="100000"/>
+              <a:buChar char="•"/>
+            </a:pPr>
+            <a:r>
+              <a:rPr lang="en-US" sz="960" dirty="0">
+                <a:solidFill>
+                  <a:srgbClr val="1C1F26"/>
+                </a:solidFill>
+                <a:latin typeface="Calibri" pitchFamily="34" charset="0"/>
+                <a:ea typeface="Calibri" pitchFamily="34" charset="-122"/>
+                <a:cs typeface="Calibri" pitchFamily="34" charset="-120"/>
+              </a:rPr>
+              <a:t>Open Komatsu first-article nonconformity</a:t>
+            </a:r>
+            <a:endParaRPr lang="en-US" sz="960" dirty="0"/>
           </a:p>
         </p:txBody>
       </p:sp>
       <p:sp>
         <p:nvSpPr>
           <p:cNvPr id="16" name="Text 14"/>
-          <p:cNvSpPr/>
-          <p:nvPr/>
-        </p:nvSpPr>
-        <p:spPr>
-          <a:xfrm>
-            <a:off x="1234440" y="4873752"/>
-            <a:ext cx="2926080" cy="502920"/>
-          </a:xfrm>
-          <a:prstGeom prst="rect">
-            <a:avLst/>
-          </a:prstGeom>
-          <a:noFill/>
-          <a:ln/>
-        </p:spPr>
-        <p:txBody>
-          <a:bodyPr wrap="square" lIns="0" tIns="0" rIns="0" bIns="0" rtlCol="0" anchor="ctr"/>
-          <a:lstStyle/>
-          <a:p>
-            <a:pPr indent="0" marL="0">
-              <a:lnSpc>
-                <a:spcPct val="100000"/>
-              </a:lnSpc>
-              <a:buNone/>
-            </a:pPr>
-            <a:r>
-              <a:rPr lang="en-US" sz="1300" b="1" dirty="0">
-                <a:solidFill>
-                  <a:srgbClr val="FFFFFF"/>
-                </a:solidFill>
-                <a:latin typeface="Calibri" pitchFamily="34" charset="0"/>
-                <a:ea typeface="Calibri" pitchFamily="34" charset="-122"/>
-                <a:cs typeface="Calibri" pitchFamily="34" charset="-120"/>
-              </a:rPr>
-              <a:t>Quality-systems investment</a:t>
-            </a:r>
-            <a:endParaRPr lang="en-US" sz="1300" dirty="0"/>
-          </a:p>
-        </p:txBody>
-      </p:sp>
-      <p:sp>
-        <p:nvSpPr>
-          <p:cNvPr id="17" name="Text 15"/>
-          <p:cNvSpPr/>
-          <p:nvPr/>
-        </p:nvSpPr>
-        <p:spPr>
-          <a:xfrm>
-            <a:off x="4297680" y="4846320"/>
-            <a:ext cx="7345375" cy="731520"/>
-          </a:xfrm>
-          <a:prstGeom prst="rect">
-            <a:avLst/>
-          </a:prstGeom>
-          <a:noFill/>
-          <a:ln/>
-        </p:spPr>
-        <p:txBody>
-          <a:bodyPr wrap="square" lIns="0" tIns="0" rIns="0" bIns="0" rtlCol="0" anchor="t"/>
-          <a:lstStyle/>
-          <a:p>
-            <a:pPr indent="0" marL="0">
-              <a:lnSpc>
-                <a:spcPct val="115000"/>
-              </a:lnSpc>
-              <a:buNone/>
-            </a:pPr>
-            <a:r>
-              <a:rPr lang="en-US" sz="1030" dirty="0">
-                <a:solidFill>
-                  <a:srgbClr val="CBD3DC"/>
-                </a:solidFill>
-                <a:latin typeface="Calibri" pitchFamily="34" charset="0"/>
-                <a:ea typeface="Calibri" pitchFamily="34" charset="-122"/>
-                <a:cs typeface="Calibri" pitchFamily="34" charset="-120"/>
-              </a:rPr>
-              <a:t>Targeted spend to bring the rejection rate back toward its FY22-23 low (~2.6%) — scrap-cost savings alone should fund a meaningful share of this.</a:t>
-            </a:r>
-            <a:endParaRPr lang="en-US" sz="1030" dirty="0"/>
-          </a:p>
-        </p:txBody>
-      </p:sp>
-      <p:sp>
-        <p:nvSpPr>
-          <p:cNvPr id="18" name="Text 16"/>
-          <p:cNvSpPr/>
-          <p:nvPr/>
-        </p:nvSpPr>
-        <p:spPr>
-          <a:xfrm>
-            <a:off x="548640" y="5989320"/>
-            <a:ext cx="11094415" cy="457200"/>
-          </a:xfrm>
-          <a:prstGeom prst="rect">
-            <a:avLst/>
-          </a:prstGeom>
-          <a:noFill/>
-          <a:ln/>
-        </p:spPr>
-        <p:txBody>
-          <a:bodyPr wrap="square" lIns="0" tIns="0" rIns="0" bIns="0" rtlCol="0" anchor="ctr"/>
-          <a:lstStyle/>
-          <a:p>
-            <a:pPr indent="0" marL="0">
-              <a:lnSpc>
-                <a:spcPct val="110000"/>
-              </a:lnSpc>
-              <a:buNone/>
-            </a:pPr>
-            <a:r>
-              <a:rPr lang="en-US" sz="950" i="1" dirty="0">
-                <a:solidFill>
-                  <a:srgbClr val="9AA2AD"/>
-                </a:solidFill>
-                <a:latin typeface="Calibri" pitchFamily="34" charset="0"/>
-                <a:ea typeface="Calibri" pitchFamily="34" charset="-122"/>
-                <a:cs typeface="Calibri" pitchFamily="34" charset="-120"/>
-              </a:rPr>
-              <a:t>Any of the three should be sized against audited FY25 and FY25-26 management accounts, not the figures in this deck alone — and against resolution of the governance flags on slide 12.</a:t>
-            </a:r>
-            <a:endParaRPr lang="en-US" sz="950" dirty="0"/>
-          </a:p>
-        </p:txBody>
-      </p:sp>
-      <p:sp>
-        <p:nvSpPr>
-          <p:cNvPr id="19" name="Text 17"/>
           <p:cNvSpPr/>
           <p:nvPr/>
         </p:nvSpPr>
@@ -17077,7 +17501,7 @@
             <a:r>
               <a:rPr lang="en-US" sz="800" dirty="0">
                 <a:solidFill>
-                  <a:srgbClr val="8B93A0"/>
+                  <a:srgbClr val="9AA2AD"/>
                 </a:solidFill>
                 <a:latin typeface="Calibri" pitchFamily="34" charset="0"/>
                 <a:ea typeface="Calibri" pitchFamily="34" charset="-122"/>
@@ -17091,7 +17515,7 @@
       </p:sp>
       <p:sp>
         <p:nvSpPr>
-          <p:cNvPr id="20" name="Text 18"/>
+          <p:cNvPr id="17" name="Text 15"/>
           <p:cNvSpPr/>
           <p:nvPr/>
         </p:nvSpPr>
@@ -17116,7 +17540,7 @@
             <a:r>
               <a:rPr lang="en-US" sz="800" dirty="0">
                 <a:solidFill>
-                  <a:srgbClr val="8B93A0"/>
+                  <a:srgbClr val="9AA2AD"/>
                 </a:solidFill>
                 <a:latin typeface="Calibri" pitchFamily="34" charset="0"/>
                 <a:ea typeface="Calibri" pitchFamily="34" charset="-122"/>
@@ -17162,17 +17586,97 @@
       </p:grpSpPr>
       <p:sp>
         <p:nvSpPr>
-          <p:cNvPr id="2" name="Shape 0"/>
-          <p:cNvSpPr/>
-          <p:nvPr/>
-        </p:nvSpPr>
-        <p:spPr>
-          <a:xfrm>
-            <a:off x="9692640" y="-1280160"/>
-            <a:ext cx="4754880" cy="4754880"/>
-          </a:xfrm>
-          <a:prstGeom prst="ellipse">
-            <a:avLst/>
+          <p:cNvPr id="2" name="Text 0"/>
+          <p:cNvSpPr/>
+          <p:nvPr/>
+        </p:nvSpPr>
+        <p:spPr>
+          <a:xfrm>
+            <a:off x="548640" y="457200"/>
+            <a:ext cx="4572000" cy="274320"/>
+          </a:xfrm>
+          <a:prstGeom prst="rect">
+            <a:avLst/>
+          </a:prstGeom>
+          <a:noFill/>
+          <a:ln/>
+        </p:spPr>
+        <p:txBody>
+          <a:bodyPr wrap="square" lIns="0" tIns="0" rIns="0" bIns="0" rtlCol="0" anchor="ctr"/>
+          <a:lstStyle/>
+          <a:p>
+            <a:pPr indent="0" marL="0">
+              <a:buNone/>
+            </a:pPr>
+            <a:r>
+              <a:rPr lang="en-US" sz="1100" b="1" spc="200" kern="0" dirty="0">
+                <a:solidFill>
+                  <a:srgbClr val="D9622B"/>
+                </a:solidFill>
+                <a:latin typeface="Calibri" pitchFamily="34" charset="0"/>
+                <a:ea typeface="Calibri" pitchFamily="34" charset="-122"/>
+                <a:cs typeface="Calibri" pitchFamily="34" charset="-120"/>
+              </a:rPr>
+              <a:t>INVESTMENT CONSIDERATIONS</a:t>
+            </a:r>
+            <a:endParaRPr lang="en-US" sz="1100" dirty="0"/>
+          </a:p>
+        </p:txBody>
+      </p:sp>
+      <p:sp>
+        <p:nvSpPr>
+          <p:cNvPr id="3" name="Text 1"/>
+          <p:cNvSpPr/>
+          <p:nvPr/>
+        </p:nvSpPr>
+        <p:spPr>
+          <a:xfrm>
+            <a:off x="548640" y="841248"/>
+            <a:ext cx="11094415" cy="685800"/>
+          </a:xfrm>
+          <a:prstGeom prst="rect">
+            <a:avLst/>
+          </a:prstGeom>
+          <a:noFill/>
+          <a:ln/>
+        </p:spPr>
+        <p:txBody>
+          <a:bodyPr wrap="square" lIns="0" tIns="0" rIns="0" bIns="0" rtlCol="0" anchor="ctr"/>
+          <a:lstStyle/>
+          <a:p>
+            <a:pPr algn="l" indent="0" marL="0">
+              <a:buNone/>
+            </a:pPr>
+            <a:r>
+              <a:rPr lang="en-US" sz="3000" b="1" dirty="0">
+                <a:solidFill>
+                  <a:srgbClr val="FFFFFF"/>
+                </a:solidFill>
+                <a:latin typeface="Cambria" pitchFamily="34" charset="0"/>
+                <a:ea typeface="Cambria" pitchFamily="34" charset="-122"/>
+                <a:cs typeface="Cambria" pitchFamily="34" charset="-120"/>
+              </a:rPr>
+              <a:t>A framework for the ask — terms to be finalized with management</a:t>
+            </a:r>
+            <a:endParaRPr lang="en-US" sz="3000" dirty="0"/>
+          </a:p>
+        </p:txBody>
+      </p:sp>
+      <p:sp>
+        <p:nvSpPr>
+          <p:cNvPr id="4" name="Shape 2"/>
+          <p:cNvSpPr/>
+          <p:nvPr/>
+        </p:nvSpPr>
+        <p:spPr>
+          <a:xfrm>
+            <a:off x="548640" y="1783080"/>
+            <a:ext cx="11094415" cy="685800"/>
+          </a:xfrm>
+          <a:prstGeom prst="roundRect">
+            <a:avLst>
+              <a:gd name="adj" fmla="val 8000"/>
+            </a:avLst>
           </a:prstGeom>
           <a:solidFill>
             <a:srgbClr val="262B34"/>
@@ -17182,34 +17686,115 @@
       </p:sp>
       <p:sp>
         <p:nvSpPr>
-          <p:cNvPr id="3" name="Shape 1"/>
-          <p:cNvSpPr/>
-          <p:nvPr/>
-        </p:nvSpPr>
-        <p:spPr>
-          <a:xfrm>
-            <a:off x="-1463040" y="4572000"/>
-            <a:ext cx="3657600" cy="3657600"/>
+          <p:cNvPr id="5" name="Text 3"/>
+          <p:cNvSpPr/>
+          <p:nvPr/>
+        </p:nvSpPr>
+        <p:spPr>
+          <a:xfrm>
+            <a:off x="777240" y="1783080"/>
+            <a:ext cx="10637215" cy="685800"/>
+          </a:xfrm>
+          <a:prstGeom prst="rect">
+            <a:avLst/>
+          </a:prstGeom>
+          <a:noFill/>
+          <a:ln/>
+        </p:spPr>
+        <p:txBody>
+          <a:bodyPr wrap="square" lIns="0" tIns="0" rIns="0" bIns="0" rtlCol="0" anchor="ctr"/>
+          <a:lstStyle/>
+          <a:p>
+            <a:pPr indent="0" marL="0">
+              <a:lnSpc>
+                <a:spcPct val="110000"/>
+              </a:lnSpc>
+              <a:buNone/>
+            </a:pPr>
+            <a:r>
+              <a:rPr lang="en-US" sz="1030" i="1" dirty="0">
+                <a:solidFill>
+                  <a:srgbClr val="E8B84B"/>
+                </a:solidFill>
+                <a:latin typeface="Calibri" pitchFamily="34" charset="0"/>
+                <a:ea typeface="Calibri" pitchFamily="34" charset="-122"/>
+                <a:cs typeface="Calibri" pitchFamily="34" charset="-120"/>
+              </a:rPr>
+              <a:t>The materials reviewed do not specify a funding quantum, instrument, valuation or use-of-proceeds. What follows is a suggested framework, derived from the financial and operational analysis in this deck — not a management-approved ask.</a:t>
+            </a:r>
+            <a:endParaRPr lang="en-US" sz="1030" dirty="0"/>
+          </a:p>
+        </p:txBody>
+      </p:sp>
+      <p:sp>
+        <p:nvSpPr>
+          <p:cNvPr id="6" name="Shape 4"/>
+          <p:cNvSpPr/>
+          <p:nvPr/>
+        </p:nvSpPr>
+        <p:spPr>
+          <a:xfrm>
+            <a:off x="548640" y="2788920"/>
+            <a:ext cx="457200" cy="457200"/>
           </a:xfrm>
           <a:prstGeom prst="ellipse">
             <a:avLst/>
           </a:prstGeom>
           <a:solidFill>
-            <a:srgbClr val="262B34"/>
+            <a:srgbClr val="D9622B"/>
           </a:solidFill>
           <a:ln/>
         </p:spPr>
       </p:sp>
       <p:sp>
         <p:nvSpPr>
-          <p:cNvPr id="4" name="Text 2"/>
-          <p:cNvSpPr/>
-          <p:nvPr/>
-        </p:nvSpPr>
-        <p:spPr>
-          <a:xfrm>
-            <a:off x="548640" y="2286000"/>
-            <a:ext cx="9144000" cy="731520"/>
+          <p:cNvPr id="7" name="Text 5"/>
+          <p:cNvSpPr/>
+          <p:nvPr/>
+        </p:nvSpPr>
+        <p:spPr>
+          <a:xfrm>
+            <a:off x="548640" y="2788920"/>
+            <a:ext cx="457200" cy="457200"/>
+          </a:xfrm>
+          <a:prstGeom prst="rect">
+            <a:avLst/>
+          </a:prstGeom>
+          <a:noFill/>
+          <a:ln/>
+        </p:spPr>
+        <p:txBody>
+          <a:bodyPr wrap="square" lIns="0" tIns="0" rIns="0" bIns="0" rtlCol="0" anchor="ctr"/>
+          <a:lstStyle/>
+          <a:p>
+            <a:pPr algn="ctr" indent="0" marL="0">
+              <a:buNone/>
+            </a:pPr>
+            <a:r>
+              <a:rPr lang="en-US" sz="1300" b="1" dirty="0">
+                <a:solidFill>
+                  <a:srgbClr val="FFFFFF"/>
+                </a:solidFill>
+                <a:latin typeface="Calibri" pitchFamily="34" charset="0"/>
+                <a:ea typeface="Calibri" pitchFamily="34" charset="-122"/>
+                <a:cs typeface="Calibri" pitchFamily="34" charset="-120"/>
+              </a:rPr>
+              <a:t>1</a:t>
+            </a:r>
+            <a:endParaRPr lang="en-US" sz="1300" dirty="0"/>
+          </a:p>
+        </p:txBody>
+      </p:sp>
+      <p:sp>
+        <p:nvSpPr>
+          <p:cNvPr id="8" name="Text 6"/>
+          <p:cNvSpPr/>
+          <p:nvPr/>
+        </p:nvSpPr>
+        <p:spPr>
+          <a:xfrm>
+            <a:off x="1234440" y="2770632"/>
+            <a:ext cx="2926080" cy="502920"/>
           </a:xfrm>
           <a:prstGeom prst="rect">
             <a:avLst/>
@@ -17222,176 +17807,23 @@
           <a:lstStyle/>
           <a:p>
             <a:pPr indent="0" marL="0">
-              <a:buNone/>
-            </a:pPr>
-            <a:r>
-              <a:rPr lang="en-US" sz="3400" b="1" dirty="0">
+              <a:lnSpc>
+                <a:spcPct val="100000"/>
+              </a:lnSpc>
+              <a:buNone/>
+            </a:pPr>
+            <a:r>
+              <a:rPr lang="en-US" sz="1300" b="1" dirty="0">
                 <a:solidFill>
                   <a:srgbClr val="FFFFFF"/>
                 </a:solidFill>
-                <a:latin typeface="Cambria" pitchFamily="34" charset="0"/>
-                <a:ea typeface="Cambria" pitchFamily="34" charset="-122"/>
-                <a:cs typeface="Cambria" pitchFamily="34" charset="-120"/>
-              </a:rPr>
-              <a:t>Datre Corporation Limited</a:t>
-            </a:r>
-            <a:endParaRPr lang="en-US" sz="3400" dirty="0"/>
-          </a:p>
-        </p:txBody>
-      </p:sp>
-      <p:sp>
-        <p:nvSpPr>
-          <p:cNvPr id="5" name="Text 3"/>
-          <p:cNvSpPr/>
-          <p:nvPr/>
-        </p:nvSpPr>
-        <p:spPr>
-          <a:xfrm>
-            <a:off x="548640" y="2971800"/>
-            <a:ext cx="9144000" cy="457200"/>
-          </a:xfrm>
-          <a:prstGeom prst="rect">
-            <a:avLst/>
-          </a:prstGeom>
-          <a:noFill/>
-          <a:ln/>
-        </p:spPr>
-        <p:txBody>
-          <a:bodyPr wrap="square" lIns="0" tIns="0" rIns="0" bIns="0" rtlCol="0" anchor="ctr"/>
-          <a:lstStyle/>
-          <a:p>
-            <a:pPr indent="0" marL="0">
-              <a:buNone/>
-            </a:pPr>
-            <a:r>
-              <a:rPr lang="en-US" sz="1500" i="1" dirty="0">
-                <a:solidFill>
-                  <a:srgbClr val="CBD3DC"/>
-                </a:solidFill>
-                <a:latin typeface="Calibri" pitchFamily="34" charset="0"/>
-                <a:ea typeface="Calibri" pitchFamily="34" charset="-122"/>
-                <a:cs typeface="Calibri" pitchFamily="34" charset="-120"/>
-              </a:rPr>
-              <a:t>Engineering Essence, Manufacturing Personified</a:t>
-            </a:r>
-            <a:endParaRPr lang="en-US" sz="1500" dirty="0"/>
-          </a:p>
-        </p:txBody>
-      </p:sp>
-      <p:sp>
-        <p:nvSpPr>
-          <p:cNvPr id="6" name="Text 4"/>
-          <p:cNvSpPr/>
-          <p:nvPr/>
-        </p:nvSpPr>
-        <p:spPr>
-          <a:xfrm>
-            <a:off x="548640" y="4023360"/>
-            <a:ext cx="2743200" cy="274320"/>
-          </a:xfrm>
-          <a:prstGeom prst="rect">
-            <a:avLst/>
-          </a:prstGeom>
-          <a:noFill/>
-          <a:ln/>
-        </p:spPr>
-        <p:txBody>
-          <a:bodyPr wrap="square" lIns="0" tIns="0" rIns="0" bIns="0" rtlCol="0" anchor="ctr"/>
-          <a:lstStyle/>
-          <a:p>
-            <a:pPr indent="0" marL="0">
-              <a:buNone/>
-            </a:pPr>
-            <a:r>
-              <a:rPr lang="en-US" sz="950" b="1" spc="100" kern="0" dirty="0">
-                <a:solidFill>
-                  <a:srgbClr val="D9622B"/>
-                </a:solidFill>
-                <a:latin typeface="Calibri" pitchFamily="34" charset="0"/>
-                <a:ea typeface="Calibri" pitchFamily="34" charset="-122"/>
-                <a:cs typeface="Calibri" pitchFamily="34" charset="-120"/>
-              </a:rPr>
-              <a:t>REGISTERED OFFICE</a:t>
-            </a:r>
-            <a:endParaRPr lang="en-US" sz="950" dirty="0"/>
-          </a:p>
-        </p:txBody>
-      </p:sp>
-      <p:sp>
-        <p:nvSpPr>
-          <p:cNvPr id="7" name="Text 5"/>
-          <p:cNvSpPr/>
-          <p:nvPr/>
-        </p:nvSpPr>
-        <p:spPr>
-          <a:xfrm>
-            <a:off x="548640" y="4279392"/>
-            <a:ext cx="9144000" cy="365760"/>
-          </a:xfrm>
-          <a:prstGeom prst="rect">
-            <a:avLst/>
-          </a:prstGeom>
-          <a:noFill/>
-          <a:ln/>
-        </p:spPr>
-        <p:txBody>
-          <a:bodyPr wrap="square" lIns="0" tIns="0" rIns="0" bIns="0" rtlCol="0" anchor="ctr"/>
-          <a:lstStyle/>
-          <a:p>
-            <a:pPr indent="0" marL="0">
-              <a:buNone/>
-            </a:pPr>
-            <a:r>
-              <a:rPr lang="en-US" sz="1200" dirty="0">
-                <a:solidFill>
-                  <a:srgbClr val="FFFFFF"/>
-                </a:solidFill>
-                <a:latin typeface="Calibri" pitchFamily="34" charset="0"/>
-                <a:ea typeface="Calibri" pitchFamily="34" charset="-122"/>
-                <a:cs typeface="Calibri" pitchFamily="34" charset="-120"/>
-              </a:rPr>
-              <a:t>Sector-III, Falta Industrial Growth Centre, South 24 Parganas, West Bengal 743504, India</a:t>
-            </a:r>
-            <a:endParaRPr lang="en-US" sz="1200" dirty="0"/>
-          </a:p>
-        </p:txBody>
-      </p:sp>
-      <p:sp>
-        <p:nvSpPr>
-          <p:cNvPr id="8" name="Text 6"/>
-          <p:cNvSpPr/>
-          <p:nvPr/>
-        </p:nvSpPr>
-        <p:spPr>
-          <a:xfrm>
-            <a:off x="548640" y="4681728"/>
-            <a:ext cx="2743200" cy="274320"/>
-          </a:xfrm>
-          <a:prstGeom prst="rect">
-            <a:avLst/>
-          </a:prstGeom>
-          <a:noFill/>
-          <a:ln/>
-        </p:spPr>
-        <p:txBody>
-          <a:bodyPr wrap="square" lIns="0" tIns="0" rIns="0" bIns="0" rtlCol="0" anchor="ctr"/>
-          <a:lstStyle/>
-          <a:p>
-            <a:pPr indent="0" marL="0">
-              <a:buNone/>
-            </a:pPr>
-            <a:r>
-              <a:rPr lang="en-US" sz="950" b="1" spc="100" kern="0" dirty="0">
-                <a:solidFill>
-                  <a:srgbClr val="D9622B"/>
-                </a:solidFill>
-                <a:latin typeface="Calibri" pitchFamily="34" charset="0"/>
-                <a:ea typeface="Calibri" pitchFamily="34" charset="-122"/>
-                <a:cs typeface="Calibri" pitchFamily="34" charset="-120"/>
-              </a:rPr>
-              <a:t>CONTACT</a:t>
-            </a:r>
-            <a:endParaRPr lang="en-US" sz="950" dirty="0"/>
+                <a:latin typeface="Calibri" pitchFamily="34" charset="0"/>
+                <a:ea typeface="Calibri" pitchFamily="34" charset="-122"/>
+                <a:cs typeface="Calibri" pitchFamily="34" charset="-120"/>
+              </a:rPr>
+              <a:t>Balance-sheet repair</a:t>
+            </a:r>
+            <a:endParaRPr lang="en-US" sz="1300" dirty="0"/>
           </a:p>
         </p:txBody>
       </p:sp>
@@ -17403,134 +17835,17 @@
         </p:nvSpPr>
         <p:spPr>
           <a:xfrm>
-            <a:off x="548640" y="4937760"/>
-            <a:ext cx="9144000" cy="365760"/>
-          </a:xfrm>
-          <a:prstGeom prst="rect">
-            <a:avLst/>
-          </a:prstGeom>
-          <a:noFill/>
-          <a:ln/>
-        </p:spPr>
-        <p:txBody>
-          <a:bodyPr wrap="square" lIns="0" tIns="0" rIns="0" bIns="0" rtlCol="0" anchor="ctr"/>
-          <a:lstStyle/>
-          <a:p>
-            <a:pPr indent="0" marL="0">
-              <a:buNone/>
-            </a:pPr>
-            <a:r>
-              <a:rPr lang="en-US" sz="1200" dirty="0">
-                <a:solidFill>
-                  <a:srgbClr val="FFFFFF"/>
-                </a:solidFill>
-                <a:latin typeface="Calibri" pitchFamily="34" charset="0"/>
-                <a:ea typeface="Calibri" pitchFamily="34" charset="-122"/>
-                <a:cs typeface="Calibri" pitchFamily="34" charset="-120"/>
-              </a:rPr>
-              <a:t>sales@datre.com  ·  hr@datre.com  ·  www.datre.in</a:t>
-            </a:r>
-            <a:endParaRPr lang="en-US" sz="1200" dirty="0"/>
-          </a:p>
-        </p:txBody>
-      </p:sp>
-      <p:sp>
-        <p:nvSpPr>
-          <p:cNvPr id="10" name="Text 8"/>
-          <p:cNvSpPr/>
-          <p:nvPr/>
-        </p:nvSpPr>
-        <p:spPr>
-          <a:xfrm>
-            <a:off x="548640" y="5340096"/>
-            <a:ext cx="2743200" cy="274320"/>
-          </a:xfrm>
-          <a:prstGeom prst="rect">
-            <a:avLst/>
-          </a:prstGeom>
-          <a:noFill/>
-          <a:ln/>
-        </p:spPr>
-        <p:txBody>
-          <a:bodyPr wrap="square" lIns="0" tIns="0" rIns="0" bIns="0" rtlCol="0" anchor="ctr"/>
-          <a:lstStyle/>
-          <a:p>
-            <a:pPr indent="0" marL="0">
-              <a:buNone/>
-            </a:pPr>
-            <a:r>
-              <a:rPr lang="en-US" sz="950" b="1" spc="100" kern="0" dirty="0">
-                <a:solidFill>
-                  <a:srgbClr val="D9622B"/>
-                </a:solidFill>
-                <a:latin typeface="Calibri" pitchFamily="34" charset="0"/>
-                <a:ea typeface="Calibri" pitchFamily="34" charset="-122"/>
-                <a:cs typeface="Calibri" pitchFamily="34" charset="-120"/>
-              </a:rPr>
-              <a:t>PREPARED FOR</a:t>
-            </a:r>
-            <a:endParaRPr lang="en-US" sz="950" dirty="0"/>
-          </a:p>
-        </p:txBody>
-      </p:sp>
-      <p:sp>
-        <p:nvSpPr>
-          <p:cNvPr id="11" name="Text 9"/>
-          <p:cNvSpPr/>
-          <p:nvPr/>
-        </p:nvSpPr>
-        <p:spPr>
-          <a:xfrm>
-            <a:off x="548640" y="5596128"/>
-            <a:ext cx="9144000" cy="365760"/>
-          </a:xfrm>
-          <a:prstGeom prst="rect">
-            <a:avLst/>
-          </a:prstGeom>
-          <a:noFill/>
-          <a:ln/>
-        </p:spPr>
-        <p:txBody>
-          <a:bodyPr wrap="square" lIns="0" tIns="0" rIns="0" bIns="0" rtlCol="0" anchor="ctr"/>
-          <a:lstStyle/>
-          <a:p>
-            <a:pPr indent="0" marL="0">
-              <a:buNone/>
-            </a:pPr>
-            <a:r>
-              <a:rPr lang="en-US" sz="1200" dirty="0">
-                <a:solidFill>
-                  <a:srgbClr val="FFFFFF"/>
-                </a:solidFill>
-                <a:latin typeface="Calibri" pitchFamily="34" charset="0"/>
-                <a:ea typeface="Calibri" pitchFamily="34" charset="-122"/>
-                <a:cs typeface="Calibri" pitchFamily="34" charset="-120"/>
-              </a:rPr>
-              <a:t>Investor discussion — Indranil Dutta, Chief Executive Officer</a:t>
-            </a:r>
-            <a:endParaRPr lang="en-US" sz="1200" dirty="0"/>
-          </a:p>
-        </p:txBody>
-      </p:sp>
-      <p:sp>
-        <p:nvSpPr>
-          <p:cNvPr id="12" name="Text 10"/>
-          <p:cNvSpPr/>
-          <p:nvPr/>
-        </p:nvSpPr>
-        <p:spPr>
-          <a:xfrm>
-            <a:off x="548640" y="5943600"/>
-            <a:ext cx="11094415" cy="640080"/>
-          </a:xfrm>
-          <a:prstGeom prst="rect">
-            <a:avLst/>
-          </a:prstGeom>
-          <a:noFill/>
-          <a:ln/>
-        </p:spPr>
-        <p:txBody>
-          <a:bodyPr wrap="square" lIns="0" tIns="0" rIns="0" bIns="0" rtlCol="0" anchor="ctr"/>
+            <a:off x="4297680" y="2743200"/>
+            <a:ext cx="7345375" cy="731520"/>
+          </a:xfrm>
+          <a:prstGeom prst="rect">
+            <a:avLst/>
+          </a:prstGeom>
+          <a:noFill/>
+          <a:ln/>
+        </p:spPr>
+        <p:txBody>
+          <a:bodyPr wrap="square" lIns="0" tIns="0" rIns="0" bIns="0" rtlCol="0" anchor="t"/>
           <a:lstStyle/>
           <a:p>
             <a:pPr indent="0" marL="0">
@@ -17540,23 +17855,390 @@
               <a:buNone/>
             </a:pPr>
             <a:r>
-              <a:rPr lang="en-US" sz="850" i="1" dirty="0">
-                <a:solidFill>
-                  <a:srgbClr val="7A828E"/>
-                </a:solidFill>
-                <a:latin typeface="Calibri" pitchFamily="34" charset="0"/>
-                <a:ea typeface="Calibri" pitchFamily="34" charset="-122"/>
-                <a:cs typeface="Calibri" pitchFamily="34" charset="-120"/>
-              </a:rPr>
-              <a:t>This document consolidates the company's own financial statements, management information system reports and internal analyses. Figures are sourced and dated throughout; where audited and unaudited data diverge, both are shown. Confidential — prepared for internal investor discussion only.</a:t>
-            </a:r>
-            <a:endParaRPr lang="en-US" sz="850" dirty="0"/>
+              <a:rPr lang="en-US" sz="1030" dirty="0">
+                <a:solidFill>
+                  <a:srgbClr val="CBD3DC"/>
+                </a:solidFill>
+                <a:latin typeface="Calibri" pitchFamily="34" charset="0"/>
+                <a:ea typeface="Calibri" pitchFamily="34" charset="-122"/>
+                <a:cs typeface="Calibri" pitchFamily="34" charset="-120"/>
+              </a:rPr>
+              <a:t>Equity infusion or a structured plan to accelerate net worth from -₹3.0 Cr to positive, rather than relying solely on ~₹1.4 Cr/yr retained earnings.</a:t>
+            </a:r>
+            <a:endParaRPr lang="en-US" sz="1030" dirty="0"/>
+          </a:p>
+        </p:txBody>
+      </p:sp>
+      <p:sp>
+        <p:nvSpPr>
+          <p:cNvPr id="10" name="Shape 8"/>
+          <p:cNvSpPr/>
+          <p:nvPr/>
+        </p:nvSpPr>
+        <p:spPr>
+          <a:xfrm>
+            <a:off x="548640" y="3840480"/>
+            <a:ext cx="457200" cy="457200"/>
+          </a:xfrm>
+          <a:prstGeom prst="ellipse">
+            <a:avLst/>
+          </a:prstGeom>
+          <a:solidFill>
+            <a:srgbClr val="D9622B"/>
+          </a:solidFill>
+          <a:ln/>
+        </p:spPr>
+      </p:sp>
+      <p:sp>
+        <p:nvSpPr>
+          <p:cNvPr id="11" name="Text 9"/>
+          <p:cNvSpPr/>
+          <p:nvPr/>
+        </p:nvSpPr>
+        <p:spPr>
+          <a:xfrm>
+            <a:off x="548640" y="3840480"/>
+            <a:ext cx="457200" cy="457200"/>
+          </a:xfrm>
+          <a:prstGeom prst="rect">
+            <a:avLst/>
+          </a:prstGeom>
+          <a:noFill/>
+          <a:ln/>
+        </p:spPr>
+        <p:txBody>
+          <a:bodyPr wrap="square" lIns="0" tIns="0" rIns="0" bIns="0" rtlCol="0" anchor="ctr"/>
+          <a:lstStyle/>
+          <a:p>
+            <a:pPr algn="ctr" indent="0" marL="0">
+              <a:buNone/>
+            </a:pPr>
+            <a:r>
+              <a:rPr lang="en-US" sz="1300" b="1" dirty="0">
+                <a:solidFill>
+                  <a:srgbClr val="FFFFFF"/>
+                </a:solidFill>
+                <a:latin typeface="Calibri" pitchFamily="34" charset="0"/>
+                <a:ea typeface="Calibri" pitchFamily="34" charset="-122"/>
+                <a:cs typeface="Calibri" pitchFamily="34" charset="-120"/>
+              </a:rPr>
+              <a:t>2</a:t>
+            </a:r>
+            <a:endParaRPr lang="en-US" sz="1300" dirty="0"/>
+          </a:p>
+        </p:txBody>
+      </p:sp>
+      <p:sp>
+        <p:nvSpPr>
+          <p:cNvPr id="12" name="Text 10"/>
+          <p:cNvSpPr/>
+          <p:nvPr/>
+        </p:nvSpPr>
+        <p:spPr>
+          <a:xfrm>
+            <a:off x="1234440" y="3822192"/>
+            <a:ext cx="2926080" cy="502920"/>
+          </a:xfrm>
+          <a:prstGeom prst="rect">
+            <a:avLst/>
+          </a:prstGeom>
+          <a:noFill/>
+          <a:ln/>
+        </p:spPr>
+        <p:txBody>
+          <a:bodyPr wrap="square" lIns="0" tIns="0" rIns="0" bIns="0" rtlCol="0" anchor="ctr"/>
+          <a:lstStyle/>
+          <a:p>
+            <a:pPr indent="0" marL="0">
+              <a:lnSpc>
+                <a:spcPct val="100000"/>
+              </a:lnSpc>
+              <a:buNone/>
+            </a:pPr>
+            <a:r>
+              <a:rPr lang="en-US" sz="1300" b="1" dirty="0">
+                <a:solidFill>
+                  <a:srgbClr val="FFFFFF"/>
+                </a:solidFill>
+                <a:latin typeface="Calibri" pitchFamily="34" charset="0"/>
+                <a:ea typeface="Calibri" pitchFamily="34" charset="-122"/>
+                <a:cs typeface="Calibri" pitchFamily="34" charset="-120"/>
+              </a:rPr>
+              <a:t>Working-capital bridge</a:t>
+            </a:r>
+            <a:endParaRPr lang="en-US" sz="1300" dirty="0"/>
           </a:p>
         </p:txBody>
       </p:sp>
       <p:sp>
         <p:nvSpPr>
           <p:cNvPr id="13" name="Text 11"/>
+          <p:cNvSpPr/>
+          <p:nvPr/>
+        </p:nvSpPr>
+        <p:spPr>
+          <a:xfrm>
+            <a:off x="4297680" y="3794760"/>
+            <a:ext cx="7345375" cy="731520"/>
+          </a:xfrm>
+          <a:prstGeom prst="rect">
+            <a:avLst/>
+          </a:prstGeom>
+          <a:noFill/>
+          <a:ln/>
+        </p:spPr>
+        <p:txBody>
+          <a:bodyPr wrap="square" lIns="0" tIns="0" rIns="0" bIns="0" rtlCol="0" anchor="t"/>
+          <a:lstStyle/>
+          <a:p>
+            <a:pPr indent="0" marL="0">
+              <a:lnSpc>
+                <a:spcPct val="115000"/>
+              </a:lnSpc>
+              <a:buNone/>
+            </a:pPr>
+            <a:r>
+              <a:rPr lang="en-US" sz="1030" dirty="0">
+                <a:solidFill>
+                  <a:srgbClr val="CBD3DC"/>
+                </a:solidFill>
+                <a:latin typeface="Calibri" pitchFamily="34" charset="0"/>
+                <a:ea typeface="Calibri" pitchFamily="34" charset="-122"/>
+                <a:cs typeface="Calibri" pitchFamily="34" charset="-120"/>
+              </a:rPr>
+              <a:t>Support the Tega/Escorts receivable cycle at the ₹25-30 Cr revenue range Datre has now demonstrated it can reach.</a:t>
+            </a:r>
+            <a:endParaRPr lang="en-US" sz="1030" dirty="0"/>
+          </a:p>
+        </p:txBody>
+      </p:sp>
+      <p:sp>
+        <p:nvSpPr>
+          <p:cNvPr id="14" name="Shape 12"/>
+          <p:cNvSpPr/>
+          <p:nvPr/>
+        </p:nvSpPr>
+        <p:spPr>
+          <a:xfrm>
+            <a:off x="548640" y="4892040"/>
+            <a:ext cx="457200" cy="457200"/>
+          </a:xfrm>
+          <a:prstGeom prst="ellipse">
+            <a:avLst/>
+          </a:prstGeom>
+          <a:solidFill>
+            <a:srgbClr val="D9622B"/>
+          </a:solidFill>
+          <a:ln/>
+        </p:spPr>
+      </p:sp>
+      <p:sp>
+        <p:nvSpPr>
+          <p:cNvPr id="15" name="Text 13"/>
+          <p:cNvSpPr/>
+          <p:nvPr/>
+        </p:nvSpPr>
+        <p:spPr>
+          <a:xfrm>
+            <a:off x="548640" y="4892040"/>
+            <a:ext cx="457200" cy="457200"/>
+          </a:xfrm>
+          <a:prstGeom prst="rect">
+            <a:avLst/>
+          </a:prstGeom>
+          <a:noFill/>
+          <a:ln/>
+        </p:spPr>
+        <p:txBody>
+          <a:bodyPr wrap="square" lIns="0" tIns="0" rIns="0" bIns="0" rtlCol="0" anchor="ctr"/>
+          <a:lstStyle/>
+          <a:p>
+            <a:pPr algn="ctr" indent="0" marL="0">
+              <a:buNone/>
+            </a:pPr>
+            <a:r>
+              <a:rPr lang="en-US" sz="1300" b="1" dirty="0">
+                <a:solidFill>
+                  <a:srgbClr val="FFFFFF"/>
+                </a:solidFill>
+                <a:latin typeface="Calibri" pitchFamily="34" charset="0"/>
+                <a:ea typeface="Calibri" pitchFamily="34" charset="-122"/>
+                <a:cs typeface="Calibri" pitchFamily="34" charset="-120"/>
+              </a:rPr>
+              <a:t>3</a:t>
+            </a:r>
+            <a:endParaRPr lang="en-US" sz="1300" dirty="0"/>
+          </a:p>
+        </p:txBody>
+      </p:sp>
+      <p:sp>
+        <p:nvSpPr>
+          <p:cNvPr id="16" name="Text 14"/>
+          <p:cNvSpPr/>
+          <p:nvPr/>
+        </p:nvSpPr>
+        <p:spPr>
+          <a:xfrm>
+            <a:off x="1234440" y="4873752"/>
+            <a:ext cx="2926080" cy="502920"/>
+          </a:xfrm>
+          <a:prstGeom prst="rect">
+            <a:avLst/>
+          </a:prstGeom>
+          <a:noFill/>
+          <a:ln/>
+        </p:spPr>
+        <p:txBody>
+          <a:bodyPr wrap="square" lIns="0" tIns="0" rIns="0" bIns="0" rtlCol="0" anchor="ctr"/>
+          <a:lstStyle/>
+          <a:p>
+            <a:pPr indent="0" marL="0">
+              <a:lnSpc>
+                <a:spcPct val="100000"/>
+              </a:lnSpc>
+              <a:buNone/>
+            </a:pPr>
+            <a:r>
+              <a:rPr lang="en-US" sz="1300" b="1" dirty="0">
+                <a:solidFill>
+                  <a:srgbClr val="FFFFFF"/>
+                </a:solidFill>
+                <a:latin typeface="Calibri" pitchFamily="34" charset="0"/>
+                <a:ea typeface="Calibri" pitchFamily="34" charset="-122"/>
+                <a:cs typeface="Calibri" pitchFamily="34" charset="-120"/>
+              </a:rPr>
+              <a:t>Quality-systems investment</a:t>
+            </a:r>
+            <a:endParaRPr lang="en-US" sz="1300" dirty="0"/>
+          </a:p>
+        </p:txBody>
+      </p:sp>
+      <p:sp>
+        <p:nvSpPr>
+          <p:cNvPr id="17" name="Text 15"/>
+          <p:cNvSpPr/>
+          <p:nvPr/>
+        </p:nvSpPr>
+        <p:spPr>
+          <a:xfrm>
+            <a:off x="4297680" y="4846320"/>
+            <a:ext cx="7345375" cy="731520"/>
+          </a:xfrm>
+          <a:prstGeom prst="rect">
+            <a:avLst/>
+          </a:prstGeom>
+          <a:noFill/>
+          <a:ln/>
+        </p:spPr>
+        <p:txBody>
+          <a:bodyPr wrap="square" lIns="0" tIns="0" rIns="0" bIns="0" rtlCol="0" anchor="t"/>
+          <a:lstStyle/>
+          <a:p>
+            <a:pPr indent="0" marL="0">
+              <a:lnSpc>
+                <a:spcPct val="115000"/>
+              </a:lnSpc>
+              <a:buNone/>
+            </a:pPr>
+            <a:r>
+              <a:rPr lang="en-US" sz="1030" dirty="0">
+                <a:solidFill>
+                  <a:srgbClr val="CBD3DC"/>
+                </a:solidFill>
+                <a:latin typeface="Calibri" pitchFamily="34" charset="0"/>
+                <a:ea typeface="Calibri" pitchFamily="34" charset="-122"/>
+                <a:cs typeface="Calibri" pitchFamily="34" charset="-120"/>
+              </a:rPr>
+              <a:t>Targeted spend to bring the rejection rate back toward its FY22-23 low (~2.6%) — scrap-cost savings alone should fund a meaningful share of this.</a:t>
+            </a:r>
+            <a:endParaRPr lang="en-US" sz="1030" dirty="0"/>
+          </a:p>
+        </p:txBody>
+      </p:sp>
+      <p:sp>
+        <p:nvSpPr>
+          <p:cNvPr id="18" name="Text 16"/>
+          <p:cNvSpPr/>
+          <p:nvPr/>
+        </p:nvSpPr>
+        <p:spPr>
+          <a:xfrm>
+            <a:off x="548640" y="5989320"/>
+            <a:ext cx="11094415" cy="457200"/>
+          </a:xfrm>
+          <a:prstGeom prst="rect">
+            <a:avLst/>
+          </a:prstGeom>
+          <a:noFill/>
+          <a:ln/>
+        </p:spPr>
+        <p:txBody>
+          <a:bodyPr wrap="square" lIns="0" tIns="0" rIns="0" bIns="0" rtlCol="0" anchor="ctr"/>
+          <a:lstStyle/>
+          <a:p>
+            <a:pPr indent="0" marL="0">
+              <a:lnSpc>
+                <a:spcPct val="110000"/>
+              </a:lnSpc>
+              <a:buNone/>
+            </a:pPr>
+            <a:r>
+              <a:rPr lang="en-US" sz="950" i="1" dirty="0">
+                <a:solidFill>
+                  <a:srgbClr val="9AA2AD"/>
+                </a:solidFill>
+                <a:latin typeface="Calibri" pitchFamily="34" charset="0"/>
+                <a:ea typeface="Calibri" pitchFamily="34" charset="-122"/>
+                <a:cs typeface="Calibri" pitchFamily="34" charset="-120"/>
+              </a:rPr>
+              <a:t>Any of the three should be sized against audited FY25 and FY25-26 management accounts, not the figures in this deck alone — and against resolution of the governance flags on slide 12.</a:t>
+            </a:r>
+            <a:endParaRPr lang="en-US" sz="950" dirty="0"/>
+          </a:p>
+        </p:txBody>
+      </p:sp>
+      <p:sp>
+        <p:nvSpPr>
+          <p:cNvPr id="19" name="Text 17"/>
+          <p:cNvSpPr/>
+          <p:nvPr/>
+        </p:nvSpPr>
+        <p:spPr>
+          <a:xfrm>
+            <a:off x="548640" y="6473952"/>
+            <a:ext cx="11094415" cy="274320"/>
+          </a:xfrm>
+          <a:prstGeom prst="rect">
+            <a:avLst/>
+          </a:prstGeom>
+          <a:noFill/>
+          <a:ln/>
+        </p:spPr>
+        <p:txBody>
+          <a:bodyPr wrap="square" lIns="0" tIns="0" rIns="0" bIns="0" rtlCol="0" anchor="ctr"/>
+          <a:lstStyle/>
+          <a:p>
+            <a:pPr algn="l" indent="0" marL="0">
+              <a:buNone/>
+            </a:pPr>
+            <a:r>
+              <a:rPr lang="en-US" sz="800" dirty="0">
+                <a:solidFill>
+                  <a:srgbClr val="8B93A0"/>
+                </a:solidFill>
+                <a:latin typeface="Calibri" pitchFamily="34" charset="0"/>
+                <a:ea typeface="Calibri" pitchFamily="34" charset="-122"/>
+                <a:cs typeface="Calibri" pitchFamily="34" charset="-120"/>
+              </a:rPr>
+              <a:t>DATRE CORPORATION LIMITED  |  CONFIDENTIAL — PREPARED FOR INVESTOR DISCUSSION</a:t>
+            </a:r>
+            <a:endParaRPr lang="en-US" sz="800" dirty="0"/>
+          </a:p>
+        </p:txBody>
+      </p:sp>
+      <p:sp>
+        <p:nvSpPr>
+          <p:cNvPr id="20" name="Text 18"/>
           <p:cNvSpPr/>
           <p:nvPr/>
         </p:nvSpPr>
@@ -17588,6 +18270,471 @@
                 <a:cs typeface="Calibri" pitchFamily="34" charset="-120"/>
               </a:rPr>
               <a:t>21</a:t>
+            </a:r>
+            <a:endParaRPr lang="en-US" sz="800" dirty="0"/>
+          </a:p>
+        </p:txBody>
+      </p:sp>
+    </p:spTree>
+  </p:cSld>
+  <p:clrMapOvr>
+    <a:masterClrMapping/>
+  </p:clrMapOvr>
+</p:sld>
+</file>
+
+<file path=ppt/slides/slide22.xml><?xml version="1.0" encoding="utf-8"?>
+<p:sld xmlns:a="http://schemas.openxmlformats.org/drawingml/2006/main" xmlns:r="http://schemas.openxmlformats.org/officeDocument/2006/relationships" xmlns:p="http://schemas.openxmlformats.org/presentationml/2006/main">
+  <p:cSld name="Slide 22">
+    <p:bg>
+      <p:bgPr>
+        <a:solidFill>
+          <a:srgbClr val="1C1F26"/>
+        </a:solidFill>
+      </p:bgPr>
+    </p:bg>
+    <p:spTree>
+      <p:nvGrpSpPr>
+        <p:cNvPr id="1" name=""/>
+        <p:cNvGrpSpPr/>
+        <p:nvPr/>
+      </p:nvGrpSpPr>
+      <p:grpSpPr>
+        <a:xfrm>
+          <a:off x="0" y="0"/>
+          <a:ext cx="0" cy="0"/>
+          <a:chOff x="0" y="0"/>
+          <a:chExt cx="0" cy="0"/>
+        </a:xfrm>
+      </p:grpSpPr>
+      <p:sp>
+        <p:nvSpPr>
+          <p:cNvPr id="2" name="Shape 0"/>
+          <p:cNvSpPr/>
+          <p:nvPr/>
+        </p:nvSpPr>
+        <p:spPr>
+          <a:xfrm>
+            <a:off x="9692640" y="-1280160"/>
+            <a:ext cx="4754880" cy="4754880"/>
+          </a:xfrm>
+          <a:prstGeom prst="ellipse">
+            <a:avLst/>
+          </a:prstGeom>
+          <a:solidFill>
+            <a:srgbClr val="262B34"/>
+          </a:solidFill>
+          <a:ln/>
+        </p:spPr>
+      </p:sp>
+      <p:sp>
+        <p:nvSpPr>
+          <p:cNvPr id="3" name="Shape 1"/>
+          <p:cNvSpPr/>
+          <p:nvPr/>
+        </p:nvSpPr>
+        <p:spPr>
+          <a:xfrm>
+            <a:off x="-1463040" y="4572000"/>
+            <a:ext cx="3657600" cy="3657600"/>
+          </a:xfrm>
+          <a:prstGeom prst="ellipse">
+            <a:avLst/>
+          </a:prstGeom>
+          <a:solidFill>
+            <a:srgbClr val="262B34"/>
+          </a:solidFill>
+          <a:ln/>
+        </p:spPr>
+      </p:sp>
+      <p:sp>
+        <p:nvSpPr>
+          <p:cNvPr id="4" name="Text 2"/>
+          <p:cNvSpPr/>
+          <p:nvPr/>
+        </p:nvSpPr>
+        <p:spPr>
+          <a:xfrm>
+            <a:off x="548640" y="2286000"/>
+            <a:ext cx="9144000" cy="731520"/>
+          </a:xfrm>
+          <a:prstGeom prst="rect">
+            <a:avLst/>
+          </a:prstGeom>
+          <a:noFill/>
+          <a:ln/>
+        </p:spPr>
+        <p:txBody>
+          <a:bodyPr wrap="square" lIns="0" tIns="0" rIns="0" bIns="0" rtlCol="0" anchor="ctr"/>
+          <a:lstStyle/>
+          <a:p>
+            <a:pPr indent="0" marL="0">
+              <a:buNone/>
+            </a:pPr>
+            <a:r>
+              <a:rPr lang="en-US" sz="3400" b="1" dirty="0">
+                <a:solidFill>
+                  <a:srgbClr val="FFFFFF"/>
+                </a:solidFill>
+                <a:latin typeface="Cambria" pitchFamily="34" charset="0"/>
+                <a:ea typeface="Cambria" pitchFamily="34" charset="-122"/>
+                <a:cs typeface="Cambria" pitchFamily="34" charset="-120"/>
+              </a:rPr>
+              <a:t>Datre Corporation Limited</a:t>
+            </a:r>
+            <a:endParaRPr lang="en-US" sz="3400" dirty="0"/>
+          </a:p>
+        </p:txBody>
+      </p:sp>
+      <p:sp>
+        <p:nvSpPr>
+          <p:cNvPr id="5" name="Text 3"/>
+          <p:cNvSpPr/>
+          <p:nvPr/>
+        </p:nvSpPr>
+        <p:spPr>
+          <a:xfrm>
+            <a:off x="548640" y="2971800"/>
+            <a:ext cx="9144000" cy="457200"/>
+          </a:xfrm>
+          <a:prstGeom prst="rect">
+            <a:avLst/>
+          </a:prstGeom>
+          <a:noFill/>
+          <a:ln/>
+        </p:spPr>
+        <p:txBody>
+          <a:bodyPr wrap="square" lIns="0" tIns="0" rIns="0" bIns="0" rtlCol="0" anchor="ctr"/>
+          <a:lstStyle/>
+          <a:p>
+            <a:pPr indent="0" marL="0">
+              <a:buNone/>
+            </a:pPr>
+            <a:r>
+              <a:rPr lang="en-US" sz="1500" i="1" dirty="0">
+                <a:solidFill>
+                  <a:srgbClr val="CBD3DC"/>
+                </a:solidFill>
+                <a:latin typeface="Calibri" pitchFamily="34" charset="0"/>
+                <a:ea typeface="Calibri" pitchFamily="34" charset="-122"/>
+                <a:cs typeface="Calibri" pitchFamily="34" charset="-120"/>
+              </a:rPr>
+              <a:t>Engineering Essence, Manufacturing Personified</a:t>
+            </a:r>
+            <a:endParaRPr lang="en-US" sz="1500" dirty="0"/>
+          </a:p>
+        </p:txBody>
+      </p:sp>
+      <p:sp>
+        <p:nvSpPr>
+          <p:cNvPr id="6" name="Text 4"/>
+          <p:cNvSpPr/>
+          <p:nvPr/>
+        </p:nvSpPr>
+        <p:spPr>
+          <a:xfrm>
+            <a:off x="548640" y="4023360"/>
+            <a:ext cx="2743200" cy="274320"/>
+          </a:xfrm>
+          <a:prstGeom prst="rect">
+            <a:avLst/>
+          </a:prstGeom>
+          <a:noFill/>
+          <a:ln/>
+        </p:spPr>
+        <p:txBody>
+          <a:bodyPr wrap="square" lIns="0" tIns="0" rIns="0" bIns="0" rtlCol="0" anchor="ctr"/>
+          <a:lstStyle/>
+          <a:p>
+            <a:pPr indent="0" marL="0">
+              <a:buNone/>
+            </a:pPr>
+            <a:r>
+              <a:rPr lang="en-US" sz="950" b="1" spc="100" kern="0" dirty="0">
+                <a:solidFill>
+                  <a:srgbClr val="D9622B"/>
+                </a:solidFill>
+                <a:latin typeface="Calibri" pitchFamily="34" charset="0"/>
+                <a:ea typeface="Calibri" pitchFamily="34" charset="-122"/>
+                <a:cs typeface="Calibri" pitchFamily="34" charset="-120"/>
+              </a:rPr>
+              <a:t>REGISTERED OFFICE</a:t>
+            </a:r>
+            <a:endParaRPr lang="en-US" sz="950" dirty="0"/>
+          </a:p>
+        </p:txBody>
+      </p:sp>
+      <p:sp>
+        <p:nvSpPr>
+          <p:cNvPr id="7" name="Text 5"/>
+          <p:cNvSpPr/>
+          <p:nvPr/>
+        </p:nvSpPr>
+        <p:spPr>
+          <a:xfrm>
+            <a:off x="548640" y="4279392"/>
+            <a:ext cx="9144000" cy="365760"/>
+          </a:xfrm>
+          <a:prstGeom prst="rect">
+            <a:avLst/>
+          </a:prstGeom>
+          <a:noFill/>
+          <a:ln/>
+        </p:spPr>
+        <p:txBody>
+          <a:bodyPr wrap="square" lIns="0" tIns="0" rIns="0" bIns="0" rtlCol="0" anchor="ctr"/>
+          <a:lstStyle/>
+          <a:p>
+            <a:pPr indent="0" marL="0">
+              <a:buNone/>
+            </a:pPr>
+            <a:r>
+              <a:rPr lang="en-US" sz="1200" dirty="0">
+                <a:solidFill>
+                  <a:srgbClr val="FFFFFF"/>
+                </a:solidFill>
+                <a:latin typeface="Calibri" pitchFamily="34" charset="0"/>
+                <a:ea typeface="Calibri" pitchFamily="34" charset="-122"/>
+                <a:cs typeface="Calibri" pitchFamily="34" charset="-120"/>
+              </a:rPr>
+              <a:t>Sector-III, Falta Industrial Growth Centre, South 24 Parganas, West Bengal 743504, India</a:t>
+            </a:r>
+            <a:endParaRPr lang="en-US" sz="1200" dirty="0"/>
+          </a:p>
+        </p:txBody>
+      </p:sp>
+      <p:sp>
+        <p:nvSpPr>
+          <p:cNvPr id="8" name="Text 6"/>
+          <p:cNvSpPr/>
+          <p:nvPr/>
+        </p:nvSpPr>
+        <p:spPr>
+          <a:xfrm>
+            <a:off x="548640" y="4681728"/>
+            <a:ext cx="2743200" cy="274320"/>
+          </a:xfrm>
+          <a:prstGeom prst="rect">
+            <a:avLst/>
+          </a:prstGeom>
+          <a:noFill/>
+          <a:ln/>
+        </p:spPr>
+        <p:txBody>
+          <a:bodyPr wrap="square" lIns="0" tIns="0" rIns="0" bIns="0" rtlCol="0" anchor="ctr"/>
+          <a:lstStyle/>
+          <a:p>
+            <a:pPr indent="0" marL="0">
+              <a:buNone/>
+            </a:pPr>
+            <a:r>
+              <a:rPr lang="en-US" sz="950" b="1" spc="100" kern="0" dirty="0">
+                <a:solidFill>
+                  <a:srgbClr val="D9622B"/>
+                </a:solidFill>
+                <a:latin typeface="Calibri" pitchFamily="34" charset="0"/>
+                <a:ea typeface="Calibri" pitchFamily="34" charset="-122"/>
+                <a:cs typeface="Calibri" pitchFamily="34" charset="-120"/>
+              </a:rPr>
+              <a:t>CONTACT</a:t>
+            </a:r>
+            <a:endParaRPr lang="en-US" sz="950" dirty="0"/>
+          </a:p>
+        </p:txBody>
+      </p:sp>
+      <p:sp>
+        <p:nvSpPr>
+          <p:cNvPr id="9" name="Text 7"/>
+          <p:cNvSpPr/>
+          <p:nvPr/>
+        </p:nvSpPr>
+        <p:spPr>
+          <a:xfrm>
+            <a:off x="548640" y="4937760"/>
+            <a:ext cx="9144000" cy="365760"/>
+          </a:xfrm>
+          <a:prstGeom prst="rect">
+            <a:avLst/>
+          </a:prstGeom>
+          <a:noFill/>
+          <a:ln/>
+        </p:spPr>
+        <p:txBody>
+          <a:bodyPr wrap="square" lIns="0" tIns="0" rIns="0" bIns="0" rtlCol="0" anchor="ctr"/>
+          <a:lstStyle/>
+          <a:p>
+            <a:pPr indent="0" marL="0">
+              <a:buNone/>
+            </a:pPr>
+            <a:r>
+              <a:rPr lang="en-US" sz="1200" dirty="0">
+                <a:solidFill>
+                  <a:srgbClr val="FFFFFF"/>
+                </a:solidFill>
+                <a:latin typeface="Calibri" pitchFamily="34" charset="0"/>
+                <a:ea typeface="Calibri" pitchFamily="34" charset="-122"/>
+                <a:cs typeface="Calibri" pitchFamily="34" charset="-120"/>
+              </a:rPr>
+              <a:t>sales@datre.com  ·  hr@datre.com  ·  www.datre.in</a:t>
+            </a:r>
+            <a:endParaRPr lang="en-US" sz="1200" dirty="0"/>
+          </a:p>
+        </p:txBody>
+      </p:sp>
+      <p:sp>
+        <p:nvSpPr>
+          <p:cNvPr id="10" name="Text 8"/>
+          <p:cNvSpPr/>
+          <p:nvPr/>
+        </p:nvSpPr>
+        <p:spPr>
+          <a:xfrm>
+            <a:off x="548640" y="5340096"/>
+            <a:ext cx="2743200" cy="274320"/>
+          </a:xfrm>
+          <a:prstGeom prst="rect">
+            <a:avLst/>
+          </a:prstGeom>
+          <a:noFill/>
+          <a:ln/>
+        </p:spPr>
+        <p:txBody>
+          <a:bodyPr wrap="square" lIns="0" tIns="0" rIns="0" bIns="0" rtlCol="0" anchor="ctr"/>
+          <a:lstStyle/>
+          <a:p>
+            <a:pPr indent="0" marL="0">
+              <a:buNone/>
+            </a:pPr>
+            <a:r>
+              <a:rPr lang="en-US" sz="950" b="1" spc="100" kern="0" dirty="0">
+                <a:solidFill>
+                  <a:srgbClr val="D9622B"/>
+                </a:solidFill>
+                <a:latin typeface="Calibri" pitchFamily="34" charset="0"/>
+                <a:ea typeface="Calibri" pitchFamily="34" charset="-122"/>
+                <a:cs typeface="Calibri" pitchFamily="34" charset="-120"/>
+              </a:rPr>
+              <a:t>PREPARED FOR</a:t>
+            </a:r>
+            <a:endParaRPr lang="en-US" sz="950" dirty="0"/>
+          </a:p>
+        </p:txBody>
+      </p:sp>
+      <p:sp>
+        <p:nvSpPr>
+          <p:cNvPr id="11" name="Text 9"/>
+          <p:cNvSpPr/>
+          <p:nvPr/>
+        </p:nvSpPr>
+        <p:spPr>
+          <a:xfrm>
+            <a:off x="548640" y="5596128"/>
+            <a:ext cx="9144000" cy="365760"/>
+          </a:xfrm>
+          <a:prstGeom prst="rect">
+            <a:avLst/>
+          </a:prstGeom>
+          <a:noFill/>
+          <a:ln/>
+        </p:spPr>
+        <p:txBody>
+          <a:bodyPr wrap="square" lIns="0" tIns="0" rIns="0" bIns="0" rtlCol="0" anchor="ctr"/>
+          <a:lstStyle/>
+          <a:p>
+            <a:pPr indent="0" marL="0">
+              <a:buNone/>
+            </a:pPr>
+            <a:r>
+              <a:rPr lang="en-US" sz="1200" dirty="0">
+                <a:solidFill>
+                  <a:srgbClr val="FFFFFF"/>
+                </a:solidFill>
+                <a:latin typeface="Calibri" pitchFamily="34" charset="0"/>
+                <a:ea typeface="Calibri" pitchFamily="34" charset="-122"/>
+                <a:cs typeface="Calibri" pitchFamily="34" charset="-120"/>
+              </a:rPr>
+              <a:t>Investor discussion — Indranil Dutta, Chief Executive Officer</a:t>
+            </a:r>
+            <a:endParaRPr lang="en-US" sz="1200" dirty="0"/>
+          </a:p>
+        </p:txBody>
+      </p:sp>
+      <p:sp>
+        <p:nvSpPr>
+          <p:cNvPr id="12" name="Text 10"/>
+          <p:cNvSpPr/>
+          <p:nvPr/>
+        </p:nvSpPr>
+        <p:spPr>
+          <a:xfrm>
+            <a:off x="548640" y="5943600"/>
+            <a:ext cx="11094415" cy="640080"/>
+          </a:xfrm>
+          <a:prstGeom prst="rect">
+            <a:avLst/>
+          </a:prstGeom>
+          <a:noFill/>
+          <a:ln/>
+        </p:spPr>
+        <p:txBody>
+          <a:bodyPr wrap="square" lIns="0" tIns="0" rIns="0" bIns="0" rtlCol="0" anchor="ctr"/>
+          <a:lstStyle/>
+          <a:p>
+            <a:pPr indent="0" marL="0">
+              <a:lnSpc>
+                <a:spcPct val="115000"/>
+              </a:lnSpc>
+              <a:buNone/>
+            </a:pPr>
+            <a:r>
+              <a:rPr lang="en-US" sz="850" i="1" dirty="0">
+                <a:solidFill>
+                  <a:srgbClr val="7A828E"/>
+                </a:solidFill>
+                <a:latin typeface="Calibri" pitchFamily="34" charset="0"/>
+                <a:ea typeface="Calibri" pitchFamily="34" charset="-122"/>
+                <a:cs typeface="Calibri" pitchFamily="34" charset="-120"/>
+              </a:rPr>
+              <a:t>This document consolidates the company's own financial statements, management information system reports and internal analyses. Figures are sourced and dated throughout; where audited and unaudited data diverge, both are shown. Confidential — prepared for internal investor discussion only.</a:t>
+            </a:r>
+            <a:endParaRPr lang="en-US" sz="850" dirty="0"/>
+          </a:p>
+        </p:txBody>
+      </p:sp>
+      <p:sp>
+        <p:nvSpPr>
+          <p:cNvPr id="13" name="Text 11"/>
+          <p:cNvSpPr/>
+          <p:nvPr/>
+        </p:nvSpPr>
+        <p:spPr>
+          <a:xfrm>
+            <a:off x="11277295" y="6473952"/>
+            <a:ext cx="457200" cy="274320"/>
+          </a:xfrm>
+          <a:prstGeom prst="rect">
+            <a:avLst/>
+          </a:prstGeom>
+          <a:noFill/>
+          <a:ln/>
+        </p:spPr>
+        <p:txBody>
+          <a:bodyPr wrap="square" lIns="0" tIns="0" rIns="0" bIns="0" rtlCol="0" anchor="ctr"/>
+          <a:lstStyle/>
+          <a:p>
+            <a:pPr algn="r" indent="0" marL="0">
+              <a:buNone/>
+            </a:pPr>
+            <a:r>
+              <a:rPr lang="en-US" sz="800" dirty="0">
+                <a:solidFill>
+                  <a:srgbClr val="8B93A0"/>
+                </a:solidFill>
+                <a:latin typeface="Calibri" pitchFamily="34" charset="0"/>
+                <a:ea typeface="Calibri" pitchFamily="34" charset="-122"/>
+                <a:cs typeface="Calibri" pitchFamily="34" charset="-120"/>
+              </a:rPr>
+              <a:t>22</a:t>
             </a:r>
             <a:endParaRPr lang="en-US" sz="800" dirty="0"/>
           </a:p>
@@ -20615,7 +21762,7 @@
                 <a:ea typeface="Calibri" pitchFamily="34" charset="-122"/>
                 <a:cs typeface="Calibri" pitchFamily="34" charset="-120"/>
               </a:rPr>
-              <a:t>Why it matters for pricing power: the Sona Comstar knuckle-casting repricing (slide 15) is the same logic in commercial practice — cost-to-serve, not raw-material chemistry, is what Datre asks customers to pay for.</a:t>
+              <a:t>Why it matters for pricing power: the Sona Comstar knuckle-casting repricing (slide 16) is the same logic in commercial practice — cost-to-serve, not raw-material chemistry, is what Datre asks customers to pay for.</a:t>
             </a:r>
             <a:endParaRPr lang="en-US" sz="1050" dirty="0"/>
           </a:p>
@@ -22728,7 +23875,7 @@
                 <a:ea typeface="Calibri" pitchFamily="34" charset="-122"/>
                 <a:cs typeface="Calibri" pitchFamily="34" charset="-120"/>
               </a:rPr>
-              <a:t>Caveat: this infrastructure has not prevented rejection rates from climbing to 10%+ in the most recent quarter — see slide 14.</a:t>
+              <a:t>Caveat: this infrastructure has not prevented rejection rates from climbing to 10%+ in the most recent quarter — see slide 15.</a:t>
             </a:r>
             <a:endParaRPr lang="en-US" sz="1000" dirty="0"/>
           </a:p>

--- a/investor-pitch/Datre_Corporation_Investor_Pitch.pptx
+++ b/investor-pitch/Datre_Corporation_Investor_Pitch.pptx
@@ -6483,7 +6483,7 @@
                 <a:ea typeface="Cambria" pitchFamily="34" charset="-122"/>
                 <a:cs typeface="Cambria" pitchFamily="34" charset="-120"/>
               </a:rPr>
-              <a:t>₹24.9 Cr</a:t>
+              <a:t>₹25.9 Cr</a:t>
             </a:r>
             <a:endParaRPr lang="en-US" sz="2400" dirty="0"/>
           </a:p>
@@ -6525,7 +6525,7 @@
                 <a:ea typeface="Calibri" pitchFamily="34" charset="-122"/>
                 <a:cs typeface="Calibri" pitchFamily="34" charset="-120"/>
               </a:rPr>
-              <a:t>FY25-26 net sales — a record, +27% YoY, ahead of the ₹26 Cr base-case target set in Aug 2025</a:t>
+              <a:t>FY25-26 revenue (turnover statement) — a record, +26% YoY, with a record ₹1.82 Cr profit alongside it</a:t>
             </a:r>
             <a:endParaRPr lang="en-US" sz="950" dirty="0"/>
           </a:p>
@@ -6621,7 +6621,7 @@
         <p:spPr>
           <a:xfrm>
             <a:off x="7955280" y="5486400"/>
-            <a:ext cx="3687775" cy="457200"/>
+            <a:ext cx="3687775" cy="548640"/>
           </a:xfrm>
           <a:prstGeom prst="rect">
             <a:avLst/>
@@ -6634,6 +6634,9 @@
           <a:lstStyle/>
           <a:p>
             <a:pPr indent="0" marL="0">
+              <a:lnSpc>
+                <a:spcPct val="110000"/>
+              </a:lnSpc>
               <a:buNone/>
             </a:pPr>
             <a:r>
@@ -6645,7 +6648,7 @@
                 <a:ea typeface="Calibri" pitchFamily="34" charset="-122"/>
                 <a:cs typeface="Calibri" pitchFamily="34" charset="-120"/>
               </a:rPr>
-              <a:t>Source: management MIS (net sales, ex-GST), full-year FY24-25 and FY25-26.</a:t>
+              <a:t>Quarterly chart: management MIS (net sales, ex-GST). Headline figure: year-end turnover statement, ₹1 Cr higher than the MIS quarterly sum — a minor, unreconciled gap typical of interim vs. final cuts.</a:t>
             </a:r>
             <a:endParaRPr lang="en-US" sz="800" dirty="0"/>
           </a:p>
@@ -9484,7 +9487,7 @@
                 <a:ea typeface="Calibri" pitchFamily="34" charset="-122"/>
                 <a:cs typeface="Calibri" pitchFamily="34" charset="-120"/>
               </a:rPr>
-              <a:t>One internal document is titled with reference to “post-NCLT” status. No case details, dates or resolution terms were available for verification — confirm and disclose before external circulation.</a:t>
+              <a:t>One internal document references “post-NCLT” status. A decade-long turnover statement shows a ₹51.47 Cr exceptional gain in FY2018-19 against an operating loss that year — likely this event, not formally confirmed. Confirm mechanism and terms before external circulation.</a:t>
             </a:r>
             <a:endParaRPr lang="en-US" sz="880" dirty="0"/>
           </a:p>
@@ -9733,7 +9736,7 @@
                 <a:ea typeface="Cambria" pitchFamily="34" charset="-122"/>
                 <a:cs typeface="Cambria" pitchFamily="34" charset="-120"/>
               </a:rPr>
-              <a:t>~24%</a:t>
+              <a:t>~25%</a:t>
             </a:r>
             <a:endParaRPr lang="en-US" sz="2400" dirty="0"/>
           </a:p>
@@ -9817,7 +9820,7 @@
                 <a:ea typeface="Calibri" pitchFamily="34" charset="-122"/>
                 <a:cs typeface="Calibri" pitchFamily="34" charset="-120"/>
               </a:rPr>
-              <a:t>₹8.5 Cr → ₹24.9 Cr over 5 years</a:t>
+              <a:t>₹8.5 Cr → ₹25.9 Cr over 5 years</a:t>
             </a:r>
             <a:endParaRPr lang="en-US" sz="900" dirty="0"/>
           </a:p>
@@ -10755,7 +10758,7 @@
         <p:spPr>
           <a:xfrm>
             <a:off x="548640" y="5074920"/>
-            <a:ext cx="6126480" cy="457200"/>
+            <a:ext cx="6126480" cy="640080"/>
           </a:xfrm>
           <a:prstGeom prst="rect">
             <a:avLst/>
@@ -10768,6 +10771,9 @@
           <a:lstStyle/>
           <a:p>
             <a:pPr indent="0" marL="0">
+              <a:lnSpc>
+                <a:spcPct val="110000"/>
+              </a:lnSpc>
               <a:buNone/>
             </a:pPr>
             <a:r>
@@ -10779,7 +10785,7 @@
                 <a:ea typeface="Calibri" pitchFamily="34" charset="-122"/>
                 <a:cs typeface="Calibri" pitchFamily="34" charset="-120"/>
               </a:rPr>
-              <a:t>Source: company financial statements &amp; internal analysis, FY21-FY24 actuals, FY26 management projection.</a:t>
+              <a:t>Chart: Tega's individual share (company financial statements &amp; internal analysis, FY21-FY24 actuals, FY26 projection). "All OEM" figure in the panel at right uses a separate Net Contribution basis — see source note below.</a:t>
             </a:r>
             <a:endParaRPr lang="en-US" sz="800" dirty="0"/>
           </a:p>
@@ -10793,8 +10799,8 @@
         </p:nvSpPr>
         <p:spPr>
           <a:xfrm>
-            <a:off x="6949440" y="1737360"/>
-            <a:ext cx="4693615" cy="365760"/>
+            <a:off x="6949440" y="1691640"/>
+            <a:ext cx="4693615" cy="320040"/>
           </a:xfrm>
           <a:prstGeom prst="rect">
             <a:avLst/>
@@ -10810,7 +10816,7 @@
               <a:buNone/>
             </a:pPr>
             <a:r>
-              <a:rPr lang="en-US" sz="1600" b="1" dirty="0">
+              <a:rPr lang="en-US" sz="1500" b="1" dirty="0">
                 <a:solidFill>
                   <a:srgbClr val="1C1F26"/>
                 </a:solidFill>
@@ -10818,9 +10824,9 @@
                 <a:ea typeface="Cambria" pitchFamily="34" charset="-122"/>
                 <a:cs typeface="Cambria" pitchFamily="34" charset="-120"/>
               </a:rPr>
-              <a:t>~80%</a:t>
-            </a:r>
-            <a:endParaRPr lang="en-US" sz="1600" dirty="0"/>
+              <a:t>43% → 82%</a:t>
+            </a:r>
+            <a:endParaRPr lang="en-US" sz="1500" dirty="0"/>
           </a:p>
         </p:txBody>
       </p:sp>
@@ -10832,8 +10838,8 @@
         </p:nvSpPr>
         <p:spPr>
           <a:xfrm>
-            <a:off x="6949440" y="2103120"/>
-            <a:ext cx="4693615" cy="822960"/>
+            <a:off x="6949440" y="2020824"/>
+            <a:ext cx="4693615" cy="621792"/>
           </a:xfrm>
           <a:prstGeom prst="rect">
             <a:avLst/>
@@ -10847,12 +10853,12 @@
           <a:p>
             <a:pPr indent="0" marL="0">
               <a:lnSpc>
-                <a:spcPct val="115000"/>
+                <a:spcPct val="110000"/>
               </a:lnSpc>
               <a:buNone/>
             </a:pPr>
             <a:r>
-              <a:rPr lang="en-US" sz="980" dirty="0">
+              <a:rPr lang="en-US" sz="930" dirty="0">
                 <a:solidFill>
                   <a:srgbClr val="3A4553"/>
                 </a:solidFill>
@@ -10860,9 +10866,9 @@
                 <a:ea typeface="Calibri" pitchFamily="34" charset="-122"/>
                 <a:cs typeface="Calibri" pitchFamily="34" charset="-120"/>
               </a:rPr>
-              <a:t>Tega + Escorts share of contribution — the deep OEM integration that is also the single largest risk on this deck</a:t>
-            </a:r>
-            <a:endParaRPr lang="en-US" sz="980" dirty="0"/>
+              <a:t>OEM share of total contribution, FY22 to FY26 (proj.) — a deliberate pivot, not passive drift</a:t>
+            </a:r>
+            <a:endParaRPr lang="en-US" sz="930" dirty="0"/>
           </a:p>
         </p:txBody>
       </p:sp>
@@ -10874,8 +10880,8 @@
         </p:nvSpPr>
         <p:spPr>
           <a:xfrm>
-            <a:off x="6949440" y="3108960"/>
-            <a:ext cx="4693615" cy="365760"/>
+            <a:off x="6949440" y="2715768"/>
+            <a:ext cx="4693615" cy="320040"/>
           </a:xfrm>
           <a:prstGeom prst="rect">
             <a:avLst/>
@@ -10891,7 +10897,7 @@
               <a:buNone/>
             </a:pPr>
             <a:r>
-              <a:rPr lang="en-US" sz="1600" b="1" dirty="0">
+              <a:rPr lang="en-US" sz="1500" b="1" dirty="0">
                 <a:solidFill>
                   <a:srgbClr val="1C1F26"/>
                 </a:solidFill>
@@ -10899,9 +10905,9 @@
                 <a:ea typeface="Cambria" pitchFamily="34" charset="-122"/>
                 <a:cs typeface="Cambria" pitchFamily="34" charset="-120"/>
               </a:rPr>
-              <a:t>₹9.0 → ₹7.5 Cr</a:t>
-            </a:r>
-            <a:endParaRPr lang="en-US" sz="1600" dirty="0"/>
+              <a:t>₹0</a:t>
+            </a:r>
+            <a:endParaRPr lang="en-US" sz="1500" dirty="0"/>
           </a:p>
         </p:txBody>
       </p:sp>
@@ -10913,8 +10919,8 @@
         </p:nvSpPr>
         <p:spPr>
           <a:xfrm>
-            <a:off x="6949440" y="3474720"/>
-            <a:ext cx="4693615" cy="822960"/>
+            <a:off x="6949440" y="3044952"/>
+            <a:ext cx="4693615" cy="621792"/>
           </a:xfrm>
           <a:prstGeom prst="rect">
             <a:avLst/>
@@ -10928,12 +10934,12 @@
           <a:p>
             <a:pPr indent="0" marL="0">
               <a:lnSpc>
-                <a:spcPct val="115000"/>
+                <a:spcPct val="110000"/>
               </a:lnSpc>
               <a:buNone/>
             </a:pPr>
             <a:r>
-              <a:rPr lang="en-US" sz="980" dirty="0">
+              <a:rPr lang="en-US" sz="930" dirty="0">
                 <a:solidFill>
                   <a:srgbClr val="3A4553"/>
                 </a:solidFill>
@@ -10941,9 +10947,9 @@
                 <a:ea typeface="Calibri" pitchFamily="34" charset="-122"/>
                 <a:cs typeface="Calibri" pitchFamily="34" charset="-120"/>
               </a:rPr>
-              <a:t>Tega's small-casting orders declined YoY, FY23-24 to FY24-25</a:t>
-            </a:r>
-            <a:endParaRPr lang="en-US" sz="980" dirty="0"/>
+              <a:t>Non-OEM legacy contribution by FY25 — IISCO, Bhushan Steel, Tata Metaliks, ESL and Metso wound down to zero, on purpose</a:t>
+            </a:r>
+            <a:endParaRPr lang="en-US" sz="930" dirty="0"/>
           </a:p>
         </p:txBody>
       </p:sp>
@@ -10955,8 +10961,8 @@
         </p:nvSpPr>
         <p:spPr>
           <a:xfrm>
-            <a:off x="6949440" y="4480560"/>
-            <a:ext cx="4693615" cy="365760"/>
+            <a:off x="6949440" y="3739896"/>
+            <a:ext cx="4693615" cy="320040"/>
           </a:xfrm>
           <a:prstGeom prst="rect">
             <a:avLst/>
@@ -10972,7 +10978,7 @@
               <a:buNone/>
             </a:pPr>
             <a:r>
-              <a:rPr lang="en-US" sz="1600" b="1" dirty="0">
+              <a:rPr lang="en-US" sz="1500" b="1" dirty="0">
                 <a:solidFill>
                   <a:srgbClr val="1C1F26"/>
                 </a:solidFill>
@@ -10980,9 +10986,9 @@
                 <a:ea typeface="Cambria" pitchFamily="34" charset="-122"/>
                 <a:cs typeface="Cambria" pitchFamily="34" charset="-120"/>
               </a:rPr>
-              <a:t>Thejo Engineering</a:t>
-            </a:r>
-            <a:endParaRPr lang="en-US" sz="1600" dirty="0"/>
+              <a:t>₹9.0 → ₹7.5 Cr</a:t>
+            </a:r>
+            <a:endParaRPr lang="en-US" sz="1500" dirty="0"/>
           </a:p>
         </p:txBody>
       </p:sp>
@@ -10994,8 +11000,8 @@
         </p:nvSpPr>
         <p:spPr>
           <a:xfrm>
-            <a:off x="6949440" y="4846320"/>
-            <a:ext cx="4693615" cy="822960"/>
+            <a:off x="6949440" y="4069080"/>
+            <a:ext cx="4693615" cy="621792"/>
           </a:xfrm>
           <a:prstGeom prst="rect">
             <a:avLst/>
@@ -11009,12 +11015,12 @@
           <a:p>
             <a:pPr indent="0" marL="0">
               <a:lnSpc>
-                <a:spcPct val="115000"/>
+                <a:spcPct val="110000"/>
               </a:lnSpc>
               <a:buNone/>
             </a:pPr>
             <a:r>
-              <a:rPr lang="en-US" sz="980" dirty="0">
+              <a:rPr lang="en-US" sz="930" dirty="0">
                 <a:solidFill>
                   <a:srgbClr val="3A4553"/>
                 </a:solidFill>
@@ -11022,15 +11028,138 @@
                 <a:ea typeface="Calibri" pitchFamily="34" charset="-122"/>
                 <a:cs typeface="Calibri" pitchFamily="34" charset="-120"/>
               </a:rPr>
-              <a:t>Formalized via NDA/exclusive tie-up alongside Tega in Mining — a real second leg, growing since FY22-23, though still small next to Tega/Escorts</a:t>
-            </a:r>
-            <a:endParaRPr lang="en-US" sz="980" dirty="0"/>
+              <a:t>Tega's small-casting orders still declined YoY, FY23-24 to FY24-25</a:t>
+            </a:r>
+            <a:endParaRPr lang="en-US" sz="930" dirty="0"/>
           </a:p>
         </p:txBody>
       </p:sp>
       <p:sp>
         <p:nvSpPr>
           <p:cNvPr id="12" name="Text 9"/>
+          <p:cNvSpPr/>
+          <p:nvPr/>
+        </p:nvSpPr>
+        <p:spPr>
+          <a:xfrm>
+            <a:off x="6949440" y="4764024"/>
+            <a:ext cx="4693615" cy="320040"/>
+          </a:xfrm>
+          <a:prstGeom prst="rect">
+            <a:avLst/>
+          </a:prstGeom>
+          <a:noFill/>
+          <a:ln/>
+        </p:spPr>
+        <p:txBody>
+          <a:bodyPr wrap="square" lIns="0" tIns="0" rIns="0" bIns="0" rtlCol="0" anchor="ctr"/>
+          <a:lstStyle/>
+          <a:p>
+            <a:pPr indent="0" marL="0">
+              <a:buNone/>
+            </a:pPr>
+            <a:r>
+              <a:rPr lang="en-US" sz="1500" b="1" dirty="0">
+                <a:solidFill>
+                  <a:srgbClr val="1C1F26"/>
+                </a:solidFill>
+                <a:latin typeface="Cambria" pitchFamily="34" charset="0"/>
+                <a:ea typeface="Cambria" pitchFamily="34" charset="-122"/>
+                <a:cs typeface="Cambria" pitchFamily="34" charset="-120"/>
+              </a:rPr>
+              <a:t>Thejo Engineering</a:t>
+            </a:r>
+            <a:endParaRPr lang="en-US" sz="1500" dirty="0"/>
+          </a:p>
+        </p:txBody>
+      </p:sp>
+      <p:sp>
+        <p:nvSpPr>
+          <p:cNvPr id="13" name="Text 10"/>
+          <p:cNvSpPr/>
+          <p:nvPr/>
+        </p:nvSpPr>
+        <p:spPr>
+          <a:xfrm>
+            <a:off x="6949440" y="5093208"/>
+            <a:ext cx="4693615" cy="621792"/>
+          </a:xfrm>
+          <a:prstGeom prst="rect">
+            <a:avLst/>
+          </a:prstGeom>
+          <a:noFill/>
+          <a:ln/>
+        </p:spPr>
+        <p:txBody>
+          <a:bodyPr wrap="square" lIns="0" tIns="0" rIns="0" bIns="0" rtlCol="0" anchor="ctr"/>
+          <a:lstStyle/>
+          <a:p>
+            <a:pPr indent="0" marL="0">
+              <a:lnSpc>
+                <a:spcPct val="110000"/>
+              </a:lnSpc>
+              <a:buNone/>
+            </a:pPr>
+            <a:r>
+              <a:rPr lang="en-US" sz="930" dirty="0">
+                <a:solidFill>
+                  <a:srgbClr val="3A4553"/>
+                </a:solidFill>
+                <a:latin typeface="Calibri" pitchFamily="34" charset="0"/>
+                <a:ea typeface="Calibri" pitchFamily="34" charset="-122"/>
+                <a:cs typeface="Calibri" pitchFamily="34" charset="-120"/>
+              </a:rPr>
+              <a:t>NDA/exclusive tie-up alongside Tega — the real second leg, still small next to Tega/Escorts</a:t>
+            </a:r>
+            <a:endParaRPr lang="en-US" sz="930" dirty="0"/>
+          </a:p>
+        </p:txBody>
+      </p:sp>
+      <p:sp>
+        <p:nvSpPr>
+          <p:cNvPr id="14" name="Text 11"/>
+          <p:cNvSpPr/>
+          <p:nvPr/>
+        </p:nvSpPr>
+        <p:spPr>
+          <a:xfrm>
+            <a:off x="6949440" y="5833872"/>
+            <a:ext cx="4693615" cy="502920"/>
+          </a:xfrm>
+          <a:prstGeom prst="rect">
+            <a:avLst/>
+          </a:prstGeom>
+          <a:noFill/>
+          <a:ln/>
+        </p:spPr>
+        <p:txBody>
+          <a:bodyPr wrap="square" lIns="0" tIns="0" rIns="0" bIns="0" rtlCol="0" anchor="ctr"/>
+          <a:lstStyle/>
+          <a:p>
+            <a:pPr indent="0" marL="0">
+              <a:lnSpc>
+                <a:spcPct val="110000"/>
+              </a:lnSpc>
+              <a:buNone/>
+            </a:pPr>
+            <a:r>
+              <a:rPr lang="en-US" sz="750" i="1" dirty="0">
+                <a:solidFill>
+                  <a:srgbClr val="6B7684"/>
+                </a:solidFill>
+                <a:latin typeface="Calibri" pitchFamily="34" charset="0"/>
+                <a:ea typeface="Calibri" pitchFamily="34" charset="-122"/>
+                <a:cs typeface="Calibri" pitchFamily="34" charset="-120"/>
+              </a:rPr>
+              <a:t>Panel figures: internal "Net Contribution" analysis (FY22 vs. FY26 projected) — a different basis from the Tega-share chart at left; both point the same direction.</a:t>
+            </a:r>
+            <a:endParaRPr lang="en-US" sz="750" dirty="0"/>
+          </a:p>
+        </p:txBody>
+      </p:sp>
+      <p:sp>
+        <p:nvSpPr>
+          <p:cNvPr id="15" name="Text 12"/>
           <p:cNvSpPr/>
           <p:nvPr/>
         </p:nvSpPr>
@@ -11069,7 +11198,7 @@
       </p:sp>
       <p:sp>
         <p:nvSpPr>
-          <p:cNvPr id="13" name="Text 10"/>
+          <p:cNvPr id="16" name="Text 13"/>
           <p:cNvSpPr/>
           <p:nvPr/>
         </p:nvSpPr>
@@ -12598,7 +12727,7 @@
                           <a:ea typeface="Calibri" pitchFamily="34" charset="-122"/>
                           <a:cs typeface="Calibri" pitchFamily="34" charset="-120"/>
                         </a:rPr>
-                        <a:t>5 running idler part numbers, 3 under RFQ. Contribution ₹68-114/kg — highest in the portfolio.</a:t>
+                        <a:t>5 idler part numbers, 3 under RFQ. Best ₹/kg in the portfolio (₹68-114) — but tiny in absolute terms: ₹1.03L (FY25) → ₹5.23L proj. (FY26), vs. Tega's ₹359L.</a:t>
                       </a:r>
                       <a:endParaRPr lang="en-US" sz="930" dirty="0">
                         <a:latin typeface="Calibri" charset="0"/>
@@ -12666,7 +12795,7 @@
                           <a:ea typeface="Calibri" pitchFamily="34" charset="-122"/>
                           <a:cs typeface="Calibri" pitchFamily="34" charset="-120"/>
                         </a:rPr>
-                        <a:t>Open first-article nonconformity (Mar 2026, part 17M3053110). Quality must close before further progress.</a:t>
+                        <a:t>Open first-article nonconformity (Mar 2026, part 17M3053110). Quality must close first — and stays sub-scale even resolved.</a:t>
                       </a:r>
                       <a:endParaRPr lang="en-US" sz="900" dirty="0">
                         <a:latin typeface="Calibri" charset="0"/>
@@ -13146,7 +13275,7 @@
                           <a:ea typeface="Calibri" pitchFamily="34" charset="-122"/>
                           <a:cs typeface="Calibri" pitchFamily="34" charset="-120"/>
                         </a:rPr>
-                        <a:t>Export tie-up under NDA; initial trial in progress.</a:t>
+                        <a:t>Export tie-up under NDA; initial trial in progress. First contribution projected FY25: ₹0.81L — a start, not yet a business.</a:t>
                       </a:r>
                       <a:endParaRPr lang="en-US" sz="930" dirty="0">
                         <a:latin typeface="Calibri" charset="0"/>
@@ -14107,7 +14236,7 @@
                 <a:ea typeface="Cambria" pitchFamily="34" charset="-122"/>
                 <a:cs typeface="Cambria" pitchFamily="34" charset="-120"/>
               </a:rPr>
-              <a:t>₹24.9 Cr</a:t>
+              <a:t>₹25.9 Cr</a:t>
             </a:r>
             <a:endParaRPr lang="en-US" sz="2700" dirty="0"/>
           </a:p>
@@ -14146,7 +14275,7 @@
                 <a:ea typeface="Calibri" pitchFamily="34" charset="-122"/>
                 <a:cs typeface="Calibri" pitchFamily="34" charset="-120"/>
               </a:rPr>
-              <a:t>FY25-26 net sales</a:t>
+              <a:t>FY25-26 revenue</a:t>
             </a:r>
             <a:endParaRPr lang="en-US" sz="1150" dirty="0"/>
           </a:p>
@@ -14185,7 +14314,7 @@
                 <a:ea typeface="Calibri" pitchFamily="34" charset="-122"/>
                 <a:cs typeface="Calibri" pitchFamily="34" charset="-120"/>
               </a:rPr>
-              <a:t>Record year, +27% YoY</a:t>
+              <a:t>Record year, +26% YoY — also a record ₹1.82 Cr profit</a:t>
             </a:r>
             <a:endParaRPr lang="en-US" sz="950" dirty="0"/>
           </a:p>
@@ -14813,7 +14942,7 @@
                 <a:ea typeface="Calibri" pitchFamily="34" charset="-122"/>
                 <a:cs typeface="Calibri" pitchFamily="34" charset="-120"/>
               </a:rPr>
-              <a:t>The moat now runs on operations: utilization has climbed from ~55% (2018) to ~81% (Aug 2025) on the same 1990s-era plant — revenue nearly tripled without a new factory.</a:t>
+              <a:t>The moat now runs on operations: utilization has climbed from ~55% (2018) to ~81% (Aug 2025) on the same 1990s-era plant — revenue has more than tripled without a new factory.</a:t>
             </a:r>
             <a:endParaRPr lang="en-US" sz="1100" dirty="0"/>
           </a:p>
@@ -22690,7 +22819,7 @@
                 <a:ea typeface="Calibri" pitchFamily="34" charset="-122"/>
                 <a:cs typeface="Calibri" pitchFamily="34" charset="-120"/>
               </a:rPr>
-              <a:t>Three consecutive audited profit years; FY25-26 revenue reaches a record ₹24.9 Cr; Komatsu (Japan) qualification pipeline opens.</a:t>
+              <a:t>Four consecutive profitable years (three audited, FY25-26 unaudited); FY25-26 revenue reaches a record ₹25.9 Cr; Komatsu (Japan) qualification pipeline opens.</a:t>
             </a:r>
             <a:endParaRPr lang="en-US" sz="930" dirty="0"/>
           </a:p>
@@ -24839,7 +24968,7 @@
                 <a:ea typeface="Calibri" pitchFamily="34" charset="-122"/>
                 <a:cs typeface="Calibri" pitchFamily="34" charset="-120"/>
               </a:rPr>
-              <a:t>Tega Industries (sole supplier since 2005, ~80%+ of Tega's outsourced white-iron liner need, historically) · Metso Outotec</a:t>
+              <a:t>Tega Industries (sole supplier since 2005, ~80%+ of Tega's outsourced white-iron liner need, historically); Metso wound down to zero by FY25 as part of the OEM-focus pivot</a:t>
             </a:r>
             <a:endParaRPr lang="en-US" sz="1000" dirty="0"/>
           </a:p>
@@ -26651,7 +26780,7 @@
         <p:spPr>
           <a:xfrm>
             <a:off x="7132320" y="1737360"/>
-            <a:ext cx="4510735" cy="457200"/>
+            <a:ext cx="4510735" cy="384048"/>
           </a:xfrm>
           <a:prstGeom prst="rect">
             <a:avLst/>
@@ -26667,7 +26796,7 @@
               <a:buNone/>
             </a:pPr>
             <a:r>
-              <a:rPr lang="en-US" sz="2200" b="1" dirty="0">
+              <a:rPr lang="en-US" sz="2000" b="1" dirty="0">
                 <a:solidFill>
                   <a:srgbClr val="E8B84B"/>
                 </a:solidFill>
@@ -26675,9 +26804,9 @@
                 <a:ea typeface="Cambria" pitchFamily="34" charset="-122"/>
                 <a:cs typeface="Cambria" pitchFamily="34" charset="-120"/>
               </a:rPr>
-              <a:t>2.9x</a:t>
-            </a:r>
-            <a:endParaRPr lang="en-US" sz="2200" dirty="0"/>
+              <a:t>3.1x</a:t>
+            </a:r>
+            <a:endParaRPr lang="en-US" sz="2000" dirty="0"/>
           </a:p>
         </p:txBody>
       </p:sp>
@@ -26689,8 +26818,8 @@
         </p:nvSpPr>
         <p:spPr>
           <a:xfrm>
-            <a:off x="7132320" y="2176272"/>
-            <a:ext cx="4510735" cy="685800"/>
+            <a:off x="7132320" y="2121408"/>
+            <a:ext cx="4510735" cy="502920"/>
           </a:xfrm>
           <a:prstGeom prst="rect">
             <a:avLst/>
@@ -26704,12 +26833,12 @@
           <a:p>
             <a:pPr indent="0" marL="0">
               <a:lnSpc>
-                <a:spcPct val="115000"/>
+                <a:spcPct val="110000"/>
               </a:lnSpc>
               <a:buNone/>
             </a:pPr>
             <a:r>
-              <a:rPr lang="en-US" sz="970" dirty="0">
+              <a:rPr lang="en-US" sz="930" dirty="0">
                 <a:solidFill>
                   <a:srgbClr val="CBD3DC"/>
                 </a:solidFill>
@@ -26719,7 +26848,7 @@
               </a:rPr>
               <a:t>Revenue growth, FY21 to FY25-26 — on the same installed capacity</a:t>
             </a:r>
-            <a:endParaRPr lang="en-US" sz="970" dirty="0"/>
+            <a:endParaRPr lang="en-US" sz="930" dirty="0"/>
           </a:p>
         </p:txBody>
       </p:sp>
@@ -26731,8 +26860,8 @@
         </p:nvSpPr>
         <p:spPr>
           <a:xfrm>
-            <a:off x="7132320" y="2971800"/>
-            <a:ext cx="4510735" cy="457200"/>
+            <a:off x="7132320" y="2651760"/>
+            <a:ext cx="4510735" cy="384048"/>
           </a:xfrm>
           <a:prstGeom prst="rect">
             <a:avLst/>
@@ -26748,7 +26877,7 @@
               <a:buNone/>
             </a:pPr>
             <a:r>
-              <a:rPr lang="en-US" sz="2200" b="1" dirty="0">
+              <a:rPr lang="en-US" sz="2000" b="1" dirty="0">
                 <a:solidFill>
                   <a:srgbClr val="E8B84B"/>
                 </a:solidFill>
@@ -26758,7 +26887,7 @@
               </a:rPr>
               <a:t>+7%</a:t>
             </a:r>
-            <a:endParaRPr lang="en-US" sz="2200" dirty="0"/>
+            <a:endParaRPr lang="en-US" sz="2000" dirty="0"/>
           </a:p>
         </p:txBody>
       </p:sp>
@@ -26770,8 +26899,8 @@
         </p:nvSpPr>
         <p:spPr>
           <a:xfrm>
-            <a:off x="7132320" y="3410712"/>
-            <a:ext cx="4510735" cy="685800"/>
+            <a:off x="7132320" y="3035808"/>
+            <a:ext cx="4510735" cy="502920"/>
           </a:xfrm>
           <a:prstGeom prst="rect">
             <a:avLst/>
@@ -26785,12 +26914,12 @@
           <a:p>
             <a:pPr indent="0" marL="0">
               <a:lnSpc>
-                <a:spcPct val="115000"/>
+                <a:spcPct val="110000"/>
               </a:lnSpc>
               <a:buNone/>
             </a:pPr>
             <a:r>
-              <a:rPr lang="en-US" sz="970" dirty="0">
+              <a:rPr lang="en-US" sz="930" dirty="0">
                 <a:solidFill>
                   <a:srgbClr val="CBD3DC"/>
                 </a:solidFill>
@@ -26800,7 +26929,7 @@
               </a:rPr>
               <a:t>Realization per MT, FY23-24 to FY25-26 — more value from the same tonnage</a:t>
             </a:r>
-            <a:endParaRPr lang="en-US" sz="970" dirty="0"/>
+            <a:endParaRPr lang="en-US" sz="930" dirty="0"/>
           </a:p>
         </p:txBody>
       </p:sp>
@@ -26812,8 +26941,8 @@
         </p:nvSpPr>
         <p:spPr>
           <a:xfrm>
-            <a:off x="7132320" y="4206240"/>
-            <a:ext cx="4510735" cy="457200"/>
+            <a:off x="7132320" y="3566160"/>
+            <a:ext cx="4510735" cy="384048"/>
           </a:xfrm>
           <a:prstGeom prst="rect">
             <a:avLst/>
@@ -26829,7 +26958,7 @@
               <a:buNone/>
             </a:pPr>
             <a:r>
-              <a:rPr lang="en-US" sz="2200" b="1" dirty="0">
+              <a:rPr lang="en-US" sz="2000" b="1" dirty="0">
                 <a:solidFill>
                   <a:srgbClr val="E8B84B"/>
                 </a:solidFill>
@@ -26837,9 +26966,9 @@
                 <a:ea typeface="Cambria" pitchFamily="34" charset="-122"/>
                 <a:cs typeface="Cambria" pitchFamily="34" charset="-120"/>
               </a:rPr>
-              <a:t>100%</a:t>
-            </a:r>
-            <a:endParaRPr lang="en-US" sz="2200" dirty="0"/>
+              <a:t>15%</a:t>
+            </a:r>
+            <a:endParaRPr lang="en-US" sz="2000" dirty="0"/>
           </a:p>
         </p:txBody>
       </p:sp>
@@ -26851,8 +26980,8 @@
         </p:nvSpPr>
         <p:spPr>
           <a:xfrm>
-            <a:off x="7132320" y="4645152"/>
-            <a:ext cx="4510735" cy="685800"/>
+            <a:off x="7132320" y="3950208"/>
+            <a:ext cx="4510735" cy="502920"/>
           </a:xfrm>
           <a:prstGeom prst="rect">
             <a:avLst/>
@@ -26866,12 +26995,12 @@
           <a:p>
             <a:pPr indent="0" marL="0">
               <a:lnSpc>
-                <a:spcPct val="115000"/>
+                <a:spcPct val="110000"/>
               </a:lnSpc>
               <a:buNone/>
             </a:pPr>
             <a:r>
-              <a:rPr lang="en-US" sz="970" dirty="0">
+              <a:rPr lang="en-US" sz="930" dirty="0">
                 <a:solidFill>
                   <a:srgbClr val="CBD3DC"/>
                 </a:solidFill>
@@ -26879,15 +27008,96 @@
                 <a:ea typeface="Calibri" pitchFamily="34" charset="-122"/>
                 <a:cs typeface="Calibri" pitchFamily="34" charset="-120"/>
               </a:rPr>
+              <a:t>Fixed costs as % of turnover, FY26 (proj.) — a 5-year low, down from 25.7% in FY22</a:t>
+            </a:r>
+            <a:endParaRPr lang="en-US" sz="930" dirty="0"/>
+          </a:p>
+        </p:txBody>
+      </p:sp>
+      <p:sp>
+        <p:nvSpPr>
+          <p:cNvPr id="12" name="Text 9"/>
+          <p:cNvSpPr/>
+          <p:nvPr/>
+        </p:nvSpPr>
+        <p:spPr>
+          <a:xfrm>
+            <a:off x="7132320" y="4480560"/>
+            <a:ext cx="4510735" cy="384048"/>
+          </a:xfrm>
+          <a:prstGeom prst="rect">
+            <a:avLst/>
+          </a:prstGeom>
+          <a:noFill/>
+          <a:ln/>
+        </p:spPr>
+        <p:txBody>
+          <a:bodyPr wrap="square" lIns="0" tIns="0" rIns="0" bIns="0" rtlCol="0" anchor="ctr"/>
+          <a:lstStyle/>
+          <a:p>
+            <a:pPr indent="0" marL="0">
+              <a:buNone/>
+            </a:pPr>
+            <a:r>
+              <a:rPr lang="en-US" sz="2000" b="1" dirty="0">
+                <a:solidFill>
+                  <a:srgbClr val="E8B84B"/>
+                </a:solidFill>
+                <a:latin typeface="Cambria" pitchFamily="34" charset="0"/>
+                <a:ea typeface="Cambria" pitchFamily="34" charset="-122"/>
+                <a:cs typeface="Cambria" pitchFamily="34" charset="-120"/>
+              </a:rPr>
+              <a:t>100%</a:t>
+            </a:r>
+            <a:endParaRPr lang="en-US" sz="2000" dirty="0"/>
+          </a:p>
+        </p:txBody>
+      </p:sp>
+      <p:sp>
+        <p:nvSpPr>
+          <p:cNvPr id="13" name="Text 10"/>
+          <p:cNvSpPr/>
+          <p:nvPr/>
+        </p:nvSpPr>
+        <p:spPr>
+          <a:xfrm>
+            <a:off x="7132320" y="4864608"/>
+            <a:ext cx="4510735" cy="502920"/>
+          </a:xfrm>
+          <a:prstGeom prst="rect">
+            <a:avLst/>
+          </a:prstGeom>
+          <a:noFill/>
+          <a:ln/>
+        </p:spPr>
+        <p:txBody>
+          <a:bodyPr wrap="square" lIns="0" tIns="0" rIns="0" bIns="0" rtlCol="0" anchor="ctr"/>
+          <a:lstStyle/>
+          <a:p>
+            <a:pPr indent="0" marL="0">
+              <a:lnSpc>
+                <a:spcPct val="110000"/>
+              </a:lnSpc>
+              <a:buNone/>
+            </a:pPr>
+            <a:r>
+              <a:rPr lang="en-US" sz="930" dirty="0">
+                <a:solidFill>
+                  <a:srgbClr val="CBD3DC"/>
+                </a:solidFill>
+                <a:latin typeface="Calibri" pitchFamily="34" charset="0"/>
+                <a:ea typeface="Calibri" pitchFamily="34" charset="-122"/>
+                <a:cs typeface="Calibri" pitchFamily="34" charset="-120"/>
+              </a:rPr>
               <a:t>In-house maintenance of 1990s-vintage imported European machinery — no OEM dependency</a:t>
             </a:r>
-            <a:endParaRPr lang="en-US" sz="970" dirty="0"/>
-          </a:p>
-        </p:txBody>
-      </p:sp>
-      <p:sp>
-        <p:nvSpPr>
-          <p:cNvPr id="12" name="Shape 9"/>
+            <a:endParaRPr lang="en-US" sz="930" dirty="0"/>
+          </a:p>
+        </p:txBody>
+      </p:sp>
+      <p:sp>
+        <p:nvSpPr>
+          <p:cNvPr id="14" name="Shape 11"/>
           <p:cNvSpPr/>
           <p:nvPr/>
         </p:nvSpPr>
@@ -26909,7 +27119,7 @@
       </p:sp>
       <p:sp>
         <p:nvSpPr>
-          <p:cNvPr id="13" name="Text 10"/>
+          <p:cNvPr id="15" name="Text 12"/>
           <p:cNvSpPr/>
           <p:nvPr/>
         </p:nvSpPr>
@@ -26930,12 +27140,12 @@
           <a:p>
             <a:pPr indent="0" marL="0">
               <a:lnSpc>
-                <a:spcPct val="115000"/>
+                <a:spcPct val="112000"/>
               </a:lnSpc>
               <a:buNone/>
             </a:pPr>
             <a:r>
-              <a:rPr lang="en-US" sz="1000" dirty="0">
+              <a:rPr lang="en-US" sz="970" dirty="0">
                 <a:solidFill>
                   <a:srgbClr val="FFFFFF"/>
                 </a:solidFill>
@@ -26943,15 +27153,15 @@
                 <a:ea typeface="Calibri" pitchFamily="34" charset="-122"/>
                 <a:cs typeface="Calibri" pitchFamily="34" charset="-120"/>
               </a:rPr>
-              <a:t>Why this is harder to copy than it looks: a well-funded competitor can order new furnaces tomorrow. What it cannot buy is 25+ years of knowing exactly how these specific, aging European machines fail — and “low capex” has been management's stated growth plan in every strategy document reviewed since 2022, not a one-year claim.</a:t>
-            </a:r>
-            <a:endParaRPr lang="en-US" sz="1000" dirty="0"/>
-          </a:p>
-        </p:txBody>
-      </p:sp>
-      <p:sp>
-        <p:nvSpPr>
-          <p:cNvPr id="14" name="Text 11"/>
+              <a:t>Why this is harder to copy than it looks: a well-funded competitor can order new furnaces tomorrow. What it cannot buy is 25+ years of knowing exactly how these specific, aging machines fail. "Low capex" doesn't mean zero — FY26 carries a planned ₹85.66L program (capacity + technology upgrades) — but it's modest, targeted spend, not a new factory.</a:t>
+            </a:r>
+            <a:endParaRPr lang="en-US" sz="970" dirty="0"/>
+          </a:p>
+        </p:txBody>
+      </p:sp>
+      <p:sp>
+        <p:nvSpPr>
+          <p:cNvPr id="16" name="Text 13"/>
           <p:cNvSpPr/>
           <p:nvPr/>
         </p:nvSpPr>
@@ -26990,7 +27200,7 @@
       </p:sp>
       <p:sp>
         <p:nvSpPr>
-          <p:cNvPr id="15" name="Text 12"/>
+          <p:cNvPr id="17" name="Text 14"/>
           <p:cNvSpPr/>
           <p:nvPr/>
         </p:nvSpPr>

--- a/investor-pitch/Datre_Corporation_Investor_Pitch.pptx
+++ b/investor-pitch/Datre_Corporation_Investor_Pitch.pptx
@@ -29,9 +29,11 @@
     <p:sldId id="277" r:id="rId23"/>
     <p:sldId id="278" r:id="rId24"/>
     <p:sldId id="279" r:id="rId25"/>
+    <p:sldId id="280" r:id="rId26"/>
+    <p:sldId id="281" r:id="rId27"/>
   </p:sldIdLst>
   <p:notesMasterIdLst>
-    <p:notesMasterId r:id="rId26"/>
+    <p:notesMasterId r:id="rId28"/>
   </p:notesMasterIdLst>
   <p:sldSz cx="12191695" cy="6858000"/>
   <p:notesSz cx="6858000" cy="12191695"/>
@@ -1636,6 +1638,293 @@
     <c:autoTitleDeleted val="1"/>
     <c:plotArea>
       <c:layout/>
+      <c:barChart>
+        <c:barDir val="col"/>
+        <c:grouping val="clustered"/>
+        <c:varyColors val="0"/>
+        <c:ser>
+          <c:idx val="0"/>
+          <c:order val="0"/>
+          <c:tx>
+            <c:strRef>
+              <c:f>Sheet1!$B$1</c:f>
+              <c:strCache>
+                <c:ptCount val="1"/>
+                <c:pt idx="0">
+                  <c:v>CEO CTC as % of turnover</c:v>
+                </c:pt>
+              </c:strCache>
+            </c:strRef>
+          </c:tx>
+          <c:spPr>
+            <a:solidFill>
+              <a:srgbClr val="D9622B"/>
+            </a:solidFill>
+            <a:effectLst/>
+          </c:spPr>
+          <c:invertIfNegative val="0"/>
+          <c:dLbls>
+            <c:numFmt formatCode="0.00&quot;%&quot;" sourceLinked="0"/>
+            <c:txPr>
+              <a:bodyPr/>
+              <a:lstStyle/>
+              <a:p>
+                <a:pPr>
+                  <a:defRPr b="0" i="0" strike="noStrike" sz="1100" u="none">
+                    <a:solidFill>
+                      <a:srgbClr val="1C1F26"/>
+                    </a:solidFill>
+                    <a:latin typeface="Arial"/>
+                  </a:defRPr>
+                </a:pPr>
+              </a:p>
+            </c:txPr>
+            <c:showLegendKey val="0"/>
+            <c:showVal val="1"/>
+            <c:showCatName val="0"/>
+            <c:showSerName val="0"/>
+            <c:showPercent val="0"/>
+            <c:showBubbleSize val="0"/>
+            <c:showLeaderLines val="0"/>
+          </c:dLbls>
+          <c:cat>
+            <c:multiLvlStrRef>
+              <c:f>Sheet1!$A$2:$A$6</c:f>
+              <c:multiLvlStrCache>
+                <c:ptCount val="5"/>
+                <c:lvl>
+                  <c:pt idx="0">
+                    <c:v>FY22</c:v>
+                  </c:pt>
+                  <c:pt idx="1">
+                    <c:v>FY23</c:v>
+                  </c:pt>
+                  <c:pt idx="2">
+                    <c:v>FY24</c:v>
+                  </c:pt>
+                  <c:pt idx="3">
+                    <c:v>FY25</c:v>
+                  </c:pt>
+                  <c:pt idx="4">
+                    <c:v>FY25-26</c:v>
+                  </c:pt>
+                </c:lvl>
+              </c:multiLvlStrCache>
+            </c:multiLvlStrRef>
+          </c:cat>
+          <c:val>
+            <c:numRef>
+              <c:f>Sheet1!$B$2:$B$6</c:f>
+              <c:numCache>
+                <c:formatCode>General</c:formatCode>
+                <c:ptCount val="5"/>
+                <c:pt idx="0">
+                  <c:v>1.72</c:v>
+                </c:pt>
+                <c:pt idx="1">
+                  <c:v>1.52</c:v>
+                </c:pt>
+                <c:pt idx="2">
+                  <c:v>1.26</c:v>
+                </c:pt>
+                <c:pt idx="3">
+                  <c:v>1.59</c:v>
+                </c:pt>
+                <c:pt idx="4">
+                  <c:v>1.51</c:v>
+                </c:pt>
+              </c:numCache>
+            </c:numRef>
+          </c:val>
+        </c:ser>
+        <c:dLbls>
+          <c:numFmt formatCode="0.00&quot;%&quot;" sourceLinked="0"/>
+          <c:txPr>
+            <a:bodyPr/>
+            <a:lstStyle/>
+            <a:p>
+              <a:pPr>
+                <a:defRPr b="0" i="0" strike="noStrike" sz="1100" u="none">
+                  <a:solidFill>
+                    <a:srgbClr val="1C1F26"/>
+                  </a:solidFill>
+                  <a:latin typeface="Arial"/>
+                </a:defRPr>
+              </a:pPr>
+            </a:p>
+          </c:txPr>
+          <c:showLegendKey val="0"/>
+          <c:showVal val="1"/>
+          <c:showCatName val="0"/>
+          <c:showSerName val="0"/>
+          <c:showPercent val="0"/>
+          <c:showBubbleSize val="0"/>
+          <c:showLeaderLines val="0"/>
+        </c:dLbls>
+        <c:gapWidth val="150"/>
+        <c:overlap val="0"/>
+        <c:axId val="2094734554"/>
+        <c:axId val="2094734552"/>
+        <c:axId val="2094734556"/>
+      </c:barChart>
+      <c:catAx>
+        <c:axId val="2094734554"/>
+        <c:scaling>
+          <c:orientation val="minMax"/>
+        </c:scaling>
+        <c:delete val="0"/>
+        <c:axPos val="b"/>
+        <c:numFmt formatCode="General" sourceLinked="1"/>
+        <c:majorTickMark val="out"/>
+        <c:minorTickMark val="none"/>
+        <c:tickLblPos val="low"/>
+        <c:spPr>
+          <a:ln w="12700" cap="flat">
+            <a:solidFill>
+              <a:srgbClr val="888888"/>
+            </a:solidFill>
+            <a:prstDash val="solid"/>
+            <a:round/>
+          </a:ln>
+        </c:spPr>
+        <c:txPr>
+          <a:bodyPr/>
+          <a:lstStyle/>
+          <a:p>
+            <a:pPr>
+              <a:defRPr sz="1100" b="0" i="0" u="none" strike="noStrike">
+                <a:solidFill>
+                  <a:srgbClr val="3A4553"/>
+                </a:solidFill>
+                <a:latin typeface="Arial"/>
+              </a:defRPr>
+            </a:pPr>
+            <a:endParaRPr lang="en-US"/>
+          </a:p>
+        </c:txPr>
+        <c:crossAx val="2094734552"/>
+        <c:crosses val="autoZero"/>
+        <c:auto val="1"/>
+        <c:lblAlgn val="ctr"/>
+        <c:noMultiLvlLbl val="1"/>
+      </c:catAx>
+      <c:valAx>
+        <c:axId val="2094734552"/>
+        <c:scaling>
+          <c:orientation val="minMax"/>
+          <c:max val="2.5"/>
+          <c:min val="0"/>
+        </c:scaling>
+        <c:delete val="0"/>
+        <c:axPos val="l"/>
+        <c:majorGridlines>
+          <c:spPr>
+            <a:ln w="9525" cap="flat">
+              <a:solidFill>
+                <a:srgbClr val="E1E4E9"/>
+              </a:solidFill>
+              <a:prstDash val="solid"/>
+              <a:round/>
+            </a:ln>
+          </c:spPr>
+        </c:majorGridlines>
+        <c:title>
+          <c:tx>
+            <c:rich>
+              <a:bodyPr/>
+              <a:lstStyle/>
+              <a:p>
+                <a:pPr>
+                  <a:defRPr sz="900" b="0" i="0" u="none" strike="noStrike">
+                    <a:solidFill>
+                      <a:srgbClr val="6B7684"/>
+                    </a:solidFill>
+                    <a:latin typeface="Arial"/>
+                  </a:defRPr>
+                </a:pPr>
+                <a:r>
+                  <a:rPr sz="900" b="0" i="0" u="none" strike="noStrike">
+                    <a:solidFill>
+                      <a:srgbClr val="6B7684"/>
+                    </a:solidFill>
+                    <a:latin typeface="Arial"/>
+                  </a:rPr>
+                  <a:t>% of turnover</a:t>
+                </a:r>
+              </a:p>
+            </c:rich>
+          </c:tx>
+          <c:layout/>
+          <c:overlay val="0"/>
+        </c:title>
+        <c:numFmt formatCode="General" sourceLinked="0"/>
+        <c:majorTickMark val="out"/>
+        <c:minorTickMark val="none"/>
+        <c:tickLblPos val="nextTo"/>
+        <c:spPr>
+          <a:ln w="12700" cap="flat">
+            <a:solidFill>
+              <a:srgbClr val="888888"/>
+            </a:solidFill>
+            <a:prstDash val="solid"/>
+            <a:round/>
+          </a:ln>
+        </c:spPr>
+        <c:txPr>
+          <a:bodyPr/>
+          <a:lstStyle/>
+          <a:p>
+            <a:pPr>
+              <a:defRPr sz="900" b="0" i="0" u="none" strike="noStrike">
+                <a:solidFill>
+                  <a:srgbClr val="3A4553"/>
+                </a:solidFill>
+                <a:latin typeface="Arial"/>
+              </a:defRPr>
+            </a:pPr>
+            <a:endParaRPr lang="en-US"/>
+          </a:p>
+        </c:txPr>
+        <c:crossAx val="2094734554"/>
+        <c:crosses val="autoZero"/>
+        <c:crossBetween val="between"/>
+      </c:valAx>
+      <c:spPr>
+        <a:solidFill>
+          <a:srgbClr val="FFFFFF"/>
+        </a:solidFill>
+        <a:ln>
+          <a:noFill/>
+        </a:ln>
+        <a:effectLst/>
+      </c:spPr>
+    </c:plotArea>
+    <c:plotVisOnly val="1"/>
+    <c:dispBlanksAs val="span"/>
+  </c:chart>
+  <c:spPr>
+    <a:solidFill>
+      <a:srgbClr val="FFFFFF"/>
+    </a:solidFill>
+    <a:ln>
+      <a:noFill/>
+    </a:ln>
+    <a:effectLst/>
+  </c:spPr>
+  <c:externalData r:id="rId1">
+    <c:autoUpdate val="0"/>
+  </c:externalData>
+</c:chartSpace>
+</file>
+
+<file path=ppt/charts/chart6.xml><?xml version="1.0" encoding="utf-8"?>
+<c:chartSpace xmlns:c="http://schemas.openxmlformats.org/drawingml/2006/chart" xmlns:a="http://schemas.openxmlformats.org/drawingml/2006/main" xmlns:r="http://schemas.openxmlformats.org/officeDocument/2006/relationships">
+  <c:date1904 val="0"/>
+  <c:roundedCorners val="1"/>
+  <c:chart>
+    <c:autoTitleDeleted val="1"/>
+    <c:plotArea>
+      <c:layout/>
       <c:lineChart>
         <c:varyColors val="0"/>
         <c:ser>
@@ -1927,7 +2216,7 @@
 </c:chartSpace>
 </file>
 
-<file path=ppt/charts/chart6.xml><?xml version="1.0" encoding="utf-8"?>
+<file path=ppt/charts/chart7.xml><?xml version="1.0" encoding="utf-8"?>
 <c:chartSpace xmlns:c="http://schemas.openxmlformats.org/drawingml/2006/chart" xmlns:a="http://schemas.openxmlformats.org/drawingml/2006/main" xmlns:r="http://schemas.openxmlformats.org/officeDocument/2006/relationships">
   <c:date1904 val="0"/>
   <c:roundedCorners val="1"/>
@@ -2212,7 +2501,7 @@
 </c:chartSpace>
 </file>
 
-<file path=ppt/charts/chart7.xml><?xml version="1.0" encoding="utf-8"?>
+<file path=ppt/charts/chart8.xml><?xml version="1.0" encoding="utf-8"?>
 <c:chartSpace xmlns:c="http://schemas.openxmlformats.org/drawingml/2006/chart" xmlns:a="http://schemas.openxmlformats.org/drawingml/2006/main" xmlns:r="http://schemas.openxmlformats.org/officeDocument/2006/relationships">
   <c:date1904 val="0"/>
   <c:roundedCorners val="1"/>
@@ -4324,6 +4613,182 @@
             <a:fld id="{F7021451-1387-4CA6-816F-3879F97B5CBC}" type="slidenum">
               <a:rPr lang="en-US"/>
               <a:t>24</a:t>
+            </a:fld>
+            <a:endParaRPr lang="en-US"/>
+          </a:p>
+        </p:txBody>
+      </p:sp>
+    </p:spTree>
+    <p:extLst>
+      <p:ext uri="{BB962C8B-B14F-4D97-AF65-F5344CB8AC3E}">
+        <p14:creationId xmlns:p14="http://schemas.microsoft.com/office/powerpoint/2010/main" val="1024086991"/>
+      </p:ext>
+    </p:extLst>
+  </p:cSld>
+  <p:clrMapOvr>
+    <a:masterClrMapping/>
+  </p:clrMapOvr>
+</p:notes>
+</file>
+
+<file path=ppt/notesSlides/notesSlide25.xml><?xml version="1.0" encoding="utf-8"?>
+<p:notes xmlns:a="http://schemas.openxmlformats.org/drawingml/2006/main" xmlns:r="http://schemas.openxmlformats.org/officeDocument/2006/relationships" xmlns:p="http://schemas.openxmlformats.org/presentationml/2006/main">
+  <p:cSld>
+    <p:spTree>
+      <p:nvGrpSpPr>
+        <p:cNvPr id="1" name=""/>
+        <p:cNvGrpSpPr/>
+        <p:nvPr/>
+      </p:nvGrpSpPr>
+      <p:grpSpPr>
+        <a:xfrm>
+          <a:off x="0" y="0"/>
+          <a:ext cx="0" cy="0"/>
+          <a:chOff x="0" y="0"/>
+          <a:chExt cx="0" cy="0"/>
+        </a:xfrm>
+      </p:grpSpPr>
+      <p:sp>
+        <p:nvSpPr>
+          <p:cNvPr id="2" name="Slide Image Placeholder 1"/>
+          <p:cNvSpPr>
+            <a:spLocks noGrp="1" noRot="1" noChangeAspect="1"/>
+          </p:cNvSpPr>
+          <p:nvPr>
+            <p:ph type="sldImg"/>
+          </p:nvPr>
+        </p:nvSpPr>
+        <p:spPr/>
+      </p:sp>
+      <p:sp>
+        <p:nvSpPr>
+          <p:cNvPr id="3" name="Notes Placeholder 2"/>
+          <p:cNvSpPr>
+            <a:spLocks noGrp="1"/>
+          </p:cNvSpPr>
+          <p:nvPr>
+            <p:ph type="body" idx="1"/>
+          </p:nvPr>
+        </p:nvSpPr>
+        <p:spPr/>
+        <p:txBody>
+          <a:bodyPr/>
+          <a:lstStyle/>
+          <a:p>
+            <a:r>
+              <a:rPr lang="en-US" dirty="0"/>
+              <a:t/>
+            </a:r>
+            <a:endParaRPr lang="en-US" dirty="0"/>
+          </a:p>
+        </p:txBody>
+      </p:sp>
+      <p:sp>
+        <p:nvSpPr>
+          <p:cNvPr id="4" name="Slide Number Placeholder 3"/>
+          <p:cNvSpPr>
+            <a:spLocks noGrp="1"/>
+          </p:cNvSpPr>
+          <p:nvPr>
+            <p:ph type="sldNum" sz="quarter" idx="10"/>
+          </p:nvPr>
+        </p:nvSpPr>
+        <p:spPr/>
+        <p:txBody>
+          <a:bodyPr/>
+          <a:lstStyle/>
+          <a:p>
+            <a:fld id="{F7021451-1387-4CA6-816F-3879F97B5CBC}" type="slidenum">
+              <a:rPr lang="en-US"/>
+              <a:t>25</a:t>
+            </a:fld>
+            <a:endParaRPr lang="en-US"/>
+          </a:p>
+        </p:txBody>
+      </p:sp>
+    </p:spTree>
+    <p:extLst>
+      <p:ext uri="{BB962C8B-B14F-4D97-AF65-F5344CB8AC3E}">
+        <p14:creationId xmlns:p14="http://schemas.microsoft.com/office/powerpoint/2010/main" val="1024086991"/>
+      </p:ext>
+    </p:extLst>
+  </p:cSld>
+  <p:clrMapOvr>
+    <a:masterClrMapping/>
+  </p:clrMapOvr>
+</p:notes>
+</file>
+
+<file path=ppt/notesSlides/notesSlide26.xml><?xml version="1.0" encoding="utf-8"?>
+<p:notes xmlns:a="http://schemas.openxmlformats.org/drawingml/2006/main" xmlns:r="http://schemas.openxmlformats.org/officeDocument/2006/relationships" xmlns:p="http://schemas.openxmlformats.org/presentationml/2006/main">
+  <p:cSld>
+    <p:spTree>
+      <p:nvGrpSpPr>
+        <p:cNvPr id="1" name=""/>
+        <p:cNvGrpSpPr/>
+        <p:nvPr/>
+      </p:nvGrpSpPr>
+      <p:grpSpPr>
+        <a:xfrm>
+          <a:off x="0" y="0"/>
+          <a:ext cx="0" cy="0"/>
+          <a:chOff x="0" y="0"/>
+          <a:chExt cx="0" cy="0"/>
+        </a:xfrm>
+      </p:grpSpPr>
+      <p:sp>
+        <p:nvSpPr>
+          <p:cNvPr id="2" name="Slide Image Placeholder 1"/>
+          <p:cNvSpPr>
+            <a:spLocks noGrp="1" noRot="1" noChangeAspect="1"/>
+          </p:cNvSpPr>
+          <p:nvPr>
+            <p:ph type="sldImg"/>
+          </p:nvPr>
+        </p:nvSpPr>
+        <p:spPr/>
+      </p:sp>
+      <p:sp>
+        <p:nvSpPr>
+          <p:cNvPr id="3" name="Notes Placeholder 2"/>
+          <p:cNvSpPr>
+            <a:spLocks noGrp="1"/>
+          </p:cNvSpPr>
+          <p:nvPr>
+            <p:ph type="body" idx="1"/>
+          </p:nvPr>
+        </p:nvSpPr>
+        <p:spPr/>
+        <p:txBody>
+          <a:bodyPr/>
+          <a:lstStyle/>
+          <a:p>
+            <a:r>
+              <a:rPr lang="en-US" dirty="0"/>
+              <a:t/>
+            </a:r>
+            <a:endParaRPr lang="en-US" dirty="0"/>
+          </a:p>
+        </p:txBody>
+      </p:sp>
+      <p:sp>
+        <p:nvSpPr>
+          <p:cNvPr id="4" name="Slide Number Placeholder 3"/>
+          <p:cNvSpPr>
+            <a:spLocks noGrp="1"/>
+          </p:cNvSpPr>
+          <p:nvPr>
+            <p:ph type="sldNum" sz="quarter" idx="10"/>
+          </p:nvPr>
+        </p:nvSpPr>
+        <p:spPr/>
+        <p:txBody>
+          <a:bodyPr/>
+          <a:lstStyle/>
+          <a:p>
+            <a:fld id="{F7021451-1387-4CA6-816F-3879F97B5CBC}" type="slidenum">
+              <a:rPr lang="en-US"/>
+              <a:t>26</a:t>
             </a:fld>
             <a:endParaRPr lang="en-US"/>
           </a:p>
@@ -9063,7 +9528,7 @@
                 <a:ea typeface="Calibri" pitchFamily="34" charset="-122"/>
                 <a:cs typeface="Calibri" pitchFamily="34" charset="-120"/>
               </a:rPr>
-              <a:t>Liabilities have exceeded assets every audited year (FY22-25) — but the gap has narrowed every year, from -₹5.94 Cr to -₹1.54 Cr. At the FY24-25 pace, FY26 crosses to positive — FY26-27's slower start (slide 12) puts that timeline at risk, though slide 13 shows a bigger gap closed before. See slide 15 for the trend.</a:t>
+              <a:t>Liabilities have exceeded assets every audited year (FY22-25) — but the gap has narrowed every year, from -₹5.94 Cr to -₹1.54 Cr. At the FY24-25 pace, FY26 crosses to positive — FY26-27's slower start (slide 12) puts that timeline at risk, though slide 13 shows a bigger gap closed before. See slide 17 for the trend.</a:t>
             </a:r>
             <a:endParaRPr lang="en-US" sz="1000" dirty="0"/>
           </a:p>
@@ -9636,7 +10101,7 @@
                 <a:ea typeface="Calibri" pitchFamily="34" charset="-122"/>
                 <a:cs typeface="Calibri" pitchFamily="34" charset="-120"/>
               </a:rPr>
-              <a:t>THE PROGRESS CASE</a:t>
+              <a:t>GOVERNANCE — MANAGEMENT COMPENSATION</a:t>
             </a:r>
             <a:endParaRPr lang="en-US" sz="1100" dirty="0"/>
           </a:p>
@@ -9675,44 +10140,38 @@
                 <a:ea typeface="Cambria" pitchFamily="34" charset="-122"/>
                 <a:cs typeface="Cambria" pitchFamily="34" charset="-120"/>
               </a:rPr>
-              <a:t>Four numbers that show this is a multi-year rebuild, not one good year</a:t>
+              <a:t>CEO compensation has tracked turnover for five years — FY26-27 is the test</a:t>
             </a:r>
             <a:endParaRPr lang="en-US" sz="3000" dirty="0"/>
           </a:p>
         </p:txBody>
       </p:sp>
-      <p:sp>
-        <p:nvSpPr>
-          <p:cNvPr id="4" name="Shape 2"/>
-          <p:cNvSpPr/>
-          <p:nvPr/>
-        </p:nvSpPr>
-        <p:spPr>
-          <a:xfrm>
-            <a:off x="548640" y="1737360"/>
-            <a:ext cx="2567864" cy="1600200"/>
-          </a:xfrm>
-          <a:prstGeom prst="roundRect">
-            <a:avLst>
-              <a:gd name="adj" fmla="val 4571"/>
-            </a:avLst>
-          </a:prstGeom>
-          <a:solidFill>
-            <a:srgbClr val="EDF5EF"/>
-          </a:solidFill>
-          <a:ln/>
-        </p:spPr>
-      </p:sp>
-      <p:sp>
-        <p:nvSpPr>
-          <p:cNvPr id="5" name="Text 3"/>
-          <p:cNvSpPr/>
-          <p:nvPr/>
-        </p:nvSpPr>
-        <p:spPr>
-          <a:xfrm>
-            <a:off x="713232" y="1874520"/>
-            <a:ext cx="2238680" cy="502920"/>
+      <p:graphicFrame>
+        <p:nvGraphicFramePr>
+          <p:cNvPr id="4" name="Chart 0" descr=""/>
+          <p:cNvGraphicFramePr/>
+          <p:nvPr/>
+        </p:nvGraphicFramePr>
+        <p:xfrm>
+          <a:off x="548640" y="1737360"/>
+          <a:ext cx="6400800" cy="3200400"/>
+        </p:xfrm>
+        <a:graphic xmlns:a="http://schemas.openxmlformats.org/drawingml/2006/main">
+          <a:graphicData uri="http://schemas.openxmlformats.org/drawingml/2006/chart">
+            <c:chart xmlns:c="http://schemas.openxmlformats.org/drawingml/2006/chart" r:id="rId1"/>
+          </a:graphicData>
+        </a:graphic>
+      </p:graphicFrame>
+      <p:sp>
+        <p:nvSpPr>
+          <p:cNvPr id="5" name="Text 2"/>
+          <p:cNvSpPr/>
+          <p:nvPr/>
+        </p:nvSpPr>
+        <p:spPr>
+          <a:xfrm>
+            <a:off x="548640" y="5074920"/>
+            <a:ext cx="6400800" cy="502920"/>
           </a:xfrm>
           <a:prstGeom prst="rect">
             <a:avLst/>
@@ -9725,33 +10184,75 @@
           <a:lstStyle/>
           <a:p>
             <a:pPr indent="0" marL="0">
-              <a:buNone/>
-            </a:pPr>
-            <a:r>
-              <a:rPr lang="en-US" sz="2400" b="1" dirty="0">
-                <a:solidFill>
-                  <a:srgbClr val="3F8F5F"/>
+              <a:lnSpc>
+                <a:spcPct val="110000"/>
+              </a:lnSpc>
+              <a:buNone/>
+            </a:pPr>
+            <a:r>
+              <a:rPr lang="en-US" sz="900" i="1" dirty="0">
+                <a:solidFill>
+                  <a:srgbClr val="6B7684"/>
+                </a:solidFill>
+                <a:latin typeface="Calibri" pitchFamily="34" charset="0"/>
+                <a:ea typeface="Calibri" pitchFamily="34" charset="-122"/>
+                <a:cs typeface="Calibri" pitchFamily="34" charset="-120"/>
+              </a:rPr>
+              <a:t>Five straight years in a 1.26%-1.72% band — compensation scaled with the business, not ahead of it. Source: internal CTC records vs. audited/turnover-statement revenue.</a:t>
+            </a:r>
+            <a:endParaRPr lang="en-US" sz="900" dirty="0"/>
+          </a:p>
+        </p:txBody>
+      </p:sp>
+      <p:sp>
+        <p:nvSpPr>
+          <p:cNvPr id="6" name="Text 3"/>
+          <p:cNvSpPr/>
+          <p:nvPr/>
+        </p:nvSpPr>
+        <p:spPr>
+          <a:xfrm>
+            <a:off x="7223760" y="1737360"/>
+            <a:ext cx="4419295" cy="411480"/>
+          </a:xfrm>
+          <a:prstGeom prst="rect">
+            <a:avLst/>
+          </a:prstGeom>
+          <a:noFill/>
+          <a:ln/>
+        </p:spPr>
+        <p:txBody>
+          <a:bodyPr wrap="square" lIns="0" tIns="0" rIns="0" bIns="0" rtlCol="0" anchor="ctr"/>
+          <a:lstStyle/>
+          <a:p>
+            <a:pPr indent="0" marL="0">
+              <a:buNone/>
+            </a:pPr>
+            <a:r>
+              <a:rPr lang="en-US" sz="2100" b="1" dirty="0">
+                <a:solidFill>
+                  <a:srgbClr val="1C1F26"/>
                 </a:solidFill>
                 <a:latin typeface="Cambria" pitchFamily="34" charset="0"/>
                 <a:ea typeface="Cambria" pitchFamily="34" charset="-122"/>
                 <a:cs typeface="Cambria" pitchFamily="34" charset="-120"/>
               </a:rPr>
-              <a:t>~25%</a:t>
-            </a:r>
-            <a:endParaRPr lang="en-US" sz="2400" dirty="0"/>
-          </a:p>
-        </p:txBody>
-      </p:sp>
-      <p:sp>
-        <p:nvSpPr>
-          <p:cNvPr id="6" name="Text 4"/>
-          <p:cNvSpPr/>
-          <p:nvPr/>
-        </p:nvSpPr>
-        <p:spPr>
-          <a:xfrm>
-            <a:off x="713232" y="2395728"/>
-            <a:ext cx="2238680" cy="502920"/>
+              <a:t>1.18x</a:t>
+            </a:r>
+            <a:endParaRPr lang="en-US" sz="2100" dirty="0"/>
+          </a:p>
+        </p:txBody>
+      </p:sp>
+      <p:sp>
+        <p:nvSpPr>
+          <p:cNvPr id="7" name="Text 4"/>
+          <p:cNvSpPr/>
+          <p:nvPr/>
+        </p:nvSpPr>
+        <p:spPr>
+          <a:xfrm>
+            <a:off x="7223760" y="2139696"/>
+            <a:ext cx="4419295" cy="685800"/>
           </a:xfrm>
           <a:prstGeom prst="rect">
             <a:avLst/>
@@ -9765,138 +10266,74 @@
           <a:p>
             <a:pPr indent="0" marL="0">
               <a:lnSpc>
-                <a:spcPct val="105000"/>
+                <a:spcPct val="115000"/>
               </a:lnSpc>
               <a:buNone/>
             </a:pPr>
             <a:r>
-              <a:rPr lang="en-US" sz="1030" b="1" dirty="0">
+              <a:rPr lang="en-US" sz="950" dirty="0">
+                <a:solidFill>
+                  <a:srgbClr val="3A4553"/>
+                </a:solidFill>
+                <a:latin typeface="Calibri" pitchFamily="34" charset="0"/>
+                <a:ea typeface="Calibri" pitchFamily="34" charset="-122"/>
+                <a:cs typeface="Calibri" pitchFamily="34" charset="-120"/>
+              </a:rPr>
+              <a:t>CEO CTC vs. CFO CTC, FY26-27 — a narrow premium, consistent across all 5 years</a:t>
+            </a:r>
+            <a:endParaRPr lang="en-US" sz="950" dirty="0"/>
+          </a:p>
+        </p:txBody>
+      </p:sp>
+      <p:sp>
+        <p:nvSpPr>
+          <p:cNvPr id="8" name="Text 5"/>
+          <p:cNvSpPr/>
+          <p:nvPr/>
+        </p:nvSpPr>
+        <p:spPr>
+          <a:xfrm>
+            <a:off x="7223760" y="2907792"/>
+            <a:ext cx="4419295" cy="411480"/>
+          </a:xfrm>
+          <a:prstGeom prst="rect">
+            <a:avLst/>
+          </a:prstGeom>
+          <a:noFill/>
+          <a:ln/>
+        </p:spPr>
+        <p:txBody>
+          <a:bodyPr wrap="square" lIns="0" tIns="0" rIns="0" bIns="0" rtlCol="0" anchor="ctr"/>
+          <a:lstStyle/>
+          <a:p>
+            <a:pPr indent="0" marL="0">
+              <a:buNone/>
+            </a:pPr>
+            <a:r>
+              <a:rPr lang="en-US" sz="2100" b="1" dirty="0">
                 <a:solidFill>
                   <a:srgbClr val="1C1F26"/>
-                </a:solidFill>
-                <a:latin typeface="Calibri" pitchFamily="34" charset="0"/>
-                <a:ea typeface="Calibri" pitchFamily="34" charset="-122"/>
-                <a:cs typeface="Calibri" pitchFamily="34" charset="-120"/>
-              </a:rPr>
-              <a:t>Revenue CAGR, FY21 trough to FY25-26</a:t>
-            </a:r>
-            <a:endParaRPr lang="en-US" sz="1030" dirty="0"/>
-          </a:p>
-        </p:txBody>
-      </p:sp>
-      <p:sp>
-        <p:nvSpPr>
-          <p:cNvPr id="7" name="Text 5"/>
-          <p:cNvSpPr/>
-          <p:nvPr/>
-        </p:nvSpPr>
-        <p:spPr>
-          <a:xfrm>
-            <a:off x="713232" y="2889504"/>
-            <a:ext cx="2238680" cy="411480"/>
-          </a:xfrm>
-          <a:prstGeom prst="rect">
-            <a:avLst/>
-          </a:prstGeom>
-          <a:noFill/>
-          <a:ln/>
-        </p:spPr>
-        <p:txBody>
-          <a:bodyPr wrap="square" lIns="0" tIns="0" rIns="0" bIns="0" rtlCol="0" anchor="ctr"/>
-          <a:lstStyle/>
-          <a:p>
-            <a:pPr indent="0" marL="0">
-              <a:lnSpc>
-                <a:spcPct val="105000"/>
-              </a:lnSpc>
-              <a:buNone/>
-            </a:pPr>
-            <a:r>
-              <a:rPr lang="en-US" sz="900" dirty="0">
-                <a:solidFill>
-                  <a:srgbClr val="3A4553"/>
-                </a:solidFill>
-                <a:latin typeface="Calibri" pitchFamily="34" charset="0"/>
-                <a:ea typeface="Calibri" pitchFamily="34" charset="-122"/>
-                <a:cs typeface="Calibri" pitchFamily="34" charset="-120"/>
-              </a:rPr>
-              <a:t>₹8.5 Cr → ₹25.9 Cr over 5 years</a:t>
-            </a:r>
-            <a:endParaRPr lang="en-US" sz="900" dirty="0"/>
-          </a:p>
-        </p:txBody>
-      </p:sp>
-      <p:sp>
-        <p:nvSpPr>
-          <p:cNvPr id="8" name="Shape 6"/>
-          <p:cNvSpPr/>
-          <p:nvPr/>
-        </p:nvSpPr>
-        <p:spPr>
-          <a:xfrm>
-            <a:off x="3390824" y="1737360"/>
-            <a:ext cx="2567864" cy="1600200"/>
-          </a:xfrm>
-          <a:prstGeom prst="roundRect">
-            <a:avLst>
-              <a:gd name="adj" fmla="val 4571"/>
-            </a:avLst>
-          </a:prstGeom>
-          <a:solidFill>
-            <a:srgbClr val="EDF5EF"/>
-          </a:solidFill>
-          <a:ln/>
-        </p:spPr>
-      </p:sp>
-      <p:sp>
-        <p:nvSpPr>
-          <p:cNvPr id="9" name="Text 7"/>
-          <p:cNvSpPr/>
-          <p:nvPr/>
-        </p:nvSpPr>
-        <p:spPr>
-          <a:xfrm>
-            <a:off x="3555416" y="1874520"/>
-            <a:ext cx="2238680" cy="502920"/>
-          </a:xfrm>
-          <a:prstGeom prst="rect">
-            <a:avLst/>
-          </a:prstGeom>
-          <a:noFill/>
-          <a:ln/>
-        </p:spPr>
-        <p:txBody>
-          <a:bodyPr wrap="square" lIns="0" tIns="0" rIns="0" bIns="0" rtlCol="0" anchor="ctr"/>
-          <a:lstStyle/>
-          <a:p>
-            <a:pPr indent="0" marL="0">
-              <a:buNone/>
-            </a:pPr>
-            <a:r>
-              <a:rPr lang="en-US" sz="2400" b="1" dirty="0">
-                <a:solidFill>
-                  <a:srgbClr val="3F8F5F"/>
                 </a:solidFill>
                 <a:latin typeface="Cambria" pitchFamily="34" charset="0"/>
                 <a:ea typeface="Cambria" pitchFamily="34" charset="-122"/>
                 <a:cs typeface="Cambria" pitchFamily="34" charset="-120"/>
               </a:rPr>
-              <a:t>₹4.4 Cr</a:t>
-            </a:r>
-            <a:endParaRPr lang="en-US" sz="2400" dirty="0"/>
-          </a:p>
-        </p:txBody>
-      </p:sp>
-      <p:sp>
-        <p:nvSpPr>
-          <p:cNvPr id="10" name="Text 8"/>
-          <p:cNvSpPr/>
-          <p:nvPr/>
-        </p:nvSpPr>
-        <p:spPr>
-          <a:xfrm>
-            <a:off x="3555416" y="2395728"/>
-            <a:ext cx="2238680" cy="502920"/>
+              <a:t>61.5%</a:t>
+            </a:r>
+            <a:endParaRPr lang="en-US" sz="2100" dirty="0"/>
+          </a:p>
+        </p:txBody>
+      </p:sp>
+      <p:sp>
+        <p:nvSpPr>
+          <p:cNvPr id="9" name="Text 6"/>
+          <p:cNvSpPr/>
+          <p:nvPr/>
+        </p:nvSpPr>
+        <p:spPr>
+          <a:xfrm>
+            <a:off x="7223760" y="3310128"/>
+            <a:ext cx="4419295" cy="685800"/>
           </a:xfrm>
           <a:prstGeom prst="rect">
             <a:avLst/>
@@ -9910,138 +10347,74 @@
           <a:p>
             <a:pPr indent="0" marL="0">
               <a:lnSpc>
-                <a:spcPct val="105000"/>
+                <a:spcPct val="115000"/>
               </a:lnSpc>
               <a:buNone/>
             </a:pPr>
             <a:r>
-              <a:rPr lang="en-US" sz="1030" b="1" dirty="0">
+              <a:rPr lang="en-US" sz="950" dirty="0">
+                <a:solidFill>
+                  <a:srgbClr val="3A4553"/>
+                </a:solidFill>
+                <a:latin typeface="Calibri" pitchFamily="34" charset="0"/>
+                <a:ea typeface="Calibri" pitchFamily="34" charset="-122"/>
+                <a:cs typeface="Calibri" pitchFamily="34" charset="-120"/>
+              </a:rPr>
+              <a:t>CEO's CTC relative to the combined CTC of the other 28 listed staff (ex-CFO), FY26-27</a:t>
+            </a:r>
+            <a:endParaRPr lang="en-US" sz="950" dirty="0"/>
+          </a:p>
+        </p:txBody>
+      </p:sp>
+      <p:sp>
+        <p:nvSpPr>
+          <p:cNvPr id="10" name="Text 7"/>
+          <p:cNvSpPr/>
+          <p:nvPr/>
+        </p:nvSpPr>
+        <p:spPr>
+          <a:xfrm>
+            <a:off x="7223760" y="4078224"/>
+            <a:ext cx="4419295" cy="411480"/>
+          </a:xfrm>
+          <a:prstGeom prst="rect">
+            <a:avLst/>
+          </a:prstGeom>
+          <a:noFill/>
+          <a:ln/>
+        </p:spPr>
+        <p:txBody>
+          <a:bodyPr wrap="square" lIns="0" tIns="0" rIns="0" bIns="0" rtlCol="0" anchor="ctr"/>
+          <a:lstStyle/>
+          <a:p>
+            <a:pPr indent="0" marL="0">
+              <a:buNone/>
+            </a:pPr>
+            <a:r>
+              <a:rPr lang="en-US" sz="2100" b="1" dirty="0">
                 <a:solidFill>
                   <a:srgbClr val="1C1F26"/>
-                </a:solidFill>
-                <a:latin typeface="Calibri" pitchFamily="34" charset="0"/>
-                <a:ea typeface="Calibri" pitchFamily="34" charset="-122"/>
-                <a:cs typeface="Calibri" pitchFamily="34" charset="-120"/>
-              </a:rPr>
-              <a:t>Net worth recovered, FY22 to FY25</a:t>
-            </a:r>
-            <a:endParaRPr lang="en-US" sz="1030" dirty="0"/>
-          </a:p>
-        </p:txBody>
-      </p:sp>
-      <p:sp>
-        <p:nvSpPr>
-          <p:cNvPr id="11" name="Text 9"/>
-          <p:cNvSpPr/>
-          <p:nvPr/>
-        </p:nvSpPr>
-        <p:spPr>
-          <a:xfrm>
-            <a:off x="3555416" y="2889504"/>
-            <a:ext cx="2238680" cy="411480"/>
-          </a:xfrm>
-          <a:prstGeom prst="rect">
-            <a:avLst/>
-          </a:prstGeom>
-          <a:noFill/>
-          <a:ln/>
-        </p:spPr>
-        <p:txBody>
-          <a:bodyPr wrap="square" lIns="0" tIns="0" rIns="0" bIns="0" rtlCol="0" anchor="ctr"/>
-          <a:lstStyle/>
-          <a:p>
-            <a:pPr indent="0" marL="0">
-              <a:lnSpc>
-                <a:spcPct val="105000"/>
-              </a:lnSpc>
-              <a:buNone/>
-            </a:pPr>
-            <a:r>
-              <a:rPr lang="en-US" sz="900" dirty="0">
-                <a:solidFill>
-                  <a:srgbClr val="3A4553"/>
-                </a:solidFill>
-                <a:latin typeface="Calibri" pitchFamily="34" charset="0"/>
-                <a:ea typeface="Calibri" pitchFamily="34" charset="-122"/>
-                <a:cs typeface="Calibri" pitchFamily="34" charset="-120"/>
-              </a:rPr>
-              <a:t>-₹5.94 Cr → -₹1.54 Cr, narrower every year</a:t>
-            </a:r>
-            <a:endParaRPr lang="en-US" sz="900" dirty="0"/>
-          </a:p>
-        </p:txBody>
-      </p:sp>
-      <p:sp>
-        <p:nvSpPr>
-          <p:cNvPr id="12" name="Shape 10"/>
-          <p:cNvSpPr/>
-          <p:nvPr/>
-        </p:nvSpPr>
-        <p:spPr>
-          <a:xfrm>
-            <a:off x="6233008" y="1737360"/>
-            <a:ext cx="2567864" cy="1600200"/>
-          </a:xfrm>
-          <a:prstGeom prst="roundRect">
-            <a:avLst>
-              <a:gd name="adj" fmla="val 4571"/>
-            </a:avLst>
-          </a:prstGeom>
-          <a:solidFill>
-            <a:srgbClr val="EDF5EF"/>
-          </a:solidFill>
-          <a:ln/>
-        </p:spPr>
-      </p:sp>
-      <p:sp>
-        <p:nvSpPr>
-          <p:cNvPr id="13" name="Text 11"/>
-          <p:cNvSpPr/>
-          <p:nvPr/>
-        </p:nvSpPr>
-        <p:spPr>
-          <a:xfrm>
-            <a:off x="6397600" y="1874520"/>
-            <a:ext cx="2238680" cy="502920"/>
-          </a:xfrm>
-          <a:prstGeom prst="rect">
-            <a:avLst/>
-          </a:prstGeom>
-          <a:noFill/>
-          <a:ln/>
-        </p:spPr>
-        <p:txBody>
-          <a:bodyPr wrap="square" lIns="0" tIns="0" rIns="0" bIns="0" rtlCol="0" anchor="ctr"/>
-          <a:lstStyle/>
-          <a:p>
-            <a:pPr indent="0" marL="0">
-              <a:buNone/>
-            </a:pPr>
-            <a:r>
-              <a:rPr lang="en-US" sz="2400" b="1" dirty="0">
-                <a:solidFill>
-                  <a:srgbClr val="3F8F5F"/>
                 </a:solidFill>
                 <a:latin typeface="Cambria" pitchFamily="34" charset="0"/>
                 <a:ea typeface="Cambria" pitchFamily="34" charset="-122"/>
                 <a:cs typeface="Cambria" pitchFamily="34" charset="-120"/>
               </a:rPr>
-              <a:t>+45%</a:t>
-            </a:r>
-            <a:endParaRPr lang="en-US" sz="2400" dirty="0"/>
-          </a:p>
-        </p:txBody>
-      </p:sp>
-      <p:sp>
-        <p:nvSpPr>
-          <p:cNvPr id="14" name="Text 12"/>
-          <p:cNvSpPr/>
-          <p:nvPr/>
-        </p:nvSpPr>
-        <p:spPr>
-          <a:xfrm>
-            <a:off x="6397600" y="2395728"/>
-            <a:ext cx="2238680" cy="502920"/>
+              <a:t>24%/yr</a:t>
+            </a:r>
+            <a:endParaRPr lang="en-US" sz="2100" dirty="0"/>
+          </a:p>
+        </p:txBody>
+      </p:sp>
+      <p:sp>
+        <p:nvSpPr>
+          <p:cNvPr id="11" name="Text 8"/>
+          <p:cNvSpPr/>
+          <p:nvPr/>
+        </p:nvSpPr>
+        <p:spPr>
+          <a:xfrm>
+            <a:off x="7223760" y="4480560"/>
+            <a:ext cx="4419295" cy="685800"/>
           </a:xfrm>
           <a:prstGeom prst="rect">
             <a:avLst/>
@@ -10055,35 +10428,57 @@
           <a:p>
             <a:pPr indent="0" marL="0">
               <a:lnSpc>
-                <a:spcPct val="105000"/>
+                <a:spcPct val="115000"/>
               </a:lnSpc>
               <a:buNone/>
             </a:pPr>
             <a:r>
-              <a:rPr lang="en-US" sz="1030" b="1" dirty="0">
-                <a:solidFill>
-                  <a:srgbClr val="1C1F26"/>
-                </a:solidFill>
-                <a:latin typeface="Calibri" pitchFamily="34" charset="0"/>
-                <a:ea typeface="Calibri" pitchFamily="34" charset="-122"/>
-                <a:cs typeface="Calibri" pitchFamily="34" charset="-120"/>
-              </a:rPr>
-              <a:t>Tega contribution/kg, FY22-23 to FY25-26</a:t>
-            </a:r>
-            <a:endParaRPr lang="en-US" sz="1030" dirty="0"/>
-          </a:p>
-        </p:txBody>
-      </p:sp>
-      <p:sp>
-        <p:nvSpPr>
-          <p:cNvPr id="15" name="Text 13"/>
-          <p:cNvSpPr/>
-          <p:nvPr/>
-        </p:nvSpPr>
-        <p:spPr>
-          <a:xfrm>
-            <a:off x="6397600" y="2889504"/>
-            <a:ext cx="2238680" cy="411480"/>
+              <a:rPr lang="en-US" sz="950" dirty="0">
+                <a:solidFill>
+                  <a:srgbClr val="3A4553"/>
+                </a:solidFill>
+                <a:latin typeface="Calibri" pitchFamily="34" charset="0"/>
+                <a:ea typeface="Calibri" pitchFamily="34" charset="-122"/>
+                <a:cs typeface="Calibri" pitchFamily="34" charset="-120"/>
+              </a:rPr>
+              <a:t>CEO CTC 5-year CAGR — faster than most operating roles (6-17%/yr), in line with the CFO (21%/yr)</a:t>
+            </a:r>
+            <a:endParaRPr lang="en-US" sz="950" dirty="0"/>
+          </a:p>
+        </p:txBody>
+      </p:sp>
+      <p:sp>
+        <p:nvSpPr>
+          <p:cNvPr id="12" name="Shape 9"/>
+          <p:cNvSpPr/>
+          <p:nvPr/>
+        </p:nvSpPr>
+        <p:spPr>
+          <a:xfrm>
+            <a:off x="548640" y="5669280"/>
+            <a:ext cx="11094415" cy="777240"/>
+          </a:xfrm>
+          <a:prstGeom prst="roundRect">
+            <a:avLst>
+              <a:gd name="adj" fmla="val 9412"/>
+            </a:avLst>
+          </a:prstGeom>
+          <a:solidFill>
+            <a:srgbClr val="FBEEEC"/>
+          </a:solidFill>
+          <a:ln/>
+        </p:spPr>
+      </p:sp>
+      <p:sp>
+        <p:nvSpPr>
+          <p:cNvPr id="13" name="Text 10"/>
+          <p:cNvSpPr/>
+          <p:nvPr/>
+        </p:nvSpPr>
+        <p:spPr>
+          <a:xfrm>
+            <a:off x="777240" y="5669280"/>
+            <a:ext cx="10637215" cy="777240"/>
           </a:xfrm>
           <a:prstGeom prst="rect">
             <a:avLst/>
@@ -10097,457 +10492,28 @@
           <a:p>
             <a:pPr indent="0" marL="0">
               <a:lnSpc>
-                <a:spcPct val="105000"/>
+                <a:spcPct val="112000"/>
               </a:lnSpc>
               <a:buNone/>
             </a:pPr>
             <a:r>
-              <a:rPr lang="en-US" sz="900" dirty="0">
-                <a:solidFill>
-                  <a:srgbClr val="3A4553"/>
-                </a:solidFill>
-                <a:latin typeface="Calibri" pitchFamily="34" charset="0"/>
-                <a:ea typeface="Calibri" pitchFamily="34" charset="-122"/>
-                <a:cs typeface="Calibri" pitchFamily="34" charset="-120"/>
-              </a:rPr>
-              <a:t>~₹40/kg → ~₹59/kg average</a:t>
-            </a:r>
-            <a:endParaRPr lang="en-US" sz="900" dirty="0"/>
-          </a:p>
-        </p:txBody>
-      </p:sp>
-      <p:sp>
-        <p:nvSpPr>
-          <p:cNvPr id="16" name="Shape 14"/>
-          <p:cNvSpPr/>
-          <p:nvPr/>
-        </p:nvSpPr>
-        <p:spPr>
-          <a:xfrm>
-            <a:off x="9075191" y="1737360"/>
-            <a:ext cx="2567864" cy="1600200"/>
-          </a:xfrm>
-          <a:prstGeom prst="roundRect">
-            <a:avLst>
-              <a:gd name="adj" fmla="val 4571"/>
-            </a:avLst>
-          </a:prstGeom>
-          <a:solidFill>
-            <a:srgbClr val="EDF5EF"/>
-          </a:solidFill>
-          <a:ln/>
-        </p:spPr>
-      </p:sp>
-      <p:sp>
-        <p:nvSpPr>
-          <p:cNvPr id="17" name="Text 15"/>
-          <p:cNvSpPr/>
-          <p:nvPr/>
-        </p:nvSpPr>
-        <p:spPr>
-          <a:xfrm>
-            <a:off x="9239783" y="1874520"/>
-            <a:ext cx="2238680" cy="502920"/>
-          </a:xfrm>
-          <a:prstGeom prst="rect">
-            <a:avLst/>
-          </a:prstGeom>
-          <a:noFill/>
-          <a:ln/>
-        </p:spPr>
-        <p:txBody>
-          <a:bodyPr wrap="square" lIns="0" tIns="0" rIns="0" bIns="0" rtlCol="0" anchor="ctr"/>
-          <a:lstStyle/>
-          <a:p>
-            <a:pPr indent="0" marL="0">
-              <a:buNone/>
-            </a:pPr>
-            <a:r>
-              <a:rPr lang="en-US" sz="2400" b="1" dirty="0">
-                <a:solidFill>
-                  <a:srgbClr val="3F8F5F"/>
-                </a:solidFill>
-                <a:latin typeface="Cambria" pitchFamily="34" charset="0"/>
-                <a:ea typeface="Cambria" pitchFamily="34" charset="-122"/>
-                <a:cs typeface="Cambria" pitchFamily="34" charset="-120"/>
-              </a:rPr>
-              <a:t>8+ yrs</a:t>
-            </a:r>
-            <a:endParaRPr lang="en-US" sz="2400" dirty="0"/>
-          </a:p>
-        </p:txBody>
-      </p:sp>
-      <p:sp>
-        <p:nvSpPr>
-          <p:cNvPr id="18" name="Text 16"/>
-          <p:cNvSpPr/>
-          <p:nvPr/>
-        </p:nvSpPr>
-        <p:spPr>
-          <a:xfrm>
-            <a:off x="9239783" y="2395728"/>
-            <a:ext cx="2238680" cy="502920"/>
-          </a:xfrm>
-          <a:prstGeom prst="rect">
-            <a:avLst/>
-          </a:prstGeom>
-          <a:noFill/>
-          <a:ln/>
-        </p:spPr>
-        <p:txBody>
-          <a:bodyPr wrap="square" lIns="0" tIns="0" rIns="0" bIns="0" rtlCol="0" anchor="ctr"/>
-          <a:lstStyle/>
-          <a:p>
-            <a:pPr indent="0" marL="0">
-              <a:lnSpc>
-                <a:spcPct val="105000"/>
-              </a:lnSpc>
-              <a:buNone/>
-            </a:pPr>
-            <a:r>
-              <a:rPr lang="en-US" sz="1030" b="1" dirty="0">
-                <a:solidFill>
-                  <a:srgbClr val="1C1F26"/>
-                </a:solidFill>
-                <a:latin typeface="Calibri" pitchFamily="34" charset="0"/>
-                <a:ea typeface="Calibri" pitchFamily="34" charset="-122"/>
-                <a:cs typeface="Calibri" pitchFamily="34" charset="-120"/>
-              </a:rPr>
-              <a:t>Tenure of several anchor accounts</a:t>
-            </a:r>
-            <a:endParaRPr lang="en-US" sz="1030" dirty="0"/>
-          </a:p>
-        </p:txBody>
-      </p:sp>
-      <p:sp>
-        <p:nvSpPr>
-          <p:cNvPr id="19" name="Text 17"/>
-          <p:cNvSpPr/>
-          <p:nvPr/>
-        </p:nvSpPr>
-        <p:spPr>
-          <a:xfrm>
-            <a:off x="9239783" y="2889504"/>
-            <a:ext cx="2238680" cy="411480"/>
-          </a:xfrm>
-          <a:prstGeom prst="rect">
-            <a:avLst/>
-          </a:prstGeom>
-          <a:noFill/>
-          <a:ln/>
-        </p:spPr>
-        <p:txBody>
-          <a:bodyPr wrap="square" lIns="0" tIns="0" rIns="0" bIns="0" rtlCol="0" anchor="ctr"/>
-          <a:lstStyle/>
-          <a:p>
-            <a:pPr indent="0" marL="0">
-              <a:lnSpc>
-                <a:spcPct val="105000"/>
-              </a:lnSpc>
-              <a:buNone/>
-            </a:pPr>
-            <a:r>
-              <a:rPr lang="en-US" sz="900" dirty="0">
-                <a:solidFill>
-                  <a:srgbClr val="3A4553"/>
-                </a:solidFill>
-                <a:latin typeface="Calibri" pitchFamily="34" charset="0"/>
-                <a:ea typeface="Calibri" pitchFamily="34" charset="-122"/>
-                <a:cs typeface="Calibri" pitchFamily="34" charset="-120"/>
-              </a:rPr>
-              <a:t>BEML, Escort, Tega, Tata Metaliks tracked since FY17-18</a:t>
-            </a:r>
-            <a:endParaRPr lang="en-US" sz="900" dirty="0"/>
-          </a:p>
-        </p:txBody>
-      </p:sp>
-      <p:sp>
-        <p:nvSpPr>
-          <p:cNvPr id="20" name="Shape 18"/>
-          <p:cNvSpPr/>
-          <p:nvPr/>
-        </p:nvSpPr>
-        <p:spPr>
-          <a:xfrm>
-            <a:off x="548640" y="3611880"/>
-            <a:ext cx="5364328" cy="2331720"/>
-          </a:xfrm>
-          <a:prstGeom prst="roundRect">
-            <a:avLst>
-              <a:gd name="adj" fmla="val 3137"/>
-            </a:avLst>
-          </a:prstGeom>
-          <a:solidFill>
-            <a:srgbClr val="F4F5F7"/>
-          </a:solidFill>
-          <a:ln/>
-        </p:spPr>
-      </p:sp>
-      <p:sp>
-        <p:nvSpPr>
-          <p:cNvPr id="21" name="Text 19"/>
-          <p:cNvSpPr/>
-          <p:nvPr/>
-        </p:nvSpPr>
-        <p:spPr>
-          <a:xfrm>
-            <a:off x="804672" y="3794760"/>
-            <a:ext cx="4852264" cy="274320"/>
-          </a:xfrm>
-          <a:prstGeom prst="rect">
-            <a:avLst/>
-          </a:prstGeom>
-          <a:noFill/>
-          <a:ln/>
-        </p:spPr>
-        <p:txBody>
-          <a:bodyPr wrap="square" lIns="0" tIns="0" rIns="0" bIns="0" rtlCol="0" anchor="ctr"/>
-          <a:lstStyle/>
-          <a:p>
-            <a:pPr indent="0" marL="0">
-              <a:buNone/>
-            </a:pPr>
-            <a:r>
-              <a:rPr lang="en-US" sz="1000" b="1" spc="100" kern="0" dirty="0">
-                <a:solidFill>
-                  <a:srgbClr val="3F8F5F"/>
-                </a:solidFill>
-                <a:latin typeface="Calibri" pitchFamily="34" charset="0"/>
-                <a:ea typeface="Calibri" pitchFamily="34" charset="-122"/>
-                <a:cs typeface="Calibri" pitchFamily="34" charset="-120"/>
-              </a:rPr>
-              <a:t>BALANCE SHEET: ON PACE TO CROSS ZERO</a:t>
-            </a:r>
-            <a:endParaRPr lang="en-US" sz="1000" dirty="0"/>
-          </a:p>
-        </p:txBody>
-      </p:sp>
-      <p:sp>
-        <p:nvSpPr>
-          <p:cNvPr id="22" name="Text 20"/>
-          <p:cNvSpPr/>
-          <p:nvPr/>
-        </p:nvSpPr>
-        <p:spPr>
-          <a:xfrm>
-            <a:off x="804672" y="4096512"/>
-            <a:ext cx="4852264" cy="1737360"/>
-          </a:xfrm>
-          <a:prstGeom prst="rect">
-            <a:avLst/>
-          </a:prstGeom>
-          <a:noFill/>
-          <a:ln/>
-        </p:spPr>
-        <p:txBody>
-          <a:bodyPr wrap="square" lIns="0" tIns="0" rIns="0" bIns="0" rtlCol="0" anchor="ctr"/>
-          <a:lstStyle/>
-          <a:p>
-            <a:pPr indent="0" marL="0">
-              <a:lnSpc>
-                <a:spcPct val="120000"/>
-              </a:lnSpc>
-              <a:buNone/>
-            </a:pPr>
-            <a:r>
-              <a:rPr lang="en-US" sz="1000" dirty="0">
-                <a:solidFill>
-                  <a:srgbClr val="1C1F26"/>
-                </a:solidFill>
-                <a:latin typeface="Calibri" pitchFamily="34" charset="0"/>
-                <a:ea typeface="Calibri" pitchFamily="34" charset="-122"/>
-                <a:cs typeface="Calibri" pitchFamily="34" charset="-120"/>
-              </a:rPr>
-              <a:t>Net worth has improved in every audited year since FY22 — not a one-off recovery. At the FY24-25 pace (~₹1.4 Cr/yr), the company crosses into positive net worth around FY26. That is a real, trackable milestone: the moment Datre stops being balance-sheet-insolvent on paper, four years after the Covid-era trough.</a:t>
-            </a:r>
-            <a:endParaRPr lang="en-US" sz="1000" dirty="0"/>
-          </a:p>
-        </p:txBody>
-      </p:sp>
-      <p:sp>
-        <p:nvSpPr>
-          <p:cNvPr id="23" name="Shape 21"/>
-          <p:cNvSpPr/>
-          <p:nvPr/>
-        </p:nvSpPr>
-        <p:spPr>
-          <a:xfrm>
-            <a:off x="6278728" y="3611880"/>
-            <a:ext cx="5364328" cy="2331720"/>
-          </a:xfrm>
-          <a:prstGeom prst="roundRect">
-            <a:avLst>
-              <a:gd name="adj" fmla="val 3137"/>
-            </a:avLst>
-          </a:prstGeom>
-          <a:solidFill>
-            <a:srgbClr val="F4F5F7"/>
-          </a:solidFill>
-          <a:ln/>
-        </p:spPr>
-      </p:sp>
-      <p:sp>
-        <p:nvSpPr>
-          <p:cNvPr id="24" name="Text 22"/>
-          <p:cNvSpPr/>
-          <p:nvPr/>
-        </p:nvSpPr>
-        <p:spPr>
-          <a:xfrm>
-            <a:off x="6534760" y="3794760"/>
-            <a:ext cx="4852264" cy="274320"/>
-          </a:xfrm>
-          <a:prstGeom prst="rect">
-            <a:avLst/>
-          </a:prstGeom>
-          <a:noFill/>
-          <a:ln/>
-        </p:spPr>
-        <p:txBody>
-          <a:bodyPr wrap="square" lIns="0" tIns="0" rIns="0" bIns="0" rtlCol="0" anchor="ctr"/>
-          <a:lstStyle/>
-          <a:p>
-            <a:pPr indent="0" marL="0">
-              <a:buNone/>
-            </a:pPr>
-            <a:r>
-              <a:rPr lang="en-US" sz="1000" b="1" spc="100" kern="0" dirty="0">
-                <a:solidFill>
-                  <a:srgbClr val="3F8F5F"/>
-                </a:solidFill>
-                <a:latin typeface="Calibri" pitchFamily="34" charset="0"/>
-                <a:ea typeface="Calibri" pitchFamily="34" charset="-122"/>
-                <a:cs typeface="Calibri" pitchFamily="34" charset="-120"/>
-              </a:rPr>
-              <a:t>NOT JUST A GOOD YEAR — A REBUILT CUSTOMER BASE</a:t>
-            </a:r>
-            <a:endParaRPr lang="en-US" sz="1000" dirty="0"/>
-          </a:p>
-        </p:txBody>
-      </p:sp>
-      <p:sp>
-        <p:nvSpPr>
-          <p:cNvPr id="25" name="Text 23"/>
-          <p:cNvSpPr/>
-          <p:nvPr/>
-        </p:nvSpPr>
-        <p:spPr>
-          <a:xfrm>
-            <a:off x="6534760" y="4096512"/>
-            <a:ext cx="4852264" cy="1737360"/>
-          </a:xfrm>
-          <a:prstGeom prst="rect">
-            <a:avLst/>
-          </a:prstGeom>
-          <a:noFill/>
-          <a:ln/>
-        </p:spPr>
-        <p:txBody>
-          <a:bodyPr wrap="square" lIns="0" tIns="0" rIns="0" bIns="0" rtlCol="0" anchor="ctr"/>
-          <a:lstStyle/>
-          <a:p>
-            <a:pPr indent="0" marL="0">
-              <a:lnSpc>
-                <a:spcPct val="120000"/>
-              </a:lnSpc>
-              <a:buNone/>
-            </a:pPr>
-            <a:r>
-              <a:rPr lang="en-US" sz="1000" dirty="0">
-                <a:solidFill>
-                  <a:srgbClr val="1C1F26"/>
-                </a:solidFill>
-                <a:latin typeface="Calibri" pitchFamily="34" charset="0"/>
-                <a:ea typeface="Calibri" pitchFamily="34" charset="-122"/>
-                <a:cs typeface="Calibri" pitchFamily="34" charset="-120"/>
-              </a:rPr>
-              <a:t>Internal contribution records track named OEM accounts — BEML, Escort, Tega, Bhushan/Tata Steel, IISCO, Metco, Neo Metaliks, Paharpur, Tata Metaliks — back to FY2017-18. The current profitability isn't built on a handful of one-off wins; it sits on relationships that have held, and in Tega's case deepened, across an 8-year span that includes the FY21 near-failure.</a:t>
-            </a:r>
-            <a:endParaRPr lang="en-US" sz="1000" dirty="0"/>
-          </a:p>
-        </p:txBody>
-      </p:sp>
-      <p:sp>
-        <p:nvSpPr>
-          <p:cNvPr id="26" name="Text 24"/>
-          <p:cNvSpPr/>
-          <p:nvPr/>
-        </p:nvSpPr>
-        <p:spPr>
-          <a:xfrm>
-            <a:off x="548640" y="6108192"/>
-            <a:ext cx="11094415" cy="320040"/>
-          </a:xfrm>
-          <a:prstGeom prst="rect">
-            <a:avLst/>
-          </a:prstGeom>
-          <a:noFill/>
-          <a:ln/>
-        </p:spPr>
-        <p:txBody>
-          <a:bodyPr wrap="square" lIns="0" tIns="0" rIns="0" bIns="0" rtlCol="0" anchor="ctr"/>
-          <a:lstStyle/>
-          <a:p>
-            <a:pPr indent="0" marL="0">
-              <a:buNone/>
-            </a:pPr>
-            <a:r>
-              <a:rPr lang="en-US" sz="900" i="1" dirty="0">
-                <a:solidFill>
-                  <a:srgbClr val="6B7684"/>
-                </a:solidFill>
-                <a:latin typeface="Calibri" pitchFamily="34" charset="0"/>
-                <a:ea typeface="Calibri" pitchFamily="34" charset="-122"/>
-                <a:cs typeface="Calibri" pitchFamily="34" charset="-120"/>
-              </a:rPr>
-              <a:t>Read alongside the balance-sheet, concentration and quality-control slides that follow: the progress is real and multi-year, but customer concentration, the quality trend and the FY26-27 slowdown are real too. Both things are true at once.</a:t>
-            </a:r>
-            <a:endParaRPr lang="en-US" sz="900" dirty="0"/>
-          </a:p>
-        </p:txBody>
-      </p:sp>
-      <p:sp>
-        <p:nvSpPr>
-          <p:cNvPr id="27" name="Text 25"/>
-          <p:cNvSpPr/>
-          <p:nvPr/>
-        </p:nvSpPr>
-        <p:spPr>
-          <a:xfrm>
-            <a:off x="548640" y="6400800"/>
-            <a:ext cx="11094415" cy="256032"/>
-          </a:xfrm>
-          <a:prstGeom prst="rect">
-            <a:avLst/>
-          </a:prstGeom>
-          <a:noFill/>
-          <a:ln/>
-        </p:spPr>
-        <p:txBody>
-          <a:bodyPr wrap="square" lIns="0" tIns="0" rIns="0" bIns="0" rtlCol="0" anchor="ctr"/>
-          <a:lstStyle/>
-          <a:p>
-            <a:pPr indent="0" marL="0">
-              <a:buNone/>
-            </a:pPr>
-            <a:r>
-              <a:rPr lang="en-US" sz="750" i="1" dirty="0">
-                <a:solidFill>
-                  <a:srgbClr val="6B7684"/>
-                </a:solidFill>
-                <a:latin typeface="Calibri" pitchFamily="34" charset="0"/>
-                <a:ea typeface="Calibri" pitchFamily="34" charset="-122"/>
-                <a:cs typeface="Calibri" pitchFamily="34" charset="-120"/>
-              </a:rPr>
-              <a:t>Source: audited balance sheets FY22-FY25; internal contribution-tracking records, FY2017-18 through FY2025-26; Aug 2025 order-book analysis (Tega ₹/kg).</a:t>
-            </a:r>
-            <a:endParaRPr lang="en-US" sz="750" dirty="0"/>
-          </a:p>
-        </p:txBody>
-      </p:sp>
-      <p:sp>
-        <p:nvSpPr>
-          <p:cNvPr id="28" name="Text 26"/>
+              <a:rPr lang="en-US" sz="950" i="1" dirty="0">
+                <a:solidFill>
+                  <a:srgbClr val="B8453F"/>
+                </a:solidFill>
+                <a:latin typeface="Calibri" pitchFamily="34" charset="0"/>
+                <a:ea typeface="Calibri" pitchFamily="34" charset="-122"/>
+                <a:cs typeface="Calibri" pitchFamily="34" charset="-120"/>
+              </a:rPr>
+              <a:t>FY26-27, untested: CTC was set 29% higher than FY25-26 — but Q1 revenue is down 42% YoY (slide 12). At last year's turnover (₹25.9 Cr) the ratio becomes 1.95%; at the pace Q1 implies (~₹20.5 Cr) it becomes 2.47%. Either way, this is the first year in five the pattern may not hold.</a:t>
+            </a:r>
+            <a:endParaRPr lang="en-US" sz="950" dirty="0"/>
+          </a:p>
+        </p:txBody>
+      </p:sp>
+      <p:sp>
+        <p:nvSpPr>
+          <p:cNvPr id="14" name="Text 11"/>
           <p:cNvSpPr/>
           <p:nvPr/>
         </p:nvSpPr>
@@ -10586,7 +10552,7 @@
       </p:sp>
       <p:sp>
         <p:nvSpPr>
-          <p:cNvPr id="29" name="Text 27"/>
+          <p:cNvPr id="15" name="Text 12"/>
           <p:cNvSpPr/>
           <p:nvPr/>
         </p:nvSpPr>
@@ -10637,7 +10603,7 @@
     <p:bg>
       <p:bgPr>
         <a:solidFill>
-          <a:srgbClr val="FFFFFF"/>
+          <a:srgbClr val="1C1F26"/>
         </a:solidFill>
       </p:bgPr>
     </p:bg>
@@ -10688,7 +10654,7 @@
                 <a:ea typeface="Calibri" pitchFamily="34" charset="-122"/>
                 <a:cs typeface="Calibri" pitchFamily="34" charset="-120"/>
               </a:rPr>
-              <a:t>CRITICAL ANALYSIS — CONCENTRATION RISK</a:t>
+              <a:t>GOVERNANCE — THE FRAMEWORK</a:t>
             </a:r>
             <a:endParaRPr lang="en-US" sz="1100" dirty="0"/>
           </a:p>
@@ -10721,44 +10687,509 @@
             <a:r>
               <a:rPr lang="en-US" sz="3000" b="1" dirty="0">
                 <a:solidFill>
-                  <a:srgbClr val="1C1F26"/>
+                  <a:srgbClr val="FFFFFF"/>
                 </a:solidFill>
                 <a:latin typeface="Cambria" pitchFamily="34" charset="0"/>
                 <a:ea typeface="Cambria" pitchFamily="34" charset="-122"/>
                 <a:cs typeface="Cambria" pitchFamily="34" charset="-120"/>
               </a:rPr>
-              <a:t>Two customers now drive roughly 80% of contribution</a:t>
+              <a:t>Why turnover is the right anchor — and what compensation should be</a:t>
             </a:r>
             <a:endParaRPr lang="en-US" sz="3000" dirty="0"/>
           </a:p>
         </p:txBody>
       </p:sp>
-      <p:graphicFrame>
-        <p:nvGraphicFramePr>
-          <p:cNvPr id="4" name="Chart 0" descr=""/>
-          <p:cNvGraphicFramePr/>
-          <p:nvPr/>
-        </p:nvGraphicFramePr>
-        <p:xfrm>
-          <a:off x="548640" y="1737360"/>
-          <a:ext cx="6126480" cy="3200400"/>
-        </p:xfrm>
-        <a:graphic xmlns:a="http://schemas.openxmlformats.org/drawingml/2006/main">
-          <a:graphicData uri="http://schemas.openxmlformats.org/drawingml/2006/chart">
-            <c:chart xmlns:c="http://schemas.openxmlformats.org/drawingml/2006/chart" r:id="rId1"/>
-          </a:graphicData>
-        </a:graphic>
-      </p:graphicFrame>
-      <p:sp>
-        <p:nvSpPr>
-          <p:cNvPr id="5" name="Text 2"/>
-          <p:cNvSpPr/>
-          <p:nvPr/>
-        </p:nvSpPr>
-        <p:spPr>
-          <a:xfrm>
-            <a:off x="548640" y="5074920"/>
-            <a:ext cx="6126480" cy="640080"/>
+      <p:sp>
+        <p:nvSpPr>
+          <p:cNvPr id="4" name="Shape 2"/>
+          <p:cNvSpPr/>
+          <p:nvPr/>
+        </p:nvSpPr>
+        <p:spPr>
+          <a:xfrm>
+            <a:off x="548640" y="1737360"/>
+            <a:ext cx="384048" cy="384048"/>
+          </a:xfrm>
+          <a:prstGeom prst="ellipse">
+            <a:avLst/>
+          </a:prstGeom>
+          <a:solidFill>
+            <a:srgbClr val="D9622B"/>
+          </a:solidFill>
+          <a:ln/>
+        </p:spPr>
+      </p:sp>
+      <p:sp>
+        <p:nvSpPr>
+          <p:cNvPr id="5" name="Text 3"/>
+          <p:cNvSpPr/>
+          <p:nvPr/>
+        </p:nvSpPr>
+        <p:spPr>
+          <a:xfrm>
+            <a:off x="548640" y="1737360"/>
+            <a:ext cx="384048" cy="384048"/>
+          </a:xfrm>
+          <a:prstGeom prst="rect">
+            <a:avLst/>
+          </a:prstGeom>
+          <a:noFill/>
+          <a:ln/>
+        </p:spPr>
+        <p:txBody>
+          <a:bodyPr wrap="square" lIns="0" tIns="0" rIns="0" bIns="0" rtlCol="0" anchor="ctr"/>
+          <a:lstStyle/>
+          <a:p>
+            <a:pPr algn="ctr" indent="0" marL="0">
+              <a:buNone/>
+            </a:pPr>
+            <a:r>
+              <a:rPr lang="en-US" sz="1092" b="1" dirty="0">
+                <a:solidFill>
+                  <a:srgbClr val="FFFFFF"/>
+                </a:solidFill>
+                <a:latin typeface="Calibri" pitchFamily="34" charset="0"/>
+                <a:ea typeface="Calibri" pitchFamily="34" charset="-122"/>
+                <a:cs typeface="Calibri" pitchFamily="34" charset="-120"/>
+              </a:rPr>
+              <a:t>1</a:t>
+            </a:r>
+            <a:endParaRPr lang="en-US" sz="1092" dirty="0"/>
+          </a:p>
+        </p:txBody>
+      </p:sp>
+      <p:sp>
+        <p:nvSpPr>
+          <p:cNvPr id="6" name="Text 4"/>
+          <p:cNvSpPr/>
+          <p:nvPr/>
+        </p:nvSpPr>
+        <p:spPr>
+          <a:xfrm>
+            <a:off x="1115568" y="1709928"/>
+            <a:ext cx="10527487" cy="365760"/>
+          </a:xfrm>
+          <a:prstGeom prst="rect">
+            <a:avLst/>
+          </a:prstGeom>
+          <a:noFill/>
+          <a:ln/>
+        </p:spPr>
+        <p:txBody>
+          <a:bodyPr wrap="square" lIns="0" tIns="0" rIns="0" bIns="0" rtlCol="0" anchor="ctr"/>
+          <a:lstStyle/>
+          <a:p>
+            <a:pPr indent="0" marL="0">
+              <a:buNone/>
+            </a:pPr>
+            <a:r>
+              <a:rPr lang="en-US" sz="1350" b="1" dirty="0">
+                <a:solidFill>
+                  <a:srgbClr val="FFFFFF"/>
+                </a:solidFill>
+                <a:latin typeface="Calibri" pitchFamily="34" charset="0"/>
+                <a:ea typeface="Calibri" pitchFamily="34" charset="-122"/>
+                <a:cs typeface="Calibri" pitchFamily="34" charset="-120"/>
+              </a:rPr>
+              <a:t>No statutory cap applies</a:t>
+            </a:r>
+            <a:endParaRPr lang="en-US" sz="1350" dirty="0"/>
+          </a:p>
+        </p:txBody>
+      </p:sp>
+      <p:sp>
+        <p:nvSpPr>
+          <p:cNvPr id="7" name="Text 5"/>
+          <p:cNvSpPr/>
+          <p:nvPr/>
+        </p:nvSpPr>
+        <p:spPr>
+          <a:xfrm>
+            <a:off x="1115568" y="2084832"/>
+            <a:ext cx="10527487" cy="594360"/>
+          </a:xfrm>
+          <a:prstGeom prst="rect">
+            <a:avLst/>
+          </a:prstGeom>
+          <a:noFill/>
+          <a:ln/>
+        </p:spPr>
+        <p:txBody>
+          <a:bodyPr wrap="square" lIns="0" tIns="0" rIns="0" bIns="0" rtlCol="0" anchor="ctr"/>
+          <a:lstStyle/>
+          <a:p>
+            <a:pPr indent="0" marL="0">
+              <a:lnSpc>
+                <a:spcPct val="115000"/>
+              </a:lnSpc>
+              <a:buNone/>
+            </a:pPr>
+            <a:r>
+              <a:rPr lang="en-US" sz="1000" dirty="0">
+                <a:solidFill>
+                  <a:srgbClr val="CBD3DC"/>
+                </a:solidFill>
+                <a:latin typeface="Calibri" pitchFamily="34" charset="0"/>
+                <a:ea typeface="Calibri" pitchFamily="34" charset="-122"/>
+                <a:cs typeface="Calibri" pitchFamily="34" charset="-120"/>
+              </a:rPr>
+              <a:t>Datre is a private limited company. The Companies Act's profit-linked remuneration caps (Section 197) bind public companies, not this one — there's no legal reason profit has to be the reference point.</a:t>
+            </a:r>
+            <a:endParaRPr lang="en-US" sz="1000" dirty="0"/>
+          </a:p>
+        </p:txBody>
+      </p:sp>
+      <p:sp>
+        <p:nvSpPr>
+          <p:cNvPr id="8" name="Shape 6"/>
+          <p:cNvSpPr/>
+          <p:nvPr/>
+        </p:nvSpPr>
+        <p:spPr>
+          <a:xfrm>
+            <a:off x="548640" y="2788920"/>
+            <a:ext cx="384048" cy="384048"/>
+          </a:xfrm>
+          <a:prstGeom prst="ellipse">
+            <a:avLst/>
+          </a:prstGeom>
+          <a:solidFill>
+            <a:srgbClr val="D9622B"/>
+          </a:solidFill>
+          <a:ln/>
+        </p:spPr>
+      </p:sp>
+      <p:sp>
+        <p:nvSpPr>
+          <p:cNvPr id="9" name="Text 7"/>
+          <p:cNvSpPr/>
+          <p:nvPr/>
+        </p:nvSpPr>
+        <p:spPr>
+          <a:xfrm>
+            <a:off x="548640" y="2788920"/>
+            <a:ext cx="384048" cy="384048"/>
+          </a:xfrm>
+          <a:prstGeom prst="rect">
+            <a:avLst/>
+          </a:prstGeom>
+          <a:noFill/>
+          <a:ln/>
+        </p:spPr>
+        <p:txBody>
+          <a:bodyPr wrap="square" lIns="0" tIns="0" rIns="0" bIns="0" rtlCol="0" anchor="ctr"/>
+          <a:lstStyle/>
+          <a:p>
+            <a:pPr algn="ctr" indent="0" marL="0">
+              <a:buNone/>
+            </a:pPr>
+            <a:r>
+              <a:rPr lang="en-US" sz="1092" b="1" dirty="0">
+                <a:solidFill>
+                  <a:srgbClr val="FFFFFF"/>
+                </a:solidFill>
+                <a:latin typeface="Calibri" pitchFamily="34" charset="0"/>
+                <a:ea typeface="Calibri" pitchFamily="34" charset="-122"/>
+                <a:cs typeface="Calibri" pitchFamily="34" charset="-120"/>
+              </a:rPr>
+              <a:t>2</a:t>
+            </a:r>
+            <a:endParaRPr lang="en-US" sz="1092" dirty="0"/>
+          </a:p>
+        </p:txBody>
+      </p:sp>
+      <p:sp>
+        <p:nvSpPr>
+          <p:cNvPr id="10" name="Text 8"/>
+          <p:cNvSpPr/>
+          <p:nvPr/>
+        </p:nvSpPr>
+        <p:spPr>
+          <a:xfrm>
+            <a:off x="1115568" y="2761488"/>
+            <a:ext cx="10527487" cy="365760"/>
+          </a:xfrm>
+          <a:prstGeom prst="rect">
+            <a:avLst/>
+          </a:prstGeom>
+          <a:noFill/>
+          <a:ln/>
+        </p:spPr>
+        <p:txBody>
+          <a:bodyPr wrap="square" lIns="0" tIns="0" rIns="0" bIns="0" rtlCol="0" anchor="ctr"/>
+          <a:lstStyle/>
+          <a:p>
+            <a:pPr indent="0" marL="0">
+              <a:buNone/>
+            </a:pPr>
+            <a:r>
+              <a:rPr lang="en-US" sz="1350" b="1" dirty="0">
+                <a:solidFill>
+                  <a:srgbClr val="FFFFFF"/>
+                </a:solidFill>
+                <a:latin typeface="Calibri" pitchFamily="34" charset="0"/>
+                <a:ea typeface="Calibri" pitchFamily="34" charset="-122"/>
+                <a:cs typeface="Calibri" pitchFamily="34" charset="-120"/>
+              </a:rPr>
+              <a:t>Turnover is the stable base</a:t>
+            </a:r>
+            <a:endParaRPr lang="en-US" sz="1350" dirty="0"/>
+          </a:p>
+        </p:txBody>
+      </p:sp>
+      <p:sp>
+        <p:nvSpPr>
+          <p:cNvPr id="11" name="Text 9"/>
+          <p:cNvSpPr/>
+          <p:nvPr/>
+        </p:nvSpPr>
+        <p:spPr>
+          <a:xfrm>
+            <a:off x="1115568" y="3136392"/>
+            <a:ext cx="10527487" cy="594360"/>
+          </a:xfrm>
+          <a:prstGeom prst="rect">
+            <a:avLst/>
+          </a:prstGeom>
+          <a:noFill/>
+          <a:ln/>
+        </p:spPr>
+        <p:txBody>
+          <a:bodyPr wrap="square" lIns="0" tIns="0" rIns="0" bIns="0" rtlCol="0" anchor="ctr"/>
+          <a:lstStyle/>
+          <a:p>
+            <a:pPr indent="0" marL="0">
+              <a:lnSpc>
+                <a:spcPct val="115000"/>
+              </a:lnSpc>
+              <a:buNone/>
+            </a:pPr>
+            <a:r>
+              <a:rPr lang="en-US" sz="1000" dirty="0">
+                <a:solidFill>
+                  <a:srgbClr val="CBD3DC"/>
+                </a:solidFill>
+                <a:latin typeface="Calibri" pitchFamily="34" charset="0"/>
+                <a:ea typeface="Calibri" pitchFamily="34" charset="-122"/>
+                <a:cs typeface="Calibri" pitchFamily="34" charset="-120"/>
+              </a:rPr>
+              <a:t>Datre ran losses or near-breakeven for most of FY16-FY22. A profit-linked formula would have paid the CEO almost nothing through the exact years he was engineering the turnaround, and only rewarded him after the fact.</a:t>
+            </a:r>
+            <a:endParaRPr lang="en-US" sz="1000" dirty="0"/>
+          </a:p>
+        </p:txBody>
+      </p:sp>
+      <p:sp>
+        <p:nvSpPr>
+          <p:cNvPr id="12" name="Shape 10"/>
+          <p:cNvSpPr/>
+          <p:nvPr/>
+        </p:nvSpPr>
+        <p:spPr>
+          <a:xfrm>
+            <a:off x="548640" y="3840480"/>
+            <a:ext cx="384048" cy="384048"/>
+          </a:xfrm>
+          <a:prstGeom prst="ellipse">
+            <a:avLst/>
+          </a:prstGeom>
+          <a:solidFill>
+            <a:srgbClr val="D9622B"/>
+          </a:solidFill>
+          <a:ln/>
+        </p:spPr>
+      </p:sp>
+      <p:sp>
+        <p:nvSpPr>
+          <p:cNvPr id="13" name="Text 11"/>
+          <p:cNvSpPr/>
+          <p:nvPr/>
+        </p:nvSpPr>
+        <p:spPr>
+          <a:xfrm>
+            <a:off x="548640" y="3840480"/>
+            <a:ext cx="384048" cy="384048"/>
+          </a:xfrm>
+          <a:prstGeom prst="rect">
+            <a:avLst/>
+          </a:prstGeom>
+          <a:noFill/>
+          <a:ln/>
+        </p:spPr>
+        <p:txBody>
+          <a:bodyPr wrap="square" lIns="0" tIns="0" rIns="0" bIns="0" rtlCol="0" anchor="ctr"/>
+          <a:lstStyle/>
+          <a:p>
+            <a:pPr algn="ctr" indent="0" marL="0">
+              <a:buNone/>
+            </a:pPr>
+            <a:r>
+              <a:rPr lang="en-US" sz="1092" b="1" dirty="0">
+                <a:solidFill>
+                  <a:srgbClr val="FFFFFF"/>
+                </a:solidFill>
+                <a:latin typeface="Calibri" pitchFamily="34" charset="0"/>
+                <a:ea typeface="Calibri" pitchFamily="34" charset="-122"/>
+                <a:cs typeface="Calibri" pitchFamily="34" charset="-120"/>
+              </a:rPr>
+              <a:t>3</a:t>
+            </a:r>
+            <a:endParaRPr lang="en-US" sz="1092" dirty="0"/>
+          </a:p>
+        </p:txBody>
+      </p:sp>
+      <p:sp>
+        <p:nvSpPr>
+          <p:cNvPr id="14" name="Text 12"/>
+          <p:cNvSpPr/>
+          <p:nvPr/>
+        </p:nvSpPr>
+        <p:spPr>
+          <a:xfrm>
+            <a:off x="1115568" y="3813048"/>
+            <a:ext cx="10527487" cy="365760"/>
+          </a:xfrm>
+          <a:prstGeom prst="rect">
+            <a:avLst/>
+          </a:prstGeom>
+          <a:noFill/>
+          <a:ln/>
+        </p:spPr>
+        <p:txBody>
+          <a:bodyPr wrap="square" lIns="0" tIns="0" rIns="0" bIns="0" rtlCol="0" anchor="ctr"/>
+          <a:lstStyle/>
+          <a:p>
+            <a:pPr indent="0" marL="0">
+              <a:buNone/>
+            </a:pPr>
+            <a:r>
+              <a:rPr lang="en-US" sz="1350" b="1" dirty="0">
+                <a:solidFill>
+                  <a:srgbClr val="FFFFFF"/>
+                </a:solidFill>
+                <a:latin typeface="Calibri" pitchFamily="34" charset="0"/>
+                <a:ea typeface="Calibri" pitchFamily="34" charset="-122"/>
+                <a:cs typeface="Calibri" pitchFamily="34" charset="-120"/>
+              </a:rPr>
+              <a:t>It resists being gamed</a:t>
+            </a:r>
+            <a:endParaRPr lang="en-US" sz="1350" dirty="0"/>
+          </a:p>
+        </p:txBody>
+      </p:sp>
+      <p:sp>
+        <p:nvSpPr>
+          <p:cNvPr id="15" name="Text 13"/>
+          <p:cNvSpPr/>
+          <p:nvPr/>
+        </p:nvSpPr>
+        <p:spPr>
+          <a:xfrm>
+            <a:off x="1115568" y="4187952"/>
+            <a:ext cx="10527487" cy="594360"/>
+          </a:xfrm>
+          <a:prstGeom prst="rect">
+            <a:avLst/>
+          </a:prstGeom>
+          <a:noFill/>
+          <a:ln/>
+        </p:spPr>
+        <p:txBody>
+          <a:bodyPr wrap="square" lIns="0" tIns="0" rIns="0" bIns="0" rtlCol="0" anchor="ctr"/>
+          <a:lstStyle/>
+          <a:p>
+            <a:pPr indent="0" marL="0">
+              <a:lnSpc>
+                <a:spcPct val="115000"/>
+              </a:lnSpc>
+              <a:buNone/>
+            </a:pPr>
+            <a:r>
+              <a:rPr lang="en-US" sz="1000" dirty="0">
+                <a:solidFill>
+                  <a:srgbClr val="CBD3DC"/>
+                </a:solidFill>
+                <a:latin typeface="Calibri" pitchFamily="34" charset="0"/>
+                <a:ea typeface="Calibri" pitchFamily="34" charset="-122"/>
+                <a:cs typeface="Calibri" pitchFamily="34" charset="-120"/>
+              </a:rPr>
+              <a:t>Profit is sensitive to expense timing and provisioning — the same Ind AS 19 gap and FY26 capex-as-abnormal-expense treatment flagged on slide 14. Turnover is harder to manipulate and cleaner to benchmark against.</a:t>
+            </a:r>
+            <a:endParaRPr lang="en-US" sz="1000" dirty="0"/>
+          </a:p>
+        </p:txBody>
+      </p:sp>
+      <p:sp>
+        <p:nvSpPr>
+          <p:cNvPr id="16" name="Shape 14"/>
+          <p:cNvSpPr/>
+          <p:nvPr/>
+        </p:nvSpPr>
+        <p:spPr>
+          <a:xfrm>
+            <a:off x="548640" y="4846320"/>
+            <a:ext cx="11094415" cy="1097280"/>
+          </a:xfrm>
+          <a:prstGeom prst="roundRect">
+            <a:avLst>
+              <a:gd name="adj" fmla="val 6667"/>
+            </a:avLst>
+          </a:prstGeom>
+          <a:solidFill>
+            <a:srgbClr val="262B34"/>
+          </a:solidFill>
+          <a:ln/>
+        </p:spPr>
+      </p:sp>
+      <p:sp>
+        <p:nvSpPr>
+          <p:cNvPr id="17" name="Text 15"/>
+          <p:cNvSpPr/>
+          <p:nvPr/>
+        </p:nvSpPr>
+        <p:spPr>
+          <a:xfrm>
+            <a:off x="822960" y="4983480"/>
+            <a:ext cx="10545775" cy="274320"/>
+          </a:xfrm>
+          <a:prstGeom prst="rect">
+            <a:avLst/>
+          </a:prstGeom>
+          <a:noFill/>
+          <a:ln/>
+        </p:spPr>
+        <p:txBody>
+          <a:bodyPr wrap="square" lIns="0" tIns="0" rIns="0" bIns="0" rtlCol="0" anchor="ctr"/>
+          <a:lstStyle/>
+          <a:p>
+            <a:pPr indent="0" marL="0">
+              <a:buNone/>
+            </a:pPr>
+            <a:r>
+              <a:rPr lang="en-US" sz="1000" b="1" spc="100" kern="0" dirty="0">
+                <a:solidFill>
+                  <a:srgbClr val="E8B84B"/>
+                </a:solidFill>
+                <a:latin typeface="Calibri" pitchFamily="34" charset="0"/>
+                <a:ea typeface="Calibri" pitchFamily="34" charset="-122"/>
+                <a:cs typeface="Calibri" pitchFamily="34" charset="-120"/>
+              </a:rPr>
+              <a:t>RECOMMENDATION</a:t>
+            </a:r>
+            <a:endParaRPr lang="en-US" sz="1000" dirty="0"/>
+          </a:p>
+        </p:txBody>
+      </p:sp>
+      <p:sp>
+        <p:nvSpPr>
+          <p:cNvPr id="18" name="Text 16"/>
+          <p:cNvSpPr/>
+          <p:nvPr/>
+        </p:nvSpPr>
+        <p:spPr>
+          <a:xfrm>
+            <a:off x="822960" y="5257800"/>
+            <a:ext cx="10545775" cy="621792"/>
           </a:xfrm>
           <a:prstGeom prst="rect">
             <a:avLst/>
@@ -10777,69 +11208,30 @@
               <a:buNone/>
             </a:pPr>
             <a:r>
-              <a:rPr lang="en-US" sz="800" i="1" dirty="0">
-                <a:solidFill>
-                  <a:srgbClr val="6B7684"/>
-                </a:solidFill>
-                <a:latin typeface="Calibri" pitchFamily="34" charset="0"/>
-                <a:ea typeface="Calibri" pitchFamily="34" charset="-122"/>
-                <a:cs typeface="Calibri" pitchFamily="34" charset="-120"/>
-              </a:rPr>
-              <a:t>Chart: Tega's individual share (company financial statements &amp; internal analysis, FY21-FY24 actuals, FY26 projection). "All OEM" figure in the panel at right uses a separate Net Contribution basis — see source note below.</a:t>
-            </a:r>
-            <a:endParaRPr lang="en-US" sz="800" dirty="0"/>
-          </a:p>
-        </p:txBody>
-      </p:sp>
-      <p:sp>
-        <p:nvSpPr>
-          <p:cNvPr id="6" name="Text 3"/>
-          <p:cNvSpPr/>
-          <p:nvPr/>
-        </p:nvSpPr>
-        <p:spPr>
-          <a:xfrm>
-            <a:off x="6949440" y="1691640"/>
-            <a:ext cx="4693615" cy="320040"/>
-          </a:xfrm>
-          <a:prstGeom prst="rect">
-            <a:avLst/>
-          </a:prstGeom>
-          <a:noFill/>
-          <a:ln/>
-        </p:spPr>
-        <p:txBody>
-          <a:bodyPr wrap="square" lIns="0" tIns="0" rIns="0" bIns="0" rtlCol="0" anchor="ctr"/>
-          <a:lstStyle/>
-          <a:p>
-            <a:pPr indent="0" marL="0">
-              <a:buNone/>
-            </a:pPr>
-            <a:r>
-              <a:rPr lang="en-US" sz="1500" b="1" dirty="0">
-                <a:solidFill>
-                  <a:srgbClr val="1C1F26"/>
-                </a:solidFill>
-                <a:latin typeface="Cambria" pitchFamily="34" charset="0"/>
-                <a:ea typeface="Cambria" pitchFamily="34" charset="-122"/>
-                <a:cs typeface="Cambria" pitchFamily="34" charset="-120"/>
-              </a:rPr>
-              <a:t>43% → 82%</a:t>
-            </a:r>
-            <a:endParaRPr lang="en-US" sz="1500" dirty="0"/>
-          </a:p>
-        </p:txBody>
-      </p:sp>
-      <p:sp>
-        <p:nvSpPr>
-          <p:cNvPr id="7" name="Text 4"/>
-          <p:cNvSpPr/>
-          <p:nvPr/>
-        </p:nvSpPr>
-        <p:spPr>
-          <a:xfrm>
-            <a:off x="6949440" y="2020824"/>
-            <a:ext cx="4693615" cy="621792"/>
+              <a:rPr lang="en-US" sz="1000" dirty="0">
+                <a:solidFill>
+                  <a:srgbClr val="FFFFFF"/>
+                </a:solidFill>
+                <a:latin typeface="Calibri" pitchFamily="34" charset="0"/>
+                <a:ea typeface="Calibri" pitchFamily="34" charset="-122"/>
+                <a:cs typeface="Calibri" pitchFamily="34" charset="-120"/>
+              </a:rPr>
+              <a:t>Anchor CEO CTC to 1.5%-1.7% of trailing-twelve-month audited turnover — the band Datre's own 5-year record already supports. Revise annually at Board level off the prior full audited year, not projections; any increase beyond the band should require Board justification, as FY26-27's now does.</a:t>
+            </a:r>
+            <a:endParaRPr lang="en-US" sz="1000" dirty="0"/>
+          </a:p>
+        </p:txBody>
+      </p:sp>
+      <p:sp>
+        <p:nvSpPr>
+          <p:cNvPr id="19" name="Text 17"/>
+          <p:cNvSpPr/>
+          <p:nvPr/>
+        </p:nvSpPr>
+        <p:spPr>
+          <a:xfrm>
+            <a:off x="548640" y="6053328"/>
+            <a:ext cx="11094415" cy="320040"/>
           </a:xfrm>
           <a:prstGeom prst="rect">
             <a:avLst/>
@@ -10858,308 +11250,23 @@
               <a:buNone/>
             </a:pPr>
             <a:r>
-              <a:rPr lang="en-US" sz="930" dirty="0">
-                <a:solidFill>
-                  <a:srgbClr val="3A4553"/>
-                </a:solidFill>
-                <a:latin typeface="Calibri" pitchFamily="34" charset="0"/>
-                <a:ea typeface="Calibri" pitchFamily="34" charset="-122"/>
-                <a:cs typeface="Calibri" pitchFamily="34" charset="-120"/>
-              </a:rPr>
-              <a:t>OEM share of total contribution, FY22 to FY26 (proj.) — a deliberate pivot, not passive drift</a:t>
-            </a:r>
-            <a:endParaRPr lang="en-US" sz="930" dirty="0"/>
-          </a:p>
-        </p:txBody>
-      </p:sp>
-      <p:sp>
-        <p:nvSpPr>
-          <p:cNvPr id="8" name="Text 5"/>
-          <p:cNvSpPr/>
-          <p:nvPr/>
-        </p:nvSpPr>
-        <p:spPr>
-          <a:xfrm>
-            <a:off x="6949440" y="2715768"/>
-            <a:ext cx="4693615" cy="320040"/>
-          </a:xfrm>
-          <a:prstGeom prst="rect">
-            <a:avLst/>
-          </a:prstGeom>
-          <a:noFill/>
-          <a:ln/>
-        </p:spPr>
-        <p:txBody>
-          <a:bodyPr wrap="square" lIns="0" tIns="0" rIns="0" bIns="0" rtlCol="0" anchor="ctr"/>
-          <a:lstStyle/>
-          <a:p>
-            <a:pPr indent="0" marL="0">
-              <a:buNone/>
-            </a:pPr>
-            <a:r>
-              <a:rPr lang="en-US" sz="1500" b="1" dirty="0">
-                <a:solidFill>
-                  <a:srgbClr val="1C1F26"/>
-                </a:solidFill>
-                <a:latin typeface="Cambria" pitchFamily="34" charset="0"/>
-                <a:ea typeface="Cambria" pitchFamily="34" charset="-122"/>
-                <a:cs typeface="Cambria" pitchFamily="34" charset="-120"/>
-              </a:rPr>
-              <a:t>₹0</a:t>
-            </a:r>
-            <a:endParaRPr lang="en-US" sz="1500" dirty="0"/>
-          </a:p>
-        </p:txBody>
-      </p:sp>
-      <p:sp>
-        <p:nvSpPr>
-          <p:cNvPr id="9" name="Text 6"/>
-          <p:cNvSpPr/>
-          <p:nvPr/>
-        </p:nvSpPr>
-        <p:spPr>
-          <a:xfrm>
-            <a:off x="6949440" y="3044952"/>
-            <a:ext cx="4693615" cy="621792"/>
-          </a:xfrm>
-          <a:prstGeom prst="rect">
-            <a:avLst/>
-          </a:prstGeom>
-          <a:noFill/>
-          <a:ln/>
-        </p:spPr>
-        <p:txBody>
-          <a:bodyPr wrap="square" lIns="0" tIns="0" rIns="0" bIns="0" rtlCol="0" anchor="ctr"/>
-          <a:lstStyle/>
-          <a:p>
-            <a:pPr indent="0" marL="0">
-              <a:lnSpc>
-                <a:spcPct val="110000"/>
-              </a:lnSpc>
-              <a:buNone/>
-            </a:pPr>
-            <a:r>
-              <a:rPr lang="en-US" sz="930" dirty="0">
-                <a:solidFill>
-                  <a:srgbClr val="3A4553"/>
-                </a:solidFill>
-                <a:latin typeface="Calibri" pitchFamily="34" charset="0"/>
-                <a:ea typeface="Calibri" pitchFamily="34" charset="-122"/>
-                <a:cs typeface="Calibri" pitchFamily="34" charset="-120"/>
-              </a:rPr>
-              <a:t>Non-OEM legacy contribution by FY25 — IISCO, Bhushan Steel, Tata Metaliks, ESL and Metso wound down to zero, on purpose</a:t>
-            </a:r>
-            <a:endParaRPr lang="en-US" sz="930" dirty="0"/>
-          </a:p>
-        </p:txBody>
-      </p:sp>
-      <p:sp>
-        <p:nvSpPr>
-          <p:cNvPr id="10" name="Text 7"/>
-          <p:cNvSpPr/>
-          <p:nvPr/>
-        </p:nvSpPr>
-        <p:spPr>
-          <a:xfrm>
-            <a:off x="6949440" y="3739896"/>
-            <a:ext cx="4693615" cy="320040"/>
-          </a:xfrm>
-          <a:prstGeom prst="rect">
-            <a:avLst/>
-          </a:prstGeom>
-          <a:noFill/>
-          <a:ln/>
-        </p:spPr>
-        <p:txBody>
-          <a:bodyPr wrap="square" lIns="0" tIns="0" rIns="0" bIns="0" rtlCol="0" anchor="ctr"/>
-          <a:lstStyle/>
-          <a:p>
-            <a:pPr indent="0" marL="0">
-              <a:buNone/>
-            </a:pPr>
-            <a:r>
-              <a:rPr lang="en-US" sz="1500" b="1" dirty="0">
-                <a:solidFill>
-                  <a:srgbClr val="1C1F26"/>
-                </a:solidFill>
-                <a:latin typeface="Cambria" pitchFamily="34" charset="0"/>
-                <a:ea typeface="Cambria" pitchFamily="34" charset="-122"/>
-                <a:cs typeface="Cambria" pitchFamily="34" charset="-120"/>
-              </a:rPr>
-              <a:t>₹9.0 → ₹7.5 Cr</a:t>
-            </a:r>
-            <a:endParaRPr lang="en-US" sz="1500" dirty="0"/>
-          </a:p>
-        </p:txBody>
-      </p:sp>
-      <p:sp>
-        <p:nvSpPr>
-          <p:cNvPr id="11" name="Text 8"/>
-          <p:cNvSpPr/>
-          <p:nvPr/>
-        </p:nvSpPr>
-        <p:spPr>
-          <a:xfrm>
-            <a:off x="6949440" y="4069080"/>
-            <a:ext cx="4693615" cy="621792"/>
-          </a:xfrm>
-          <a:prstGeom prst="rect">
-            <a:avLst/>
-          </a:prstGeom>
-          <a:noFill/>
-          <a:ln/>
-        </p:spPr>
-        <p:txBody>
-          <a:bodyPr wrap="square" lIns="0" tIns="0" rIns="0" bIns="0" rtlCol="0" anchor="ctr"/>
-          <a:lstStyle/>
-          <a:p>
-            <a:pPr indent="0" marL="0">
-              <a:lnSpc>
-                <a:spcPct val="110000"/>
-              </a:lnSpc>
-              <a:buNone/>
-            </a:pPr>
-            <a:r>
-              <a:rPr lang="en-US" sz="930" dirty="0">
-                <a:solidFill>
-                  <a:srgbClr val="3A4553"/>
-                </a:solidFill>
-                <a:latin typeface="Calibri" pitchFamily="34" charset="0"/>
-                <a:ea typeface="Calibri" pitchFamily="34" charset="-122"/>
-                <a:cs typeface="Calibri" pitchFamily="34" charset="-120"/>
-              </a:rPr>
-              <a:t>Tega's small-casting orders still declined YoY, FY23-24 to FY24-25</a:t>
-            </a:r>
-            <a:endParaRPr lang="en-US" sz="930" dirty="0"/>
-          </a:p>
-        </p:txBody>
-      </p:sp>
-      <p:sp>
-        <p:nvSpPr>
-          <p:cNvPr id="12" name="Text 9"/>
-          <p:cNvSpPr/>
-          <p:nvPr/>
-        </p:nvSpPr>
-        <p:spPr>
-          <a:xfrm>
-            <a:off x="6949440" y="4764024"/>
-            <a:ext cx="4693615" cy="320040"/>
-          </a:xfrm>
-          <a:prstGeom prst="rect">
-            <a:avLst/>
-          </a:prstGeom>
-          <a:noFill/>
-          <a:ln/>
-        </p:spPr>
-        <p:txBody>
-          <a:bodyPr wrap="square" lIns="0" tIns="0" rIns="0" bIns="0" rtlCol="0" anchor="ctr"/>
-          <a:lstStyle/>
-          <a:p>
-            <a:pPr indent="0" marL="0">
-              <a:buNone/>
-            </a:pPr>
-            <a:r>
-              <a:rPr lang="en-US" sz="1500" b="1" dirty="0">
-                <a:solidFill>
-                  <a:srgbClr val="1C1F26"/>
-                </a:solidFill>
-                <a:latin typeface="Cambria" pitchFamily="34" charset="0"/>
-                <a:ea typeface="Cambria" pitchFamily="34" charset="-122"/>
-                <a:cs typeface="Cambria" pitchFamily="34" charset="-120"/>
-              </a:rPr>
-              <a:t>Thejo Engineering</a:t>
-            </a:r>
-            <a:endParaRPr lang="en-US" sz="1500" dirty="0"/>
-          </a:p>
-        </p:txBody>
-      </p:sp>
-      <p:sp>
-        <p:nvSpPr>
-          <p:cNvPr id="13" name="Text 10"/>
-          <p:cNvSpPr/>
-          <p:nvPr/>
-        </p:nvSpPr>
-        <p:spPr>
-          <a:xfrm>
-            <a:off x="6949440" y="5093208"/>
-            <a:ext cx="4693615" cy="621792"/>
-          </a:xfrm>
-          <a:prstGeom prst="rect">
-            <a:avLst/>
-          </a:prstGeom>
-          <a:noFill/>
-          <a:ln/>
-        </p:spPr>
-        <p:txBody>
-          <a:bodyPr wrap="square" lIns="0" tIns="0" rIns="0" bIns="0" rtlCol="0" anchor="ctr"/>
-          <a:lstStyle/>
-          <a:p>
-            <a:pPr indent="0" marL="0">
-              <a:lnSpc>
-                <a:spcPct val="110000"/>
-              </a:lnSpc>
-              <a:buNone/>
-            </a:pPr>
-            <a:r>
-              <a:rPr lang="en-US" sz="930" dirty="0">
-                <a:solidFill>
-                  <a:srgbClr val="3A4553"/>
-                </a:solidFill>
-                <a:latin typeface="Calibri" pitchFamily="34" charset="0"/>
-                <a:ea typeface="Calibri" pitchFamily="34" charset="-122"/>
-                <a:cs typeface="Calibri" pitchFamily="34" charset="-120"/>
-              </a:rPr>
-              <a:t>NDA/exclusive tie-up alongside Tega — the real second leg, still small next to Tega/Escorts</a:t>
-            </a:r>
-            <a:endParaRPr lang="en-US" sz="930" dirty="0"/>
-          </a:p>
-        </p:txBody>
-      </p:sp>
-      <p:sp>
-        <p:nvSpPr>
-          <p:cNvPr id="14" name="Text 11"/>
-          <p:cNvSpPr/>
-          <p:nvPr/>
-        </p:nvSpPr>
-        <p:spPr>
-          <a:xfrm>
-            <a:off x="6949440" y="5833872"/>
-            <a:ext cx="4693615" cy="502920"/>
-          </a:xfrm>
-          <a:prstGeom prst="rect">
-            <a:avLst/>
-          </a:prstGeom>
-          <a:noFill/>
-          <a:ln/>
-        </p:spPr>
-        <p:txBody>
-          <a:bodyPr wrap="square" lIns="0" tIns="0" rIns="0" bIns="0" rtlCol="0" anchor="ctr"/>
-          <a:lstStyle/>
-          <a:p>
-            <a:pPr indent="0" marL="0">
-              <a:lnSpc>
-                <a:spcPct val="110000"/>
-              </a:lnSpc>
-              <a:buNone/>
-            </a:pPr>
-            <a:r>
-              <a:rPr lang="en-US" sz="750" i="1" dirty="0">
-                <a:solidFill>
-                  <a:srgbClr val="6B7684"/>
-                </a:solidFill>
-                <a:latin typeface="Calibri" pitchFamily="34" charset="0"/>
-                <a:ea typeface="Calibri" pitchFamily="34" charset="-122"/>
-                <a:cs typeface="Calibri" pitchFamily="34" charset="-120"/>
-              </a:rPr>
-              <a:t>Panel figures: internal "Net Contribution" analysis (FY22 vs. FY26 projected) — a different basis from the Tega-share chart at left; both point the same direction.</a:t>
-            </a:r>
-            <a:endParaRPr lang="en-US" sz="750" dirty="0"/>
-          </a:p>
-        </p:txBody>
-      </p:sp>
-      <p:sp>
-        <p:nvSpPr>
-          <p:cNvPr id="15" name="Text 12"/>
+              <a:rPr lang="en-US" sz="850" i="1" dirty="0">
+                <a:solidFill>
+                  <a:srgbClr val="9AA2AD"/>
+                </a:solidFill>
+                <a:latin typeface="Calibri" pitchFamily="34" charset="0"/>
+                <a:ea typeface="Calibri" pitchFamily="34" charset="-122"/>
+                <a:cs typeface="Calibri" pitchFamily="34" charset="-120"/>
+              </a:rPr>
+              <a:t>This framework is grounded in Datre's own history, not a verified external benchmark. Recommend a formal SME/foundry-sector compensation study before treating it as permanent.</a:t>
+            </a:r>
+            <a:endParaRPr lang="en-US" sz="850" dirty="0"/>
+          </a:p>
+        </p:txBody>
+      </p:sp>
+      <p:sp>
+        <p:nvSpPr>
+          <p:cNvPr id="20" name="Text 18"/>
           <p:cNvSpPr/>
           <p:nvPr/>
         </p:nvSpPr>
@@ -11184,7 +11291,7 @@
             <a:r>
               <a:rPr lang="en-US" sz="800" dirty="0">
                 <a:solidFill>
-                  <a:srgbClr val="9AA2AD"/>
+                  <a:srgbClr val="8B93A0"/>
                 </a:solidFill>
                 <a:latin typeface="Calibri" pitchFamily="34" charset="0"/>
                 <a:ea typeface="Calibri" pitchFamily="34" charset="-122"/>
@@ -11198,7 +11305,7 @@
       </p:sp>
       <p:sp>
         <p:nvSpPr>
-          <p:cNvPr id="16" name="Text 13"/>
+          <p:cNvPr id="21" name="Text 19"/>
           <p:cNvSpPr/>
           <p:nvPr/>
         </p:nvSpPr>
@@ -11223,7 +11330,7 @@
             <a:r>
               <a:rPr lang="en-US" sz="800" dirty="0">
                 <a:solidFill>
-                  <a:srgbClr val="9AA2AD"/>
+                  <a:srgbClr val="8B93A0"/>
                 </a:solidFill>
                 <a:latin typeface="Calibri" pitchFamily="34" charset="0"/>
                 <a:ea typeface="Calibri" pitchFamily="34" charset="-122"/>
@@ -11300,7 +11407,7 @@
                 <a:ea typeface="Calibri" pitchFamily="34" charset="-122"/>
                 <a:cs typeface="Calibri" pitchFamily="34" charset="-120"/>
               </a:rPr>
-              <a:t>CRITICAL ANALYSIS — OPERATIONS</a:t>
+              <a:t>THE PROGRESS CASE</a:t>
             </a:r>
             <a:endParaRPr lang="en-US" sz="1100" dirty="0"/>
           </a:p>
@@ -11339,81 +11446,606 @@
                 <a:ea typeface="Cambria" pitchFamily="34" charset="-122"/>
                 <a:cs typeface="Cambria" pitchFamily="34" charset="-120"/>
               </a:rPr>
-              <a:t>Rejection rate has trended the wrong way for four periods</a:t>
+              <a:t>Four numbers that show this is a multi-year rebuild, not one good year</a:t>
             </a:r>
             <a:endParaRPr lang="en-US" sz="3000" dirty="0"/>
           </a:p>
         </p:txBody>
       </p:sp>
-      <p:graphicFrame>
-        <p:nvGraphicFramePr>
-          <p:cNvPr id="4" name="Chart 0" descr=""/>
-          <p:cNvGraphicFramePr/>
-          <p:nvPr/>
-        </p:nvGraphicFramePr>
-        <p:xfrm>
-          <a:off x="548640" y="1737360"/>
-          <a:ext cx="7315200" cy="3566160"/>
-        </p:xfrm>
-        <a:graphic xmlns:a="http://schemas.openxmlformats.org/drawingml/2006/main">
-          <a:graphicData uri="http://schemas.openxmlformats.org/drawingml/2006/chart">
-            <c:chart xmlns:c="http://schemas.openxmlformats.org/drawingml/2006/chart" r:id="rId1"/>
-          </a:graphicData>
-        </a:graphic>
-      </p:graphicFrame>
-      <p:sp>
-        <p:nvSpPr>
-          <p:cNvPr id="5" name="Text 2"/>
-          <p:cNvSpPr/>
-          <p:nvPr/>
-        </p:nvSpPr>
-        <p:spPr>
-          <a:xfrm>
-            <a:off x="548640" y="5394960"/>
-            <a:ext cx="7315200" cy="365760"/>
-          </a:xfrm>
-          <a:prstGeom prst="rect">
-            <a:avLst/>
-          </a:prstGeom>
-          <a:noFill/>
-          <a:ln/>
-        </p:spPr>
-        <p:txBody>
-          <a:bodyPr wrap="square" lIns="0" tIns="0" rIns="0" bIns="0" rtlCol="0" anchor="ctr"/>
-          <a:lstStyle/>
-          <a:p>
-            <a:pPr indent="0" marL="0">
-              <a:buNone/>
-            </a:pPr>
-            <a:r>
-              <a:rPr lang="en-US" sz="800" i="1" dirty="0">
-                <a:solidFill>
-                  <a:srgbClr val="6B7684"/>
-                </a:solidFill>
-                <a:latin typeface="Calibri" pitchFamily="34" charset="0"/>
-                <a:ea typeface="Calibri" pitchFamily="34" charset="-122"/>
-                <a:cs typeface="Calibri" pitchFamily="34" charset="-120"/>
-              </a:rPr>
-              <a:t>Source: management MIS, production &amp; rejection registers, FY22-23 through FY26-27 (4 months).</a:t>
-            </a:r>
-            <a:endParaRPr lang="en-US" sz="800" dirty="0"/>
-          </a:p>
-        </p:txBody>
-      </p:sp>
-      <p:sp>
-        <p:nvSpPr>
-          <p:cNvPr id="6" name="Shape 3"/>
-          <p:cNvSpPr/>
-          <p:nvPr/>
-        </p:nvSpPr>
-        <p:spPr>
-          <a:xfrm>
-            <a:off x="8138160" y="1737360"/>
-            <a:ext cx="3504895" cy="4023360"/>
+      <p:sp>
+        <p:nvSpPr>
+          <p:cNvPr id="4" name="Shape 2"/>
+          <p:cNvSpPr/>
+          <p:nvPr/>
+        </p:nvSpPr>
+        <p:spPr>
+          <a:xfrm>
+            <a:off x="548640" y="1737360"/>
+            <a:ext cx="2567864" cy="1600200"/>
           </a:xfrm>
           <a:prstGeom prst="roundRect">
             <a:avLst>
-              <a:gd name="adj" fmla="val 2087"/>
+              <a:gd name="adj" fmla="val 4571"/>
+            </a:avLst>
+          </a:prstGeom>
+          <a:solidFill>
+            <a:srgbClr val="EDF5EF"/>
+          </a:solidFill>
+          <a:ln/>
+        </p:spPr>
+      </p:sp>
+      <p:sp>
+        <p:nvSpPr>
+          <p:cNvPr id="5" name="Text 3"/>
+          <p:cNvSpPr/>
+          <p:nvPr/>
+        </p:nvSpPr>
+        <p:spPr>
+          <a:xfrm>
+            <a:off x="713232" y="1874520"/>
+            <a:ext cx="2238680" cy="502920"/>
+          </a:xfrm>
+          <a:prstGeom prst="rect">
+            <a:avLst/>
+          </a:prstGeom>
+          <a:noFill/>
+          <a:ln/>
+        </p:spPr>
+        <p:txBody>
+          <a:bodyPr wrap="square" lIns="0" tIns="0" rIns="0" bIns="0" rtlCol="0" anchor="ctr"/>
+          <a:lstStyle/>
+          <a:p>
+            <a:pPr indent="0" marL="0">
+              <a:buNone/>
+            </a:pPr>
+            <a:r>
+              <a:rPr lang="en-US" sz="2400" b="1" dirty="0">
+                <a:solidFill>
+                  <a:srgbClr val="3F8F5F"/>
+                </a:solidFill>
+                <a:latin typeface="Cambria" pitchFamily="34" charset="0"/>
+                <a:ea typeface="Cambria" pitchFamily="34" charset="-122"/>
+                <a:cs typeface="Cambria" pitchFamily="34" charset="-120"/>
+              </a:rPr>
+              <a:t>~25%</a:t>
+            </a:r>
+            <a:endParaRPr lang="en-US" sz="2400" dirty="0"/>
+          </a:p>
+        </p:txBody>
+      </p:sp>
+      <p:sp>
+        <p:nvSpPr>
+          <p:cNvPr id="6" name="Text 4"/>
+          <p:cNvSpPr/>
+          <p:nvPr/>
+        </p:nvSpPr>
+        <p:spPr>
+          <a:xfrm>
+            <a:off x="713232" y="2395728"/>
+            <a:ext cx="2238680" cy="502920"/>
+          </a:xfrm>
+          <a:prstGeom prst="rect">
+            <a:avLst/>
+          </a:prstGeom>
+          <a:noFill/>
+          <a:ln/>
+        </p:spPr>
+        <p:txBody>
+          <a:bodyPr wrap="square" lIns="0" tIns="0" rIns="0" bIns="0" rtlCol="0" anchor="ctr"/>
+          <a:lstStyle/>
+          <a:p>
+            <a:pPr indent="0" marL="0">
+              <a:lnSpc>
+                <a:spcPct val="105000"/>
+              </a:lnSpc>
+              <a:buNone/>
+            </a:pPr>
+            <a:r>
+              <a:rPr lang="en-US" sz="1030" b="1" dirty="0">
+                <a:solidFill>
+                  <a:srgbClr val="1C1F26"/>
+                </a:solidFill>
+                <a:latin typeface="Calibri" pitchFamily="34" charset="0"/>
+                <a:ea typeface="Calibri" pitchFamily="34" charset="-122"/>
+                <a:cs typeface="Calibri" pitchFamily="34" charset="-120"/>
+              </a:rPr>
+              <a:t>Revenue CAGR, FY21 trough to FY25-26</a:t>
+            </a:r>
+            <a:endParaRPr lang="en-US" sz="1030" dirty="0"/>
+          </a:p>
+        </p:txBody>
+      </p:sp>
+      <p:sp>
+        <p:nvSpPr>
+          <p:cNvPr id="7" name="Text 5"/>
+          <p:cNvSpPr/>
+          <p:nvPr/>
+        </p:nvSpPr>
+        <p:spPr>
+          <a:xfrm>
+            <a:off x="713232" y="2889504"/>
+            <a:ext cx="2238680" cy="411480"/>
+          </a:xfrm>
+          <a:prstGeom prst="rect">
+            <a:avLst/>
+          </a:prstGeom>
+          <a:noFill/>
+          <a:ln/>
+        </p:spPr>
+        <p:txBody>
+          <a:bodyPr wrap="square" lIns="0" tIns="0" rIns="0" bIns="0" rtlCol="0" anchor="ctr"/>
+          <a:lstStyle/>
+          <a:p>
+            <a:pPr indent="0" marL="0">
+              <a:lnSpc>
+                <a:spcPct val="105000"/>
+              </a:lnSpc>
+              <a:buNone/>
+            </a:pPr>
+            <a:r>
+              <a:rPr lang="en-US" sz="900" dirty="0">
+                <a:solidFill>
+                  <a:srgbClr val="3A4553"/>
+                </a:solidFill>
+                <a:latin typeface="Calibri" pitchFamily="34" charset="0"/>
+                <a:ea typeface="Calibri" pitchFamily="34" charset="-122"/>
+                <a:cs typeface="Calibri" pitchFamily="34" charset="-120"/>
+              </a:rPr>
+              <a:t>₹8.5 Cr → ₹25.9 Cr over 5 years</a:t>
+            </a:r>
+            <a:endParaRPr lang="en-US" sz="900" dirty="0"/>
+          </a:p>
+        </p:txBody>
+      </p:sp>
+      <p:sp>
+        <p:nvSpPr>
+          <p:cNvPr id="8" name="Shape 6"/>
+          <p:cNvSpPr/>
+          <p:nvPr/>
+        </p:nvSpPr>
+        <p:spPr>
+          <a:xfrm>
+            <a:off x="3390824" y="1737360"/>
+            <a:ext cx="2567864" cy="1600200"/>
+          </a:xfrm>
+          <a:prstGeom prst="roundRect">
+            <a:avLst>
+              <a:gd name="adj" fmla="val 4571"/>
+            </a:avLst>
+          </a:prstGeom>
+          <a:solidFill>
+            <a:srgbClr val="EDF5EF"/>
+          </a:solidFill>
+          <a:ln/>
+        </p:spPr>
+      </p:sp>
+      <p:sp>
+        <p:nvSpPr>
+          <p:cNvPr id="9" name="Text 7"/>
+          <p:cNvSpPr/>
+          <p:nvPr/>
+        </p:nvSpPr>
+        <p:spPr>
+          <a:xfrm>
+            <a:off x="3555416" y="1874520"/>
+            <a:ext cx="2238680" cy="502920"/>
+          </a:xfrm>
+          <a:prstGeom prst="rect">
+            <a:avLst/>
+          </a:prstGeom>
+          <a:noFill/>
+          <a:ln/>
+        </p:spPr>
+        <p:txBody>
+          <a:bodyPr wrap="square" lIns="0" tIns="0" rIns="0" bIns="0" rtlCol="0" anchor="ctr"/>
+          <a:lstStyle/>
+          <a:p>
+            <a:pPr indent="0" marL="0">
+              <a:buNone/>
+            </a:pPr>
+            <a:r>
+              <a:rPr lang="en-US" sz="2400" b="1" dirty="0">
+                <a:solidFill>
+                  <a:srgbClr val="3F8F5F"/>
+                </a:solidFill>
+                <a:latin typeface="Cambria" pitchFamily="34" charset="0"/>
+                <a:ea typeface="Cambria" pitchFamily="34" charset="-122"/>
+                <a:cs typeface="Cambria" pitchFamily="34" charset="-120"/>
+              </a:rPr>
+              <a:t>₹4.4 Cr</a:t>
+            </a:r>
+            <a:endParaRPr lang="en-US" sz="2400" dirty="0"/>
+          </a:p>
+        </p:txBody>
+      </p:sp>
+      <p:sp>
+        <p:nvSpPr>
+          <p:cNvPr id="10" name="Text 8"/>
+          <p:cNvSpPr/>
+          <p:nvPr/>
+        </p:nvSpPr>
+        <p:spPr>
+          <a:xfrm>
+            <a:off x="3555416" y="2395728"/>
+            <a:ext cx="2238680" cy="502920"/>
+          </a:xfrm>
+          <a:prstGeom prst="rect">
+            <a:avLst/>
+          </a:prstGeom>
+          <a:noFill/>
+          <a:ln/>
+        </p:spPr>
+        <p:txBody>
+          <a:bodyPr wrap="square" lIns="0" tIns="0" rIns="0" bIns="0" rtlCol="0" anchor="ctr"/>
+          <a:lstStyle/>
+          <a:p>
+            <a:pPr indent="0" marL="0">
+              <a:lnSpc>
+                <a:spcPct val="105000"/>
+              </a:lnSpc>
+              <a:buNone/>
+            </a:pPr>
+            <a:r>
+              <a:rPr lang="en-US" sz="1030" b="1" dirty="0">
+                <a:solidFill>
+                  <a:srgbClr val="1C1F26"/>
+                </a:solidFill>
+                <a:latin typeface="Calibri" pitchFamily="34" charset="0"/>
+                <a:ea typeface="Calibri" pitchFamily="34" charset="-122"/>
+                <a:cs typeface="Calibri" pitchFamily="34" charset="-120"/>
+              </a:rPr>
+              <a:t>Net worth recovered, FY22 to FY25</a:t>
+            </a:r>
+            <a:endParaRPr lang="en-US" sz="1030" dirty="0"/>
+          </a:p>
+        </p:txBody>
+      </p:sp>
+      <p:sp>
+        <p:nvSpPr>
+          <p:cNvPr id="11" name="Text 9"/>
+          <p:cNvSpPr/>
+          <p:nvPr/>
+        </p:nvSpPr>
+        <p:spPr>
+          <a:xfrm>
+            <a:off x="3555416" y="2889504"/>
+            <a:ext cx="2238680" cy="411480"/>
+          </a:xfrm>
+          <a:prstGeom prst="rect">
+            <a:avLst/>
+          </a:prstGeom>
+          <a:noFill/>
+          <a:ln/>
+        </p:spPr>
+        <p:txBody>
+          <a:bodyPr wrap="square" lIns="0" tIns="0" rIns="0" bIns="0" rtlCol="0" anchor="ctr"/>
+          <a:lstStyle/>
+          <a:p>
+            <a:pPr indent="0" marL="0">
+              <a:lnSpc>
+                <a:spcPct val="105000"/>
+              </a:lnSpc>
+              <a:buNone/>
+            </a:pPr>
+            <a:r>
+              <a:rPr lang="en-US" sz="900" dirty="0">
+                <a:solidFill>
+                  <a:srgbClr val="3A4553"/>
+                </a:solidFill>
+                <a:latin typeface="Calibri" pitchFamily="34" charset="0"/>
+                <a:ea typeface="Calibri" pitchFamily="34" charset="-122"/>
+                <a:cs typeface="Calibri" pitchFamily="34" charset="-120"/>
+              </a:rPr>
+              <a:t>-₹5.94 Cr → -₹1.54 Cr, narrower every year</a:t>
+            </a:r>
+            <a:endParaRPr lang="en-US" sz="900" dirty="0"/>
+          </a:p>
+        </p:txBody>
+      </p:sp>
+      <p:sp>
+        <p:nvSpPr>
+          <p:cNvPr id="12" name="Shape 10"/>
+          <p:cNvSpPr/>
+          <p:nvPr/>
+        </p:nvSpPr>
+        <p:spPr>
+          <a:xfrm>
+            <a:off x="6233008" y="1737360"/>
+            <a:ext cx="2567864" cy="1600200"/>
+          </a:xfrm>
+          <a:prstGeom prst="roundRect">
+            <a:avLst>
+              <a:gd name="adj" fmla="val 4571"/>
+            </a:avLst>
+          </a:prstGeom>
+          <a:solidFill>
+            <a:srgbClr val="EDF5EF"/>
+          </a:solidFill>
+          <a:ln/>
+        </p:spPr>
+      </p:sp>
+      <p:sp>
+        <p:nvSpPr>
+          <p:cNvPr id="13" name="Text 11"/>
+          <p:cNvSpPr/>
+          <p:nvPr/>
+        </p:nvSpPr>
+        <p:spPr>
+          <a:xfrm>
+            <a:off x="6397600" y="1874520"/>
+            <a:ext cx="2238680" cy="502920"/>
+          </a:xfrm>
+          <a:prstGeom prst="rect">
+            <a:avLst/>
+          </a:prstGeom>
+          <a:noFill/>
+          <a:ln/>
+        </p:spPr>
+        <p:txBody>
+          <a:bodyPr wrap="square" lIns="0" tIns="0" rIns="0" bIns="0" rtlCol="0" anchor="ctr"/>
+          <a:lstStyle/>
+          <a:p>
+            <a:pPr indent="0" marL="0">
+              <a:buNone/>
+            </a:pPr>
+            <a:r>
+              <a:rPr lang="en-US" sz="2400" b="1" dirty="0">
+                <a:solidFill>
+                  <a:srgbClr val="3F8F5F"/>
+                </a:solidFill>
+                <a:latin typeface="Cambria" pitchFamily="34" charset="0"/>
+                <a:ea typeface="Cambria" pitchFamily="34" charset="-122"/>
+                <a:cs typeface="Cambria" pitchFamily="34" charset="-120"/>
+              </a:rPr>
+              <a:t>+45%</a:t>
+            </a:r>
+            <a:endParaRPr lang="en-US" sz="2400" dirty="0"/>
+          </a:p>
+        </p:txBody>
+      </p:sp>
+      <p:sp>
+        <p:nvSpPr>
+          <p:cNvPr id="14" name="Text 12"/>
+          <p:cNvSpPr/>
+          <p:nvPr/>
+        </p:nvSpPr>
+        <p:spPr>
+          <a:xfrm>
+            <a:off x="6397600" y="2395728"/>
+            <a:ext cx="2238680" cy="502920"/>
+          </a:xfrm>
+          <a:prstGeom prst="rect">
+            <a:avLst/>
+          </a:prstGeom>
+          <a:noFill/>
+          <a:ln/>
+        </p:spPr>
+        <p:txBody>
+          <a:bodyPr wrap="square" lIns="0" tIns="0" rIns="0" bIns="0" rtlCol="0" anchor="ctr"/>
+          <a:lstStyle/>
+          <a:p>
+            <a:pPr indent="0" marL="0">
+              <a:lnSpc>
+                <a:spcPct val="105000"/>
+              </a:lnSpc>
+              <a:buNone/>
+            </a:pPr>
+            <a:r>
+              <a:rPr lang="en-US" sz="1030" b="1" dirty="0">
+                <a:solidFill>
+                  <a:srgbClr val="1C1F26"/>
+                </a:solidFill>
+                <a:latin typeface="Calibri" pitchFamily="34" charset="0"/>
+                <a:ea typeface="Calibri" pitchFamily="34" charset="-122"/>
+                <a:cs typeface="Calibri" pitchFamily="34" charset="-120"/>
+              </a:rPr>
+              <a:t>Tega contribution/kg, FY22-23 to FY25-26</a:t>
+            </a:r>
+            <a:endParaRPr lang="en-US" sz="1030" dirty="0"/>
+          </a:p>
+        </p:txBody>
+      </p:sp>
+      <p:sp>
+        <p:nvSpPr>
+          <p:cNvPr id="15" name="Text 13"/>
+          <p:cNvSpPr/>
+          <p:nvPr/>
+        </p:nvSpPr>
+        <p:spPr>
+          <a:xfrm>
+            <a:off x="6397600" y="2889504"/>
+            <a:ext cx="2238680" cy="411480"/>
+          </a:xfrm>
+          <a:prstGeom prst="rect">
+            <a:avLst/>
+          </a:prstGeom>
+          <a:noFill/>
+          <a:ln/>
+        </p:spPr>
+        <p:txBody>
+          <a:bodyPr wrap="square" lIns="0" tIns="0" rIns="0" bIns="0" rtlCol="0" anchor="ctr"/>
+          <a:lstStyle/>
+          <a:p>
+            <a:pPr indent="0" marL="0">
+              <a:lnSpc>
+                <a:spcPct val="105000"/>
+              </a:lnSpc>
+              <a:buNone/>
+            </a:pPr>
+            <a:r>
+              <a:rPr lang="en-US" sz="900" dirty="0">
+                <a:solidFill>
+                  <a:srgbClr val="3A4553"/>
+                </a:solidFill>
+                <a:latin typeface="Calibri" pitchFamily="34" charset="0"/>
+                <a:ea typeface="Calibri" pitchFamily="34" charset="-122"/>
+                <a:cs typeface="Calibri" pitchFamily="34" charset="-120"/>
+              </a:rPr>
+              <a:t>~₹40/kg → ~₹59/kg average</a:t>
+            </a:r>
+            <a:endParaRPr lang="en-US" sz="900" dirty="0"/>
+          </a:p>
+        </p:txBody>
+      </p:sp>
+      <p:sp>
+        <p:nvSpPr>
+          <p:cNvPr id="16" name="Shape 14"/>
+          <p:cNvSpPr/>
+          <p:nvPr/>
+        </p:nvSpPr>
+        <p:spPr>
+          <a:xfrm>
+            <a:off x="9075191" y="1737360"/>
+            <a:ext cx="2567864" cy="1600200"/>
+          </a:xfrm>
+          <a:prstGeom prst="roundRect">
+            <a:avLst>
+              <a:gd name="adj" fmla="val 4571"/>
+            </a:avLst>
+          </a:prstGeom>
+          <a:solidFill>
+            <a:srgbClr val="EDF5EF"/>
+          </a:solidFill>
+          <a:ln/>
+        </p:spPr>
+      </p:sp>
+      <p:sp>
+        <p:nvSpPr>
+          <p:cNvPr id="17" name="Text 15"/>
+          <p:cNvSpPr/>
+          <p:nvPr/>
+        </p:nvSpPr>
+        <p:spPr>
+          <a:xfrm>
+            <a:off x="9239783" y="1874520"/>
+            <a:ext cx="2238680" cy="502920"/>
+          </a:xfrm>
+          <a:prstGeom prst="rect">
+            <a:avLst/>
+          </a:prstGeom>
+          <a:noFill/>
+          <a:ln/>
+        </p:spPr>
+        <p:txBody>
+          <a:bodyPr wrap="square" lIns="0" tIns="0" rIns="0" bIns="0" rtlCol="0" anchor="ctr"/>
+          <a:lstStyle/>
+          <a:p>
+            <a:pPr indent="0" marL="0">
+              <a:buNone/>
+            </a:pPr>
+            <a:r>
+              <a:rPr lang="en-US" sz="2400" b="1" dirty="0">
+                <a:solidFill>
+                  <a:srgbClr val="3F8F5F"/>
+                </a:solidFill>
+                <a:latin typeface="Cambria" pitchFamily="34" charset="0"/>
+                <a:ea typeface="Cambria" pitchFamily="34" charset="-122"/>
+                <a:cs typeface="Cambria" pitchFamily="34" charset="-120"/>
+              </a:rPr>
+              <a:t>8+ yrs</a:t>
+            </a:r>
+            <a:endParaRPr lang="en-US" sz="2400" dirty="0"/>
+          </a:p>
+        </p:txBody>
+      </p:sp>
+      <p:sp>
+        <p:nvSpPr>
+          <p:cNvPr id="18" name="Text 16"/>
+          <p:cNvSpPr/>
+          <p:nvPr/>
+        </p:nvSpPr>
+        <p:spPr>
+          <a:xfrm>
+            <a:off x="9239783" y="2395728"/>
+            <a:ext cx="2238680" cy="502920"/>
+          </a:xfrm>
+          <a:prstGeom prst="rect">
+            <a:avLst/>
+          </a:prstGeom>
+          <a:noFill/>
+          <a:ln/>
+        </p:spPr>
+        <p:txBody>
+          <a:bodyPr wrap="square" lIns="0" tIns="0" rIns="0" bIns="0" rtlCol="0" anchor="ctr"/>
+          <a:lstStyle/>
+          <a:p>
+            <a:pPr indent="0" marL="0">
+              <a:lnSpc>
+                <a:spcPct val="105000"/>
+              </a:lnSpc>
+              <a:buNone/>
+            </a:pPr>
+            <a:r>
+              <a:rPr lang="en-US" sz="1030" b="1" dirty="0">
+                <a:solidFill>
+                  <a:srgbClr val="1C1F26"/>
+                </a:solidFill>
+                <a:latin typeface="Calibri" pitchFamily="34" charset="0"/>
+                <a:ea typeface="Calibri" pitchFamily="34" charset="-122"/>
+                <a:cs typeface="Calibri" pitchFamily="34" charset="-120"/>
+              </a:rPr>
+              <a:t>Tenure of several anchor accounts</a:t>
+            </a:r>
+            <a:endParaRPr lang="en-US" sz="1030" dirty="0"/>
+          </a:p>
+        </p:txBody>
+      </p:sp>
+      <p:sp>
+        <p:nvSpPr>
+          <p:cNvPr id="19" name="Text 17"/>
+          <p:cNvSpPr/>
+          <p:nvPr/>
+        </p:nvSpPr>
+        <p:spPr>
+          <a:xfrm>
+            <a:off x="9239783" y="2889504"/>
+            <a:ext cx="2238680" cy="411480"/>
+          </a:xfrm>
+          <a:prstGeom prst="rect">
+            <a:avLst/>
+          </a:prstGeom>
+          <a:noFill/>
+          <a:ln/>
+        </p:spPr>
+        <p:txBody>
+          <a:bodyPr wrap="square" lIns="0" tIns="0" rIns="0" bIns="0" rtlCol="0" anchor="ctr"/>
+          <a:lstStyle/>
+          <a:p>
+            <a:pPr indent="0" marL="0">
+              <a:lnSpc>
+                <a:spcPct val="105000"/>
+              </a:lnSpc>
+              <a:buNone/>
+            </a:pPr>
+            <a:r>
+              <a:rPr lang="en-US" sz="900" dirty="0">
+                <a:solidFill>
+                  <a:srgbClr val="3A4553"/>
+                </a:solidFill>
+                <a:latin typeface="Calibri" pitchFamily="34" charset="0"/>
+                <a:ea typeface="Calibri" pitchFamily="34" charset="-122"/>
+                <a:cs typeface="Calibri" pitchFamily="34" charset="-120"/>
+              </a:rPr>
+              <a:t>BEML, Escort, Tega, Tata Metaliks tracked since FY17-18</a:t>
+            </a:r>
+            <a:endParaRPr lang="en-US" sz="900" dirty="0"/>
+          </a:p>
+        </p:txBody>
+      </p:sp>
+      <p:sp>
+        <p:nvSpPr>
+          <p:cNvPr id="20" name="Shape 18"/>
+          <p:cNvSpPr/>
+          <p:nvPr/>
+        </p:nvSpPr>
+        <p:spPr>
+          <a:xfrm>
+            <a:off x="548640" y="3611880"/>
+            <a:ext cx="5364328" cy="2331720"/>
+          </a:xfrm>
+          <a:prstGeom prst="roundRect">
+            <a:avLst>
+              <a:gd name="adj" fmla="val 3137"/>
             </a:avLst>
           </a:prstGeom>
           <a:solidFill>
@@ -11424,14 +12056,14 @@
       </p:sp>
       <p:sp>
         <p:nvSpPr>
-          <p:cNvPr id="7" name="Text 4"/>
-          <p:cNvSpPr/>
-          <p:nvPr/>
-        </p:nvSpPr>
-        <p:spPr>
-          <a:xfrm>
-            <a:off x="8366760" y="1920240"/>
-            <a:ext cx="3047695" cy="274320"/>
+          <p:cNvPr id="21" name="Text 19"/>
+          <p:cNvSpPr/>
+          <p:nvPr/>
+        </p:nvSpPr>
+        <p:spPr>
+          <a:xfrm>
+            <a:off x="804672" y="3794760"/>
+            <a:ext cx="4852264" cy="274320"/>
           </a:xfrm>
           <a:prstGeom prst="rect">
             <a:avLst/>
@@ -11449,13 +12081,13 @@
             <a:r>
               <a:rPr lang="en-US" sz="1000" b="1" spc="100" kern="0" dirty="0">
                 <a:solidFill>
-                  <a:srgbClr val="D9622B"/>
-                </a:solidFill>
-                <a:latin typeface="Calibri" pitchFamily="34" charset="0"/>
-                <a:ea typeface="Calibri" pitchFamily="34" charset="-122"/>
-                <a:cs typeface="Calibri" pitchFamily="34" charset="-120"/>
-              </a:rPr>
-              <a:t>ALSO RISING</a:t>
+                  <a:srgbClr val="3F8F5F"/>
+                </a:solidFill>
+                <a:latin typeface="Calibri" pitchFamily="34" charset="0"/>
+                <a:ea typeface="Calibri" pitchFamily="34" charset="-122"/>
+                <a:cs typeface="Calibri" pitchFamily="34" charset="-120"/>
+              </a:rPr>
+              <a:t>BALANCE SHEET: ON PACE TO CROSS ZERO</a:t>
             </a:r>
             <a:endParaRPr lang="en-US" sz="1000" dirty="0"/>
           </a:p>
@@ -11463,157 +12095,14 @@
       </p:sp>
       <p:sp>
         <p:nvSpPr>
-          <p:cNvPr id="8" name="Text 5"/>
-          <p:cNvSpPr/>
-          <p:nvPr/>
-        </p:nvSpPr>
-        <p:spPr>
-          <a:xfrm>
-            <a:off x="8366760" y="2212848"/>
-            <a:ext cx="3047695" cy="274320"/>
-          </a:xfrm>
-          <a:prstGeom prst="rect">
-            <a:avLst/>
-          </a:prstGeom>
-          <a:noFill/>
-          <a:ln/>
-        </p:spPr>
-        <p:txBody>
-          <a:bodyPr wrap="square" lIns="0" tIns="0" rIns="0" bIns="0" rtlCol="0" anchor="ctr"/>
-          <a:lstStyle/>
-          <a:p>
-            <a:pPr indent="0" marL="0">
-              <a:buNone/>
-            </a:pPr>
-            <a:r>
-              <a:rPr lang="en-US" sz="1100" b="1" dirty="0">
-                <a:solidFill>
-                  <a:srgbClr val="1C1F26"/>
-                </a:solidFill>
-                <a:latin typeface="Calibri" pitchFamily="34" charset="0"/>
-                <a:ea typeface="Calibri" pitchFamily="34" charset="-122"/>
-                <a:cs typeface="Calibri" pitchFamily="34" charset="-120"/>
-              </a:rPr>
-              <a:t>Fixed costs as % of net sales</a:t>
-            </a:r>
-            <a:endParaRPr lang="en-US" sz="1100" dirty="0"/>
-          </a:p>
-        </p:txBody>
-      </p:sp>
-      <p:sp>
-        <p:nvSpPr>
-          <p:cNvPr id="9" name="Text 6"/>
-          <p:cNvSpPr/>
-          <p:nvPr/>
-        </p:nvSpPr>
-        <p:spPr>
-          <a:xfrm>
-            <a:off x="8366760" y="2487168"/>
-            <a:ext cx="3047695" cy="365760"/>
-          </a:xfrm>
-          <a:prstGeom prst="rect">
-            <a:avLst/>
-          </a:prstGeom>
-          <a:noFill/>
-          <a:ln/>
-        </p:spPr>
-        <p:txBody>
-          <a:bodyPr wrap="square" lIns="0" tIns="0" rIns="0" bIns="0" rtlCol="0" anchor="ctr"/>
-          <a:lstStyle/>
-          <a:p>
-            <a:pPr indent="0" marL="0">
-              <a:buNone/>
-            </a:pPr>
-            <a:r>
-              <a:rPr lang="en-US" sz="1700" b="1" dirty="0">
-                <a:solidFill>
-                  <a:srgbClr val="B8453F"/>
-                </a:solidFill>
-                <a:latin typeface="Cambria" pitchFamily="34" charset="0"/>
-                <a:ea typeface="Cambria" pitchFamily="34" charset="-122"/>
-                <a:cs typeface="Cambria" pitchFamily="34" charset="-120"/>
-              </a:rPr>
-              <a:t>16.06%  →  17.09%</a:t>
-            </a:r>
-            <a:endParaRPr lang="en-US" sz="1700" dirty="0"/>
-          </a:p>
-        </p:txBody>
-      </p:sp>
-      <p:sp>
-        <p:nvSpPr>
-          <p:cNvPr id="10" name="Text 7"/>
-          <p:cNvSpPr/>
-          <p:nvPr/>
-        </p:nvSpPr>
-        <p:spPr>
-          <a:xfrm>
-            <a:off x="8366760" y="2880360"/>
-            <a:ext cx="3047695" cy="457200"/>
-          </a:xfrm>
-          <a:prstGeom prst="rect">
-            <a:avLst/>
-          </a:prstGeom>
-          <a:noFill/>
-          <a:ln/>
-        </p:spPr>
-        <p:txBody>
-          <a:bodyPr wrap="square" lIns="0" tIns="0" rIns="0" bIns="0" rtlCol="0" anchor="ctr"/>
-          <a:lstStyle/>
-          <a:p>
-            <a:pPr indent="0" marL="0">
-              <a:lnSpc>
-                <a:spcPct val="110000"/>
-              </a:lnSpc>
-              <a:buNone/>
-            </a:pPr>
-            <a:r>
-              <a:rPr lang="en-US" sz="930" dirty="0">
-                <a:solidFill>
-                  <a:srgbClr val="3A4553"/>
-                </a:solidFill>
-                <a:latin typeface="Calibri" pitchFamily="34" charset="0"/>
-                <a:ea typeface="Calibri" pitchFamily="34" charset="-122"/>
-                <a:cs typeface="Calibri" pitchFamily="34" charset="-120"/>
-              </a:rPr>
-              <a:t>FY23-24 to FY24-25 — rose even in the year sales dipped.</a:t>
-            </a:r>
-            <a:endParaRPr lang="en-US" sz="930" dirty="0"/>
-          </a:p>
-        </p:txBody>
-      </p:sp>
-      <p:sp>
-        <p:nvSpPr>
-          <p:cNvPr id="11" name="Shape 8"/>
-          <p:cNvSpPr/>
-          <p:nvPr/>
-        </p:nvSpPr>
-        <p:spPr>
-          <a:xfrm>
-            <a:off x="8366760" y="3520440"/>
-            <a:ext cx="3047695" cy="0"/>
-          </a:xfrm>
-          <a:prstGeom prst="line">
-            <a:avLst/>
-          </a:prstGeom>
-          <a:noFill/>
-          <a:ln w="12700">
-            <a:solidFill>
-              <a:srgbClr val="E1E4E9"/>
-            </a:solidFill>
-            <a:prstDash val="solid"/>
-          </a:ln>
-        </p:spPr>
-      </p:sp>
-      <p:sp>
-        <p:nvSpPr>
-          <p:cNvPr id="12" name="Text 9"/>
-          <p:cNvSpPr/>
-          <p:nvPr/>
-        </p:nvSpPr>
-        <p:spPr>
-          <a:xfrm>
-            <a:off x="8366760" y="3703320"/>
-            <a:ext cx="3047695" cy="1920240"/>
+          <p:cNvPr id="22" name="Text 20"/>
+          <p:cNvSpPr/>
+          <p:nvPr/>
+        </p:nvSpPr>
+        <p:spPr>
+          <a:xfrm>
+            <a:off x="804672" y="4096512"/>
+            <a:ext cx="4852264" cy="1737360"/>
           </a:xfrm>
           <a:prstGeom prst="rect">
             <a:avLst/>
@@ -11640,7 +12129,7 @@
                 <a:ea typeface="Calibri" pitchFamily="34" charset="-122"/>
                 <a:cs typeface="Calibri" pitchFamily="34" charset="-120"/>
               </a:rPr>
-              <a:t>This is not a one-off spike — it is the same quality-control theme recurring across three fiscal years despite a well-equipped testing lab (slide 8). It belongs on the same diligence list as the customer-concentration risk.</a:t>
+              <a:t>Net worth has improved in every audited year since FY22 — not a one-off recovery. At the FY24-25 pace (~₹1.4 Cr/yr), the company crosses into positive net worth around FY26. That is a real, trackable milestone: the moment Datre stops being balance-sheet-insolvent on paper, four years after the Covid-era trough.</a:t>
             </a:r>
             <a:endParaRPr lang="en-US" sz="1000" dirty="0"/>
           </a:p>
@@ -11648,7 +12137,188 @@
       </p:sp>
       <p:sp>
         <p:nvSpPr>
-          <p:cNvPr id="13" name="Text 10"/>
+          <p:cNvPr id="23" name="Shape 21"/>
+          <p:cNvSpPr/>
+          <p:nvPr/>
+        </p:nvSpPr>
+        <p:spPr>
+          <a:xfrm>
+            <a:off x="6278728" y="3611880"/>
+            <a:ext cx="5364328" cy="2331720"/>
+          </a:xfrm>
+          <a:prstGeom prst="roundRect">
+            <a:avLst>
+              <a:gd name="adj" fmla="val 3137"/>
+            </a:avLst>
+          </a:prstGeom>
+          <a:solidFill>
+            <a:srgbClr val="F4F5F7"/>
+          </a:solidFill>
+          <a:ln/>
+        </p:spPr>
+      </p:sp>
+      <p:sp>
+        <p:nvSpPr>
+          <p:cNvPr id="24" name="Text 22"/>
+          <p:cNvSpPr/>
+          <p:nvPr/>
+        </p:nvSpPr>
+        <p:spPr>
+          <a:xfrm>
+            <a:off x="6534760" y="3794760"/>
+            <a:ext cx="4852264" cy="274320"/>
+          </a:xfrm>
+          <a:prstGeom prst="rect">
+            <a:avLst/>
+          </a:prstGeom>
+          <a:noFill/>
+          <a:ln/>
+        </p:spPr>
+        <p:txBody>
+          <a:bodyPr wrap="square" lIns="0" tIns="0" rIns="0" bIns="0" rtlCol="0" anchor="ctr"/>
+          <a:lstStyle/>
+          <a:p>
+            <a:pPr indent="0" marL="0">
+              <a:buNone/>
+            </a:pPr>
+            <a:r>
+              <a:rPr lang="en-US" sz="1000" b="1" spc="100" kern="0" dirty="0">
+                <a:solidFill>
+                  <a:srgbClr val="3F8F5F"/>
+                </a:solidFill>
+                <a:latin typeface="Calibri" pitchFamily="34" charset="0"/>
+                <a:ea typeface="Calibri" pitchFamily="34" charset="-122"/>
+                <a:cs typeface="Calibri" pitchFamily="34" charset="-120"/>
+              </a:rPr>
+              <a:t>NOT JUST A GOOD YEAR — A REBUILT CUSTOMER BASE</a:t>
+            </a:r>
+            <a:endParaRPr lang="en-US" sz="1000" dirty="0"/>
+          </a:p>
+        </p:txBody>
+      </p:sp>
+      <p:sp>
+        <p:nvSpPr>
+          <p:cNvPr id="25" name="Text 23"/>
+          <p:cNvSpPr/>
+          <p:nvPr/>
+        </p:nvSpPr>
+        <p:spPr>
+          <a:xfrm>
+            <a:off x="6534760" y="4096512"/>
+            <a:ext cx="4852264" cy="1737360"/>
+          </a:xfrm>
+          <a:prstGeom prst="rect">
+            <a:avLst/>
+          </a:prstGeom>
+          <a:noFill/>
+          <a:ln/>
+        </p:spPr>
+        <p:txBody>
+          <a:bodyPr wrap="square" lIns="0" tIns="0" rIns="0" bIns="0" rtlCol="0" anchor="ctr"/>
+          <a:lstStyle/>
+          <a:p>
+            <a:pPr indent="0" marL="0">
+              <a:lnSpc>
+                <a:spcPct val="120000"/>
+              </a:lnSpc>
+              <a:buNone/>
+            </a:pPr>
+            <a:r>
+              <a:rPr lang="en-US" sz="1000" dirty="0">
+                <a:solidFill>
+                  <a:srgbClr val="1C1F26"/>
+                </a:solidFill>
+                <a:latin typeface="Calibri" pitchFamily="34" charset="0"/>
+                <a:ea typeface="Calibri" pitchFamily="34" charset="-122"/>
+                <a:cs typeface="Calibri" pitchFamily="34" charset="-120"/>
+              </a:rPr>
+              <a:t>Internal contribution records track named OEM accounts — BEML, Escort, Tega, Bhushan/Tata Steel, IISCO, Metco, Neo Metaliks, Paharpur, Tata Metaliks — back to FY2017-18. The current profitability isn't built on a handful of one-off wins; it sits on relationships that have held, and in Tega's case deepened, across an 8-year span that includes the FY21 near-failure.</a:t>
+            </a:r>
+            <a:endParaRPr lang="en-US" sz="1000" dirty="0"/>
+          </a:p>
+        </p:txBody>
+      </p:sp>
+      <p:sp>
+        <p:nvSpPr>
+          <p:cNvPr id="26" name="Text 24"/>
+          <p:cNvSpPr/>
+          <p:nvPr/>
+        </p:nvSpPr>
+        <p:spPr>
+          <a:xfrm>
+            <a:off x="548640" y="6108192"/>
+            <a:ext cx="11094415" cy="320040"/>
+          </a:xfrm>
+          <a:prstGeom prst="rect">
+            <a:avLst/>
+          </a:prstGeom>
+          <a:noFill/>
+          <a:ln/>
+        </p:spPr>
+        <p:txBody>
+          <a:bodyPr wrap="square" lIns="0" tIns="0" rIns="0" bIns="0" rtlCol="0" anchor="ctr"/>
+          <a:lstStyle/>
+          <a:p>
+            <a:pPr indent="0" marL="0">
+              <a:buNone/>
+            </a:pPr>
+            <a:r>
+              <a:rPr lang="en-US" sz="900" i="1" dirty="0">
+                <a:solidFill>
+                  <a:srgbClr val="6B7684"/>
+                </a:solidFill>
+                <a:latin typeface="Calibri" pitchFamily="34" charset="0"/>
+                <a:ea typeface="Calibri" pitchFamily="34" charset="-122"/>
+                <a:cs typeface="Calibri" pitchFamily="34" charset="-120"/>
+              </a:rPr>
+              <a:t>Read alongside the balance-sheet, concentration and quality-control slides that follow: the progress is real and multi-year, but customer concentration, the quality trend and the FY26-27 slowdown are real too. Both things are true at once.</a:t>
+            </a:r>
+            <a:endParaRPr lang="en-US" sz="900" dirty="0"/>
+          </a:p>
+        </p:txBody>
+      </p:sp>
+      <p:sp>
+        <p:nvSpPr>
+          <p:cNvPr id="27" name="Text 25"/>
+          <p:cNvSpPr/>
+          <p:nvPr/>
+        </p:nvSpPr>
+        <p:spPr>
+          <a:xfrm>
+            <a:off x="548640" y="6400800"/>
+            <a:ext cx="11094415" cy="256032"/>
+          </a:xfrm>
+          <a:prstGeom prst="rect">
+            <a:avLst/>
+          </a:prstGeom>
+          <a:noFill/>
+          <a:ln/>
+        </p:spPr>
+        <p:txBody>
+          <a:bodyPr wrap="square" lIns="0" tIns="0" rIns="0" bIns="0" rtlCol="0" anchor="ctr"/>
+          <a:lstStyle/>
+          <a:p>
+            <a:pPr indent="0" marL="0">
+              <a:buNone/>
+            </a:pPr>
+            <a:r>
+              <a:rPr lang="en-US" sz="750" i="1" dirty="0">
+                <a:solidFill>
+                  <a:srgbClr val="6B7684"/>
+                </a:solidFill>
+                <a:latin typeface="Calibri" pitchFamily="34" charset="0"/>
+                <a:ea typeface="Calibri" pitchFamily="34" charset="-122"/>
+                <a:cs typeface="Calibri" pitchFamily="34" charset="-120"/>
+              </a:rPr>
+              <a:t>Source: audited balance sheets FY22-FY25; internal contribution-tracking records, FY2017-18 through FY2025-26; Aug 2025 order-book analysis (Tega ₹/kg).</a:t>
+            </a:r>
+            <a:endParaRPr lang="en-US" sz="750" dirty="0"/>
+          </a:p>
+        </p:txBody>
+      </p:sp>
+      <p:sp>
+        <p:nvSpPr>
+          <p:cNvPr id="28" name="Text 26"/>
           <p:cNvSpPr/>
           <p:nvPr/>
         </p:nvSpPr>
@@ -11687,7 +12357,7 @@
       </p:sp>
       <p:sp>
         <p:nvSpPr>
-          <p:cNvPr id="14" name="Text 11"/>
+          <p:cNvPr id="29" name="Text 27"/>
           <p:cNvSpPr/>
           <p:nvPr/>
         </p:nvSpPr>
@@ -11789,6 +12459,2301 @@
                 <a:ea typeface="Calibri" pitchFamily="34" charset="-122"/>
                 <a:cs typeface="Calibri" pitchFamily="34" charset="-120"/>
               </a:rPr>
+              <a:t>CRITICAL ANALYSIS — CONCENTRATION RISK</a:t>
+            </a:r>
+            <a:endParaRPr lang="en-US" sz="1100" dirty="0"/>
+          </a:p>
+        </p:txBody>
+      </p:sp>
+      <p:sp>
+        <p:nvSpPr>
+          <p:cNvPr id="3" name="Text 1"/>
+          <p:cNvSpPr/>
+          <p:nvPr/>
+        </p:nvSpPr>
+        <p:spPr>
+          <a:xfrm>
+            <a:off x="548640" y="841248"/>
+            <a:ext cx="11094415" cy="685800"/>
+          </a:xfrm>
+          <a:prstGeom prst="rect">
+            <a:avLst/>
+          </a:prstGeom>
+          <a:noFill/>
+          <a:ln/>
+        </p:spPr>
+        <p:txBody>
+          <a:bodyPr wrap="square" lIns="0" tIns="0" rIns="0" bIns="0" rtlCol="0" anchor="ctr"/>
+          <a:lstStyle/>
+          <a:p>
+            <a:pPr algn="l" indent="0" marL="0">
+              <a:buNone/>
+            </a:pPr>
+            <a:r>
+              <a:rPr lang="en-US" sz="3000" b="1" dirty="0">
+                <a:solidFill>
+                  <a:srgbClr val="1C1F26"/>
+                </a:solidFill>
+                <a:latin typeface="Cambria" pitchFamily="34" charset="0"/>
+                <a:ea typeface="Cambria" pitchFamily="34" charset="-122"/>
+                <a:cs typeface="Cambria" pitchFamily="34" charset="-120"/>
+              </a:rPr>
+              <a:t>Two customers now drive roughly 80% of contribution</a:t>
+            </a:r>
+            <a:endParaRPr lang="en-US" sz="3000" dirty="0"/>
+          </a:p>
+        </p:txBody>
+      </p:sp>
+      <p:graphicFrame>
+        <p:nvGraphicFramePr>
+          <p:cNvPr id="4" name="Chart 0" descr=""/>
+          <p:cNvGraphicFramePr/>
+          <p:nvPr/>
+        </p:nvGraphicFramePr>
+        <p:xfrm>
+          <a:off x="548640" y="1737360"/>
+          <a:ext cx="6126480" cy="3200400"/>
+        </p:xfrm>
+        <a:graphic xmlns:a="http://schemas.openxmlformats.org/drawingml/2006/main">
+          <a:graphicData uri="http://schemas.openxmlformats.org/drawingml/2006/chart">
+            <c:chart xmlns:c="http://schemas.openxmlformats.org/drawingml/2006/chart" r:id="rId1"/>
+          </a:graphicData>
+        </a:graphic>
+      </p:graphicFrame>
+      <p:sp>
+        <p:nvSpPr>
+          <p:cNvPr id="5" name="Text 2"/>
+          <p:cNvSpPr/>
+          <p:nvPr/>
+        </p:nvSpPr>
+        <p:spPr>
+          <a:xfrm>
+            <a:off x="548640" y="5074920"/>
+            <a:ext cx="6126480" cy="640080"/>
+          </a:xfrm>
+          <a:prstGeom prst="rect">
+            <a:avLst/>
+          </a:prstGeom>
+          <a:noFill/>
+          <a:ln/>
+        </p:spPr>
+        <p:txBody>
+          <a:bodyPr wrap="square" lIns="0" tIns="0" rIns="0" bIns="0" rtlCol="0" anchor="ctr"/>
+          <a:lstStyle/>
+          <a:p>
+            <a:pPr indent="0" marL="0">
+              <a:lnSpc>
+                <a:spcPct val="110000"/>
+              </a:lnSpc>
+              <a:buNone/>
+            </a:pPr>
+            <a:r>
+              <a:rPr lang="en-US" sz="800" i="1" dirty="0">
+                <a:solidFill>
+                  <a:srgbClr val="6B7684"/>
+                </a:solidFill>
+                <a:latin typeface="Calibri" pitchFamily="34" charset="0"/>
+                <a:ea typeface="Calibri" pitchFamily="34" charset="-122"/>
+                <a:cs typeface="Calibri" pitchFamily="34" charset="-120"/>
+              </a:rPr>
+              <a:t>Chart: Tega's individual share (company financial statements &amp; internal analysis, FY21-FY24 actuals, FY26 projection). "All OEM" figure in the panel at right uses a separate Net Contribution basis — see source note below.</a:t>
+            </a:r>
+            <a:endParaRPr lang="en-US" sz="800" dirty="0"/>
+          </a:p>
+        </p:txBody>
+      </p:sp>
+      <p:sp>
+        <p:nvSpPr>
+          <p:cNvPr id="6" name="Text 3"/>
+          <p:cNvSpPr/>
+          <p:nvPr/>
+        </p:nvSpPr>
+        <p:spPr>
+          <a:xfrm>
+            <a:off x="6949440" y="1691640"/>
+            <a:ext cx="4693615" cy="320040"/>
+          </a:xfrm>
+          <a:prstGeom prst="rect">
+            <a:avLst/>
+          </a:prstGeom>
+          <a:noFill/>
+          <a:ln/>
+        </p:spPr>
+        <p:txBody>
+          <a:bodyPr wrap="square" lIns="0" tIns="0" rIns="0" bIns="0" rtlCol="0" anchor="ctr"/>
+          <a:lstStyle/>
+          <a:p>
+            <a:pPr indent="0" marL="0">
+              <a:buNone/>
+            </a:pPr>
+            <a:r>
+              <a:rPr lang="en-US" sz="1500" b="1" dirty="0">
+                <a:solidFill>
+                  <a:srgbClr val="1C1F26"/>
+                </a:solidFill>
+                <a:latin typeface="Cambria" pitchFamily="34" charset="0"/>
+                <a:ea typeface="Cambria" pitchFamily="34" charset="-122"/>
+                <a:cs typeface="Cambria" pitchFamily="34" charset="-120"/>
+              </a:rPr>
+              <a:t>43% → 82%</a:t>
+            </a:r>
+            <a:endParaRPr lang="en-US" sz="1500" dirty="0"/>
+          </a:p>
+        </p:txBody>
+      </p:sp>
+      <p:sp>
+        <p:nvSpPr>
+          <p:cNvPr id="7" name="Text 4"/>
+          <p:cNvSpPr/>
+          <p:nvPr/>
+        </p:nvSpPr>
+        <p:spPr>
+          <a:xfrm>
+            <a:off x="6949440" y="2020824"/>
+            <a:ext cx="4693615" cy="621792"/>
+          </a:xfrm>
+          <a:prstGeom prst="rect">
+            <a:avLst/>
+          </a:prstGeom>
+          <a:noFill/>
+          <a:ln/>
+        </p:spPr>
+        <p:txBody>
+          <a:bodyPr wrap="square" lIns="0" tIns="0" rIns="0" bIns="0" rtlCol="0" anchor="ctr"/>
+          <a:lstStyle/>
+          <a:p>
+            <a:pPr indent="0" marL="0">
+              <a:lnSpc>
+                <a:spcPct val="110000"/>
+              </a:lnSpc>
+              <a:buNone/>
+            </a:pPr>
+            <a:r>
+              <a:rPr lang="en-US" sz="930" dirty="0">
+                <a:solidFill>
+                  <a:srgbClr val="3A4553"/>
+                </a:solidFill>
+                <a:latin typeface="Calibri" pitchFamily="34" charset="0"/>
+                <a:ea typeface="Calibri" pitchFamily="34" charset="-122"/>
+                <a:cs typeface="Calibri" pitchFamily="34" charset="-120"/>
+              </a:rPr>
+              <a:t>OEM share of total contribution, FY22 to FY26 (proj.) — a deliberate pivot, not passive drift</a:t>
+            </a:r>
+            <a:endParaRPr lang="en-US" sz="930" dirty="0"/>
+          </a:p>
+        </p:txBody>
+      </p:sp>
+      <p:sp>
+        <p:nvSpPr>
+          <p:cNvPr id="8" name="Text 5"/>
+          <p:cNvSpPr/>
+          <p:nvPr/>
+        </p:nvSpPr>
+        <p:spPr>
+          <a:xfrm>
+            <a:off x="6949440" y="2715768"/>
+            <a:ext cx="4693615" cy="320040"/>
+          </a:xfrm>
+          <a:prstGeom prst="rect">
+            <a:avLst/>
+          </a:prstGeom>
+          <a:noFill/>
+          <a:ln/>
+        </p:spPr>
+        <p:txBody>
+          <a:bodyPr wrap="square" lIns="0" tIns="0" rIns="0" bIns="0" rtlCol="0" anchor="ctr"/>
+          <a:lstStyle/>
+          <a:p>
+            <a:pPr indent="0" marL="0">
+              <a:buNone/>
+            </a:pPr>
+            <a:r>
+              <a:rPr lang="en-US" sz="1500" b="1" dirty="0">
+                <a:solidFill>
+                  <a:srgbClr val="1C1F26"/>
+                </a:solidFill>
+                <a:latin typeface="Cambria" pitchFamily="34" charset="0"/>
+                <a:ea typeface="Cambria" pitchFamily="34" charset="-122"/>
+                <a:cs typeface="Cambria" pitchFamily="34" charset="-120"/>
+              </a:rPr>
+              <a:t>₹0</a:t>
+            </a:r>
+            <a:endParaRPr lang="en-US" sz="1500" dirty="0"/>
+          </a:p>
+        </p:txBody>
+      </p:sp>
+      <p:sp>
+        <p:nvSpPr>
+          <p:cNvPr id="9" name="Text 6"/>
+          <p:cNvSpPr/>
+          <p:nvPr/>
+        </p:nvSpPr>
+        <p:spPr>
+          <a:xfrm>
+            <a:off x="6949440" y="3044952"/>
+            <a:ext cx="4693615" cy="621792"/>
+          </a:xfrm>
+          <a:prstGeom prst="rect">
+            <a:avLst/>
+          </a:prstGeom>
+          <a:noFill/>
+          <a:ln/>
+        </p:spPr>
+        <p:txBody>
+          <a:bodyPr wrap="square" lIns="0" tIns="0" rIns="0" bIns="0" rtlCol="0" anchor="ctr"/>
+          <a:lstStyle/>
+          <a:p>
+            <a:pPr indent="0" marL="0">
+              <a:lnSpc>
+                <a:spcPct val="110000"/>
+              </a:lnSpc>
+              <a:buNone/>
+            </a:pPr>
+            <a:r>
+              <a:rPr lang="en-US" sz="930" dirty="0">
+                <a:solidFill>
+                  <a:srgbClr val="3A4553"/>
+                </a:solidFill>
+                <a:latin typeface="Calibri" pitchFamily="34" charset="0"/>
+                <a:ea typeface="Calibri" pitchFamily="34" charset="-122"/>
+                <a:cs typeface="Calibri" pitchFamily="34" charset="-120"/>
+              </a:rPr>
+              <a:t>Non-OEM legacy contribution by FY25 — IISCO, Bhushan Steel, Tata Metaliks, ESL and Metso wound down to zero, on purpose</a:t>
+            </a:r>
+            <a:endParaRPr lang="en-US" sz="930" dirty="0"/>
+          </a:p>
+        </p:txBody>
+      </p:sp>
+      <p:sp>
+        <p:nvSpPr>
+          <p:cNvPr id="10" name="Text 7"/>
+          <p:cNvSpPr/>
+          <p:nvPr/>
+        </p:nvSpPr>
+        <p:spPr>
+          <a:xfrm>
+            <a:off x="6949440" y="3739896"/>
+            <a:ext cx="4693615" cy="320040"/>
+          </a:xfrm>
+          <a:prstGeom prst="rect">
+            <a:avLst/>
+          </a:prstGeom>
+          <a:noFill/>
+          <a:ln/>
+        </p:spPr>
+        <p:txBody>
+          <a:bodyPr wrap="square" lIns="0" tIns="0" rIns="0" bIns="0" rtlCol="0" anchor="ctr"/>
+          <a:lstStyle/>
+          <a:p>
+            <a:pPr indent="0" marL="0">
+              <a:buNone/>
+            </a:pPr>
+            <a:r>
+              <a:rPr lang="en-US" sz="1500" b="1" dirty="0">
+                <a:solidFill>
+                  <a:srgbClr val="1C1F26"/>
+                </a:solidFill>
+                <a:latin typeface="Cambria" pitchFamily="34" charset="0"/>
+                <a:ea typeface="Cambria" pitchFamily="34" charset="-122"/>
+                <a:cs typeface="Cambria" pitchFamily="34" charset="-120"/>
+              </a:rPr>
+              <a:t>₹9.0 → ₹7.5 Cr</a:t>
+            </a:r>
+            <a:endParaRPr lang="en-US" sz="1500" dirty="0"/>
+          </a:p>
+        </p:txBody>
+      </p:sp>
+      <p:sp>
+        <p:nvSpPr>
+          <p:cNvPr id="11" name="Text 8"/>
+          <p:cNvSpPr/>
+          <p:nvPr/>
+        </p:nvSpPr>
+        <p:spPr>
+          <a:xfrm>
+            <a:off x="6949440" y="4069080"/>
+            <a:ext cx="4693615" cy="621792"/>
+          </a:xfrm>
+          <a:prstGeom prst="rect">
+            <a:avLst/>
+          </a:prstGeom>
+          <a:noFill/>
+          <a:ln/>
+        </p:spPr>
+        <p:txBody>
+          <a:bodyPr wrap="square" lIns="0" tIns="0" rIns="0" bIns="0" rtlCol="0" anchor="ctr"/>
+          <a:lstStyle/>
+          <a:p>
+            <a:pPr indent="0" marL="0">
+              <a:lnSpc>
+                <a:spcPct val="110000"/>
+              </a:lnSpc>
+              <a:buNone/>
+            </a:pPr>
+            <a:r>
+              <a:rPr lang="en-US" sz="930" dirty="0">
+                <a:solidFill>
+                  <a:srgbClr val="3A4553"/>
+                </a:solidFill>
+                <a:latin typeface="Calibri" pitchFamily="34" charset="0"/>
+                <a:ea typeface="Calibri" pitchFamily="34" charset="-122"/>
+                <a:cs typeface="Calibri" pitchFamily="34" charset="-120"/>
+              </a:rPr>
+              <a:t>Tega's small-casting orders still declined YoY, FY23-24 to FY24-25</a:t>
+            </a:r>
+            <a:endParaRPr lang="en-US" sz="930" dirty="0"/>
+          </a:p>
+        </p:txBody>
+      </p:sp>
+      <p:sp>
+        <p:nvSpPr>
+          <p:cNvPr id="12" name="Text 9"/>
+          <p:cNvSpPr/>
+          <p:nvPr/>
+        </p:nvSpPr>
+        <p:spPr>
+          <a:xfrm>
+            <a:off x="6949440" y="4764024"/>
+            <a:ext cx="4693615" cy="320040"/>
+          </a:xfrm>
+          <a:prstGeom prst="rect">
+            <a:avLst/>
+          </a:prstGeom>
+          <a:noFill/>
+          <a:ln/>
+        </p:spPr>
+        <p:txBody>
+          <a:bodyPr wrap="square" lIns="0" tIns="0" rIns="0" bIns="0" rtlCol="0" anchor="ctr"/>
+          <a:lstStyle/>
+          <a:p>
+            <a:pPr indent="0" marL="0">
+              <a:buNone/>
+            </a:pPr>
+            <a:r>
+              <a:rPr lang="en-US" sz="1500" b="1" dirty="0">
+                <a:solidFill>
+                  <a:srgbClr val="1C1F26"/>
+                </a:solidFill>
+                <a:latin typeface="Cambria" pitchFamily="34" charset="0"/>
+                <a:ea typeface="Cambria" pitchFamily="34" charset="-122"/>
+                <a:cs typeface="Cambria" pitchFamily="34" charset="-120"/>
+              </a:rPr>
+              <a:t>Thejo Engineering</a:t>
+            </a:r>
+            <a:endParaRPr lang="en-US" sz="1500" dirty="0"/>
+          </a:p>
+        </p:txBody>
+      </p:sp>
+      <p:sp>
+        <p:nvSpPr>
+          <p:cNvPr id="13" name="Text 10"/>
+          <p:cNvSpPr/>
+          <p:nvPr/>
+        </p:nvSpPr>
+        <p:spPr>
+          <a:xfrm>
+            <a:off x="6949440" y="5093208"/>
+            <a:ext cx="4693615" cy="621792"/>
+          </a:xfrm>
+          <a:prstGeom prst="rect">
+            <a:avLst/>
+          </a:prstGeom>
+          <a:noFill/>
+          <a:ln/>
+        </p:spPr>
+        <p:txBody>
+          <a:bodyPr wrap="square" lIns="0" tIns="0" rIns="0" bIns="0" rtlCol="0" anchor="ctr"/>
+          <a:lstStyle/>
+          <a:p>
+            <a:pPr indent="0" marL="0">
+              <a:lnSpc>
+                <a:spcPct val="110000"/>
+              </a:lnSpc>
+              <a:buNone/>
+            </a:pPr>
+            <a:r>
+              <a:rPr lang="en-US" sz="930" dirty="0">
+                <a:solidFill>
+                  <a:srgbClr val="3A4553"/>
+                </a:solidFill>
+                <a:latin typeface="Calibri" pitchFamily="34" charset="0"/>
+                <a:ea typeface="Calibri" pitchFamily="34" charset="-122"/>
+                <a:cs typeface="Calibri" pitchFamily="34" charset="-120"/>
+              </a:rPr>
+              <a:t>NDA/exclusive tie-up alongside Tega — the real second leg, still small next to Tega/Escorts</a:t>
+            </a:r>
+            <a:endParaRPr lang="en-US" sz="930" dirty="0"/>
+          </a:p>
+        </p:txBody>
+      </p:sp>
+      <p:sp>
+        <p:nvSpPr>
+          <p:cNvPr id="14" name="Text 11"/>
+          <p:cNvSpPr/>
+          <p:nvPr/>
+        </p:nvSpPr>
+        <p:spPr>
+          <a:xfrm>
+            <a:off x="6949440" y="5833872"/>
+            <a:ext cx="4693615" cy="502920"/>
+          </a:xfrm>
+          <a:prstGeom prst="rect">
+            <a:avLst/>
+          </a:prstGeom>
+          <a:noFill/>
+          <a:ln/>
+        </p:spPr>
+        <p:txBody>
+          <a:bodyPr wrap="square" lIns="0" tIns="0" rIns="0" bIns="0" rtlCol="0" anchor="ctr"/>
+          <a:lstStyle/>
+          <a:p>
+            <a:pPr indent="0" marL="0">
+              <a:lnSpc>
+                <a:spcPct val="110000"/>
+              </a:lnSpc>
+              <a:buNone/>
+            </a:pPr>
+            <a:r>
+              <a:rPr lang="en-US" sz="750" i="1" dirty="0">
+                <a:solidFill>
+                  <a:srgbClr val="6B7684"/>
+                </a:solidFill>
+                <a:latin typeface="Calibri" pitchFamily="34" charset="0"/>
+                <a:ea typeface="Calibri" pitchFamily="34" charset="-122"/>
+                <a:cs typeface="Calibri" pitchFamily="34" charset="-120"/>
+              </a:rPr>
+              <a:t>Panel figures: internal "Net Contribution" analysis (FY22 vs. FY26 projected) — a different basis from the Tega-share chart at left; both point the same direction.</a:t>
+            </a:r>
+            <a:endParaRPr lang="en-US" sz="750" dirty="0"/>
+          </a:p>
+        </p:txBody>
+      </p:sp>
+      <p:sp>
+        <p:nvSpPr>
+          <p:cNvPr id="15" name="Text 12"/>
+          <p:cNvSpPr/>
+          <p:nvPr/>
+        </p:nvSpPr>
+        <p:spPr>
+          <a:xfrm>
+            <a:off x="548640" y="6473952"/>
+            <a:ext cx="11094415" cy="274320"/>
+          </a:xfrm>
+          <a:prstGeom prst="rect">
+            <a:avLst/>
+          </a:prstGeom>
+          <a:noFill/>
+          <a:ln/>
+        </p:spPr>
+        <p:txBody>
+          <a:bodyPr wrap="square" lIns="0" tIns="0" rIns="0" bIns="0" rtlCol="0" anchor="ctr"/>
+          <a:lstStyle/>
+          <a:p>
+            <a:pPr algn="l" indent="0" marL="0">
+              <a:buNone/>
+            </a:pPr>
+            <a:r>
+              <a:rPr lang="en-US" sz="800" dirty="0">
+                <a:solidFill>
+                  <a:srgbClr val="9AA2AD"/>
+                </a:solidFill>
+                <a:latin typeface="Calibri" pitchFamily="34" charset="0"/>
+                <a:ea typeface="Calibri" pitchFamily="34" charset="-122"/>
+                <a:cs typeface="Calibri" pitchFamily="34" charset="-120"/>
+              </a:rPr>
+              <a:t>DATRE CORPORATION LIMITED  |  CONFIDENTIAL — PREPARED FOR INVESTOR DISCUSSION</a:t>
+            </a:r>
+            <a:endParaRPr lang="en-US" sz="800" dirty="0"/>
+          </a:p>
+        </p:txBody>
+      </p:sp>
+      <p:sp>
+        <p:nvSpPr>
+          <p:cNvPr id="16" name="Text 13"/>
+          <p:cNvSpPr/>
+          <p:nvPr/>
+        </p:nvSpPr>
+        <p:spPr>
+          <a:xfrm>
+            <a:off x="11277295" y="6473952"/>
+            <a:ext cx="457200" cy="274320"/>
+          </a:xfrm>
+          <a:prstGeom prst="rect">
+            <a:avLst/>
+          </a:prstGeom>
+          <a:noFill/>
+          <a:ln/>
+        </p:spPr>
+        <p:txBody>
+          <a:bodyPr wrap="square" lIns="0" tIns="0" rIns="0" bIns="0" rtlCol="0" anchor="ctr"/>
+          <a:lstStyle/>
+          <a:p>
+            <a:pPr algn="r" indent="0" marL="0">
+              <a:buNone/>
+            </a:pPr>
+            <a:r>
+              <a:rPr lang="en-US" sz="800" dirty="0">
+                <a:solidFill>
+                  <a:srgbClr val="9AA2AD"/>
+                </a:solidFill>
+                <a:latin typeface="Calibri" pitchFamily="34" charset="0"/>
+                <a:ea typeface="Calibri" pitchFamily="34" charset="-122"/>
+                <a:cs typeface="Calibri" pitchFamily="34" charset="-120"/>
+              </a:rPr>
+              <a:t>18</a:t>
+            </a:r>
+            <a:endParaRPr lang="en-US" sz="800" dirty="0"/>
+          </a:p>
+        </p:txBody>
+      </p:sp>
+    </p:spTree>
+  </p:cSld>
+  <p:clrMapOvr>
+    <a:masterClrMapping/>
+  </p:clrMapOvr>
+</p:sld>
+</file>
+
+<file path=ppt/slides/slide19.xml><?xml version="1.0" encoding="utf-8"?>
+<p:sld xmlns:a="http://schemas.openxmlformats.org/drawingml/2006/main" xmlns:r="http://schemas.openxmlformats.org/officeDocument/2006/relationships" xmlns:p="http://schemas.openxmlformats.org/presentationml/2006/main">
+  <p:cSld name="Slide 19">
+    <p:bg>
+      <p:bgPr>
+        <a:solidFill>
+          <a:srgbClr val="FFFFFF"/>
+        </a:solidFill>
+      </p:bgPr>
+    </p:bg>
+    <p:spTree>
+      <p:nvGrpSpPr>
+        <p:cNvPr id="1" name=""/>
+        <p:cNvGrpSpPr/>
+        <p:nvPr/>
+      </p:nvGrpSpPr>
+      <p:grpSpPr>
+        <a:xfrm>
+          <a:off x="0" y="0"/>
+          <a:ext cx="0" cy="0"/>
+          <a:chOff x="0" y="0"/>
+          <a:chExt cx="0" cy="0"/>
+        </a:xfrm>
+      </p:grpSpPr>
+      <p:sp>
+        <p:nvSpPr>
+          <p:cNvPr id="2" name="Text 0"/>
+          <p:cNvSpPr/>
+          <p:nvPr/>
+        </p:nvSpPr>
+        <p:spPr>
+          <a:xfrm>
+            <a:off x="548640" y="457200"/>
+            <a:ext cx="4572000" cy="274320"/>
+          </a:xfrm>
+          <a:prstGeom prst="rect">
+            <a:avLst/>
+          </a:prstGeom>
+          <a:noFill/>
+          <a:ln/>
+        </p:spPr>
+        <p:txBody>
+          <a:bodyPr wrap="square" lIns="0" tIns="0" rIns="0" bIns="0" rtlCol="0" anchor="ctr"/>
+          <a:lstStyle/>
+          <a:p>
+            <a:pPr indent="0" marL="0">
+              <a:buNone/>
+            </a:pPr>
+            <a:r>
+              <a:rPr lang="en-US" sz="1100" b="1" spc="200" kern="0" dirty="0">
+                <a:solidFill>
+                  <a:srgbClr val="D9622B"/>
+                </a:solidFill>
+                <a:latin typeface="Calibri" pitchFamily="34" charset="0"/>
+                <a:ea typeface="Calibri" pitchFamily="34" charset="-122"/>
+                <a:cs typeface="Calibri" pitchFamily="34" charset="-120"/>
+              </a:rPr>
+              <a:t>CRITICAL ANALYSIS — OPERATIONS</a:t>
+            </a:r>
+            <a:endParaRPr lang="en-US" sz="1100" dirty="0"/>
+          </a:p>
+        </p:txBody>
+      </p:sp>
+      <p:sp>
+        <p:nvSpPr>
+          <p:cNvPr id="3" name="Text 1"/>
+          <p:cNvSpPr/>
+          <p:nvPr/>
+        </p:nvSpPr>
+        <p:spPr>
+          <a:xfrm>
+            <a:off x="548640" y="841248"/>
+            <a:ext cx="11094415" cy="685800"/>
+          </a:xfrm>
+          <a:prstGeom prst="rect">
+            <a:avLst/>
+          </a:prstGeom>
+          <a:noFill/>
+          <a:ln/>
+        </p:spPr>
+        <p:txBody>
+          <a:bodyPr wrap="square" lIns="0" tIns="0" rIns="0" bIns="0" rtlCol="0" anchor="ctr"/>
+          <a:lstStyle/>
+          <a:p>
+            <a:pPr algn="l" indent="0" marL="0">
+              <a:buNone/>
+            </a:pPr>
+            <a:r>
+              <a:rPr lang="en-US" sz="3000" b="1" dirty="0">
+                <a:solidFill>
+                  <a:srgbClr val="1C1F26"/>
+                </a:solidFill>
+                <a:latin typeface="Cambria" pitchFamily="34" charset="0"/>
+                <a:ea typeface="Cambria" pitchFamily="34" charset="-122"/>
+                <a:cs typeface="Cambria" pitchFamily="34" charset="-120"/>
+              </a:rPr>
+              <a:t>Rejection rate has trended the wrong way for four periods</a:t>
+            </a:r>
+            <a:endParaRPr lang="en-US" sz="3000" dirty="0"/>
+          </a:p>
+        </p:txBody>
+      </p:sp>
+      <p:graphicFrame>
+        <p:nvGraphicFramePr>
+          <p:cNvPr id="4" name="Chart 0" descr=""/>
+          <p:cNvGraphicFramePr/>
+          <p:nvPr/>
+        </p:nvGraphicFramePr>
+        <p:xfrm>
+          <a:off x="548640" y="1737360"/>
+          <a:ext cx="7315200" cy="3566160"/>
+        </p:xfrm>
+        <a:graphic xmlns:a="http://schemas.openxmlformats.org/drawingml/2006/main">
+          <a:graphicData uri="http://schemas.openxmlformats.org/drawingml/2006/chart">
+            <c:chart xmlns:c="http://schemas.openxmlformats.org/drawingml/2006/chart" r:id="rId1"/>
+          </a:graphicData>
+        </a:graphic>
+      </p:graphicFrame>
+      <p:sp>
+        <p:nvSpPr>
+          <p:cNvPr id="5" name="Text 2"/>
+          <p:cNvSpPr/>
+          <p:nvPr/>
+        </p:nvSpPr>
+        <p:spPr>
+          <a:xfrm>
+            <a:off x="548640" y="5394960"/>
+            <a:ext cx="7315200" cy="365760"/>
+          </a:xfrm>
+          <a:prstGeom prst="rect">
+            <a:avLst/>
+          </a:prstGeom>
+          <a:noFill/>
+          <a:ln/>
+        </p:spPr>
+        <p:txBody>
+          <a:bodyPr wrap="square" lIns="0" tIns="0" rIns="0" bIns="0" rtlCol="0" anchor="ctr"/>
+          <a:lstStyle/>
+          <a:p>
+            <a:pPr indent="0" marL="0">
+              <a:buNone/>
+            </a:pPr>
+            <a:r>
+              <a:rPr lang="en-US" sz="800" i="1" dirty="0">
+                <a:solidFill>
+                  <a:srgbClr val="6B7684"/>
+                </a:solidFill>
+                <a:latin typeface="Calibri" pitchFamily="34" charset="0"/>
+                <a:ea typeface="Calibri" pitchFamily="34" charset="-122"/>
+                <a:cs typeface="Calibri" pitchFamily="34" charset="-120"/>
+              </a:rPr>
+              <a:t>Source: management MIS, production &amp; rejection registers, FY22-23 through FY26-27 (4 months).</a:t>
+            </a:r>
+            <a:endParaRPr lang="en-US" sz="800" dirty="0"/>
+          </a:p>
+        </p:txBody>
+      </p:sp>
+      <p:sp>
+        <p:nvSpPr>
+          <p:cNvPr id="6" name="Shape 3"/>
+          <p:cNvSpPr/>
+          <p:nvPr/>
+        </p:nvSpPr>
+        <p:spPr>
+          <a:xfrm>
+            <a:off x="8138160" y="1737360"/>
+            <a:ext cx="3504895" cy="4023360"/>
+          </a:xfrm>
+          <a:prstGeom prst="roundRect">
+            <a:avLst>
+              <a:gd name="adj" fmla="val 2087"/>
+            </a:avLst>
+          </a:prstGeom>
+          <a:solidFill>
+            <a:srgbClr val="F4F5F7"/>
+          </a:solidFill>
+          <a:ln/>
+        </p:spPr>
+      </p:sp>
+      <p:sp>
+        <p:nvSpPr>
+          <p:cNvPr id="7" name="Text 4"/>
+          <p:cNvSpPr/>
+          <p:nvPr/>
+        </p:nvSpPr>
+        <p:spPr>
+          <a:xfrm>
+            <a:off x="8366760" y="1920240"/>
+            <a:ext cx="3047695" cy="274320"/>
+          </a:xfrm>
+          <a:prstGeom prst="rect">
+            <a:avLst/>
+          </a:prstGeom>
+          <a:noFill/>
+          <a:ln/>
+        </p:spPr>
+        <p:txBody>
+          <a:bodyPr wrap="square" lIns="0" tIns="0" rIns="0" bIns="0" rtlCol="0" anchor="ctr"/>
+          <a:lstStyle/>
+          <a:p>
+            <a:pPr indent="0" marL="0">
+              <a:buNone/>
+            </a:pPr>
+            <a:r>
+              <a:rPr lang="en-US" sz="1000" b="1" spc="100" kern="0" dirty="0">
+                <a:solidFill>
+                  <a:srgbClr val="D9622B"/>
+                </a:solidFill>
+                <a:latin typeface="Calibri" pitchFamily="34" charset="0"/>
+                <a:ea typeface="Calibri" pitchFamily="34" charset="-122"/>
+                <a:cs typeface="Calibri" pitchFamily="34" charset="-120"/>
+              </a:rPr>
+              <a:t>ALSO RISING</a:t>
+            </a:r>
+            <a:endParaRPr lang="en-US" sz="1000" dirty="0"/>
+          </a:p>
+        </p:txBody>
+      </p:sp>
+      <p:sp>
+        <p:nvSpPr>
+          <p:cNvPr id="8" name="Text 5"/>
+          <p:cNvSpPr/>
+          <p:nvPr/>
+        </p:nvSpPr>
+        <p:spPr>
+          <a:xfrm>
+            <a:off x="8366760" y="2212848"/>
+            <a:ext cx="3047695" cy="274320"/>
+          </a:xfrm>
+          <a:prstGeom prst="rect">
+            <a:avLst/>
+          </a:prstGeom>
+          <a:noFill/>
+          <a:ln/>
+        </p:spPr>
+        <p:txBody>
+          <a:bodyPr wrap="square" lIns="0" tIns="0" rIns="0" bIns="0" rtlCol="0" anchor="ctr"/>
+          <a:lstStyle/>
+          <a:p>
+            <a:pPr indent="0" marL="0">
+              <a:buNone/>
+            </a:pPr>
+            <a:r>
+              <a:rPr lang="en-US" sz="1100" b="1" dirty="0">
+                <a:solidFill>
+                  <a:srgbClr val="1C1F26"/>
+                </a:solidFill>
+                <a:latin typeface="Calibri" pitchFamily="34" charset="0"/>
+                <a:ea typeface="Calibri" pitchFamily="34" charset="-122"/>
+                <a:cs typeface="Calibri" pitchFamily="34" charset="-120"/>
+              </a:rPr>
+              <a:t>Fixed costs as % of net sales</a:t>
+            </a:r>
+            <a:endParaRPr lang="en-US" sz="1100" dirty="0"/>
+          </a:p>
+        </p:txBody>
+      </p:sp>
+      <p:sp>
+        <p:nvSpPr>
+          <p:cNvPr id="9" name="Text 6"/>
+          <p:cNvSpPr/>
+          <p:nvPr/>
+        </p:nvSpPr>
+        <p:spPr>
+          <a:xfrm>
+            <a:off x="8366760" y="2487168"/>
+            <a:ext cx="3047695" cy="365760"/>
+          </a:xfrm>
+          <a:prstGeom prst="rect">
+            <a:avLst/>
+          </a:prstGeom>
+          <a:noFill/>
+          <a:ln/>
+        </p:spPr>
+        <p:txBody>
+          <a:bodyPr wrap="square" lIns="0" tIns="0" rIns="0" bIns="0" rtlCol="0" anchor="ctr"/>
+          <a:lstStyle/>
+          <a:p>
+            <a:pPr indent="0" marL="0">
+              <a:buNone/>
+            </a:pPr>
+            <a:r>
+              <a:rPr lang="en-US" sz="1700" b="1" dirty="0">
+                <a:solidFill>
+                  <a:srgbClr val="B8453F"/>
+                </a:solidFill>
+                <a:latin typeface="Cambria" pitchFamily="34" charset="0"/>
+                <a:ea typeface="Cambria" pitchFamily="34" charset="-122"/>
+                <a:cs typeface="Cambria" pitchFamily="34" charset="-120"/>
+              </a:rPr>
+              <a:t>16.06%  →  17.09%</a:t>
+            </a:r>
+            <a:endParaRPr lang="en-US" sz="1700" dirty="0"/>
+          </a:p>
+        </p:txBody>
+      </p:sp>
+      <p:sp>
+        <p:nvSpPr>
+          <p:cNvPr id="10" name="Text 7"/>
+          <p:cNvSpPr/>
+          <p:nvPr/>
+        </p:nvSpPr>
+        <p:spPr>
+          <a:xfrm>
+            <a:off x="8366760" y="2880360"/>
+            <a:ext cx="3047695" cy="457200"/>
+          </a:xfrm>
+          <a:prstGeom prst="rect">
+            <a:avLst/>
+          </a:prstGeom>
+          <a:noFill/>
+          <a:ln/>
+        </p:spPr>
+        <p:txBody>
+          <a:bodyPr wrap="square" lIns="0" tIns="0" rIns="0" bIns="0" rtlCol="0" anchor="ctr"/>
+          <a:lstStyle/>
+          <a:p>
+            <a:pPr indent="0" marL="0">
+              <a:lnSpc>
+                <a:spcPct val="110000"/>
+              </a:lnSpc>
+              <a:buNone/>
+            </a:pPr>
+            <a:r>
+              <a:rPr lang="en-US" sz="930" dirty="0">
+                <a:solidFill>
+                  <a:srgbClr val="3A4553"/>
+                </a:solidFill>
+                <a:latin typeface="Calibri" pitchFamily="34" charset="0"/>
+                <a:ea typeface="Calibri" pitchFamily="34" charset="-122"/>
+                <a:cs typeface="Calibri" pitchFamily="34" charset="-120"/>
+              </a:rPr>
+              <a:t>FY23-24 to FY24-25 — rose even in the year sales dipped.</a:t>
+            </a:r>
+            <a:endParaRPr lang="en-US" sz="930" dirty="0"/>
+          </a:p>
+        </p:txBody>
+      </p:sp>
+      <p:sp>
+        <p:nvSpPr>
+          <p:cNvPr id="11" name="Shape 8"/>
+          <p:cNvSpPr/>
+          <p:nvPr/>
+        </p:nvSpPr>
+        <p:spPr>
+          <a:xfrm>
+            <a:off x="8366760" y="3520440"/>
+            <a:ext cx="3047695" cy="0"/>
+          </a:xfrm>
+          <a:prstGeom prst="line">
+            <a:avLst/>
+          </a:prstGeom>
+          <a:noFill/>
+          <a:ln w="12700">
+            <a:solidFill>
+              <a:srgbClr val="E1E4E9"/>
+            </a:solidFill>
+            <a:prstDash val="solid"/>
+          </a:ln>
+        </p:spPr>
+      </p:sp>
+      <p:sp>
+        <p:nvSpPr>
+          <p:cNvPr id="12" name="Text 9"/>
+          <p:cNvSpPr/>
+          <p:nvPr/>
+        </p:nvSpPr>
+        <p:spPr>
+          <a:xfrm>
+            <a:off x="8366760" y="3703320"/>
+            <a:ext cx="3047695" cy="1920240"/>
+          </a:xfrm>
+          <a:prstGeom prst="rect">
+            <a:avLst/>
+          </a:prstGeom>
+          <a:noFill/>
+          <a:ln/>
+        </p:spPr>
+        <p:txBody>
+          <a:bodyPr wrap="square" lIns="0" tIns="0" rIns="0" bIns="0" rtlCol="0" anchor="ctr"/>
+          <a:lstStyle/>
+          <a:p>
+            <a:pPr indent="0" marL="0">
+              <a:lnSpc>
+                <a:spcPct val="120000"/>
+              </a:lnSpc>
+              <a:buNone/>
+            </a:pPr>
+            <a:r>
+              <a:rPr lang="en-US" sz="1000" dirty="0">
+                <a:solidFill>
+                  <a:srgbClr val="1C1F26"/>
+                </a:solidFill>
+                <a:latin typeface="Calibri" pitchFamily="34" charset="0"/>
+                <a:ea typeface="Calibri" pitchFamily="34" charset="-122"/>
+                <a:cs typeface="Calibri" pitchFamily="34" charset="-120"/>
+              </a:rPr>
+              <a:t>This is not a one-off spike — it is the same quality-control theme recurring across three fiscal years despite a well-equipped testing lab (slide 8). It belongs on the same diligence list as the customer-concentration risk.</a:t>
+            </a:r>
+            <a:endParaRPr lang="en-US" sz="1000" dirty="0"/>
+          </a:p>
+        </p:txBody>
+      </p:sp>
+      <p:sp>
+        <p:nvSpPr>
+          <p:cNvPr id="13" name="Text 10"/>
+          <p:cNvSpPr/>
+          <p:nvPr/>
+        </p:nvSpPr>
+        <p:spPr>
+          <a:xfrm>
+            <a:off x="548640" y="6473952"/>
+            <a:ext cx="11094415" cy="274320"/>
+          </a:xfrm>
+          <a:prstGeom prst="rect">
+            <a:avLst/>
+          </a:prstGeom>
+          <a:noFill/>
+          <a:ln/>
+        </p:spPr>
+        <p:txBody>
+          <a:bodyPr wrap="square" lIns="0" tIns="0" rIns="0" bIns="0" rtlCol="0" anchor="ctr"/>
+          <a:lstStyle/>
+          <a:p>
+            <a:pPr algn="l" indent="0" marL="0">
+              <a:buNone/>
+            </a:pPr>
+            <a:r>
+              <a:rPr lang="en-US" sz="800" dirty="0">
+                <a:solidFill>
+                  <a:srgbClr val="9AA2AD"/>
+                </a:solidFill>
+                <a:latin typeface="Calibri" pitchFamily="34" charset="0"/>
+                <a:ea typeface="Calibri" pitchFamily="34" charset="-122"/>
+                <a:cs typeface="Calibri" pitchFamily="34" charset="-120"/>
+              </a:rPr>
+              <a:t>DATRE CORPORATION LIMITED  |  CONFIDENTIAL — PREPARED FOR INVESTOR DISCUSSION</a:t>
+            </a:r>
+            <a:endParaRPr lang="en-US" sz="800" dirty="0"/>
+          </a:p>
+        </p:txBody>
+      </p:sp>
+      <p:sp>
+        <p:nvSpPr>
+          <p:cNvPr id="14" name="Text 11"/>
+          <p:cNvSpPr/>
+          <p:nvPr/>
+        </p:nvSpPr>
+        <p:spPr>
+          <a:xfrm>
+            <a:off x="11277295" y="6473952"/>
+            <a:ext cx="457200" cy="274320"/>
+          </a:xfrm>
+          <a:prstGeom prst="rect">
+            <a:avLst/>
+          </a:prstGeom>
+          <a:noFill/>
+          <a:ln/>
+        </p:spPr>
+        <p:txBody>
+          <a:bodyPr wrap="square" lIns="0" tIns="0" rIns="0" bIns="0" rtlCol="0" anchor="ctr"/>
+          <a:lstStyle/>
+          <a:p>
+            <a:pPr algn="r" indent="0" marL="0">
+              <a:buNone/>
+            </a:pPr>
+            <a:r>
+              <a:rPr lang="en-US" sz="800" dirty="0">
+                <a:solidFill>
+                  <a:srgbClr val="9AA2AD"/>
+                </a:solidFill>
+                <a:latin typeface="Calibri" pitchFamily="34" charset="0"/>
+                <a:ea typeface="Calibri" pitchFamily="34" charset="-122"/>
+                <a:cs typeface="Calibri" pitchFamily="34" charset="-120"/>
+              </a:rPr>
+              <a:t>19</a:t>
+            </a:r>
+            <a:endParaRPr lang="en-US" sz="800" dirty="0"/>
+          </a:p>
+        </p:txBody>
+      </p:sp>
+    </p:spTree>
+  </p:cSld>
+  <p:clrMapOvr>
+    <a:masterClrMapping/>
+  </p:clrMapOvr>
+</p:sld>
+</file>
+
+<file path=ppt/slides/slide2.xml><?xml version="1.0" encoding="utf-8"?>
+<p:sld xmlns:a="http://schemas.openxmlformats.org/drawingml/2006/main" xmlns:r="http://schemas.openxmlformats.org/officeDocument/2006/relationships" xmlns:p="http://schemas.openxmlformats.org/presentationml/2006/main">
+  <p:cSld name="Slide 2">
+    <p:bg>
+      <p:bgPr>
+        <a:solidFill>
+          <a:srgbClr val="FFFFFF"/>
+        </a:solidFill>
+      </p:bgPr>
+    </p:bg>
+    <p:spTree>
+      <p:nvGrpSpPr>
+        <p:cNvPr id="1" name=""/>
+        <p:cNvGrpSpPr/>
+        <p:nvPr/>
+      </p:nvGrpSpPr>
+      <p:grpSpPr>
+        <a:xfrm>
+          <a:off x="0" y="0"/>
+          <a:ext cx="0" cy="0"/>
+          <a:chOff x="0" y="0"/>
+          <a:chExt cx="0" cy="0"/>
+        </a:xfrm>
+      </p:grpSpPr>
+      <p:sp>
+        <p:nvSpPr>
+          <p:cNvPr id="2" name="Text 0"/>
+          <p:cNvSpPr/>
+          <p:nvPr/>
+        </p:nvSpPr>
+        <p:spPr>
+          <a:xfrm>
+            <a:off x="548640" y="457200"/>
+            <a:ext cx="4572000" cy="274320"/>
+          </a:xfrm>
+          <a:prstGeom prst="rect">
+            <a:avLst/>
+          </a:prstGeom>
+          <a:noFill/>
+          <a:ln/>
+        </p:spPr>
+        <p:txBody>
+          <a:bodyPr wrap="square" lIns="0" tIns="0" rIns="0" bIns="0" rtlCol="0" anchor="ctr"/>
+          <a:lstStyle/>
+          <a:p>
+            <a:pPr indent="0" marL="0">
+              <a:buNone/>
+            </a:pPr>
+            <a:r>
+              <a:rPr lang="en-US" sz="1100" b="1" spc="200" kern="0" dirty="0">
+                <a:solidFill>
+                  <a:srgbClr val="D9622B"/>
+                </a:solidFill>
+                <a:latin typeface="Calibri" pitchFamily="34" charset="0"/>
+                <a:ea typeface="Calibri" pitchFamily="34" charset="-122"/>
+                <a:cs typeface="Calibri" pitchFamily="34" charset="-120"/>
+              </a:rPr>
+              <a:t>EXECUTIVE SUMMARY</a:t>
+            </a:r>
+            <a:endParaRPr lang="en-US" sz="1100" dirty="0"/>
+          </a:p>
+        </p:txBody>
+      </p:sp>
+      <p:sp>
+        <p:nvSpPr>
+          <p:cNvPr id="3" name="Text 1"/>
+          <p:cNvSpPr/>
+          <p:nvPr/>
+        </p:nvSpPr>
+        <p:spPr>
+          <a:xfrm>
+            <a:off x="548640" y="841248"/>
+            <a:ext cx="11094415" cy="685800"/>
+          </a:xfrm>
+          <a:prstGeom prst="rect">
+            <a:avLst/>
+          </a:prstGeom>
+          <a:noFill/>
+          <a:ln/>
+        </p:spPr>
+        <p:txBody>
+          <a:bodyPr wrap="square" lIns="0" tIns="0" rIns="0" bIns="0" rtlCol="0" anchor="ctr"/>
+          <a:lstStyle/>
+          <a:p>
+            <a:pPr algn="l" indent="0" marL="0">
+              <a:buNone/>
+            </a:pPr>
+            <a:r>
+              <a:rPr lang="en-US" sz="3000" b="1" dirty="0">
+                <a:solidFill>
+                  <a:srgbClr val="1C1F26"/>
+                </a:solidFill>
+                <a:latin typeface="Cambria" pitchFamily="34" charset="0"/>
+                <a:ea typeface="Cambria" pitchFamily="34" charset="-122"/>
+                <a:cs typeface="Cambria" pitchFamily="34" charset="-120"/>
+              </a:rPr>
+              <a:t>A paradigm Datre built deliberately — now running harder on an aging plant</a:t>
+            </a:r>
+            <a:endParaRPr lang="en-US" sz="3000" dirty="0"/>
+          </a:p>
+        </p:txBody>
+      </p:sp>
+      <p:sp>
+        <p:nvSpPr>
+          <p:cNvPr id="4" name="Shape 2"/>
+          <p:cNvSpPr/>
+          <p:nvPr/>
+        </p:nvSpPr>
+        <p:spPr>
+          <a:xfrm>
+            <a:off x="548640" y="1783080"/>
+            <a:ext cx="2567864" cy="1600200"/>
+          </a:xfrm>
+          <a:prstGeom prst="roundRect">
+            <a:avLst>
+              <a:gd name="adj" fmla="val 4571"/>
+            </a:avLst>
+          </a:prstGeom>
+          <a:solidFill>
+            <a:srgbClr val="F4F5F7"/>
+          </a:solidFill>
+          <a:ln/>
+          <a:effectLst>
+            <a:outerShdw sx="100000" sy="100000" kx="0" ky="0" algn="bl" rotWithShape="0" blurRad="76200" dist="25400" dir="5400000">
+              <a:srgbClr val="1C1F26">
+                <a:alpha val="10000"/>
+              </a:srgbClr>
+            </a:outerShdw>
+          </a:effectLst>
+        </p:spPr>
+      </p:sp>
+      <p:sp>
+        <p:nvSpPr>
+          <p:cNvPr id="5" name="Text 3"/>
+          <p:cNvSpPr/>
+          <p:nvPr/>
+        </p:nvSpPr>
+        <p:spPr>
+          <a:xfrm>
+            <a:off x="713232" y="1920240"/>
+            <a:ext cx="2238680" cy="566928"/>
+          </a:xfrm>
+          <a:prstGeom prst="rect">
+            <a:avLst/>
+          </a:prstGeom>
+          <a:noFill/>
+          <a:ln/>
+        </p:spPr>
+        <p:txBody>
+          <a:bodyPr wrap="square" lIns="0" tIns="0" rIns="0" bIns="0" rtlCol="0" anchor="ctr"/>
+          <a:lstStyle/>
+          <a:p>
+            <a:pPr indent="0" marL="0">
+              <a:buNone/>
+            </a:pPr>
+            <a:r>
+              <a:rPr lang="en-US" sz="2700" b="1" dirty="0">
+                <a:solidFill>
+                  <a:srgbClr val="3F8F5F"/>
+                </a:solidFill>
+                <a:latin typeface="Cambria" pitchFamily="34" charset="0"/>
+                <a:ea typeface="Cambria" pitchFamily="34" charset="-122"/>
+                <a:cs typeface="Cambria" pitchFamily="34" charset="-120"/>
+              </a:rPr>
+              <a:t>₹25.9 Cr</a:t>
+            </a:r>
+            <a:endParaRPr lang="en-US" sz="2700" dirty="0"/>
+          </a:p>
+        </p:txBody>
+      </p:sp>
+      <p:sp>
+        <p:nvSpPr>
+          <p:cNvPr id="6" name="Text 4"/>
+          <p:cNvSpPr/>
+          <p:nvPr/>
+        </p:nvSpPr>
+        <p:spPr>
+          <a:xfrm>
+            <a:off x="713232" y="2487168"/>
+            <a:ext cx="2238680" cy="411480"/>
+          </a:xfrm>
+          <a:prstGeom prst="rect">
+            <a:avLst/>
+          </a:prstGeom>
+          <a:noFill/>
+          <a:ln/>
+        </p:spPr>
+        <p:txBody>
+          <a:bodyPr wrap="square" lIns="0" tIns="0" rIns="0" bIns="0" rtlCol="0" anchor="ctr"/>
+          <a:lstStyle/>
+          <a:p>
+            <a:pPr indent="0" marL="0">
+              <a:buNone/>
+            </a:pPr>
+            <a:r>
+              <a:rPr lang="en-US" sz="1150" b="1" dirty="0">
+                <a:solidFill>
+                  <a:srgbClr val="1C1F26"/>
+                </a:solidFill>
+                <a:latin typeface="Calibri" pitchFamily="34" charset="0"/>
+                <a:ea typeface="Calibri" pitchFamily="34" charset="-122"/>
+                <a:cs typeface="Calibri" pitchFamily="34" charset="-120"/>
+              </a:rPr>
+              <a:t>FY25-26 revenue</a:t>
+            </a:r>
+            <a:endParaRPr lang="en-US" sz="1150" dirty="0"/>
+          </a:p>
+        </p:txBody>
+      </p:sp>
+      <p:sp>
+        <p:nvSpPr>
+          <p:cNvPr id="7" name="Text 5"/>
+          <p:cNvSpPr/>
+          <p:nvPr/>
+        </p:nvSpPr>
+        <p:spPr>
+          <a:xfrm>
+            <a:off x="713232" y="2871216"/>
+            <a:ext cx="2238680" cy="457200"/>
+          </a:xfrm>
+          <a:prstGeom prst="rect">
+            <a:avLst/>
+          </a:prstGeom>
+          <a:noFill/>
+          <a:ln/>
+        </p:spPr>
+        <p:txBody>
+          <a:bodyPr wrap="square" lIns="0" tIns="0" rIns="0" bIns="0" rtlCol="0" anchor="ctr"/>
+          <a:lstStyle/>
+          <a:p>
+            <a:pPr indent="0" marL="0">
+              <a:buNone/>
+            </a:pPr>
+            <a:r>
+              <a:rPr lang="en-US" sz="950" dirty="0">
+                <a:solidFill>
+                  <a:srgbClr val="6B7684"/>
+                </a:solidFill>
+                <a:latin typeface="Calibri" pitchFamily="34" charset="0"/>
+                <a:ea typeface="Calibri" pitchFamily="34" charset="-122"/>
+                <a:cs typeface="Calibri" pitchFamily="34" charset="-120"/>
+              </a:rPr>
+              <a:t>Record year, +26% YoY — also a record ₹1.82 Cr profit</a:t>
+            </a:r>
+            <a:endParaRPr lang="en-US" sz="950" dirty="0"/>
+          </a:p>
+        </p:txBody>
+      </p:sp>
+      <p:sp>
+        <p:nvSpPr>
+          <p:cNvPr id="8" name="Shape 6"/>
+          <p:cNvSpPr/>
+          <p:nvPr/>
+        </p:nvSpPr>
+        <p:spPr>
+          <a:xfrm>
+            <a:off x="3390824" y="1783080"/>
+            <a:ext cx="2567864" cy="1600200"/>
+          </a:xfrm>
+          <a:prstGeom prst="roundRect">
+            <a:avLst>
+              <a:gd name="adj" fmla="val 4571"/>
+            </a:avLst>
+          </a:prstGeom>
+          <a:solidFill>
+            <a:srgbClr val="F4F5F7"/>
+          </a:solidFill>
+          <a:ln/>
+          <a:effectLst>
+            <a:outerShdw sx="100000" sy="100000" kx="0" ky="0" algn="bl" rotWithShape="0" blurRad="76200" dist="25400" dir="5400000">
+              <a:srgbClr val="1C1F26">
+                <a:alpha val="10000"/>
+              </a:srgbClr>
+            </a:outerShdw>
+          </a:effectLst>
+        </p:spPr>
+      </p:sp>
+      <p:sp>
+        <p:nvSpPr>
+          <p:cNvPr id="9" name="Text 7"/>
+          <p:cNvSpPr/>
+          <p:nvPr/>
+        </p:nvSpPr>
+        <p:spPr>
+          <a:xfrm>
+            <a:off x="3555416" y="1920240"/>
+            <a:ext cx="2238680" cy="566928"/>
+          </a:xfrm>
+          <a:prstGeom prst="rect">
+            <a:avLst/>
+          </a:prstGeom>
+          <a:noFill/>
+          <a:ln/>
+        </p:spPr>
+        <p:txBody>
+          <a:bodyPr wrap="square" lIns="0" tIns="0" rIns="0" bIns="0" rtlCol="0" anchor="ctr"/>
+          <a:lstStyle/>
+          <a:p>
+            <a:pPr indent="0" marL="0">
+              <a:buNone/>
+            </a:pPr>
+            <a:r>
+              <a:rPr lang="en-US" sz="2700" b="1" dirty="0">
+                <a:solidFill>
+                  <a:srgbClr val="3F8F5F"/>
+                </a:solidFill>
+                <a:latin typeface="Cambria" pitchFamily="34" charset="0"/>
+                <a:ea typeface="Cambria" pitchFamily="34" charset="-122"/>
+                <a:cs typeface="Cambria" pitchFamily="34" charset="-120"/>
+              </a:rPr>
+              <a:t>2.9x</a:t>
+            </a:r>
+            <a:endParaRPr lang="en-US" sz="2700" dirty="0"/>
+          </a:p>
+        </p:txBody>
+      </p:sp>
+      <p:sp>
+        <p:nvSpPr>
+          <p:cNvPr id="10" name="Text 8"/>
+          <p:cNvSpPr/>
+          <p:nvPr/>
+        </p:nvSpPr>
+        <p:spPr>
+          <a:xfrm>
+            <a:off x="3555416" y="2487168"/>
+            <a:ext cx="2238680" cy="411480"/>
+          </a:xfrm>
+          <a:prstGeom prst="rect">
+            <a:avLst/>
+          </a:prstGeom>
+          <a:noFill/>
+          <a:ln/>
+        </p:spPr>
+        <p:txBody>
+          <a:bodyPr wrap="square" lIns="0" tIns="0" rIns="0" bIns="0" rtlCol="0" anchor="ctr"/>
+          <a:lstStyle/>
+          <a:p>
+            <a:pPr indent="0" marL="0">
+              <a:buNone/>
+            </a:pPr>
+            <a:r>
+              <a:rPr lang="en-US" sz="1150" b="1" dirty="0">
+                <a:solidFill>
+                  <a:srgbClr val="1C1F26"/>
+                </a:solidFill>
+                <a:latin typeface="Calibri" pitchFamily="34" charset="0"/>
+                <a:ea typeface="Calibri" pitchFamily="34" charset="-122"/>
+                <a:cs typeface="Calibri" pitchFamily="34" charset="-120"/>
+              </a:rPr>
+              <a:t>Revenue growth on the same plant</a:t>
+            </a:r>
+            <a:endParaRPr lang="en-US" sz="1150" dirty="0"/>
+          </a:p>
+        </p:txBody>
+      </p:sp>
+      <p:sp>
+        <p:nvSpPr>
+          <p:cNvPr id="11" name="Text 9"/>
+          <p:cNvSpPr/>
+          <p:nvPr/>
+        </p:nvSpPr>
+        <p:spPr>
+          <a:xfrm>
+            <a:off x="3555416" y="2871216"/>
+            <a:ext cx="2238680" cy="457200"/>
+          </a:xfrm>
+          <a:prstGeom prst="rect">
+            <a:avLst/>
+          </a:prstGeom>
+          <a:noFill/>
+          <a:ln/>
+        </p:spPr>
+        <p:txBody>
+          <a:bodyPr wrap="square" lIns="0" tIns="0" rIns="0" bIns="0" rtlCol="0" anchor="ctr"/>
+          <a:lstStyle/>
+          <a:p>
+            <a:pPr indent="0" marL="0">
+              <a:buNone/>
+            </a:pPr>
+            <a:r>
+              <a:rPr lang="en-US" sz="950" dirty="0">
+                <a:solidFill>
+                  <a:srgbClr val="6B7684"/>
+                </a:solidFill>
+                <a:latin typeface="Calibri" pitchFamily="34" charset="0"/>
+                <a:ea typeface="Calibri" pitchFamily="34" charset="-122"/>
+                <a:cs typeface="Calibri" pitchFamily="34" charset="-120"/>
+              </a:rPr>
+              <a:t>FY21 trough to FY25-26, no expansion</a:t>
+            </a:r>
+            <a:endParaRPr lang="en-US" sz="950" dirty="0"/>
+          </a:p>
+        </p:txBody>
+      </p:sp>
+      <p:sp>
+        <p:nvSpPr>
+          <p:cNvPr id="12" name="Shape 10"/>
+          <p:cNvSpPr/>
+          <p:nvPr/>
+        </p:nvSpPr>
+        <p:spPr>
+          <a:xfrm>
+            <a:off x="6233008" y="1783080"/>
+            <a:ext cx="2567864" cy="1600200"/>
+          </a:xfrm>
+          <a:prstGeom prst="roundRect">
+            <a:avLst>
+              <a:gd name="adj" fmla="val 4571"/>
+            </a:avLst>
+          </a:prstGeom>
+          <a:solidFill>
+            <a:srgbClr val="F4F5F7"/>
+          </a:solidFill>
+          <a:ln/>
+          <a:effectLst>
+            <a:outerShdw sx="100000" sy="100000" kx="0" ky="0" algn="bl" rotWithShape="0" blurRad="76200" dist="25400" dir="5400000">
+              <a:srgbClr val="1C1F26">
+                <a:alpha val="10000"/>
+              </a:srgbClr>
+            </a:outerShdw>
+          </a:effectLst>
+        </p:spPr>
+      </p:sp>
+      <p:sp>
+        <p:nvSpPr>
+          <p:cNvPr id="13" name="Text 11"/>
+          <p:cNvSpPr/>
+          <p:nvPr/>
+        </p:nvSpPr>
+        <p:spPr>
+          <a:xfrm>
+            <a:off x="6397600" y="1920240"/>
+            <a:ext cx="2238680" cy="566928"/>
+          </a:xfrm>
+          <a:prstGeom prst="rect">
+            <a:avLst/>
+          </a:prstGeom>
+          <a:noFill/>
+          <a:ln/>
+        </p:spPr>
+        <p:txBody>
+          <a:bodyPr wrap="square" lIns="0" tIns="0" rIns="0" bIns="0" rtlCol="0" anchor="ctr"/>
+          <a:lstStyle/>
+          <a:p>
+            <a:pPr indent="0" marL="0">
+              <a:buNone/>
+            </a:pPr>
+            <a:r>
+              <a:rPr lang="en-US" sz="2700" b="1" dirty="0">
+                <a:solidFill>
+                  <a:srgbClr val="1C1F26"/>
+                </a:solidFill>
+                <a:latin typeface="Cambria" pitchFamily="34" charset="0"/>
+                <a:ea typeface="Cambria" pitchFamily="34" charset="-122"/>
+                <a:cs typeface="Cambria" pitchFamily="34" charset="-120"/>
+              </a:rPr>
+              <a:t>₹4.4 Cr</a:t>
+            </a:r>
+            <a:endParaRPr lang="en-US" sz="2700" dirty="0"/>
+          </a:p>
+        </p:txBody>
+      </p:sp>
+      <p:sp>
+        <p:nvSpPr>
+          <p:cNvPr id="14" name="Text 12"/>
+          <p:cNvSpPr/>
+          <p:nvPr/>
+        </p:nvSpPr>
+        <p:spPr>
+          <a:xfrm>
+            <a:off x="6397600" y="2487168"/>
+            <a:ext cx="2238680" cy="411480"/>
+          </a:xfrm>
+          <a:prstGeom prst="rect">
+            <a:avLst/>
+          </a:prstGeom>
+          <a:noFill/>
+          <a:ln/>
+        </p:spPr>
+        <p:txBody>
+          <a:bodyPr wrap="square" lIns="0" tIns="0" rIns="0" bIns="0" rtlCol="0" anchor="ctr"/>
+          <a:lstStyle/>
+          <a:p>
+            <a:pPr indent="0" marL="0">
+              <a:buNone/>
+            </a:pPr>
+            <a:r>
+              <a:rPr lang="en-US" sz="1150" b="1" dirty="0">
+                <a:solidFill>
+                  <a:srgbClr val="1C1F26"/>
+                </a:solidFill>
+                <a:latin typeface="Calibri" pitchFamily="34" charset="0"/>
+                <a:ea typeface="Calibri" pitchFamily="34" charset="-122"/>
+                <a:cs typeface="Calibri" pitchFamily="34" charset="-120"/>
+              </a:rPr>
+              <a:t>Net worth recovered since FY22</a:t>
+            </a:r>
+            <a:endParaRPr lang="en-US" sz="1150" dirty="0"/>
+          </a:p>
+        </p:txBody>
+      </p:sp>
+      <p:sp>
+        <p:nvSpPr>
+          <p:cNvPr id="15" name="Text 13"/>
+          <p:cNvSpPr/>
+          <p:nvPr/>
+        </p:nvSpPr>
+        <p:spPr>
+          <a:xfrm>
+            <a:off x="6397600" y="2871216"/>
+            <a:ext cx="2238680" cy="457200"/>
+          </a:xfrm>
+          <a:prstGeom prst="rect">
+            <a:avLst/>
+          </a:prstGeom>
+          <a:noFill/>
+          <a:ln/>
+        </p:spPr>
+        <p:txBody>
+          <a:bodyPr wrap="square" lIns="0" tIns="0" rIns="0" bIns="0" rtlCol="0" anchor="ctr"/>
+          <a:lstStyle/>
+          <a:p>
+            <a:pPr indent="0" marL="0">
+              <a:buNone/>
+            </a:pPr>
+            <a:r>
+              <a:rPr lang="en-US" sz="950" dirty="0">
+                <a:solidFill>
+                  <a:srgbClr val="6B7684"/>
+                </a:solidFill>
+                <a:latin typeface="Calibri" pitchFamily="34" charset="0"/>
+                <a:ea typeface="Calibri" pitchFamily="34" charset="-122"/>
+                <a:cs typeface="Calibri" pitchFamily="34" charset="-120"/>
+              </a:rPr>
+              <a:t>-₹5.94 Cr → -₹1.54 Cr (FY25)</a:t>
+            </a:r>
+            <a:endParaRPr lang="en-US" sz="950" dirty="0"/>
+          </a:p>
+        </p:txBody>
+      </p:sp>
+      <p:sp>
+        <p:nvSpPr>
+          <p:cNvPr id="16" name="Shape 14"/>
+          <p:cNvSpPr/>
+          <p:nvPr/>
+        </p:nvSpPr>
+        <p:spPr>
+          <a:xfrm>
+            <a:off x="9075191" y="1783080"/>
+            <a:ext cx="2567864" cy="1600200"/>
+          </a:xfrm>
+          <a:prstGeom prst="roundRect">
+            <a:avLst>
+              <a:gd name="adj" fmla="val 4571"/>
+            </a:avLst>
+          </a:prstGeom>
+          <a:solidFill>
+            <a:srgbClr val="F4F5F7"/>
+          </a:solidFill>
+          <a:ln/>
+          <a:effectLst>
+            <a:outerShdw sx="100000" sy="100000" kx="0" ky="0" algn="bl" rotWithShape="0" blurRad="76200" dist="25400" dir="5400000">
+              <a:srgbClr val="1C1F26">
+                <a:alpha val="10000"/>
+              </a:srgbClr>
+            </a:outerShdw>
+          </a:effectLst>
+        </p:spPr>
+      </p:sp>
+      <p:sp>
+        <p:nvSpPr>
+          <p:cNvPr id="17" name="Text 15"/>
+          <p:cNvSpPr/>
+          <p:nvPr/>
+        </p:nvSpPr>
+        <p:spPr>
+          <a:xfrm>
+            <a:off x="9239783" y="1920240"/>
+            <a:ext cx="2238680" cy="566928"/>
+          </a:xfrm>
+          <a:prstGeom prst="rect">
+            <a:avLst/>
+          </a:prstGeom>
+          <a:noFill/>
+          <a:ln/>
+        </p:spPr>
+        <p:txBody>
+          <a:bodyPr wrap="square" lIns="0" tIns="0" rIns="0" bIns="0" rtlCol="0" anchor="ctr"/>
+          <a:lstStyle/>
+          <a:p>
+            <a:pPr indent="0" marL="0">
+              <a:buNone/>
+            </a:pPr>
+            <a:r>
+              <a:rPr lang="en-US" sz="2700" b="1" dirty="0">
+                <a:solidFill>
+                  <a:srgbClr val="B8453F"/>
+                </a:solidFill>
+                <a:latin typeface="Cambria" pitchFamily="34" charset="0"/>
+                <a:ea typeface="Cambria" pitchFamily="34" charset="-122"/>
+                <a:cs typeface="Cambria" pitchFamily="34" charset="-120"/>
+              </a:rPr>
+              <a:t>~80%</a:t>
+            </a:r>
+            <a:endParaRPr lang="en-US" sz="2700" dirty="0"/>
+          </a:p>
+        </p:txBody>
+      </p:sp>
+      <p:sp>
+        <p:nvSpPr>
+          <p:cNvPr id="18" name="Text 16"/>
+          <p:cNvSpPr/>
+          <p:nvPr/>
+        </p:nvSpPr>
+        <p:spPr>
+          <a:xfrm>
+            <a:off x="9239783" y="2487168"/>
+            <a:ext cx="2238680" cy="411480"/>
+          </a:xfrm>
+          <a:prstGeom prst="rect">
+            <a:avLst/>
+          </a:prstGeom>
+          <a:noFill/>
+          <a:ln/>
+        </p:spPr>
+        <p:txBody>
+          <a:bodyPr wrap="square" lIns="0" tIns="0" rIns="0" bIns="0" rtlCol="0" anchor="ctr"/>
+          <a:lstStyle/>
+          <a:p>
+            <a:pPr indent="0" marL="0">
+              <a:buNone/>
+            </a:pPr>
+            <a:r>
+              <a:rPr lang="en-US" sz="1150" b="1" dirty="0">
+                <a:solidFill>
+                  <a:srgbClr val="1C1F26"/>
+                </a:solidFill>
+                <a:latin typeface="Calibri" pitchFamily="34" charset="0"/>
+                <a:ea typeface="Calibri" pitchFamily="34" charset="-122"/>
+                <a:cs typeface="Calibri" pitchFamily="34" charset="-120"/>
+              </a:rPr>
+              <a:t>Revenue from 2 customers</a:t>
+            </a:r>
+            <a:endParaRPr lang="en-US" sz="1150" dirty="0"/>
+          </a:p>
+        </p:txBody>
+      </p:sp>
+      <p:sp>
+        <p:nvSpPr>
+          <p:cNvPr id="19" name="Text 17"/>
+          <p:cNvSpPr/>
+          <p:nvPr/>
+        </p:nvSpPr>
+        <p:spPr>
+          <a:xfrm>
+            <a:off x="9239783" y="2871216"/>
+            <a:ext cx="2238680" cy="457200"/>
+          </a:xfrm>
+          <a:prstGeom prst="rect">
+            <a:avLst/>
+          </a:prstGeom>
+          <a:noFill/>
+          <a:ln/>
+        </p:spPr>
+        <p:txBody>
+          <a:bodyPr wrap="square" lIns="0" tIns="0" rIns="0" bIns="0" rtlCol="0" anchor="ctr"/>
+          <a:lstStyle/>
+          <a:p>
+            <a:pPr indent="0" marL="0">
+              <a:buNone/>
+            </a:pPr>
+            <a:r>
+              <a:rPr lang="en-US" sz="950" dirty="0">
+                <a:solidFill>
+                  <a:srgbClr val="6B7684"/>
+                </a:solidFill>
+                <a:latin typeface="Calibri" pitchFamily="34" charset="0"/>
+                <a:ea typeface="Calibri" pitchFamily="34" charset="-122"/>
+                <a:cs typeface="Calibri" pitchFamily="34" charset="-120"/>
+              </a:rPr>
+              <a:t>Tega + Escorts — key risk</a:t>
+            </a:r>
+            <a:endParaRPr lang="en-US" sz="950" dirty="0"/>
+          </a:p>
+        </p:txBody>
+      </p:sp>
+      <p:sp>
+        <p:nvSpPr>
+          <p:cNvPr id="20" name="Shape 18"/>
+          <p:cNvSpPr/>
+          <p:nvPr/>
+        </p:nvSpPr>
+        <p:spPr>
+          <a:xfrm>
+            <a:off x="548640" y="3749040"/>
+            <a:ext cx="5364328" cy="2331720"/>
+          </a:xfrm>
+          <a:prstGeom prst="roundRect">
+            <a:avLst>
+              <a:gd name="adj" fmla="val 3137"/>
+            </a:avLst>
+          </a:prstGeom>
+          <a:solidFill>
+            <a:srgbClr val="EDF5EF"/>
+          </a:solidFill>
+          <a:ln/>
+        </p:spPr>
+      </p:sp>
+      <p:sp>
+        <p:nvSpPr>
+          <p:cNvPr id="21" name="Shape 19"/>
+          <p:cNvSpPr/>
+          <p:nvPr/>
+        </p:nvSpPr>
+        <p:spPr>
+          <a:xfrm>
+            <a:off x="777240" y="3977640"/>
+            <a:ext cx="384048" cy="384048"/>
+          </a:xfrm>
+          <a:prstGeom prst="ellipse">
+            <a:avLst/>
+          </a:prstGeom>
+          <a:solidFill>
+            <a:srgbClr val="3F8F5F"/>
+          </a:solidFill>
+          <a:ln/>
+        </p:spPr>
+      </p:sp>
+      <p:sp>
+        <p:nvSpPr>
+          <p:cNvPr id="22" name="Text 20"/>
+          <p:cNvSpPr/>
+          <p:nvPr/>
+        </p:nvSpPr>
+        <p:spPr>
+          <a:xfrm>
+            <a:off x="777240" y="3977640"/>
+            <a:ext cx="384048" cy="384048"/>
+          </a:xfrm>
+          <a:prstGeom prst="rect">
+            <a:avLst/>
+          </a:prstGeom>
+          <a:noFill/>
+          <a:ln/>
+        </p:spPr>
+        <p:txBody>
+          <a:bodyPr wrap="square" lIns="0" tIns="0" rIns="0" bIns="0" rtlCol="0" anchor="ctr"/>
+          <a:lstStyle/>
+          <a:p>
+            <a:pPr algn="ctr" indent="0" marL="0">
+              <a:buNone/>
+            </a:pPr>
+            <a:r>
+              <a:rPr lang="en-US" sz="1092" b="1" dirty="0">
+                <a:solidFill>
+                  <a:srgbClr val="FFFFFF"/>
+                </a:solidFill>
+                <a:latin typeface="Calibri" pitchFamily="34" charset="0"/>
+                <a:ea typeface="Calibri" pitchFamily="34" charset="-122"/>
+                <a:cs typeface="Calibri" pitchFamily="34" charset="-120"/>
+              </a:rPr>
+              <a:t>✓</a:t>
+            </a:r>
+            <a:endParaRPr lang="en-US" sz="1092" dirty="0"/>
+          </a:p>
+        </p:txBody>
+      </p:sp>
+      <p:sp>
+        <p:nvSpPr>
+          <p:cNvPr id="23" name="Text 21"/>
+          <p:cNvSpPr/>
+          <p:nvPr/>
+        </p:nvSpPr>
+        <p:spPr>
+          <a:xfrm>
+            <a:off x="1325880" y="3977640"/>
+            <a:ext cx="4358488" cy="365760"/>
+          </a:xfrm>
+          <a:prstGeom prst="rect">
+            <a:avLst/>
+          </a:prstGeom>
+          <a:noFill/>
+          <a:ln/>
+        </p:spPr>
+        <p:txBody>
+          <a:bodyPr wrap="square" lIns="0" tIns="0" rIns="0" bIns="0" rtlCol="0" anchor="ctr"/>
+          <a:lstStyle/>
+          <a:p>
+            <a:pPr indent="0" marL="0">
+              <a:buNone/>
+            </a:pPr>
+            <a:r>
+              <a:rPr lang="en-US" sz="1400" b="1" dirty="0">
+                <a:solidFill>
+                  <a:srgbClr val="1C1F26"/>
+                </a:solidFill>
+                <a:latin typeface="Calibri" pitchFamily="34" charset="0"/>
+                <a:ea typeface="Calibri" pitchFamily="34" charset="-122"/>
+                <a:cs typeface="Calibri" pitchFamily="34" charset="-120"/>
+              </a:rPr>
+              <a:t>The Investment Case</a:t>
+            </a:r>
+            <a:endParaRPr lang="en-US" sz="1400" dirty="0"/>
+          </a:p>
+        </p:txBody>
+      </p:sp>
+      <p:sp>
+        <p:nvSpPr>
+          <p:cNvPr id="24" name="Text 22"/>
+          <p:cNvSpPr/>
+          <p:nvPr/>
+        </p:nvSpPr>
+        <p:spPr>
+          <a:xfrm>
+            <a:off x="822960" y="4434840"/>
+            <a:ext cx="4815688" cy="1508760"/>
+          </a:xfrm>
+          <a:prstGeom prst="rect">
+            <a:avLst/>
+          </a:prstGeom>
+          <a:noFill/>
+          <a:ln/>
+        </p:spPr>
+        <p:txBody>
+          <a:bodyPr wrap="square" lIns="0" tIns="0" rIns="0" bIns="0" rtlCol="0" anchor="ctr"/>
+          <a:lstStyle/>
+          <a:p>
+            <a:pPr marL="342900" indent="-342900">
+              <a:lnSpc>
+                <a:spcPct val="105000"/>
+              </a:lnSpc>
+              <a:spcAft>
+                <a:spcPts val="800"/>
+              </a:spcAft>
+              <a:buSzPct val="100000"/>
+              <a:buChar char="•"/>
+            </a:pPr>
+            <a:r>
+              <a:rPr lang="en-US" sz="1100" dirty="0">
+                <a:solidFill>
+                  <a:srgbClr val="1C1F26"/>
+                </a:solidFill>
+                <a:latin typeface="Calibri" pitchFamily="34" charset="0"/>
+                <a:ea typeface="Calibri" pitchFamily="34" charset="-122"/>
+                <a:cs typeface="Calibri" pitchFamily="34" charset="-120"/>
+              </a:rPr>
+              <a:t>A paradigm built deliberately, not inherited: repositioned from commodity foundry to engineering company, then protected the one thing that couldn't be commoditized — heat-treatment know-how.</a:t>
+            </a:r>
+            <a:endParaRPr lang="en-US" sz="1100" dirty="0"/>
+          </a:p>
+          <a:p>
+            <a:pPr marL="342900" indent="-342900">
+              <a:lnSpc>
+                <a:spcPct val="105000"/>
+              </a:lnSpc>
+              <a:spcAft>
+                <a:spcPts val="800"/>
+              </a:spcAft>
+              <a:buSzPct val="100000"/>
+              <a:buChar char="•"/>
+            </a:pPr>
+            <a:r>
+              <a:rPr lang="en-US" sz="1100" dirty="0">
+                <a:solidFill>
+                  <a:srgbClr val="1C1F26"/>
+                </a:solidFill>
+                <a:latin typeface="Calibri" pitchFamily="34" charset="0"/>
+                <a:ea typeface="Calibri" pitchFamily="34" charset="-122"/>
+                <a:cs typeface="Calibri" pitchFamily="34" charset="-120"/>
+              </a:rPr>
+              <a:t>The moat now runs on operations: utilization has climbed from ~55% (2018) to ~81% (Aug 2025) on the same 1990s-era plant — revenue has more than tripled without a new factory.</a:t>
+            </a:r>
+            <a:endParaRPr lang="en-US" sz="1100" dirty="0"/>
+          </a:p>
+          <a:p>
+            <a:pPr marL="342900" indent="-342900">
+              <a:lnSpc>
+                <a:spcPct val="105000"/>
+              </a:lnSpc>
+              <a:buSzPct val="100000"/>
+              <a:buChar char="•"/>
+            </a:pPr>
+            <a:r>
+              <a:rPr lang="en-US" sz="1100" dirty="0">
+                <a:solidFill>
+                  <a:srgbClr val="1C1F26"/>
+                </a:solidFill>
+                <a:latin typeface="Calibri" pitchFamily="34" charset="0"/>
+                <a:ea typeface="Calibri" pitchFamily="34" charset="-122"/>
+                <a:cs typeface="Calibri" pitchFamily="34" charset="-120"/>
+              </a:rPr>
+              <a:t>Tier-1 OEM integration (Tega, Escorts, Komatsu-qualified) at industry-leading contribution per kg on select parts.</a:t>
+            </a:r>
+            <a:endParaRPr lang="en-US" sz="1100" dirty="0"/>
+          </a:p>
+        </p:txBody>
+      </p:sp>
+      <p:sp>
+        <p:nvSpPr>
+          <p:cNvPr id="25" name="Shape 23"/>
+          <p:cNvSpPr/>
+          <p:nvPr/>
+        </p:nvSpPr>
+        <p:spPr>
+          <a:xfrm>
+            <a:off x="6278728" y="3749040"/>
+            <a:ext cx="5364328" cy="2331720"/>
+          </a:xfrm>
+          <a:prstGeom prst="roundRect">
+            <a:avLst>
+              <a:gd name="adj" fmla="val 3137"/>
+            </a:avLst>
+          </a:prstGeom>
+          <a:solidFill>
+            <a:srgbClr val="FBEEEC"/>
+          </a:solidFill>
+          <a:ln/>
+        </p:spPr>
+      </p:sp>
+      <p:sp>
+        <p:nvSpPr>
+          <p:cNvPr id="26" name="Shape 24"/>
+          <p:cNvSpPr/>
+          <p:nvPr/>
+        </p:nvSpPr>
+        <p:spPr>
+          <a:xfrm>
+            <a:off x="6507328" y="3977640"/>
+            <a:ext cx="384048" cy="384048"/>
+          </a:xfrm>
+          <a:prstGeom prst="ellipse">
+            <a:avLst/>
+          </a:prstGeom>
+          <a:solidFill>
+            <a:srgbClr val="B8453F"/>
+          </a:solidFill>
+          <a:ln/>
+        </p:spPr>
+      </p:sp>
+      <p:sp>
+        <p:nvSpPr>
+          <p:cNvPr id="27" name="Text 25"/>
+          <p:cNvSpPr/>
+          <p:nvPr/>
+        </p:nvSpPr>
+        <p:spPr>
+          <a:xfrm>
+            <a:off x="6507328" y="3977640"/>
+            <a:ext cx="384048" cy="384048"/>
+          </a:xfrm>
+          <a:prstGeom prst="rect">
+            <a:avLst/>
+          </a:prstGeom>
+          <a:noFill/>
+          <a:ln/>
+        </p:spPr>
+        <p:txBody>
+          <a:bodyPr wrap="square" lIns="0" tIns="0" rIns="0" bIns="0" rtlCol="0" anchor="ctr"/>
+          <a:lstStyle/>
+          <a:p>
+            <a:pPr algn="ctr" indent="0" marL="0">
+              <a:buNone/>
+            </a:pPr>
+            <a:r>
+              <a:rPr lang="en-US" sz="1092" b="1" dirty="0">
+                <a:solidFill>
+                  <a:srgbClr val="FFFFFF"/>
+                </a:solidFill>
+                <a:latin typeface="Calibri" pitchFamily="34" charset="0"/>
+                <a:ea typeface="Calibri" pitchFamily="34" charset="-122"/>
+                <a:cs typeface="Calibri" pitchFamily="34" charset="-120"/>
+              </a:rPr>
+              <a:t>!</a:t>
+            </a:r>
+            <a:endParaRPr lang="en-US" sz="1092" dirty="0"/>
+          </a:p>
+        </p:txBody>
+      </p:sp>
+      <p:sp>
+        <p:nvSpPr>
+          <p:cNvPr id="28" name="Text 26"/>
+          <p:cNvSpPr/>
+          <p:nvPr/>
+        </p:nvSpPr>
+        <p:spPr>
+          <a:xfrm>
+            <a:off x="7055968" y="3977640"/>
+            <a:ext cx="4358488" cy="365760"/>
+          </a:xfrm>
+          <a:prstGeom prst="rect">
+            <a:avLst/>
+          </a:prstGeom>
+          <a:noFill/>
+          <a:ln/>
+        </p:spPr>
+        <p:txBody>
+          <a:bodyPr wrap="square" lIns="0" tIns="0" rIns="0" bIns="0" rtlCol="0" anchor="ctr"/>
+          <a:lstStyle/>
+          <a:p>
+            <a:pPr indent="0" marL="0">
+              <a:buNone/>
+            </a:pPr>
+            <a:r>
+              <a:rPr lang="en-US" sz="1400" b="1" dirty="0">
+                <a:solidFill>
+                  <a:srgbClr val="1C1F26"/>
+                </a:solidFill>
+                <a:latin typeface="Calibri" pitchFamily="34" charset="0"/>
+                <a:ea typeface="Calibri" pitchFamily="34" charset="-122"/>
+                <a:cs typeface="Calibri" pitchFamily="34" charset="-120"/>
+              </a:rPr>
+              <a:t>What Investors Should Probe</a:t>
+            </a:r>
+            <a:endParaRPr lang="en-US" sz="1400" dirty="0"/>
+          </a:p>
+        </p:txBody>
+      </p:sp>
+      <p:sp>
+        <p:nvSpPr>
+          <p:cNvPr id="29" name="Text 27"/>
+          <p:cNvSpPr/>
+          <p:nvPr/>
+        </p:nvSpPr>
+        <p:spPr>
+          <a:xfrm>
+            <a:off x="6553048" y="4434840"/>
+            <a:ext cx="4815688" cy="1508760"/>
+          </a:xfrm>
+          <a:prstGeom prst="rect">
+            <a:avLst/>
+          </a:prstGeom>
+          <a:noFill/>
+          <a:ln/>
+        </p:spPr>
+        <p:txBody>
+          <a:bodyPr wrap="square" lIns="0" tIns="0" rIns="0" bIns="0" rtlCol="0" anchor="ctr"/>
+          <a:lstStyle/>
+          <a:p>
+            <a:pPr marL="342900" indent="-342900">
+              <a:lnSpc>
+                <a:spcPct val="105000"/>
+              </a:lnSpc>
+              <a:spcAft>
+                <a:spcPts val="800"/>
+              </a:spcAft>
+              <a:buSzPct val="100000"/>
+              <a:buChar char="•"/>
+            </a:pPr>
+            <a:r>
+              <a:rPr lang="en-US" sz="1100" dirty="0">
+                <a:solidFill>
+                  <a:srgbClr val="1C1F26"/>
+                </a:solidFill>
+                <a:latin typeface="Calibri" pitchFamily="34" charset="0"/>
+                <a:ea typeface="Calibri" pitchFamily="34" charset="-122"/>
+                <a:cs typeface="Calibri" pitchFamily="34" charset="-120"/>
+              </a:rPr>
+              <a:t>Net worth is still negative (-₹1.54 Cr, FY25) and the most recent quarter (Q1 FY26-27) shows sales down 42% YoY.</a:t>
+            </a:r>
+            <a:endParaRPr lang="en-US" sz="1100" dirty="0"/>
+          </a:p>
+          <a:p>
+            <a:pPr marL="342900" indent="-342900">
+              <a:lnSpc>
+                <a:spcPct val="105000"/>
+              </a:lnSpc>
+              <a:spcAft>
+                <a:spcPts val="800"/>
+              </a:spcAft>
+              <a:buSzPct val="100000"/>
+              <a:buChar char="•"/>
+            </a:pPr>
+            <a:r>
+              <a:rPr lang="en-US" sz="1100" dirty="0">
+                <a:solidFill>
+                  <a:srgbClr val="1C1F26"/>
+                </a:solidFill>
+                <a:latin typeface="Calibri" pitchFamily="34" charset="0"/>
+                <a:ea typeface="Calibri" pitchFamily="34" charset="-122"/>
+                <a:cs typeface="Calibri" pitchFamily="34" charset="-120"/>
+              </a:rPr>
+              <a:t>Rejection/scrap rate has climbed for four straight periods, reaching 10.1% — the operational skill behind the moat hasn't visibly fixed this yet.</a:t>
+            </a:r>
+            <a:endParaRPr lang="en-US" sz="1100" dirty="0"/>
+          </a:p>
+          <a:p>
+            <a:pPr marL="342900" indent="-342900">
+              <a:lnSpc>
+                <a:spcPct val="105000"/>
+              </a:lnSpc>
+              <a:buSzPct val="100000"/>
+              <a:buChar char="•"/>
+            </a:pPr>
+            <a:r>
+              <a:rPr lang="en-US" sz="1100" dirty="0">
+                <a:solidFill>
+                  <a:srgbClr val="1C1F26"/>
+                </a:solidFill>
+                <a:latin typeface="Calibri" pitchFamily="34" charset="0"/>
+                <a:ea typeface="Calibri" pitchFamily="34" charset="-122"/>
+                <a:cs typeface="Calibri" pitchFamily="34" charset="-120"/>
+              </a:rPr>
+              <a:t>Two customers drive ~80% of contribution; recurring auditor qualification remains open.</a:t>
+            </a:r>
+            <a:endParaRPr lang="en-US" sz="1100" dirty="0"/>
+          </a:p>
+        </p:txBody>
+      </p:sp>
+      <p:sp>
+        <p:nvSpPr>
+          <p:cNvPr id="30" name="Text 28"/>
+          <p:cNvSpPr/>
+          <p:nvPr/>
+        </p:nvSpPr>
+        <p:spPr>
+          <a:xfrm>
+            <a:off x="548640" y="6473952"/>
+            <a:ext cx="11094415" cy="274320"/>
+          </a:xfrm>
+          <a:prstGeom prst="rect">
+            <a:avLst/>
+          </a:prstGeom>
+          <a:noFill/>
+          <a:ln/>
+        </p:spPr>
+        <p:txBody>
+          <a:bodyPr wrap="square" lIns="0" tIns="0" rIns="0" bIns="0" rtlCol="0" anchor="ctr"/>
+          <a:lstStyle/>
+          <a:p>
+            <a:pPr algn="l" indent="0" marL="0">
+              <a:buNone/>
+            </a:pPr>
+            <a:r>
+              <a:rPr lang="en-US" sz="800" dirty="0">
+                <a:solidFill>
+                  <a:srgbClr val="9AA2AD"/>
+                </a:solidFill>
+                <a:latin typeface="Calibri" pitchFamily="34" charset="0"/>
+                <a:ea typeface="Calibri" pitchFamily="34" charset="-122"/>
+                <a:cs typeface="Calibri" pitchFamily="34" charset="-120"/>
+              </a:rPr>
+              <a:t>DATRE CORPORATION LIMITED  |  CONFIDENTIAL — PREPARED FOR INVESTOR DISCUSSION</a:t>
+            </a:r>
+            <a:endParaRPr lang="en-US" sz="800" dirty="0"/>
+          </a:p>
+        </p:txBody>
+      </p:sp>
+      <p:sp>
+        <p:nvSpPr>
+          <p:cNvPr id="31" name="Text 29"/>
+          <p:cNvSpPr/>
+          <p:nvPr/>
+        </p:nvSpPr>
+        <p:spPr>
+          <a:xfrm>
+            <a:off x="11277295" y="6473952"/>
+            <a:ext cx="457200" cy="274320"/>
+          </a:xfrm>
+          <a:prstGeom prst="rect">
+            <a:avLst/>
+          </a:prstGeom>
+          <a:noFill/>
+          <a:ln/>
+        </p:spPr>
+        <p:txBody>
+          <a:bodyPr wrap="square" lIns="0" tIns="0" rIns="0" bIns="0" rtlCol="0" anchor="ctr"/>
+          <a:lstStyle/>
+          <a:p>
+            <a:pPr algn="r" indent="0" marL="0">
+              <a:buNone/>
+            </a:pPr>
+            <a:r>
+              <a:rPr lang="en-US" sz="800" dirty="0">
+                <a:solidFill>
+                  <a:srgbClr val="9AA2AD"/>
+                </a:solidFill>
+                <a:latin typeface="Calibri" pitchFamily="34" charset="0"/>
+                <a:ea typeface="Calibri" pitchFamily="34" charset="-122"/>
+                <a:cs typeface="Calibri" pitchFamily="34" charset="-120"/>
+              </a:rPr>
+              <a:t>2</a:t>
+            </a:r>
+            <a:endParaRPr lang="en-US" sz="800" dirty="0"/>
+          </a:p>
+        </p:txBody>
+      </p:sp>
+    </p:spTree>
+  </p:cSld>
+  <p:clrMapOvr>
+    <a:masterClrMapping/>
+  </p:clrMapOvr>
+</p:sld>
+</file>
+
+<file path=ppt/slides/slide20.xml><?xml version="1.0" encoding="utf-8"?>
+<p:sld xmlns:a="http://schemas.openxmlformats.org/drawingml/2006/main" xmlns:r="http://schemas.openxmlformats.org/officeDocument/2006/relationships" xmlns:p="http://schemas.openxmlformats.org/presentationml/2006/main">
+  <p:cSld name="Slide 20">
+    <p:bg>
+      <p:bgPr>
+        <a:solidFill>
+          <a:srgbClr val="FFFFFF"/>
+        </a:solidFill>
+      </p:bgPr>
+    </p:bg>
+    <p:spTree>
+      <p:nvGrpSpPr>
+        <p:cNvPr id="1" name=""/>
+        <p:cNvGrpSpPr/>
+        <p:nvPr/>
+      </p:nvGrpSpPr>
+      <p:grpSpPr>
+        <a:xfrm>
+          <a:off x="0" y="0"/>
+          <a:ext cx="0" cy="0"/>
+          <a:chOff x="0" y="0"/>
+          <a:chExt cx="0" cy="0"/>
+        </a:xfrm>
+      </p:grpSpPr>
+      <p:sp>
+        <p:nvSpPr>
+          <p:cNvPr id="2" name="Text 0"/>
+          <p:cNvSpPr/>
+          <p:nvPr/>
+        </p:nvSpPr>
+        <p:spPr>
+          <a:xfrm>
+            <a:off x="548640" y="457200"/>
+            <a:ext cx="4572000" cy="274320"/>
+          </a:xfrm>
+          <a:prstGeom prst="rect">
+            <a:avLst/>
+          </a:prstGeom>
+          <a:noFill/>
+          <a:ln/>
+        </p:spPr>
+        <p:txBody>
+          <a:bodyPr wrap="square" lIns="0" tIns="0" rIns="0" bIns="0" rtlCol="0" anchor="ctr"/>
+          <a:lstStyle/>
+          <a:p>
+            <a:pPr indent="0" marL="0">
+              <a:buNone/>
+            </a:pPr>
+            <a:r>
+              <a:rPr lang="en-US" sz="1100" b="1" spc="200" kern="0" dirty="0">
+                <a:solidFill>
+                  <a:srgbClr val="D9622B"/>
+                </a:solidFill>
+                <a:latin typeface="Calibri" pitchFamily="34" charset="0"/>
+                <a:ea typeface="Calibri" pitchFamily="34" charset="-122"/>
+                <a:cs typeface="Calibri" pitchFamily="34" charset="-120"/>
+              </a:rPr>
               <a:t>MARGIN UPSIDE</a:t>
             </a:r>
             <a:endParaRPr lang="en-US" sz="1100" dirty="0"/>
@@ -12155,7 +15120,7 @@
                 <a:ea typeface="Calibri" pitchFamily="34" charset="-122"/>
                 <a:cs typeface="Calibri" pitchFamily="34" charset="-120"/>
               </a:rPr>
-              <a:t>18</a:t>
+              <a:t>20</a:t>
             </a:r>
             <a:endParaRPr lang="en-US" sz="800" dirty="0"/>
           </a:p>
@@ -12169,9 +15134,9 @@
 </p:sld>
 </file>
 
-<file path=ppt/slides/slide19.xml><?xml version="1.0" encoding="utf-8"?>
+<file path=ppt/slides/slide21.xml><?xml version="1.0" encoding="utf-8"?>
 <p:sld xmlns:a="http://schemas.openxmlformats.org/drawingml/2006/main" xmlns:r="http://schemas.openxmlformats.org/officeDocument/2006/relationships" xmlns:p="http://schemas.openxmlformats.org/presentationml/2006/main">
-  <p:cSld name="Slide 19">
+  <p:cSld name="Slide 21">
     <p:bg>
       <p:bgPr>
         <a:solidFill>
@@ -12273,7 +15238,7 @@
       </p:sp>
       <p:graphicFrame>
         <p:nvGraphicFramePr>
-          <p:cNvPr id="20" name="Table 0"/>
+          <p:cNvPr id="22" name="Table 0"/>
           <p:cNvGraphicFramePr>
             <a:graphicFrameLocks noGrp="1"/>
           </p:cNvGraphicFramePr>
@@ -14058,7 +17023,7 @@
                 <a:ea typeface="Calibri" pitchFamily="34" charset="-122"/>
                 <a:cs typeface="Calibri" pitchFamily="34" charset="-120"/>
               </a:rPr>
-              <a:t>19</a:t>
+              <a:t>21</a:t>
             </a:r>
             <a:endParaRPr lang="en-US" sz="800" dirty="0"/>
           </a:p>
@@ -14072,9 +17037,9 @@
 </p:sld>
 </file>
 
-<file path=ppt/slides/slide2.xml><?xml version="1.0" encoding="utf-8"?>
+<file path=ppt/slides/slide22.xml><?xml version="1.0" encoding="utf-8"?>
 <p:sld xmlns:a="http://schemas.openxmlformats.org/drawingml/2006/main" xmlns:r="http://schemas.openxmlformats.org/officeDocument/2006/relationships" xmlns:p="http://schemas.openxmlformats.org/presentationml/2006/main">
-  <p:cSld name="Slide 2">
+  <p:cSld name="Slide 22">
     <p:bg>
       <p:bgPr>
         <a:solidFill>
@@ -14129,7 +17094,7 @@
                 <a:ea typeface="Calibri" pitchFamily="34" charset="-122"/>
                 <a:cs typeface="Calibri" pitchFamily="34" charset="-120"/>
               </a:rPr>
-              <a:t>EXECUTIVE SUMMARY</a:t>
+              <a:t>COMPETITIVE POSITION</a:t>
             </a:r>
             <a:endParaRPr lang="en-US" sz="1100" dirty="0"/>
           </a:p>
@@ -14168,1200 +17133,6 @@
                 <a:ea typeface="Cambria" pitchFamily="34" charset="-122"/>
                 <a:cs typeface="Cambria" pitchFamily="34" charset="-120"/>
               </a:rPr>
-              <a:t>A paradigm Datre built deliberately — now running harder on an aging plant</a:t>
-            </a:r>
-            <a:endParaRPr lang="en-US" sz="3000" dirty="0"/>
-          </a:p>
-        </p:txBody>
-      </p:sp>
-      <p:sp>
-        <p:nvSpPr>
-          <p:cNvPr id="4" name="Shape 2"/>
-          <p:cNvSpPr/>
-          <p:nvPr/>
-        </p:nvSpPr>
-        <p:spPr>
-          <a:xfrm>
-            <a:off x="548640" y="1783080"/>
-            <a:ext cx="2567864" cy="1600200"/>
-          </a:xfrm>
-          <a:prstGeom prst="roundRect">
-            <a:avLst>
-              <a:gd name="adj" fmla="val 4571"/>
-            </a:avLst>
-          </a:prstGeom>
-          <a:solidFill>
-            <a:srgbClr val="F4F5F7"/>
-          </a:solidFill>
-          <a:ln/>
-          <a:effectLst>
-            <a:outerShdw sx="100000" sy="100000" kx="0" ky="0" algn="bl" rotWithShape="0" blurRad="76200" dist="25400" dir="5400000">
-              <a:srgbClr val="1C1F26">
-                <a:alpha val="10000"/>
-              </a:srgbClr>
-            </a:outerShdw>
-          </a:effectLst>
-        </p:spPr>
-      </p:sp>
-      <p:sp>
-        <p:nvSpPr>
-          <p:cNvPr id="5" name="Text 3"/>
-          <p:cNvSpPr/>
-          <p:nvPr/>
-        </p:nvSpPr>
-        <p:spPr>
-          <a:xfrm>
-            <a:off x="713232" y="1920240"/>
-            <a:ext cx="2238680" cy="566928"/>
-          </a:xfrm>
-          <a:prstGeom prst="rect">
-            <a:avLst/>
-          </a:prstGeom>
-          <a:noFill/>
-          <a:ln/>
-        </p:spPr>
-        <p:txBody>
-          <a:bodyPr wrap="square" lIns="0" tIns="0" rIns="0" bIns="0" rtlCol="0" anchor="ctr"/>
-          <a:lstStyle/>
-          <a:p>
-            <a:pPr indent="0" marL="0">
-              <a:buNone/>
-            </a:pPr>
-            <a:r>
-              <a:rPr lang="en-US" sz="2700" b="1" dirty="0">
-                <a:solidFill>
-                  <a:srgbClr val="3F8F5F"/>
-                </a:solidFill>
-                <a:latin typeface="Cambria" pitchFamily="34" charset="0"/>
-                <a:ea typeface="Cambria" pitchFamily="34" charset="-122"/>
-                <a:cs typeface="Cambria" pitchFamily="34" charset="-120"/>
-              </a:rPr>
-              <a:t>₹25.9 Cr</a:t>
-            </a:r>
-            <a:endParaRPr lang="en-US" sz="2700" dirty="0"/>
-          </a:p>
-        </p:txBody>
-      </p:sp>
-      <p:sp>
-        <p:nvSpPr>
-          <p:cNvPr id="6" name="Text 4"/>
-          <p:cNvSpPr/>
-          <p:nvPr/>
-        </p:nvSpPr>
-        <p:spPr>
-          <a:xfrm>
-            <a:off x="713232" y="2487168"/>
-            <a:ext cx="2238680" cy="411480"/>
-          </a:xfrm>
-          <a:prstGeom prst="rect">
-            <a:avLst/>
-          </a:prstGeom>
-          <a:noFill/>
-          <a:ln/>
-        </p:spPr>
-        <p:txBody>
-          <a:bodyPr wrap="square" lIns="0" tIns="0" rIns="0" bIns="0" rtlCol="0" anchor="ctr"/>
-          <a:lstStyle/>
-          <a:p>
-            <a:pPr indent="0" marL="0">
-              <a:buNone/>
-            </a:pPr>
-            <a:r>
-              <a:rPr lang="en-US" sz="1150" b="1" dirty="0">
-                <a:solidFill>
-                  <a:srgbClr val="1C1F26"/>
-                </a:solidFill>
-                <a:latin typeface="Calibri" pitchFamily="34" charset="0"/>
-                <a:ea typeface="Calibri" pitchFamily="34" charset="-122"/>
-                <a:cs typeface="Calibri" pitchFamily="34" charset="-120"/>
-              </a:rPr>
-              <a:t>FY25-26 revenue</a:t>
-            </a:r>
-            <a:endParaRPr lang="en-US" sz="1150" dirty="0"/>
-          </a:p>
-        </p:txBody>
-      </p:sp>
-      <p:sp>
-        <p:nvSpPr>
-          <p:cNvPr id="7" name="Text 5"/>
-          <p:cNvSpPr/>
-          <p:nvPr/>
-        </p:nvSpPr>
-        <p:spPr>
-          <a:xfrm>
-            <a:off x="713232" y="2871216"/>
-            <a:ext cx="2238680" cy="457200"/>
-          </a:xfrm>
-          <a:prstGeom prst="rect">
-            <a:avLst/>
-          </a:prstGeom>
-          <a:noFill/>
-          <a:ln/>
-        </p:spPr>
-        <p:txBody>
-          <a:bodyPr wrap="square" lIns="0" tIns="0" rIns="0" bIns="0" rtlCol="0" anchor="ctr"/>
-          <a:lstStyle/>
-          <a:p>
-            <a:pPr indent="0" marL="0">
-              <a:buNone/>
-            </a:pPr>
-            <a:r>
-              <a:rPr lang="en-US" sz="950" dirty="0">
-                <a:solidFill>
-                  <a:srgbClr val="6B7684"/>
-                </a:solidFill>
-                <a:latin typeface="Calibri" pitchFamily="34" charset="0"/>
-                <a:ea typeface="Calibri" pitchFamily="34" charset="-122"/>
-                <a:cs typeface="Calibri" pitchFamily="34" charset="-120"/>
-              </a:rPr>
-              <a:t>Record year, +26% YoY — also a record ₹1.82 Cr profit</a:t>
-            </a:r>
-            <a:endParaRPr lang="en-US" sz="950" dirty="0"/>
-          </a:p>
-        </p:txBody>
-      </p:sp>
-      <p:sp>
-        <p:nvSpPr>
-          <p:cNvPr id="8" name="Shape 6"/>
-          <p:cNvSpPr/>
-          <p:nvPr/>
-        </p:nvSpPr>
-        <p:spPr>
-          <a:xfrm>
-            <a:off x="3390824" y="1783080"/>
-            <a:ext cx="2567864" cy="1600200"/>
-          </a:xfrm>
-          <a:prstGeom prst="roundRect">
-            <a:avLst>
-              <a:gd name="adj" fmla="val 4571"/>
-            </a:avLst>
-          </a:prstGeom>
-          <a:solidFill>
-            <a:srgbClr val="F4F5F7"/>
-          </a:solidFill>
-          <a:ln/>
-          <a:effectLst>
-            <a:outerShdw sx="100000" sy="100000" kx="0" ky="0" algn="bl" rotWithShape="0" blurRad="76200" dist="25400" dir="5400000">
-              <a:srgbClr val="1C1F26">
-                <a:alpha val="10000"/>
-              </a:srgbClr>
-            </a:outerShdw>
-          </a:effectLst>
-        </p:spPr>
-      </p:sp>
-      <p:sp>
-        <p:nvSpPr>
-          <p:cNvPr id="9" name="Text 7"/>
-          <p:cNvSpPr/>
-          <p:nvPr/>
-        </p:nvSpPr>
-        <p:spPr>
-          <a:xfrm>
-            <a:off x="3555416" y="1920240"/>
-            <a:ext cx="2238680" cy="566928"/>
-          </a:xfrm>
-          <a:prstGeom prst="rect">
-            <a:avLst/>
-          </a:prstGeom>
-          <a:noFill/>
-          <a:ln/>
-        </p:spPr>
-        <p:txBody>
-          <a:bodyPr wrap="square" lIns="0" tIns="0" rIns="0" bIns="0" rtlCol="0" anchor="ctr"/>
-          <a:lstStyle/>
-          <a:p>
-            <a:pPr indent="0" marL="0">
-              <a:buNone/>
-            </a:pPr>
-            <a:r>
-              <a:rPr lang="en-US" sz="2700" b="1" dirty="0">
-                <a:solidFill>
-                  <a:srgbClr val="3F8F5F"/>
-                </a:solidFill>
-                <a:latin typeface="Cambria" pitchFamily="34" charset="0"/>
-                <a:ea typeface="Cambria" pitchFamily="34" charset="-122"/>
-                <a:cs typeface="Cambria" pitchFamily="34" charset="-120"/>
-              </a:rPr>
-              <a:t>2.9x</a:t>
-            </a:r>
-            <a:endParaRPr lang="en-US" sz="2700" dirty="0"/>
-          </a:p>
-        </p:txBody>
-      </p:sp>
-      <p:sp>
-        <p:nvSpPr>
-          <p:cNvPr id="10" name="Text 8"/>
-          <p:cNvSpPr/>
-          <p:nvPr/>
-        </p:nvSpPr>
-        <p:spPr>
-          <a:xfrm>
-            <a:off x="3555416" y="2487168"/>
-            <a:ext cx="2238680" cy="411480"/>
-          </a:xfrm>
-          <a:prstGeom prst="rect">
-            <a:avLst/>
-          </a:prstGeom>
-          <a:noFill/>
-          <a:ln/>
-        </p:spPr>
-        <p:txBody>
-          <a:bodyPr wrap="square" lIns="0" tIns="0" rIns="0" bIns="0" rtlCol="0" anchor="ctr"/>
-          <a:lstStyle/>
-          <a:p>
-            <a:pPr indent="0" marL="0">
-              <a:buNone/>
-            </a:pPr>
-            <a:r>
-              <a:rPr lang="en-US" sz="1150" b="1" dirty="0">
-                <a:solidFill>
-                  <a:srgbClr val="1C1F26"/>
-                </a:solidFill>
-                <a:latin typeface="Calibri" pitchFamily="34" charset="0"/>
-                <a:ea typeface="Calibri" pitchFamily="34" charset="-122"/>
-                <a:cs typeface="Calibri" pitchFamily="34" charset="-120"/>
-              </a:rPr>
-              <a:t>Revenue growth on the same plant</a:t>
-            </a:r>
-            <a:endParaRPr lang="en-US" sz="1150" dirty="0"/>
-          </a:p>
-        </p:txBody>
-      </p:sp>
-      <p:sp>
-        <p:nvSpPr>
-          <p:cNvPr id="11" name="Text 9"/>
-          <p:cNvSpPr/>
-          <p:nvPr/>
-        </p:nvSpPr>
-        <p:spPr>
-          <a:xfrm>
-            <a:off x="3555416" y="2871216"/>
-            <a:ext cx="2238680" cy="457200"/>
-          </a:xfrm>
-          <a:prstGeom prst="rect">
-            <a:avLst/>
-          </a:prstGeom>
-          <a:noFill/>
-          <a:ln/>
-        </p:spPr>
-        <p:txBody>
-          <a:bodyPr wrap="square" lIns="0" tIns="0" rIns="0" bIns="0" rtlCol="0" anchor="ctr"/>
-          <a:lstStyle/>
-          <a:p>
-            <a:pPr indent="0" marL="0">
-              <a:buNone/>
-            </a:pPr>
-            <a:r>
-              <a:rPr lang="en-US" sz="950" dirty="0">
-                <a:solidFill>
-                  <a:srgbClr val="6B7684"/>
-                </a:solidFill>
-                <a:latin typeface="Calibri" pitchFamily="34" charset="0"/>
-                <a:ea typeface="Calibri" pitchFamily="34" charset="-122"/>
-                <a:cs typeface="Calibri" pitchFamily="34" charset="-120"/>
-              </a:rPr>
-              <a:t>FY21 trough to FY25-26, no expansion</a:t>
-            </a:r>
-            <a:endParaRPr lang="en-US" sz="950" dirty="0"/>
-          </a:p>
-        </p:txBody>
-      </p:sp>
-      <p:sp>
-        <p:nvSpPr>
-          <p:cNvPr id="12" name="Shape 10"/>
-          <p:cNvSpPr/>
-          <p:nvPr/>
-        </p:nvSpPr>
-        <p:spPr>
-          <a:xfrm>
-            <a:off x="6233008" y="1783080"/>
-            <a:ext cx="2567864" cy="1600200"/>
-          </a:xfrm>
-          <a:prstGeom prst="roundRect">
-            <a:avLst>
-              <a:gd name="adj" fmla="val 4571"/>
-            </a:avLst>
-          </a:prstGeom>
-          <a:solidFill>
-            <a:srgbClr val="F4F5F7"/>
-          </a:solidFill>
-          <a:ln/>
-          <a:effectLst>
-            <a:outerShdw sx="100000" sy="100000" kx="0" ky="0" algn="bl" rotWithShape="0" blurRad="76200" dist="25400" dir="5400000">
-              <a:srgbClr val="1C1F26">
-                <a:alpha val="10000"/>
-              </a:srgbClr>
-            </a:outerShdw>
-          </a:effectLst>
-        </p:spPr>
-      </p:sp>
-      <p:sp>
-        <p:nvSpPr>
-          <p:cNvPr id="13" name="Text 11"/>
-          <p:cNvSpPr/>
-          <p:nvPr/>
-        </p:nvSpPr>
-        <p:spPr>
-          <a:xfrm>
-            <a:off x="6397600" y="1920240"/>
-            <a:ext cx="2238680" cy="566928"/>
-          </a:xfrm>
-          <a:prstGeom prst="rect">
-            <a:avLst/>
-          </a:prstGeom>
-          <a:noFill/>
-          <a:ln/>
-        </p:spPr>
-        <p:txBody>
-          <a:bodyPr wrap="square" lIns="0" tIns="0" rIns="0" bIns="0" rtlCol="0" anchor="ctr"/>
-          <a:lstStyle/>
-          <a:p>
-            <a:pPr indent="0" marL="0">
-              <a:buNone/>
-            </a:pPr>
-            <a:r>
-              <a:rPr lang="en-US" sz="2700" b="1" dirty="0">
-                <a:solidFill>
-                  <a:srgbClr val="1C1F26"/>
-                </a:solidFill>
-                <a:latin typeface="Cambria" pitchFamily="34" charset="0"/>
-                <a:ea typeface="Cambria" pitchFamily="34" charset="-122"/>
-                <a:cs typeface="Cambria" pitchFamily="34" charset="-120"/>
-              </a:rPr>
-              <a:t>₹4.4 Cr</a:t>
-            </a:r>
-            <a:endParaRPr lang="en-US" sz="2700" dirty="0"/>
-          </a:p>
-        </p:txBody>
-      </p:sp>
-      <p:sp>
-        <p:nvSpPr>
-          <p:cNvPr id="14" name="Text 12"/>
-          <p:cNvSpPr/>
-          <p:nvPr/>
-        </p:nvSpPr>
-        <p:spPr>
-          <a:xfrm>
-            <a:off x="6397600" y="2487168"/>
-            <a:ext cx="2238680" cy="411480"/>
-          </a:xfrm>
-          <a:prstGeom prst="rect">
-            <a:avLst/>
-          </a:prstGeom>
-          <a:noFill/>
-          <a:ln/>
-        </p:spPr>
-        <p:txBody>
-          <a:bodyPr wrap="square" lIns="0" tIns="0" rIns="0" bIns="0" rtlCol="0" anchor="ctr"/>
-          <a:lstStyle/>
-          <a:p>
-            <a:pPr indent="0" marL="0">
-              <a:buNone/>
-            </a:pPr>
-            <a:r>
-              <a:rPr lang="en-US" sz="1150" b="1" dirty="0">
-                <a:solidFill>
-                  <a:srgbClr val="1C1F26"/>
-                </a:solidFill>
-                <a:latin typeface="Calibri" pitchFamily="34" charset="0"/>
-                <a:ea typeface="Calibri" pitchFamily="34" charset="-122"/>
-                <a:cs typeface="Calibri" pitchFamily="34" charset="-120"/>
-              </a:rPr>
-              <a:t>Net worth recovered since FY22</a:t>
-            </a:r>
-            <a:endParaRPr lang="en-US" sz="1150" dirty="0"/>
-          </a:p>
-        </p:txBody>
-      </p:sp>
-      <p:sp>
-        <p:nvSpPr>
-          <p:cNvPr id="15" name="Text 13"/>
-          <p:cNvSpPr/>
-          <p:nvPr/>
-        </p:nvSpPr>
-        <p:spPr>
-          <a:xfrm>
-            <a:off x="6397600" y="2871216"/>
-            <a:ext cx="2238680" cy="457200"/>
-          </a:xfrm>
-          <a:prstGeom prst="rect">
-            <a:avLst/>
-          </a:prstGeom>
-          <a:noFill/>
-          <a:ln/>
-        </p:spPr>
-        <p:txBody>
-          <a:bodyPr wrap="square" lIns="0" tIns="0" rIns="0" bIns="0" rtlCol="0" anchor="ctr"/>
-          <a:lstStyle/>
-          <a:p>
-            <a:pPr indent="0" marL="0">
-              <a:buNone/>
-            </a:pPr>
-            <a:r>
-              <a:rPr lang="en-US" sz="950" dirty="0">
-                <a:solidFill>
-                  <a:srgbClr val="6B7684"/>
-                </a:solidFill>
-                <a:latin typeface="Calibri" pitchFamily="34" charset="0"/>
-                <a:ea typeface="Calibri" pitchFamily="34" charset="-122"/>
-                <a:cs typeface="Calibri" pitchFamily="34" charset="-120"/>
-              </a:rPr>
-              <a:t>-₹5.94 Cr → -₹1.54 Cr (FY25)</a:t>
-            </a:r>
-            <a:endParaRPr lang="en-US" sz="950" dirty="0"/>
-          </a:p>
-        </p:txBody>
-      </p:sp>
-      <p:sp>
-        <p:nvSpPr>
-          <p:cNvPr id="16" name="Shape 14"/>
-          <p:cNvSpPr/>
-          <p:nvPr/>
-        </p:nvSpPr>
-        <p:spPr>
-          <a:xfrm>
-            <a:off x="9075191" y="1783080"/>
-            <a:ext cx="2567864" cy="1600200"/>
-          </a:xfrm>
-          <a:prstGeom prst="roundRect">
-            <a:avLst>
-              <a:gd name="adj" fmla="val 4571"/>
-            </a:avLst>
-          </a:prstGeom>
-          <a:solidFill>
-            <a:srgbClr val="F4F5F7"/>
-          </a:solidFill>
-          <a:ln/>
-          <a:effectLst>
-            <a:outerShdw sx="100000" sy="100000" kx="0" ky="0" algn="bl" rotWithShape="0" blurRad="76200" dist="25400" dir="5400000">
-              <a:srgbClr val="1C1F26">
-                <a:alpha val="10000"/>
-              </a:srgbClr>
-            </a:outerShdw>
-          </a:effectLst>
-        </p:spPr>
-      </p:sp>
-      <p:sp>
-        <p:nvSpPr>
-          <p:cNvPr id="17" name="Text 15"/>
-          <p:cNvSpPr/>
-          <p:nvPr/>
-        </p:nvSpPr>
-        <p:spPr>
-          <a:xfrm>
-            <a:off x="9239783" y="1920240"/>
-            <a:ext cx="2238680" cy="566928"/>
-          </a:xfrm>
-          <a:prstGeom prst="rect">
-            <a:avLst/>
-          </a:prstGeom>
-          <a:noFill/>
-          <a:ln/>
-        </p:spPr>
-        <p:txBody>
-          <a:bodyPr wrap="square" lIns="0" tIns="0" rIns="0" bIns="0" rtlCol="0" anchor="ctr"/>
-          <a:lstStyle/>
-          <a:p>
-            <a:pPr indent="0" marL="0">
-              <a:buNone/>
-            </a:pPr>
-            <a:r>
-              <a:rPr lang="en-US" sz="2700" b="1" dirty="0">
-                <a:solidFill>
-                  <a:srgbClr val="B8453F"/>
-                </a:solidFill>
-                <a:latin typeface="Cambria" pitchFamily="34" charset="0"/>
-                <a:ea typeface="Cambria" pitchFamily="34" charset="-122"/>
-                <a:cs typeface="Cambria" pitchFamily="34" charset="-120"/>
-              </a:rPr>
-              <a:t>~80%</a:t>
-            </a:r>
-            <a:endParaRPr lang="en-US" sz="2700" dirty="0"/>
-          </a:p>
-        </p:txBody>
-      </p:sp>
-      <p:sp>
-        <p:nvSpPr>
-          <p:cNvPr id="18" name="Text 16"/>
-          <p:cNvSpPr/>
-          <p:nvPr/>
-        </p:nvSpPr>
-        <p:spPr>
-          <a:xfrm>
-            <a:off x="9239783" y="2487168"/>
-            <a:ext cx="2238680" cy="411480"/>
-          </a:xfrm>
-          <a:prstGeom prst="rect">
-            <a:avLst/>
-          </a:prstGeom>
-          <a:noFill/>
-          <a:ln/>
-        </p:spPr>
-        <p:txBody>
-          <a:bodyPr wrap="square" lIns="0" tIns="0" rIns="0" bIns="0" rtlCol="0" anchor="ctr"/>
-          <a:lstStyle/>
-          <a:p>
-            <a:pPr indent="0" marL="0">
-              <a:buNone/>
-            </a:pPr>
-            <a:r>
-              <a:rPr lang="en-US" sz="1150" b="1" dirty="0">
-                <a:solidFill>
-                  <a:srgbClr val="1C1F26"/>
-                </a:solidFill>
-                <a:latin typeface="Calibri" pitchFamily="34" charset="0"/>
-                <a:ea typeface="Calibri" pitchFamily="34" charset="-122"/>
-                <a:cs typeface="Calibri" pitchFamily="34" charset="-120"/>
-              </a:rPr>
-              <a:t>Revenue from 2 customers</a:t>
-            </a:r>
-            <a:endParaRPr lang="en-US" sz="1150" dirty="0"/>
-          </a:p>
-        </p:txBody>
-      </p:sp>
-      <p:sp>
-        <p:nvSpPr>
-          <p:cNvPr id="19" name="Text 17"/>
-          <p:cNvSpPr/>
-          <p:nvPr/>
-        </p:nvSpPr>
-        <p:spPr>
-          <a:xfrm>
-            <a:off x="9239783" y="2871216"/>
-            <a:ext cx="2238680" cy="457200"/>
-          </a:xfrm>
-          <a:prstGeom prst="rect">
-            <a:avLst/>
-          </a:prstGeom>
-          <a:noFill/>
-          <a:ln/>
-        </p:spPr>
-        <p:txBody>
-          <a:bodyPr wrap="square" lIns="0" tIns="0" rIns="0" bIns="0" rtlCol="0" anchor="ctr"/>
-          <a:lstStyle/>
-          <a:p>
-            <a:pPr indent="0" marL="0">
-              <a:buNone/>
-            </a:pPr>
-            <a:r>
-              <a:rPr lang="en-US" sz="950" dirty="0">
-                <a:solidFill>
-                  <a:srgbClr val="6B7684"/>
-                </a:solidFill>
-                <a:latin typeface="Calibri" pitchFamily="34" charset="0"/>
-                <a:ea typeface="Calibri" pitchFamily="34" charset="-122"/>
-                <a:cs typeface="Calibri" pitchFamily="34" charset="-120"/>
-              </a:rPr>
-              <a:t>Tega + Escorts — key risk</a:t>
-            </a:r>
-            <a:endParaRPr lang="en-US" sz="950" dirty="0"/>
-          </a:p>
-        </p:txBody>
-      </p:sp>
-      <p:sp>
-        <p:nvSpPr>
-          <p:cNvPr id="20" name="Shape 18"/>
-          <p:cNvSpPr/>
-          <p:nvPr/>
-        </p:nvSpPr>
-        <p:spPr>
-          <a:xfrm>
-            <a:off x="548640" y="3749040"/>
-            <a:ext cx="5364328" cy="2331720"/>
-          </a:xfrm>
-          <a:prstGeom prst="roundRect">
-            <a:avLst>
-              <a:gd name="adj" fmla="val 3137"/>
-            </a:avLst>
-          </a:prstGeom>
-          <a:solidFill>
-            <a:srgbClr val="EDF5EF"/>
-          </a:solidFill>
-          <a:ln/>
-        </p:spPr>
-      </p:sp>
-      <p:sp>
-        <p:nvSpPr>
-          <p:cNvPr id="21" name="Shape 19"/>
-          <p:cNvSpPr/>
-          <p:nvPr/>
-        </p:nvSpPr>
-        <p:spPr>
-          <a:xfrm>
-            <a:off x="777240" y="3977640"/>
-            <a:ext cx="384048" cy="384048"/>
-          </a:xfrm>
-          <a:prstGeom prst="ellipse">
-            <a:avLst/>
-          </a:prstGeom>
-          <a:solidFill>
-            <a:srgbClr val="3F8F5F"/>
-          </a:solidFill>
-          <a:ln/>
-        </p:spPr>
-      </p:sp>
-      <p:sp>
-        <p:nvSpPr>
-          <p:cNvPr id="22" name="Text 20"/>
-          <p:cNvSpPr/>
-          <p:nvPr/>
-        </p:nvSpPr>
-        <p:spPr>
-          <a:xfrm>
-            <a:off x="777240" y="3977640"/>
-            <a:ext cx="384048" cy="384048"/>
-          </a:xfrm>
-          <a:prstGeom prst="rect">
-            <a:avLst/>
-          </a:prstGeom>
-          <a:noFill/>
-          <a:ln/>
-        </p:spPr>
-        <p:txBody>
-          <a:bodyPr wrap="square" lIns="0" tIns="0" rIns="0" bIns="0" rtlCol="0" anchor="ctr"/>
-          <a:lstStyle/>
-          <a:p>
-            <a:pPr algn="ctr" indent="0" marL="0">
-              <a:buNone/>
-            </a:pPr>
-            <a:r>
-              <a:rPr lang="en-US" sz="1092" b="1" dirty="0">
-                <a:solidFill>
-                  <a:srgbClr val="FFFFFF"/>
-                </a:solidFill>
-                <a:latin typeface="Calibri" pitchFamily="34" charset="0"/>
-                <a:ea typeface="Calibri" pitchFamily="34" charset="-122"/>
-                <a:cs typeface="Calibri" pitchFamily="34" charset="-120"/>
-              </a:rPr>
-              <a:t>✓</a:t>
-            </a:r>
-            <a:endParaRPr lang="en-US" sz="1092" dirty="0"/>
-          </a:p>
-        </p:txBody>
-      </p:sp>
-      <p:sp>
-        <p:nvSpPr>
-          <p:cNvPr id="23" name="Text 21"/>
-          <p:cNvSpPr/>
-          <p:nvPr/>
-        </p:nvSpPr>
-        <p:spPr>
-          <a:xfrm>
-            <a:off x="1325880" y="3977640"/>
-            <a:ext cx="4358488" cy="365760"/>
-          </a:xfrm>
-          <a:prstGeom prst="rect">
-            <a:avLst/>
-          </a:prstGeom>
-          <a:noFill/>
-          <a:ln/>
-        </p:spPr>
-        <p:txBody>
-          <a:bodyPr wrap="square" lIns="0" tIns="0" rIns="0" bIns="0" rtlCol="0" anchor="ctr"/>
-          <a:lstStyle/>
-          <a:p>
-            <a:pPr indent="0" marL="0">
-              <a:buNone/>
-            </a:pPr>
-            <a:r>
-              <a:rPr lang="en-US" sz="1400" b="1" dirty="0">
-                <a:solidFill>
-                  <a:srgbClr val="1C1F26"/>
-                </a:solidFill>
-                <a:latin typeface="Calibri" pitchFamily="34" charset="0"/>
-                <a:ea typeface="Calibri" pitchFamily="34" charset="-122"/>
-                <a:cs typeface="Calibri" pitchFamily="34" charset="-120"/>
-              </a:rPr>
-              <a:t>The Investment Case</a:t>
-            </a:r>
-            <a:endParaRPr lang="en-US" sz="1400" dirty="0"/>
-          </a:p>
-        </p:txBody>
-      </p:sp>
-      <p:sp>
-        <p:nvSpPr>
-          <p:cNvPr id="24" name="Text 22"/>
-          <p:cNvSpPr/>
-          <p:nvPr/>
-        </p:nvSpPr>
-        <p:spPr>
-          <a:xfrm>
-            <a:off x="822960" y="4434840"/>
-            <a:ext cx="4815688" cy="1508760"/>
-          </a:xfrm>
-          <a:prstGeom prst="rect">
-            <a:avLst/>
-          </a:prstGeom>
-          <a:noFill/>
-          <a:ln/>
-        </p:spPr>
-        <p:txBody>
-          <a:bodyPr wrap="square" lIns="0" tIns="0" rIns="0" bIns="0" rtlCol="0" anchor="ctr"/>
-          <a:lstStyle/>
-          <a:p>
-            <a:pPr marL="342900" indent="-342900">
-              <a:lnSpc>
-                <a:spcPct val="105000"/>
-              </a:lnSpc>
-              <a:spcAft>
-                <a:spcPts val="800"/>
-              </a:spcAft>
-              <a:buSzPct val="100000"/>
-              <a:buChar char="•"/>
-            </a:pPr>
-            <a:r>
-              <a:rPr lang="en-US" sz="1100" dirty="0">
-                <a:solidFill>
-                  <a:srgbClr val="1C1F26"/>
-                </a:solidFill>
-                <a:latin typeface="Calibri" pitchFamily="34" charset="0"/>
-                <a:ea typeface="Calibri" pitchFamily="34" charset="-122"/>
-                <a:cs typeface="Calibri" pitchFamily="34" charset="-120"/>
-              </a:rPr>
-              <a:t>A paradigm built deliberately, not inherited: repositioned from commodity foundry to engineering company, then protected the one thing that couldn't be commoditized — heat-treatment know-how.</a:t>
-            </a:r>
-            <a:endParaRPr lang="en-US" sz="1100" dirty="0"/>
-          </a:p>
-          <a:p>
-            <a:pPr marL="342900" indent="-342900">
-              <a:lnSpc>
-                <a:spcPct val="105000"/>
-              </a:lnSpc>
-              <a:spcAft>
-                <a:spcPts val="800"/>
-              </a:spcAft>
-              <a:buSzPct val="100000"/>
-              <a:buChar char="•"/>
-            </a:pPr>
-            <a:r>
-              <a:rPr lang="en-US" sz="1100" dirty="0">
-                <a:solidFill>
-                  <a:srgbClr val="1C1F26"/>
-                </a:solidFill>
-                <a:latin typeface="Calibri" pitchFamily="34" charset="0"/>
-                <a:ea typeface="Calibri" pitchFamily="34" charset="-122"/>
-                <a:cs typeface="Calibri" pitchFamily="34" charset="-120"/>
-              </a:rPr>
-              <a:t>The moat now runs on operations: utilization has climbed from ~55% (2018) to ~81% (Aug 2025) on the same 1990s-era plant — revenue has more than tripled without a new factory.</a:t>
-            </a:r>
-            <a:endParaRPr lang="en-US" sz="1100" dirty="0"/>
-          </a:p>
-          <a:p>
-            <a:pPr marL="342900" indent="-342900">
-              <a:lnSpc>
-                <a:spcPct val="105000"/>
-              </a:lnSpc>
-              <a:buSzPct val="100000"/>
-              <a:buChar char="•"/>
-            </a:pPr>
-            <a:r>
-              <a:rPr lang="en-US" sz="1100" dirty="0">
-                <a:solidFill>
-                  <a:srgbClr val="1C1F26"/>
-                </a:solidFill>
-                <a:latin typeface="Calibri" pitchFamily="34" charset="0"/>
-                <a:ea typeface="Calibri" pitchFamily="34" charset="-122"/>
-                <a:cs typeface="Calibri" pitchFamily="34" charset="-120"/>
-              </a:rPr>
-              <a:t>Tier-1 OEM integration (Tega, Escorts, Komatsu-qualified) at industry-leading contribution per kg on select parts.</a:t>
-            </a:r>
-            <a:endParaRPr lang="en-US" sz="1100" dirty="0"/>
-          </a:p>
-        </p:txBody>
-      </p:sp>
-      <p:sp>
-        <p:nvSpPr>
-          <p:cNvPr id="25" name="Shape 23"/>
-          <p:cNvSpPr/>
-          <p:nvPr/>
-        </p:nvSpPr>
-        <p:spPr>
-          <a:xfrm>
-            <a:off x="6278728" y="3749040"/>
-            <a:ext cx="5364328" cy="2331720"/>
-          </a:xfrm>
-          <a:prstGeom prst="roundRect">
-            <a:avLst>
-              <a:gd name="adj" fmla="val 3137"/>
-            </a:avLst>
-          </a:prstGeom>
-          <a:solidFill>
-            <a:srgbClr val="FBEEEC"/>
-          </a:solidFill>
-          <a:ln/>
-        </p:spPr>
-      </p:sp>
-      <p:sp>
-        <p:nvSpPr>
-          <p:cNvPr id="26" name="Shape 24"/>
-          <p:cNvSpPr/>
-          <p:nvPr/>
-        </p:nvSpPr>
-        <p:spPr>
-          <a:xfrm>
-            <a:off x="6507328" y="3977640"/>
-            <a:ext cx="384048" cy="384048"/>
-          </a:xfrm>
-          <a:prstGeom prst="ellipse">
-            <a:avLst/>
-          </a:prstGeom>
-          <a:solidFill>
-            <a:srgbClr val="B8453F"/>
-          </a:solidFill>
-          <a:ln/>
-        </p:spPr>
-      </p:sp>
-      <p:sp>
-        <p:nvSpPr>
-          <p:cNvPr id="27" name="Text 25"/>
-          <p:cNvSpPr/>
-          <p:nvPr/>
-        </p:nvSpPr>
-        <p:spPr>
-          <a:xfrm>
-            <a:off x="6507328" y="3977640"/>
-            <a:ext cx="384048" cy="384048"/>
-          </a:xfrm>
-          <a:prstGeom prst="rect">
-            <a:avLst/>
-          </a:prstGeom>
-          <a:noFill/>
-          <a:ln/>
-        </p:spPr>
-        <p:txBody>
-          <a:bodyPr wrap="square" lIns="0" tIns="0" rIns="0" bIns="0" rtlCol="0" anchor="ctr"/>
-          <a:lstStyle/>
-          <a:p>
-            <a:pPr algn="ctr" indent="0" marL="0">
-              <a:buNone/>
-            </a:pPr>
-            <a:r>
-              <a:rPr lang="en-US" sz="1092" b="1" dirty="0">
-                <a:solidFill>
-                  <a:srgbClr val="FFFFFF"/>
-                </a:solidFill>
-                <a:latin typeface="Calibri" pitchFamily="34" charset="0"/>
-                <a:ea typeface="Calibri" pitchFamily="34" charset="-122"/>
-                <a:cs typeface="Calibri" pitchFamily="34" charset="-120"/>
-              </a:rPr>
-              <a:t>!</a:t>
-            </a:r>
-            <a:endParaRPr lang="en-US" sz="1092" dirty="0"/>
-          </a:p>
-        </p:txBody>
-      </p:sp>
-      <p:sp>
-        <p:nvSpPr>
-          <p:cNvPr id="28" name="Text 26"/>
-          <p:cNvSpPr/>
-          <p:nvPr/>
-        </p:nvSpPr>
-        <p:spPr>
-          <a:xfrm>
-            <a:off x="7055968" y="3977640"/>
-            <a:ext cx="4358488" cy="365760"/>
-          </a:xfrm>
-          <a:prstGeom prst="rect">
-            <a:avLst/>
-          </a:prstGeom>
-          <a:noFill/>
-          <a:ln/>
-        </p:spPr>
-        <p:txBody>
-          <a:bodyPr wrap="square" lIns="0" tIns="0" rIns="0" bIns="0" rtlCol="0" anchor="ctr"/>
-          <a:lstStyle/>
-          <a:p>
-            <a:pPr indent="0" marL="0">
-              <a:buNone/>
-            </a:pPr>
-            <a:r>
-              <a:rPr lang="en-US" sz="1400" b="1" dirty="0">
-                <a:solidFill>
-                  <a:srgbClr val="1C1F26"/>
-                </a:solidFill>
-                <a:latin typeface="Calibri" pitchFamily="34" charset="0"/>
-                <a:ea typeface="Calibri" pitchFamily="34" charset="-122"/>
-                <a:cs typeface="Calibri" pitchFamily="34" charset="-120"/>
-              </a:rPr>
-              <a:t>What Investors Should Probe</a:t>
-            </a:r>
-            <a:endParaRPr lang="en-US" sz="1400" dirty="0"/>
-          </a:p>
-        </p:txBody>
-      </p:sp>
-      <p:sp>
-        <p:nvSpPr>
-          <p:cNvPr id="29" name="Text 27"/>
-          <p:cNvSpPr/>
-          <p:nvPr/>
-        </p:nvSpPr>
-        <p:spPr>
-          <a:xfrm>
-            <a:off x="6553048" y="4434840"/>
-            <a:ext cx="4815688" cy="1508760"/>
-          </a:xfrm>
-          <a:prstGeom prst="rect">
-            <a:avLst/>
-          </a:prstGeom>
-          <a:noFill/>
-          <a:ln/>
-        </p:spPr>
-        <p:txBody>
-          <a:bodyPr wrap="square" lIns="0" tIns="0" rIns="0" bIns="0" rtlCol="0" anchor="ctr"/>
-          <a:lstStyle/>
-          <a:p>
-            <a:pPr marL="342900" indent="-342900">
-              <a:lnSpc>
-                <a:spcPct val="105000"/>
-              </a:lnSpc>
-              <a:spcAft>
-                <a:spcPts val="800"/>
-              </a:spcAft>
-              <a:buSzPct val="100000"/>
-              <a:buChar char="•"/>
-            </a:pPr>
-            <a:r>
-              <a:rPr lang="en-US" sz="1100" dirty="0">
-                <a:solidFill>
-                  <a:srgbClr val="1C1F26"/>
-                </a:solidFill>
-                <a:latin typeface="Calibri" pitchFamily="34" charset="0"/>
-                <a:ea typeface="Calibri" pitchFamily="34" charset="-122"/>
-                <a:cs typeface="Calibri" pitchFamily="34" charset="-120"/>
-              </a:rPr>
-              <a:t>Net worth is still negative (-₹1.54 Cr, FY25) and the most recent quarter (Q1 FY26-27) shows sales down 42% YoY.</a:t>
-            </a:r>
-            <a:endParaRPr lang="en-US" sz="1100" dirty="0"/>
-          </a:p>
-          <a:p>
-            <a:pPr marL="342900" indent="-342900">
-              <a:lnSpc>
-                <a:spcPct val="105000"/>
-              </a:lnSpc>
-              <a:spcAft>
-                <a:spcPts val="800"/>
-              </a:spcAft>
-              <a:buSzPct val="100000"/>
-              <a:buChar char="•"/>
-            </a:pPr>
-            <a:r>
-              <a:rPr lang="en-US" sz="1100" dirty="0">
-                <a:solidFill>
-                  <a:srgbClr val="1C1F26"/>
-                </a:solidFill>
-                <a:latin typeface="Calibri" pitchFamily="34" charset="0"/>
-                <a:ea typeface="Calibri" pitchFamily="34" charset="-122"/>
-                <a:cs typeface="Calibri" pitchFamily="34" charset="-120"/>
-              </a:rPr>
-              <a:t>Rejection/scrap rate has climbed for four straight periods, reaching 10.1% — the operational skill behind the moat hasn't visibly fixed this yet.</a:t>
-            </a:r>
-            <a:endParaRPr lang="en-US" sz="1100" dirty="0"/>
-          </a:p>
-          <a:p>
-            <a:pPr marL="342900" indent="-342900">
-              <a:lnSpc>
-                <a:spcPct val="105000"/>
-              </a:lnSpc>
-              <a:buSzPct val="100000"/>
-              <a:buChar char="•"/>
-            </a:pPr>
-            <a:r>
-              <a:rPr lang="en-US" sz="1100" dirty="0">
-                <a:solidFill>
-                  <a:srgbClr val="1C1F26"/>
-                </a:solidFill>
-                <a:latin typeface="Calibri" pitchFamily="34" charset="0"/>
-                <a:ea typeface="Calibri" pitchFamily="34" charset="-122"/>
-                <a:cs typeface="Calibri" pitchFamily="34" charset="-120"/>
-              </a:rPr>
-              <a:t>Two customers drive ~80% of contribution; recurring auditor qualification remains open.</a:t>
-            </a:r>
-            <a:endParaRPr lang="en-US" sz="1100" dirty="0"/>
-          </a:p>
-        </p:txBody>
-      </p:sp>
-      <p:sp>
-        <p:nvSpPr>
-          <p:cNvPr id="30" name="Text 28"/>
-          <p:cNvSpPr/>
-          <p:nvPr/>
-        </p:nvSpPr>
-        <p:spPr>
-          <a:xfrm>
-            <a:off x="548640" y="6473952"/>
-            <a:ext cx="11094415" cy="274320"/>
-          </a:xfrm>
-          <a:prstGeom prst="rect">
-            <a:avLst/>
-          </a:prstGeom>
-          <a:noFill/>
-          <a:ln/>
-        </p:spPr>
-        <p:txBody>
-          <a:bodyPr wrap="square" lIns="0" tIns="0" rIns="0" bIns="0" rtlCol="0" anchor="ctr"/>
-          <a:lstStyle/>
-          <a:p>
-            <a:pPr algn="l" indent="0" marL="0">
-              <a:buNone/>
-            </a:pPr>
-            <a:r>
-              <a:rPr lang="en-US" sz="800" dirty="0">
-                <a:solidFill>
-                  <a:srgbClr val="9AA2AD"/>
-                </a:solidFill>
-                <a:latin typeface="Calibri" pitchFamily="34" charset="0"/>
-                <a:ea typeface="Calibri" pitchFamily="34" charset="-122"/>
-                <a:cs typeface="Calibri" pitchFamily="34" charset="-120"/>
-              </a:rPr>
-              <a:t>DATRE CORPORATION LIMITED  |  CONFIDENTIAL — PREPARED FOR INVESTOR DISCUSSION</a:t>
-            </a:r>
-            <a:endParaRPr lang="en-US" sz="800" dirty="0"/>
-          </a:p>
-        </p:txBody>
-      </p:sp>
-      <p:sp>
-        <p:nvSpPr>
-          <p:cNvPr id="31" name="Text 29"/>
-          <p:cNvSpPr/>
-          <p:nvPr/>
-        </p:nvSpPr>
-        <p:spPr>
-          <a:xfrm>
-            <a:off x="11277295" y="6473952"/>
-            <a:ext cx="457200" cy="274320"/>
-          </a:xfrm>
-          <a:prstGeom prst="rect">
-            <a:avLst/>
-          </a:prstGeom>
-          <a:noFill/>
-          <a:ln/>
-        </p:spPr>
-        <p:txBody>
-          <a:bodyPr wrap="square" lIns="0" tIns="0" rIns="0" bIns="0" rtlCol="0" anchor="ctr"/>
-          <a:lstStyle/>
-          <a:p>
-            <a:pPr algn="r" indent="0" marL="0">
-              <a:buNone/>
-            </a:pPr>
-            <a:r>
-              <a:rPr lang="en-US" sz="800" dirty="0">
-                <a:solidFill>
-                  <a:srgbClr val="9AA2AD"/>
-                </a:solidFill>
-                <a:latin typeface="Calibri" pitchFamily="34" charset="0"/>
-                <a:ea typeface="Calibri" pitchFamily="34" charset="-122"/>
-                <a:cs typeface="Calibri" pitchFamily="34" charset="-120"/>
-              </a:rPr>
-              <a:t>2</a:t>
-            </a:r>
-            <a:endParaRPr lang="en-US" sz="800" dirty="0"/>
-          </a:p>
-        </p:txBody>
-      </p:sp>
-    </p:spTree>
-  </p:cSld>
-  <p:clrMapOvr>
-    <a:masterClrMapping/>
-  </p:clrMapOvr>
-</p:sld>
-</file>
-
-<file path=ppt/slides/slide20.xml><?xml version="1.0" encoding="utf-8"?>
-<p:sld xmlns:a="http://schemas.openxmlformats.org/drawingml/2006/main" xmlns:r="http://schemas.openxmlformats.org/officeDocument/2006/relationships" xmlns:p="http://schemas.openxmlformats.org/presentationml/2006/main">
-  <p:cSld name="Slide 20">
-    <p:bg>
-      <p:bgPr>
-        <a:solidFill>
-          <a:srgbClr val="FFFFFF"/>
-        </a:solidFill>
-      </p:bgPr>
-    </p:bg>
-    <p:spTree>
-      <p:nvGrpSpPr>
-        <p:cNvPr id="1" name=""/>
-        <p:cNvGrpSpPr/>
-        <p:nvPr/>
-      </p:nvGrpSpPr>
-      <p:grpSpPr>
-        <a:xfrm>
-          <a:off x="0" y="0"/>
-          <a:ext cx="0" cy="0"/>
-          <a:chOff x="0" y="0"/>
-          <a:chExt cx="0" cy="0"/>
-        </a:xfrm>
-      </p:grpSpPr>
-      <p:sp>
-        <p:nvSpPr>
-          <p:cNvPr id="2" name="Text 0"/>
-          <p:cNvSpPr/>
-          <p:nvPr/>
-        </p:nvSpPr>
-        <p:spPr>
-          <a:xfrm>
-            <a:off x="548640" y="457200"/>
-            <a:ext cx="4572000" cy="274320"/>
-          </a:xfrm>
-          <a:prstGeom prst="rect">
-            <a:avLst/>
-          </a:prstGeom>
-          <a:noFill/>
-          <a:ln/>
-        </p:spPr>
-        <p:txBody>
-          <a:bodyPr wrap="square" lIns="0" tIns="0" rIns="0" bIns="0" rtlCol="0" anchor="ctr"/>
-          <a:lstStyle/>
-          <a:p>
-            <a:pPr indent="0" marL="0">
-              <a:buNone/>
-            </a:pPr>
-            <a:r>
-              <a:rPr lang="en-US" sz="1100" b="1" spc="200" kern="0" dirty="0">
-                <a:solidFill>
-                  <a:srgbClr val="D9622B"/>
-                </a:solidFill>
-                <a:latin typeface="Calibri" pitchFamily="34" charset="0"/>
-                <a:ea typeface="Calibri" pitchFamily="34" charset="-122"/>
-                <a:cs typeface="Calibri" pitchFamily="34" charset="-120"/>
-              </a:rPr>
-              <a:t>COMPETITIVE POSITION</a:t>
-            </a:r>
-            <a:endParaRPr lang="en-US" sz="1100" dirty="0"/>
-          </a:p>
-        </p:txBody>
-      </p:sp>
-      <p:sp>
-        <p:nvSpPr>
-          <p:cNvPr id="3" name="Text 1"/>
-          <p:cNvSpPr/>
-          <p:nvPr/>
-        </p:nvSpPr>
-        <p:spPr>
-          <a:xfrm>
-            <a:off x="548640" y="841248"/>
-            <a:ext cx="11094415" cy="685800"/>
-          </a:xfrm>
-          <a:prstGeom prst="rect">
-            <a:avLst/>
-          </a:prstGeom>
-          <a:noFill/>
-          <a:ln/>
-        </p:spPr>
-        <p:txBody>
-          <a:bodyPr wrap="square" lIns="0" tIns="0" rIns="0" bIns="0" rtlCol="0" anchor="ctr"/>
-          <a:lstStyle/>
-          <a:p>
-            <a:pPr algn="l" indent="0" marL="0">
-              <a:buNone/>
-            </a:pPr>
-            <a:r>
-              <a:rPr lang="en-US" sz="3000" b="1" dirty="0">
-                <a:solidFill>
-                  <a:srgbClr val="1C1F26"/>
-                </a:solidFill>
-                <a:latin typeface="Cambria" pitchFamily="34" charset="0"/>
-                <a:ea typeface="Cambria" pitchFamily="34" charset="-122"/>
-                <a:cs typeface="Cambria" pitchFamily="34" charset="-120"/>
-              </a:rPr>
               <a:t>Scale and margin, against named Indian foundry peers</a:t>
             </a:r>
             <a:endParaRPr lang="en-US" sz="3000" dirty="0"/>
@@ -15370,7 +17141,7 @@
       </p:sp>
       <p:graphicFrame>
         <p:nvGraphicFramePr>
-          <p:cNvPr id="21" name="Table 0"/>
+          <p:cNvPr id="23" name="Table 0"/>
           <p:cNvGraphicFramePr>
             <a:graphicFrameLocks noGrp="1"/>
           </p:cNvGraphicFramePr>
@@ -18290,7 +20061,7 @@
                 <a:ea typeface="Calibri" pitchFamily="34" charset="-122"/>
                 <a:cs typeface="Calibri" pitchFamily="34" charset="-120"/>
               </a:rPr>
-              <a:t>20</a:t>
+              <a:t>22</a:t>
             </a:r>
             <a:endParaRPr lang="en-US" sz="800" dirty="0"/>
           </a:p>
@@ -18304,9 +20075,9 @@
 </p:sld>
 </file>
 
-<file path=ppt/slides/slide21.xml><?xml version="1.0" encoding="utf-8"?>
+<file path=ppt/slides/slide23.xml><?xml version="1.0" encoding="utf-8"?>
 <p:sld xmlns:a="http://schemas.openxmlformats.org/drawingml/2006/main" xmlns:r="http://schemas.openxmlformats.org/officeDocument/2006/relationships" xmlns:p="http://schemas.openxmlformats.org/presentationml/2006/main">
-  <p:cSld name="Slide 21">
+  <p:cSld name="Slide 23">
     <p:bg>
       <p:bgPr>
         <a:solidFill>
@@ -19042,7 +20813,7 @@
                 <a:ea typeface="Calibri" pitchFamily="34" charset="-122"/>
                 <a:cs typeface="Calibri" pitchFamily="34" charset="-120"/>
               </a:rPr>
-              <a:t>21</a:t>
+              <a:t>23</a:t>
             </a:r>
             <a:endParaRPr lang="en-US" sz="800" dirty="0"/>
           </a:p>
@@ -19056,9 +20827,9 @@
 </p:sld>
 </file>
 
-<file path=ppt/slides/slide22.xml><?xml version="1.0" encoding="utf-8"?>
+<file path=ppt/slides/slide24.xml><?xml version="1.0" encoding="utf-8"?>
 <p:sld xmlns:a="http://schemas.openxmlformats.org/drawingml/2006/main" xmlns:r="http://schemas.openxmlformats.org/officeDocument/2006/relationships" xmlns:p="http://schemas.openxmlformats.org/presentationml/2006/main">
-  <p:cSld name="Slide 22">
+  <p:cSld name="Slide 24">
     <p:bg>
       <p:bgPr>
         <a:solidFill>
@@ -19946,7 +21717,7 @@
                 <a:ea typeface="Calibri" pitchFamily="34" charset="-122"/>
                 <a:cs typeface="Calibri" pitchFamily="34" charset="-120"/>
               </a:rPr>
-              <a:t>22</a:t>
+              <a:t>24</a:t>
             </a:r>
             <a:endParaRPr lang="en-US" sz="800" dirty="0"/>
           </a:p>
@@ -19960,9 +21731,9 @@
 </p:sld>
 </file>
 
-<file path=ppt/slides/slide23.xml><?xml version="1.0" encoding="utf-8"?>
+<file path=ppt/slides/slide25.xml><?xml version="1.0" encoding="utf-8"?>
 <p:sld xmlns:a="http://schemas.openxmlformats.org/drawingml/2006/main" xmlns:r="http://schemas.openxmlformats.org/officeDocument/2006/relationships" xmlns:p="http://schemas.openxmlformats.org/presentationml/2006/main">
-  <p:cSld name="Slide 23">
+  <p:cSld name="Slide 25">
     <p:bg>
       <p:bgPr>
         <a:solidFill>
@@ -20669,7 +22440,7 @@
                 <a:ea typeface="Calibri" pitchFamily="34" charset="-122"/>
                 <a:cs typeface="Calibri" pitchFamily="34" charset="-120"/>
               </a:rPr>
-              <a:t>23</a:t>
+              <a:t>25</a:t>
             </a:r>
             <a:endParaRPr lang="en-US" sz="800" dirty="0"/>
           </a:p>
@@ -20683,9 +22454,9 @@
 </p:sld>
 </file>
 
-<file path=ppt/slides/slide24.xml><?xml version="1.0" encoding="utf-8"?>
+<file path=ppt/slides/slide26.xml><?xml version="1.0" encoding="utf-8"?>
 <p:sld xmlns:a="http://schemas.openxmlformats.org/drawingml/2006/main" xmlns:r="http://schemas.openxmlformats.org/officeDocument/2006/relationships" xmlns:p="http://schemas.openxmlformats.org/presentationml/2006/main">
-  <p:cSld name="Slide 24">
+  <p:cSld name="Slide 26">
     <p:bg>
       <p:bgPr>
         <a:solidFill>
@@ -21134,7 +22905,7 @@
                 <a:ea typeface="Calibri" pitchFamily="34" charset="-122"/>
                 <a:cs typeface="Calibri" pitchFamily="34" charset="-120"/>
               </a:rPr>
-              <a:t>24</a:t>
+              <a:t>26</a:t>
             </a:r>
             <a:endParaRPr lang="en-US" sz="800" dirty="0"/>
           </a:p>
@@ -24406,7 +26177,7 @@
                 <a:ea typeface="Calibri" pitchFamily="34" charset="-122"/>
                 <a:cs typeface="Calibri" pitchFamily="34" charset="-120"/>
               </a:rPr>
-              <a:t>Why it matters for pricing power: the Sona Comstar knuckle-casting repricing (slide 18) is the same logic in commercial practice — cost-to-serve, not raw-material chemistry, is what Datre asks customers to pay for.</a:t>
+              <a:t>Why it matters for pricing power: the Sona Comstar knuckle-casting repricing (slide 20) is the same logic in commercial practice — cost-to-serve, not raw-material chemistry, is what Datre asks customers to pay for.</a:t>
             </a:r>
             <a:endParaRPr lang="en-US" sz="1050" dirty="0"/>
           </a:p>
@@ -26519,7 +28290,7 @@
                 <a:ea typeface="Calibri" pitchFamily="34" charset="-122"/>
                 <a:cs typeface="Calibri" pitchFamily="34" charset="-120"/>
               </a:rPr>
-              <a:t>Caveat: this infrastructure has not prevented rejection rates from climbing to 10%+ in the most recent quarter — see slide 17.</a:t>
+              <a:t>Caveat: this infrastructure has not prevented rejection rates from climbing to 10%+ in the most recent quarter — see slide 19.</a:t>
             </a:r>
             <a:endParaRPr lang="en-US" sz="1000" dirty="0"/>
           </a:p>

--- a/investor-pitch/Datre_Corporation_Investor_Pitch.pptx
+++ b/investor-pitch/Datre_Corporation_Investor_Pitch.pptx
@@ -31,9 +31,11 @@
     <p:sldId id="279" r:id="rId25"/>
     <p:sldId id="280" r:id="rId26"/>
     <p:sldId id="281" r:id="rId27"/>
+    <p:sldId id="282" r:id="rId28"/>
+    <p:sldId id="283" r:id="rId29"/>
   </p:sldIdLst>
   <p:notesMasterIdLst>
-    <p:notesMasterId r:id="rId28"/>
+    <p:notesMasterId r:id="rId30"/>
   </p:notesMasterIdLst>
   <p:sldSz cx="12191695" cy="6858000"/>
   <p:notesSz cx="6858000" cy="12191695"/>
@@ -2786,6 +2788,353 @@
 </c:chartSpace>
 </file>
 
+<file path=ppt/charts/chart9.xml><?xml version="1.0" encoding="utf-8"?>
+<c:chartSpace xmlns:c="http://schemas.openxmlformats.org/drawingml/2006/chart" xmlns:a="http://schemas.openxmlformats.org/drawingml/2006/main" xmlns:r="http://schemas.openxmlformats.org/officeDocument/2006/relationships">
+  <c:date1904 val="0"/>
+  <c:roundedCorners val="1"/>
+  <c:chart>
+    <c:autoTitleDeleted val="1"/>
+    <c:plotArea>
+      <c:layout/>
+      <c:barChart>
+        <c:barDir val="col"/>
+        <c:grouping val="clustered"/>
+        <c:varyColors val="0"/>
+        <c:ser>
+          <c:idx val="0"/>
+          <c:order val="0"/>
+          <c:tx>
+            <c:strRef>
+              <c:f>Sheet1!$B$1</c:f>
+              <c:strCache>
+                <c:ptCount val="1"/>
+                <c:pt idx="0">
+                  <c:v>₹ Cr</c:v>
+                </c:pt>
+              </c:strCache>
+            </c:strRef>
+          </c:tx>
+          <c:spPr>
+            <a:solidFill>
+              <a:srgbClr val="6B7684"/>
+            </a:solidFill>
+            <a:effectLst/>
+          </c:spPr>
+          <c:invertIfNegative val="0"/>
+          <c:dLbls>
+            <c:numFmt formatCode="0.00" sourceLinked="0"/>
+            <c:txPr>
+              <a:bodyPr/>
+              <a:lstStyle/>
+              <a:p>
+                <a:pPr>
+                  <a:defRPr b="0" i="0" strike="noStrike" sz="1050" u="none">
+                    <a:solidFill>
+                      <a:srgbClr val="1C1F26"/>
+                    </a:solidFill>
+                    <a:latin typeface="Arial"/>
+                  </a:defRPr>
+                </a:pPr>
+              </a:p>
+            </c:txPr>
+            <c:showLegendKey val="0"/>
+            <c:showVal val="1"/>
+            <c:showCatName val="0"/>
+            <c:showSerName val="0"/>
+            <c:showPercent val="0"/>
+            <c:showBubbleSize val="0"/>
+            <c:showLeaderLines val="0"/>
+          </c:dLbls>
+          <c:dPt>
+            <c:idx val="0"/>
+            <c:invertIfNegative val="0"/>
+            <c:bubble3D val="0"/>
+            <c:spPr>
+              <a:solidFill>
+                <a:srgbClr val="6B7684"/>
+              </a:solidFill>
+              <a:effectLst/>
+            </c:spPr>
+          </c:dPt>
+          <c:dPt>
+            <c:idx val="1"/>
+            <c:invertIfNegative val="0"/>
+            <c:bubble3D val="0"/>
+            <c:spPr>
+              <a:solidFill>
+                <a:srgbClr val="6B7684"/>
+              </a:solidFill>
+              <a:effectLst/>
+            </c:spPr>
+          </c:dPt>
+          <c:dPt>
+            <c:idx val="2"/>
+            <c:invertIfNegative val="0"/>
+            <c:bubble3D val="0"/>
+            <c:spPr>
+              <a:solidFill>
+                <a:srgbClr val="D9622B"/>
+              </a:solidFill>
+              <a:effectLst/>
+            </c:spPr>
+          </c:dPt>
+          <c:dPt>
+            <c:idx val="3"/>
+            <c:invertIfNegative val="0"/>
+            <c:bubble3D val="0"/>
+            <c:spPr>
+              <a:solidFill>
+                <a:srgbClr val="D9622B"/>
+              </a:solidFill>
+              <a:effectLst/>
+            </c:spPr>
+          </c:dPt>
+          <c:dPt>
+            <c:idx val="4"/>
+            <c:invertIfNegative val="0"/>
+            <c:bubble3D val="0"/>
+            <c:spPr>
+              <a:solidFill>
+                <a:srgbClr val="D9622B"/>
+              </a:solidFill>
+              <a:effectLst/>
+            </c:spPr>
+          </c:dPt>
+          <c:cat>
+            <c:multiLvlStrRef>
+              <c:f>Sheet1!$A$2:$A$6</c:f>
+              <c:multiLvlStrCache>
+                <c:ptCount val="5"/>
+                <c:lvl>
+                  <c:pt idx="0">
+                    <c:v>P&amp;M net book
+value</c:v>
+                  </c:pt>
+                  <c:pt idx="1">
+                    <c:v>Land
+(historical cost)</c:v>
+                  </c:pt>
+                  <c:pt idx="2">
+                    <c:v>FMV @ 4x
+avg. PAT</c:v>
+                  </c:pt>
+                  <c:pt idx="3">
+                    <c:v>FMV @ 6x
+avg. PAT</c:v>
+                  </c:pt>
+                  <c:pt idx="4">
+                    <c:v>FMV @ 8x
+avg. PAT</c:v>
+                  </c:pt>
+                </c:lvl>
+              </c:multiLvlStrCache>
+            </c:multiLvlStrRef>
+          </c:cat>
+          <c:val>
+            <c:numRef>
+              <c:f>Sheet1!$B$2:$B$6</c:f>
+              <c:numCache>
+                <c:formatCode>General</c:formatCode>
+                <c:ptCount val="5"/>
+                <c:pt idx="0">
+                  <c:v>1.8</c:v>
+                </c:pt>
+                <c:pt idx="1">
+                  <c:v>0.79</c:v>
+                </c:pt>
+                <c:pt idx="2">
+                  <c:v>5.7</c:v>
+                </c:pt>
+                <c:pt idx="3">
+                  <c:v>8.6</c:v>
+                </c:pt>
+                <c:pt idx="4">
+                  <c:v>11.4</c:v>
+                </c:pt>
+              </c:numCache>
+            </c:numRef>
+          </c:val>
+        </c:ser>
+        <c:dLbls>
+          <c:numFmt formatCode="0.00" sourceLinked="0"/>
+          <c:txPr>
+            <a:bodyPr/>
+            <a:lstStyle/>
+            <a:p>
+              <a:pPr>
+                <a:defRPr b="0" i="0" strike="noStrike" sz="1050" u="none">
+                  <a:solidFill>
+                    <a:srgbClr val="1C1F26"/>
+                  </a:solidFill>
+                  <a:latin typeface="Arial"/>
+                </a:defRPr>
+              </a:pPr>
+            </a:p>
+          </c:txPr>
+          <c:showLegendKey val="0"/>
+          <c:showVal val="1"/>
+          <c:showCatName val="0"/>
+          <c:showSerName val="0"/>
+          <c:showPercent val="0"/>
+          <c:showBubbleSize val="0"/>
+          <c:showLeaderLines val="0"/>
+        </c:dLbls>
+        <c:gapWidth val="150"/>
+        <c:overlap val="0"/>
+        <c:axId val="2094734554"/>
+        <c:axId val="2094734552"/>
+        <c:axId val="2094734556"/>
+      </c:barChart>
+      <c:catAx>
+        <c:axId val="2094734554"/>
+        <c:scaling>
+          <c:orientation val="minMax"/>
+        </c:scaling>
+        <c:delete val="0"/>
+        <c:axPos val="b"/>
+        <c:numFmt formatCode="General" sourceLinked="1"/>
+        <c:majorTickMark val="out"/>
+        <c:minorTickMark val="none"/>
+        <c:tickLblPos val="low"/>
+        <c:spPr>
+          <a:ln w="12700" cap="flat">
+            <a:solidFill>
+              <a:srgbClr val="888888"/>
+            </a:solidFill>
+            <a:prstDash val="solid"/>
+            <a:round/>
+          </a:ln>
+        </c:spPr>
+        <c:txPr>
+          <a:bodyPr/>
+          <a:lstStyle/>
+          <a:p>
+            <a:pPr>
+              <a:defRPr sz="900" b="0" i="0" u="none" strike="noStrike">
+                <a:solidFill>
+                  <a:srgbClr val="3A4553"/>
+                </a:solidFill>
+                <a:latin typeface="Arial"/>
+              </a:defRPr>
+            </a:pPr>
+            <a:endParaRPr lang="en-US"/>
+          </a:p>
+        </c:txPr>
+        <c:crossAx val="2094734552"/>
+        <c:crosses val="autoZero"/>
+        <c:auto val="1"/>
+        <c:lblAlgn val="ctr"/>
+        <c:noMultiLvlLbl val="1"/>
+      </c:catAx>
+      <c:valAx>
+        <c:axId val="2094734552"/>
+        <c:scaling>
+          <c:orientation val="minMax"/>
+          <c:max val="13"/>
+          <c:min val="0"/>
+        </c:scaling>
+        <c:delete val="0"/>
+        <c:axPos val="l"/>
+        <c:majorGridlines>
+          <c:spPr>
+            <a:ln w="9525" cap="flat">
+              <a:solidFill>
+                <a:srgbClr val="E1E4E9"/>
+              </a:solidFill>
+              <a:prstDash val="solid"/>
+              <a:round/>
+            </a:ln>
+          </c:spPr>
+        </c:majorGridlines>
+        <c:title>
+          <c:tx>
+            <c:rich>
+              <a:bodyPr/>
+              <a:lstStyle/>
+              <a:p>
+                <a:pPr>
+                  <a:defRPr sz="900" b="0" i="0" u="none" strike="noStrike">
+                    <a:solidFill>
+                      <a:srgbClr val="6B7684"/>
+                    </a:solidFill>
+                    <a:latin typeface="Arial"/>
+                  </a:defRPr>
+                </a:pPr>
+                <a:r>
+                  <a:rPr sz="900" b="0" i="0" u="none" strike="noStrike">
+                    <a:solidFill>
+                      <a:srgbClr val="6B7684"/>
+                    </a:solidFill>
+                    <a:latin typeface="Arial"/>
+                  </a:rPr>
+                  <a:t>₹ Cr</a:t>
+                </a:r>
+              </a:p>
+            </c:rich>
+          </c:tx>
+          <c:layout/>
+          <c:overlay val="0"/>
+        </c:title>
+        <c:numFmt formatCode="General" sourceLinked="0"/>
+        <c:majorTickMark val="out"/>
+        <c:minorTickMark val="none"/>
+        <c:tickLblPos val="nextTo"/>
+        <c:spPr>
+          <a:ln w="12700" cap="flat">
+            <a:solidFill>
+              <a:srgbClr val="888888"/>
+            </a:solidFill>
+            <a:prstDash val="solid"/>
+            <a:round/>
+          </a:ln>
+        </c:spPr>
+        <c:txPr>
+          <a:bodyPr/>
+          <a:lstStyle/>
+          <a:p>
+            <a:pPr>
+              <a:defRPr sz="900" b="0" i="0" u="none" strike="noStrike">
+                <a:solidFill>
+                  <a:srgbClr val="3A4553"/>
+                </a:solidFill>
+                <a:latin typeface="Arial"/>
+              </a:defRPr>
+            </a:pPr>
+            <a:endParaRPr lang="en-US"/>
+          </a:p>
+        </c:txPr>
+        <c:crossAx val="2094734554"/>
+        <c:crosses val="autoZero"/>
+        <c:crossBetween val="between"/>
+      </c:valAx>
+      <c:spPr>
+        <a:solidFill>
+          <a:srgbClr val="FFFFFF"/>
+        </a:solidFill>
+        <a:ln>
+          <a:noFill/>
+        </a:ln>
+        <a:effectLst/>
+      </c:spPr>
+    </c:plotArea>
+    <c:plotVisOnly val="1"/>
+    <c:dispBlanksAs val="span"/>
+  </c:chart>
+  <c:spPr>
+    <a:solidFill>
+      <a:srgbClr val="FFFFFF"/>
+    </a:solidFill>
+    <a:ln>
+      <a:noFill/>
+    </a:ln>
+    <a:effectLst/>
+  </c:spPr>
+  <c:externalData r:id="rId1">
+    <c:autoUpdate val="0"/>
+  </c:externalData>
+</c:chartSpace>
+</file>
+
 <file path=ppt/notesMasters/notesMaster1.xml><?xml version="1.0" encoding="utf-8"?>
 <p:notesMaster xmlns:a="http://schemas.openxmlformats.org/drawingml/2006/main" xmlns:r="http://schemas.openxmlformats.org/officeDocument/2006/relationships" xmlns:p="http://schemas.openxmlformats.org/presentationml/2006/main">
   <p:cSld>
@@ -4789,6 +5138,182 @@
             <a:fld id="{F7021451-1387-4CA6-816F-3879F97B5CBC}" type="slidenum">
               <a:rPr lang="en-US"/>
               <a:t>26</a:t>
+            </a:fld>
+            <a:endParaRPr lang="en-US"/>
+          </a:p>
+        </p:txBody>
+      </p:sp>
+    </p:spTree>
+    <p:extLst>
+      <p:ext uri="{BB962C8B-B14F-4D97-AF65-F5344CB8AC3E}">
+        <p14:creationId xmlns:p14="http://schemas.microsoft.com/office/powerpoint/2010/main" val="1024086991"/>
+      </p:ext>
+    </p:extLst>
+  </p:cSld>
+  <p:clrMapOvr>
+    <a:masterClrMapping/>
+  </p:clrMapOvr>
+</p:notes>
+</file>
+
+<file path=ppt/notesSlides/notesSlide27.xml><?xml version="1.0" encoding="utf-8"?>
+<p:notes xmlns:a="http://schemas.openxmlformats.org/drawingml/2006/main" xmlns:r="http://schemas.openxmlformats.org/officeDocument/2006/relationships" xmlns:p="http://schemas.openxmlformats.org/presentationml/2006/main">
+  <p:cSld>
+    <p:spTree>
+      <p:nvGrpSpPr>
+        <p:cNvPr id="1" name=""/>
+        <p:cNvGrpSpPr/>
+        <p:nvPr/>
+      </p:nvGrpSpPr>
+      <p:grpSpPr>
+        <a:xfrm>
+          <a:off x="0" y="0"/>
+          <a:ext cx="0" cy="0"/>
+          <a:chOff x="0" y="0"/>
+          <a:chExt cx="0" cy="0"/>
+        </a:xfrm>
+      </p:grpSpPr>
+      <p:sp>
+        <p:nvSpPr>
+          <p:cNvPr id="2" name="Slide Image Placeholder 1"/>
+          <p:cNvSpPr>
+            <a:spLocks noGrp="1" noRot="1" noChangeAspect="1"/>
+          </p:cNvSpPr>
+          <p:nvPr>
+            <p:ph type="sldImg"/>
+          </p:nvPr>
+        </p:nvSpPr>
+        <p:spPr/>
+      </p:sp>
+      <p:sp>
+        <p:nvSpPr>
+          <p:cNvPr id="3" name="Notes Placeholder 2"/>
+          <p:cNvSpPr>
+            <a:spLocks noGrp="1"/>
+          </p:cNvSpPr>
+          <p:nvPr>
+            <p:ph type="body" idx="1"/>
+          </p:nvPr>
+        </p:nvSpPr>
+        <p:spPr/>
+        <p:txBody>
+          <a:bodyPr/>
+          <a:lstStyle/>
+          <a:p>
+            <a:r>
+              <a:rPr lang="en-US" dirty="0"/>
+              <a:t/>
+            </a:r>
+            <a:endParaRPr lang="en-US" dirty="0"/>
+          </a:p>
+        </p:txBody>
+      </p:sp>
+      <p:sp>
+        <p:nvSpPr>
+          <p:cNvPr id="4" name="Slide Number Placeholder 3"/>
+          <p:cNvSpPr>
+            <a:spLocks noGrp="1"/>
+          </p:cNvSpPr>
+          <p:nvPr>
+            <p:ph type="sldNum" sz="quarter" idx="10"/>
+          </p:nvPr>
+        </p:nvSpPr>
+        <p:spPr/>
+        <p:txBody>
+          <a:bodyPr/>
+          <a:lstStyle/>
+          <a:p>
+            <a:fld id="{F7021451-1387-4CA6-816F-3879F97B5CBC}" type="slidenum">
+              <a:rPr lang="en-US"/>
+              <a:t>27</a:t>
+            </a:fld>
+            <a:endParaRPr lang="en-US"/>
+          </a:p>
+        </p:txBody>
+      </p:sp>
+    </p:spTree>
+    <p:extLst>
+      <p:ext uri="{BB962C8B-B14F-4D97-AF65-F5344CB8AC3E}">
+        <p14:creationId xmlns:p14="http://schemas.microsoft.com/office/powerpoint/2010/main" val="1024086991"/>
+      </p:ext>
+    </p:extLst>
+  </p:cSld>
+  <p:clrMapOvr>
+    <a:masterClrMapping/>
+  </p:clrMapOvr>
+</p:notes>
+</file>
+
+<file path=ppt/notesSlides/notesSlide28.xml><?xml version="1.0" encoding="utf-8"?>
+<p:notes xmlns:a="http://schemas.openxmlformats.org/drawingml/2006/main" xmlns:r="http://schemas.openxmlformats.org/officeDocument/2006/relationships" xmlns:p="http://schemas.openxmlformats.org/presentationml/2006/main">
+  <p:cSld>
+    <p:spTree>
+      <p:nvGrpSpPr>
+        <p:cNvPr id="1" name=""/>
+        <p:cNvGrpSpPr/>
+        <p:nvPr/>
+      </p:nvGrpSpPr>
+      <p:grpSpPr>
+        <a:xfrm>
+          <a:off x="0" y="0"/>
+          <a:ext cx="0" cy="0"/>
+          <a:chOff x="0" y="0"/>
+          <a:chExt cx="0" cy="0"/>
+        </a:xfrm>
+      </p:grpSpPr>
+      <p:sp>
+        <p:nvSpPr>
+          <p:cNvPr id="2" name="Slide Image Placeholder 1"/>
+          <p:cNvSpPr>
+            <a:spLocks noGrp="1" noRot="1" noChangeAspect="1"/>
+          </p:cNvSpPr>
+          <p:nvPr>
+            <p:ph type="sldImg"/>
+          </p:nvPr>
+        </p:nvSpPr>
+        <p:spPr/>
+      </p:sp>
+      <p:sp>
+        <p:nvSpPr>
+          <p:cNvPr id="3" name="Notes Placeholder 2"/>
+          <p:cNvSpPr>
+            <a:spLocks noGrp="1"/>
+          </p:cNvSpPr>
+          <p:nvPr>
+            <p:ph type="body" idx="1"/>
+          </p:nvPr>
+        </p:nvSpPr>
+        <p:spPr/>
+        <p:txBody>
+          <a:bodyPr/>
+          <a:lstStyle/>
+          <a:p>
+            <a:r>
+              <a:rPr lang="en-US" dirty="0"/>
+              <a:t/>
+            </a:r>
+            <a:endParaRPr lang="en-US" dirty="0"/>
+          </a:p>
+        </p:txBody>
+      </p:sp>
+      <p:sp>
+        <p:nvSpPr>
+          <p:cNvPr id="4" name="Slide Number Placeholder 3"/>
+          <p:cNvSpPr>
+            <a:spLocks noGrp="1"/>
+          </p:cNvSpPr>
+          <p:nvPr>
+            <p:ph type="sldNum" sz="quarter" idx="10"/>
+          </p:nvPr>
+        </p:nvSpPr>
+        <p:spPr/>
+        <p:txBody>
+          <a:bodyPr/>
+          <a:lstStyle/>
+          <a:p>
+            <a:fld id="{F7021451-1387-4CA6-816F-3879F97B5CBC}" type="slidenum">
+              <a:rPr lang="en-US"/>
+              <a:t>28</a:t>
             </a:fld>
             <a:endParaRPr lang="en-US"/>
           </a:p>
@@ -21737,7 +22262,7 @@
     <p:bg>
       <p:bgPr>
         <a:solidFill>
-          <a:srgbClr val="1C1F26"/>
+          <a:srgbClr val="FFFFFF"/>
         </a:solidFill>
       </p:bgPr>
     </p:bg>
@@ -21788,7 +22313,7 @@
                 <a:ea typeface="Calibri" pitchFamily="34" charset="-122"/>
                 <a:cs typeface="Calibri" pitchFamily="34" charset="-120"/>
               </a:rPr>
-              <a:t>INVESTMENT CONSIDERATIONS</a:t>
+              <a:t>VALUATION — THE TWO LENSES</a:t>
             </a:r>
             <a:endParaRPr lang="en-US" sz="1100" dirty="0"/>
           </a:p>
@@ -21821,50 +22346,44 @@
             <a:r>
               <a:rPr lang="en-US" sz="3000" b="1" dirty="0">
                 <a:solidFill>
-                  <a:srgbClr val="FFFFFF"/>
+                  <a:srgbClr val="1C1F26"/>
                 </a:solidFill>
                 <a:latin typeface="Cambria" pitchFamily="34" charset="0"/>
                 <a:ea typeface="Cambria" pitchFamily="34" charset="-122"/>
                 <a:cs typeface="Cambria" pitchFamily="34" charset="-120"/>
               </a:rPr>
-              <a:t>A framework for the ask — terms to be finalized with management</a:t>
+              <a:t>Two ways to price this business — and they disagree by 3-10x</a:t>
             </a:r>
             <a:endParaRPr lang="en-US" sz="3000" dirty="0"/>
           </a:p>
         </p:txBody>
       </p:sp>
-      <p:sp>
-        <p:nvSpPr>
-          <p:cNvPr id="4" name="Shape 2"/>
-          <p:cNvSpPr/>
-          <p:nvPr/>
-        </p:nvSpPr>
-        <p:spPr>
-          <a:xfrm>
-            <a:off x="548640" y="1783080"/>
-            <a:ext cx="11094415" cy="685800"/>
-          </a:xfrm>
-          <a:prstGeom prst="roundRect">
-            <a:avLst>
-              <a:gd name="adj" fmla="val 8000"/>
-            </a:avLst>
-          </a:prstGeom>
-          <a:solidFill>
-            <a:srgbClr val="262B34"/>
-          </a:solidFill>
-          <a:ln/>
-        </p:spPr>
-      </p:sp>
-      <p:sp>
-        <p:nvSpPr>
-          <p:cNvPr id="5" name="Text 3"/>
-          <p:cNvSpPr/>
-          <p:nvPr/>
-        </p:nvSpPr>
-        <p:spPr>
-          <a:xfrm>
-            <a:off x="777240" y="1783080"/>
-            <a:ext cx="10637215" cy="685800"/>
+      <p:graphicFrame>
+        <p:nvGraphicFramePr>
+          <p:cNvPr id="4" name="Chart 0" descr=""/>
+          <p:cNvGraphicFramePr/>
+          <p:nvPr/>
+        </p:nvGraphicFramePr>
+        <p:xfrm>
+          <a:off x="548640" y="1737360"/>
+          <a:ext cx="6400800" cy="3200400"/>
+        </p:xfrm>
+        <a:graphic xmlns:a="http://schemas.openxmlformats.org/drawingml/2006/main">
+          <a:graphicData uri="http://schemas.openxmlformats.org/drawingml/2006/chart">
+            <c:chart xmlns:c="http://schemas.openxmlformats.org/drawingml/2006/chart" r:id="rId1"/>
+          </a:graphicData>
+        </a:graphic>
+      </p:graphicFrame>
+      <p:sp>
+        <p:nvSpPr>
+          <p:cNvPr id="5" name="Text 2"/>
+          <p:cNvSpPr/>
+          <p:nvPr/>
+        </p:nvSpPr>
+        <p:spPr>
+          <a:xfrm>
+            <a:off x="548640" y="5074920"/>
+            <a:ext cx="6400800" cy="594360"/>
           </a:xfrm>
           <a:prstGeom prst="rect">
             <a:avLst/>
@@ -21883,89 +22402,30 @@
               <a:buNone/>
             </a:pPr>
             <a:r>
-              <a:rPr lang="en-US" sz="1030" i="1" dirty="0">
-                <a:solidFill>
-                  <a:srgbClr val="E8B84B"/>
-                </a:solidFill>
-                <a:latin typeface="Calibri" pitchFamily="34" charset="0"/>
-                <a:ea typeface="Calibri" pitchFamily="34" charset="-122"/>
-                <a:cs typeface="Calibri" pitchFamily="34" charset="-120"/>
-              </a:rPr>
-              <a:t>The materials reviewed do not specify a funding quantum, instrument, valuation or use-of-proceeds. What follows is a suggested framework, derived from the financial and operational analysis in this deck — not a management-approved ask.</a:t>
-            </a:r>
-            <a:endParaRPr lang="en-US" sz="1030" dirty="0"/>
-          </a:p>
-        </p:txBody>
-      </p:sp>
-      <p:sp>
-        <p:nvSpPr>
-          <p:cNvPr id="6" name="Shape 4"/>
-          <p:cNvSpPr/>
-          <p:nvPr/>
-        </p:nvSpPr>
-        <p:spPr>
-          <a:xfrm>
-            <a:off x="548640" y="2788920"/>
-            <a:ext cx="457200" cy="457200"/>
-          </a:xfrm>
-          <a:prstGeom prst="ellipse">
-            <a:avLst/>
-          </a:prstGeom>
-          <a:solidFill>
-            <a:srgbClr val="D9622B"/>
-          </a:solidFill>
-          <a:ln/>
-        </p:spPr>
-      </p:sp>
-      <p:sp>
-        <p:nvSpPr>
-          <p:cNvPr id="7" name="Text 5"/>
-          <p:cNvSpPr/>
-          <p:nvPr/>
-        </p:nvSpPr>
-        <p:spPr>
-          <a:xfrm>
-            <a:off x="548640" y="2788920"/>
-            <a:ext cx="457200" cy="457200"/>
-          </a:xfrm>
-          <a:prstGeom prst="rect">
-            <a:avLst/>
-          </a:prstGeom>
-          <a:noFill/>
-          <a:ln/>
-        </p:spPr>
-        <p:txBody>
-          <a:bodyPr wrap="square" lIns="0" tIns="0" rIns="0" bIns="0" rtlCol="0" anchor="ctr"/>
-          <a:lstStyle/>
-          <a:p>
-            <a:pPr algn="ctr" indent="0" marL="0">
-              <a:buNone/>
-            </a:pPr>
-            <a:r>
-              <a:rPr lang="en-US" sz="1300" b="1" dirty="0">
-                <a:solidFill>
-                  <a:srgbClr val="FFFFFF"/>
-                </a:solidFill>
-                <a:latin typeface="Calibri" pitchFamily="34" charset="0"/>
-                <a:ea typeface="Calibri" pitchFamily="34" charset="-122"/>
-                <a:cs typeface="Calibri" pitchFamily="34" charset="-120"/>
-              </a:rPr>
-              <a:t>1</a:t>
-            </a:r>
-            <a:endParaRPr lang="en-US" sz="1300" dirty="0"/>
-          </a:p>
-        </p:txBody>
-      </p:sp>
-      <p:sp>
-        <p:nvSpPr>
-          <p:cNvPr id="8" name="Text 6"/>
-          <p:cNvSpPr/>
-          <p:nvPr/>
-        </p:nvSpPr>
-        <p:spPr>
-          <a:xfrm>
-            <a:off x="1234440" y="2770632"/>
-            <a:ext cx="2926080" cy="502920"/>
+              <a:rPr lang="en-US" sz="850" i="1" dirty="0">
+                <a:solidFill>
+                  <a:srgbClr val="6B7684"/>
+                </a:solidFill>
+                <a:latin typeface="Calibri" pitchFamily="34" charset="0"/>
+                <a:ea typeface="Calibri" pitchFamily="34" charset="-122"/>
+                <a:cs typeface="Calibri" pitchFamily="34" charset="-120"/>
+              </a:rPr>
+              <a:t>Grey bars: today's book value of the hard assets (internal depreciation register, FY23-24 close). Orange bars: illustrative income-basis value, capitalizing the 3-year average audited PAT (₹1.43 Cr, FY23-25) at a range of multiples — no verified comparable transaction exists for Indian niche-foundry M&amp;A; treat as sensitivity, not appraisal.</a:t>
+            </a:r>
+            <a:endParaRPr lang="en-US" sz="850" dirty="0"/>
+          </a:p>
+        </p:txBody>
+      </p:sp>
+      <p:sp>
+        <p:nvSpPr>
+          <p:cNvPr id="6" name="Text 3"/>
+          <p:cNvSpPr/>
+          <p:nvPr/>
+        </p:nvSpPr>
+        <p:spPr>
+          <a:xfrm>
+            <a:off x="7223760" y="1737360"/>
+            <a:ext cx="4419295" cy="411480"/>
           </a:xfrm>
           <a:prstGeom prst="rect">
             <a:avLst/>
@@ -21978,45 +22438,42 @@
           <a:lstStyle/>
           <a:p>
             <a:pPr indent="0" marL="0">
-              <a:lnSpc>
-                <a:spcPct val="100000"/>
-              </a:lnSpc>
-              <a:buNone/>
-            </a:pPr>
-            <a:r>
-              <a:rPr lang="en-US" sz="1300" b="1" dirty="0">
-                <a:solidFill>
-                  <a:srgbClr val="FFFFFF"/>
-                </a:solidFill>
-                <a:latin typeface="Calibri" pitchFamily="34" charset="0"/>
-                <a:ea typeface="Calibri" pitchFamily="34" charset="-122"/>
-                <a:cs typeface="Calibri" pitchFamily="34" charset="-120"/>
-              </a:rPr>
-              <a:t>Balance-sheet repair</a:t>
-            </a:r>
-            <a:endParaRPr lang="en-US" sz="1300" dirty="0"/>
-          </a:p>
-        </p:txBody>
-      </p:sp>
-      <p:sp>
-        <p:nvSpPr>
-          <p:cNvPr id="9" name="Text 7"/>
-          <p:cNvSpPr/>
-          <p:nvPr/>
-        </p:nvSpPr>
-        <p:spPr>
-          <a:xfrm>
-            <a:off x="4297680" y="2743200"/>
-            <a:ext cx="7345375" cy="731520"/>
-          </a:xfrm>
-          <a:prstGeom prst="rect">
-            <a:avLst/>
-          </a:prstGeom>
-          <a:noFill/>
-          <a:ln/>
-        </p:spPr>
-        <p:txBody>
-          <a:bodyPr wrap="square" lIns="0" tIns="0" rIns="0" bIns="0" rtlCol="0" anchor="t"/>
+              <a:buNone/>
+            </a:pPr>
+            <a:r>
+              <a:rPr lang="en-US" sz="2100" b="1" dirty="0">
+                <a:solidFill>
+                  <a:srgbClr val="1C1F26"/>
+                </a:solidFill>
+                <a:latin typeface="Cambria" pitchFamily="34" charset="0"/>
+                <a:ea typeface="Cambria" pitchFamily="34" charset="-122"/>
+                <a:cs typeface="Cambria" pitchFamily="34" charset="-120"/>
+              </a:rPr>
+              <a:t>~90%</a:t>
+            </a:r>
+            <a:endParaRPr lang="en-US" sz="2100" dirty="0"/>
+          </a:p>
+        </p:txBody>
+      </p:sp>
+      <p:sp>
+        <p:nvSpPr>
+          <p:cNvPr id="7" name="Text 4"/>
+          <p:cNvSpPr/>
+          <p:nvPr/>
+        </p:nvSpPr>
+        <p:spPr>
+          <a:xfrm>
+            <a:off x="7223760" y="2139696"/>
+            <a:ext cx="4419295" cy="685800"/>
+          </a:xfrm>
+          <a:prstGeom prst="rect">
+            <a:avLst/>
+          </a:prstGeom>
+          <a:noFill/>
+          <a:ln/>
+        </p:spPr>
+        <p:txBody>
+          <a:bodyPr wrap="square" lIns="0" tIns="0" rIns="0" bIns="0" rtlCol="0" anchor="ctr"/>
           <a:lstStyle/>
           <a:p>
             <a:pPr indent="0" marL="0">
@@ -22026,89 +22483,30 @@
               <a:buNone/>
             </a:pPr>
             <a:r>
-              <a:rPr lang="en-US" sz="1030" dirty="0">
-                <a:solidFill>
-                  <a:srgbClr val="CBD3DC"/>
-                </a:solidFill>
-                <a:latin typeface="Calibri" pitchFamily="34" charset="0"/>
-                <a:ea typeface="Calibri" pitchFamily="34" charset="-122"/>
-                <a:cs typeface="Calibri" pitchFamily="34" charset="-120"/>
-              </a:rPr>
-              <a:t>Equity infusion or a structured plan to accelerate net worth from -₹1.54 Cr (FY25) to positive, rather than relying solely on ~₹1.4 Cr/yr retained earnings.</a:t>
-            </a:r>
-            <a:endParaRPr lang="en-US" sz="1030" dirty="0"/>
-          </a:p>
-        </p:txBody>
-      </p:sp>
-      <p:sp>
-        <p:nvSpPr>
-          <p:cNvPr id="10" name="Shape 8"/>
-          <p:cNvSpPr/>
-          <p:nvPr/>
-        </p:nvSpPr>
-        <p:spPr>
-          <a:xfrm>
-            <a:off x="548640" y="3840480"/>
-            <a:ext cx="457200" cy="457200"/>
-          </a:xfrm>
-          <a:prstGeom prst="ellipse">
-            <a:avLst/>
-          </a:prstGeom>
-          <a:solidFill>
-            <a:srgbClr val="D9622B"/>
-          </a:solidFill>
-          <a:ln/>
-        </p:spPr>
-      </p:sp>
-      <p:sp>
-        <p:nvSpPr>
-          <p:cNvPr id="11" name="Text 9"/>
-          <p:cNvSpPr/>
-          <p:nvPr/>
-        </p:nvSpPr>
-        <p:spPr>
-          <a:xfrm>
-            <a:off x="548640" y="3840480"/>
-            <a:ext cx="457200" cy="457200"/>
-          </a:xfrm>
-          <a:prstGeom prst="rect">
-            <a:avLst/>
-          </a:prstGeom>
-          <a:noFill/>
-          <a:ln/>
-        </p:spPr>
-        <p:txBody>
-          <a:bodyPr wrap="square" lIns="0" tIns="0" rIns="0" bIns="0" rtlCol="0" anchor="ctr"/>
-          <a:lstStyle/>
-          <a:p>
-            <a:pPr algn="ctr" indent="0" marL="0">
-              <a:buNone/>
-            </a:pPr>
-            <a:r>
-              <a:rPr lang="en-US" sz="1300" b="1" dirty="0">
-                <a:solidFill>
-                  <a:srgbClr val="FFFFFF"/>
-                </a:solidFill>
-                <a:latin typeface="Calibri" pitchFamily="34" charset="0"/>
-                <a:ea typeface="Calibri" pitchFamily="34" charset="-122"/>
-                <a:cs typeface="Calibri" pitchFamily="34" charset="-120"/>
-              </a:rPr>
-              <a:t>2</a:t>
-            </a:r>
-            <a:endParaRPr lang="en-US" sz="1300" dirty="0"/>
-          </a:p>
-        </p:txBody>
-      </p:sp>
-      <p:sp>
-        <p:nvSpPr>
-          <p:cNvPr id="12" name="Text 10"/>
-          <p:cNvSpPr/>
-          <p:nvPr/>
-        </p:nvSpPr>
-        <p:spPr>
-          <a:xfrm>
-            <a:off x="1234440" y="3822192"/>
-            <a:ext cx="2926080" cy="502920"/>
+              <a:rPr lang="en-US" sz="950" dirty="0">
+                <a:solidFill>
+                  <a:srgbClr val="3A4553"/>
+                </a:solidFill>
+                <a:latin typeface="Calibri" pitchFamily="34" charset="0"/>
+                <a:ea typeface="Calibri" pitchFamily="34" charset="-122"/>
+                <a:cs typeface="Calibri" pitchFamily="34" charset="-120"/>
+              </a:rPr>
+              <a:t>Of Plant &amp; Machinery's ~₹17.6 Cr original cost has already been depreciated — book value is now ~₹1.8 Cr</a:t>
+            </a:r>
+            <a:endParaRPr lang="en-US" sz="950" dirty="0"/>
+          </a:p>
+        </p:txBody>
+      </p:sp>
+      <p:sp>
+        <p:nvSpPr>
+          <p:cNvPr id="8" name="Text 5"/>
+          <p:cNvSpPr/>
+          <p:nvPr/>
+        </p:nvSpPr>
+        <p:spPr>
+          <a:xfrm>
+            <a:off x="7223760" y="2907792"/>
+            <a:ext cx="4419295" cy="411480"/>
           </a:xfrm>
           <a:prstGeom prst="rect">
             <a:avLst/>
@@ -22121,45 +22519,42 @@
           <a:lstStyle/>
           <a:p>
             <a:pPr indent="0" marL="0">
-              <a:lnSpc>
-                <a:spcPct val="100000"/>
-              </a:lnSpc>
-              <a:buNone/>
-            </a:pPr>
-            <a:r>
-              <a:rPr lang="en-US" sz="1300" b="1" dirty="0">
-                <a:solidFill>
-                  <a:srgbClr val="FFFFFF"/>
-                </a:solidFill>
-                <a:latin typeface="Calibri" pitchFamily="34" charset="0"/>
-                <a:ea typeface="Calibri" pitchFamily="34" charset="-122"/>
-                <a:cs typeface="Calibri" pitchFamily="34" charset="-120"/>
-              </a:rPr>
-              <a:t>Working-capital bridge</a:t>
-            </a:r>
-            <a:endParaRPr lang="en-US" sz="1300" dirty="0"/>
-          </a:p>
-        </p:txBody>
-      </p:sp>
-      <p:sp>
-        <p:nvSpPr>
-          <p:cNvPr id="13" name="Text 11"/>
-          <p:cNvSpPr/>
-          <p:nvPr/>
-        </p:nvSpPr>
-        <p:spPr>
-          <a:xfrm>
-            <a:off x="4297680" y="3794760"/>
-            <a:ext cx="7345375" cy="731520"/>
-          </a:xfrm>
-          <a:prstGeom prst="rect">
-            <a:avLst/>
-          </a:prstGeom>
-          <a:noFill/>
-          <a:ln/>
-        </p:spPr>
-        <p:txBody>
-          <a:bodyPr wrap="square" lIns="0" tIns="0" rIns="0" bIns="0" rtlCol="0" anchor="t"/>
+              <a:buNone/>
+            </a:pPr>
+            <a:r>
+              <a:rPr lang="en-US" sz="2100" b="1" dirty="0">
+                <a:solidFill>
+                  <a:srgbClr val="1C1F26"/>
+                </a:solidFill>
+                <a:latin typeface="Cambria" pitchFamily="34" charset="0"/>
+                <a:ea typeface="Cambria" pitchFamily="34" charset="-122"/>
+                <a:cs typeface="Cambria" pitchFamily="34" charset="-120"/>
+              </a:rPr>
+              <a:t>-₹1.54 Cr</a:t>
+            </a:r>
+            <a:endParaRPr lang="en-US" sz="2100" dirty="0"/>
+          </a:p>
+        </p:txBody>
+      </p:sp>
+      <p:sp>
+        <p:nvSpPr>
+          <p:cNvPr id="9" name="Text 6"/>
+          <p:cNvSpPr/>
+          <p:nvPr/>
+        </p:nvSpPr>
+        <p:spPr>
+          <a:xfrm>
+            <a:off x="7223760" y="3310128"/>
+            <a:ext cx="4419295" cy="685800"/>
+          </a:xfrm>
+          <a:prstGeom prst="rect">
+            <a:avLst/>
+          </a:prstGeom>
+          <a:noFill/>
+          <a:ln/>
+        </p:spPr>
+        <p:txBody>
+          <a:bodyPr wrap="square" lIns="0" tIns="0" rIns="0" bIns="0" rtlCol="0" anchor="ctr"/>
           <a:lstStyle/>
           <a:p>
             <a:pPr indent="0" marL="0">
@@ -22169,89 +22564,30 @@
               <a:buNone/>
             </a:pPr>
             <a:r>
-              <a:rPr lang="en-US" sz="1030" dirty="0">
-                <a:solidFill>
-                  <a:srgbClr val="CBD3DC"/>
-                </a:solidFill>
-                <a:latin typeface="Calibri" pitchFamily="34" charset="0"/>
-                <a:ea typeface="Calibri" pitchFamily="34" charset="-122"/>
-                <a:cs typeface="Calibri" pitchFamily="34" charset="-120"/>
-              </a:rPr>
-              <a:t>Support the Tega/Escorts receivable cycle at the ₹25-30 Cr revenue range Datre has now demonstrated it can reach.</a:t>
-            </a:r>
-            <a:endParaRPr lang="en-US" sz="1030" dirty="0"/>
-          </a:p>
-        </p:txBody>
-      </p:sp>
-      <p:sp>
-        <p:nvSpPr>
-          <p:cNvPr id="14" name="Shape 12"/>
-          <p:cNvSpPr/>
-          <p:nvPr/>
-        </p:nvSpPr>
-        <p:spPr>
-          <a:xfrm>
-            <a:off x="548640" y="4892040"/>
-            <a:ext cx="457200" cy="457200"/>
-          </a:xfrm>
-          <a:prstGeom prst="ellipse">
-            <a:avLst/>
-          </a:prstGeom>
-          <a:solidFill>
-            <a:srgbClr val="D9622B"/>
-          </a:solidFill>
-          <a:ln/>
-        </p:spPr>
-      </p:sp>
-      <p:sp>
-        <p:nvSpPr>
-          <p:cNvPr id="15" name="Text 13"/>
-          <p:cNvSpPr/>
-          <p:nvPr/>
-        </p:nvSpPr>
-        <p:spPr>
-          <a:xfrm>
-            <a:off x="548640" y="4892040"/>
-            <a:ext cx="457200" cy="457200"/>
-          </a:xfrm>
-          <a:prstGeom prst="rect">
-            <a:avLst/>
-          </a:prstGeom>
-          <a:noFill/>
-          <a:ln/>
-        </p:spPr>
-        <p:txBody>
-          <a:bodyPr wrap="square" lIns="0" tIns="0" rIns="0" bIns="0" rtlCol="0" anchor="ctr"/>
-          <a:lstStyle/>
-          <a:p>
-            <a:pPr algn="ctr" indent="0" marL="0">
-              <a:buNone/>
-            </a:pPr>
-            <a:r>
-              <a:rPr lang="en-US" sz="1300" b="1" dirty="0">
-                <a:solidFill>
-                  <a:srgbClr val="FFFFFF"/>
-                </a:solidFill>
-                <a:latin typeface="Calibri" pitchFamily="34" charset="0"/>
-                <a:ea typeface="Calibri" pitchFamily="34" charset="-122"/>
-                <a:cs typeface="Calibri" pitchFamily="34" charset="-120"/>
-              </a:rPr>
-              <a:t>3</a:t>
-            </a:r>
-            <a:endParaRPr lang="en-US" sz="1300" dirty="0"/>
-          </a:p>
-        </p:txBody>
-      </p:sp>
-      <p:sp>
-        <p:nvSpPr>
-          <p:cNvPr id="16" name="Text 14"/>
-          <p:cNvSpPr/>
-          <p:nvPr/>
-        </p:nvSpPr>
-        <p:spPr>
-          <a:xfrm>
-            <a:off x="1234440" y="4873752"/>
-            <a:ext cx="2926080" cy="502920"/>
+              <a:rPr lang="en-US" sz="950" dirty="0">
+                <a:solidFill>
+                  <a:srgbClr val="3A4553"/>
+                </a:solidFill>
+                <a:latin typeface="Calibri" pitchFamily="34" charset="0"/>
+                <a:ea typeface="Calibri" pitchFamily="34" charset="-122"/>
+                <a:cs typeface="Calibri" pitchFamily="34" charset="-120"/>
+              </a:rPr>
+              <a:t>FY25 audited net worth — a literal net-asset-value approach prices the whole enterprise at zero or below</a:t>
+            </a:r>
+            <a:endParaRPr lang="en-US" sz="950" dirty="0"/>
+          </a:p>
+        </p:txBody>
+      </p:sp>
+      <p:sp>
+        <p:nvSpPr>
+          <p:cNvPr id="10" name="Text 7"/>
+          <p:cNvSpPr/>
+          <p:nvPr/>
+        </p:nvSpPr>
+        <p:spPr>
+          <a:xfrm>
+            <a:off x="7223760" y="4078224"/>
+            <a:ext cx="4419295" cy="411480"/>
           </a:xfrm>
           <a:prstGeom prst="rect">
             <a:avLst/>
@@ -22264,45 +22600,42 @@
           <a:lstStyle/>
           <a:p>
             <a:pPr indent="0" marL="0">
-              <a:lnSpc>
-                <a:spcPct val="100000"/>
-              </a:lnSpc>
-              <a:buNone/>
-            </a:pPr>
-            <a:r>
-              <a:rPr lang="en-US" sz="1300" b="1" dirty="0">
-                <a:solidFill>
-                  <a:srgbClr val="FFFFFF"/>
-                </a:solidFill>
-                <a:latin typeface="Calibri" pitchFamily="34" charset="0"/>
-                <a:ea typeface="Calibri" pitchFamily="34" charset="-122"/>
-                <a:cs typeface="Calibri" pitchFamily="34" charset="-120"/>
-              </a:rPr>
-              <a:t>Quality-systems investment</a:t>
-            </a:r>
-            <a:endParaRPr lang="en-US" sz="1300" dirty="0"/>
-          </a:p>
-        </p:txBody>
-      </p:sp>
-      <p:sp>
-        <p:nvSpPr>
-          <p:cNvPr id="17" name="Text 15"/>
-          <p:cNvSpPr/>
-          <p:nvPr/>
-        </p:nvSpPr>
-        <p:spPr>
-          <a:xfrm>
-            <a:off x="4297680" y="4846320"/>
-            <a:ext cx="7345375" cy="731520"/>
-          </a:xfrm>
-          <a:prstGeom prst="rect">
-            <a:avLst/>
-          </a:prstGeom>
-          <a:noFill/>
-          <a:ln/>
-        </p:spPr>
-        <p:txBody>
-          <a:bodyPr wrap="square" lIns="0" tIns="0" rIns="0" bIns="0" rtlCol="0" anchor="t"/>
+              <a:buNone/>
+            </a:pPr>
+            <a:r>
+              <a:rPr lang="en-US" sz="2100" b="1" dirty="0">
+                <a:solidFill>
+                  <a:srgbClr val="1C1F26"/>
+                </a:solidFill>
+                <a:latin typeface="Cambria" pitchFamily="34" charset="0"/>
+                <a:ea typeface="Cambria" pitchFamily="34" charset="-122"/>
+                <a:cs typeface="Cambria" pitchFamily="34" charset="-120"/>
+              </a:rPr>
+              <a:t>3 yrs</a:t>
+            </a:r>
+            <a:endParaRPr lang="en-US" sz="2100" dirty="0"/>
+          </a:p>
+        </p:txBody>
+      </p:sp>
+      <p:sp>
+        <p:nvSpPr>
+          <p:cNvPr id="11" name="Text 8"/>
+          <p:cNvSpPr/>
+          <p:nvPr/>
+        </p:nvSpPr>
+        <p:spPr>
+          <a:xfrm>
+            <a:off x="7223760" y="4480560"/>
+            <a:ext cx="4419295" cy="685800"/>
+          </a:xfrm>
+          <a:prstGeom prst="rect">
+            <a:avLst/>
+          </a:prstGeom>
+          <a:noFill/>
+          <a:ln/>
+        </p:spPr>
+        <p:txBody>
+          <a:bodyPr wrap="square" lIns="0" tIns="0" rIns="0" bIns="0" rtlCol="0" anchor="ctr"/>
           <a:lstStyle/>
           <a:p>
             <a:pPr indent="0" marL="0">
@@ -22312,30 +22645,52 @@
               <a:buNone/>
             </a:pPr>
             <a:r>
-              <a:rPr lang="en-US" sz="1030" dirty="0">
-                <a:solidFill>
-                  <a:srgbClr val="CBD3DC"/>
-                </a:solidFill>
-                <a:latin typeface="Calibri" pitchFamily="34" charset="0"/>
-                <a:ea typeface="Calibri" pitchFamily="34" charset="-122"/>
-                <a:cs typeface="Calibri" pitchFamily="34" charset="-120"/>
-              </a:rPr>
-              <a:t>Targeted spend to bring the rejection rate back toward its FY22-23 low (~2.6%) — scrap-cost savings alone should fund a meaningful share of this.</a:t>
-            </a:r>
-            <a:endParaRPr lang="en-US" sz="1030" dirty="0"/>
-          </a:p>
-        </p:txBody>
-      </p:sp>
-      <p:sp>
-        <p:nvSpPr>
-          <p:cNvPr id="18" name="Text 16"/>
-          <p:cNvSpPr/>
-          <p:nvPr/>
-        </p:nvSpPr>
-        <p:spPr>
-          <a:xfrm>
-            <a:off x="548640" y="5989320"/>
-            <a:ext cx="11094415" cy="457200"/>
+              <a:rPr lang="en-US" sz="950" dirty="0">
+                <a:solidFill>
+                  <a:srgbClr val="3A4553"/>
+                </a:solidFill>
+                <a:latin typeface="Calibri" pitchFamily="34" charset="0"/>
+                <a:ea typeface="Calibri" pitchFamily="34" charset="-122"/>
+                <a:cs typeface="Calibri" pitchFamily="34" charset="-120"/>
+              </a:rPr>
+              <a:t>Straight years of real audited profit (FY23-25) this same balance sheet has been earning</a:t>
+            </a:r>
+            <a:endParaRPr lang="en-US" sz="950" dirty="0"/>
+          </a:p>
+        </p:txBody>
+      </p:sp>
+      <p:sp>
+        <p:nvSpPr>
+          <p:cNvPr id="12" name="Shape 9"/>
+          <p:cNvSpPr/>
+          <p:nvPr/>
+        </p:nvSpPr>
+        <p:spPr>
+          <a:xfrm>
+            <a:off x="548640" y="5669280"/>
+            <a:ext cx="11094415" cy="777240"/>
+          </a:xfrm>
+          <a:prstGeom prst="roundRect">
+            <a:avLst>
+              <a:gd name="adj" fmla="val 9412"/>
+            </a:avLst>
+          </a:prstGeom>
+          <a:solidFill>
+            <a:srgbClr val="FBEEEC"/>
+          </a:solidFill>
+          <a:ln/>
+        </p:spPr>
+      </p:sp>
+      <p:sp>
+        <p:nvSpPr>
+          <p:cNvPr id="13" name="Text 10"/>
+          <p:cNvSpPr/>
+          <p:nvPr/>
+        </p:nvSpPr>
+        <p:spPr>
+          <a:xfrm>
+            <a:off x="777240" y="5669280"/>
+            <a:ext cx="10637215" cy="777240"/>
           </a:xfrm>
           <a:prstGeom prst="rect">
             <a:avLst/>
@@ -22349,20 +22704,20 @@
           <a:p>
             <a:pPr indent="0" marL="0">
               <a:lnSpc>
-                <a:spcPct val="110000"/>
+                <a:spcPct val="112000"/>
               </a:lnSpc>
               <a:buNone/>
             </a:pPr>
             <a:r>
               <a:rPr lang="en-US" sz="950" i="1" dirty="0">
                 <a:solidFill>
-                  <a:srgbClr val="9AA2AD"/>
-                </a:solidFill>
-                <a:latin typeface="Calibri" pitchFamily="34" charset="0"/>
-                <a:ea typeface="Calibri" pitchFamily="34" charset="-122"/>
-                <a:cs typeface="Calibri" pitchFamily="34" charset="-120"/>
-              </a:rPr>
-              <a:t>Any of the three should be sized against audited FY25 and FY25-26 management accounts, not the figures in this deck alone — and against resolution of the governance flags on slide 14.</a:t>
+                  <a:srgbClr val="B8453F"/>
+                </a:solidFill>
+                <a:latin typeface="Calibri" pitchFamily="34" charset="0"/>
+                <a:ea typeface="Calibri" pitchFamily="34" charset="-122"/>
+                <a:cs typeface="Calibri" pitchFamily="34" charset="-120"/>
+              </a:rPr>
+              <a:t>Even the lightest capitalized-earnings estimate (4x PAT ≈ ₹5.7 Cr) is more than 3x the combined book value of every fixed asset on the balance sheet. A pure NAV view can't explain three years of real cash profit — the model, not the business, is the thing that's wrong here.</a:t>
             </a:r>
             <a:endParaRPr lang="en-US" sz="950" dirty="0"/>
           </a:p>
@@ -22370,7 +22725,7 @@
       </p:sp>
       <p:sp>
         <p:nvSpPr>
-          <p:cNvPr id="19" name="Text 17"/>
+          <p:cNvPr id="14" name="Text 11"/>
           <p:cNvSpPr/>
           <p:nvPr/>
         </p:nvSpPr>
@@ -22395,7 +22750,7 @@
             <a:r>
               <a:rPr lang="en-US" sz="800" dirty="0">
                 <a:solidFill>
-                  <a:srgbClr val="8B93A0"/>
+                  <a:srgbClr val="9AA2AD"/>
                 </a:solidFill>
                 <a:latin typeface="Calibri" pitchFamily="34" charset="0"/>
                 <a:ea typeface="Calibri" pitchFamily="34" charset="-122"/>
@@ -22409,7 +22764,7 @@
       </p:sp>
       <p:sp>
         <p:nvSpPr>
-          <p:cNvPr id="20" name="Text 18"/>
+          <p:cNvPr id="15" name="Text 12"/>
           <p:cNvSpPr/>
           <p:nvPr/>
         </p:nvSpPr>
@@ -22434,7 +22789,7 @@
             <a:r>
               <a:rPr lang="en-US" sz="800" dirty="0">
                 <a:solidFill>
-                  <a:srgbClr val="8B93A0"/>
+                  <a:srgbClr val="9AA2AD"/>
                 </a:solidFill>
                 <a:latin typeface="Calibri" pitchFamily="34" charset="0"/>
                 <a:ea typeface="Calibri" pitchFamily="34" charset="-122"/>
@@ -22480,54 +22835,14 @@
       </p:grpSpPr>
       <p:sp>
         <p:nvSpPr>
-          <p:cNvPr id="2" name="Shape 0"/>
-          <p:cNvSpPr/>
-          <p:nvPr/>
-        </p:nvSpPr>
-        <p:spPr>
-          <a:xfrm>
-            <a:off x="9692640" y="-1280160"/>
-            <a:ext cx="4754880" cy="4754880"/>
-          </a:xfrm>
-          <a:prstGeom prst="ellipse">
-            <a:avLst/>
-          </a:prstGeom>
-          <a:solidFill>
-            <a:srgbClr val="262B34"/>
-          </a:solidFill>
-          <a:ln/>
-        </p:spPr>
-      </p:sp>
-      <p:sp>
-        <p:nvSpPr>
-          <p:cNvPr id="3" name="Shape 1"/>
-          <p:cNvSpPr/>
-          <p:nvPr/>
-        </p:nvSpPr>
-        <p:spPr>
-          <a:xfrm>
-            <a:off x="-1463040" y="4572000"/>
-            <a:ext cx="3657600" cy="3657600"/>
-          </a:xfrm>
-          <a:prstGeom prst="ellipse">
-            <a:avLst/>
-          </a:prstGeom>
-          <a:solidFill>
-            <a:srgbClr val="262B34"/>
-          </a:solidFill>
-          <a:ln/>
-        </p:spPr>
-      </p:sp>
-      <p:sp>
-        <p:nvSpPr>
-          <p:cNvPr id="4" name="Text 2"/>
-          <p:cNvSpPr/>
-          <p:nvPr/>
-        </p:nvSpPr>
-        <p:spPr>
-          <a:xfrm>
-            <a:off x="548640" y="2286000"/>
-            <a:ext cx="9144000" cy="731520"/>
+          <p:cNvPr id="2" name="Text 0"/>
+          <p:cNvSpPr/>
+          <p:nvPr/>
+        </p:nvSpPr>
+        <p:spPr>
+          <a:xfrm>
+            <a:off x="548640" y="457200"/>
+            <a:ext cx="4572000" cy="274320"/>
           </a:xfrm>
           <a:prstGeom prst="rect">
             <a:avLst/>
@@ -22543,7 +22858,46 @@
               <a:buNone/>
             </a:pPr>
             <a:r>
-              <a:rPr lang="en-US" sz="3400" b="1" dirty="0">
+              <a:rPr lang="en-US" sz="1100" b="1" spc="200" kern="0" dirty="0">
+                <a:solidFill>
+                  <a:srgbClr val="D9622B"/>
+                </a:solidFill>
+                <a:latin typeface="Calibri" pitchFamily="34" charset="0"/>
+                <a:ea typeface="Calibri" pitchFamily="34" charset="-122"/>
+                <a:cs typeface="Calibri" pitchFamily="34" charset="-120"/>
+              </a:rPr>
+              <a:t>VALUATION — THE BUYER PROBLEM</a:t>
+            </a:r>
+            <a:endParaRPr lang="en-US" sz="1100" dirty="0"/>
+          </a:p>
+        </p:txBody>
+      </p:sp>
+      <p:sp>
+        <p:nvSpPr>
+          <p:cNvPr id="3" name="Text 1"/>
+          <p:cNvSpPr/>
+          <p:nvPr/>
+        </p:nvSpPr>
+        <p:spPr>
+          <a:xfrm>
+            <a:off x="548640" y="841248"/>
+            <a:ext cx="11094415" cy="685800"/>
+          </a:xfrm>
+          <a:prstGeom prst="rect">
+            <a:avLst/>
+          </a:prstGeom>
+          <a:noFill/>
+          <a:ln/>
+        </p:spPr>
+        <p:txBody>
+          <a:bodyPr wrap="square" lIns="0" tIns="0" rIns="0" bIns="0" rtlCol="0" anchor="ctr"/>
+          <a:lstStyle/>
+          <a:p>
+            <a:pPr algn="l" indent="0" marL="0">
+              <a:buNone/>
+            </a:pPr>
+            <a:r>
+              <a:rPr lang="en-US" sz="3000" b="1" dirty="0">
                 <a:solidFill>
                   <a:srgbClr val="FFFFFF"/>
                 </a:solidFill>
@@ -22551,11 +22905,31 @@
                 <a:ea typeface="Cambria" pitchFamily="34" charset="-122"/>
                 <a:cs typeface="Cambria" pitchFamily="34" charset="-120"/>
               </a:rPr>
-              <a:t>Datre Corporation Limited</a:t>
-            </a:r>
-            <a:endParaRPr lang="en-US" sz="3400" dirty="0"/>
-          </a:p>
-        </p:txBody>
+              <a:t>Why it's still hard to sell — and why that isn't a flaw</a:t>
+            </a:r>
+            <a:endParaRPr lang="en-US" sz="3000" dirty="0"/>
+          </a:p>
+        </p:txBody>
+      </p:sp>
+      <p:sp>
+        <p:nvSpPr>
+          <p:cNvPr id="4" name="Shape 2"/>
+          <p:cNvSpPr/>
+          <p:nvPr/>
+        </p:nvSpPr>
+        <p:spPr>
+          <a:xfrm>
+            <a:off x="548640" y="1737360"/>
+            <a:ext cx="384048" cy="384048"/>
+          </a:xfrm>
+          <a:prstGeom prst="ellipse">
+            <a:avLst/>
+          </a:prstGeom>
+          <a:solidFill>
+            <a:srgbClr val="D9622B"/>
+          </a:solidFill>
+          <a:ln/>
+        </p:spPr>
       </p:sp>
       <p:sp>
         <p:nvSpPr>
@@ -22565,8 +22939,47 @@
         </p:nvSpPr>
         <p:spPr>
           <a:xfrm>
-            <a:off x="548640" y="2971800"/>
-            <a:ext cx="9144000" cy="457200"/>
+            <a:off x="548640" y="1737360"/>
+            <a:ext cx="384048" cy="384048"/>
+          </a:xfrm>
+          <a:prstGeom prst="rect">
+            <a:avLst/>
+          </a:prstGeom>
+          <a:noFill/>
+          <a:ln/>
+        </p:spPr>
+        <p:txBody>
+          <a:bodyPr wrap="square" lIns="0" tIns="0" rIns="0" bIns="0" rtlCol="0" anchor="ctr"/>
+          <a:lstStyle/>
+          <a:p>
+            <a:pPr algn="ctr" indent="0" marL="0">
+              <a:buNone/>
+            </a:pPr>
+            <a:r>
+              <a:rPr lang="en-US" sz="1092" b="1" dirty="0">
+                <a:solidFill>
+                  <a:srgbClr val="FFFFFF"/>
+                </a:solidFill>
+                <a:latin typeface="Calibri" pitchFamily="34" charset="0"/>
+                <a:ea typeface="Calibri" pitchFamily="34" charset="-122"/>
+                <a:cs typeface="Calibri" pitchFamily="34" charset="-120"/>
+              </a:rPr>
+              <a:t>1</a:t>
+            </a:r>
+            <a:endParaRPr lang="en-US" sz="1092" dirty="0"/>
+          </a:p>
+        </p:txBody>
+      </p:sp>
+      <p:sp>
+        <p:nvSpPr>
+          <p:cNvPr id="6" name="Text 4"/>
+          <p:cNvSpPr/>
+          <p:nvPr/>
+        </p:nvSpPr>
+        <p:spPr>
+          <a:xfrm>
+            <a:off x="1115568" y="1709928"/>
+            <a:ext cx="10527487" cy="365760"/>
           </a:xfrm>
           <a:prstGeom prst="rect">
             <a:avLst/>
@@ -22582,56 +22995,17 @@
               <a:buNone/>
             </a:pPr>
             <a:r>
-              <a:rPr lang="en-US" sz="1500" i="1" dirty="0">
-                <a:solidFill>
-                  <a:srgbClr val="CBD3DC"/>
-                </a:solidFill>
-                <a:latin typeface="Calibri" pitchFamily="34" charset="0"/>
-                <a:ea typeface="Calibri" pitchFamily="34" charset="-122"/>
-                <a:cs typeface="Calibri" pitchFamily="34" charset="-120"/>
-              </a:rPr>
-              <a:t>Engineering Essence, Manufacturing Personified</a:t>
-            </a:r>
-            <a:endParaRPr lang="en-US" sz="1500" dirty="0"/>
-          </a:p>
-        </p:txBody>
-      </p:sp>
-      <p:sp>
-        <p:nvSpPr>
-          <p:cNvPr id="6" name="Text 4"/>
-          <p:cNvSpPr/>
-          <p:nvPr/>
-        </p:nvSpPr>
-        <p:spPr>
-          <a:xfrm>
-            <a:off x="548640" y="4023360"/>
-            <a:ext cx="2743200" cy="274320"/>
-          </a:xfrm>
-          <a:prstGeom prst="rect">
-            <a:avLst/>
-          </a:prstGeom>
-          <a:noFill/>
-          <a:ln/>
-        </p:spPr>
-        <p:txBody>
-          <a:bodyPr wrap="square" lIns="0" tIns="0" rIns="0" bIns="0" rtlCol="0" anchor="ctr"/>
-          <a:lstStyle/>
-          <a:p>
-            <a:pPr indent="0" marL="0">
-              <a:buNone/>
-            </a:pPr>
-            <a:r>
-              <a:rPr lang="en-US" sz="950" b="1" spc="100" kern="0" dirty="0">
-                <a:solidFill>
-                  <a:srgbClr val="D9622B"/>
-                </a:solidFill>
-                <a:latin typeface="Calibri" pitchFamily="34" charset="0"/>
-                <a:ea typeface="Calibri" pitchFamily="34" charset="-122"/>
-                <a:cs typeface="Calibri" pitchFamily="34" charset="-120"/>
-              </a:rPr>
-              <a:t>REGISTERED OFFICE</a:t>
-            </a:r>
-            <a:endParaRPr lang="en-US" sz="950" dirty="0"/>
+              <a:rPr lang="en-US" sz="1350" b="1" dirty="0">
+                <a:solidFill>
+                  <a:srgbClr val="FFFFFF"/>
+                </a:solidFill>
+                <a:latin typeface="Calibri" pitchFamily="34" charset="0"/>
+                <a:ea typeface="Calibri" pitchFamily="34" charset="-122"/>
+                <a:cs typeface="Calibri" pitchFamily="34" charset="-120"/>
+              </a:rPr>
+              <a:t>Liquidation value: a generic buyer's logic</a:t>
+            </a:r>
+            <a:endParaRPr lang="en-US" sz="1350" dirty="0"/>
           </a:p>
         </p:txBody>
       </p:sp>
@@ -22643,203 +23017,8 @@
         </p:nvSpPr>
         <p:spPr>
           <a:xfrm>
-            <a:off x="548640" y="4279392"/>
-            <a:ext cx="9144000" cy="365760"/>
-          </a:xfrm>
-          <a:prstGeom prst="rect">
-            <a:avLst/>
-          </a:prstGeom>
-          <a:noFill/>
-          <a:ln/>
-        </p:spPr>
-        <p:txBody>
-          <a:bodyPr wrap="square" lIns="0" tIns="0" rIns="0" bIns="0" rtlCol="0" anchor="ctr"/>
-          <a:lstStyle/>
-          <a:p>
-            <a:pPr indent="0" marL="0">
-              <a:buNone/>
-            </a:pPr>
-            <a:r>
-              <a:rPr lang="en-US" sz="1200" dirty="0">
-                <a:solidFill>
-                  <a:srgbClr val="FFFFFF"/>
-                </a:solidFill>
-                <a:latin typeface="Calibri" pitchFamily="34" charset="0"/>
-                <a:ea typeface="Calibri" pitchFamily="34" charset="-122"/>
-                <a:cs typeface="Calibri" pitchFamily="34" charset="-120"/>
-              </a:rPr>
-              <a:t>Sector-III, Falta Industrial Growth Centre, South 24 Parganas, West Bengal 743504, India</a:t>
-            </a:r>
-            <a:endParaRPr lang="en-US" sz="1200" dirty="0"/>
-          </a:p>
-        </p:txBody>
-      </p:sp>
-      <p:sp>
-        <p:nvSpPr>
-          <p:cNvPr id="8" name="Text 6"/>
-          <p:cNvSpPr/>
-          <p:nvPr/>
-        </p:nvSpPr>
-        <p:spPr>
-          <a:xfrm>
-            <a:off x="548640" y="4681728"/>
-            <a:ext cx="2743200" cy="274320"/>
-          </a:xfrm>
-          <a:prstGeom prst="rect">
-            <a:avLst/>
-          </a:prstGeom>
-          <a:noFill/>
-          <a:ln/>
-        </p:spPr>
-        <p:txBody>
-          <a:bodyPr wrap="square" lIns="0" tIns="0" rIns="0" bIns="0" rtlCol="0" anchor="ctr"/>
-          <a:lstStyle/>
-          <a:p>
-            <a:pPr indent="0" marL="0">
-              <a:buNone/>
-            </a:pPr>
-            <a:r>
-              <a:rPr lang="en-US" sz="950" b="1" spc="100" kern="0" dirty="0">
-                <a:solidFill>
-                  <a:srgbClr val="D9622B"/>
-                </a:solidFill>
-                <a:latin typeface="Calibri" pitchFamily="34" charset="0"/>
-                <a:ea typeface="Calibri" pitchFamily="34" charset="-122"/>
-                <a:cs typeface="Calibri" pitchFamily="34" charset="-120"/>
-              </a:rPr>
-              <a:t>CONTACT</a:t>
-            </a:r>
-            <a:endParaRPr lang="en-US" sz="950" dirty="0"/>
-          </a:p>
-        </p:txBody>
-      </p:sp>
-      <p:sp>
-        <p:nvSpPr>
-          <p:cNvPr id="9" name="Text 7"/>
-          <p:cNvSpPr/>
-          <p:nvPr/>
-        </p:nvSpPr>
-        <p:spPr>
-          <a:xfrm>
-            <a:off x="548640" y="4937760"/>
-            <a:ext cx="9144000" cy="365760"/>
-          </a:xfrm>
-          <a:prstGeom prst="rect">
-            <a:avLst/>
-          </a:prstGeom>
-          <a:noFill/>
-          <a:ln/>
-        </p:spPr>
-        <p:txBody>
-          <a:bodyPr wrap="square" lIns="0" tIns="0" rIns="0" bIns="0" rtlCol="0" anchor="ctr"/>
-          <a:lstStyle/>
-          <a:p>
-            <a:pPr indent="0" marL="0">
-              <a:buNone/>
-            </a:pPr>
-            <a:r>
-              <a:rPr lang="en-US" sz="1200" dirty="0">
-                <a:solidFill>
-                  <a:srgbClr val="FFFFFF"/>
-                </a:solidFill>
-                <a:latin typeface="Calibri" pitchFamily="34" charset="0"/>
-                <a:ea typeface="Calibri" pitchFamily="34" charset="-122"/>
-                <a:cs typeface="Calibri" pitchFamily="34" charset="-120"/>
-              </a:rPr>
-              <a:t>sales@datre.com  ·  hr@datre.com  ·  www.datre.in</a:t>
-            </a:r>
-            <a:endParaRPr lang="en-US" sz="1200" dirty="0"/>
-          </a:p>
-        </p:txBody>
-      </p:sp>
-      <p:sp>
-        <p:nvSpPr>
-          <p:cNvPr id="10" name="Text 8"/>
-          <p:cNvSpPr/>
-          <p:nvPr/>
-        </p:nvSpPr>
-        <p:spPr>
-          <a:xfrm>
-            <a:off x="548640" y="5340096"/>
-            <a:ext cx="2743200" cy="274320"/>
-          </a:xfrm>
-          <a:prstGeom prst="rect">
-            <a:avLst/>
-          </a:prstGeom>
-          <a:noFill/>
-          <a:ln/>
-        </p:spPr>
-        <p:txBody>
-          <a:bodyPr wrap="square" lIns="0" tIns="0" rIns="0" bIns="0" rtlCol="0" anchor="ctr"/>
-          <a:lstStyle/>
-          <a:p>
-            <a:pPr indent="0" marL="0">
-              <a:buNone/>
-            </a:pPr>
-            <a:r>
-              <a:rPr lang="en-US" sz="950" b="1" spc="100" kern="0" dirty="0">
-                <a:solidFill>
-                  <a:srgbClr val="D9622B"/>
-                </a:solidFill>
-                <a:latin typeface="Calibri" pitchFamily="34" charset="0"/>
-                <a:ea typeface="Calibri" pitchFamily="34" charset="-122"/>
-                <a:cs typeface="Calibri" pitchFamily="34" charset="-120"/>
-              </a:rPr>
-              <a:t>PREPARED FOR</a:t>
-            </a:r>
-            <a:endParaRPr lang="en-US" sz="950" dirty="0"/>
-          </a:p>
-        </p:txBody>
-      </p:sp>
-      <p:sp>
-        <p:nvSpPr>
-          <p:cNvPr id="11" name="Text 9"/>
-          <p:cNvSpPr/>
-          <p:nvPr/>
-        </p:nvSpPr>
-        <p:spPr>
-          <a:xfrm>
-            <a:off x="548640" y="5596128"/>
-            <a:ext cx="9144000" cy="365760"/>
-          </a:xfrm>
-          <a:prstGeom prst="rect">
-            <a:avLst/>
-          </a:prstGeom>
-          <a:noFill/>
-          <a:ln/>
-        </p:spPr>
-        <p:txBody>
-          <a:bodyPr wrap="square" lIns="0" tIns="0" rIns="0" bIns="0" rtlCol="0" anchor="ctr"/>
-          <a:lstStyle/>
-          <a:p>
-            <a:pPr indent="0" marL="0">
-              <a:buNone/>
-            </a:pPr>
-            <a:r>
-              <a:rPr lang="en-US" sz="1200" dirty="0">
-                <a:solidFill>
-                  <a:srgbClr val="FFFFFF"/>
-                </a:solidFill>
-                <a:latin typeface="Calibri" pitchFamily="34" charset="0"/>
-                <a:ea typeface="Calibri" pitchFamily="34" charset="-122"/>
-                <a:cs typeface="Calibri" pitchFamily="34" charset="-120"/>
-              </a:rPr>
-              <a:t>Investor discussion — Indranil Dutta, Chief Executive Officer</a:t>
-            </a:r>
-            <a:endParaRPr lang="en-US" sz="1200" dirty="0"/>
-          </a:p>
-        </p:txBody>
-      </p:sp>
-      <p:sp>
-        <p:nvSpPr>
-          <p:cNvPr id="12" name="Text 10"/>
-          <p:cNvSpPr/>
-          <p:nvPr/>
-        </p:nvSpPr>
-        <p:spPr>
-          <a:xfrm>
-            <a:off x="548640" y="5943600"/>
-            <a:ext cx="11094415" cy="640080"/>
+            <a:off x="1115568" y="2084832"/>
+            <a:ext cx="10527487" cy="658368"/>
           </a:xfrm>
           <a:prstGeom prst="rect">
             <a:avLst/>
@@ -22858,15 +23037,440 @@
               <a:buNone/>
             </a:pPr>
             <a:r>
+              <a:rPr lang="en-US" sz="1000" dirty="0">
+                <a:solidFill>
+                  <a:srgbClr val="CBD3DC"/>
+                </a:solidFill>
+                <a:latin typeface="Calibri" pitchFamily="34" charset="0"/>
+                <a:ea typeface="Calibri" pitchFamily="34" charset="-122"/>
+                <a:cs typeface="Calibri" pitchFamily="34" charset="-120"/>
+              </a:rPr>
+              <a:t>A machinery dealer or plot buyer can only underwrite what they can verify and reuse immediately — the hardware. They have no way to price 25-30 years of heat-treatment process history, RDSO/OEM qualifications, or a customer book earned through years of trial batches and audits.</a:t>
+            </a:r>
+            <a:endParaRPr lang="en-US" sz="1000" dirty="0"/>
+          </a:p>
+        </p:txBody>
+      </p:sp>
+      <p:sp>
+        <p:nvSpPr>
+          <p:cNvPr id="8" name="Shape 6"/>
+          <p:cNvSpPr/>
+          <p:nvPr/>
+        </p:nvSpPr>
+        <p:spPr>
+          <a:xfrm>
+            <a:off x="548640" y="2834640"/>
+            <a:ext cx="384048" cy="384048"/>
+          </a:xfrm>
+          <a:prstGeom prst="ellipse">
+            <a:avLst/>
+          </a:prstGeom>
+          <a:solidFill>
+            <a:srgbClr val="D9622B"/>
+          </a:solidFill>
+          <a:ln/>
+        </p:spPr>
+      </p:sp>
+      <p:sp>
+        <p:nvSpPr>
+          <p:cNvPr id="9" name="Text 7"/>
+          <p:cNvSpPr/>
+          <p:nvPr/>
+        </p:nvSpPr>
+        <p:spPr>
+          <a:xfrm>
+            <a:off x="548640" y="2834640"/>
+            <a:ext cx="384048" cy="384048"/>
+          </a:xfrm>
+          <a:prstGeom prst="rect">
+            <a:avLst/>
+          </a:prstGeom>
+          <a:noFill/>
+          <a:ln/>
+        </p:spPr>
+        <p:txBody>
+          <a:bodyPr wrap="square" lIns="0" tIns="0" rIns="0" bIns="0" rtlCol="0" anchor="ctr"/>
+          <a:lstStyle/>
+          <a:p>
+            <a:pPr algn="ctr" indent="0" marL="0">
+              <a:buNone/>
+            </a:pPr>
+            <a:r>
+              <a:rPr lang="en-US" sz="1092" b="1" dirty="0">
+                <a:solidFill>
+                  <a:srgbClr val="FFFFFF"/>
+                </a:solidFill>
+                <a:latin typeface="Calibri" pitchFamily="34" charset="0"/>
+                <a:ea typeface="Calibri" pitchFamily="34" charset="-122"/>
+                <a:cs typeface="Calibri" pitchFamily="34" charset="-120"/>
+              </a:rPr>
+              <a:t>2</a:t>
+            </a:r>
+            <a:endParaRPr lang="en-US" sz="1092" dirty="0"/>
+          </a:p>
+        </p:txBody>
+      </p:sp>
+      <p:sp>
+        <p:nvSpPr>
+          <p:cNvPr id="10" name="Text 8"/>
+          <p:cNvSpPr/>
+          <p:nvPr/>
+        </p:nvSpPr>
+        <p:spPr>
+          <a:xfrm>
+            <a:off x="1115568" y="2807208"/>
+            <a:ext cx="10527487" cy="365760"/>
+          </a:xfrm>
+          <a:prstGeom prst="rect">
+            <a:avLst/>
+          </a:prstGeom>
+          <a:noFill/>
+          <a:ln/>
+        </p:spPr>
+        <p:txBody>
+          <a:bodyPr wrap="square" lIns="0" tIns="0" rIns="0" bIns="0" rtlCol="0" anchor="ctr"/>
+          <a:lstStyle/>
+          <a:p>
+            <a:pPr indent="0" marL="0">
+              <a:buNone/>
+            </a:pPr>
+            <a:r>
+              <a:rPr lang="en-US" sz="1350" b="1" dirty="0">
+                <a:solidFill>
+                  <a:srgbClr val="FFFFFF"/>
+                </a:solidFill>
+                <a:latin typeface="Calibri" pitchFamily="34" charset="0"/>
+                <a:ea typeface="Calibri" pitchFamily="34" charset="-122"/>
+                <a:cs typeface="Calibri" pitchFamily="34" charset="-120"/>
+              </a:rPr>
+              <a:t>Fair market value: what the business earns standalone</a:t>
+            </a:r>
+            <a:endParaRPr lang="en-US" sz="1350" dirty="0"/>
+          </a:p>
+        </p:txBody>
+      </p:sp>
+      <p:sp>
+        <p:nvSpPr>
+          <p:cNvPr id="11" name="Text 9"/>
+          <p:cNvSpPr/>
+          <p:nvPr/>
+        </p:nvSpPr>
+        <p:spPr>
+          <a:xfrm>
+            <a:off x="1115568" y="3182112"/>
+            <a:ext cx="10527487" cy="658368"/>
+          </a:xfrm>
+          <a:prstGeom prst="rect">
+            <a:avLst/>
+          </a:prstGeom>
+          <a:noFill/>
+          <a:ln/>
+        </p:spPr>
+        <p:txBody>
+          <a:bodyPr wrap="square" lIns="0" tIns="0" rIns="0" bIns="0" rtlCol="0" anchor="ctr"/>
+          <a:lstStyle/>
+          <a:p>
+            <a:pPr indent="0" marL="0">
+              <a:lnSpc>
+                <a:spcPct val="115000"/>
+              </a:lnSpc>
+              <a:buNone/>
+            </a:pPr>
+            <a:r>
+              <a:rPr lang="en-US" sz="1000" dirty="0">
+                <a:solidFill>
+                  <a:srgbClr val="CBD3DC"/>
+                </a:solidFill>
+                <a:latin typeface="Calibri" pitchFamily="34" charset="0"/>
+                <a:ea typeface="Calibri" pitchFamily="34" charset="-122"/>
+                <a:cs typeface="Calibri" pitchFamily="34" charset="-120"/>
+              </a:rPr>
+              <a:t>Even on light, illustrative multiples, capitalized earnings already clear 3x+ the entire fixed-asset book (slide 25). This is the value a rational financial buyer, with no synergy, would underwrite.</a:t>
+            </a:r>
+            <a:endParaRPr lang="en-US" sz="1000" dirty="0"/>
+          </a:p>
+        </p:txBody>
+      </p:sp>
+      <p:sp>
+        <p:nvSpPr>
+          <p:cNvPr id="12" name="Shape 10"/>
+          <p:cNvSpPr/>
+          <p:nvPr/>
+        </p:nvSpPr>
+        <p:spPr>
+          <a:xfrm>
+            <a:off x="548640" y="3931920"/>
+            <a:ext cx="384048" cy="384048"/>
+          </a:xfrm>
+          <a:prstGeom prst="ellipse">
+            <a:avLst/>
+          </a:prstGeom>
+          <a:solidFill>
+            <a:srgbClr val="D9622B"/>
+          </a:solidFill>
+          <a:ln/>
+        </p:spPr>
+      </p:sp>
+      <p:sp>
+        <p:nvSpPr>
+          <p:cNvPr id="13" name="Text 11"/>
+          <p:cNvSpPr/>
+          <p:nvPr/>
+        </p:nvSpPr>
+        <p:spPr>
+          <a:xfrm>
+            <a:off x="548640" y="3931920"/>
+            <a:ext cx="384048" cy="384048"/>
+          </a:xfrm>
+          <a:prstGeom prst="rect">
+            <a:avLst/>
+          </a:prstGeom>
+          <a:noFill/>
+          <a:ln/>
+        </p:spPr>
+        <p:txBody>
+          <a:bodyPr wrap="square" lIns="0" tIns="0" rIns="0" bIns="0" rtlCol="0" anchor="ctr"/>
+          <a:lstStyle/>
+          <a:p>
+            <a:pPr algn="ctr" indent="0" marL="0">
+              <a:buNone/>
+            </a:pPr>
+            <a:r>
+              <a:rPr lang="en-US" sz="1092" b="1" dirty="0">
+                <a:solidFill>
+                  <a:srgbClr val="FFFFFF"/>
+                </a:solidFill>
+                <a:latin typeface="Calibri" pitchFamily="34" charset="0"/>
+                <a:ea typeface="Calibri" pitchFamily="34" charset="-122"/>
+                <a:cs typeface="Calibri" pitchFamily="34" charset="-120"/>
+              </a:rPr>
+              <a:t>3</a:t>
+            </a:r>
+            <a:endParaRPr lang="en-US" sz="1092" dirty="0"/>
+          </a:p>
+        </p:txBody>
+      </p:sp>
+      <p:sp>
+        <p:nvSpPr>
+          <p:cNvPr id="14" name="Text 12"/>
+          <p:cNvSpPr/>
+          <p:nvPr/>
+        </p:nvSpPr>
+        <p:spPr>
+          <a:xfrm>
+            <a:off x="1115568" y="3904488"/>
+            <a:ext cx="10527487" cy="365760"/>
+          </a:xfrm>
+          <a:prstGeom prst="rect">
+            <a:avLst/>
+          </a:prstGeom>
+          <a:noFill/>
+          <a:ln/>
+        </p:spPr>
+        <p:txBody>
+          <a:bodyPr wrap="square" lIns="0" tIns="0" rIns="0" bIns="0" rtlCol="0" anchor="ctr"/>
+          <a:lstStyle/>
+          <a:p>
+            <a:pPr indent="0" marL="0">
+              <a:buNone/>
+            </a:pPr>
+            <a:r>
+              <a:rPr lang="en-US" sz="1350" b="1" dirty="0">
+                <a:solidFill>
+                  <a:srgbClr val="FFFFFF"/>
+                </a:solidFill>
+                <a:latin typeface="Calibri" pitchFamily="34" charset="0"/>
+                <a:ea typeface="Calibri" pitchFamily="34" charset="-122"/>
+                <a:cs typeface="Calibri" pitchFamily="34" charset="-120"/>
+              </a:rPr>
+              <a:t>Strategic value: what it's worth to the right buyer</a:t>
+            </a:r>
+            <a:endParaRPr lang="en-US" sz="1350" dirty="0"/>
+          </a:p>
+        </p:txBody>
+      </p:sp>
+      <p:sp>
+        <p:nvSpPr>
+          <p:cNvPr id="15" name="Text 13"/>
+          <p:cNvSpPr/>
+          <p:nvPr/>
+        </p:nvSpPr>
+        <p:spPr>
+          <a:xfrm>
+            <a:off x="1115568" y="4279392"/>
+            <a:ext cx="10527487" cy="658368"/>
+          </a:xfrm>
+          <a:prstGeom prst="rect">
+            <a:avLst/>
+          </a:prstGeom>
+          <a:noFill/>
+          <a:ln/>
+        </p:spPr>
+        <p:txBody>
+          <a:bodyPr wrap="square" lIns="0" tIns="0" rIns="0" bIns="0" rtlCol="0" anchor="ctr"/>
+          <a:lstStyle/>
+          <a:p>
+            <a:pPr indent="0" marL="0">
+              <a:lnSpc>
+                <a:spcPct val="115000"/>
+              </a:lnSpc>
+              <a:buNone/>
+            </a:pPr>
+            <a:r>
+              <a:rPr lang="en-US" sz="1000" dirty="0">
+                <a:solidFill>
+                  <a:srgbClr val="CBD3DC"/>
+                </a:solidFill>
+                <a:latin typeface="Calibri" pitchFamily="34" charset="0"/>
+                <a:ea typeface="Calibri" pitchFamily="34" charset="-122"/>
+                <a:cs typeface="Calibri" pitchFamily="34" charset="-120"/>
+              </a:rPr>
+              <a:t>An OEM wanting captive supply, or a foundry group wanting instant access to Datre's Tier-1 relationships, avoids the same multi-year, uncertain-utilization qualification cost any new entrant faces. That's the ceiling few generic buyers can pay — and only a narrow buyer set can underwrite it.</a:t>
+            </a:r>
+            <a:endParaRPr lang="en-US" sz="1000" dirty="0"/>
+          </a:p>
+        </p:txBody>
+      </p:sp>
+      <p:sp>
+        <p:nvSpPr>
+          <p:cNvPr id="16" name="Shape 14"/>
+          <p:cNvSpPr/>
+          <p:nvPr/>
+        </p:nvSpPr>
+        <p:spPr>
+          <a:xfrm>
+            <a:off x="548640" y="5029200"/>
+            <a:ext cx="11094415" cy="1005840"/>
+          </a:xfrm>
+          <a:prstGeom prst="roundRect">
+            <a:avLst>
+              <a:gd name="adj" fmla="val 7273"/>
+            </a:avLst>
+          </a:prstGeom>
+          <a:solidFill>
+            <a:srgbClr val="262B34"/>
+          </a:solidFill>
+          <a:ln/>
+        </p:spPr>
+      </p:sp>
+      <p:sp>
+        <p:nvSpPr>
+          <p:cNvPr id="17" name="Text 15"/>
+          <p:cNvSpPr/>
+          <p:nvPr/>
+        </p:nvSpPr>
+        <p:spPr>
+          <a:xfrm>
+            <a:off x="822960" y="5166360"/>
+            <a:ext cx="10545775" cy="274320"/>
+          </a:xfrm>
+          <a:prstGeom prst="rect">
+            <a:avLst/>
+          </a:prstGeom>
+          <a:noFill/>
+          <a:ln/>
+        </p:spPr>
+        <p:txBody>
+          <a:bodyPr wrap="square" lIns="0" tIns="0" rIns="0" bIns="0" rtlCol="0" anchor="ctr"/>
+          <a:lstStyle/>
+          <a:p>
+            <a:pPr indent="0" marL="0">
+              <a:buNone/>
+            </a:pPr>
+            <a:r>
+              <a:rPr lang="en-US" sz="1000" b="1" spc="100" kern="0" dirty="0">
+                <a:solidFill>
+                  <a:srgbClr val="E8B84B"/>
+                </a:solidFill>
+                <a:latin typeface="Calibri" pitchFamily="34" charset="0"/>
+                <a:ea typeface="Calibri" pitchFamily="34" charset="-122"/>
+                <a:cs typeface="Calibri" pitchFamily="34" charset="-120"/>
+              </a:rPr>
+              <a:t>RECOMMENDATION</a:t>
+            </a:r>
+            <a:endParaRPr lang="en-US" sz="1000" dirty="0"/>
+          </a:p>
+        </p:txBody>
+      </p:sp>
+      <p:sp>
+        <p:nvSpPr>
+          <p:cNvPr id="18" name="Text 16"/>
+          <p:cNvSpPr/>
+          <p:nvPr/>
+        </p:nvSpPr>
+        <p:spPr>
+          <a:xfrm>
+            <a:off x="822960" y="5440680"/>
+            <a:ext cx="10545775" cy="548640"/>
+          </a:xfrm>
+          <a:prstGeom prst="rect">
+            <a:avLst/>
+          </a:prstGeom>
+          <a:noFill/>
+          <a:ln/>
+        </p:spPr>
+        <p:txBody>
+          <a:bodyPr wrap="square" lIns="0" tIns="0" rIns="0" bIns="0" rtlCol="0" anchor="ctr"/>
+          <a:lstStyle/>
+          <a:p>
+            <a:pPr indent="0" marL="0">
+              <a:lnSpc>
+                <a:spcPct val="110000"/>
+              </a:lnSpc>
+              <a:buNone/>
+            </a:pPr>
+            <a:r>
+              <a:rPr lang="en-US" sz="1000" dirty="0">
+                <a:solidFill>
+                  <a:srgbClr val="FFFFFF"/>
+                </a:solidFill>
+                <a:latin typeface="Calibri" pitchFamily="34" charset="0"/>
+                <a:ea typeface="Calibri" pitchFamily="34" charset="-122"/>
+                <a:cs typeface="Calibri" pitchFamily="34" charset="-120"/>
+              </a:rPr>
+              <a:t>Negotiate on earnings capacity plus a named strategic premium, not on net-asset value of 30-year-old machinery. A thin pool of qualified buyers is a sale-process problem, solved with a targeted and patient process — not a reason to discount enterprise value to book.</a:t>
+            </a:r>
+            <a:endParaRPr lang="en-US" sz="1000" dirty="0"/>
+          </a:p>
+        </p:txBody>
+      </p:sp>
+      <p:sp>
+        <p:nvSpPr>
+          <p:cNvPr id="19" name="Text 17"/>
+          <p:cNvSpPr/>
+          <p:nvPr/>
+        </p:nvSpPr>
+        <p:spPr>
+          <a:xfrm>
+            <a:off x="548640" y="6144768"/>
+            <a:ext cx="11094415" cy="320040"/>
+          </a:xfrm>
+          <a:prstGeom prst="rect">
+            <a:avLst/>
+          </a:prstGeom>
+          <a:noFill/>
+          <a:ln/>
+        </p:spPr>
+        <p:txBody>
+          <a:bodyPr wrap="square" lIns="0" tIns="0" rIns="0" bIns="0" rtlCol="0" anchor="ctr"/>
+          <a:lstStyle/>
+          <a:p>
+            <a:pPr indent="0" marL="0">
+              <a:lnSpc>
+                <a:spcPct val="110000"/>
+              </a:lnSpc>
+              <a:buNone/>
+            </a:pPr>
+            <a:r>
               <a:rPr lang="en-US" sz="850" i="1" dirty="0">
                 <a:solidFill>
-                  <a:srgbClr val="7A828E"/>
-                </a:solidFill>
-                <a:latin typeface="Calibri" pitchFamily="34" charset="0"/>
-                <a:ea typeface="Calibri" pitchFamily="34" charset="-122"/>
-                <a:cs typeface="Calibri" pitchFamily="34" charset="-120"/>
-              </a:rPr>
-              <a:t>This document consolidates the company's own financial statements, management information system reports and internal analyses. Figures are sourced and dated throughout; where audited and unaudited data diverge, both are shown. Confidential — prepared for internal investor discussion only.</a:t>
+                  <a:srgbClr val="9AA2AD"/>
+                </a:solidFill>
+                <a:latin typeface="Calibri" pitchFamily="34" charset="0"/>
+                <a:ea typeface="Calibri" pitchFamily="34" charset="-122"/>
+                <a:cs typeface="Calibri" pitchFamily="34" charset="-120"/>
+              </a:rPr>
+              <a:t>This framework uses Datre's own audited and internal records for the asset and earnings figures; the FMV multiples and the existence/identity of a strategic buyer are illustrative and unverified. Recommend a formal valuation (registered valuer / IBBI standards) before using this for negotiation.</a:t>
             </a:r>
             <a:endParaRPr lang="en-US" sz="850" dirty="0"/>
           </a:p>
@@ -22874,7 +23478,46 @@
       </p:sp>
       <p:sp>
         <p:nvSpPr>
-          <p:cNvPr id="13" name="Text 11"/>
+          <p:cNvPr id="20" name="Text 18"/>
+          <p:cNvSpPr/>
+          <p:nvPr/>
+        </p:nvSpPr>
+        <p:spPr>
+          <a:xfrm>
+            <a:off x="548640" y="6473952"/>
+            <a:ext cx="11094415" cy="274320"/>
+          </a:xfrm>
+          <a:prstGeom prst="rect">
+            <a:avLst/>
+          </a:prstGeom>
+          <a:noFill/>
+          <a:ln/>
+        </p:spPr>
+        <p:txBody>
+          <a:bodyPr wrap="square" lIns="0" tIns="0" rIns="0" bIns="0" rtlCol="0" anchor="ctr"/>
+          <a:lstStyle/>
+          <a:p>
+            <a:pPr algn="l" indent="0" marL="0">
+              <a:buNone/>
+            </a:pPr>
+            <a:r>
+              <a:rPr lang="en-US" sz="800" dirty="0">
+                <a:solidFill>
+                  <a:srgbClr val="8B93A0"/>
+                </a:solidFill>
+                <a:latin typeface="Calibri" pitchFamily="34" charset="0"/>
+                <a:ea typeface="Calibri" pitchFamily="34" charset="-122"/>
+                <a:cs typeface="Calibri" pitchFamily="34" charset="-120"/>
+              </a:rPr>
+              <a:t>DATRE CORPORATION LIMITED  |  CONFIDENTIAL — PREPARED FOR INVESTOR DISCUSSION</a:t>
+            </a:r>
+            <a:endParaRPr lang="en-US" sz="800" dirty="0"/>
+          </a:p>
+        </p:txBody>
+      </p:sp>
+      <p:sp>
+        <p:nvSpPr>
+          <p:cNvPr id="21" name="Text 19"/>
           <p:cNvSpPr/>
           <p:nvPr/>
         </p:nvSpPr>
@@ -22906,6 +23549,1194 @@
                 <a:cs typeface="Calibri" pitchFamily="34" charset="-120"/>
               </a:rPr>
               <a:t>26</a:t>
+            </a:r>
+            <a:endParaRPr lang="en-US" sz="800" dirty="0"/>
+          </a:p>
+        </p:txBody>
+      </p:sp>
+    </p:spTree>
+  </p:cSld>
+  <p:clrMapOvr>
+    <a:masterClrMapping/>
+  </p:clrMapOvr>
+</p:sld>
+</file>
+
+<file path=ppt/slides/slide27.xml><?xml version="1.0" encoding="utf-8"?>
+<p:sld xmlns:a="http://schemas.openxmlformats.org/drawingml/2006/main" xmlns:r="http://schemas.openxmlformats.org/officeDocument/2006/relationships" xmlns:p="http://schemas.openxmlformats.org/presentationml/2006/main">
+  <p:cSld name="Slide 27">
+    <p:bg>
+      <p:bgPr>
+        <a:solidFill>
+          <a:srgbClr val="1C1F26"/>
+        </a:solidFill>
+      </p:bgPr>
+    </p:bg>
+    <p:spTree>
+      <p:nvGrpSpPr>
+        <p:cNvPr id="1" name=""/>
+        <p:cNvGrpSpPr/>
+        <p:nvPr/>
+      </p:nvGrpSpPr>
+      <p:grpSpPr>
+        <a:xfrm>
+          <a:off x="0" y="0"/>
+          <a:ext cx="0" cy="0"/>
+          <a:chOff x="0" y="0"/>
+          <a:chExt cx="0" cy="0"/>
+        </a:xfrm>
+      </p:grpSpPr>
+      <p:sp>
+        <p:nvSpPr>
+          <p:cNvPr id="2" name="Text 0"/>
+          <p:cNvSpPr/>
+          <p:nvPr/>
+        </p:nvSpPr>
+        <p:spPr>
+          <a:xfrm>
+            <a:off x="548640" y="457200"/>
+            <a:ext cx="4572000" cy="274320"/>
+          </a:xfrm>
+          <a:prstGeom prst="rect">
+            <a:avLst/>
+          </a:prstGeom>
+          <a:noFill/>
+          <a:ln/>
+        </p:spPr>
+        <p:txBody>
+          <a:bodyPr wrap="square" lIns="0" tIns="0" rIns="0" bIns="0" rtlCol="0" anchor="ctr"/>
+          <a:lstStyle/>
+          <a:p>
+            <a:pPr indent="0" marL="0">
+              <a:buNone/>
+            </a:pPr>
+            <a:r>
+              <a:rPr lang="en-US" sz="1100" b="1" spc="200" kern="0" dirty="0">
+                <a:solidFill>
+                  <a:srgbClr val="D9622B"/>
+                </a:solidFill>
+                <a:latin typeface="Calibri" pitchFamily="34" charset="0"/>
+                <a:ea typeface="Calibri" pitchFamily="34" charset="-122"/>
+                <a:cs typeface="Calibri" pitchFamily="34" charset="-120"/>
+              </a:rPr>
+              <a:t>INVESTMENT CONSIDERATIONS</a:t>
+            </a:r>
+            <a:endParaRPr lang="en-US" sz="1100" dirty="0"/>
+          </a:p>
+        </p:txBody>
+      </p:sp>
+      <p:sp>
+        <p:nvSpPr>
+          <p:cNvPr id="3" name="Text 1"/>
+          <p:cNvSpPr/>
+          <p:nvPr/>
+        </p:nvSpPr>
+        <p:spPr>
+          <a:xfrm>
+            <a:off x="548640" y="841248"/>
+            <a:ext cx="11094415" cy="685800"/>
+          </a:xfrm>
+          <a:prstGeom prst="rect">
+            <a:avLst/>
+          </a:prstGeom>
+          <a:noFill/>
+          <a:ln/>
+        </p:spPr>
+        <p:txBody>
+          <a:bodyPr wrap="square" lIns="0" tIns="0" rIns="0" bIns="0" rtlCol="0" anchor="ctr"/>
+          <a:lstStyle/>
+          <a:p>
+            <a:pPr algn="l" indent="0" marL="0">
+              <a:buNone/>
+            </a:pPr>
+            <a:r>
+              <a:rPr lang="en-US" sz="3000" b="1" dirty="0">
+                <a:solidFill>
+                  <a:srgbClr val="FFFFFF"/>
+                </a:solidFill>
+                <a:latin typeface="Cambria" pitchFamily="34" charset="0"/>
+                <a:ea typeface="Cambria" pitchFamily="34" charset="-122"/>
+                <a:cs typeface="Cambria" pitchFamily="34" charset="-120"/>
+              </a:rPr>
+              <a:t>A framework for the ask — terms to be finalized with management</a:t>
+            </a:r>
+            <a:endParaRPr lang="en-US" sz="3000" dirty="0"/>
+          </a:p>
+        </p:txBody>
+      </p:sp>
+      <p:sp>
+        <p:nvSpPr>
+          <p:cNvPr id="4" name="Shape 2"/>
+          <p:cNvSpPr/>
+          <p:nvPr/>
+        </p:nvSpPr>
+        <p:spPr>
+          <a:xfrm>
+            <a:off x="548640" y="1783080"/>
+            <a:ext cx="11094415" cy="685800"/>
+          </a:xfrm>
+          <a:prstGeom prst="roundRect">
+            <a:avLst>
+              <a:gd name="adj" fmla="val 8000"/>
+            </a:avLst>
+          </a:prstGeom>
+          <a:solidFill>
+            <a:srgbClr val="262B34"/>
+          </a:solidFill>
+          <a:ln/>
+        </p:spPr>
+      </p:sp>
+      <p:sp>
+        <p:nvSpPr>
+          <p:cNvPr id="5" name="Text 3"/>
+          <p:cNvSpPr/>
+          <p:nvPr/>
+        </p:nvSpPr>
+        <p:spPr>
+          <a:xfrm>
+            <a:off x="777240" y="1783080"/>
+            <a:ext cx="10637215" cy="685800"/>
+          </a:xfrm>
+          <a:prstGeom prst="rect">
+            <a:avLst/>
+          </a:prstGeom>
+          <a:noFill/>
+          <a:ln/>
+        </p:spPr>
+        <p:txBody>
+          <a:bodyPr wrap="square" lIns="0" tIns="0" rIns="0" bIns="0" rtlCol="0" anchor="ctr"/>
+          <a:lstStyle/>
+          <a:p>
+            <a:pPr indent="0" marL="0">
+              <a:lnSpc>
+                <a:spcPct val="110000"/>
+              </a:lnSpc>
+              <a:buNone/>
+            </a:pPr>
+            <a:r>
+              <a:rPr lang="en-US" sz="1030" i="1" dirty="0">
+                <a:solidFill>
+                  <a:srgbClr val="E8B84B"/>
+                </a:solidFill>
+                <a:latin typeface="Calibri" pitchFamily="34" charset="0"/>
+                <a:ea typeface="Calibri" pitchFamily="34" charset="-122"/>
+                <a:cs typeface="Calibri" pitchFamily="34" charset="-120"/>
+              </a:rPr>
+              <a:t>The materials reviewed do not specify a funding quantum, instrument, valuation or use-of-proceeds. What follows is a suggested framework, derived from the financial and operational analysis in this deck — not a management-approved ask.</a:t>
+            </a:r>
+            <a:endParaRPr lang="en-US" sz="1030" dirty="0"/>
+          </a:p>
+        </p:txBody>
+      </p:sp>
+      <p:sp>
+        <p:nvSpPr>
+          <p:cNvPr id="6" name="Shape 4"/>
+          <p:cNvSpPr/>
+          <p:nvPr/>
+        </p:nvSpPr>
+        <p:spPr>
+          <a:xfrm>
+            <a:off x="548640" y="2788920"/>
+            <a:ext cx="457200" cy="457200"/>
+          </a:xfrm>
+          <a:prstGeom prst="ellipse">
+            <a:avLst/>
+          </a:prstGeom>
+          <a:solidFill>
+            <a:srgbClr val="D9622B"/>
+          </a:solidFill>
+          <a:ln/>
+        </p:spPr>
+      </p:sp>
+      <p:sp>
+        <p:nvSpPr>
+          <p:cNvPr id="7" name="Text 5"/>
+          <p:cNvSpPr/>
+          <p:nvPr/>
+        </p:nvSpPr>
+        <p:spPr>
+          <a:xfrm>
+            <a:off x="548640" y="2788920"/>
+            <a:ext cx="457200" cy="457200"/>
+          </a:xfrm>
+          <a:prstGeom prst="rect">
+            <a:avLst/>
+          </a:prstGeom>
+          <a:noFill/>
+          <a:ln/>
+        </p:spPr>
+        <p:txBody>
+          <a:bodyPr wrap="square" lIns="0" tIns="0" rIns="0" bIns="0" rtlCol="0" anchor="ctr"/>
+          <a:lstStyle/>
+          <a:p>
+            <a:pPr algn="ctr" indent="0" marL="0">
+              <a:buNone/>
+            </a:pPr>
+            <a:r>
+              <a:rPr lang="en-US" sz="1300" b="1" dirty="0">
+                <a:solidFill>
+                  <a:srgbClr val="FFFFFF"/>
+                </a:solidFill>
+                <a:latin typeface="Calibri" pitchFamily="34" charset="0"/>
+                <a:ea typeface="Calibri" pitchFamily="34" charset="-122"/>
+                <a:cs typeface="Calibri" pitchFamily="34" charset="-120"/>
+              </a:rPr>
+              <a:t>1</a:t>
+            </a:r>
+            <a:endParaRPr lang="en-US" sz="1300" dirty="0"/>
+          </a:p>
+        </p:txBody>
+      </p:sp>
+      <p:sp>
+        <p:nvSpPr>
+          <p:cNvPr id="8" name="Text 6"/>
+          <p:cNvSpPr/>
+          <p:nvPr/>
+        </p:nvSpPr>
+        <p:spPr>
+          <a:xfrm>
+            <a:off x="1234440" y="2770632"/>
+            <a:ext cx="2926080" cy="502920"/>
+          </a:xfrm>
+          <a:prstGeom prst="rect">
+            <a:avLst/>
+          </a:prstGeom>
+          <a:noFill/>
+          <a:ln/>
+        </p:spPr>
+        <p:txBody>
+          <a:bodyPr wrap="square" lIns="0" tIns="0" rIns="0" bIns="0" rtlCol="0" anchor="ctr"/>
+          <a:lstStyle/>
+          <a:p>
+            <a:pPr indent="0" marL="0">
+              <a:lnSpc>
+                <a:spcPct val="100000"/>
+              </a:lnSpc>
+              <a:buNone/>
+            </a:pPr>
+            <a:r>
+              <a:rPr lang="en-US" sz="1300" b="1" dirty="0">
+                <a:solidFill>
+                  <a:srgbClr val="FFFFFF"/>
+                </a:solidFill>
+                <a:latin typeface="Calibri" pitchFamily="34" charset="0"/>
+                <a:ea typeface="Calibri" pitchFamily="34" charset="-122"/>
+                <a:cs typeface="Calibri" pitchFamily="34" charset="-120"/>
+              </a:rPr>
+              <a:t>Balance-sheet repair</a:t>
+            </a:r>
+            <a:endParaRPr lang="en-US" sz="1300" dirty="0"/>
+          </a:p>
+        </p:txBody>
+      </p:sp>
+      <p:sp>
+        <p:nvSpPr>
+          <p:cNvPr id="9" name="Text 7"/>
+          <p:cNvSpPr/>
+          <p:nvPr/>
+        </p:nvSpPr>
+        <p:spPr>
+          <a:xfrm>
+            <a:off x="4297680" y="2743200"/>
+            <a:ext cx="7345375" cy="731520"/>
+          </a:xfrm>
+          <a:prstGeom prst="rect">
+            <a:avLst/>
+          </a:prstGeom>
+          <a:noFill/>
+          <a:ln/>
+        </p:spPr>
+        <p:txBody>
+          <a:bodyPr wrap="square" lIns="0" tIns="0" rIns="0" bIns="0" rtlCol="0" anchor="t"/>
+          <a:lstStyle/>
+          <a:p>
+            <a:pPr indent="0" marL="0">
+              <a:lnSpc>
+                <a:spcPct val="115000"/>
+              </a:lnSpc>
+              <a:buNone/>
+            </a:pPr>
+            <a:r>
+              <a:rPr lang="en-US" sz="1030" dirty="0">
+                <a:solidFill>
+                  <a:srgbClr val="CBD3DC"/>
+                </a:solidFill>
+                <a:latin typeface="Calibri" pitchFamily="34" charset="0"/>
+                <a:ea typeface="Calibri" pitchFamily="34" charset="-122"/>
+                <a:cs typeface="Calibri" pitchFamily="34" charset="-120"/>
+              </a:rPr>
+              <a:t>Equity infusion or a structured plan to accelerate net worth from -₹1.54 Cr (FY25) to positive, rather than relying solely on ~₹1.4 Cr/yr retained earnings.</a:t>
+            </a:r>
+            <a:endParaRPr lang="en-US" sz="1030" dirty="0"/>
+          </a:p>
+        </p:txBody>
+      </p:sp>
+      <p:sp>
+        <p:nvSpPr>
+          <p:cNvPr id="10" name="Shape 8"/>
+          <p:cNvSpPr/>
+          <p:nvPr/>
+        </p:nvSpPr>
+        <p:spPr>
+          <a:xfrm>
+            <a:off x="548640" y="3840480"/>
+            <a:ext cx="457200" cy="457200"/>
+          </a:xfrm>
+          <a:prstGeom prst="ellipse">
+            <a:avLst/>
+          </a:prstGeom>
+          <a:solidFill>
+            <a:srgbClr val="D9622B"/>
+          </a:solidFill>
+          <a:ln/>
+        </p:spPr>
+      </p:sp>
+      <p:sp>
+        <p:nvSpPr>
+          <p:cNvPr id="11" name="Text 9"/>
+          <p:cNvSpPr/>
+          <p:nvPr/>
+        </p:nvSpPr>
+        <p:spPr>
+          <a:xfrm>
+            <a:off x="548640" y="3840480"/>
+            <a:ext cx="457200" cy="457200"/>
+          </a:xfrm>
+          <a:prstGeom prst="rect">
+            <a:avLst/>
+          </a:prstGeom>
+          <a:noFill/>
+          <a:ln/>
+        </p:spPr>
+        <p:txBody>
+          <a:bodyPr wrap="square" lIns="0" tIns="0" rIns="0" bIns="0" rtlCol="0" anchor="ctr"/>
+          <a:lstStyle/>
+          <a:p>
+            <a:pPr algn="ctr" indent="0" marL="0">
+              <a:buNone/>
+            </a:pPr>
+            <a:r>
+              <a:rPr lang="en-US" sz="1300" b="1" dirty="0">
+                <a:solidFill>
+                  <a:srgbClr val="FFFFFF"/>
+                </a:solidFill>
+                <a:latin typeface="Calibri" pitchFamily="34" charset="0"/>
+                <a:ea typeface="Calibri" pitchFamily="34" charset="-122"/>
+                <a:cs typeface="Calibri" pitchFamily="34" charset="-120"/>
+              </a:rPr>
+              <a:t>2</a:t>
+            </a:r>
+            <a:endParaRPr lang="en-US" sz="1300" dirty="0"/>
+          </a:p>
+        </p:txBody>
+      </p:sp>
+      <p:sp>
+        <p:nvSpPr>
+          <p:cNvPr id="12" name="Text 10"/>
+          <p:cNvSpPr/>
+          <p:nvPr/>
+        </p:nvSpPr>
+        <p:spPr>
+          <a:xfrm>
+            <a:off x="1234440" y="3822192"/>
+            <a:ext cx="2926080" cy="502920"/>
+          </a:xfrm>
+          <a:prstGeom prst="rect">
+            <a:avLst/>
+          </a:prstGeom>
+          <a:noFill/>
+          <a:ln/>
+        </p:spPr>
+        <p:txBody>
+          <a:bodyPr wrap="square" lIns="0" tIns="0" rIns="0" bIns="0" rtlCol="0" anchor="ctr"/>
+          <a:lstStyle/>
+          <a:p>
+            <a:pPr indent="0" marL="0">
+              <a:lnSpc>
+                <a:spcPct val="100000"/>
+              </a:lnSpc>
+              <a:buNone/>
+            </a:pPr>
+            <a:r>
+              <a:rPr lang="en-US" sz="1300" b="1" dirty="0">
+                <a:solidFill>
+                  <a:srgbClr val="FFFFFF"/>
+                </a:solidFill>
+                <a:latin typeface="Calibri" pitchFamily="34" charset="0"/>
+                <a:ea typeface="Calibri" pitchFamily="34" charset="-122"/>
+                <a:cs typeface="Calibri" pitchFamily="34" charset="-120"/>
+              </a:rPr>
+              <a:t>Working-capital bridge</a:t>
+            </a:r>
+            <a:endParaRPr lang="en-US" sz="1300" dirty="0"/>
+          </a:p>
+        </p:txBody>
+      </p:sp>
+      <p:sp>
+        <p:nvSpPr>
+          <p:cNvPr id="13" name="Text 11"/>
+          <p:cNvSpPr/>
+          <p:nvPr/>
+        </p:nvSpPr>
+        <p:spPr>
+          <a:xfrm>
+            <a:off x="4297680" y="3794760"/>
+            <a:ext cx="7345375" cy="731520"/>
+          </a:xfrm>
+          <a:prstGeom prst="rect">
+            <a:avLst/>
+          </a:prstGeom>
+          <a:noFill/>
+          <a:ln/>
+        </p:spPr>
+        <p:txBody>
+          <a:bodyPr wrap="square" lIns="0" tIns="0" rIns="0" bIns="0" rtlCol="0" anchor="t"/>
+          <a:lstStyle/>
+          <a:p>
+            <a:pPr indent="0" marL="0">
+              <a:lnSpc>
+                <a:spcPct val="115000"/>
+              </a:lnSpc>
+              <a:buNone/>
+            </a:pPr>
+            <a:r>
+              <a:rPr lang="en-US" sz="1030" dirty="0">
+                <a:solidFill>
+                  <a:srgbClr val="CBD3DC"/>
+                </a:solidFill>
+                <a:latin typeface="Calibri" pitchFamily="34" charset="0"/>
+                <a:ea typeface="Calibri" pitchFamily="34" charset="-122"/>
+                <a:cs typeface="Calibri" pitchFamily="34" charset="-120"/>
+              </a:rPr>
+              <a:t>Support the Tega/Escorts receivable cycle at the ₹25-30 Cr revenue range Datre has now demonstrated it can reach.</a:t>
+            </a:r>
+            <a:endParaRPr lang="en-US" sz="1030" dirty="0"/>
+          </a:p>
+        </p:txBody>
+      </p:sp>
+      <p:sp>
+        <p:nvSpPr>
+          <p:cNvPr id="14" name="Shape 12"/>
+          <p:cNvSpPr/>
+          <p:nvPr/>
+        </p:nvSpPr>
+        <p:spPr>
+          <a:xfrm>
+            <a:off x="548640" y="4892040"/>
+            <a:ext cx="457200" cy="457200"/>
+          </a:xfrm>
+          <a:prstGeom prst="ellipse">
+            <a:avLst/>
+          </a:prstGeom>
+          <a:solidFill>
+            <a:srgbClr val="D9622B"/>
+          </a:solidFill>
+          <a:ln/>
+        </p:spPr>
+      </p:sp>
+      <p:sp>
+        <p:nvSpPr>
+          <p:cNvPr id="15" name="Text 13"/>
+          <p:cNvSpPr/>
+          <p:nvPr/>
+        </p:nvSpPr>
+        <p:spPr>
+          <a:xfrm>
+            <a:off x="548640" y="4892040"/>
+            <a:ext cx="457200" cy="457200"/>
+          </a:xfrm>
+          <a:prstGeom prst="rect">
+            <a:avLst/>
+          </a:prstGeom>
+          <a:noFill/>
+          <a:ln/>
+        </p:spPr>
+        <p:txBody>
+          <a:bodyPr wrap="square" lIns="0" tIns="0" rIns="0" bIns="0" rtlCol="0" anchor="ctr"/>
+          <a:lstStyle/>
+          <a:p>
+            <a:pPr algn="ctr" indent="0" marL="0">
+              <a:buNone/>
+            </a:pPr>
+            <a:r>
+              <a:rPr lang="en-US" sz="1300" b="1" dirty="0">
+                <a:solidFill>
+                  <a:srgbClr val="FFFFFF"/>
+                </a:solidFill>
+                <a:latin typeface="Calibri" pitchFamily="34" charset="0"/>
+                <a:ea typeface="Calibri" pitchFamily="34" charset="-122"/>
+                <a:cs typeface="Calibri" pitchFamily="34" charset="-120"/>
+              </a:rPr>
+              <a:t>3</a:t>
+            </a:r>
+            <a:endParaRPr lang="en-US" sz="1300" dirty="0"/>
+          </a:p>
+        </p:txBody>
+      </p:sp>
+      <p:sp>
+        <p:nvSpPr>
+          <p:cNvPr id="16" name="Text 14"/>
+          <p:cNvSpPr/>
+          <p:nvPr/>
+        </p:nvSpPr>
+        <p:spPr>
+          <a:xfrm>
+            <a:off x="1234440" y="4873752"/>
+            <a:ext cx="2926080" cy="502920"/>
+          </a:xfrm>
+          <a:prstGeom prst="rect">
+            <a:avLst/>
+          </a:prstGeom>
+          <a:noFill/>
+          <a:ln/>
+        </p:spPr>
+        <p:txBody>
+          <a:bodyPr wrap="square" lIns="0" tIns="0" rIns="0" bIns="0" rtlCol="0" anchor="ctr"/>
+          <a:lstStyle/>
+          <a:p>
+            <a:pPr indent="0" marL="0">
+              <a:lnSpc>
+                <a:spcPct val="100000"/>
+              </a:lnSpc>
+              <a:buNone/>
+            </a:pPr>
+            <a:r>
+              <a:rPr lang="en-US" sz="1300" b="1" dirty="0">
+                <a:solidFill>
+                  <a:srgbClr val="FFFFFF"/>
+                </a:solidFill>
+                <a:latin typeface="Calibri" pitchFamily="34" charset="0"/>
+                <a:ea typeface="Calibri" pitchFamily="34" charset="-122"/>
+                <a:cs typeface="Calibri" pitchFamily="34" charset="-120"/>
+              </a:rPr>
+              <a:t>Quality-systems investment</a:t>
+            </a:r>
+            <a:endParaRPr lang="en-US" sz="1300" dirty="0"/>
+          </a:p>
+        </p:txBody>
+      </p:sp>
+      <p:sp>
+        <p:nvSpPr>
+          <p:cNvPr id="17" name="Text 15"/>
+          <p:cNvSpPr/>
+          <p:nvPr/>
+        </p:nvSpPr>
+        <p:spPr>
+          <a:xfrm>
+            <a:off x="4297680" y="4846320"/>
+            <a:ext cx="7345375" cy="731520"/>
+          </a:xfrm>
+          <a:prstGeom prst="rect">
+            <a:avLst/>
+          </a:prstGeom>
+          <a:noFill/>
+          <a:ln/>
+        </p:spPr>
+        <p:txBody>
+          <a:bodyPr wrap="square" lIns="0" tIns="0" rIns="0" bIns="0" rtlCol="0" anchor="t"/>
+          <a:lstStyle/>
+          <a:p>
+            <a:pPr indent="0" marL="0">
+              <a:lnSpc>
+                <a:spcPct val="115000"/>
+              </a:lnSpc>
+              <a:buNone/>
+            </a:pPr>
+            <a:r>
+              <a:rPr lang="en-US" sz="1030" dirty="0">
+                <a:solidFill>
+                  <a:srgbClr val="CBD3DC"/>
+                </a:solidFill>
+                <a:latin typeface="Calibri" pitchFamily="34" charset="0"/>
+                <a:ea typeface="Calibri" pitchFamily="34" charset="-122"/>
+                <a:cs typeface="Calibri" pitchFamily="34" charset="-120"/>
+              </a:rPr>
+              <a:t>Targeted spend to bring the rejection rate back toward its FY22-23 low (~2.6%) — scrap-cost savings alone should fund a meaningful share of this.</a:t>
+            </a:r>
+            <a:endParaRPr lang="en-US" sz="1030" dirty="0"/>
+          </a:p>
+        </p:txBody>
+      </p:sp>
+      <p:sp>
+        <p:nvSpPr>
+          <p:cNvPr id="18" name="Text 16"/>
+          <p:cNvSpPr/>
+          <p:nvPr/>
+        </p:nvSpPr>
+        <p:spPr>
+          <a:xfrm>
+            <a:off x="548640" y="5989320"/>
+            <a:ext cx="11094415" cy="457200"/>
+          </a:xfrm>
+          <a:prstGeom prst="rect">
+            <a:avLst/>
+          </a:prstGeom>
+          <a:noFill/>
+          <a:ln/>
+        </p:spPr>
+        <p:txBody>
+          <a:bodyPr wrap="square" lIns="0" tIns="0" rIns="0" bIns="0" rtlCol="0" anchor="ctr"/>
+          <a:lstStyle/>
+          <a:p>
+            <a:pPr indent="0" marL="0">
+              <a:lnSpc>
+                <a:spcPct val="110000"/>
+              </a:lnSpc>
+              <a:buNone/>
+            </a:pPr>
+            <a:r>
+              <a:rPr lang="en-US" sz="950" i="1" dirty="0">
+                <a:solidFill>
+                  <a:srgbClr val="9AA2AD"/>
+                </a:solidFill>
+                <a:latin typeface="Calibri" pitchFamily="34" charset="0"/>
+                <a:ea typeface="Calibri" pitchFamily="34" charset="-122"/>
+                <a:cs typeface="Calibri" pitchFamily="34" charset="-120"/>
+              </a:rPr>
+              <a:t>Any of the three should be sized against audited FY25 and FY25-26 management accounts, not the figures in this deck alone — and against resolution of the governance flags on slide 14.</a:t>
+            </a:r>
+            <a:endParaRPr lang="en-US" sz="950" dirty="0"/>
+          </a:p>
+        </p:txBody>
+      </p:sp>
+      <p:sp>
+        <p:nvSpPr>
+          <p:cNvPr id="19" name="Text 17"/>
+          <p:cNvSpPr/>
+          <p:nvPr/>
+        </p:nvSpPr>
+        <p:spPr>
+          <a:xfrm>
+            <a:off x="548640" y="6473952"/>
+            <a:ext cx="11094415" cy="274320"/>
+          </a:xfrm>
+          <a:prstGeom prst="rect">
+            <a:avLst/>
+          </a:prstGeom>
+          <a:noFill/>
+          <a:ln/>
+        </p:spPr>
+        <p:txBody>
+          <a:bodyPr wrap="square" lIns="0" tIns="0" rIns="0" bIns="0" rtlCol="0" anchor="ctr"/>
+          <a:lstStyle/>
+          <a:p>
+            <a:pPr algn="l" indent="0" marL="0">
+              <a:buNone/>
+            </a:pPr>
+            <a:r>
+              <a:rPr lang="en-US" sz="800" dirty="0">
+                <a:solidFill>
+                  <a:srgbClr val="8B93A0"/>
+                </a:solidFill>
+                <a:latin typeface="Calibri" pitchFamily="34" charset="0"/>
+                <a:ea typeface="Calibri" pitchFamily="34" charset="-122"/>
+                <a:cs typeface="Calibri" pitchFamily="34" charset="-120"/>
+              </a:rPr>
+              <a:t>DATRE CORPORATION LIMITED  |  CONFIDENTIAL — PREPARED FOR INVESTOR DISCUSSION</a:t>
+            </a:r>
+            <a:endParaRPr lang="en-US" sz="800" dirty="0"/>
+          </a:p>
+        </p:txBody>
+      </p:sp>
+      <p:sp>
+        <p:nvSpPr>
+          <p:cNvPr id="20" name="Text 18"/>
+          <p:cNvSpPr/>
+          <p:nvPr/>
+        </p:nvSpPr>
+        <p:spPr>
+          <a:xfrm>
+            <a:off x="11277295" y="6473952"/>
+            <a:ext cx="457200" cy="274320"/>
+          </a:xfrm>
+          <a:prstGeom prst="rect">
+            <a:avLst/>
+          </a:prstGeom>
+          <a:noFill/>
+          <a:ln/>
+        </p:spPr>
+        <p:txBody>
+          <a:bodyPr wrap="square" lIns="0" tIns="0" rIns="0" bIns="0" rtlCol="0" anchor="ctr"/>
+          <a:lstStyle/>
+          <a:p>
+            <a:pPr algn="r" indent="0" marL="0">
+              <a:buNone/>
+            </a:pPr>
+            <a:r>
+              <a:rPr lang="en-US" sz="800" dirty="0">
+                <a:solidFill>
+                  <a:srgbClr val="8B93A0"/>
+                </a:solidFill>
+                <a:latin typeface="Calibri" pitchFamily="34" charset="0"/>
+                <a:ea typeface="Calibri" pitchFamily="34" charset="-122"/>
+                <a:cs typeface="Calibri" pitchFamily="34" charset="-120"/>
+              </a:rPr>
+              <a:t>27</a:t>
+            </a:r>
+            <a:endParaRPr lang="en-US" sz="800" dirty="0"/>
+          </a:p>
+        </p:txBody>
+      </p:sp>
+    </p:spTree>
+  </p:cSld>
+  <p:clrMapOvr>
+    <a:masterClrMapping/>
+  </p:clrMapOvr>
+</p:sld>
+</file>
+
+<file path=ppt/slides/slide28.xml><?xml version="1.0" encoding="utf-8"?>
+<p:sld xmlns:a="http://schemas.openxmlformats.org/drawingml/2006/main" xmlns:r="http://schemas.openxmlformats.org/officeDocument/2006/relationships" xmlns:p="http://schemas.openxmlformats.org/presentationml/2006/main">
+  <p:cSld name="Slide 28">
+    <p:bg>
+      <p:bgPr>
+        <a:solidFill>
+          <a:srgbClr val="1C1F26"/>
+        </a:solidFill>
+      </p:bgPr>
+    </p:bg>
+    <p:spTree>
+      <p:nvGrpSpPr>
+        <p:cNvPr id="1" name=""/>
+        <p:cNvGrpSpPr/>
+        <p:nvPr/>
+      </p:nvGrpSpPr>
+      <p:grpSpPr>
+        <a:xfrm>
+          <a:off x="0" y="0"/>
+          <a:ext cx="0" cy="0"/>
+          <a:chOff x="0" y="0"/>
+          <a:chExt cx="0" cy="0"/>
+        </a:xfrm>
+      </p:grpSpPr>
+      <p:sp>
+        <p:nvSpPr>
+          <p:cNvPr id="2" name="Shape 0"/>
+          <p:cNvSpPr/>
+          <p:nvPr/>
+        </p:nvSpPr>
+        <p:spPr>
+          <a:xfrm>
+            <a:off x="9692640" y="-1280160"/>
+            <a:ext cx="4754880" cy="4754880"/>
+          </a:xfrm>
+          <a:prstGeom prst="ellipse">
+            <a:avLst/>
+          </a:prstGeom>
+          <a:solidFill>
+            <a:srgbClr val="262B34"/>
+          </a:solidFill>
+          <a:ln/>
+        </p:spPr>
+      </p:sp>
+      <p:sp>
+        <p:nvSpPr>
+          <p:cNvPr id="3" name="Shape 1"/>
+          <p:cNvSpPr/>
+          <p:nvPr/>
+        </p:nvSpPr>
+        <p:spPr>
+          <a:xfrm>
+            <a:off x="-1463040" y="4572000"/>
+            <a:ext cx="3657600" cy="3657600"/>
+          </a:xfrm>
+          <a:prstGeom prst="ellipse">
+            <a:avLst/>
+          </a:prstGeom>
+          <a:solidFill>
+            <a:srgbClr val="262B34"/>
+          </a:solidFill>
+          <a:ln/>
+        </p:spPr>
+      </p:sp>
+      <p:sp>
+        <p:nvSpPr>
+          <p:cNvPr id="4" name="Text 2"/>
+          <p:cNvSpPr/>
+          <p:nvPr/>
+        </p:nvSpPr>
+        <p:spPr>
+          <a:xfrm>
+            <a:off x="548640" y="2286000"/>
+            <a:ext cx="9144000" cy="731520"/>
+          </a:xfrm>
+          <a:prstGeom prst="rect">
+            <a:avLst/>
+          </a:prstGeom>
+          <a:noFill/>
+          <a:ln/>
+        </p:spPr>
+        <p:txBody>
+          <a:bodyPr wrap="square" lIns="0" tIns="0" rIns="0" bIns="0" rtlCol="0" anchor="ctr"/>
+          <a:lstStyle/>
+          <a:p>
+            <a:pPr indent="0" marL="0">
+              <a:buNone/>
+            </a:pPr>
+            <a:r>
+              <a:rPr lang="en-US" sz="3400" b="1" dirty="0">
+                <a:solidFill>
+                  <a:srgbClr val="FFFFFF"/>
+                </a:solidFill>
+                <a:latin typeface="Cambria" pitchFamily="34" charset="0"/>
+                <a:ea typeface="Cambria" pitchFamily="34" charset="-122"/>
+                <a:cs typeface="Cambria" pitchFamily="34" charset="-120"/>
+              </a:rPr>
+              <a:t>Datre Corporation Limited</a:t>
+            </a:r>
+            <a:endParaRPr lang="en-US" sz="3400" dirty="0"/>
+          </a:p>
+        </p:txBody>
+      </p:sp>
+      <p:sp>
+        <p:nvSpPr>
+          <p:cNvPr id="5" name="Text 3"/>
+          <p:cNvSpPr/>
+          <p:nvPr/>
+        </p:nvSpPr>
+        <p:spPr>
+          <a:xfrm>
+            <a:off x="548640" y="2971800"/>
+            <a:ext cx="9144000" cy="457200"/>
+          </a:xfrm>
+          <a:prstGeom prst="rect">
+            <a:avLst/>
+          </a:prstGeom>
+          <a:noFill/>
+          <a:ln/>
+        </p:spPr>
+        <p:txBody>
+          <a:bodyPr wrap="square" lIns="0" tIns="0" rIns="0" bIns="0" rtlCol="0" anchor="ctr"/>
+          <a:lstStyle/>
+          <a:p>
+            <a:pPr indent="0" marL="0">
+              <a:buNone/>
+            </a:pPr>
+            <a:r>
+              <a:rPr lang="en-US" sz="1500" i="1" dirty="0">
+                <a:solidFill>
+                  <a:srgbClr val="CBD3DC"/>
+                </a:solidFill>
+                <a:latin typeface="Calibri" pitchFamily="34" charset="0"/>
+                <a:ea typeface="Calibri" pitchFamily="34" charset="-122"/>
+                <a:cs typeface="Calibri" pitchFamily="34" charset="-120"/>
+              </a:rPr>
+              <a:t>Engineering Essence, Manufacturing Personified</a:t>
+            </a:r>
+            <a:endParaRPr lang="en-US" sz="1500" dirty="0"/>
+          </a:p>
+        </p:txBody>
+      </p:sp>
+      <p:sp>
+        <p:nvSpPr>
+          <p:cNvPr id="6" name="Text 4"/>
+          <p:cNvSpPr/>
+          <p:nvPr/>
+        </p:nvSpPr>
+        <p:spPr>
+          <a:xfrm>
+            <a:off x="548640" y="4023360"/>
+            <a:ext cx="2743200" cy="274320"/>
+          </a:xfrm>
+          <a:prstGeom prst="rect">
+            <a:avLst/>
+          </a:prstGeom>
+          <a:noFill/>
+          <a:ln/>
+        </p:spPr>
+        <p:txBody>
+          <a:bodyPr wrap="square" lIns="0" tIns="0" rIns="0" bIns="0" rtlCol="0" anchor="ctr"/>
+          <a:lstStyle/>
+          <a:p>
+            <a:pPr indent="0" marL="0">
+              <a:buNone/>
+            </a:pPr>
+            <a:r>
+              <a:rPr lang="en-US" sz="950" b="1" spc="100" kern="0" dirty="0">
+                <a:solidFill>
+                  <a:srgbClr val="D9622B"/>
+                </a:solidFill>
+                <a:latin typeface="Calibri" pitchFamily="34" charset="0"/>
+                <a:ea typeface="Calibri" pitchFamily="34" charset="-122"/>
+                <a:cs typeface="Calibri" pitchFamily="34" charset="-120"/>
+              </a:rPr>
+              <a:t>REGISTERED OFFICE</a:t>
+            </a:r>
+            <a:endParaRPr lang="en-US" sz="950" dirty="0"/>
+          </a:p>
+        </p:txBody>
+      </p:sp>
+      <p:sp>
+        <p:nvSpPr>
+          <p:cNvPr id="7" name="Text 5"/>
+          <p:cNvSpPr/>
+          <p:nvPr/>
+        </p:nvSpPr>
+        <p:spPr>
+          <a:xfrm>
+            <a:off x="548640" y="4279392"/>
+            <a:ext cx="9144000" cy="365760"/>
+          </a:xfrm>
+          <a:prstGeom prst="rect">
+            <a:avLst/>
+          </a:prstGeom>
+          <a:noFill/>
+          <a:ln/>
+        </p:spPr>
+        <p:txBody>
+          <a:bodyPr wrap="square" lIns="0" tIns="0" rIns="0" bIns="0" rtlCol="0" anchor="ctr"/>
+          <a:lstStyle/>
+          <a:p>
+            <a:pPr indent="0" marL="0">
+              <a:buNone/>
+            </a:pPr>
+            <a:r>
+              <a:rPr lang="en-US" sz="1200" dirty="0">
+                <a:solidFill>
+                  <a:srgbClr val="FFFFFF"/>
+                </a:solidFill>
+                <a:latin typeface="Calibri" pitchFamily="34" charset="0"/>
+                <a:ea typeface="Calibri" pitchFamily="34" charset="-122"/>
+                <a:cs typeface="Calibri" pitchFamily="34" charset="-120"/>
+              </a:rPr>
+              <a:t>Sector-III, Falta Industrial Growth Centre, South 24 Parganas, West Bengal 743504, India</a:t>
+            </a:r>
+            <a:endParaRPr lang="en-US" sz="1200" dirty="0"/>
+          </a:p>
+        </p:txBody>
+      </p:sp>
+      <p:sp>
+        <p:nvSpPr>
+          <p:cNvPr id="8" name="Text 6"/>
+          <p:cNvSpPr/>
+          <p:nvPr/>
+        </p:nvSpPr>
+        <p:spPr>
+          <a:xfrm>
+            <a:off x="548640" y="4681728"/>
+            <a:ext cx="2743200" cy="274320"/>
+          </a:xfrm>
+          <a:prstGeom prst="rect">
+            <a:avLst/>
+          </a:prstGeom>
+          <a:noFill/>
+          <a:ln/>
+        </p:spPr>
+        <p:txBody>
+          <a:bodyPr wrap="square" lIns="0" tIns="0" rIns="0" bIns="0" rtlCol="0" anchor="ctr"/>
+          <a:lstStyle/>
+          <a:p>
+            <a:pPr indent="0" marL="0">
+              <a:buNone/>
+            </a:pPr>
+            <a:r>
+              <a:rPr lang="en-US" sz="950" b="1" spc="100" kern="0" dirty="0">
+                <a:solidFill>
+                  <a:srgbClr val="D9622B"/>
+                </a:solidFill>
+                <a:latin typeface="Calibri" pitchFamily="34" charset="0"/>
+                <a:ea typeface="Calibri" pitchFamily="34" charset="-122"/>
+                <a:cs typeface="Calibri" pitchFamily="34" charset="-120"/>
+              </a:rPr>
+              <a:t>CONTACT</a:t>
+            </a:r>
+            <a:endParaRPr lang="en-US" sz="950" dirty="0"/>
+          </a:p>
+        </p:txBody>
+      </p:sp>
+      <p:sp>
+        <p:nvSpPr>
+          <p:cNvPr id="9" name="Text 7"/>
+          <p:cNvSpPr/>
+          <p:nvPr/>
+        </p:nvSpPr>
+        <p:spPr>
+          <a:xfrm>
+            <a:off x="548640" y="4937760"/>
+            <a:ext cx="9144000" cy="365760"/>
+          </a:xfrm>
+          <a:prstGeom prst="rect">
+            <a:avLst/>
+          </a:prstGeom>
+          <a:noFill/>
+          <a:ln/>
+        </p:spPr>
+        <p:txBody>
+          <a:bodyPr wrap="square" lIns="0" tIns="0" rIns="0" bIns="0" rtlCol="0" anchor="ctr"/>
+          <a:lstStyle/>
+          <a:p>
+            <a:pPr indent="0" marL="0">
+              <a:buNone/>
+            </a:pPr>
+            <a:r>
+              <a:rPr lang="en-US" sz="1200" dirty="0">
+                <a:solidFill>
+                  <a:srgbClr val="FFFFFF"/>
+                </a:solidFill>
+                <a:latin typeface="Calibri" pitchFamily="34" charset="0"/>
+                <a:ea typeface="Calibri" pitchFamily="34" charset="-122"/>
+                <a:cs typeface="Calibri" pitchFamily="34" charset="-120"/>
+              </a:rPr>
+              <a:t>sales@datre.com  ·  hr@datre.com  ·  www.datre.in</a:t>
+            </a:r>
+            <a:endParaRPr lang="en-US" sz="1200" dirty="0"/>
+          </a:p>
+        </p:txBody>
+      </p:sp>
+      <p:sp>
+        <p:nvSpPr>
+          <p:cNvPr id="10" name="Text 8"/>
+          <p:cNvSpPr/>
+          <p:nvPr/>
+        </p:nvSpPr>
+        <p:spPr>
+          <a:xfrm>
+            <a:off x="548640" y="5340096"/>
+            <a:ext cx="2743200" cy="274320"/>
+          </a:xfrm>
+          <a:prstGeom prst="rect">
+            <a:avLst/>
+          </a:prstGeom>
+          <a:noFill/>
+          <a:ln/>
+        </p:spPr>
+        <p:txBody>
+          <a:bodyPr wrap="square" lIns="0" tIns="0" rIns="0" bIns="0" rtlCol="0" anchor="ctr"/>
+          <a:lstStyle/>
+          <a:p>
+            <a:pPr indent="0" marL="0">
+              <a:buNone/>
+            </a:pPr>
+            <a:r>
+              <a:rPr lang="en-US" sz="950" b="1" spc="100" kern="0" dirty="0">
+                <a:solidFill>
+                  <a:srgbClr val="D9622B"/>
+                </a:solidFill>
+                <a:latin typeface="Calibri" pitchFamily="34" charset="0"/>
+                <a:ea typeface="Calibri" pitchFamily="34" charset="-122"/>
+                <a:cs typeface="Calibri" pitchFamily="34" charset="-120"/>
+              </a:rPr>
+              <a:t>PREPARED FOR</a:t>
+            </a:r>
+            <a:endParaRPr lang="en-US" sz="950" dirty="0"/>
+          </a:p>
+        </p:txBody>
+      </p:sp>
+      <p:sp>
+        <p:nvSpPr>
+          <p:cNvPr id="11" name="Text 9"/>
+          <p:cNvSpPr/>
+          <p:nvPr/>
+        </p:nvSpPr>
+        <p:spPr>
+          <a:xfrm>
+            <a:off x="548640" y="5596128"/>
+            <a:ext cx="9144000" cy="365760"/>
+          </a:xfrm>
+          <a:prstGeom prst="rect">
+            <a:avLst/>
+          </a:prstGeom>
+          <a:noFill/>
+          <a:ln/>
+        </p:spPr>
+        <p:txBody>
+          <a:bodyPr wrap="square" lIns="0" tIns="0" rIns="0" bIns="0" rtlCol="0" anchor="ctr"/>
+          <a:lstStyle/>
+          <a:p>
+            <a:pPr indent="0" marL="0">
+              <a:buNone/>
+            </a:pPr>
+            <a:r>
+              <a:rPr lang="en-US" sz="1200" dirty="0">
+                <a:solidFill>
+                  <a:srgbClr val="FFFFFF"/>
+                </a:solidFill>
+                <a:latin typeface="Calibri" pitchFamily="34" charset="0"/>
+                <a:ea typeface="Calibri" pitchFamily="34" charset="-122"/>
+                <a:cs typeface="Calibri" pitchFamily="34" charset="-120"/>
+              </a:rPr>
+              <a:t>Investor discussion — Indranil Dutta, Chief Executive Officer</a:t>
+            </a:r>
+            <a:endParaRPr lang="en-US" sz="1200" dirty="0"/>
+          </a:p>
+        </p:txBody>
+      </p:sp>
+      <p:sp>
+        <p:nvSpPr>
+          <p:cNvPr id="12" name="Text 10"/>
+          <p:cNvSpPr/>
+          <p:nvPr/>
+        </p:nvSpPr>
+        <p:spPr>
+          <a:xfrm>
+            <a:off x="548640" y="5943600"/>
+            <a:ext cx="11094415" cy="640080"/>
+          </a:xfrm>
+          <a:prstGeom prst="rect">
+            <a:avLst/>
+          </a:prstGeom>
+          <a:noFill/>
+          <a:ln/>
+        </p:spPr>
+        <p:txBody>
+          <a:bodyPr wrap="square" lIns="0" tIns="0" rIns="0" bIns="0" rtlCol="0" anchor="ctr"/>
+          <a:lstStyle/>
+          <a:p>
+            <a:pPr indent="0" marL="0">
+              <a:lnSpc>
+                <a:spcPct val="115000"/>
+              </a:lnSpc>
+              <a:buNone/>
+            </a:pPr>
+            <a:r>
+              <a:rPr lang="en-US" sz="850" i="1" dirty="0">
+                <a:solidFill>
+                  <a:srgbClr val="7A828E"/>
+                </a:solidFill>
+                <a:latin typeface="Calibri" pitchFamily="34" charset="0"/>
+                <a:ea typeface="Calibri" pitchFamily="34" charset="-122"/>
+                <a:cs typeface="Calibri" pitchFamily="34" charset="-120"/>
+              </a:rPr>
+              <a:t>This document consolidates the company's own financial statements, management information system reports and internal analyses. Figures are sourced and dated throughout; where audited and unaudited data diverge, both are shown. Confidential — prepared for internal investor discussion only.</a:t>
+            </a:r>
+            <a:endParaRPr lang="en-US" sz="850" dirty="0"/>
+          </a:p>
+        </p:txBody>
+      </p:sp>
+      <p:sp>
+        <p:nvSpPr>
+          <p:cNvPr id="13" name="Text 11"/>
+          <p:cNvSpPr/>
+          <p:nvPr/>
+        </p:nvSpPr>
+        <p:spPr>
+          <a:xfrm>
+            <a:off x="11277295" y="6473952"/>
+            <a:ext cx="457200" cy="274320"/>
+          </a:xfrm>
+          <a:prstGeom prst="rect">
+            <a:avLst/>
+          </a:prstGeom>
+          <a:noFill/>
+          <a:ln/>
+        </p:spPr>
+        <p:txBody>
+          <a:bodyPr wrap="square" lIns="0" tIns="0" rIns="0" bIns="0" rtlCol="0" anchor="ctr"/>
+          <a:lstStyle/>
+          <a:p>
+            <a:pPr algn="r" indent="0" marL="0">
+              <a:buNone/>
+            </a:pPr>
+            <a:r>
+              <a:rPr lang="en-US" sz="800" dirty="0">
+                <a:solidFill>
+                  <a:srgbClr val="8B93A0"/>
+                </a:solidFill>
+                <a:latin typeface="Calibri" pitchFamily="34" charset="0"/>
+                <a:ea typeface="Calibri" pitchFamily="34" charset="-122"/>
+                <a:cs typeface="Calibri" pitchFamily="34" charset="-120"/>
+              </a:rPr>
+              <a:t>28</a:t>
             </a:r>
             <a:endParaRPr lang="en-US" sz="800" dirty="0"/>
           </a:p>

--- a/investor-pitch/Datre_Corporation_Investor_Pitch.pptx
+++ b/investor-pitch/Datre_Corporation_Investor_Pitch.pptx
@@ -33,9 +33,11 @@
     <p:sldId id="281" r:id="rId27"/>
     <p:sldId id="282" r:id="rId28"/>
     <p:sldId id="283" r:id="rId29"/>
+    <p:sldId id="284" r:id="rId30"/>
+    <p:sldId id="285" r:id="rId31"/>
   </p:sldIdLst>
   <p:notesMasterIdLst>
-    <p:notesMasterId r:id="rId30"/>
+    <p:notesMasterId r:id="rId32"/>
   </p:notesMasterIdLst>
   <p:sldSz cx="12191695" cy="6858000"/>
   <p:notesSz cx="6858000" cy="12191695"/>
@@ -5332,6 +5334,94 @@
 </p:notes>
 </file>
 
+<file path=ppt/notesSlides/notesSlide29.xml><?xml version="1.0" encoding="utf-8"?>
+<p:notes xmlns:a="http://schemas.openxmlformats.org/drawingml/2006/main" xmlns:r="http://schemas.openxmlformats.org/officeDocument/2006/relationships" xmlns:p="http://schemas.openxmlformats.org/presentationml/2006/main">
+  <p:cSld>
+    <p:spTree>
+      <p:nvGrpSpPr>
+        <p:cNvPr id="1" name=""/>
+        <p:cNvGrpSpPr/>
+        <p:nvPr/>
+      </p:nvGrpSpPr>
+      <p:grpSpPr>
+        <a:xfrm>
+          <a:off x="0" y="0"/>
+          <a:ext cx="0" cy="0"/>
+          <a:chOff x="0" y="0"/>
+          <a:chExt cx="0" cy="0"/>
+        </a:xfrm>
+      </p:grpSpPr>
+      <p:sp>
+        <p:nvSpPr>
+          <p:cNvPr id="2" name="Slide Image Placeholder 1"/>
+          <p:cNvSpPr>
+            <a:spLocks noGrp="1" noRot="1" noChangeAspect="1"/>
+          </p:cNvSpPr>
+          <p:nvPr>
+            <p:ph type="sldImg"/>
+          </p:nvPr>
+        </p:nvSpPr>
+        <p:spPr/>
+      </p:sp>
+      <p:sp>
+        <p:nvSpPr>
+          <p:cNvPr id="3" name="Notes Placeholder 2"/>
+          <p:cNvSpPr>
+            <a:spLocks noGrp="1"/>
+          </p:cNvSpPr>
+          <p:nvPr>
+            <p:ph type="body" idx="1"/>
+          </p:nvPr>
+        </p:nvSpPr>
+        <p:spPr/>
+        <p:txBody>
+          <a:bodyPr/>
+          <a:lstStyle/>
+          <a:p>
+            <a:r>
+              <a:rPr lang="en-US" dirty="0"/>
+              <a:t/>
+            </a:r>
+            <a:endParaRPr lang="en-US" dirty="0"/>
+          </a:p>
+        </p:txBody>
+      </p:sp>
+      <p:sp>
+        <p:nvSpPr>
+          <p:cNvPr id="4" name="Slide Number Placeholder 3"/>
+          <p:cNvSpPr>
+            <a:spLocks noGrp="1"/>
+          </p:cNvSpPr>
+          <p:nvPr>
+            <p:ph type="sldNum" sz="quarter" idx="10"/>
+          </p:nvPr>
+        </p:nvSpPr>
+        <p:spPr/>
+        <p:txBody>
+          <a:bodyPr/>
+          <a:lstStyle/>
+          <a:p>
+            <a:fld id="{F7021451-1387-4CA6-816F-3879F97B5CBC}" type="slidenum">
+              <a:rPr lang="en-US"/>
+              <a:t>29</a:t>
+            </a:fld>
+            <a:endParaRPr lang="en-US"/>
+          </a:p>
+        </p:txBody>
+      </p:sp>
+    </p:spTree>
+    <p:extLst>
+      <p:ext uri="{BB962C8B-B14F-4D97-AF65-F5344CB8AC3E}">
+        <p14:creationId xmlns:p14="http://schemas.microsoft.com/office/powerpoint/2010/main" val="1024086991"/>
+      </p:ext>
+    </p:extLst>
+  </p:cSld>
+  <p:clrMapOvr>
+    <a:masterClrMapping/>
+  </p:clrMapOvr>
+</p:notes>
+</file>
+
 <file path=ppt/notesSlides/notesSlide3.xml><?xml version="1.0" encoding="utf-8"?>
 <p:notes xmlns:a="http://schemas.openxmlformats.org/drawingml/2006/main" xmlns:r="http://schemas.openxmlformats.org/officeDocument/2006/relationships" xmlns:p="http://schemas.openxmlformats.org/presentationml/2006/main">
   <p:cSld>
@@ -5402,6 +5492,94 @@
             <a:fld id="{F7021451-1387-4CA6-816F-3879F97B5CBC}" type="slidenum">
               <a:rPr lang="en-US"/>
               <a:t>3</a:t>
+            </a:fld>
+            <a:endParaRPr lang="en-US"/>
+          </a:p>
+        </p:txBody>
+      </p:sp>
+    </p:spTree>
+    <p:extLst>
+      <p:ext uri="{BB962C8B-B14F-4D97-AF65-F5344CB8AC3E}">
+        <p14:creationId xmlns:p14="http://schemas.microsoft.com/office/powerpoint/2010/main" val="1024086991"/>
+      </p:ext>
+    </p:extLst>
+  </p:cSld>
+  <p:clrMapOvr>
+    <a:masterClrMapping/>
+  </p:clrMapOvr>
+</p:notes>
+</file>
+
+<file path=ppt/notesSlides/notesSlide30.xml><?xml version="1.0" encoding="utf-8"?>
+<p:notes xmlns:a="http://schemas.openxmlformats.org/drawingml/2006/main" xmlns:r="http://schemas.openxmlformats.org/officeDocument/2006/relationships" xmlns:p="http://schemas.openxmlformats.org/presentationml/2006/main">
+  <p:cSld>
+    <p:spTree>
+      <p:nvGrpSpPr>
+        <p:cNvPr id="1" name=""/>
+        <p:cNvGrpSpPr/>
+        <p:nvPr/>
+      </p:nvGrpSpPr>
+      <p:grpSpPr>
+        <a:xfrm>
+          <a:off x="0" y="0"/>
+          <a:ext cx="0" cy="0"/>
+          <a:chOff x="0" y="0"/>
+          <a:chExt cx="0" cy="0"/>
+        </a:xfrm>
+      </p:grpSpPr>
+      <p:sp>
+        <p:nvSpPr>
+          <p:cNvPr id="2" name="Slide Image Placeholder 1"/>
+          <p:cNvSpPr>
+            <a:spLocks noGrp="1" noRot="1" noChangeAspect="1"/>
+          </p:cNvSpPr>
+          <p:nvPr>
+            <p:ph type="sldImg"/>
+          </p:nvPr>
+        </p:nvSpPr>
+        <p:spPr/>
+      </p:sp>
+      <p:sp>
+        <p:nvSpPr>
+          <p:cNvPr id="3" name="Notes Placeholder 2"/>
+          <p:cNvSpPr>
+            <a:spLocks noGrp="1"/>
+          </p:cNvSpPr>
+          <p:nvPr>
+            <p:ph type="body" idx="1"/>
+          </p:nvPr>
+        </p:nvSpPr>
+        <p:spPr/>
+        <p:txBody>
+          <a:bodyPr/>
+          <a:lstStyle/>
+          <a:p>
+            <a:r>
+              <a:rPr lang="en-US" dirty="0"/>
+              <a:t/>
+            </a:r>
+            <a:endParaRPr lang="en-US" dirty="0"/>
+          </a:p>
+        </p:txBody>
+      </p:sp>
+      <p:sp>
+        <p:nvSpPr>
+          <p:cNvPr id="4" name="Slide Number Placeholder 3"/>
+          <p:cNvSpPr>
+            <a:spLocks noGrp="1"/>
+          </p:cNvSpPr>
+          <p:nvPr>
+            <p:ph type="sldNum" sz="quarter" idx="10"/>
+          </p:nvPr>
+        </p:nvSpPr>
+        <p:spPr/>
+        <p:txBody>
+          <a:bodyPr/>
+          <a:lstStyle/>
+          <a:p>
+            <a:fld id="{F7021451-1387-4CA6-816F-3879F97B5CBC}" type="slidenum">
+              <a:rPr lang="en-US"/>
+              <a:t>30</a:t>
             </a:fld>
             <a:endParaRPr lang="en-US"/>
           </a:p>
@@ -21409,7 +21587,7 @@
                 <a:ea typeface="Calibri" pitchFamily="34" charset="-122"/>
                 <a:cs typeface="Calibri" pitchFamily="34" charset="-120"/>
               </a:rPr>
-              <a:t>CRITICAL ANALYSIS — SUMMARY</a:t>
+              <a:t>MARKET CONTEXT — INDUSTRY LANDSCAPE</a:t>
             </a:r>
             <a:endParaRPr lang="en-US" sz="1100" dirty="0"/>
           </a:p>
@@ -21448,7 +21626,7 @@
                 <a:ea typeface="Cambria" pitchFamily="34" charset="-122"/>
                 <a:cs typeface="Cambria" pitchFamily="34" charset="-120"/>
               </a:rPr>
-              <a:t>SWOT: the honest scorecard</a:t>
+              <a:t>The Indian foundry sector is splitting into two tiers — Datre sits in the smaller one</a:t>
             </a:r>
             <a:endParaRPr lang="en-US" sz="3000" dirty="0"/>
           </a:p>
@@ -21462,16 +21640,16 @@
         </p:nvSpPr>
         <p:spPr>
           <a:xfrm>
-            <a:off x="548640" y="1737360"/>
-            <a:ext cx="5387188" cy="2148840"/>
+            <a:off x="548640" y="1783080"/>
+            <a:ext cx="2567864" cy="1691640"/>
           </a:xfrm>
           <a:prstGeom prst="roundRect">
             <a:avLst>
-              <a:gd name="adj" fmla="val 3404"/>
+              <a:gd name="adj" fmla="val 4324"/>
             </a:avLst>
           </a:prstGeom>
           <a:solidFill>
-            <a:srgbClr val="EDF5EF"/>
+            <a:srgbClr val="F4F5F7"/>
           </a:solidFill>
           <a:ln/>
         </p:spPr>
@@ -21484,8 +21662,8 @@
         </p:nvSpPr>
         <p:spPr>
           <a:xfrm>
-            <a:off x="804672" y="1901952"/>
-            <a:ext cx="4875124" cy="274320"/>
+            <a:off x="713232" y="1938528"/>
+            <a:ext cx="2238680" cy="548640"/>
           </a:xfrm>
           <a:prstGeom prst="rect">
             <a:avLst/>
@@ -21501,17 +21679,17 @@
               <a:buNone/>
             </a:pPr>
             <a:r>
-              <a:rPr lang="en-US" sz="1150" b="1" spc="150" kern="0" dirty="0">
-                <a:solidFill>
-                  <a:srgbClr val="3F8F5F"/>
-                </a:solidFill>
-                <a:latin typeface="Calibri" pitchFamily="34" charset="0"/>
-                <a:ea typeface="Calibri" pitchFamily="34" charset="-122"/>
-                <a:cs typeface="Calibri" pitchFamily="34" charset="-120"/>
-              </a:rPr>
-              <a:t>STRENGTHS</a:t>
-            </a:r>
-            <a:endParaRPr lang="en-US" sz="1150" dirty="0"/>
+              <a:rPr lang="en-US" sz="1700" b="1" dirty="0">
+                <a:solidFill>
+                  <a:srgbClr val="D9622B"/>
+                </a:solidFill>
+                <a:latin typeface="Cambria" pitchFamily="34" charset="0"/>
+                <a:ea typeface="Cambria" pitchFamily="34" charset="-122"/>
+                <a:cs typeface="Cambria" pitchFamily="34" charset="-120"/>
+              </a:rPr>
+              <a:t>~1,700 / 4,500-5,000</a:t>
+            </a:r>
+            <a:endParaRPr lang="en-US" sz="1700" dirty="0"/>
           </a:p>
         </p:txBody>
       </p:sp>
@@ -21523,8 +21701,420 @@
         </p:nvSpPr>
         <p:spPr>
           <a:xfrm>
-            <a:off x="804672" y="2212848"/>
-            <a:ext cx="4875124" cy="1554480"/>
+            <a:off x="713232" y="2514600"/>
+            <a:ext cx="2238680" cy="868680"/>
+          </a:xfrm>
+          <a:prstGeom prst="rect">
+            <a:avLst/>
+          </a:prstGeom>
+          <a:noFill/>
+          <a:ln/>
+        </p:spPr>
+        <p:txBody>
+          <a:bodyPr wrap="square" lIns="0" tIns="0" rIns="0" bIns="0" rtlCol="0" anchor="ctr"/>
+          <a:lstStyle/>
+          <a:p>
+            <a:pPr indent="0" marL="0">
+              <a:lnSpc>
+                <a:spcPct val="112000"/>
+              </a:lnSpc>
+              <a:buNone/>
+            </a:pPr>
+            <a:r>
+              <a:rPr lang="en-US" sz="900" dirty="0">
+                <a:solidFill>
+                  <a:srgbClr val="3A4553"/>
+                </a:solidFill>
+                <a:latin typeface="Calibri" pitchFamily="34" charset="0"/>
+                <a:ea typeface="Calibri" pitchFamily="34" charset="-122"/>
+                <a:cs typeface="Calibri" pitchFamily="34" charset="-120"/>
+              </a:rPr>
+              <a:t>Internationally accredited units, of the industry total — Datre's RDSO 'A' status sits inside this ~35% tier</a:t>
+            </a:r>
+            <a:endParaRPr lang="en-US" sz="900" dirty="0"/>
+          </a:p>
+        </p:txBody>
+      </p:sp>
+      <p:sp>
+        <p:nvSpPr>
+          <p:cNvPr id="7" name="Shape 5"/>
+          <p:cNvSpPr/>
+          <p:nvPr/>
+        </p:nvSpPr>
+        <p:spPr>
+          <a:xfrm>
+            <a:off x="3390824" y="1783080"/>
+            <a:ext cx="2567864" cy="1691640"/>
+          </a:xfrm>
+          <a:prstGeom prst="roundRect">
+            <a:avLst>
+              <a:gd name="adj" fmla="val 4324"/>
+            </a:avLst>
+          </a:prstGeom>
+          <a:solidFill>
+            <a:srgbClr val="F4F5F7"/>
+          </a:solidFill>
+          <a:ln/>
+        </p:spPr>
+      </p:sp>
+      <p:sp>
+        <p:nvSpPr>
+          <p:cNvPr id="8" name="Text 6"/>
+          <p:cNvSpPr/>
+          <p:nvPr/>
+        </p:nvSpPr>
+        <p:spPr>
+          <a:xfrm>
+            <a:off x="3555416" y="1938528"/>
+            <a:ext cx="2238680" cy="548640"/>
+          </a:xfrm>
+          <a:prstGeom prst="rect">
+            <a:avLst/>
+          </a:prstGeom>
+          <a:noFill/>
+          <a:ln/>
+        </p:spPr>
+        <p:txBody>
+          <a:bodyPr wrap="square" lIns="0" tIns="0" rIns="0" bIns="0" rtlCol="0" anchor="ctr"/>
+          <a:lstStyle/>
+          <a:p>
+            <a:pPr indent="0" marL="0">
+              <a:buNone/>
+            </a:pPr>
+            <a:r>
+              <a:rPr lang="en-US" sz="1700" b="1" dirty="0">
+                <a:solidFill>
+                  <a:srgbClr val="D9622B"/>
+                </a:solidFill>
+                <a:latin typeface="Cambria" pitchFamily="34" charset="0"/>
+                <a:ea typeface="Cambria" pitchFamily="34" charset="-122"/>
+                <a:cs typeface="Cambria" pitchFamily="34" charset="-120"/>
+              </a:rPr>
+              <a:t>+7.9%</a:t>
+            </a:r>
+            <a:endParaRPr lang="en-US" sz="1700" dirty="0"/>
+          </a:p>
+        </p:txBody>
+      </p:sp>
+      <p:sp>
+        <p:nvSpPr>
+          <p:cNvPr id="9" name="Text 7"/>
+          <p:cNvSpPr/>
+          <p:nvPr/>
+        </p:nvSpPr>
+        <p:spPr>
+          <a:xfrm>
+            <a:off x="3555416" y="2514600"/>
+            <a:ext cx="2238680" cy="868680"/>
+          </a:xfrm>
+          <a:prstGeom prst="rect">
+            <a:avLst/>
+          </a:prstGeom>
+          <a:noFill/>
+          <a:ln/>
+        </p:spPr>
+        <p:txBody>
+          <a:bodyPr wrap="square" lIns="0" tIns="0" rIns="0" bIns="0" rtlCol="0" anchor="ctr"/>
+          <a:lstStyle/>
+          <a:p>
+            <a:pPr indent="0" marL="0">
+              <a:lnSpc>
+                <a:spcPct val="112000"/>
+              </a:lnSpc>
+              <a:buNone/>
+            </a:pPr>
+            <a:r>
+              <a:rPr lang="en-US" sz="900" dirty="0">
+                <a:solidFill>
+                  <a:srgbClr val="3A4553"/>
+                </a:solidFill>
+                <a:latin typeface="Calibri" pitchFamily="34" charset="0"/>
+                <a:ea typeface="Calibri" pitchFamily="34" charset="-122"/>
+                <a:cs typeface="Calibri" pitchFamily="34" charset="-120"/>
+              </a:rPr>
+              <a:t>Finished steel consumption growth, Apr-Jul FY27 (56 MT) — a genuine demand tailwind</a:t>
+            </a:r>
+            <a:endParaRPr lang="en-US" sz="900" dirty="0"/>
+          </a:p>
+        </p:txBody>
+      </p:sp>
+      <p:sp>
+        <p:nvSpPr>
+          <p:cNvPr id="10" name="Shape 8"/>
+          <p:cNvSpPr/>
+          <p:nvPr/>
+        </p:nvSpPr>
+        <p:spPr>
+          <a:xfrm>
+            <a:off x="6233008" y="1783080"/>
+            <a:ext cx="2567864" cy="1691640"/>
+          </a:xfrm>
+          <a:prstGeom prst="roundRect">
+            <a:avLst>
+              <a:gd name="adj" fmla="val 4324"/>
+            </a:avLst>
+          </a:prstGeom>
+          <a:solidFill>
+            <a:srgbClr val="F4F5F7"/>
+          </a:solidFill>
+          <a:ln/>
+        </p:spPr>
+      </p:sp>
+      <p:sp>
+        <p:nvSpPr>
+          <p:cNvPr id="11" name="Text 9"/>
+          <p:cNvSpPr/>
+          <p:nvPr/>
+        </p:nvSpPr>
+        <p:spPr>
+          <a:xfrm>
+            <a:off x="6397600" y="1938528"/>
+            <a:ext cx="2238680" cy="548640"/>
+          </a:xfrm>
+          <a:prstGeom prst="rect">
+            <a:avLst/>
+          </a:prstGeom>
+          <a:noFill/>
+          <a:ln/>
+        </p:spPr>
+        <p:txBody>
+          <a:bodyPr wrap="square" lIns="0" tIns="0" rIns="0" bIns="0" rtlCol="0" anchor="ctr"/>
+          <a:lstStyle/>
+          <a:p>
+            <a:pPr indent="0" marL="0">
+              <a:buNone/>
+            </a:pPr>
+            <a:r>
+              <a:rPr lang="en-US" sz="1700" b="1" dirty="0">
+                <a:solidFill>
+                  <a:srgbClr val="D9622B"/>
+                </a:solidFill>
+                <a:latin typeface="Cambria" pitchFamily="34" charset="0"/>
+                <a:ea typeface="Cambria" pitchFamily="34" charset="-122"/>
+                <a:cs typeface="Cambria" pitchFamily="34" charset="-120"/>
+              </a:rPr>
+              <a:t>~25%</a:t>
+            </a:r>
+            <a:endParaRPr lang="en-US" sz="1700" dirty="0"/>
+          </a:p>
+        </p:txBody>
+      </p:sp>
+      <p:sp>
+        <p:nvSpPr>
+          <p:cNvPr id="12" name="Text 10"/>
+          <p:cNvSpPr/>
+          <p:nvPr/>
+        </p:nvSpPr>
+        <p:spPr>
+          <a:xfrm>
+            <a:off x="6397600" y="2514600"/>
+            <a:ext cx="2238680" cy="868680"/>
+          </a:xfrm>
+          <a:prstGeom prst="rect">
+            <a:avLst/>
+          </a:prstGeom>
+          <a:noFill/>
+          <a:ln/>
+        </p:spPr>
+        <p:txBody>
+          <a:bodyPr wrap="square" lIns="0" tIns="0" rIns="0" bIns="0" rtlCol="0" anchor="ctr"/>
+          <a:lstStyle/>
+          <a:p>
+            <a:pPr indent="0" marL="0">
+              <a:lnSpc>
+                <a:spcPct val="112000"/>
+              </a:lnSpc>
+              <a:buNone/>
+            </a:pPr>
+            <a:r>
+              <a:rPr lang="en-US" sz="900" dirty="0">
+                <a:solidFill>
+                  <a:srgbClr val="3A4553"/>
+                </a:solidFill>
+                <a:latin typeface="Calibri" pitchFamily="34" charset="0"/>
+                <a:ea typeface="Calibri" pitchFamily="34" charset="-122"/>
+                <a:cs typeface="Calibri" pitchFamily="34" charset="-120"/>
+              </a:rPr>
+              <a:t>Melt-fuel cost rise at cupola/iron foundries since the coke-quota cuts (~USD 360→480/t delivered)</a:t>
+            </a:r>
+            <a:endParaRPr lang="en-US" sz="900" dirty="0"/>
+          </a:p>
+        </p:txBody>
+      </p:sp>
+      <p:sp>
+        <p:nvSpPr>
+          <p:cNvPr id="13" name="Shape 11"/>
+          <p:cNvSpPr/>
+          <p:nvPr/>
+        </p:nvSpPr>
+        <p:spPr>
+          <a:xfrm>
+            <a:off x="9075191" y="1783080"/>
+            <a:ext cx="2567864" cy="1691640"/>
+          </a:xfrm>
+          <a:prstGeom prst="roundRect">
+            <a:avLst>
+              <a:gd name="adj" fmla="val 4324"/>
+            </a:avLst>
+          </a:prstGeom>
+          <a:solidFill>
+            <a:srgbClr val="F4F5F7"/>
+          </a:solidFill>
+          <a:ln/>
+        </p:spPr>
+      </p:sp>
+      <p:sp>
+        <p:nvSpPr>
+          <p:cNvPr id="14" name="Text 12"/>
+          <p:cNvSpPr/>
+          <p:nvPr/>
+        </p:nvSpPr>
+        <p:spPr>
+          <a:xfrm>
+            <a:off x="9239783" y="1938528"/>
+            <a:ext cx="2238680" cy="548640"/>
+          </a:xfrm>
+          <a:prstGeom prst="rect">
+            <a:avLst/>
+          </a:prstGeom>
+          <a:noFill/>
+          <a:ln/>
+        </p:spPr>
+        <p:txBody>
+          <a:bodyPr wrap="square" lIns="0" tIns="0" rIns="0" bIns="0" rtlCol="0" anchor="ctr"/>
+          <a:lstStyle/>
+          <a:p>
+            <a:pPr indent="0" marL="0">
+              <a:buNone/>
+            </a:pPr>
+            <a:r>
+              <a:rPr lang="en-US" sz="1700" b="1" dirty="0">
+                <a:solidFill>
+                  <a:srgbClr val="D9622B"/>
+                </a:solidFill>
+                <a:latin typeface="Cambria" pitchFamily="34" charset="0"/>
+                <a:ea typeface="Cambria" pitchFamily="34" charset="-122"/>
+                <a:cs typeface="Cambria" pitchFamily="34" charset="-120"/>
+              </a:rPr>
+              <a:t>8-12/qtr</a:t>
+            </a:r>
+            <a:endParaRPr lang="en-US" sz="1700" dirty="0"/>
+          </a:p>
+        </p:txBody>
+      </p:sp>
+      <p:sp>
+        <p:nvSpPr>
+          <p:cNvPr id="15" name="Text 13"/>
+          <p:cNvSpPr/>
+          <p:nvPr/>
+        </p:nvSpPr>
+        <p:spPr>
+          <a:xfrm>
+            <a:off x="9239783" y="2514600"/>
+            <a:ext cx="2238680" cy="868680"/>
+          </a:xfrm>
+          <a:prstGeom prst="rect">
+            <a:avLst/>
+          </a:prstGeom>
+          <a:noFill/>
+          <a:ln/>
+        </p:spPr>
+        <p:txBody>
+          <a:bodyPr wrap="square" lIns="0" tIns="0" rIns="0" bIns="0" rtlCol="0" anchor="ctr"/>
+          <a:lstStyle/>
+          <a:p>
+            <a:pPr indent="0" marL="0">
+              <a:lnSpc>
+                <a:spcPct val="112000"/>
+              </a:lnSpc>
+              <a:buNone/>
+            </a:pPr>
+            <a:r>
+              <a:rPr lang="en-US" sz="900" dirty="0">
+                <a:solidFill>
+                  <a:srgbClr val="3A4553"/>
+                </a:solidFill>
+                <a:latin typeface="Calibri" pitchFamily="34" charset="0"/>
+                <a:ea typeface="Calibri" pitchFamily="34" charset="-122"/>
+                <a:cs typeface="Calibri" pitchFamily="34" charset="-120"/>
+              </a:rPr>
+              <a:t>Micro-foundries shutting each quarter since mid-2025 — concentrated in the unaccredited, cupola-based tier</a:t>
+            </a:r>
+            <a:endParaRPr lang="en-US" sz="900" dirty="0"/>
+          </a:p>
+        </p:txBody>
+      </p:sp>
+      <p:sp>
+        <p:nvSpPr>
+          <p:cNvPr id="16" name="Shape 14"/>
+          <p:cNvSpPr/>
+          <p:nvPr/>
+        </p:nvSpPr>
+        <p:spPr>
+          <a:xfrm>
+            <a:off x="548640" y="3794760"/>
+            <a:ext cx="11094415" cy="2240280"/>
+          </a:xfrm>
+          <a:prstGeom prst="roundRect">
+            <a:avLst>
+              <a:gd name="adj" fmla="val 3265"/>
+            </a:avLst>
+          </a:prstGeom>
+          <a:solidFill>
+            <a:srgbClr val="F4F5F7"/>
+          </a:solidFill>
+          <a:ln/>
+        </p:spPr>
+      </p:sp>
+      <p:sp>
+        <p:nvSpPr>
+          <p:cNvPr id="17" name="Text 15"/>
+          <p:cNvSpPr/>
+          <p:nvPr/>
+        </p:nvSpPr>
+        <p:spPr>
+          <a:xfrm>
+            <a:off x="822960" y="3995928"/>
+            <a:ext cx="10545775" cy="274320"/>
+          </a:xfrm>
+          <a:prstGeom prst="rect">
+            <a:avLst/>
+          </a:prstGeom>
+          <a:noFill/>
+          <a:ln/>
+        </p:spPr>
+        <p:txBody>
+          <a:bodyPr wrap="square" lIns="0" tIns="0" rIns="0" bIns="0" rtlCol="0" anchor="ctr"/>
+          <a:lstStyle/>
+          <a:p>
+            <a:pPr indent="0" marL="0">
+              <a:buNone/>
+            </a:pPr>
+            <a:r>
+              <a:rPr lang="en-US" sz="1050" b="1" spc="100" kern="0" dirty="0">
+                <a:solidFill>
+                  <a:srgbClr val="D9622B"/>
+                </a:solidFill>
+                <a:latin typeface="Calibri" pitchFamily="34" charset="0"/>
+                <a:ea typeface="Calibri" pitchFamily="34" charset="-122"/>
+                <a:cs typeface="Calibri" pitchFamily="34" charset="-120"/>
+              </a:rPr>
+              <a:t>HOW DATRE ACTUALLY SITS IN THIS LANDSCAPE</a:t>
+            </a:r>
+            <a:endParaRPr lang="en-US" sz="1050" dirty="0"/>
+          </a:p>
+        </p:txBody>
+      </p:sp>
+      <p:sp>
+        <p:nvSpPr>
+          <p:cNvPr id="18" name="Text 16"/>
+          <p:cNvSpPr/>
+          <p:nvPr/>
+        </p:nvSpPr>
+        <p:spPr>
+          <a:xfrm>
+            <a:off x="822960" y="4315968"/>
+            <a:ext cx="10545775" cy="1600200"/>
           </a:xfrm>
           <a:prstGeom prst="rect">
             <a:avLst/>
@@ -21537,642 +22127,120 @@
           <a:lstStyle/>
           <a:p>
             <a:pPr marL="342900" indent="-342900">
+              <a:lnSpc>
+                <a:spcPct val="112000"/>
+              </a:lnSpc>
+              <a:spcAft>
+                <a:spcPts val="700"/>
+              </a:spcAft>
+              <a:buSzPct val="100000"/>
+              <a:buChar char="•"/>
+            </a:pPr>
+            <a:r>
+              <a:rPr lang="en-US" sz="980" dirty="0">
+                <a:solidFill>
+                  <a:srgbClr val="1C1F26"/>
+                </a:solidFill>
+                <a:latin typeface="Calibri" pitchFamily="34" charset="0"/>
+                <a:ea typeface="Calibri" pitchFamily="34" charset="-122"/>
+                <a:cs typeface="Calibri" pitchFamily="34" charset="-120"/>
+              </a:rPr>
+              <a:t>Datre's induction-route, steel-casting model sits outside the coke-crisis cluster hitting cupola/iron foundries — but carries its own exposure to grid tariffs, scrap quality and alloy pricing, with no tonnage cushion to absorb a bad month.</a:t>
+            </a:r>
+            <a:endParaRPr lang="en-US" sz="980" dirty="0"/>
+          </a:p>
+          <a:p>
+            <a:pPr marL="342900" indent="-342900">
+              <a:lnSpc>
+                <a:spcPct val="112000"/>
+              </a:lnSpc>
+              <a:spcAft>
+                <a:spcPts val="700"/>
+              </a:spcAft>
+              <a:buSzPct val="100000"/>
+              <a:buChar char="•"/>
+            </a:pPr>
+            <a:r>
+              <a:rPr lang="en-US" sz="980" dirty="0">
+                <a:solidFill>
+                  <a:srgbClr val="1C1F26"/>
+                </a:solidFill>
+                <a:latin typeface="Calibri" pitchFamily="34" charset="0"/>
+                <a:ea typeface="Calibri" pitchFamily="34" charset="-122"/>
+                <a:cs typeface="Calibri" pitchFamily="34" charset="-120"/>
+              </a:rPr>
+              <a:t>Accreditation, not tonnage, is becoming the sector's real pricing power — Datre's RDSO 'A' / ISO 9001:2015 / ZED Gold status already places it in the ~1,700-unit tier competing on qualification rather than price.</a:t>
+            </a:r>
+            <a:endParaRPr lang="en-US" sz="980" dirty="0"/>
+          </a:p>
+          <a:p>
+            <a:pPr marL="342900" indent="-342900">
+              <a:lnSpc>
+                <a:spcPct val="112000"/>
+              </a:lnSpc>
+              <a:buSzPct val="100000"/>
+              <a:buChar char="•"/>
+            </a:pPr>
+            <a:r>
+              <a:rPr lang="en-US" sz="980" dirty="0">
+                <a:solidFill>
+                  <a:srgbClr val="1C1F26"/>
+                </a:solidFill>
+                <a:latin typeface="Calibri" pitchFamily="34" charset="0"/>
+                <a:ea typeface="Calibri" pitchFamily="34" charset="-122"/>
+                <a:cs typeface="Calibri" pitchFamily="34" charset="-120"/>
+              </a:rPr>
+              <a:t>Carbon intensity is arriving as a new compliance layer on top of accreditation: the EU's CBAM applies a 38.8% levy above 1.5 tCO2/t since Jan 2026, against an Indian foundry baseline of 1.8-2.2 tCO2/t. Not yet a direct hit for Datre's Japan/Australia/North America-leaning exports, but increasingly an OEM supplier-audit question.</a:t>
+            </a:r>
+            <a:endParaRPr lang="en-US" sz="980" dirty="0"/>
+          </a:p>
+        </p:txBody>
+      </p:sp>
+      <p:sp>
+        <p:nvSpPr>
+          <p:cNvPr id="19" name="Text 17"/>
+          <p:cNvSpPr/>
+          <p:nvPr/>
+        </p:nvSpPr>
+        <p:spPr>
+          <a:xfrm>
+            <a:off x="548640" y="6172200"/>
+            <a:ext cx="11094415" cy="292608"/>
+          </a:xfrm>
+          <a:prstGeom prst="rect">
+            <a:avLst/>
+          </a:prstGeom>
+          <a:noFill/>
+          <a:ln/>
+        </p:spPr>
+        <p:txBody>
+          <a:bodyPr wrap="square" lIns="0" tIns="0" rIns="0" bIns="0" rtlCol="0" anchor="ctr"/>
+          <a:lstStyle/>
+          <a:p>
+            <a:pPr indent="0" marL="0">
               <a:lnSpc>
                 <a:spcPct val="105000"/>
               </a:lnSpc>
-              <a:spcAft>
-                <a:spcPts val="500"/>
-              </a:spcAft>
-              <a:buSzPct val="100000"/>
-              <a:buChar char="•"/>
-            </a:pPr>
-            <a:r>
-              <a:rPr lang="en-US" sz="960" dirty="0">
-                <a:solidFill>
-                  <a:srgbClr val="1C1F26"/>
-                </a:solidFill>
-                <a:latin typeface="Calibri" pitchFamily="34" charset="0"/>
-                <a:ea typeface="Calibri" pitchFamily="34" charset="-122"/>
-                <a:cs typeface="Calibri" pitchFamily="34" charset="-120"/>
-              </a:rPr>
-              <a:t>Utilization ~55%→~81% (2018-2025) on the same aging plant</a:t>
-            </a:r>
-            <a:endParaRPr lang="en-US" sz="960" dirty="0"/>
-          </a:p>
-          <a:p>
-            <a:pPr marL="342900" indent="-342900">
-              <a:lnSpc>
-                <a:spcPct val="105000"/>
-              </a:lnSpc>
-              <a:spcAft>
-                <a:spcPts val="500"/>
-              </a:spcAft>
-              <a:buSzPct val="100000"/>
-              <a:buChar char="•"/>
-            </a:pPr>
-            <a:r>
-              <a:rPr lang="en-US" sz="960" dirty="0">
-                <a:solidFill>
-                  <a:srgbClr val="1C1F26"/>
-                </a:solidFill>
-                <a:latin typeface="Calibri" pitchFamily="34" charset="0"/>
-                <a:ea typeface="Calibri" pitchFamily="34" charset="-122"/>
-                <a:cs typeface="Calibri" pitchFamily="34" charset="-120"/>
-              </a:rPr>
-              <a:t>Defensible heat-treatment IP moat</a:t>
-            </a:r>
-            <a:endParaRPr lang="en-US" sz="960" dirty="0"/>
-          </a:p>
-          <a:p>
-            <a:pPr marL="342900" indent="-342900">
-              <a:lnSpc>
-                <a:spcPct val="105000"/>
-              </a:lnSpc>
-              <a:spcAft>
-                <a:spcPts val="500"/>
-              </a:spcAft>
-              <a:buSzPct val="100000"/>
-              <a:buChar char="•"/>
-            </a:pPr>
-            <a:r>
-              <a:rPr lang="en-US" sz="960" dirty="0">
-                <a:solidFill>
-                  <a:srgbClr val="1C1F26"/>
-                </a:solidFill>
-                <a:latin typeface="Calibri" pitchFamily="34" charset="0"/>
-                <a:ea typeface="Calibri" pitchFamily="34" charset="-122"/>
-                <a:cs typeface="Calibri" pitchFamily="34" charset="-120"/>
-              </a:rPr>
-              <a:t>Tier-1 OEM integration incl. Komatsu-qualified</a:t>
-            </a:r>
-            <a:endParaRPr lang="en-US" sz="960" dirty="0"/>
-          </a:p>
-          <a:p>
-            <a:pPr marL="342900" indent="-342900">
-              <a:lnSpc>
-                <a:spcPct val="105000"/>
-              </a:lnSpc>
-              <a:spcAft>
-                <a:spcPts val="500"/>
-              </a:spcAft>
-              <a:buSzPct val="100000"/>
-              <a:buChar char="•"/>
-            </a:pPr>
-            <a:r>
-              <a:rPr lang="en-US" sz="960" dirty="0">
-                <a:solidFill>
-                  <a:srgbClr val="1C1F26"/>
-                </a:solidFill>
-                <a:latin typeface="Calibri" pitchFamily="34" charset="0"/>
-                <a:ea typeface="Calibri" pitchFamily="34" charset="-122"/>
-                <a:cs typeface="Calibri" pitchFamily="34" charset="-120"/>
-              </a:rPr>
-              <a:t>Operationally debt-free; ISO 9001:2015 / RDSO 'A' / ZED Gold</a:t>
-            </a:r>
-            <a:endParaRPr lang="en-US" sz="960" dirty="0"/>
-          </a:p>
-        </p:txBody>
-      </p:sp>
-      <p:sp>
-        <p:nvSpPr>
-          <p:cNvPr id="7" name="Shape 5"/>
-          <p:cNvSpPr/>
-          <p:nvPr/>
-        </p:nvSpPr>
-        <p:spPr>
-          <a:xfrm>
-            <a:off x="6255868" y="1737360"/>
-            <a:ext cx="5387188" cy="2148840"/>
-          </a:xfrm>
-          <a:prstGeom prst="roundRect">
-            <a:avLst>
-              <a:gd name="adj" fmla="val 3404"/>
-            </a:avLst>
-          </a:prstGeom>
-          <a:solidFill>
-            <a:srgbClr val="FBEEEC"/>
-          </a:solidFill>
-          <a:ln/>
-        </p:spPr>
-      </p:sp>
-      <p:sp>
-        <p:nvSpPr>
-          <p:cNvPr id="8" name="Text 6"/>
-          <p:cNvSpPr/>
-          <p:nvPr/>
-        </p:nvSpPr>
-        <p:spPr>
-          <a:xfrm>
-            <a:off x="6511900" y="1901952"/>
-            <a:ext cx="4875124" cy="274320"/>
-          </a:xfrm>
-          <a:prstGeom prst="rect">
-            <a:avLst/>
-          </a:prstGeom>
-          <a:noFill/>
-          <a:ln/>
-        </p:spPr>
-        <p:txBody>
-          <a:bodyPr wrap="square" lIns="0" tIns="0" rIns="0" bIns="0" rtlCol="0" anchor="ctr"/>
-          <a:lstStyle/>
-          <a:p>
-            <a:pPr indent="0" marL="0">
-              <a:buNone/>
-            </a:pPr>
-            <a:r>
-              <a:rPr lang="en-US" sz="1150" b="1" spc="150" kern="0" dirty="0">
-                <a:solidFill>
-                  <a:srgbClr val="B8453F"/>
-                </a:solidFill>
-                <a:latin typeface="Calibri" pitchFamily="34" charset="0"/>
-                <a:ea typeface="Calibri" pitchFamily="34" charset="-122"/>
-                <a:cs typeface="Calibri" pitchFamily="34" charset="-120"/>
-              </a:rPr>
-              <a:t>WEAKNESSES</a:t>
-            </a:r>
-            <a:endParaRPr lang="en-US" sz="1150" dirty="0"/>
-          </a:p>
-        </p:txBody>
-      </p:sp>
-      <p:sp>
-        <p:nvSpPr>
-          <p:cNvPr id="9" name="Text 7"/>
-          <p:cNvSpPr/>
-          <p:nvPr/>
-        </p:nvSpPr>
-        <p:spPr>
-          <a:xfrm>
-            <a:off x="6511900" y="2212848"/>
-            <a:ext cx="4875124" cy="1554480"/>
-          </a:xfrm>
-          <a:prstGeom prst="rect">
-            <a:avLst/>
-          </a:prstGeom>
-          <a:noFill/>
-          <a:ln/>
-        </p:spPr>
-        <p:txBody>
-          <a:bodyPr wrap="square" lIns="0" tIns="0" rIns="0" bIns="0" rtlCol="0" anchor="ctr"/>
-          <a:lstStyle/>
-          <a:p>
-            <a:pPr marL="342900" indent="-342900">
-              <a:lnSpc>
-                <a:spcPct val="105000"/>
-              </a:lnSpc>
-              <a:spcAft>
-                <a:spcPts val="500"/>
-              </a:spcAft>
-              <a:buSzPct val="100000"/>
-              <a:buChar char="•"/>
-            </a:pPr>
-            <a:r>
-              <a:rPr lang="en-US" sz="960" dirty="0">
-                <a:solidFill>
-                  <a:srgbClr val="1C1F26"/>
-                </a:solidFill>
-                <a:latin typeface="Calibri" pitchFamily="34" charset="0"/>
-                <a:ea typeface="Calibri" pitchFamily="34" charset="-122"/>
-                <a:cs typeface="Calibri" pitchFamily="34" charset="-120"/>
-              </a:rPr>
-              <a:t>Negative net worth (-₹1.54 Cr, FY25)</a:t>
-            </a:r>
-            <a:endParaRPr lang="en-US" sz="960" dirty="0"/>
-          </a:p>
-          <a:p>
-            <a:pPr marL="342900" indent="-342900">
-              <a:lnSpc>
-                <a:spcPct val="105000"/>
-              </a:lnSpc>
-              <a:spcAft>
-                <a:spcPts val="500"/>
-              </a:spcAft>
-              <a:buSzPct val="100000"/>
-              <a:buChar char="•"/>
-            </a:pPr>
-            <a:r>
-              <a:rPr lang="en-US" sz="960" dirty="0">
-                <a:solidFill>
-                  <a:srgbClr val="1C1F26"/>
-                </a:solidFill>
-                <a:latin typeface="Calibri" pitchFamily="34" charset="0"/>
-                <a:ea typeface="Calibri" pitchFamily="34" charset="-122"/>
-                <a:cs typeface="Calibri" pitchFamily="34" charset="-120"/>
-              </a:rPr>
-              <a:t>~80% of contribution from 2 customers</a:t>
-            </a:r>
-            <a:endParaRPr lang="en-US" sz="960" dirty="0"/>
-          </a:p>
-          <a:p>
-            <a:pPr marL="342900" indent="-342900">
-              <a:lnSpc>
-                <a:spcPct val="105000"/>
-              </a:lnSpc>
-              <a:spcAft>
-                <a:spcPts val="500"/>
-              </a:spcAft>
-              <a:buSzPct val="100000"/>
-              <a:buChar char="•"/>
-            </a:pPr>
-            <a:r>
-              <a:rPr lang="en-US" sz="960" dirty="0">
-                <a:solidFill>
-                  <a:srgbClr val="1C1F26"/>
-                </a:solidFill>
-                <a:latin typeface="Calibri" pitchFamily="34" charset="0"/>
-                <a:ea typeface="Calibri" pitchFamily="34" charset="-122"/>
-                <a:cs typeface="Calibri" pitchFamily="34" charset="-120"/>
-              </a:rPr>
-              <a:t>Rejection rate at 10.1%, worst on record</a:t>
-            </a:r>
-            <a:endParaRPr lang="en-US" sz="960" dirty="0"/>
-          </a:p>
-          <a:p>
-            <a:pPr marL="342900" indent="-342900">
-              <a:lnSpc>
-                <a:spcPct val="105000"/>
-              </a:lnSpc>
-              <a:spcAft>
-                <a:spcPts val="500"/>
-              </a:spcAft>
-              <a:buSzPct val="100000"/>
-              <a:buChar char="•"/>
-            </a:pPr>
-            <a:r>
-              <a:rPr lang="en-US" sz="960" dirty="0">
-                <a:solidFill>
-                  <a:srgbClr val="1C1F26"/>
-                </a:solidFill>
-                <a:latin typeface="Calibri" pitchFamily="34" charset="0"/>
-                <a:ea typeface="Calibri" pitchFamily="34" charset="-122"/>
-                <a:cs typeface="Calibri" pitchFamily="34" charset="-120"/>
-              </a:rPr>
-              <a:t>Recurring auditor qualification; sub-scale vs. peer median</a:t>
-            </a:r>
-            <a:endParaRPr lang="en-US" sz="960" dirty="0"/>
-          </a:p>
-        </p:txBody>
-      </p:sp>
-      <p:sp>
-        <p:nvSpPr>
-          <p:cNvPr id="10" name="Shape 8"/>
-          <p:cNvSpPr/>
-          <p:nvPr/>
-        </p:nvSpPr>
-        <p:spPr>
-          <a:xfrm>
-            <a:off x="548640" y="4114800"/>
-            <a:ext cx="5387188" cy="2148840"/>
-          </a:xfrm>
-          <a:prstGeom prst="roundRect">
-            <a:avLst>
-              <a:gd name="adj" fmla="val 3404"/>
-            </a:avLst>
-          </a:prstGeom>
-          <a:solidFill>
-            <a:srgbClr val="FCEFE6"/>
-          </a:solidFill>
-          <a:ln/>
-        </p:spPr>
-      </p:sp>
-      <p:sp>
-        <p:nvSpPr>
-          <p:cNvPr id="11" name="Text 9"/>
-          <p:cNvSpPr/>
-          <p:nvPr/>
-        </p:nvSpPr>
-        <p:spPr>
-          <a:xfrm>
-            <a:off x="804672" y="4279392"/>
-            <a:ext cx="4875124" cy="274320"/>
-          </a:xfrm>
-          <a:prstGeom prst="rect">
-            <a:avLst/>
-          </a:prstGeom>
-          <a:noFill/>
-          <a:ln/>
-        </p:spPr>
-        <p:txBody>
-          <a:bodyPr wrap="square" lIns="0" tIns="0" rIns="0" bIns="0" rtlCol="0" anchor="ctr"/>
-          <a:lstStyle/>
-          <a:p>
-            <a:pPr indent="0" marL="0">
-              <a:buNone/>
-            </a:pPr>
-            <a:r>
-              <a:rPr lang="en-US" sz="1150" b="1" spc="150" kern="0" dirty="0">
-                <a:solidFill>
-                  <a:srgbClr val="D9622B"/>
-                </a:solidFill>
-                <a:latin typeface="Calibri" pitchFamily="34" charset="0"/>
-                <a:ea typeface="Calibri" pitchFamily="34" charset="-122"/>
-                <a:cs typeface="Calibri" pitchFamily="34" charset="-120"/>
-              </a:rPr>
-              <a:t>OPPORTUNITIES</a:t>
-            </a:r>
-            <a:endParaRPr lang="en-US" sz="1150" dirty="0"/>
-          </a:p>
-        </p:txBody>
-      </p:sp>
-      <p:sp>
-        <p:nvSpPr>
-          <p:cNvPr id="12" name="Text 10"/>
-          <p:cNvSpPr/>
-          <p:nvPr/>
-        </p:nvSpPr>
-        <p:spPr>
-          <a:xfrm>
-            <a:off x="804672" y="4590288"/>
-            <a:ext cx="4875124" cy="1554480"/>
-          </a:xfrm>
-          <a:prstGeom prst="rect">
-            <a:avLst/>
-          </a:prstGeom>
-          <a:noFill/>
-          <a:ln/>
-        </p:spPr>
-        <p:txBody>
-          <a:bodyPr wrap="square" lIns="0" tIns="0" rIns="0" bIns="0" rtlCol="0" anchor="ctr"/>
-          <a:lstStyle/>
-          <a:p>
-            <a:pPr marL="342900" indent="-342900">
-              <a:lnSpc>
-                <a:spcPct val="105000"/>
-              </a:lnSpc>
-              <a:spcAft>
-                <a:spcPts val="500"/>
-              </a:spcAft>
-              <a:buSzPct val="100000"/>
-              <a:buChar char="•"/>
-            </a:pPr>
-            <a:r>
-              <a:rPr lang="en-US" sz="960" dirty="0">
-                <a:solidFill>
-                  <a:srgbClr val="1C1F26"/>
-                </a:solidFill>
-                <a:latin typeface="Calibri" pitchFamily="34" charset="0"/>
-                <a:ea typeface="Calibri" pitchFamily="34" charset="-122"/>
-                <a:cs typeface="Calibri" pitchFamily="34" charset="-120"/>
-              </a:rPr>
-              <a:t>Komatsu global qualification (pending quality closure)</a:t>
-            </a:r>
-            <a:endParaRPr lang="en-US" sz="960" dirty="0"/>
-          </a:p>
-          <a:p>
-            <a:pPr marL="342900" indent="-342900">
-              <a:lnSpc>
-                <a:spcPct val="105000"/>
-              </a:lnSpc>
-              <a:spcAft>
-                <a:spcPts val="500"/>
-              </a:spcAft>
-              <a:buSzPct val="100000"/>
-              <a:buChar char="•"/>
-            </a:pPr>
-            <a:r>
-              <a:rPr lang="en-US" sz="960" dirty="0">
-                <a:solidFill>
-                  <a:srgbClr val="1C1F26"/>
-                </a:solidFill>
-                <a:latin typeface="Calibri" pitchFamily="34" charset="0"/>
-                <a:ea typeface="Calibri" pitchFamily="34" charset="-122"/>
-                <a:cs typeface="Calibri" pitchFamily="34" charset="-120"/>
-              </a:rPr>
-              <a:t>Thejo Engineering diversification, actively growing</a:t>
-            </a:r>
-            <a:endParaRPr lang="en-US" sz="960" dirty="0"/>
-          </a:p>
-          <a:p>
-            <a:pPr marL="342900" indent="-342900">
-              <a:lnSpc>
-                <a:spcPct val="105000"/>
-              </a:lnSpc>
-              <a:spcAft>
-                <a:spcPts val="500"/>
-              </a:spcAft>
-              <a:buSzPct val="100000"/>
-              <a:buChar char="•"/>
-            </a:pPr>
-            <a:r>
-              <a:rPr lang="en-US" sz="960" dirty="0">
-                <a:solidFill>
-                  <a:srgbClr val="1C1F26"/>
-                </a:solidFill>
-                <a:latin typeface="Calibri" pitchFamily="34" charset="0"/>
-                <a:ea typeface="Calibri" pitchFamily="34" charset="-122"/>
-                <a:cs typeface="Calibri" pitchFamily="34" charset="-120"/>
-              </a:rPr>
-              <a:t>15-23% capacity headroom without capex</a:t>
-            </a:r>
-            <a:endParaRPr lang="en-US" sz="960" dirty="0"/>
-          </a:p>
-          <a:p>
-            <a:pPr marL="342900" indent="-342900">
-              <a:lnSpc>
-                <a:spcPct val="105000"/>
-              </a:lnSpc>
-              <a:spcAft>
-                <a:spcPts val="500"/>
-              </a:spcAft>
-              <a:buSzPct val="100000"/>
-              <a:buChar char="•"/>
-            </a:pPr>
-            <a:r>
-              <a:rPr lang="en-US" sz="960" dirty="0">
-                <a:solidFill>
-                  <a:srgbClr val="1C1F26"/>
-                </a:solidFill>
-                <a:latin typeface="Calibri" pitchFamily="34" charset="0"/>
-                <a:ea typeface="Calibri" pitchFamily="34" charset="-122"/>
-                <a:cs typeface="Calibri" pitchFamily="34" charset="-120"/>
-              </a:rPr>
-              <a:t>Margin upside toward peer best-in-class (7-8% net)</a:t>
-            </a:r>
-            <a:endParaRPr lang="en-US" sz="960" dirty="0"/>
-          </a:p>
-        </p:txBody>
-      </p:sp>
-      <p:sp>
-        <p:nvSpPr>
-          <p:cNvPr id="13" name="Shape 11"/>
-          <p:cNvSpPr/>
-          <p:nvPr/>
-        </p:nvSpPr>
-        <p:spPr>
-          <a:xfrm>
-            <a:off x="6255868" y="4114800"/>
-            <a:ext cx="5387188" cy="2148840"/>
-          </a:xfrm>
-          <a:prstGeom prst="roundRect">
-            <a:avLst>
-              <a:gd name="adj" fmla="val 3404"/>
-            </a:avLst>
-          </a:prstGeom>
-          <a:solidFill>
-            <a:srgbClr val="F4F5F7"/>
-          </a:solidFill>
-          <a:ln/>
-        </p:spPr>
-      </p:sp>
-      <p:sp>
-        <p:nvSpPr>
-          <p:cNvPr id="14" name="Text 12"/>
-          <p:cNvSpPr/>
-          <p:nvPr/>
-        </p:nvSpPr>
-        <p:spPr>
-          <a:xfrm>
-            <a:off x="6511900" y="4279392"/>
-            <a:ext cx="4875124" cy="274320"/>
-          </a:xfrm>
-          <a:prstGeom prst="rect">
-            <a:avLst/>
-          </a:prstGeom>
-          <a:noFill/>
-          <a:ln/>
-        </p:spPr>
-        <p:txBody>
-          <a:bodyPr wrap="square" lIns="0" tIns="0" rIns="0" bIns="0" rtlCol="0" anchor="ctr"/>
-          <a:lstStyle/>
-          <a:p>
-            <a:pPr indent="0" marL="0">
-              <a:buNone/>
-            </a:pPr>
-            <a:r>
-              <a:rPr lang="en-US" sz="1150" b="1" spc="150" kern="0" dirty="0">
-                <a:solidFill>
-                  <a:srgbClr val="3A4553"/>
-                </a:solidFill>
-                <a:latin typeface="Calibri" pitchFamily="34" charset="0"/>
-                <a:ea typeface="Calibri" pitchFamily="34" charset="-122"/>
-                <a:cs typeface="Calibri" pitchFamily="34" charset="-120"/>
-              </a:rPr>
-              <a:t>THREATS</a:t>
-            </a:r>
-            <a:endParaRPr lang="en-US" sz="1150" dirty="0"/>
-          </a:p>
-        </p:txBody>
-      </p:sp>
-      <p:sp>
-        <p:nvSpPr>
-          <p:cNvPr id="15" name="Text 13"/>
-          <p:cNvSpPr/>
-          <p:nvPr/>
-        </p:nvSpPr>
-        <p:spPr>
-          <a:xfrm>
-            <a:off x="6511900" y="4590288"/>
-            <a:ext cx="4875124" cy="1554480"/>
-          </a:xfrm>
-          <a:prstGeom prst="rect">
-            <a:avLst/>
-          </a:prstGeom>
-          <a:noFill/>
-          <a:ln/>
-        </p:spPr>
-        <p:txBody>
-          <a:bodyPr wrap="square" lIns="0" tIns="0" rIns="0" bIns="0" rtlCol="0" anchor="ctr"/>
-          <a:lstStyle/>
-          <a:p>
-            <a:pPr marL="342900" indent="-342900">
-              <a:lnSpc>
-                <a:spcPct val="105000"/>
-              </a:lnSpc>
-              <a:spcAft>
-                <a:spcPts val="500"/>
-              </a:spcAft>
-              <a:buSzPct val="100000"/>
-              <a:buChar char="•"/>
-            </a:pPr>
-            <a:r>
-              <a:rPr lang="en-US" sz="960" dirty="0">
-                <a:solidFill>
-                  <a:srgbClr val="1C1F26"/>
-                </a:solidFill>
-                <a:latin typeface="Calibri" pitchFamily="34" charset="0"/>
-                <a:ea typeface="Calibri" pitchFamily="34" charset="-122"/>
-                <a:cs typeface="Calibri" pitchFamily="34" charset="-120"/>
-              </a:rPr>
-              <a:t>Tega/Escorts concentration; Tega small-order decline</a:t>
-            </a:r>
-            <a:endParaRPr lang="en-US" sz="960" dirty="0"/>
-          </a:p>
-          <a:p>
-            <a:pPr marL="342900" indent="-342900">
-              <a:lnSpc>
-                <a:spcPct val="105000"/>
-              </a:lnSpc>
-              <a:spcAft>
-                <a:spcPts val="500"/>
-              </a:spcAft>
-              <a:buSzPct val="100000"/>
-              <a:buChar char="•"/>
-            </a:pPr>
-            <a:r>
-              <a:rPr lang="en-US" sz="960" dirty="0">
-                <a:solidFill>
-                  <a:srgbClr val="1C1F26"/>
-                </a:solidFill>
-                <a:latin typeface="Calibri" pitchFamily="34" charset="0"/>
-                <a:ea typeface="Calibri" pitchFamily="34" charset="-122"/>
-                <a:cs typeface="Calibri" pitchFamily="34" charset="-120"/>
-              </a:rPr>
-              <a:t>Q1 FY26-27 demand air-pocket, cause unconfirmed</a:t>
-            </a:r>
-            <a:endParaRPr lang="en-US" sz="960" dirty="0"/>
-          </a:p>
-          <a:p>
-            <a:pPr marL="342900" indent="-342900">
-              <a:lnSpc>
-                <a:spcPct val="105000"/>
-              </a:lnSpc>
-              <a:spcAft>
-                <a:spcPts val="500"/>
-              </a:spcAft>
-              <a:buSzPct val="100000"/>
-              <a:buChar char="•"/>
-            </a:pPr>
-            <a:r>
-              <a:rPr lang="en-US" sz="960" dirty="0">
-                <a:solidFill>
-                  <a:srgbClr val="1C1F26"/>
-                </a:solidFill>
-                <a:latin typeface="Calibri" pitchFamily="34" charset="0"/>
-                <a:ea typeface="Calibri" pitchFamily="34" charset="-122"/>
-                <a:cs typeface="Calibri" pitchFamily="34" charset="-120"/>
-              </a:rPr>
-              <a:t>Steel/ferrochrome price volatility</a:t>
-            </a:r>
-            <a:endParaRPr lang="en-US" sz="960" dirty="0"/>
-          </a:p>
-          <a:p>
-            <a:pPr marL="342900" indent="-342900">
-              <a:lnSpc>
-                <a:spcPct val="105000"/>
-              </a:lnSpc>
-              <a:spcAft>
-                <a:spcPts val="500"/>
-              </a:spcAft>
-              <a:buSzPct val="100000"/>
-              <a:buChar char="•"/>
-            </a:pPr>
-            <a:r>
-              <a:rPr lang="en-US" sz="960" dirty="0">
-                <a:solidFill>
-                  <a:srgbClr val="1C1F26"/>
-                </a:solidFill>
-                <a:latin typeface="Calibri" pitchFamily="34" charset="0"/>
-                <a:ea typeface="Calibri" pitchFamily="34" charset="-122"/>
-                <a:cs typeface="Calibri" pitchFamily="34" charset="-120"/>
-              </a:rPr>
-              <a:t>Open Komatsu first-article nonconformity</a:t>
-            </a:r>
-            <a:endParaRPr lang="en-US" sz="960" dirty="0"/>
-          </a:p>
-        </p:txBody>
-      </p:sp>
-      <p:sp>
-        <p:nvSpPr>
-          <p:cNvPr id="16" name="Text 14"/>
+              <a:buNone/>
+            </a:pPr>
+            <a:r>
+              <a:rPr lang="en-US" sz="800" i="1" dirty="0">
+                <a:solidFill>
+                  <a:srgbClr val="6B7684"/>
+                </a:solidFill>
+                <a:latin typeface="Calibri" pitchFamily="34" charset="0"/>
+                <a:ea typeface="Calibri" pitchFamily="34" charset="-122"/>
+                <a:cs typeface="Calibri" pitchFamily="34" charset="-120"/>
+              </a:rPr>
+              <a:t>Sector figures (unit counts, coke pricing, CBAM threshold, consumption growth) are from an external industry briefing, not independently verified against Drive records — attributed as market context, not audited fact.</a:t>
+            </a:r>
+            <a:endParaRPr lang="en-US" sz="800" dirty="0"/>
+          </a:p>
+        </p:txBody>
+      </p:sp>
+      <p:sp>
+        <p:nvSpPr>
+          <p:cNvPr id="20" name="Text 18"/>
           <p:cNvSpPr/>
           <p:nvPr/>
         </p:nvSpPr>
@@ -22211,7 +22279,7 @@
       </p:sp>
       <p:sp>
         <p:nvSpPr>
-          <p:cNvPr id="17" name="Text 15"/>
+          <p:cNvPr id="21" name="Text 19"/>
           <p:cNvSpPr/>
           <p:nvPr/>
         </p:nvSpPr>
@@ -22259,6 +22327,759 @@
 <file path=ppt/slides/slide25.xml><?xml version="1.0" encoding="utf-8"?>
 <p:sld xmlns:a="http://schemas.openxmlformats.org/drawingml/2006/main" xmlns:r="http://schemas.openxmlformats.org/officeDocument/2006/relationships" xmlns:p="http://schemas.openxmlformats.org/presentationml/2006/main">
   <p:cSld name="Slide 25">
+    <p:bg>
+      <p:bgPr>
+        <a:solidFill>
+          <a:srgbClr val="1C1F26"/>
+        </a:solidFill>
+      </p:bgPr>
+    </p:bg>
+    <p:spTree>
+      <p:nvGrpSpPr>
+        <p:cNvPr id="1" name=""/>
+        <p:cNvGrpSpPr/>
+        <p:nvPr/>
+      </p:nvGrpSpPr>
+      <p:grpSpPr>
+        <a:xfrm>
+          <a:off x="0" y="0"/>
+          <a:ext cx="0" cy="0"/>
+          <a:chOff x="0" y="0"/>
+          <a:chExt cx="0" cy="0"/>
+        </a:xfrm>
+      </p:grpSpPr>
+      <p:sp>
+        <p:nvSpPr>
+          <p:cNvPr id="2" name="Text 0"/>
+          <p:cNvSpPr/>
+          <p:nvPr/>
+        </p:nvSpPr>
+        <p:spPr>
+          <a:xfrm>
+            <a:off x="548640" y="457200"/>
+            <a:ext cx="4572000" cy="274320"/>
+          </a:xfrm>
+          <a:prstGeom prst="rect">
+            <a:avLst/>
+          </a:prstGeom>
+          <a:noFill/>
+          <a:ln/>
+        </p:spPr>
+        <p:txBody>
+          <a:bodyPr wrap="square" lIns="0" tIns="0" rIns="0" bIns="0" rtlCol="0" anchor="ctr"/>
+          <a:lstStyle/>
+          <a:p>
+            <a:pPr indent="0" marL="0">
+              <a:buNone/>
+            </a:pPr>
+            <a:r>
+              <a:rPr lang="en-US" sz="1100" b="1" spc="200" kern="0" dirty="0">
+                <a:solidFill>
+                  <a:srgbClr val="D9622B"/>
+                </a:solidFill>
+                <a:latin typeface="Calibri" pitchFamily="34" charset="0"/>
+                <a:ea typeface="Calibri" pitchFamily="34" charset="-122"/>
+                <a:cs typeface="Calibri" pitchFamily="34" charset="-120"/>
+              </a:rPr>
+              <a:t>MARKET CONTEXT — THE MOVE</a:t>
+            </a:r>
+            <a:endParaRPr lang="en-US" sz="1100" dirty="0"/>
+          </a:p>
+        </p:txBody>
+      </p:sp>
+      <p:sp>
+        <p:nvSpPr>
+          <p:cNvPr id="3" name="Text 1"/>
+          <p:cNvSpPr/>
+          <p:nvPr/>
+        </p:nvSpPr>
+        <p:spPr>
+          <a:xfrm>
+            <a:off x="548640" y="841248"/>
+            <a:ext cx="11094415" cy="685800"/>
+          </a:xfrm>
+          <a:prstGeom prst="rect">
+            <a:avLst/>
+          </a:prstGeom>
+          <a:noFill/>
+          <a:ln/>
+        </p:spPr>
+        <p:txBody>
+          <a:bodyPr wrap="square" lIns="0" tIns="0" rIns="0" bIns="0" rtlCol="0" anchor="ctr"/>
+          <a:lstStyle/>
+          <a:p>
+            <a:pPr algn="l" indent="0" marL="0">
+              <a:buNone/>
+            </a:pPr>
+            <a:r>
+              <a:rPr lang="en-US" sz="3000" b="1" dirty="0">
+                <a:solidFill>
+                  <a:srgbClr val="FFFFFF"/>
+                </a:solidFill>
+                <a:latin typeface="Cambria" pitchFamily="34" charset="0"/>
+                <a:ea typeface="Cambria" pitchFamily="34" charset="-122"/>
+                <a:cs typeface="Cambria" pitchFamily="34" charset="-120"/>
+              </a:rPr>
+              <a:t>RDSO's fresh-registration window is the priority claim for the coming year</a:t>
+            </a:r>
+            <a:endParaRPr lang="en-US" sz="3000" dirty="0"/>
+          </a:p>
+        </p:txBody>
+      </p:sp>
+      <p:sp>
+        <p:nvSpPr>
+          <p:cNvPr id="4" name="Shape 2"/>
+          <p:cNvSpPr/>
+          <p:nvPr/>
+        </p:nvSpPr>
+        <p:spPr>
+          <a:xfrm>
+            <a:off x="548640" y="1737360"/>
+            <a:ext cx="384048" cy="384048"/>
+          </a:xfrm>
+          <a:prstGeom prst="ellipse">
+            <a:avLst/>
+          </a:prstGeom>
+          <a:solidFill>
+            <a:srgbClr val="D9622B"/>
+          </a:solidFill>
+          <a:ln/>
+        </p:spPr>
+      </p:sp>
+      <p:sp>
+        <p:nvSpPr>
+          <p:cNvPr id="5" name="Text 3"/>
+          <p:cNvSpPr/>
+          <p:nvPr/>
+        </p:nvSpPr>
+        <p:spPr>
+          <a:xfrm>
+            <a:off x="548640" y="1737360"/>
+            <a:ext cx="384048" cy="384048"/>
+          </a:xfrm>
+          <a:prstGeom prst="rect">
+            <a:avLst/>
+          </a:prstGeom>
+          <a:noFill/>
+          <a:ln/>
+        </p:spPr>
+        <p:txBody>
+          <a:bodyPr wrap="square" lIns="0" tIns="0" rIns="0" bIns="0" rtlCol="0" anchor="ctr"/>
+          <a:lstStyle/>
+          <a:p>
+            <a:pPr algn="ctr" indent="0" marL="0">
+              <a:buNone/>
+            </a:pPr>
+            <a:r>
+              <a:rPr lang="en-US" sz="1092" b="1" dirty="0">
+                <a:solidFill>
+                  <a:srgbClr val="FFFFFF"/>
+                </a:solidFill>
+                <a:latin typeface="Calibri" pitchFamily="34" charset="0"/>
+                <a:ea typeface="Calibri" pitchFamily="34" charset="-122"/>
+                <a:cs typeface="Calibri" pitchFamily="34" charset="-120"/>
+              </a:rPr>
+              <a:t>1</a:t>
+            </a:r>
+            <a:endParaRPr lang="en-US" sz="1092" dirty="0"/>
+          </a:p>
+        </p:txBody>
+      </p:sp>
+      <p:sp>
+        <p:nvSpPr>
+          <p:cNvPr id="6" name="Text 4"/>
+          <p:cNvSpPr/>
+          <p:nvPr/>
+        </p:nvSpPr>
+        <p:spPr>
+          <a:xfrm>
+            <a:off x="1115568" y="1709928"/>
+            <a:ext cx="10527487" cy="365760"/>
+          </a:xfrm>
+          <a:prstGeom prst="rect">
+            <a:avLst/>
+          </a:prstGeom>
+          <a:noFill/>
+          <a:ln/>
+        </p:spPr>
+        <p:txBody>
+          <a:bodyPr wrap="square" lIns="0" tIns="0" rIns="0" bIns="0" rtlCol="0" anchor="ctr"/>
+          <a:lstStyle/>
+          <a:p>
+            <a:pPr indent="0" marL="0">
+              <a:buNone/>
+            </a:pPr>
+            <a:r>
+              <a:rPr lang="en-US" sz="1350" b="1" dirty="0">
+                <a:solidFill>
+                  <a:srgbClr val="FFFFFF"/>
+                </a:solidFill>
+                <a:latin typeface="Calibri" pitchFamily="34" charset="0"/>
+                <a:ea typeface="Calibri" pitchFamily="34" charset="-122"/>
+                <a:cs typeface="Calibri" pitchFamily="34" charset="-120"/>
+              </a:rPr>
+              <a:t>What's opening</a:t>
+            </a:r>
+            <a:endParaRPr lang="en-US" sz="1350" dirty="0"/>
+          </a:p>
+        </p:txBody>
+      </p:sp>
+      <p:sp>
+        <p:nvSpPr>
+          <p:cNvPr id="7" name="Text 5"/>
+          <p:cNvSpPr/>
+          <p:nvPr/>
+        </p:nvSpPr>
+        <p:spPr>
+          <a:xfrm>
+            <a:off x="1115568" y="2084832"/>
+            <a:ext cx="10527487" cy="713232"/>
+          </a:xfrm>
+          <a:prstGeom prst="rect">
+            <a:avLst/>
+          </a:prstGeom>
+          <a:noFill/>
+          <a:ln/>
+        </p:spPr>
+        <p:txBody>
+          <a:bodyPr wrap="square" lIns="0" tIns="0" rIns="0" bIns="0" rtlCol="0" anchor="ctr"/>
+          <a:lstStyle/>
+          <a:p>
+            <a:pPr indent="0" marL="0">
+              <a:lnSpc>
+                <a:spcPct val="115000"/>
+              </a:lnSpc>
+              <a:buNone/>
+            </a:pPr>
+            <a:r>
+              <a:rPr lang="en-US" sz="1000" dirty="0">
+                <a:solidFill>
+                  <a:srgbClr val="CBD3DC"/>
+                </a:solidFill>
+                <a:latin typeface="Calibri" pitchFamily="34" charset="0"/>
+                <a:ea typeface="Calibri" pitchFamily="34" charset="-122"/>
+                <a:cs typeface="Calibri" pitchFamily="34" charset="-120"/>
+              </a:rPr>
+              <a:t>RDSO has opened fresh registration for cast-steel side frames, bolsters, centre pivot assemblies and CASNUB bogies — a vendor base it had kept tight for years. Simplex's May 2026 approval is already guiding to ~₹50 Cr this year and over ₹100 Cr next.</a:t>
+            </a:r>
+            <a:endParaRPr lang="en-US" sz="1000" dirty="0"/>
+          </a:p>
+        </p:txBody>
+      </p:sp>
+      <p:sp>
+        <p:nvSpPr>
+          <p:cNvPr id="8" name="Shape 6"/>
+          <p:cNvSpPr/>
+          <p:nvPr/>
+        </p:nvSpPr>
+        <p:spPr>
+          <a:xfrm>
+            <a:off x="548640" y="2880360"/>
+            <a:ext cx="384048" cy="384048"/>
+          </a:xfrm>
+          <a:prstGeom prst="ellipse">
+            <a:avLst/>
+          </a:prstGeom>
+          <a:solidFill>
+            <a:srgbClr val="D9622B"/>
+          </a:solidFill>
+          <a:ln/>
+        </p:spPr>
+      </p:sp>
+      <p:sp>
+        <p:nvSpPr>
+          <p:cNvPr id="9" name="Text 7"/>
+          <p:cNvSpPr/>
+          <p:nvPr/>
+        </p:nvSpPr>
+        <p:spPr>
+          <a:xfrm>
+            <a:off x="548640" y="2880360"/>
+            <a:ext cx="384048" cy="384048"/>
+          </a:xfrm>
+          <a:prstGeom prst="rect">
+            <a:avLst/>
+          </a:prstGeom>
+          <a:noFill/>
+          <a:ln/>
+        </p:spPr>
+        <p:txBody>
+          <a:bodyPr wrap="square" lIns="0" tIns="0" rIns="0" bIns="0" rtlCol="0" anchor="ctr"/>
+          <a:lstStyle/>
+          <a:p>
+            <a:pPr algn="ctr" indent="0" marL="0">
+              <a:buNone/>
+            </a:pPr>
+            <a:r>
+              <a:rPr lang="en-US" sz="1092" b="1" dirty="0">
+                <a:solidFill>
+                  <a:srgbClr val="FFFFFF"/>
+                </a:solidFill>
+                <a:latin typeface="Calibri" pitchFamily="34" charset="0"/>
+                <a:ea typeface="Calibri" pitchFamily="34" charset="-122"/>
+                <a:cs typeface="Calibri" pitchFamily="34" charset="-120"/>
+              </a:rPr>
+              <a:t>2</a:t>
+            </a:r>
+            <a:endParaRPr lang="en-US" sz="1092" dirty="0"/>
+          </a:p>
+        </p:txBody>
+      </p:sp>
+      <p:sp>
+        <p:nvSpPr>
+          <p:cNvPr id="10" name="Text 8"/>
+          <p:cNvSpPr/>
+          <p:nvPr/>
+        </p:nvSpPr>
+        <p:spPr>
+          <a:xfrm>
+            <a:off x="1115568" y="2852928"/>
+            <a:ext cx="10527487" cy="365760"/>
+          </a:xfrm>
+          <a:prstGeom prst="rect">
+            <a:avLst/>
+          </a:prstGeom>
+          <a:noFill/>
+          <a:ln/>
+        </p:spPr>
+        <p:txBody>
+          <a:bodyPr wrap="square" lIns="0" tIns="0" rIns="0" bIns="0" rtlCol="0" anchor="ctr"/>
+          <a:lstStyle/>
+          <a:p>
+            <a:pPr indent="0" marL="0">
+              <a:buNone/>
+            </a:pPr>
+            <a:r>
+              <a:rPr lang="en-US" sz="1350" b="1" dirty="0">
+                <a:solidFill>
+                  <a:srgbClr val="FFFFFF"/>
+                </a:solidFill>
+                <a:latin typeface="Calibri" pitchFamily="34" charset="0"/>
+                <a:ea typeface="Calibri" pitchFamily="34" charset="-122"/>
+                <a:cs typeface="Calibri" pitchFamily="34" charset="-120"/>
+              </a:rPr>
+              <a:t>Why it fits Datre</a:t>
+            </a:r>
+            <a:endParaRPr lang="en-US" sz="1350" dirty="0"/>
+          </a:p>
+        </p:txBody>
+      </p:sp>
+      <p:sp>
+        <p:nvSpPr>
+          <p:cNvPr id="11" name="Text 9"/>
+          <p:cNvSpPr/>
+          <p:nvPr/>
+        </p:nvSpPr>
+        <p:spPr>
+          <a:xfrm>
+            <a:off x="1115568" y="3227832"/>
+            <a:ext cx="10527487" cy="713232"/>
+          </a:xfrm>
+          <a:prstGeom prst="rect">
+            <a:avLst/>
+          </a:prstGeom>
+          <a:noFill/>
+          <a:ln/>
+        </p:spPr>
+        <p:txBody>
+          <a:bodyPr wrap="square" lIns="0" tIns="0" rIns="0" bIns="0" rtlCol="0" anchor="ctr"/>
+          <a:lstStyle/>
+          <a:p>
+            <a:pPr indent="0" marL="0">
+              <a:lnSpc>
+                <a:spcPct val="115000"/>
+              </a:lnSpc>
+              <a:buNone/>
+            </a:pPr>
+            <a:r>
+              <a:rPr lang="en-US" sz="1000" dirty="0">
+                <a:solidFill>
+                  <a:srgbClr val="CBD3DC"/>
+                </a:solidFill>
+                <a:latin typeface="Calibri" pitchFamily="34" charset="0"/>
+                <a:ea typeface="Calibri" pitchFamily="34" charset="-122"/>
+                <a:cs typeface="Calibri" pitchFamily="34" charset="-120"/>
+              </a:rPr>
+              <a:t>Approval-gated demand is the one segment where a small foundry quotes a price rather than accepts one — the same logic behind Datre's existing RDSO 'A' position on AAR M-201 couplers and knuckles. Whether that qualification scope extends to these bogie components, or needs its own registration cycle, is unconfirmed and should be the first thing checked with the works team.</a:t>
+            </a:r>
+            <a:endParaRPr lang="en-US" sz="1000" dirty="0"/>
+          </a:p>
+        </p:txBody>
+      </p:sp>
+      <p:sp>
+        <p:nvSpPr>
+          <p:cNvPr id="12" name="Shape 10"/>
+          <p:cNvSpPr/>
+          <p:nvPr/>
+        </p:nvSpPr>
+        <p:spPr>
+          <a:xfrm>
+            <a:off x="548640" y="4023360"/>
+            <a:ext cx="384048" cy="384048"/>
+          </a:xfrm>
+          <a:prstGeom prst="ellipse">
+            <a:avLst/>
+          </a:prstGeom>
+          <a:solidFill>
+            <a:srgbClr val="D9622B"/>
+          </a:solidFill>
+          <a:ln/>
+        </p:spPr>
+      </p:sp>
+      <p:sp>
+        <p:nvSpPr>
+          <p:cNvPr id="13" name="Text 11"/>
+          <p:cNvSpPr/>
+          <p:nvPr/>
+        </p:nvSpPr>
+        <p:spPr>
+          <a:xfrm>
+            <a:off x="548640" y="4023360"/>
+            <a:ext cx="384048" cy="384048"/>
+          </a:xfrm>
+          <a:prstGeom prst="rect">
+            <a:avLst/>
+          </a:prstGeom>
+          <a:noFill/>
+          <a:ln/>
+        </p:spPr>
+        <p:txBody>
+          <a:bodyPr wrap="square" lIns="0" tIns="0" rIns="0" bIns="0" rtlCol="0" anchor="ctr"/>
+          <a:lstStyle/>
+          <a:p>
+            <a:pPr algn="ctr" indent="0" marL="0">
+              <a:buNone/>
+            </a:pPr>
+            <a:r>
+              <a:rPr lang="en-US" sz="1092" b="1" dirty="0">
+                <a:solidFill>
+                  <a:srgbClr val="FFFFFF"/>
+                </a:solidFill>
+                <a:latin typeface="Calibri" pitchFamily="34" charset="0"/>
+                <a:ea typeface="Calibri" pitchFamily="34" charset="-122"/>
+                <a:cs typeface="Calibri" pitchFamily="34" charset="-120"/>
+              </a:rPr>
+              <a:t>3</a:t>
+            </a:r>
+            <a:endParaRPr lang="en-US" sz="1092" dirty="0"/>
+          </a:p>
+        </p:txBody>
+      </p:sp>
+      <p:sp>
+        <p:nvSpPr>
+          <p:cNvPr id="14" name="Text 12"/>
+          <p:cNvSpPr/>
+          <p:nvPr/>
+        </p:nvSpPr>
+        <p:spPr>
+          <a:xfrm>
+            <a:off x="1115568" y="3995928"/>
+            <a:ext cx="10527487" cy="365760"/>
+          </a:xfrm>
+          <a:prstGeom prst="rect">
+            <a:avLst/>
+          </a:prstGeom>
+          <a:noFill/>
+          <a:ln/>
+        </p:spPr>
+        <p:txBody>
+          <a:bodyPr wrap="square" lIns="0" tIns="0" rIns="0" bIns="0" rtlCol="0" anchor="ctr"/>
+          <a:lstStyle/>
+          <a:p>
+            <a:pPr indent="0" marL="0">
+              <a:buNone/>
+            </a:pPr>
+            <a:r>
+              <a:rPr lang="en-US" sz="1350" b="1" dirty="0">
+                <a:solidFill>
+                  <a:srgbClr val="FFFFFF"/>
+                </a:solidFill>
+                <a:latin typeface="Calibri" pitchFamily="34" charset="0"/>
+                <a:ea typeface="Calibri" pitchFamily="34" charset="-122"/>
+                <a:cs typeface="Calibri" pitchFamily="34" charset="-120"/>
+              </a:rPr>
+              <a:t>The trade-off</a:t>
+            </a:r>
+            <a:endParaRPr lang="en-US" sz="1350" dirty="0"/>
+          </a:p>
+        </p:txBody>
+      </p:sp>
+      <p:sp>
+        <p:nvSpPr>
+          <p:cNvPr id="15" name="Text 13"/>
+          <p:cNvSpPr/>
+          <p:nvPr/>
+        </p:nvSpPr>
+        <p:spPr>
+          <a:xfrm>
+            <a:off x="1115568" y="4370832"/>
+            <a:ext cx="10527487" cy="713232"/>
+          </a:xfrm>
+          <a:prstGeom prst="rect">
+            <a:avLst/>
+          </a:prstGeom>
+          <a:noFill/>
+          <a:ln/>
+        </p:spPr>
+        <p:txBody>
+          <a:bodyPr wrap="square" lIns="0" tIns="0" rIns="0" bIns="0" rtlCol="0" anchor="ctr"/>
+          <a:lstStyle/>
+          <a:p>
+            <a:pPr indent="0" marL="0">
+              <a:lnSpc>
+                <a:spcPct val="115000"/>
+              </a:lnSpc>
+              <a:buNone/>
+            </a:pPr>
+            <a:r>
+              <a:rPr lang="en-US" sz="1000" dirty="0">
+                <a:solidFill>
+                  <a:srgbClr val="CBD3DC"/>
+                </a:solidFill>
+                <a:latin typeface="Calibri" pitchFamily="34" charset="0"/>
+                <a:ea typeface="Calibri" pitchFamily="34" charset="-122"/>
+                <a:cs typeface="Calibri" pitchFamily="34" charset="-120"/>
+              </a:rPr>
+              <a:t>Railway approvals eat prototype cost and management time, and Railways buys in lumps and pays slowly. This cannot become the leg the business stands on — pursued carelessly, it would sharpen, not solve, the Tega/Escorts concentration risk already on the SWOT (slide 26).</a:t>
+            </a:r>
+            <a:endParaRPr lang="en-US" sz="1000" dirty="0"/>
+          </a:p>
+        </p:txBody>
+      </p:sp>
+      <p:sp>
+        <p:nvSpPr>
+          <p:cNvPr id="16" name="Shape 14"/>
+          <p:cNvSpPr/>
+          <p:nvPr/>
+        </p:nvSpPr>
+        <p:spPr>
+          <a:xfrm>
+            <a:off x="548640" y="5166360"/>
+            <a:ext cx="11094415" cy="868680"/>
+          </a:xfrm>
+          <a:prstGeom prst="roundRect">
+            <a:avLst>
+              <a:gd name="adj" fmla="val 8421"/>
+            </a:avLst>
+          </a:prstGeom>
+          <a:solidFill>
+            <a:srgbClr val="262B34"/>
+          </a:solidFill>
+          <a:ln/>
+        </p:spPr>
+      </p:sp>
+      <p:sp>
+        <p:nvSpPr>
+          <p:cNvPr id="17" name="Text 15"/>
+          <p:cNvSpPr/>
+          <p:nvPr/>
+        </p:nvSpPr>
+        <p:spPr>
+          <a:xfrm>
+            <a:off x="822960" y="5303520"/>
+            <a:ext cx="10545775" cy="274320"/>
+          </a:xfrm>
+          <a:prstGeom prst="rect">
+            <a:avLst/>
+          </a:prstGeom>
+          <a:noFill/>
+          <a:ln/>
+        </p:spPr>
+        <p:txBody>
+          <a:bodyPr wrap="square" lIns="0" tIns="0" rIns="0" bIns="0" rtlCol="0" anchor="ctr"/>
+          <a:lstStyle/>
+          <a:p>
+            <a:pPr indent="0" marL="0">
+              <a:buNone/>
+            </a:pPr>
+            <a:r>
+              <a:rPr lang="en-US" sz="1000" b="1" spc="100" kern="0" dirty="0">
+                <a:solidFill>
+                  <a:srgbClr val="E8B84B"/>
+                </a:solidFill>
+                <a:latin typeface="Calibri" pitchFamily="34" charset="0"/>
+                <a:ea typeface="Calibri" pitchFamily="34" charset="-122"/>
+                <a:cs typeface="Calibri" pitchFamily="34" charset="-120"/>
+              </a:rPr>
+              <a:t>RECOMMENDATION</a:t>
+            </a:r>
+            <a:endParaRPr lang="en-US" sz="1000" dirty="0"/>
+          </a:p>
+        </p:txBody>
+      </p:sp>
+      <p:sp>
+        <p:nvSpPr>
+          <p:cNvPr id="18" name="Text 16"/>
+          <p:cNvSpPr/>
+          <p:nvPr/>
+        </p:nvSpPr>
+        <p:spPr>
+          <a:xfrm>
+            <a:off x="822960" y="5577840"/>
+            <a:ext cx="10545775" cy="411480"/>
+          </a:xfrm>
+          <a:prstGeom prst="rect">
+            <a:avLst/>
+          </a:prstGeom>
+          <a:noFill/>
+          <a:ln/>
+        </p:spPr>
+        <p:txBody>
+          <a:bodyPr wrap="square" lIns="0" tIns="0" rIns="0" bIns="0" rtlCol="0" anchor="ctr"/>
+          <a:lstStyle/>
+          <a:p>
+            <a:pPr indent="0" marL="0">
+              <a:lnSpc>
+                <a:spcPct val="110000"/>
+              </a:lnSpc>
+              <a:buNone/>
+            </a:pPr>
+            <a:r>
+              <a:rPr lang="en-US" sz="1050" dirty="0">
+                <a:solidFill>
+                  <a:srgbClr val="FFFFFF"/>
+                </a:solidFill>
+                <a:latin typeface="Calibri" pitchFamily="34" charset="0"/>
+                <a:ea typeface="Calibri" pitchFamily="34" charset="-122"/>
+                <a:cs typeface="Calibri" pitchFamily="34" charset="-120"/>
+              </a:rPr>
+              <a:t>Treat the fresh-registration window as this year's priority claim, sized and resourced deliberately — not as a substitute for customer diversification.</a:t>
+            </a:r>
+            <a:endParaRPr lang="en-US" sz="1050" dirty="0"/>
+          </a:p>
+        </p:txBody>
+      </p:sp>
+      <p:sp>
+        <p:nvSpPr>
+          <p:cNvPr id="19" name="Text 17"/>
+          <p:cNvSpPr/>
+          <p:nvPr/>
+        </p:nvSpPr>
+        <p:spPr>
+          <a:xfrm>
+            <a:off x="548640" y="6172200"/>
+            <a:ext cx="11094415" cy="292608"/>
+          </a:xfrm>
+          <a:prstGeom prst="rect">
+            <a:avLst/>
+          </a:prstGeom>
+          <a:noFill/>
+          <a:ln/>
+        </p:spPr>
+        <p:txBody>
+          <a:bodyPr wrap="square" lIns="0" tIns="0" rIns="0" bIns="0" rtlCol="0" anchor="ctr"/>
+          <a:lstStyle/>
+          <a:p>
+            <a:pPr indent="0" marL="0">
+              <a:lnSpc>
+                <a:spcPct val="105000"/>
+              </a:lnSpc>
+              <a:buNone/>
+            </a:pPr>
+            <a:r>
+              <a:rPr lang="en-US" sz="800" i="1" dirty="0">
+                <a:solidFill>
+                  <a:srgbClr val="9AA2AD"/>
+                </a:solidFill>
+                <a:latin typeface="Calibri" pitchFamily="34" charset="0"/>
+                <a:ea typeface="Calibri" pitchFamily="34" charset="-122"/>
+                <a:cs typeface="Calibri" pitchFamily="34" charset="-120"/>
+              </a:rPr>
+              <a:t>RDSO registration status and Simplex's guidance are from an external industry briefing, unverified against Drive. Confirm actual scope-match to Datre's qualifications before committing prototype spend.</a:t>
+            </a:r>
+            <a:endParaRPr lang="en-US" sz="800" dirty="0"/>
+          </a:p>
+        </p:txBody>
+      </p:sp>
+      <p:sp>
+        <p:nvSpPr>
+          <p:cNvPr id="20" name="Text 18"/>
+          <p:cNvSpPr/>
+          <p:nvPr/>
+        </p:nvSpPr>
+        <p:spPr>
+          <a:xfrm>
+            <a:off x="548640" y="6473952"/>
+            <a:ext cx="11094415" cy="274320"/>
+          </a:xfrm>
+          <a:prstGeom prst="rect">
+            <a:avLst/>
+          </a:prstGeom>
+          <a:noFill/>
+          <a:ln/>
+        </p:spPr>
+        <p:txBody>
+          <a:bodyPr wrap="square" lIns="0" tIns="0" rIns="0" bIns="0" rtlCol="0" anchor="ctr"/>
+          <a:lstStyle/>
+          <a:p>
+            <a:pPr algn="l" indent="0" marL="0">
+              <a:buNone/>
+            </a:pPr>
+            <a:r>
+              <a:rPr lang="en-US" sz="800" dirty="0">
+                <a:solidFill>
+                  <a:srgbClr val="8B93A0"/>
+                </a:solidFill>
+                <a:latin typeface="Calibri" pitchFamily="34" charset="0"/>
+                <a:ea typeface="Calibri" pitchFamily="34" charset="-122"/>
+                <a:cs typeface="Calibri" pitchFamily="34" charset="-120"/>
+              </a:rPr>
+              <a:t>DATRE CORPORATION LIMITED  |  CONFIDENTIAL — PREPARED FOR INVESTOR DISCUSSION</a:t>
+            </a:r>
+            <a:endParaRPr lang="en-US" sz="800" dirty="0"/>
+          </a:p>
+        </p:txBody>
+      </p:sp>
+      <p:sp>
+        <p:nvSpPr>
+          <p:cNvPr id="21" name="Text 19"/>
+          <p:cNvSpPr/>
+          <p:nvPr/>
+        </p:nvSpPr>
+        <p:spPr>
+          <a:xfrm>
+            <a:off x="11277295" y="6473952"/>
+            <a:ext cx="457200" cy="274320"/>
+          </a:xfrm>
+          <a:prstGeom prst="rect">
+            <a:avLst/>
+          </a:prstGeom>
+          <a:noFill/>
+          <a:ln/>
+        </p:spPr>
+        <p:txBody>
+          <a:bodyPr wrap="square" lIns="0" tIns="0" rIns="0" bIns="0" rtlCol="0" anchor="ctr"/>
+          <a:lstStyle/>
+          <a:p>
+            <a:pPr algn="r" indent="0" marL="0">
+              <a:buNone/>
+            </a:pPr>
+            <a:r>
+              <a:rPr lang="en-US" sz="800" dirty="0">
+                <a:solidFill>
+                  <a:srgbClr val="8B93A0"/>
+                </a:solidFill>
+                <a:latin typeface="Calibri" pitchFamily="34" charset="0"/>
+                <a:ea typeface="Calibri" pitchFamily="34" charset="-122"/>
+                <a:cs typeface="Calibri" pitchFamily="34" charset="-120"/>
+              </a:rPr>
+              <a:t>25</a:t>
+            </a:r>
+            <a:endParaRPr lang="en-US" sz="800" dirty="0"/>
+          </a:p>
+        </p:txBody>
+      </p:sp>
+    </p:spTree>
+  </p:cSld>
+  <p:clrMapOvr>
+    <a:masterClrMapping/>
+  </p:clrMapOvr>
+</p:sld>
+</file>
+
+<file path=ppt/slides/slide26.xml><?xml version="1.0" encoding="utf-8"?>
+<p:sld xmlns:a="http://schemas.openxmlformats.org/drawingml/2006/main" xmlns:r="http://schemas.openxmlformats.org/officeDocument/2006/relationships" xmlns:p="http://schemas.openxmlformats.org/presentationml/2006/main">
+  <p:cSld name="Slide 26">
     <p:bg>
       <p:bgPr>
         <a:solidFill>
@@ -22313,7 +23134,7 @@
                 <a:ea typeface="Calibri" pitchFamily="34" charset="-122"/>
                 <a:cs typeface="Calibri" pitchFamily="34" charset="-120"/>
               </a:rPr>
-              <a:t>VALUATION — THE TWO LENSES</a:t>
+              <a:t>CRITICAL ANALYSIS — SUMMARY</a:t>
             </a:r>
             <a:endParaRPr lang="en-US" sz="1100" dirty="0"/>
           </a:p>
@@ -22352,327 +23173,205 @@
                 <a:ea typeface="Cambria" pitchFamily="34" charset="-122"/>
                 <a:cs typeface="Cambria" pitchFamily="34" charset="-120"/>
               </a:rPr>
-              <a:t>Two ways to price this business — and they disagree by 3-10x</a:t>
+              <a:t>SWOT: the honest scorecard</a:t>
             </a:r>
             <a:endParaRPr lang="en-US" sz="3000" dirty="0"/>
           </a:p>
         </p:txBody>
       </p:sp>
-      <p:graphicFrame>
-        <p:nvGraphicFramePr>
-          <p:cNvPr id="4" name="Chart 0" descr=""/>
-          <p:cNvGraphicFramePr/>
-          <p:nvPr/>
-        </p:nvGraphicFramePr>
-        <p:xfrm>
-          <a:off x="548640" y="1737360"/>
-          <a:ext cx="6400800" cy="3200400"/>
-        </p:xfrm>
-        <a:graphic xmlns:a="http://schemas.openxmlformats.org/drawingml/2006/main">
-          <a:graphicData uri="http://schemas.openxmlformats.org/drawingml/2006/chart">
-            <c:chart xmlns:c="http://schemas.openxmlformats.org/drawingml/2006/chart" r:id="rId1"/>
-          </a:graphicData>
-        </a:graphic>
-      </p:graphicFrame>
-      <p:sp>
-        <p:nvSpPr>
-          <p:cNvPr id="5" name="Text 2"/>
-          <p:cNvSpPr/>
-          <p:nvPr/>
-        </p:nvSpPr>
-        <p:spPr>
-          <a:xfrm>
-            <a:off x="548640" y="5074920"/>
-            <a:ext cx="6400800" cy="594360"/>
-          </a:xfrm>
-          <a:prstGeom prst="rect">
-            <a:avLst/>
-          </a:prstGeom>
-          <a:noFill/>
-          <a:ln/>
-        </p:spPr>
-        <p:txBody>
-          <a:bodyPr wrap="square" lIns="0" tIns="0" rIns="0" bIns="0" rtlCol="0" anchor="ctr"/>
-          <a:lstStyle/>
-          <a:p>
-            <a:pPr indent="0" marL="0">
-              <a:lnSpc>
-                <a:spcPct val="110000"/>
-              </a:lnSpc>
-              <a:buNone/>
-            </a:pPr>
-            <a:r>
-              <a:rPr lang="en-US" sz="850" i="1" dirty="0">
-                <a:solidFill>
-                  <a:srgbClr val="6B7684"/>
-                </a:solidFill>
-                <a:latin typeface="Calibri" pitchFamily="34" charset="0"/>
-                <a:ea typeface="Calibri" pitchFamily="34" charset="-122"/>
-                <a:cs typeface="Calibri" pitchFamily="34" charset="-120"/>
-              </a:rPr>
-              <a:t>Grey bars: today's book value of the hard assets (internal depreciation register, FY23-24 close). Orange bars: illustrative income-basis value, capitalizing the 3-year average audited PAT (₹1.43 Cr, FY23-25) at a range of multiples — no verified comparable transaction exists for Indian niche-foundry M&amp;A; treat as sensitivity, not appraisal.</a:t>
-            </a:r>
-            <a:endParaRPr lang="en-US" sz="850" dirty="0"/>
-          </a:p>
-        </p:txBody>
-      </p:sp>
-      <p:sp>
-        <p:nvSpPr>
-          <p:cNvPr id="6" name="Text 3"/>
-          <p:cNvSpPr/>
-          <p:nvPr/>
-        </p:nvSpPr>
-        <p:spPr>
-          <a:xfrm>
-            <a:off x="7223760" y="1737360"/>
-            <a:ext cx="4419295" cy="411480"/>
-          </a:xfrm>
-          <a:prstGeom prst="rect">
-            <a:avLst/>
-          </a:prstGeom>
-          <a:noFill/>
-          <a:ln/>
-        </p:spPr>
-        <p:txBody>
-          <a:bodyPr wrap="square" lIns="0" tIns="0" rIns="0" bIns="0" rtlCol="0" anchor="ctr"/>
-          <a:lstStyle/>
-          <a:p>
-            <a:pPr indent="0" marL="0">
-              <a:buNone/>
-            </a:pPr>
-            <a:r>
-              <a:rPr lang="en-US" sz="2100" b="1" dirty="0">
-                <a:solidFill>
-                  <a:srgbClr val="1C1F26"/>
-                </a:solidFill>
-                <a:latin typeface="Cambria" pitchFamily="34" charset="0"/>
-                <a:ea typeface="Cambria" pitchFamily="34" charset="-122"/>
-                <a:cs typeface="Cambria" pitchFamily="34" charset="-120"/>
-              </a:rPr>
-              <a:t>~90%</a:t>
-            </a:r>
-            <a:endParaRPr lang="en-US" sz="2100" dirty="0"/>
-          </a:p>
-        </p:txBody>
-      </p:sp>
-      <p:sp>
-        <p:nvSpPr>
-          <p:cNvPr id="7" name="Text 4"/>
-          <p:cNvSpPr/>
-          <p:nvPr/>
-        </p:nvSpPr>
-        <p:spPr>
-          <a:xfrm>
-            <a:off x="7223760" y="2139696"/>
-            <a:ext cx="4419295" cy="685800"/>
-          </a:xfrm>
-          <a:prstGeom prst="rect">
-            <a:avLst/>
-          </a:prstGeom>
-          <a:noFill/>
-          <a:ln/>
-        </p:spPr>
-        <p:txBody>
-          <a:bodyPr wrap="square" lIns="0" tIns="0" rIns="0" bIns="0" rtlCol="0" anchor="ctr"/>
-          <a:lstStyle/>
-          <a:p>
-            <a:pPr indent="0" marL="0">
-              <a:lnSpc>
-                <a:spcPct val="115000"/>
-              </a:lnSpc>
-              <a:buNone/>
-            </a:pPr>
-            <a:r>
-              <a:rPr lang="en-US" sz="950" dirty="0">
-                <a:solidFill>
-                  <a:srgbClr val="3A4553"/>
-                </a:solidFill>
-                <a:latin typeface="Calibri" pitchFamily="34" charset="0"/>
-                <a:ea typeface="Calibri" pitchFamily="34" charset="-122"/>
-                <a:cs typeface="Calibri" pitchFamily="34" charset="-120"/>
-              </a:rPr>
-              <a:t>Of Plant &amp; Machinery's ~₹17.6 Cr original cost has already been depreciated — book value is now ~₹1.8 Cr</a:t>
-            </a:r>
-            <a:endParaRPr lang="en-US" sz="950" dirty="0"/>
-          </a:p>
-        </p:txBody>
-      </p:sp>
-      <p:sp>
-        <p:nvSpPr>
-          <p:cNvPr id="8" name="Text 5"/>
-          <p:cNvSpPr/>
-          <p:nvPr/>
-        </p:nvSpPr>
-        <p:spPr>
-          <a:xfrm>
-            <a:off x="7223760" y="2907792"/>
-            <a:ext cx="4419295" cy="411480"/>
-          </a:xfrm>
-          <a:prstGeom prst="rect">
-            <a:avLst/>
-          </a:prstGeom>
-          <a:noFill/>
-          <a:ln/>
-        </p:spPr>
-        <p:txBody>
-          <a:bodyPr wrap="square" lIns="0" tIns="0" rIns="0" bIns="0" rtlCol="0" anchor="ctr"/>
-          <a:lstStyle/>
-          <a:p>
-            <a:pPr indent="0" marL="0">
-              <a:buNone/>
-            </a:pPr>
-            <a:r>
-              <a:rPr lang="en-US" sz="2100" b="1" dirty="0">
-                <a:solidFill>
-                  <a:srgbClr val="1C1F26"/>
-                </a:solidFill>
-                <a:latin typeface="Cambria" pitchFamily="34" charset="0"/>
-                <a:ea typeface="Cambria" pitchFamily="34" charset="-122"/>
-                <a:cs typeface="Cambria" pitchFamily="34" charset="-120"/>
-              </a:rPr>
-              <a:t>-₹1.54 Cr</a:t>
-            </a:r>
-            <a:endParaRPr lang="en-US" sz="2100" dirty="0"/>
-          </a:p>
-        </p:txBody>
-      </p:sp>
-      <p:sp>
-        <p:nvSpPr>
-          <p:cNvPr id="9" name="Text 6"/>
-          <p:cNvSpPr/>
-          <p:nvPr/>
-        </p:nvSpPr>
-        <p:spPr>
-          <a:xfrm>
-            <a:off x="7223760" y="3310128"/>
-            <a:ext cx="4419295" cy="685800"/>
-          </a:xfrm>
-          <a:prstGeom prst="rect">
-            <a:avLst/>
-          </a:prstGeom>
-          <a:noFill/>
-          <a:ln/>
-        </p:spPr>
-        <p:txBody>
-          <a:bodyPr wrap="square" lIns="0" tIns="0" rIns="0" bIns="0" rtlCol="0" anchor="ctr"/>
-          <a:lstStyle/>
-          <a:p>
-            <a:pPr indent="0" marL="0">
-              <a:lnSpc>
-                <a:spcPct val="115000"/>
-              </a:lnSpc>
-              <a:buNone/>
-            </a:pPr>
-            <a:r>
-              <a:rPr lang="en-US" sz="950" dirty="0">
-                <a:solidFill>
-                  <a:srgbClr val="3A4553"/>
-                </a:solidFill>
-                <a:latin typeface="Calibri" pitchFamily="34" charset="0"/>
-                <a:ea typeface="Calibri" pitchFamily="34" charset="-122"/>
-                <a:cs typeface="Calibri" pitchFamily="34" charset="-120"/>
-              </a:rPr>
-              <a:t>FY25 audited net worth — a literal net-asset-value approach prices the whole enterprise at zero or below</a:t>
-            </a:r>
-            <a:endParaRPr lang="en-US" sz="950" dirty="0"/>
-          </a:p>
-        </p:txBody>
-      </p:sp>
-      <p:sp>
-        <p:nvSpPr>
-          <p:cNvPr id="10" name="Text 7"/>
-          <p:cNvSpPr/>
-          <p:nvPr/>
-        </p:nvSpPr>
-        <p:spPr>
-          <a:xfrm>
-            <a:off x="7223760" y="4078224"/>
-            <a:ext cx="4419295" cy="411480"/>
-          </a:xfrm>
-          <a:prstGeom prst="rect">
-            <a:avLst/>
-          </a:prstGeom>
-          <a:noFill/>
-          <a:ln/>
-        </p:spPr>
-        <p:txBody>
-          <a:bodyPr wrap="square" lIns="0" tIns="0" rIns="0" bIns="0" rtlCol="0" anchor="ctr"/>
-          <a:lstStyle/>
-          <a:p>
-            <a:pPr indent="0" marL="0">
-              <a:buNone/>
-            </a:pPr>
-            <a:r>
-              <a:rPr lang="en-US" sz="2100" b="1" dirty="0">
-                <a:solidFill>
-                  <a:srgbClr val="1C1F26"/>
-                </a:solidFill>
-                <a:latin typeface="Cambria" pitchFamily="34" charset="0"/>
-                <a:ea typeface="Cambria" pitchFamily="34" charset="-122"/>
-                <a:cs typeface="Cambria" pitchFamily="34" charset="-120"/>
-              </a:rPr>
-              <a:t>3 yrs</a:t>
-            </a:r>
-            <a:endParaRPr lang="en-US" sz="2100" dirty="0"/>
-          </a:p>
-        </p:txBody>
-      </p:sp>
-      <p:sp>
-        <p:nvSpPr>
-          <p:cNvPr id="11" name="Text 8"/>
-          <p:cNvSpPr/>
-          <p:nvPr/>
-        </p:nvSpPr>
-        <p:spPr>
-          <a:xfrm>
-            <a:off x="7223760" y="4480560"/>
-            <a:ext cx="4419295" cy="685800"/>
-          </a:xfrm>
-          <a:prstGeom prst="rect">
-            <a:avLst/>
-          </a:prstGeom>
-          <a:noFill/>
-          <a:ln/>
-        </p:spPr>
-        <p:txBody>
-          <a:bodyPr wrap="square" lIns="0" tIns="0" rIns="0" bIns="0" rtlCol="0" anchor="ctr"/>
-          <a:lstStyle/>
-          <a:p>
-            <a:pPr indent="0" marL="0">
-              <a:lnSpc>
-                <a:spcPct val="115000"/>
-              </a:lnSpc>
-              <a:buNone/>
-            </a:pPr>
-            <a:r>
-              <a:rPr lang="en-US" sz="950" dirty="0">
-                <a:solidFill>
-                  <a:srgbClr val="3A4553"/>
-                </a:solidFill>
-                <a:latin typeface="Calibri" pitchFamily="34" charset="0"/>
-                <a:ea typeface="Calibri" pitchFamily="34" charset="-122"/>
-                <a:cs typeface="Calibri" pitchFamily="34" charset="-120"/>
-              </a:rPr>
-              <a:t>Straight years of real audited profit (FY23-25) this same balance sheet has been earning</a:t>
-            </a:r>
-            <a:endParaRPr lang="en-US" sz="950" dirty="0"/>
-          </a:p>
-        </p:txBody>
-      </p:sp>
-      <p:sp>
-        <p:nvSpPr>
-          <p:cNvPr id="12" name="Shape 9"/>
-          <p:cNvSpPr/>
-          <p:nvPr/>
-        </p:nvSpPr>
-        <p:spPr>
-          <a:xfrm>
-            <a:off x="548640" y="5669280"/>
-            <a:ext cx="11094415" cy="777240"/>
+      <p:sp>
+        <p:nvSpPr>
+          <p:cNvPr id="4" name="Shape 2"/>
+          <p:cNvSpPr/>
+          <p:nvPr/>
+        </p:nvSpPr>
+        <p:spPr>
+          <a:xfrm>
+            <a:off x="548640" y="1737360"/>
+            <a:ext cx="5387188" cy="2148840"/>
           </a:xfrm>
           <a:prstGeom prst="roundRect">
             <a:avLst>
-              <a:gd name="adj" fmla="val 9412"/>
+              <a:gd name="adj" fmla="val 3404"/>
+            </a:avLst>
+          </a:prstGeom>
+          <a:solidFill>
+            <a:srgbClr val="EDF5EF"/>
+          </a:solidFill>
+          <a:ln/>
+        </p:spPr>
+      </p:sp>
+      <p:sp>
+        <p:nvSpPr>
+          <p:cNvPr id="5" name="Text 3"/>
+          <p:cNvSpPr/>
+          <p:nvPr/>
+        </p:nvSpPr>
+        <p:spPr>
+          <a:xfrm>
+            <a:off x="804672" y="1901952"/>
+            <a:ext cx="4875124" cy="274320"/>
+          </a:xfrm>
+          <a:prstGeom prst="rect">
+            <a:avLst/>
+          </a:prstGeom>
+          <a:noFill/>
+          <a:ln/>
+        </p:spPr>
+        <p:txBody>
+          <a:bodyPr wrap="square" lIns="0" tIns="0" rIns="0" bIns="0" rtlCol="0" anchor="ctr"/>
+          <a:lstStyle/>
+          <a:p>
+            <a:pPr indent="0" marL="0">
+              <a:buNone/>
+            </a:pPr>
+            <a:r>
+              <a:rPr lang="en-US" sz="1150" b="1" spc="150" kern="0" dirty="0">
+                <a:solidFill>
+                  <a:srgbClr val="3F8F5F"/>
+                </a:solidFill>
+                <a:latin typeface="Calibri" pitchFamily="34" charset="0"/>
+                <a:ea typeface="Calibri" pitchFamily="34" charset="-122"/>
+                <a:cs typeface="Calibri" pitchFamily="34" charset="-120"/>
+              </a:rPr>
+              <a:t>STRENGTHS</a:t>
+            </a:r>
+            <a:endParaRPr lang="en-US" sz="1150" dirty="0"/>
+          </a:p>
+        </p:txBody>
+      </p:sp>
+      <p:sp>
+        <p:nvSpPr>
+          <p:cNvPr id="6" name="Text 4"/>
+          <p:cNvSpPr/>
+          <p:nvPr/>
+        </p:nvSpPr>
+        <p:spPr>
+          <a:xfrm>
+            <a:off x="804672" y="2212848"/>
+            <a:ext cx="4875124" cy="1554480"/>
+          </a:xfrm>
+          <a:prstGeom prst="rect">
+            <a:avLst/>
+          </a:prstGeom>
+          <a:noFill/>
+          <a:ln/>
+        </p:spPr>
+        <p:txBody>
+          <a:bodyPr wrap="square" lIns="0" tIns="0" rIns="0" bIns="0" rtlCol="0" anchor="ctr"/>
+          <a:lstStyle/>
+          <a:p>
+            <a:pPr marL="342900" indent="-342900">
+              <a:lnSpc>
+                <a:spcPct val="105000"/>
+              </a:lnSpc>
+              <a:spcAft>
+                <a:spcPts val="500"/>
+              </a:spcAft>
+              <a:buSzPct val="100000"/>
+              <a:buChar char="•"/>
+            </a:pPr>
+            <a:r>
+              <a:rPr lang="en-US" sz="960" dirty="0">
+                <a:solidFill>
+                  <a:srgbClr val="1C1F26"/>
+                </a:solidFill>
+                <a:latin typeface="Calibri" pitchFamily="34" charset="0"/>
+                <a:ea typeface="Calibri" pitchFamily="34" charset="-122"/>
+                <a:cs typeface="Calibri" pitchFamily="34" charset="-120"/>
+              </a:rPr>
+              <a:t>Utilization ~55%→~81% (2018-2025) on the same aging plant</a:t>
+            </a:r>
+            <a:endParaRPr lang="en-US" sz="960" dirty="0"/>
+          </a:p>
+          <a:p>
+            <a:pPr marL="342900" indent="-342900">
+              <a:lnSpc>
+                <a:spcPct val="105000"/>
+              </a:lnSpc>
+              <a:spcAft>
+                <a:spcPts val="500"/>
+              </a:spcAft>
+              <a:buSzPct val="100000"/>
+              <a:buChar char="•"/>
+            </a:pPr>
+            <a:r>
+              <a:rPr lang="en-US" sz="960" dirty="0">
+                <a:solidFill>
+                  <a:srgbClr val="1C1F26"/>
+                </a:solidFill>
+                <a:latin typeface="Calibri" pitchFamily="34" charset="0"/>
+                <a:ea typeface="Calibri" pitchFamily="34" charset="-122"/>
+                <a:cs typeface="Calibri" pitchFamily="34" charset="-120"/>
+              </a:rPr>
+              <a:t>Defensible heat-treatment IP moat</a:t>
+            </a:r>
+            <a:endParaRPr lang="en-US" sz="960" dirty="0"/>
+          </a:p>
+          <a:p>
+            <a:pPr marL="342900" indent="-342900">
+              <a:lnSpc>
+                <a:spcPct val="105000"/>
+              </a:lnSpc>
+              <a:spcAft>
+                <a:spcPts val="500"/>
+              </a:spcAft>
+              <a:buSzPct val="100000"/>
+              <a:buChar char="•"/>
+            </a:pPr>
+            <a:r>
+              <a:rPr lang="en-US" sz="960" dirty="0">
+                <a:solidFill>
+                  <a:srgbClr val="1C1F26"/>
+                </a:solidFill>
+                <a:latin typeface="Calibri" pitchFamily="34" charset="0"/>
+                <a:ea typeface="Calibri" pitchFamily="34" charset="-122"/>
+                <a:cs typeface="Calibri" pitchFamily="34" charset="-120"/>
+              </a:rPr>
+              <a:t>Tier-1 OEM integration incl. Komatsu-qualified</a:t>
+            </a:r>
+            <a:endParaRPr lang="en-US" sz="960" dirty="0"/>
+          </a:p>
+          <a:p>
+            <a:pPr marL="342900" indent="-342900">
+              <a:lnSpc>
+                <a:spcPct val="105000"/>
+              </a:lnSpc>
+              <a:spcAft>
+                <a:spcPts val="500"/>
+              </a:spcAft>
+              <a:buSzPct val="100000"/>
+              <a:buChar char="•"/>
+            </a:pPr>
+            <a:r>
+              <a:rPr lang="en-US" sz="960" dirty="0">
+                <a:solidFill>
+                  <a:srgbClr val="1C1F26"/>
+                </a:solidFill>
+                <a:latin typeface="Calibri" pitchFamily="34" charset="0"/>
+                <a:ea typeface="Calibri" pitchFamily="34" charset="-122"/>
+                <a:cs typeface="Calibri" pitchFamily="34" charset="-120"/>
+              </a:rPr>
+              <a:t>Operationally debt-free; ISO 9001:2015 / RDSO 'A' / ZED Gold</a:t>
+            </a:r>
+            <a:endParaRPr lang="en-US" sz="960" dirty="0"/>
+          </a:p>
+        </p:txBody>
+      </p:sp>
+      <p:sp>
+        <p:nvSpPr>
+          <p:cNvPr id="7" name="Shape 5"/>
+          <p:cNvSpPr/>
+          <p:nvPr/>
+        </p:nvSpPr>
+        <p:spPr>
+          <a:xfrm>
+            <a:off x="6255868" y="1737360"/>
+            <a:ext cx="5387188" cy="2148840"/>
+          </a:xfrm>
+          <a:prstGeom prst="roundRect">
+            <a:avLst>
+              <a:gd name="adj" fmla="val 3404"/>
             </a:avLst>
           </a:prstGeom>
           <a:solidFill>
@@ -22683,14 +23382,14 @@
       </p:sp>
       <p:sp>
         <p:nvSpPr>
-          <p:cNvPr id="13" name="Text 10"/>
-          <p:cNvSpPr/>
-          <p:nvPr/>
-        </p:nvSpPr>
-        <p:spPr>
-          <a:xfrm>
-            <a:off x="777240" y="5669280"/>
-            <a:ext cx="10637215" cy="777240"/>
+          <p:cNvPr id="8" name="Text 6"/>
+          <p:cNvSpPr/>
+          <p:nvPr/>
+        </p:nvSpPr>
+        <p:spPr>
+          <a:xfrm>
+            <a:off x="6511900" y="1901952"/>
+            <a:ext cx="4875124" cy="274320"/>
           </a:xfrm>
           <a:prstGeom prst="rect">
             <a:avLst/>
@@ -22703,29 +23402,502 @@
           <a:lstStyle/>
           <a:p>
             <a:pPr indent="0" marL="0">
+              <a:buNone/>
+            </a:pPr>
+            <a:r>
+              <a:rPr lang="en-US" sz="1150" b="1" spc="150" kern="0" dirty="0">
+                <a:solidFill>
+                  <a:srgbClr val="B8453F"/>
+                </a:solidFill>
+                <a:latin typeface="Calibri" pitchFamily="34" charset="0"/>
+                <a:ea typeface="Calibri" pitchFamily="34" charset="-122"/>
+                <a:cs typeface="Calibri" pitchFamily="34" charset="-120"/>
+              </a:rPr>
+              <a:t>WEAKNESSES</a:t>
+            </a:r>
+            <a:endParaRPr lang="en-US" sz="1150" dirty="0"/>
+          </a:p>
+        </p:txBody>
+      </p:sp>
+      <p:sp>
+        <p:nvSpPr>
+          <p:cNvPr id="9" name="Text 7"/>
+          <p:cNvSpPr/>
+          <p:nvPr/>
+        </p:nvSpPr>
+        <p:spPr>
+          <a:xfrm>
+            <a:off x="6511900" y="2212848"/>
+            <a:ext cx="4875124" cy="1554480"/>
+          </a:xfrm>
+          <a:prstGeom prst="rect">
+            <a:avLst/>
+          </a:prstGeom>
+          <a:noFill/>
+          <a:ln/>
+        </p:spPr>
+        <p:txBody>
+          <a:bodyPr wrap="square" lIns="0" tIns="0" rIns="0" bIns="0" rtlCol="0" anchor="ctr"/>
+          <a:lstStyle/>
+          <a:p>
+            <a:pPr marL="342900" indent="-342900">
               <a:lnSpc>
-                <a:spcPct val="112000"/>
+                <a:spcPct val="105000"/>
               </a:lnSpc>
-              <a:buNone/>
-            </a:pPr>
-            <a:r>
-              <a:rPr lang="en-US" sz="950" i="1" dirty="0">
-                <a:solidFill>
-                  <a:srgbClr val="B8453F"/>
-                </a:solidFill>
-                <a:latin typeface="Calibri" pitchFamily="34" charset="0"/>
-                <a:ea typeface="Calibri" pitchFamily="34" charset="-122"/>
-                <a:cs typeface="Calibri" pitchFamily="34" charset="-120"/>
-              </a:rPr>
-              <a:t>Even the lightest capitalized-earnings estimate (4x PAT ≈ ₹5.7 Cr) is more than 3x the combined book value of every fixed asset on the balance sheet. A pure NAV view can't explain three years of real cash profit — the model, not the business, is the thing that's wrong here.</a:t>
-            </a:r>
-            <a:endParaRPr lang="en-US" sz="950" dirty="0"/>
-          </a:p>
-        </p:txBody>
-      </p:sp>
-      <p:sp>
-        <p:nvSpPr>
-          <p:cNvPr id="14" name="Text 11"/>
+              <a:spcAft>
+                <a:spcPts val="500"/>
+              </a:spcAft>
+              <a:buSzPct val="100000"/>
+              <a:buChar char="•"/>
+            </a:pPr>
+            <a:r>
+              <a:rPr lang="en-US" sz="960" dirty="0">
+                <a:solidFill>
+                  <a:srgbClr val="1C1F26"/>
+                </a:solidFill>
+                <a:latin typeface="Calibri" pitchFamily="34" charset="0"/>
+                <a:ea typeface="Calibri" pitchFamily="34" charset="-122"/>
+                <a:cs typeface="Calibri" pitchFamily="34" charset="-120"/>
+              </a:rPr>
+              <a:t>Negative net worth (-₹1.54 Cr, FY25)</a:t>
+            </a:r>
+            <a:endParaRPr lang="en-US" sz="960" dirty="0"/>
+          </a:p>
+          <a:p>
+            <a:pPr marL="342900" indent="-342900">
+              <a:lnSpc>
+                <a:spcPct val="105000"/>
+              </a:lnSpc>
+              <a:spcAft>
+                <a:spcPts val="500"/>
+              </a:spcAft>
+              <a:buSzPct val="100000"/>
+              <a:buChar char="•"/>
+            </a:pPr>
+            <a:r>
+              <a:rPr lang="en-US" sz="960" dirty="0">
+                <a:solidFill>
+                  <a:srgbClr val="1C1F26"/>
+                </a:solidFill>
+                <a:latin typeface="Calibri" pitchFamily="34" charset="0"/>
+                <a:ea typeface="Calibri" pitchFamily="34" charset="-122"/>
+                <a:cs typeface="Calibri" pitchFamily="34" charset="-120"/>
+              </a:rPr>
+              <a:t>~80% of contribution from 2 customers</a:t>
+            </a:r>
+            <a:endParaRPr lang="en-US" sz="960" dirty="0"/>
+          </a:p>
+          <a:p>
+            <a:pPr marL="342900" indent="-342900">
+              <a:lnSpc>
+                <a:spcPct val="105000"/>
+              </a:lnSpc>
+              <a:spcAft>
+                <a:spcPts val="500"/>
+              </a:spcAft>
+              <a:buSzPct val="100000"/>
+              <a:buChar char="•"/>
+            </a:pPr>
+            <a:r>
+              <a:rPr lang="en-US" sz="960" dirty="0">
+                <a:solidFill>
+                  <a:srgbClr val="1C1F26"/>
+                </a:solidFill>
+                <a:latin typeface="Calibri" pitchFamily="34" charset="0"/>
+                <a:ea typeface="Calibri" pitchFamily="34" charset="-122"/>
+                <a:cs typeface="Calibri" pitchFamily="34" charset="-120"/>
+              </a:rPr>
+              <a:t>Rejection rate at 10.1%, worst on record</a:t>
+            </a:r>
+            <a:endParaRPr lang="en-US" sz="960" dirty="0"/>
+          </a:p>
+          <a:p>
+            <a:pPr marL="342900" indent="-342900">
+              <a:lnSpc>
+                <a:spcPct val="105000"/>
+              </a:lnSpc>
+              <a:spcAft>
+                <a:spcPts val="500"/>
+              </a:spcAft>
+              <a:buSzPct val="100000"/>
+              <a:buChar char="•"/>
+            </a:pPr>
+            <a:r>
+              <a:rPr lang="en-US" sz="960" dirty="0">
+                <a:solidFill>
+                  <a:srgbClr val="1C1F26"/>
+                </a:solidFill>
+                <a:latin typeface="Calibri" pitchFamily="34" charset="0"/>
+                <a:ea typeface="Calibri" pitchFamily="34" charset="-122"/>
+                <a:cs typeface="Calibri" pitchFamily="34" charset="-120"/>
+              </a:rPr>
+              <a:t>Recurring auditor qualification; sub-scale vs. peer median</a:t>
+            </a:r>
+            <a:endParaRPr lang="en-US" sz="960" dirty="0"/>
+          </a:p>
+        </p:txBody>
+      </p:sp>
+      <p:sp>
+        <p:nvSpPr>
+          <p:cNvPr id="10" name="Shape 8"/>
+          <p:cNvSpPr/>
+          <p:nvPr/>
+        </p:nvSpPr>
+        <p:spPr>
+          <a:xfrm>
+            <a:off x="548640" y="4114800"/>
+            <a:ext cx="5387188" cy="2148840"/>
+          </a:xfrm>
+          <a:prstGeom prst="roundRect">
+            <a:avLst>
+              <a:gd name="adj" fmla="val 3404"/>
+            </a:avLst>
+          </a:prstGeom>
+          <a:solidFill>
+            <a:srgbClr val="FCEFE6"/>
+          </a:solidFill>
+          <a:ln/>
+        </p:spPr>
+      </p:sp>
+      <p:sp>
+        <p:nvSpPr>
+          <p:cNvPr id="11" name="Text 9"/>
+          <p:cNvSpPr/>
+          <p:nvPr/>
+        </p:nvSpPr>
+        <p:spPr>
+          <a:xfrm>
+            <a:off x="804672" y="4279392"/>
+            <a:ext cx="4875124" cy="274320"/>
+          </a:xfrm>
+          <a:prstGeom prst="rect">
+            <a:avLst/>
+          </a:prstGeom>
+          <a:noFill/>
+          <a:ln/>
+        </p:spPr>
+        <p:txBody>
+          <a:bodyPr wrap="square" lIns="0" tIns="0" rIns="0" bIns="0" rtlCol="0" anchor="ctr"/>
+          <a:lstStyle/>
+          <a:p>
+            <a:pPr indent="0" marL="0">
+              <a:buNone/>
+            </a:pPr>
+            <a:r>
+              <a:rPr lang="en-US" sz="1150" b="1" spc="150" kern="0" dirty="0">
+                <a:solidFill>
+                  <a:srgbClr val="D9622B"/>
+                </a:solidFill>
+                <a:latin typeface="Calibri" pitchFamily="34" charset="0"/>
+                <a:ea typeface="Calibri" pitchFamily="34" charset="-122"/>
+                <a:cs typeface="Calibri" pitchFamily="34" charset="-120"/>
+              </a:rPr>
+              <a:t>OPPORTUNITIES</a:t>
+            </a:r>
+            <a:endParaRPr lang="en-US" sz="1150" dirty="0"/>
+          </a:p>
+        </p:txBody>
+      </p:sp>
+      <p:sp>
+        <p:nvSpPr>
+          <p:cNvPr id="12" name="Text 10"/>
+          <p:cNvSpPr/>
+          <p:nvPr/>
+        </p:nvSpPr>
+        <p:spPr>
+          <a:xfrm>
+            <a:off x="804672" y="4590288"/>
+            <a:ext cx="4875124" cy="1554480"/>
+          </a:xfrm>
+          <a:prstGeom prst="rect">
+            <a:avLst/>
+          </a:prstGeom>
+          <a:noFill/>
+          <a:ln/>
+        </p:spPr>
+        <p:txBody>
+          <a:bodyPr wrap="square" lIns="0" tIns="0" rIns="0" bIns="0" rtlCol="0" anchor="ctr"/>
+          <a:lstStyle/>
+          <a:p>
+            <a:pPr marL="342900" indent="-342900">
+              <a:lnSpc>
+                <a:spcPct val="105000"/>
+              </a:lnSpc>
+              <a:spcAft>
+                <a:spcPts val="500"/>
+              </a:spcAft>
+              <a:buSzPct val="100000"/>
+              <a:buChar char="•"/>
+            </a:pPr>
+            <a:r>
+              <a:rPr lang="en-US" sz="960" dirty="0">
+                <a:solidFill>
+                  <a:srgbClr val="1C1F26"/>
+                </a:solidFill>
+                <a:latin typeface="Calibri" pitchFamily="34" charset="0"/>
+                <a:ea typeface="Calibri" pitchFamily="34" charset="-122"/>
+                <a:cs typeface="Calibri" pitchFamily="34" charset="-120"/>
+              </a:rPr>
+              <a:t>Komatsu global qualification (pending quality closure)</a:t>
+            </a:r>
+            <a:endParaRPr lang="en-US" sz="960" dirty="0"/>
+          </a:p>
+          <a:p>
+            <a:pPr marL="342900" indent="-342900">
+              <a:lnSpc>
+                <a:spcPct val="105000"/>
+              </a:lnSpc>
+              <a:spcAft>
+                <a:spcPts val="500"/>
+              </a:spcAft>
+              <a:buSzPct val="100000"/>
+              <a:buChar char="•"/>
+            </a:pPr>
+            <a:r>
+              <a:rPr lang="en-US" sz="960" dirty="0">
+                <a:solidFill>
+                  <a:srgbClr val="1C1F26"/>
+                </a:solidFill>
+                <a:latin typeface="Calibri" pitchFamily="34" charset="0"/>
+                <a:ea typeface="Calibri" pitchFamily="34" charset="-122"/>
+                <a:cs typeface="Calibri" pitchFamily="34" charset="-120"/>
+              </a:rPr>
+              <a:t>Thejo Engineering diversification, actively growing</a:t>
+            </a:r>
+            <a:endParaRPr lang="en-US" sz="960" dirty="0"/>
+          </a:p>
+          <a:p>
+            <a:pPr marL="342900" indent="-342900">
+              <a:lnSpc>
+                <a:spcPct val="105000"/>
+              </a:lnSpc>
+              <a:spcAft>
+                <a:spcPts val="500"/>
+              </a:spcAft>
+              <a:buSzPct val="100000"/>
+              <a:buChar char="•"/>
+            </a:pPr>
+            <a:r>
+              <a:rPr lang="en-US" sz="960" dirty="0">
+                <a:solidFill>
+                  <a:srgbClr val="1C1F26"/>
+                </a:solidFill>
+                <a:latin typeface="Calibri" pitchFamily="34" charset="0"/>
+                <a:ea typeface="Calibri" pitchFamily="34" charset="-122"/>
+                <a:cs typeface="Calibri" pitchFamily="34" charset="-120"/>
+              </a:rPr>
+              <a:t>RDSO fresh-registration window for cast-steel bogie parts — approval-gated demand (slide 25)</a:t>
+            </a:r>
+            <a:endParaRPr lang="en-US" sz="960" dirty="0"/>
+          </a:p>
+          <a:p>
+            <a:pPr marL="342900" indent="-342900">
+              <a:lnSpc>
+                <a:spcPct val="105000"/>
+              </a:lnSpc>
+              <a:spcAft>
+                <a:spcPts val="500"/>
+              </a:spcAft>
+              <a:buSzPct val="100000"/>
+              <a:buChar char="•"/>
+            </a:pPr>
+            <a:r>
+              <a:rPr lang="en-US" sz="960" dirty="0">
+                <a:solidFill>
+                  <a:srgbClr val="1C1F26"/>
+                </a:solidFill>
+                <a:latin typeface="Calibri" pitchFamily="34" charset="0"/>
+                <a:ea typeface="Calibri" pitchFamily="34" charset="-122"/>
+                <a:cs typeface="Calibri" pitchFamily="34" charset="-120"/>
+              </a:rPr>
+              <a:t>Margin upside toward peer best-in-class (7-8% net)</a:t>
+            </a:r>
+            <a:endParaRPr lang="en-US" sz="960" dirty="0"/>
+          </a:p>
+        </p:txBody>
+      </p:sp>
+      <p:sp>
+        <p:nvSpPr>
+          <p:cNvPr id="13" name="Shape 11"/>
+          <p:cNvSpPr/>
+          <p:nvPr/>
+        </p:nvSpPr>
+        <p:spPr>
+          <a:xfrm>
+            <a:off x="6255868" y="4114800"/>
+            <a:ext cx="5387188" cy="2148840"/>
+          </a:xfrm>
+          <a:prstGeom prst="roundRect">
+            <a:avLst>
+              <a:gd name="adj" fmla="val 3404"/>
+            </a:avLst>
+          </a:prstGeom>
+          <a:solidFill>
+            <a:srgbClr val="F4F5F7"/>
+          </a:solidFill>
+          <a:ln/>
+        </p:spPr>
+      </p:sp>
+      <p:sp>
+        <p:nvSpPr>
+          <p:cNvPr id="14" name="Text 12"/>
+          <p:cNvSpPr/>
+          <p:nvPr/>
+        </p:nvSpPr>
+        <p:spPr>
+          <a:xfrm>
+            <a:off x="6511900" y="4279392"/>
+            <a:ext cx="4875124" cy="274320"/>
+          </a:xfrm>
+          <a:prstGeom prst="rect">
+            <a:avLst/>
+          </a:prstGeom>
+          <a:noFill/>
+          <a:ln/>
+        </p:spPr>
+        <p:txBody>
+          <a:bodyPr wrap="square" lIns="0" tIns="0" rIns="0" bIns="0" rtlCol="0" anchor="ctr"/>
+          <a:lstStyle/>
+          <a:p>
+            <a:pPr indent="0" marL="0">
+              <a:buNone/>
+            </a:pPr>
+            <a:r>
+              <a:rPr lang="en-US" sz="1150" b="1" spc="150" kern="0" dirty="0">
+                <a:solidFill>
+                  <a:srgbClr val="3A4553"/>
+                </a:solidFill>
+                <a:latin typeface="Calibri" pitchFamily="34" charset="0"/>
+                <a:ea typeface="Calibri" pitchFamily="34" charset="-122"/>
+                <a:cs typeface="Calibri" pitchFamily="34" charset="-120"/>
+              </a:rPr>
+              <a:t>THREATS</a:t>
+            </a:r>
+            <a:endParaRPr lang="en-US" sz="1150" dirty="0"/>
+          </a:p>
+        </p:txBody>
+      </p:sp>
+      <p:sp>
+        <p:nvSpPr>
+          <p:cNvPr id="15" name="Text 13"/>
+          <p:cNvSpPr/>
+          <p:nvPr/>
+        </p:nvSpPr>
+        <p:spPr>
+          <a:xfrm>
+            <a:off x="6511900" y="4590288"/>
+            <a:ext cx="4875124" cy="1554480"/>
+          </a:xfrm>
+          <a:prstGeom prst="rect">
+            <a:avLst/>
+          </a:prstGeom>
+          <a:noFill/>
+          <a:ln/>
+        </p:spPr>
+        <p:txBody>
+          <a:bodyPr wrap="square" lIns="0" tIns="0" rIns="0" bIns="0" rtlCol="0" anchor="ctr"/>
+          <a:lstStyle/>
+          <a:p>
+            <a:pPr marL="342900" indent="-342900">
+              <a:lnSpc>
+                <a:spcPct val="105000"/>
+              </a:lnSpc>
+              <a:spcAft>
+                <a:spcPts val="500"/>
+              </a:spcAft>
+              <a:buSzPct val="100000"/>
+              <a:buChar char="•"/>
+            </a:pPr>
+            <a:r>
+              <a:rPr lang="en-US" sz="960" dirty="0">
+                <a:solidFill>
+                  <a:srgbClr val="1C1F26"/>
+                </a:solidFill>
+                <a:latin typeface="Calibri" pitchFamily="34" charset="0"/>
+                <a:ea typeface="Calibri" pitchFamily="34" charset="-122"/>
+                <a:cs typeface="Calibri" pitchFamily="34" charset="-120"/>
+              </a:rPr>
+              <a:t>Tega/Escorts concentration; Tega small-order decline</a:t>
+            </a:r>
+            <a:endParaRPr lang="en-US" sz="960" dirty="0"/>
+          </a:p>
+          <a:p>
+            <a:pPr marL="342900" indent="-342900">
+              <a:lnSpc>
+                <a:spcPct val="105000"/>
+              </a:lnSpc>
+              <a:spcAft>
+                <a:spcPts val="500"/>
+              </a:spcAft>
+              <a:buSzPct val="100000"/>
+              <a:buChar char="•"/>
+            </a:pPr>
+            <a:r>
+              <a:rPr lang="en-US" sz="960" dirty="0">
+                <a:solidFill>
+                  <a:srgbClr val="1C1F26"/>
+                </a:solidFill>
+                <a:latin typeface="Calibri" pitchFamily="34" charset="0"/>
+                <a:ea typeface="Calibri" pitchFamily="34" charset="-122"/>
+                <a:cs typeface="Calibri" pitchFamily="34" charset="-120"/>
+              </a:rPr>
+              <a:t>Q1 FY26-27 demand air-pocket, cause unconfirmed</a:t>
+            </a:r>
+            <a:endParaRPr lang="en-US" sz="960" dirty="0"/>
+          </a:p>
+          <a:p>
+            <a:pPr marL="342900" indent="-342900">
+              <a:lnSpc>
+                <a:spcPct val="105000"/>
+              </a:lnSpc>
+              <a:spcAft>
+                <a:spcPts val="500"/>
+              </a:spcAft>
+              <a:buSzPct val="100000"/>
+              <a:buChar char="•"/>
+            </a:pPr>
+            <a:r>
+              <a:rPr lang="en-US" sz="960" dirty="0">
+                <a:solidFill>
+                  <a:srgbClr val="1C1F26"/>
+                </a:solidFill>
+                <a:latin typeface="Calibri" pitchFamily="34" charset="0"/>
+                <a:ea typeface="Calibri" pitchFamily="34" charset="-122"/>
+                <a:cs typeface="Calibri" pitchFamily="34" charset="-120"/>
+              </a:rPr>
+              <a:t>Carbon-intensity entering OEM audits — Indian foundries ~1.8-2.2 tCO2/t vs. CBAM's 1.5t line (slide 24)</a:t>
+            </a:r>
+            <a:endParaRPr lang="en-US" sz="960" dirty="0"/>
+          </a:p>
+          <a:p>
+            <a:pPr marL="342900" indent="-342900">
+              <a:lnSpc>
+                <a:spcPct val="105000"/>
+              </a:lnSpc>
+              <a:spcAft>
+                <a:spcPts val="500"/>
+              </a:spcAft>
+              <a:buSzPct val="100000"/>
+              <a:buChar char="•"/>
+            </a:pPr>
+            <a:r>
+              <a:rPr lang="en-US" sz="960" dirty="0">
+                <a:solidFill>
+                  <a:srgbClr val="1C1F26"/>
+                </a:solidFill>
+                <a:latin typeface="Calibri" pitchFamily="34" charset="0"/>
+                <a:ea typeface="Calibri" pitchFamily="34" charset="-122"/>
+                <a:cs typeface="Calibri" pitchFamily="34" charset="-120"/>
+              </a:rPr>
+              <a:t>Open Komatsu first-article nonconformity</a:t>
+            </a:r>
+            <a:endParaRPr lang="en-US" sz="960" dirty="0"/>
+          </a:p>
+        </p:txBody>
+      </p:sp>
+      <p:sp>
+        <p:nvSpPr>
+          <p:cNvPr id="16" name="Text 14"/>
           <p:cNvSpPr/>
           <p:nvPr/>
         </p:nvSpPr>
@@ -22764,7 +23936,7 @@
       </p:sp>
       <p:sp>
         <p:nvSpPr>
-          <p:cNvPr id="15" name="Text 12"/>
+          <p:cNvPr id="17" name="Text 15"/>
           <p:cNvSpPr/>
           <p:nvPr/>
         </p:nvSpPr>
@@ -22795,7 +23967,7 @@
                 <a:ea typeface="Calibri" pitchFamily="34" charset="-122"/>
                 <a:cs typeface="Calibri" pitchFamily="34" charset="-120"/>
               </a:rPr>
-              <a:t>25</a:t>
+              <a:t>26</a:t>
             </a:r>
             <a:endParaRPr lang="en-US" sz="800" dirty="0"/>
           </a:p>
@@ -22809,13 +23981,13 @@
 </p:sld>
 </file>
 
-<file path=ppt/slides/slide26.xml><?xml version="1.0" encoding="utf-8"?>
+<file path=ppt/slides/slide27.xml><?xml version="1.0" encoding="utf-8"?>
 <p:sld xmlns:a="http://schemas.openxmlformats.org/drawingml/2006/main" xmlns:r="http://schemas.openxmlformats.org/officeDocument/2006/relationships" xmlns:p="http://schemas.openxmlformats.org/presentationml/2006/main">
-  <p:cSld name="Slide 26">
+  <p:cSld name="Slide 27">
     <p:bg>
       <p:bgPr>
         <a:solidFill>
-          <a:srgbClr val="1C1F26"/>
+          <a:srgbClr val="FFFFFF"/>
         </a:solidFill>
       </p:bgPr>
     </p:bg>
@@ -22866,7 +24038,7 @@
                 <a:ea typeface="Calibri" pitchFamily="34" charset="-122"/>
                 <a:cs typeface="Calibri" pitchFamily="34" charset="-120"/>
               </a:rPr>
-              <a:t>VALUATION — THE BUYER PROBLEM</a:t>
+              <a:t>VALUATION — THE TWO LENSES</a:t>
             </a:r>
             <a:endParaRPr lang="en-US" sz="1100" dirty="0"/>
           </a:p>
@@ -22899,87 +24071,44 @@
             <a:r>
               <a:rPr lang="en-US" sz="3000" b="1" dirty="0">
                 <a:solidFill>
-                  <a:srgbClr val="FFFFFF"/>
+                  <a:srgbClr val="1C1F26"/>
                 </a:solidFill>
                 <a:latin typeface="Cambria" pitchFamily="34" charset="0"/>
                 <a:ea typeface="Cambria" pitchFamily="34" charset="-122"/>
                 <a:cs typeface="Cambria" pitchFamily="34" charset="-120"/>
               </a:rPr>
-              <a:t>Why it's still hard to sell — and why that isn't a flaw</a:t>
+              <a:t>Two ways to price this business — and they disagree by 3-10x</a:t>
             </a:r>
             <a:endParaRPr lang="en-US" sz="3000" dirty="0"/>
           </a:p>
         </p:txBody>
       </p:sp>
-      <p:sp>
-        <p:nvSpPr>
-          <p:cNvPr id="4" name="Shape 2"/>
-          <p:cNvSpPr/>
-          <p:nvPr/>
-        </p:nvSpPr>
-        <p:spPr>
-          <a:xfrm>
-            <a:off x="548640" y="1737360"/>
-            <a:ext cx="384048" cy="384048"/>
-          </a:xfrm>
-          <a:prstGeom prst="ellipse">
-            <a:avLst/>
-          </a:prstGeom>
-          <a:solidFill>
-            <a:srgbClr val="D9622B"/>
-          </a:solidFill>
-          <a:ln/>
-        </p:spPr>
-      </p:sp>
-      <p:sp>
-        <p:nvSpPr>
-          <p:cNvPr id="5" name="Text 3"/>
-          <p:cNvSpPr/>
-          <p:nvPr/>
-        </p:nvSpPr>
-        <p:spPr>
-          <a:xfrm>
-            <a:off x="548640" y="1737360"/>
-            <a:ext cx="384048" cy="384048"/>
-          </a:xfrm>
-          <a:prstGeom prst="rect">
-            <a:avLst/>
-          </a:prstGeom>
-          <a:noFill/>
-          <a:ln/>
-        </p:spPr>
-        <p:txBody>
-          <a:bodyPr wrap="square" lIns="0" tIns="0" rIns="0" bIns="0" rtlCol="0" anchor="ctr"/>
-          <a:lstStyle/>
-          <a:p>
-            <a:pPr algn="ctr" indent="0" marL="0">
-              <a:buNone/>
-            </a:pPr>
-            <a:r>
-              <a:rPr lang="en-US" sz="1092" b="1" dirty="0">
-                <a:solidFill>
-                  <a:srgbClr val="FFFFFF"/>
-                </a:solidFill>
-                <a:latin typeface="Calibri" pitchFamily="34" charset="0"/>
-                <a:ea typeface="Calibri" pitchFamily="34" charset="-122"/>
-                <a:cs typeface="Calibri" pitchFamily="34" charset="-120"/>
-              </a:rPr>
-              <a:t>1</a:t>
-            </a:r>
-            <a:endParaRPr lang="en-US" sz="1092" dirty="0"/>
-          </a:p>
-        </p:txBody>
-      </p:sp>
-      <p:sp>
-        <p:nvSpPr>
-          <p:cNvPr id="6" name="Text 4"/>
-          <p:cNvSpPr/>
-          <p:nvPr/>
-        </p:nvSpPr>
-        <p:spPr>
-          <a:xfrm>
-            <a:off x="1115568" y="1709928"/>
-            <a:ext cx="10527487" cy="365760"/>
+      <p:graphicFrame>
+        <p:nvGraphicFramePr>
+          <p:cNvPr id="4" name="Chart 0" descr=""/>
+          <p:cNvGraphicFramePr/>
+          <p:nvPr/>
+        </p:nvGraphicFramePr>
+        <p:xfrm>
+          <a:off x="548640" y="1737360"/>
+          <a:ext cx="6400800" cy="3200400"/>
+        </p:xfrm>
+        <a:graphic xmlns:a="http://schemas.openxmlformats.org/drawingml/2006/main">
+          <a:graphicData uri="http://schemas.openxmlformats.org/drawingml/2006/chart">
+            <c:chart xmlns:c="http://schemas.openxmlformats.org/drawingml/2006/chart" r:id="rId1"/>
+          </a:graphicData>
+        </a:graphic>
+      </p:graphicFrame>
+      <p:sp>
+        <p:nvSpPr>
+          <p:cNvPr id="5" name="Text 2"/>
+          <p:cNvSpPr/>
+          <p:nvPr/>
+        </p:nvSpPr>
+        <p:spPr>
+          <a:xfrm>
+            <a:off x="548640" y="5074920"/>
+            <a:ext cx="6400800" cy="594360"/>
           </a:xfrm>
           <a:prstGeom prst="rect">
             <a:avLst/>
@@ -22992,33 +24121,75 @@
           <a:lstStyle/>
           <a:p>
             <a:pPr indent="0" marL="0">
-              <a:buNone/>
-            </a:pPr>
-            <a:r>
-              <a:rPr lang="en-US" sz="1350" b="1" dirty="0">
-                <a:solidFill>
-                  <a:srgbClr val="FFFFFF"/>
-                </a:solidFill>
-                <a:latin typeface="Calibri" pitchFamily="34" charset="0"/>
-                <a:ea typeface="Calibri" pitchFamily="34" charset="-122"/>
-                <a:cs typeface="Calibri" pitchFamily="34" charset="-120"/>
-              </a:rPr>
-              <a:t>Liquidation value: a generic buyer's logic</a:t>
-            </a:r>
-            <a:endParaRPr lang="en-US" sz="1350" dirty="0"/>
-          </a:p>
-        </p:txBody>
-      </p:sp>
-      <p:sp>
-        <p:nvSpPr>
-          <p:cNvPr id="7" name="Text 5"/>
-          <p:cNvSpPr/>
-          <p:nvPr/>
-        </p:nvSpPr>
-        <p:spPr>
-          <a:xfrm>
-            <a:off x="1115568" y="2084832"/>
-            <a:ext cx="10527487" cy="658368"/>
+              <a:lnSpc>
+                <a:spcPct val="110000"/>
+              </a:lnSpc>
+              <a:buNone/>
+            </a:pPr>
+            <a:r>
+              <a:rPr lang="en-US" sz="850" i="1" dirty="0">
+                <a:solidFill>
+                  <a:srgbClr val="6B7684"/>
+                </a:solidFill>
+                <a:latin typeface="Calibri" pitchFamily="34" charset="0"/>
+                <a:ea typeface="Calibri" pitchFamily="34" charset="-122"/>
+                <a:cs typeface="Calibri" pitchFamily="34" charset="-120"/>
+              </a:rPr>
+              <a:t>Grey bars: today's book value of the hard assets (internal depreciation register, FY23-24 close). Orange bars: illustrative income-basis value, capitalizing the 3-year average audited PAT (₹1.43 Cr, FY23-25) at a range of multiples — no verified comparable transaction exists for Indian niche-foundry M&amp;A; treat as sensitivity, not appraisal.</a:t>
+            </a:r>
+            <a:endParaRPr lang="en-US" sz="850" dirty="0"/>
+          </a:p>
+        </p:txBody>
+      </p:sp>
+      <p:sp>
+        <p:nvSpPr>
+          <p:cNvPr id="6" name="Text 3"/>
+          <p:cNvSpPr/>
+          <p:nvPr/>
+        </p:nvSpPr>
+        <p:spPr>
+          <a:xfrm>
+            <a:off x="7223760" y="1737360"/>
+            <a:ext cx="4419295" cy="411480"/>
+          </a:xfrm>
+          <a:prstGeom prst="rect">
+            <a:avLst/>
+          </a:prstGeom>
+          <a:noFill/>
+          <a:ln/>
+        </p:spPr>
+        <p:txBody>
+          <a:bodyPr wrap="square" lIns="0" tIns="0" rIns="0" bIns="0" rtlCol="0" anchor="ctr"/>
+          <a:lstStyle/>
+          <a:p>
+            <a:pPr indent="0" marL="0">
+              <a:buNone/>
+            </a:pPr>
+            <a:r>
+              <a:rPr lang="en-US" sz="2100" b="1" dirty="0">
+                <a:solidFill>
+                  <a:srgbClr val="1C1F26"/>
+                </a:solidFill>
+                <a:latin typeface="Cambria" pitchFamily="34" charset="0"/>
+                <a:ea typeface="Cambria" pitchFamily="34" charset="-122"/>
+                <a:cs typeface="Cambria" pitchFamily="34" charset="-120"/>
+              </a:rPr>
+              <a:t>~90%</a:t>
+            </a:r>
+            <a:endParaRPr lang="en-US" sz="2100" dirty="0"/>
+          </a:p>
+        </p:txBody>
+      </p:sp>
+      <p:sp>
+        <p:nvSpPr>
+          <p:cNvPr id="7" name="Text 4"/>
+          <p:cNvSpPr/>
+          <p:nvPr/>
+        </p:nvSpPr>
+        <p:spPr>
+          <a:xfrm>
+            <a:off x="7223760" y="2139696"/>
+            <a:ext cx="4419295" cy="685800"/>
           </a:xfrm>
           <a:prstGeom prst="rect">
             <a:avLst/>
@@ -23037,89 +24208,30 @@
               <a:buNone/>
             </a:pPr>
             <a:r>
-              <a:rPr lang="en-US" sz="1000" dirty="0">
-                <a:solidFill>
-                  <a:srgbClr val="CBD3DC"/>
-                </a:solidFill>
-                <a:latin typeface="Calibri" pitchFamily="34" charset="0"/>
-                <a:ea typeface="Calibri" pitchFamily="34" charset="-122"/>
-                <a:cs typeface="Calibri" pitchFamily="34" charset="-120"/>
-              </a:rPr>
-              <a:t>A machinery dealer or plot buyer can only underwrite what they can verify and reuse immediately — the hardware. They have no way to price 25-30 years of heat-treatment process history, RDSO/OEM qualifications, or a customer book earned through years of trial batches and audits.</a:t>
-            </a:r>
-            <a:endParaRPr lang="en-US" sz="1000" dirty="0"/>
-          </a:p>
-        </p:txBody>
-      </p:sp>
-      <p:sp>
-        <p:nvSpPr>
-          <p:cNvPr id="8" name="Shape 6"/>
-          <p:cNvSpPr/>
-          <p:nvPr/>
-        </p:nvSpPr>
-        <p:spPr>
-          <a:xfrm>
-            <a:off x="548640" y="2834640"/>
-            <a:ext cx="384048" cy="384048"/>
-          </a:xfrm>
-          <a:prstGeom prst="ellipse">
-            <a:avLst/>
-          </a:prstGeom>
-          <a:solidFill>
-            <a:srgbClr val="D9622B"/>
-          </a:solidFill>
-          <a:ln/>
-        </p:spPr>
-      </p:sp>
-      <p:sp>
-        <p:nvSpPr>
-          <p:cNvPr id="9" name="Text 7"/>
-          <p:cNvSpPr/>
-          <p:nvPr/>
-        </p:nvSpPr>
-        <p:spPr>
-          <a:xfrm>
-            <a:off x="548640" y="2834640"/>
-            <a:ext cx="384048" cy="384048"/>
-          </a:xfrm>
-          <a:prstGeom prst="rect">
-            <a:avLst/>
-          </a:prstGeom>
-          <a:noFill/>
-          <a:ln/>
-        </p:spPr>
-        <p:txBody>
-          <a:bodyPr wrap="square" lIns="0" tIns="0" rIns="0" bIns="0" rtlCol="0" anchor="ctr"/>
-          <a:lstStyle/>
-          <a:p>
-            <a:pPr algn="ctr" indent="0" marL="0">
-              <a:buNone/>
-            </a:pPr>
-            <a:r>
-              <a:rPr lang="en-US" sz="1092" b="1" dirty="0">
-                <a:solidFill>
-                  <a:srgbClr val="FFFFFF"/>
-                </a:solidFill>
-                <a:latin typeface="Calibri" pitchFamily="34" charset="0"/>
-                <a:ea typeface="Calibri" pitchFamily="34" charset="-122"/>
-                <a:cs typeface="Calibri" pitchFamily="34" charset="-120"/>
-              </a:rPr>
-              <a:t>2</a:t>
-            </a:r>
-            <a:endParaRPr lang="en-US" sz="1092" dirty="0"/>
-          </a:p>
-        </p:txBody>
-      </p:sp>
-      <p:sp>
-        <p:nvSpPr>
-          <p:cNvPr id="10" name="Text 8"/>
-          <p:cNvSpPr/>
-          <p:nvPr/>
-        </p:nvSpPr>
-        <p:spPr>
-          <a:xfrm>
-            <a:off x="1115568" y="2807208"/>
-            <a:ext cx="10527487" cy="365760"/>
+              <a:rPr lang="en-US" sz="950" dirty="0">
+                <a:solidFill>
+                  <a:srgbClr val="3A4553"/>
+                </a:solidFill>
+                <a:latin typeface="Calibri" pitchFamily="34" charset="0"/>
+                <a:ea typeface="Calibri" pitchFamily="34" charset="-122"/>
+                <a:cs typeface="Calibri" pitchFamily="34" charset="-120"/>
+              </a:rPr>
+              <a:t>Of Plant &amp; Machinery's ~₹17.6 Cr original cost has already been depreciated — book value is now ~₹1.8 Cr</a:t>
+            </a:r>
+            <a:endParaRPr lang="en-US" sz="950" dirty="0"/>
+          </a:p>
+        </p:txBody>
+      </p:sp>
+      <p:sp>
+        <p:nvSpPr>
+          <p:cNvPr id="8" name="Text 5"/>
+          <p:cNvSpPr/>
+          <p:nvPr/>
+        </p:nvSpPr>
+        <p:spPr>
+          <a:xfrm>
+            <a:off x="7223760" y="2907792"/>
+            <a:ext cx="4419295" cy="411480"/>
           </a:xfrm>
           <a:prstGeom prst="rect">
             <a:avLst/>
@@ -23135,30 +24247,30 @@
               <a:buNone/>
             </a:pPr>
             <a:r>
-              <a:rPr lang="en-US" sz="1350" b="1" dirty="0">
-                <a:solidFill>
-                  <a:srgbClr val="FFFFFF"/>
-                </a:solidFill>
-                <a:latin typeface="Calibri" pitchFamily="34" charset="0"/>
-                <a:ea typeface="Calibri" pitchFamily="34" charset="-122"/>
-                <a:cs typeface="Calibri" pitchFamily="34" charset="-120"/>
-              </a:rPr>
-              <a:t>Fair market value: what the business earns standalone</a:t>
-            </a:r>
-            <a:endParaRPr lang="en-US" sz="1350" dirty="0"/>
-          </a:p>
-        </p:txBody>
-      </p:sp>
-      <p:sp>
-        <p:nvSpPr>
-          <p:cNvPr id="11" name="Text 9"/>
-          <p:cNvSpPr/>
-          <p:nvPr/>
-        </p:nvSpPr>
-        <p:spPr>
-          <a:xfrm>
-            <a:off x="1115568" y="3182112"/>
-            <a:ext cx="10527487" cy="658368"/>
+              <a:rPr lang="en-US" sz="2100" b="1" dirty="0">
+                <a:solidFill>
+                  <a:srgbClr val="1C1F26"/>
+                </a:solidFill>
+                <a:latin typeface="Cambria" pitchFamily="34" charset="0"/>
+                <a:ea typeface="Cambria" pitchFamily="34" charset="-122"/>
+                <a:cs typeface="Cambria" pitchFamily="34" charset="-120"/>
+              </a:rPr>
+              <a:t>-₹1.54 Cr</a:t>
+            </a:r>
+            <a:endParaRPr lang="en-US" sz="2100" dirty="0"/>
+          </a:p>
+        </p:txBody>
+      </p:sp>
+      <p:sp>
+        <p:nvSpPr>
+          <p:cNvPr id="9" name="Text 6"/>
+          <p:cNvSpPr/>
+          <p:nvPr/>
+        </p:nvSpPr>
+        <p:spPr>
+          <a:xfrm>
+            <a:off x="7223760" y="3310128"/>
+            <a:ext cx="4419295" cy="685800"/>
           </a:xfrm>
           <a:prstGeom prst="rect">
             <a:avLst/>
@@ -23177,89 +24289,30 @@
               <a:buNone/>
             </a:pPr>
             <a:r>
-              <a:rPr lang="en-US" sz="1000" dirty="0">
-                <a:solidFill>
-                  <a:srgbClr val="CBD3DC"/>
-                </a:solidFill>
-                <a:latin typeface="Calibri" pitchFamily="34" charset="0"/>
-                <a:ea typeface="Calibri" pitchFamily="34" charset="-122"/>
-                <a:cs typeface="Calibri" pitchFamily="34" charset="-120"/>
-              </a:rPr>
-              <a:t>Even on light, illustrative multiples, capitalized earnings already clear 3x+ the entire fixed-asset book (slide 25). This is the value a rational financial buyer, with no synergy, would underwrite.</a:t>
-            </a:r>
-            <a:endParaRPr lang="en-US" sz="1000" dirty="0"/>
-          </a:p>
-        </p:txBody>
-      </p:sp>
-      <p:sp>
-        <p:nvSpPr>
-          <p:cNvPr id="12" name="Shape 10"/>
-          <p:cNvSpPr/>
-          <p:nvPr/>
-        </p:nvSpPr>
-        <p:spPr>
-          <a:xfrm>
-            <a:off x="548640" y="3931920"/>
-            <a:ext cx="384048" cy="384048"/>
-          </a:xfrm>
-          <a:prstGeom prst="ellipse">
-            <a:avLst/>
-          </a:prstGeom>
-          <a:solidFill>
-            <a:srgbClr val="D9622B"/>
-          </a:solidFill>
-          <a:ln/>
-        </p:spPr>
-      </p:sp>
-      <p:sp>
-        <p:nvSpPr>
-          <p:cNvPr id="13" name="Text 11"/>
-          <p:cNvSpPr/>
-          <p:nvPr/>
-        </p:nvSpPr>
-        <p:spPr>
-          <a:xfrm>
-            <a:off x="548640" y="3931920"/>
-            <a:ext cx="384048" cy="384048"/>
-          </a:xfrm>
-          <a:prstGeom prst="rect">
-            <a:avLst/>
-          </a:prstGeom>
-          <a:noFill/>
-          <a:ln/>
-        </p:spPr>
-        <p:txBody>
-          <a:bodyPr wrap="square" lIns="0" tIns="0" rIns="0" bIns="0" rtlCol="0" anchor="ctr"/>
-          <a:lstStyle/>
-          <a:p>
-            <a:pPr algn="ctr" indent="0" marL="0">
-              <a:buNone/>
-            </a:pPr>
-            <a:r>
-              <a:rPr lang="en-US" sz="1092" b="1" dirty="0">
-                <a:solidFill>
-                  <a:srgbClr val="FFFFFF"/>
-                </a:solidFill>
-                <a:latin typeface="Calibri" pitchFamily="34" charset="0"/>
-                <a:ea typeface="Calibri" pitchFamily="34" charset="-122"/>
-                <a:cs typeface="Calibri" pitchFamily="34" charset="-120"/>
-              </a:rPr>
-              <a:t>3</a:t>
-            </a:r>
-            <a:endParaRPr lang="en-US" sz="1092" dirty="0"/>
-          </a:p>
-        </p:txBody>
-      </p:sp>
-      <p:sp>
-        <p:nvSpPr>
-          <p:cNvPr id="14" name="Text 12"/>
-          <p:cNvSpPr/>
-          <p:nvPr/>
-        </p:nvSpPr>
-        <p:spPr>
-          <a:xfrm>
-            <a:off x="1115568" y="3904488"/>
-            <a:ext cx="10527487" cy="365760"/>
+              <a:rPr lang="en-US" sz="950" dirty="0">
+                <a:solidFill>
+                  <a:srgbClr val="3A4553"/>
+                </a:solidFill>
+                <a:latin typeface="Calibri" pitchFamily="34" charset="0"/>
+                <a:ea typeface="Calibri" pitchFamily="34" charset="-122"/>
+                <a:cs typeface="Calibri" pitchFamily="34" charset="-120"/>
+              </a:rPr>
+              <a:t>FY25 audited net worth — a literal net-asset-value approach prices the whole enterprise at zero or below</a:t>
+            </a:r>
+            <a:endParaRPr lang="en-US" sz="950" dirty="0"/>
+          </a:p>
+        </p:txBody>
+      </p:sp>
+      <p:sp>
+        <p:nvSpPr>
+          <p:cNvPr id="10" name="Text 7"/>
+          <p:cNvSpPr/>
+          <p:nvPr/>
+        </p:nvSpPr>
+        <p:spPr>
+          <a:xfrm>
+            <a:off x="7223760" y="4078224"/>
+            <a:ext cx="4419295" cy="411480"/>
           </a:xfrm>
           <a:prstGeom prst="rect">
             <a:avLst/>
@@ -23275,30 +24328,30 @@
               <a:buNone/>
             </a:pPr>
             <a:r>
-              <a:rPr lang="en-US" sz="1350" b="1" dirty="0">
-                <a:solidFill>
-                  <a:srgbClr val="FFFFFF"/>
-                </a:solidFill>
-                <a:latin typeface="Calibri" pitchFamily="34" charset="0"/>
-                <a:ea typeface="Calibri" pitchFamily="34" charset="-122"/>
-                <a:cs typeface="Calibri" pitchFamily="34" charset="-120"/>
-              </a:rPr>
-              <a:t>Strategic value: what it's worth to the right buyer</a:t>
-            </a:r>
-            <a:endParaRPr lang="en-US" sz="1350" dirty="0"/>
-          </a:p>
-        </p:txBody>
-      </p:sp>
-      <p:sp>
-        <p:nvSpPr>
-          <p:cNvPr id="15" name="Text 13"/>
-          <p:cNvSpPr/>
-          <p:nvPr/>
-        </p:nvSpPr>
-        <p:spPr>
-          <a:xfrm>
-            <a:off x="1115568" y="4279392"/>
-            <a:ext cx="10527487" cy="658368"/>
+              <a:rPr lang="en-US" sz="2100" b="1" dirty="0">
+                <a:solidFill>
+                  <a:srgbClr val="1C1F26"/>
+                </a:solidFill>
+                <a:latin typeface="Cambria" pitchFamily="34" charset="0"/>
+                <a:ea typeface="Cambria" pitchFamily="34" charset="-122"/>
+                <a:cs typeface="Cambria" pitchFamily="34" charset="-120"/>
+              </a:rPr>
+              <a:t>3 yrs</a:t>
+            </a:r>
+            <a:endParaRPr lang="en-US" sz="2100" dirty="0"/>
+          </a:p>
+        </p:txBody>
+      </p:sp>
+      <p:sp>
+        <p:nvSpPr>
+          <p:cNvPr id="11" name="Text 8"/>
+          <p:cNvSpPr/>
+          <p:nvPr/>
+        </p:nvSpPr>
+        <p:spPr>
+          <a:xfrm>
+            <a:off x="7223760" y="4480560"/>
+            <a:ext cx="4419295" cy="685800"/>
           </a:xfrm>
           <a:prstGeom prst="rect">
             <a:avLst/>
@@ -23317,91 +24370,52 @@
               <a:buNone/>
             </a:pPr>
             <a:r>
-              <a:rPr lang="en-US" sz="1000" dirty="0">
-                <a:solidFill>
-                  <a:srgbClr val="CBD3DC"/>
-                </a:solidFill>
-                <a:latin typeface="Calibri" pitchFamily="34" charset="0"/>
-                <a:ea typeface="Calibri" pitchFamily="34" charset="-122"/>
-                <a:cs typeface="Calibri" pitchFamily="34" charset="-120"/>
-              </a:rPr>
-              <a:t>An OEM wanting captive supply, or a foundry group wanting instant access to Datre's Tier-1 relationships, avoids the same multi-year, uncertain-utilization qualification cost any new entrant faces. That's the ceiling few generic buyers can pay — and only a narrow buyer set can underwrite it.</a:t>
-            </a:r>
-            <a:endParaRPr lang="en-US" sz="1000" dirty="0"/>
-          </a:p>
-        </p:txBody>
-      </p:sp>
-      <p:sp>
-        <p:nvSpPr>
-          <p:cNvPr id="16" name="Shape 14"/>
-          <p:cNvSpPr/>
-          <p:nvPr/>
-        </p:nvSpPr>
-        <p:spPr>
-          <a:xfrm>
-            <a:off x="548640" y="5029200"/>
-            <a:ext cx="11094415" cy="1005840"/>
+              <a:rPr lang="en-US" sz="950" dirty="0">
+                <a:solidFill>
+                  <a:srgbClr val="3A4553"/>
+                </a:solidFill>
+                <a:latin typeface="Calibri" pitchFamily="34" charset="0"/>
+                <a:ea typeface="Calibri" pitchFamily="34" charset="-122"/>
+                <a:cs typeface="Calibri" pitchFamily="34" charset="-120"/>
+              </a:rPr>
+              <a:t>Straight years of real audited profit (FY23-25) this same balance sheet has been earning</a:t>
+            </a:r>
+            <a:endParaRPr lang="en-US" sz="950" dirty="0"/>
+          </a:p>
+        </p:txBody>
+      </p:sp>
+      <p:sp>
+        <p:nvSpPr>
+          <p:cNvPr id="12" name="Shape 9"/>
+          <p:cNvSpPr/>
+          <p:nvPr/>
+        </p:nvSpPr>
+        <p:spPr>
+          <a:xfrm>
+            <a:off x="548640" y="5669280"/>
+            <a:ext cx="11094415" cy="777240"/>
           </a:xfrm>
           <a:prstGeom prst="roundRect">
             <a:avLst>
-              <a:gd name="adj" fmla="val 7273"/>
+              <a:gd name="adj" fmla="val 9412"/>
             </a:avLst>
           </a:prstGeom>
           <a:solidFill>
-            <a:srgbClr val="262B34"/>
+            <a:srgbClr val="FBEEEC"/>
           </a:solidFill>
           <a:ln/>
         </p:spPr>
       </p:sp>
       <p:sp>
         <p:nvSpPr>
-          <p:cNvPr id="17" name="Text 15"/>
-          <p:cNvSpPr/>
-          <p:nvPr/>
-        </p:nvSpPr>
-        <p:spPr>
-          <a:xfrm>
-            <a:off x="822960" y="5166360"/>
-            <a:ext cx="10545775" cy="274320"/>
-          </a:xfrm>
-          <a:prstGeom prst="rect">
-            <a:avLst/>
-          </a:prstGeom>
-          <a:noFill/>
-          <a:ln/>
-        </p:spPr>
-        <p:txBody>
-          <a:bodyPr wrap="square" lIns="0" tIns="0" rIns="0" bIns="0" rtlCol="0" anchor="ctr"/>
-          <a:lstStyle/>
-          <a:p>
-            <a:pPr indent="0" marL="0">
-              <a:buNone/>
-            </a:pPr>
-            <a:r>
-              <a:rPr lang="en-US" sz="1000" b="1" spc="100" kern="0" dirty="0">
-                <a:solidFill>
-                  <a:srgbClr val="E8B84B"/>
-                </a:solidFill>
-                <a:latin typeface="Calibri" pitchFamily="34" charset="0"/>
-                <a:ea typeface="Calibri" pitchFamily="34" charset="-122"/>
-                <a:cs typeface="Calibri" pitchFamily="34" charset="-120"/>
-              </a:rPr>
-              <a:t>RECOMMENDATION</a:t>
-            </a:r>
-            <a:endParaRPr lang="en-US" sz="1000" dirty="0"/>
-          </a:p>
-        </p:txBody>
-      </p:sp>
-      <p:sp>
-        <p:nvSpPr>
-          <p:cNvPr id="18" name="Text 16"/>
-          <p:cNvSpPr/>
-          <p:nvPr/>
-        </p:nvSpPr>
-        <p:spPr>
-          <a:xfrm>
-            <a:off x="822960" y="5440680"/>
-            <a:ext cx="10545775" cy="548640"/>
+          <p:cNvPr id="13" name="Text 10"/>
+          <p:cNvSpPr/>
+          <p:nvPr/>
+        </p:nvSpPr>
+        <p:spPr>
+          <a:xfrm>
+            <a:off x="777240" y="5669280"/>
+            <a:ext cx="10637215" cy="777240"/>
           </a:xfrm>
           <a:prstGeom prst="rect">
             <a:avLst/>
@@ -23415,70 +24429,28 @@
           <a:p>
             <a:pPr indent="0" marL="0">
               <a:lnSpc>
-                <a:spcPct val="110000"/>
+                <a:spcPct val="112000"/>
               </a:lnSpc>
               <a:buNone/>
             </a:pPr>
             <a:r>
-              <a:rPr lang="en-US" sz="1000" dirty="0">
-                <a:solidFill>
-                  <a:srgbClr val="FFFFFF"/>
-                </a:solidFill>
-                <a:latin typeface="Calibri" pitchFamily="34" charset="0"/>
-                <a:ea typeface="Calibri" pitchFamily="34" charset="-122"/>
-                <a:cs typeface="Calibri" pitchFamily="34" charset="-120"/>
-              </a:rPr>
-              <a:t>Negotiate on earnings capacity plus a named strategic premium, not on net-asset value of 30-year-old machinery. A thin pool of qualified buyers is a sale-process problem, solved with a targeted and patient process — not a reason to discount enterprise value to book.</a:t>
-            </a:r>
-            <a:endParaRPr lang="en-US" sz="1000" dirty="0"/>
-          </a:p>
-        </p:txBody>
-      </p:sp>
-      <p:sp>
-        <p:nvSpPr>
-          <p:cNvPr id="19" name="Text 17"/>
-          <p:cNvSpPr/>
-          <p:nvPr/>
-        </p:nvSpPr>
-        <p:spPr>
-          <a:xfrm>
-            <a:off x="548640" y="6144768"/>
-            <a:ext cx="11094415" cy="320040"/>
-          </a:xfrm>
-          <a:prstGeom prst="rect">
-            <a:avLst/>
-          </a:prstGeom>
-          <a:noFill/>
-          <a:ln/>
-        </p:spPr>
-        <p:txBody>
-          <a:bodyPr wrap="square" lIns="0" tIns="0" rIns="0" bIns="0" rtlCol="0" anchor="ctr"/>
-          <a:lstStyle/>
-          <a:p>
-            <a:pPr indent="0" marL="0">
-              <a:lnSpc>
-                <a:spcPct val="110000"/>
-              </a:lnSpc>
-              <a:buNone/>
-            </a:pPr>
-            <a:r>
-              <a:rPr lang="en-US" sz="850" i="1" dirty="0">
-                <a:solidFill>
-                  <a:srgbClr val="9AA2AD"/>
-                </a:solidFill>
-                <a:latin typeface="Calibri" pitchFamily="34" charset="0"/>
-                <a:ea typeface="Calibri" pitchFamily="34" charset="-122"/>
-                <a:cs typeface="Calibri" pitchFamily="34" charset="-120"/>
-              </a:rPr>
-              <a:t>This framework uses Datre's own audited and internal records for the asset and earnings figures; the FMV multiples and the existence/identity of a strategic buyer are illustrative and unverified. Recommend a formal valuation (registered valuer / IBBI standards) before using this for negotiation.</a:t>
-            </a:r>
-            <a:endParaRPr lang="en-US" sz="850" dirty="0"/>
-          </a:p>
-        </p:txBody>
-      </p:sp>
-      <p:sp>
-        <p:nvSpPr>
-          <p:cNvPr id="20" name="Text 18"/>
+              <a:rPr lang="en-US" sz="950" i="1" dirty="0">
+                <a:solidFill>
+                  <a:srgbClr val="B8453F"/>
+                </a:solidFill>
+                <a:latin typeface="Calibri" pitchFamily="34" charset="0"/>
+                <a:ea typeface="Calibri" pitchFamily="34" charset="-122"/>
+                <a:cs typeface="Calibri" pitchFamily="34" charset="-120"/>
+              </a:rPr>
+              <a:t>Even the lightest capitalized-earnings estimate (4x PAT ≈ ₹5.7 Cr) is more than 3x the combined book value of every fixed asset on the balance sheet. A pure NAV view can't explain three years of real cash profit — the model, not the business, is the thing that's wrong here.</a:t>
+            </a:r>
+            <a:endParaRPr lang="en-US" sz="950" dirty="0"/>
+          </a:p>
+        </p:txBody>
+      </p:sp>
+      <p:sp>
+        <p:nvSpPr>
+          <p:cNvPr id="14" name="Text 11"/>
           <p:cNvSpPr/>
           <p:nvPr/>
         </p:nvSpPr>
@@ -23503,7 +24475,7 @@
             <a:r>
               <a:rPr lang="en-US" sz="800" dirty="0">
                 <a:solidFill>
-                  <a:srgbClr val="8B93A0"/>
+                  <a:srgbClr val="9AA2AD"/>
                 </a:solidFill>
                 <a:latin typeface="Calibri" pitchFamily="34" charset="0"/>
                 <a:ea typeface="Calibri" pitchFamily="34" charset="-122"/>
@@ -23517,7 +24489,7 @@
       </p:sp>
       <p:sp>
         <p:nvSpPr>
-          <p:cNvPr id="21" name="Text 19"/>
+          <p:cNvPr id="15" name="Text 12"/>
           <p:cNvSpPr/>
           <p:nvPr/>
         </p:nvSpPr>
@@ -23542,730 +24514,7 @@
             <a:r>
               <a:rPr lang="en-US" sz="800" dirty="0">
                 <a:solidFill>
-                  <a:srgbClr val="8B93A0"/>
-                </a:solidFill>
-                <a:latin typeface="Calibri" pitchFamily="34" charset="0"/>
-                <a:ea typeface="Calibri" pitchFamily="34" charset="-122"/>
-                <a:cs typeface="Calibri" pitchFamily="34" charset="-120"/>
-              </a:rPr>
-              <a:t>26</a:t>
-            </a:r>
-            <a:endParaRPr lang="en-US" sz="800" dirty="0"/>
-          </a:p>
-        </p:txBody>
-      </p:sp>
-    </p:spTree>
-  </p:cSld>
-  <p:clrMapOvr>
-    <a:masterClrMapping/>
-  </p:clrMapOvr>
-</p:sld>
-</file>
-
-<file path=ppt/slides/slide27.xml><?xml version="1.0" encoding="utf-8"?>
-<p:sld xmlns:a="http://schemas.openxmlformats.org/drawingml/2006/main" xmlns:r="http://schemas.openxmlformats.org/officeDocument/2006/relationships" xmlns:p="http://schemas.openxmlformats.org/presentationml/2006/main">
-  <p:cSld name="Slide 27">
-    <p:bg>
-      <p:bgPr>
-        <a:solidFill>
-          <a:srgbClr val="1C1F26"/>
-        </a:solidFill>
-      </p:bgPr>
-    </p:bg>
-    <p:spTree>
-      <p:nvGrpSpPr>
-        <p:cNvPr id="1" name=""/>
-        <p:cNvGrpSpPr/>
-        <p:nvPr/>
-      </p:nvGrpSpPr>
-      <p:grpSpPr>
-        <a:xfrm>
-          <a:off x="0" y="0"/>
-          <a:ext cx="0" cy="0"/>
-          <a:chOff x="0" y="0"/>
-          <a:chExt cx="0" cy="0"/>
-        </a:xfrm>
-      </p:grpSpPr>
-      <p:sp>
-        <p:nvSpPr>
-          <p:cNvPr id="2" name="Text 0"/>
-          <p:cNvSpPr/>
-          <p:nvPr/>
-        </p:nvSpPr>
-        <p:spPr>
-          <a:xfrm>
-            <a:off x="548640" y="457200"/>
-            <a:ext cx="4572000" cy="274320"/>
-          </a:xfrm>
-          <a:prstGeom prst="rect">
-            <a:avLst/>
-          </a:prstGeom>
-          <a:noFill/>
-          <a:ln/>
-        </p:spPr>
-        <p:txBody>
-          <a:bodyPr wrap="square" lIns="0" tIns="0" rIns="0" bIns="0" rtlCol="0" anchor="ctr"/>
-          <a:lstStyle/>
-          <a:p>
-            <a:pPr indent="0" marL="0">
-              <a:buNone/>
-            </a:pPr>
-            <a:r>
-              <a:rPr lang="en-US" sz="1100" b="1" spc="200" kern="0" dirty="0">
-                <a:solidFill>
-                  <a:srgbClr val="D9622B"/>
-                </a:solidFill>
-                <a:latin typeface="Calibri" pitchFamily="34" charset="0"/>
-                <a:ea typeface="Calibri" pitchFamily="34" charset="-122"/>
-                <a:cs typeface="Calibri" pitchFamily="34" charset="-120"/>
-              </a:rPr>
-              <a:t>INVESTMENT CONSIDERATIONS</a:t>
-            </a:r>
-            <a:endParaRPr lang="en-US" sz="1100" dirty="0"/>
-          </a:p>
-        </p:txBody>
-      </p:sp>
-      <p:sp>
-        <p:nvSpPr>
-          <p:cNvPr id="3" name="Text 1"/>
-          <p:cNvSpPr/>
-          <p:nvPr/>
-        </p:nvSpPr>
-        <p:spPr>
-          <a:xfrm>
-            <a:off x="548640" y="841248"/>
-            <a:ext cx="11094415" cy="685800"/>
-          </a:xfrm>
-          <a:prstGeom prst="rect">
-            <a:avLst/>
-          </a:prstGeom>
-          <a:noFill/>
-          <a:ln/>
-        </p:spPr>
-        <p:txBody>
-          <a:bodyPr wrap="square" lIns="0" tIns="0" rIns="0" bIns="0" rtlCol="0" anchor="ctr"/>
-          <a:lstStyle/>
-          <a:p>
-            <a:pPr algn="l" indent="0" marL="0">
-              <a:buNone/>
-            </a:pPr>
-            <a:r>
-              <a:rPr lang="en-US" sz="3000" b="1" dirty="0">
-                <a:solidFill>
-                  <a:srgbClr val="FFFFFF"/>
-                </a:solidFill>
-                <a:latin typeface="Cambria" pitchFamily="34" charset="0"/>
-                <a:ea typeface="Cambria" pitchFamily="34" charset="-122"/>
-                <a:cs typeface="Cambria" pitchFamily="34" charset="-120"/>
-              </a:rPr>
-              <a:t>A framework for the ask — terms to be finalized with management</a:t>
-            </a:r>
-            <a:endParaRPr lang="en-US" sz="3000" dirty="0"/>
-          </a:p>
-        </p:txBody>
-      </p:sp>
-      <p:sp>
-        <p:nvSpPr>
-          <p:cNvPr id="4" name="Shape 2"/>
-          <p:cNvSpPr/>
-          <p:nvPr/>
-        </p:nvSpPr>
-        <p:spPr>
-          <a:xfrm>
-            <a:off x="548640" y="1783080"/>
-            <a:ext cx="11094415" cy="685800"/>
-          </a:xfrm>
-          <a:prstGeom prst="roundRect">
-            <a:avLst>
-              <a:gd name="adj" fmla="val 8000"/>
-            </a:avLst>
-          </a:prstGeom>
-          <a:solidFill>
-            <a:srgbClr val="262B34"/>
-          </a:solidFill>
-          <a:ln/>
-        </p:spPr>
-      </p:sp>
-      <p:sp>
-        <p:nvSpPr>
-          <p:cNvPr id="5" name="Text 3"/>
-          <p:cNvSpPr/>
-          <p:nvPr/>
-        </p:nvSpPr>
-        <p:spPr>
-          <a:xfrm>
-            <a:off x="777240" y="1783080"/>
-            <a:ext cx="10637215" cy="685800"/>
-          </a:xfrm>
-          <a:prstGeom prst="rect">
-            <a:avLst/>
-          </a:prstGeom>
-          <a:noFill/>
-          <a:ln/>
-        </p:spPr>
-        <p:txBody>
-          <a:bodyPr wrap="square" lIns="0" tIns="0" rIns="0" bIns="0" rtlCol="0" anchor="ctr"/>
-          <a:lstStyle/>
-          <a:p>
-            <a:pPr indent="0" marL="0">
-              <a:lnSpc>
-                <a:spcPct val="110000"/>
-              </a:lnSpc>
-              <a:buNone/>
-            </a:pPr>
-            <a:r>
-              <a:rPr lang="en-US" sz="1030" i="1" dirty="0">
-                <a:solidFill>
-                  <a:srgbClr val="E8B84B"/>
-                </a:solidFill>
-                <a:latin typeface="Calibri" pitchFamily="34" charset="0"/>
-                <a:ea typeface="Calibri" pitchFamily="34" charset="-122"/>
-                <a:cs typeface="Calibri" pitchFamily="34" charset="-120"/>
-              </a:rPr>
-              <a:t>The materials reviewed do not specify a funding quantum, instrument, valuation or use-of-proceeds. What follows is a suggested framework, derived from the financial and operational analysis in this deck — not a management-approved ask.</a:t>
-            </a:r>
-            <a:endParaRPr lang="en-US" sz="1030" dirty="0"/>
-          </a:p>
-        </p:txBody>
-      </p:sp>
-      <p:sp>
-        <p:nvSpPr>
-          <p:cNvPr id="6" name="Shape 4"/>
-          <p:cNvSpPr/>
-          <p:nvPr/>
-        </p:nvSpPr>
-        <p:spPr>
-          <a:xfrm>
-            <a:off x="548640" y="2788920"/>
-            <a:ext cx="457200" cy="457200"/>
-          </a:xfrm>
-          <a:prstGeom prst="ellipse">
-            <a:avLst/>
-          </a:prstGeom>
-          <a:solidFill>
-            <a:srgbClr val="D9622B"/>
-          </a:solidFill>
-          <a:ln/>
-        </p:spPr>
-      </p:sp>
-      <p:sp>
-        <p:nvSpPr>
-          <p:cNvPr id="7" name="Text 5"/>
-          <p:cNvSpPr/>
-          <p:nvPr/>
-        </p:nvSpPr>
-        <p:spPr>
-          <a:xfrm>
-            <a:off x="548640" y="2788920"/>
-            <a:ext cx="457200" cy="457200"/>
-          </a:xfrm>
-          <a:prstGeom prst="rect">
-            <a:avLst/>
-          </a:prstGeom>
-          <a:noFill/>
-          <a:ln/>
-        </p:spPr>
-        <p:txBody>
-          <a:bodyPr wrap="square" lIns="0" tIns="0" rIns="0" bIns="0" rtlCol="0" anchor="ctr"/>
-          <a:lstStyle/>
-          <a:p>
-            <a:pPr algn="ctr" indent="0" marL="0">
-              <a:buNone/>
-            </a:pPr>
-            <a:r>
-              <a:rPr lang="en-US" sz="1300" b="1" dirty="0">
-                <a:solidFill>
-                  <a:srgbClr val="FFFFFF"/>
-                </a:solidFill>
-                <a:latin typeface="Calibri" pitchFamily="34" charset="0"/>
-                <a:ea typeface="Calibri" pitchFamily="34" charset="-122"/>
-                <a:cs typeface="Calibri" pitchFamily="34" charset="-120"/>
-              </a:rPr>
-              <a:t>1</a:t>
-            </a:r>
-            <a:endParaRPr lang="en-US" sz="1300" dirty="0"/>
-          </a:p>
-        </p:txBody>
-      </p:sp>
-      <p:sp>
-        <p:nvSpPr>
-          <p:cNvPr id="8" name="Text 6"/>
-          <p:cNvSpPr/>
-          <p:nvPr/>
-        </p:nvSpPr>
-        <p:spPr>
-          <a:xfrm>
-            <a:off x="1234440" y="2770632"/>
-            <a:ext cx="2926080" cy="502920"/>
-          </a:xfrm>
-          <a:prstGeom prst="rect">
-            <a:avLst/>
-          </a:prstGeom>
-          <a:noFill/>
-          <a:ln/>
-        </p:spPr>
-        <p:txBody>
-          <a:bodyPr wrap="square" lIns="0" tIns="0" rIns="0" bIns="0" rtlCol="0" anchor="ctr"/>
-          <a:lstStyle/>
-          <a:p>
-            <a:pPr indent="0" marL="0">
-              <a:lnSpc>
-                <a:spcPct val="100000"/>
-              </a:lnSpc>
-              <a:buNone/>
-            </a:pPr>
-            <a:r>
-              <a:rPr lang="en-US" sz="1300" b="1" dirty="0">
-                <a:solidFill>
-                  <a:srgbClr val="FFFFFF"/>
-                </a:solidFill>
-                <a:latin typeface="Calibri" pitchFamily="34" charset="0"/>
-                <a:ea typeface="Calibri" pitchFamily="34" charset="-122"/>
-                <a:cs typeface="Calibri" pitchFamily="34" charset="-120"/>
-              </a:rPr>
-              <a:t>Balance-sheet repair</a:t>
-            </a:r>
-            <a:endParaRPr lang="en-US" sz="1300" dirty="0"/>
-          </a:p>
-        </p:txBody>
-      </p:sp>
-      <p:sp>
-        <p:nvSpPr>
-          <p:cNvPr id="9" name="Text 7"/>
-          <p:cNvSpPr/>
-          <p:nvPr/>
-        </p:nvSpPr>
-        <p:spPr>
-          <a:xfrm>
-            <a:off x="4297680" y="2743200"/>
-            <a:ext cx="7345375" cy="731520"/>
-          </a:xfrm>
-          <a:prstGeom prst="rect">
-            <a:avLst/>
-          </a:prstGeom>
-          <a:noFill/>
-          <a:ln/>
-        </p:spPr>
-        <p:txBody>
-          <a:bodyPr wrap="square" lIns="0" tIns="0" rIns="0" bIns="0" rtlCol="0" anchor="t"/>
-          <a:lstStyle/>
-          <a:p>
-            <a:pPr indent="0" marL="0">
-              <a:lnSpc>
-                <a:spcPct val="115000"/>
-              </a:lnSpc>
-              <a:buNone/>
-            </a:pPr>
-            <a:r>
-              <a:rPr lang="en-US" sz="1030" dirty="0">
-                <a:solidFill>
-                  <a:srgbClr val="CBD3DC"/>
-                </a:solidFill>
-                <a:latin typeface="Calibri" pitchFamily="34" charset="0"/>
-                <a:ea typeface="Calibri" pitchFamily="34" charset="-122"/>
-                <a:cs typeface="Calibri" pitchFamily="34" charset="-120"/>
-              </a:rPr>
-              <a:t>Equity infusion or a structured plan to accelerate net worth from -₹1.54 Cr (FY25) to positive, rather than relying solely on ~₹1.4 Cr/yr retained earnings.</a:t>
-            </a:r>
-            <a:endParaRPr lang="en-US" sz="1030" dirty="0"/>
-          </a:p>
-        </p:txBody>
-      </p:sp>
-      <p:sp>
-        <p:nvSpPr>
-          <p:cNvPr id="10" name="Shape 8"/>
-          <p:cNvSpPr/>
-          <p:nvPr/>
-        </p:nvSpPr>
-        <p:spPr>
-          <a:xfrm>
-            <a:off x="548640" y="3840480"/>
-            <a:ext cx="457200" cy="457200"/>
-          </a:xfrm>
-          <a:prstGeom prst="ellipse">
-            <a:avLst/>
-          </a:prstGeom>
-          <a:solidFill>
-            <a:srgbClr val="D9622B"/>
-          </a:solidFill>
-          <a:ln/>
-        </p:spPr>
-      </p:sp>
-      <p:sp>
-        <p:nvSpPr>
-          <p:cNvPr id="11" name="Text 9"/>
-          <p:cNvSpPr/>
-          <p:nvPr/>
-        </p:nvSpPr>
-        <p:spPr>
-          <a:xfrm>
-            <a:off x="548640" y="3840480"/>
-            <a:ext cx="457200" cy="457200"/>
-          </a:xfrm>
-          <a:prstGeom prst="rect">
-            <a:avLst/>
-          </a:prstGeom>
-          <a:noFill/>
-          <a:ln/>
-        </p:spPr>
-        <p:txBody>
-          <a:bodyPr wrap="square" lIns="0" tIns="0" rIns="0" bIns="0" rtlCol="0" anchor="ctr"/>
-          <a:lstStyle/>
-          <a:p>
-            <a:pPr algn="ctr" indent="0" marL="0">
-              <a:buNone/>
-            </a:pPr>
-            <a:r>
-              <a:rPr lang="en-US" sz="1300" b="1" dirty="0">
-                <a:solidFill>
-                  <a:srgbClr val="FFFFFF"/>
-                </a:solidFill>
-                <a:latin typeface="Calibri" pitchFamily="34" charset="0"/>
-                <a:ea typeface="Calibri" pitchFamily="34" charset="-122"/>
-                <a:cs typeface="Calibri" pitchFamily="34" charset="-120"/>
-              </a:rPr>
-              <a:t>2</a:t>
-            </a:r>
-            <a:endParaRPr lang="en-US" sz="1300" dirty="0"/>
-          </a:p>
-        </p:txBody>
-      </p:sp>
-      <p:sp>
-        <p:nvSpPr>
-          <p:cNvPr id="12" name="Text 10"/>
-          <p:cNvSpPr/>
-          <p:nvPr/>
-        </p:nvSpPr>
-        <p:spPr>
-          <a:xfrm>
-            <a:off x="1234440" y="3822192"/>
-            <a:ext cx="2926080" cy="502920"/>
-          </a:xfrm>
-          <a:prstGeom prst="rect">
-            <a:avLst/>
-          </a:prstGeom>
-          <a:noFill/>
-          <a:ln/>
-        </p:spPr>
-        <p:txBody>
-          <a:bodyPr wrap="square" lIns="0" tIns="0" rIns="0" bIns="0" rtlCol="0" anchor="ctr"/>
-          <a:lstStyle/>
-          <a:p>
-            <a:pPr indent="0" marL="0">
-              <a:lnSpc>
-                <a:spcPct val="100000"/>
-              </a:lnSpc>
-              <a:buNone/>
-            </a:pPr>
-            <a:r>
-              <a:rPr lang="en-US" sz="1300" b="1" dirty="0">
-                <a:solidFill>
-                  <a:srgbClr val="FFFFFF"/>
-                </a:solidFill>
-                <a:latin typeface="Calibri" pitchFamily="34" charset="0"/>
-                <a:ea typeface="Calibri" pitchFamily="34" charset="-122"/>
-                <a:cs typeface="Calibri" pitchFamily="34" charset="-120"/>
-              </a:rPr>
-              <a:t>Working-capital bridge</a:t>
-            </a:r>
-            <a:endParaRPr lang="en-US" sz="1300" dirty="0"/>
-          </a:p>
-        </p:txBody>
-      </p:sp>
-      <p:sp>
-        <p:nvSpPr>
-          <p:cNvPr id="13" name="Text 11"/>
-          <p:cNvSpPr/>
-          <p:nvPr/>
-        </p:nvSpPr>
-        <p:spPr>
-          <a:xfrm>
-            <a:off x="4297680" y="3794760"/>
-            <a:ext cx="7345375" cy="731520"/>
-          </a:xfrm>
-          <a:prstGeom prst="rect">
-            <a:avLst/>
-          </a:prstGeom>
-          <a:noFill/>
-          <a:ln/>
-        </p:spPr>
-        <p:txBody>
-          <a:bodyPr wrap="square" lIns="0" tIns="0" rIns="0" bIns="0" rtlCol="0" anchor="t"/>
-          <a:lstStyle/>
-          <a:p>
-            <a:pPr indent="0" marL="0">
-              <a:lnSpc>
-                <a:spcPct val="115000"/>
-              </a:lnSpc>
-              <a:buNone/>
-            </a:pPr>
-            <a:r>
-              <a:rPr lang="en-US" sz="1030" dirty="0">
-                <a:solidFill>
-                  <a:srgbClr val="CBD3DC"/>
-                </a:solidFill>
-                <a:latin typeface="Calibri" pitchFamily="34" charset="0"/>
-                <a:ea typeface="Calibri" pitchFamily="34" charset="-122"/>
-                <a:cs typeface="Calibri" pitchFamily="34" charset="-120"/>
-              </a:rPr>
-              <a:t>Support the Tega/Escorts receivable cycle at the ₹25-30 Cr revenue range Datre has now demonstrated it can reach.</a:t>
-            </a:r>
-            <a:endParaRPr lang="en-US" sz="1030" dirty="0"/>
-          </a:p>
-        </p:txBody>
-      </p:sp>
-      <p:sp>
-        <p:nvSpPr>
-          <p:cNvPr id="14" name="Shape 12"/>
-          <p:cNvSpPr/>
-          <p:nvPr/>
-        </p:nvSpPr>
-        <p:spPr>
-          <a:xfrm>
-            <a:off x="548640" y="4892040"/>
-            <a:ext cx="457200" cy="457200"/>
-          </a:xfrm>
-          <a:prstGeom prst="ellipse">
-            <a:avLst/>
-          </a:prstGeom>
-          <a:solidFill>
-            <a:srgbClr val="D9622B"/>
-          </a:solidFill>
-          <a:ln/>
-        </p:spPr>
-      </p:sp>
-      <p:sp>
-        <p:nvSpPr>
-          <p:cNvPr id="15" name="Text 13"/>
-          <p:cNvSpPr/>
-          <p:nvPr/>
-        </p:nvSpPr>
-        <p:spPr>
-          <a:xfrm>
-            <a:off x="548640" y="4892040"/>
-            <a:ext cx="457200" cy="457200"/>
-          </a:xfrm>
-          <a:prstGeom prst="rect">
-            <a:avLst/>
-          </a:prstGeom>
-          <a:noFill/>
-          <a:ln/>
-        </p:spPr>
-        <p:txBody>
-          <a:bodyPr wrap="square" lIns="0" tIns="0" rIns="0" bIns="0" rtlCol="0" anchor="ctr"/>
-          <a:lstStyle/>
-          <a:p>
-            <a:pPr algn="ctr" indent="0" marL="0">
-              <a:buNone/>
-            </a:pPr>
-            <a:r>
-              <a:rPr lang="en-US" sz="1300" b="1" dirty="0">
-                <a:solidFill>
-                  <a:srgbClr val="FFFFFF"/>
-                </a:solidFill>
-                <a:latin typeface="Calibri" pitchFamily="34" charset="0"/>
-                <a:ea typeface="Calibri" pitchFamily="34" charset="-122"/>
-                <a:cs typeface="Calibri" pitchFamily="34" charset="-120"/>
-              </a:rPr>
-              <a:t>3</a:t>
-            </a:r>
-            <a:endParaRPr lang="en-US" sz="1300" dirty="0"/>
-          </a:p>
-        </p:txBody>
-      </p:sp>
-      <p:sp>
-        <p:nvSpPr>
-          <p:cNvPr id="16" name="Text 14"/>
-          <p:cNvSpPr/>
-          <p:nvPr/>
-        </p:nvSpPr>
-        <p:spPr>
-          <a:xfrm>
-            <a:off x="1234440" y="4873752"/>
-            <a:ext cx="2926080" cy="502920"/>
-          </a:xfrm>
-          <a:prstGeom prst="rect">
-            <a:avLst/>
-          </a:prstGeom>
-          <a:noFill/>
-          <a:ln/>
-        </p:spPr>
-        <p:txBody>
-          <a:bodyPr wrap="square" lIns="0" tIns="0" rIns="0" bIns="0" rtlCol="0" anchor="ctr"/>
-          <a:lstStyle/>
-          <a:p>
-            <a:pPr indent="0" marL="0">
-              <a:lnSpc>
-                <a:spcPct val="100000"/>
-              </a:lnSpc>
-              <a:buNone/>
-            </a:pPr>
-            <a:r>
-              <a:rPr lang="en-US" sz="1300" b="1" dirty="0">
-                <a:solidFill>
-                  <a:srgbClr val="FFFFFF"/>
-                </a:solidFill>
-                <a:latin typeface="Calibri" pitchFamily="34" charset="0"/>
-                <a:ea typeface="Calibri" pitchFamily="34" charset="-122"/>
-                <a:cs typeface="Calibri" pitchFamily="34" charset="-120"/>
-              </a:rPr>
-              <a:t>Quality-systems investment</a:t>
-            </a:r>
-            <a:endParaRPr lang="en-US" sz="1300" dirty="0"/>
-          </a:p>
-        </p:txBody>
-      </p:sp>
-      <p:sp>
-        <p:nvSpPr>
-          <p:cNvPr id="17" name="Text 15"/>
-          <p:cNvSpPr/>
-          <p:nvPr/>
-        </p:nvSpPr>
-        <p:spPr>
-          <a:xfrm>
-            <a:off x="4297680" y="4846320"/>
-            <a:ext cx="7345375" cy="731520"/>
-          </a:xfrm>
-          <a:prstGeom prst="rect">
-            <a:avLst/>
-          </a:prstGeom>
-          <a:noFill/>
-          <a:ln/>
-        </p:spPr>
-        <p:txBody>
-          <a:bodyPr wrap="square" lIns="0" tIns="0" rIns="0" bIns="0" rtlCol="0" anchor="t"/>
-          <a:lstStyle/>
-          <a:p>
-            <a:pPr indent="0" marL="0">
-              <a:lnSpc>
-                <a:spcPct val="115000"/>
-              </a:lnSpc>
-              <a:buNone/>
-            </a:pPr>
-            <a:r>
-              <a:rPr lang="en-US" sz="1030" dirty="0">
-                <a:solidFill>
-                  <a:srgbClr val="CBD3DC"/>
-                </a:solidFill>
-                <a:latin typeface="Calibri" pitchFamily="34" charset="0"/>
-                <a:ea typeface="Calibri" pitchFamily="34" charset="-122"/>
-                <a:cs typeface="Calibri" pitchFamily="34" charset="-120"/>
-              </a:rPr>
-              <a:t>Targeted spend to bring the rejection rate back toward its FY22-23 low (~2.6%) — scrap-cost savings alone should fund a meaningful share of this.</a:t>
-            </a:r>
-            <a:endParaRPr lang="en-US" sz="1030" dirty="0"/>
-          </a:p>
-        </p:txBody>
-      </p:sp>
-      <p:sp>
-        <p:nvSpPr>
-          <p:cNvPr id="18" name="Text 16"/>
-          <p:cNvSpPr/>
-          <p:nvPr/>
-        </p:nvSpPr>
-        <p:spPr>
-          <a:xfrm>
-            <a:off x="548640" y="5989320"/>
-            <a:ext cx="11094415" cy="457200"/>
-          </a:xfrm>
-          <a:prstGeom prst="rect">
-            <a:avLst/>
-          </a:prstGeom>
-          <a:noFill/>
-          <a:ln/>
-        </p:spPr>
-        <p:txBody>
-          <a:bodyPr wrap="square" lIns="0" tIns="0" rIns="0" bIns="0" rtlCol="0" anchor="ctr"/>
-          <a:lstStyle/>
-          <a:p>
-            <a:pPr indent="0" marL="0">
-              <a:lnSpc>
-                <a:spcPct val="110000"/>
-              </a:lnSpc>
-              <a:buNone/>
-            </a:pPr>
-            <a:r>
-              <a:rPr lang="en-US" sz="950" i="1" dirty="0">
-                <a:solidFill>
                   <a:srgbClr val="9AA2AD"/>
-                </a:solidFill>
-                <a:latin typeface="Calibri" pitchFamily="34" charset="0"/>
-                <a:ea typeface="Calibri" pitchFamily="34" charset="-122"/>
-                <a:cs typeface="Calibri" pitchFamily="34" charset="-120"/>
-              </a:rPr>
-              <a:t>Any of the three should be sized against audited FY25 and FY25-26 management accounts, not the figures in this deck alone — and against resolution of the governance flags on slide 14.</a:t>
-            </a:r>
-            <a:endParaRPr lang="en-US" sz="950" dirty="0"/>
-          </a:p>
-        </p:txBody>
-      </p:sp>
-      <p:sp>
-        <p:nvSpPr>
-          <p:cNvPr id="19" name="Text 17"/>
-          <p:cNvSpPr/>
-          <p:nvPr/>
-        </p:nvSpPr>
-        <p:spPr>
-          <a:xfrm>
-            <a:off x="548640" y="6473952"/>
-            <a:ext cx="11094415" cy="274320"/>
-          </a:xfrm>
-          <a:prstGeom prst="rect">
-            <a:avLst/>
-          </a:prstGeom>
-          <a:noFill/>
-          <a:ln/>
-        </p:spPr>
-        <p:txBody>
-          <a:bodyPr wrap="square" lIns="0" tIns="0" rIns="0" bIns="0" rtlCol="0" anchor="ctr"/>
-          <a:lstStyle/>
-          <a:p>
-            <a:pPr algn="l" indent="0" marL="0">
-              <a:buNone/>
-            </a:pPr>
-            <a:r>
-              <a:rPr lang="en-US" sz="800" dirty="0">
-                <a:solidFill>
-                  <a:srgbClr val="8B93A0"/>
-                </a:solidFill>
-                <a:latin typeface="Calibri" pitchFamily="34" charset="0"/>
-                <a:ea typeface="Calibri" pitchFamily="34" charset="-122"/>
-                <a:cs typeface="Calibri" pitchFamily="34" charset="-120"/>
-              </a:rPr>
-              <a:t>DATRE CORPORATION LIMITED  |  CONFIDENTIAL — PREPARED FOR INVESTOR DISCUSSION</a:t>
-            </a:r>
-            <a:endParaRPr lang="en-US" sz="800" dirty="0"/>
-          </a:p>
-        </p:txBody>
-      </p:sp>
-      <p:sp>
-        <p:nvSpPr>
-          <p:cNvPr id="20" name="Text 18"/>
-          <p:cNvSpPr/>
-          <p:nvPr/>
-        </p:nvSpPr>
-        <p:spPr>
-          <a:xfrm>
-            <a:off x="11277295" y="6473952"/>
-            <a:ext cx="457200" cy="274320"/>
-          </a:xfrm>
-          <a:prstGeom prst="rect">
-            <a:avLst/>
-          </a:prstGeom>
-          <a:noFill/>
-          <a:ln/>
-        </p:spPr>
-        <p:txBody>
-          <a:bodyPr wrap="square" lIns="0" tIns="0" rIns="0" bIns="0" rtlCol="0" anchor="ctr"/>
-          <a:lstStyle/>
-          <a:p>
-            <a:pPr algn="r" indent="0" marL="0">
-              <a:buNone/>
-            </a:pPr>
-            <a:r>
-              <a:rPr lang="en-US" sz="800" dirty="0">
-                <a:solidFill>
-                  <a:srgbClr val="8B93A0"/>
                 </a:solidFill>
                 <a:latin typeface="Calibri" pitchFamily="34" charset="0"/>
                 <a:ea typeface="Calibri" pitchFamily="34" charset="-122"/>
@@ -24311,54 +24560,14 @@
       </p:grpSpPr>
       <p:sp>
         <p:nvSpPr>
-          <p:cNvPr id="2" name="Shape 0"/>
-          <p:cNvSpPr/>
-          <p:nvPr/>
-        </p:nvSpPr>
-        <p:spPr>
-          <a:xfrm>
-            <a:off x="9692640" y="-1280160"/>
-            <a:ext cx="4754880" cy="4754880"/>
-          </a:xfrm>
-          <a:prstGeom prst="ellipse">
-            <a:avLst/>
-          </a:prstGeom>
-          <a:solidFill>
-            <a:srgbClr val="262B34"/>
-          </a:solidFill>
-          <a:ln/>
-        </p:spPr>
-      </p:sp>
-      <p:sp>
-        <p:nvSpPr>
-          <p:cNvPr id="3" name="Shape 1"/>
-          <p:cNvSpPr/>
-          <p:nvPr/>
-        </p:nvSpPr>
-        <p:spPr>
-          <a:xfrm>
-            <a:off x="-1463040" y="4572000"/>
-            <a:ext cx="3657600" cy="3657600"/>
-          </a:xfrm>
-          <a:prstGeom prst="ellipse">
-            <a:avLst/>
-          </a:prstGeom>
-          <a:solidFill>
-            <a:srgbClr val="262B34"/>
-          </a:solidFill>
-          <a:ln/>
-        </p:spPr>
-      </p:sp>
-      <p:sp>
-        <p:nvSpPr>
-          <p:cNvPr id="4" name="Text 2"/>
-          <p:cNvSpPr/>
-          <p:nvPr/>
-        </p:nvSpPr>
-        <p:spPr>
-          <a:xfrm>
-            <a:off x="548640" y="2286000"/>
-            <a:ext cx="9144000" cy="731520"/>
+          <p:cNvPr id="2" name="Text 0"/>
+          <p:cNvSpPr/>
+          <p:nvPr/>
+        </p:nvSpPr>
+        <p:spPr>
+          <a:xfrm>
+            <a:off x="548640" y="457200"/>
+            <a:ext cx="4572000" cy="274320"/>
           </a:xfrm>
           <a:prstGeom prst="rect">
             <a:avLst/>
@@ -24374,7 +24583,46 @@
               <a:buNone/>
             </a:pPr>
             <a:r>
-              <a:rPr lang="en-US" sz="3400" b="1" dirty="0">
+              <a:rPr lang="en-US" sz="1100" b="1" spc="200" kern="0" dirty="0">
+                <a:solidFill>
+                  <a:srgbClr val="D9622B"/>
+                </a:solidFill>
+                <a:latin typeface="Calibri" pitchFamily="34" charset="0"/>
+                <a:ea typeface="Calibri" pitchFamily="34" charset="-122"/>
+                <a:cs typeface="Calibri" pitchFamily="34" charset="-120"/>
+              </a:rPr>
+              <a:t>VALUATION — THE BUYER PROBLEM</a:t>
+            </a:r>
+            <a:endParaRPr lang="en-US" sz="1100" dirty="0"/>
+          </a:p>
+        </p:txBody>
+      </p:sp>
+      <p:sp>
+        <p:nvSpPr>
+          <p:cNvPr id="3" name="Text 1"/>
+          <p:cNvSpPr/>
+          <p:nvPr/>
+        </p:nvSpPr>
+        <p:spPr>
+          <a:xfrm>
+            <a:off x="548640" y="841248"/>
+            <a:ext cx="11094415" cy="685800"/>
+          </a:xfrm>
+          <a:prstGeom prst="rect">
+            <a:avLst/>
+          </a:prstGeom>
+          <a:noFill/>
+          <a:ln/>
+        </p:spPr>
+        <p:txBody>
+          <a:bodyPr wrap="square" lIns="0" tIns="0" rIns="0" bIns="0" rtlCol="0" anchor="ctr"/>
+          <a:lstStyle/>
+          <a:p>
+            <a:pPr algn="l" indent="0" marL="0">
+              <a:buNone/>
+            </a:pPr>
+            <a:r>
+              <a:rPr lang="en-US" sz="3000" b="1" dirty="0">
                 <a:solidFill>
                   <a:srgbClr val="FFFFFF"/>
                 </a:solidFill>
@@ -24382,11 +24630,31 @@
                 <a:ea typeface="Cambria" pitchFamily="34" charset="-122"/>
                 <a:cs typeface="Cambria" pitchFamily="34" charset="-120"/>
               </a:rPr>
-              <a:t>Datre Corporation Limited</a:t>
-            </a:r>
-            <a:endParaRPr lang="en-US" sz="3400" dirty="0"/>
-          </a:p>
-        </p:txBody>
+              <a:t>Why it's still hard to sell — and why that isn't a flaw</a:t>
+            </a:r>
+            <a:endParaRPr lang="en-US" sz="3000" dirty="0"/>
+          </a:p>
+        </p:txBody>
+      </p:sp>
+      <p:sp>
+        <p:nvSpPr>
+          <p:cNvPr id="4" name="Shape 2"/>
+          <p:cNvSpPr/>
+          <p:nvPr/>
+        </p:nvSpPr>
+        <p:spPr>
+          <a:xfrm>
+            <a:off x="548640" y="1737360"/>
+            <a:ext cx="384048" cy="384048"/>
+          </a:xfrm>
+          <a:prstGeom prst="ellipse">
+            <a:avLst/>
+          </a:prstGeom>
+          <a:solidFill>
+            <a:srgbClr val="D9622B"/>
+          </a:solidFill>
+          <a:ln/>
+        </p:spPr>
       </p:sp>
       <p:sp>
         <p:nvSpPr>
@@ -24396,8 +24664,47 @@
         </p:nvSpPr>
         <p:spPr>
           <a:xfrm>
-            <a:off x="548640" y="2971800"/>
-            <a:ext cx="9144000" cy="457200"/>
+            <a:off x="548640" y="1737360"/>
+            <a:ext cx="384048" cy="384048"/>
+          </a:xfrm>
+          <a:prstGeom prst="rect">
+            <a:avLst/>
+          </a:prstGeom>
+          <a:noFill/>
+          <a:ln/>
+        </p:spPr>
+        <p:txBody>
+          <a:bodyPr wrap="square" lIns="0" tIns="0" rIns="0" bIns="0" rtlCol="0" anchor="ctr"/>
+          <a:lstStyle/>
+          <a:p>
+            <a:pPr algn="ctr" indent="0" marL="0">
+              <a:buNone/>
+            </a:pPr>
+            <a:r>
+              <a:rPr lang="en-US" sz="1092" b="1" dirty="0">
+                <a:solidFill>
+                  <a:srgbClr val="FFFFFF"/>
+                </a:solidFill>
+                <a:latin typeface="Calibri" pitchFamily="34" charset="0"/>
+                <a:ea typeface="Calibri" pitchFamily="34" charset="-122"/>
+                <a:cs typeface="Calibri" pitchFamily="34" charset="-120"/>
+              </a:rPr>
+              <a:t>1</a:t>
+            </a:r>
+            <a:endParaRPr lang="en-US" sz="1092" dirty="0"/>
+          </a:p>
+        </p:txBody>
+      </p:sp>
+      <p:sp>
+        <p:nvSpPr>
+          <p:cNvPr id="6" name="Text 4"/>
+          <p:cNvSpPr/>
+          <p:nvPr/>
+        </p:nvSpPr>
+        <p:spPr>
+          <a:xfrm>
+            <a:off x="1115568" y="1709928"/>
+            <a:ext cx="10527487" cy="365760"/>
           </a:xfrm>
           <a:prstGeom prst="rect">
             <a:avLst/>
@@ -24413,56 +24720,17 @@
               <a:buNone/>
             </a:pPr>
             <a:r>
-              <a:rPr lang="en-US" sz="1500" i="1" dirty="0">
-                <a:solidFill>
-                  <a:srgbClr val="CBD3DC"/>
-                </a:solidFill>
-                <a:latin typeface="Calibri" pitchFamily="34" charset="0"/>
-                <a:ea typeface="Calibri" pitchFamily="34" charset="-122"/>
-                <a:cs typeface="Calibri" pitchFamily="34" charset="-120"/>
-              </a:rPr>
-              <a:t>Engineering Essence, Manufacturing Personified</a:t>
-            </a:r>
-            <a:endParaRPr lang="en-US" sz="1500" dirty="0"/>
-          </a:p>
-        </p:txBody>
-      </p:sp>
-      <p:sp>
-        <p:nvSpPr>
-          <p:cNvPr id="6" name="Text 4"/>
-          <p:cNvSpPr/>
-          <p:nvPr/>
-        </p:nvSpPr>
-        <p:spPr>
-          <a:xfrm>
-            <a:off x="548640" y="4023360"/>
-            <a:ext cx="2743200" cy="274320"/>
-          </a:xfrm>
-          <a:prstGeom prst="rect">
-            <a:avLst/>
-          </a:prstGeom>
-          <a:noFill/>
-          <a:ln/>
-        </p:spPr>
-        <p:txBody>
-          <a:bodyPr wrap="square" lIns="0" tIns="0" rIns="0" bIns="0" rtlCol="0" anchor="ctr"/>
-          <a:lstStyle/>
-          <a:p>
-            <a:pPr indent="0" marL="0">
-              <a:buNone/>
-            </a:pPr>
-            <a:r>
-              <a:rPr lang="en-US" sz="950" b="1" spc="100" kern="0" dirty="0">
-                <a:solidFill>
-                  <a:srgbClr val="D9622B"/>
-                </a:solidFill>
-                <a:latin typeface="Calibri" pitchFamily="34" charset="0"/>
-                <a:ea typeface="Calibri" pitchFamily="34" charset="-122"/>
-                <a:cs typeface="Calibri" pitchFamily="34" charset="-120"/>
-              </a:rPr>
-              <a:t>REGISTERED OFFICE</a:t>
-            </a:r>
-            <a:endParaRPr lang="en-US" sz="950" dirty="0"/>
+              <a:rPr lang="en-US" sz="1350" b="1" dirty="0">
+                <a:solidFill>
+                  <a:srgbClr val="FFFFFF"/>
+                </a:solidFill>
+                <a:latin typeface="Calibri" pitchFamily="34" charset="0"/>
+                <a:ea typeface="Calibri" pitchFamily="34" charset="-122"/>
+                <a:cs typeface="Calibri" pitchFamily="34" charset="-120"/>
+              </a:rPr>
+              <a:t>Liquidation value: a generic buyer's logic</a:t>
+            </a:r>
+            <a:endParaRPr lang="en-US" sz="1350" dirty="0"/>
           </a:p>
         </p:txBody>
       </p:sp>
@@ -24474,203 +24742,8 @@
         </p:nvSpPr>
         <p:spPr>
           <a:xfrm>
-            <a:off x="548640" y="4279392"/>
-            <a:ext cx="9144000" cy="365760"/>
-          </a:xfrm>
-          <a:prstGeom prst="rect">
-            <a:avLst/>
-          </a:prstGeom>
-          <a:noFill/>
-          <a:ln/>
-        </p:spPr>
-        <p:txBody>
-          <a:bodyPr wrap="square" lIns="0" tIns="0" rIns="0" bIns="0" rtlCol="0" anchor="ctr"/>
-          <a:lstStyle/>
-          <a:p>
-            <a:pPr indent="0" marL="0">
-              <a:buNone/>
-            </a:pPr>
-            <a:r>
-              <a:rPr lang="en-US" sz="1200" dirty="0">
-                <a:solidFill>
-                  <a:srgbClr val="FFFFFF"/>
-                </a:solidFill>
-                <a:latin typeface="Calibri" pitchFamily="34" charset="0"/>
-                <a:ea typeface="Calibri" pitchFamily="34" charset="-122"/>
-                <a:cs typeface="Calibri" pitchFamily="34" charset="-120"/>
-              </a:rPr>
-              <a:t>Sector-III, Falta Industrial Growth Centre, South 24 Parganas, West Bengal 743504, India</a:t>
-            </a:r>
-            <a:endParaRPr lang="en-US" sz="1200" dirty="0"/>
-          </a:p>
-        </p:txBody>
-      </p:sp>
-      <p:sp>
-        <p:nvSpPr>
-          <p:cNvPr id="8" name="Text 6"/>
-          <p:cNvSpPr/>
-          <p:nvPr/>
-        </p:nvSpPr>
-        <p:spPr>
-          <a:xfrm>
-            <a:off x="548640" y="4681728"/>
-            <a:ext cx="2743200" cy="274320"/>
-          </a:xfrm>
-          <a:prstGeom prst="rect">
-            <a:avLst/>
-          </a:prstGeom>
-          <a:noFill/>
-          <a:ln/>
-        </p:spPr>
-        <p:txBody>
-          <a:bodyPr wrap="square" lIns="0" tIns="0" rIns="0" bIns="0" rtlCol="0" anchor="ctr"/>
-          <a:lstStyle/>
-          <a:p>
-            <a:pPr indent="0" marL="0">
-              <a:buNone/>
-            </a:pPr>
-            <a:r>
-              <a:rPr lang="en-US" sz="950" b="1" spc="100" kern="0" dirty="0">
-                <a:solidFill>
-                  <a:srgbClr val="D9622B"/>
-                </a:solidFill>
-                <a:latin typeface="Calibri" pitchFamily="34" charset="0"/>
-                <a:ea typeface="Calibri" pitchFamily="34" charset="-122"/>
-                <a:cs typeface="Calibri" pitchFamily="34" charset="-120"/>
-              </a:rPr>
-              <a:t>CONTACT</a:t>
-            </a:r>
-            <a:endParaRPr lang="en-US" sz="950" dirty="0"/>
-          </a:p>
-        </p:txBody>
-      </p:sp>
-      <p:sp>
-        <p:nvSpPr>
-          <p:cNvPr id="9" name="Text 7"/>
-          <p:cNvSpPr/>
-          <p:nvPr/>
-        </p:nvSpPr>
-        <p:spPr>
-          <a:xfrm>
-            <a:off x="548640" y="4937760"/>
-            <a:ext cx="9144000" cy="365760"/>
-          </a:xfrm>
-          <a:prstGeom prst="rect">
-            <a:avLst/>
-          </a:prstGeom>
-          <a:noFill/>
-          <a:ln/>
-        </p:spPr>
-        <p:txBody>
-          <a:bodyPr wrap="square" lIns="0" tIns="0" rIns="0" bIns="0" rtlCol="0" anchor="ctr"/>
-          <a:lstStyle/>
-          <a:p>
-            <a:pPr indent="0" marL="0">
-              <a:buNone/>
-            </a:pPr>
-            <a:r>
-              <a:rPr lang="en-US" sz="1200" dirty="0">
-                <a:solidFill>
-                  <a:srgbClr val="FFFFFF"/>
-                </a:solidFill>
-                <a:latin typeface="Calibri" pitchFamily="34" charset="0"/>
-                <a:ea typeface="Calibri" pitchFamily="34" charset="-122"/>
-                <a:cs typeface="Calibri" pitchFamily="34" charset="-120"/>
-              </a:rPr>
-              <a:t>sales@datre.com  ·  hr@datre.com  ·  www.datre.in</a:t>
-            </a:r>
-            <a:endParaRPr lang="en-US" sz="1200" dirty="0"/>
-          </a:p>
-        </p:txBody>
-      </p:sp>
-      <p:sp>
-        <p:nvSpPr>
-          <p:cNvPr id="10" name="Text 8"/>
-          <p:cNvSpPr/>
-          <p:nvPr/>
-        </p:nvSpPr>
-        <p:spPr>
-          <a:xfrm>
-            <a:off x="548640" y="5340096"/>
-            <a:ext cx="2743200" cy="274320"/>
-          </a:xfrm>
-          <a:prstGeom prst="rect">
-            <a:avLst/>
-          </a:prstGeom>
-          <a:noFill/>
-          <a:ln/>
-        </p:spPr>
-        <p:txBody>
-          <a:bodyPr wrap="square" lIns="0" tIns="0" rIns="0" bIns="0" rtlCol="0" anchor="ctr"/>
-          <a:lstStyle/>
-          <a:p>
-            <a:pPr indent="0" marL="0">
-              <a:buNone/>
-            </a:pPr>
-            <a:r>
-              <a:rPr lang="en-US" sz="950" b="1" spc="100" kern="0" dirty="0">
-                <a:solidFill>
-                  <a:srgbClr val="D9622B"/>
-                </a:solidFill>
-                <a:latin typeface="Calibri" pitchFamily="34" charset="0"/>
-                <a:ea typeface="Calibri" pitchFamily="34" charset="-122"/>
-                <a:cs typeface="Calibri" pitchFamily="34" charset="-120"/>
-              </a:rPr>
-              <a:t>PREPARED FOR</a:t>
-            </a:r>
-            <a:endParaRPr lang="en-US" sz="950" dirty="0"/>
-          </a:p>
-        </p:txBody>
-      </p:sp>
-      <p:sp>
-        <p:nvSpPr>
-          <p:cNvPr id="11" name="Text 9"/>
-          <p:cNvSpPr/>
-          <p:nvPr/>
-        </p:nvSpPr>
-        <p:spPr>
-          <a:xfrm>
-            <a:off x="548640" y="5596128"/>
-            <a:ext cx="9144000" cy="365760"/>
-          </a:xfrm>
-          <a:prstGeom prst="rect">
-            <a:avLst/>
-          </a:prstGeom>
-          <a:noFill/>
-          <a:ln/>
-        </p:spPr>
-        <p:txBody>
-          <a:bodyPr wrap="square" lIns="0" tIns="0" rIns="0" bIns="0" rtlCol="0" anchor="ctr"/>
-          <a:lstStyle/>
-          <a:p>
-            <a:pPr indent="0" marL="0">
-              <a:buNone/>
-            </a:pPr>
-            <a:r>
-              <a:rPr lang="en-US" sz="1200" dirty="0">
-                <a:solidFill>
-                  <a:srgbClr val="FFFFFF"/>
-                </a:solidFill>
-                <a:latin typeface="Calibri" pitchFamily="34" charset="0"/>
-                <a:ea typeface="Calibri" pitchFamily="34" charset="-122"/>
-                <a:cs typeface="Calibri" pitchFamily="34" charset="-120"/>
-              </a:rPr>
-              <a:t>Investor discussion — Indranil Dutta, Chief Executive Officer</a:t>
-            </a:r>
-            <a:endParaRPr lang="en-US" sz="1200" dirty="0"/>
-          </a:p>
-        </p:txBody>
-      </p:sp>
-      <p:sp>
-        <p:nvSpPr>
-          <p:cNvPr id="12" name="Text 10"/>
-          <p:cNvSpPr/>
-          <p:nvPr/>
-        </p:nvSpPr>
-        <p:spPr>
-          <a:xfrm>
-            <a:off x="548640" y="5943600"/>
-            <a:ext cx="11094415" cy="640080"/>
+            <a:off x="1115568" y="2084832"/>
+            <a:ext cx="10527487" cy="658368"/>
           </a:xfrm>
           <a:prstGeom prst="rect">
             <a:avLst/>
@@ -24689,15 +24762,440 @@
               <a:buNone/>
             </a:pPr>
             <a:r>
+              <a:rPr lang="en-US" sz="1000" dirty="0">
+                <a:solidFill>
+                  <a:srgbClr val="CBD3DC"/>
+                </a:solidFill>
+                <a:latin typeface="Calibri" pitchFamily="34" charset="0"/>
+                <a:ea typeface="Calibri" pitchFamily="34" charset="-122"/>
+                <a:cs typeface="Calibri" pitchFamily="34" charset="-120"/>
+              </a:rPr>
+              <a:t>A machinery dealer or plot buyer can only underwrite what they can verify and reuse immediately — the hardware. They have no way to price 25-30 years of heat-treatment process history, RDSO/OEM qualifications, or a customer book earned through years of trial batches and audits.</a:t>
+            </a:r>
+            <a:endParaRPr lang="en-US" sz="1000" dirty="0"/>
+          </a:p>
+        </p:txBody>
+      </p:sp>
+      <p:sp>
+        <p:nvSpPr>
+          <p:cNvPr id="8" name="Shape 6"/>
+          <p:cNvSpPr/>
+          <p:nvPr/>
+        </p:nvSpPr>
+        <p:spPr>
+          <a:xfrm>
+            <a:off x="548640" y="2834640"/>
+            <a:ext cx="384048" cy="384048"/>
+          </a:xfrm>
+          <a:prstGeom prst="ellipse">
+            <a:avLst/>
+          </a:prstGeom>
+          <a:solidFill>
+            <a:srgbClr val="D9622B"/>
+          </a:solidFill>
+          <a:ln/>
+        </p:spPr>
+      </p:sp>
+      <p:sp>
+        <p:nvSpPr>
+          <p:cNvPr id="9" name="Text 7"/>
+          <p:cNvSpPr/>
+          <p:nvPr/>
+        </p:nvSpPr>
+        <p:spPr>
+          <a:xfrm>
+            <a:off x="548640" y="2834640"/>
+            <a:ext cx="384048" cy="384048"/>
+          </a:xfrm>
+          <a:prstGeom prst="rect">
+            <a:avLst/>
+          </a:prstGeom>
+          <a:noFill/>
+          <a:ln/>
+        </p:spPr>
+        <p:txBody>
+          <a:bodyPr wrap="square" lIns="0" tIns="0" rIns="0" bIns="0" rtlCol="0" anchor="ctr"/>
+          <a:lstStyle/>
+          <a:p>
+            <a:pPr algn="ctr" indent="0" marL="0">
+              <a:buNone/>
+            </a:pPr>
+            <a:r>
+              <a:rPr lang="en-US" sz="1092" b="1" dirty="0">
+                <a:solidFill>
+                  <a:srgbClr val="FFFFFF"/>
+                </a:solidFill>
+                <a:latin typeface="Calibri" pitchFamily="34" charset="0"/>
+                <a:ea typeface="Calibri" pitchFamily="34" charset="-122"/>
+                <a:cs typeface="Calibri" pitchFamily="34" charset="-120"/>
+              </a:rPr>
+              <a:t>2</a:t>
+            </a:r>
+            <a:endParaRPr lang="en-US" sz="1092" dirty="0"/>
+          </a:p>
+        </p:txBody>
+      </p:sp>
+      <p:sp>
+        <p:nvSpPr>
+          <p:cNvPr id="10" name="Text 8"/>
+          <p:cNvSpPr/>
+          <p:nvPr/>
+        </p:nvSpPr>
+        <p:spPr>
+          <a:xfrm>
+            <a:off x="1115568" y="2807208"/>
+            <a:ext cx="10527487" cy="365760"/>
+          </a:xfrm>
+          <a:prstGeom prst="rect">
+            <a:avLst/>
+          </a:prstGeom>
+          <a:noFill/>
+          <a:ln/>
+        </p:spPr>
+        <p:txBody>
+          <a:bodyPr wrap="square" lIns="0" tIns="0" rIns="0" bIns="0" rtlCol="0" anchor="ctr"/>
+          <a:lstStyle/>
+          <a:p>
+            <a:pPr indent="0" marL="0">
+              <a:buNone/>
+            </a:pPr>
+            <a:r>
+              <a:rPr lang="en-US" sz="1350" b="1" dirty="0">
+                <a:solidFill>
+                  <a:srgbClr val="FFFFFF"/>
+                </a:solidFill>
+                <a:latin typeface="Calibri" pitchFamily="34" charset="0"/>
+                <a:ea typeface="Calibri" pitchFamily="34" charset="-122"/>
+                <a:cs typeface="Calibri" pitchFamily="34" charset="-120"/>
+              </a:rPr>
+              <a:t>Fair market value: what the business earns standalone</a:t>
+            </a:r>
+            <a:endParaRPr lang="en-US" sz="1350" dirty="0"/>
+          </a:p>
+        </p:txBody>
+      </p:sp>
+      <p:sp>
+        <p:nvSpPr>
+          <p:cNvPr id="11" name="Text 9"/>
+          <p:cNvSpPr/>
+          <p:nvPr/>
+        </p:nvSpPr>
+        <p:spPr>
+          <a:xfrm>
+            <a:off x="1115568" y="3182112"/>
+            <a:ext cx="10527487" cy="658368"/>
+          </a:xfrm>
+          <a:prstGeom prst="rect">
+            <a:avLst/>
+          </a:prstGeom>
+          <a:noFill/>
+          <a:ln/>
+        </p:spPr>
+        <p:txBody>
+          <a:bodyPr wrap="square" lIns="0" tIns="0" rIns="0" bIns="0" rtlCol="0" anchor="ctr"/>
+          <a:lstStyle/>
+          <a:p>
+            <a:pPr indent="0" marL="0">
+              <a:lnSpc>
+                <a:spcPct val="115000"/>
+              </a:lnSpc>
+              <a:buNone/>
+            </a:pPr>
+            <a:r>
+              <a:rPr lang="en-US" sz="1000" dirty="0">
+                <a:solidFill>
+                  <a:srgbClr val="CBD3DC"/>
+                </a:solidFill>
+                <a:latin typeface="Calibri" pitchFamily="34" charset="0"/>
+                <a:ea typeface="Calibri" pitchFamily="34" charset="-122"/>
+                <a:cs typeface="Calibri" pitchFamily="34" charset="-120"/>
+              </a:rPr>
+              <a:t>Even on light, illustrative multiples, capitalized earnings already clear 3x+ the entire fixed-asset book (slide 27). This is the value a rational financial buyer, with no synergy, would underwrite.</a:t>
+            </a:r>
+            <a:endParaRPr lang="en-US" sz="1000" dirty="0"/>
+          </a:p>
+        </p:txBody>
+      </p:sp>
+      <p:sp>
+        <p:nvSpPr>
+          <p:cNvPr id="12" name="Shape 10"/>
+          <p:cNvSpPr/>
+          <p:nvPr/>
+        </p:nvSpPr>
+        <p:spPr>
+          <a:xfrm>
+            <a:off x="548640" y="3931920"/>
+            <a:ext cx="384048" cy="384048"/>
+          </a:xfrm>
+          <a:prstGeom prst="ellipse">
+            <a:avLst/>
+          </a:prstGeom>
+          <a:solidFill>
+            <a:srgbClr val="D9622B"/>
+          </a:solidFill>
+          <a:ln/>
+        </p:spPr>
+      </p:sp>
+      <p:sp>
+        <p:nvSpPr>
+          <p:cNvPr id="13" name="Text 11"/>
+          <p:cNvSpPr/>
+          <p:nvPr/>
+        </p:nvSpPr>
+        <p:spPr>
+          <a:xfrm>
+            <a:off x="548640" y="3931920"/>
+            <a:ext cx="384048" cy="384048"/>
+          </a:xfrm>
+          <a:prstGeom prst="rect">
+            <a:avLst/>
+          </a:prstGeom>
+          <a:noFill/>
+          <a:ln/>
+        </p:spPr>
+        <p:txBody>
+          <a:bodyPr wrap="square" lIns="0" tIns="0" rIns="0" bIns="0" rtlCol="0" anchor="ctr"/>
+          <a:lstStyle/>
+          <a:p>
+            <a:pPr algn="ctr" indent="0" marL="0">
+              <a:buNone/>
+            </a:pPr>
+            <a:r>
+              <a:rPr lang="en-US" sz="1092" b="1" dirty="0">
+                <a:solidFill>
+                  <a:srgbClr val="FFFFFF"/>
+                </a:solidFill>
+                <a:latin typeface="Calibri" pitchFamily="34" charset="0"/>
+                <a:ea typeface="Calibri" pitchFamily="34" charset="-122"/>
+                <a:cs typeface="Calibri" pitchFamily="34" charset="-120"/>
+              </a:rPr>
+              <a:t>3</a:t>
+            </a:r>
+            <a:endParaRPr lang="en-US" sz="1092" dirty="0"/>
+          </a:p>
+        </p:txBody>
+      </p:sp>
+      <p:sp>
+        <p:nvSpPr>
+          <p:cNvPr id="14" name="Text 12"/>
+          <p:cNvSpPr/>
+          <p:nvPr/>
+        </p:nvSpPr>
+        <p:spPr>
+          <a:xfrm>
+            <a:off x="1115568" y="3904488"/>
+            <a:ext cx="10527487" cy="365760"/>
+          </a:xfrm>
+          <a:prstGeom prst="rect">
+            <a:avLst/>
+          </a:prstGeom>
+          <a:noFill/>
+          <a:ln/>
+        </p:spPr>
+        <p:txBody>
+          <a:bodyPr wrap="square" lIns="0" tIns="0" rIns="0" bIns="0" rtlCol="0" anchor="ctr"/>
+          <a:lstStyle/>
+          <a:p>
+            <a:pPr indent="0" marL="0">
+              <a:buNone/>
+            </a:pPr>
+            <a:r>
+              <a:rPr lang="en-US" sz="1350" b="1" dirty="0">
+                <a:solidFill>
+                  <a:srgbClr val="FFFFFF"/>
+                </a:solidFill>
+                <a:latin typeface="Calibri" pitchFamily="34" charset="0"/>
+                <a:ea typeface="Calibri" pitchFamily="34" charset="-122"/>
+                <a:cs typeface="Calibri" pitchFamily="34" charset="-120"/>
+              </a:rPr>
+              <a:t>Strategic value: what it's worth to the right buyer</a:t>
+            </a:r>
+            <a:endParaRPr lang="en-US" sz="1350" dirty="0"/>
+          </a:p>
+        </p:txBody>
+      </p:sp>
+      <p:sp>
+        <p:nvSpPr>
+          <p:cNvPr id="15" name="Text 13"/>
+          <p:cNvSpPr/>
+          <p:nvPr/>
+        </p:nvSpPr>
+        <p:spPr>
+          <a:xfrm>
+            <a:off x="1115568" y="4279392"/>
+            <a:ext cx="10527487" cy="658368"/>
+          </a:xfrm>
+          <a:prstGeom prst="rect">
+            <a:avLst/>
+          </a:prstGeom>
+          <a:noFill/>
+          <a:ln/>
+        </p:spPr>
+        <p:txBody>
+          <a:bodyPr wrap="square" lIns="0" tIns="0" rIns="0" bIns="0" rtlCol="0" anchor="ctr"/>
+          <a:lstStyle/>
+          <a:p>
+            <a:pPr indent="0" marL="0">
+              <a:lnSpc>
+                <a:spcPct val="115000"/>
+              </a:lnSpc>
+              <a:buNone/>
+            </a:pPr>
+            <a:r>
+              <a:rPr lang="en-US" sz="1000" dirty="0">
+                <a:solidFill>
+                  <a:srgbClr val="CBD3DC"/>
+                </a:solidFill>
+                <a:latin typeface="Calibri" pitchFamily="34" charset="0"/>
+                <a:ea typeface="Calibri" pitchFamily="34" charset="-122"/>
+                <a:cs typeface="Calibri" pitchFamily="34" charset="-120"/>
+              </a:rPr>
+              <a:t>An OEM wanting captive supply, or a foundry group wanting instant access to Datre's Tier-1 relationships, avoids the same multi-year, uncertain-utilization qualification cost any new entrant faces. That's the ceiling few generic buyers can pay — and only a narrow buyer set can underwrite it.</a:t>
+            </a:r>
+            <a:endParaRPr lang="en-US" sz="1000" dirty="0"/>
+          </a:p>
+        </p:txBody>
+      </p:sp>
+      <p:sp>
+        <p:nvSpPr>
+          <p:cNvPr id="16" name="Shape 14"/>
+          <p:cNvSpPr/>
+          <p:nvPr/>
+        </p:nvSpPr>
+        <p:spPr>
+          <a:xfrm>
+            <a:off x="548640" y="5029200"/>
+            <a:ext cx="11094415" cy="1005840"/>
+          </a:xfrm>
+          <a:prstGeom prst="roundRect">
+            <a:avLst>
+              <a:gd name="adj" fmla="val 7273"/>
+            </a:avLst>
+          </a:prstGeom>
+          <a:solidFill>
+            <a:srgbClr val="262B34"/>
+          </a:solidFill>
+          <a:ln/>
+        </p:spPr>
+      </p:sp>
+      <p:sp>
+        <p:nvSpPr>
+          <p:cNvPr id="17" name="Text 15"/>
+          <p:cNvSpPr/>
+          <p:nvPr/>
+        </p:nvSpPr>
+        <p:spPr>
+          <a:xfrm>
+            <a:off x="822960" y="5166360"/>
+            <a:ext cx="10545775" cy="274320"/>
+          </a:xfrm>
+          <a:prstGeom prst="rect">
+            <a:avLst/>
+          </a:prstGeom>
+          <a:noFill/>
+          <a:ln/>
+        </p:spPr>
+        <p:txBody>
+          <a:bodyPr wrap="square" lIns="0" tIns="0" rIns="0" bIns="0" rtlCol="0" anchor="ctr"/>
+          <a:lstStyle/>
+          <a:p>
+            <a:pPr indent="0" marL="0">
+              <a:buNone/>
+            </a:pPr>
+            <a:r>
+              <a:rPr lang="en-US" sz="1000" b="1" spc="100" kern="0" dirty="0">
+                <a:solidFill>
+                  <a:srgbClr val="E8B84B"/>
+                </a:solidFill>
+                <a:latin typeface="Calibri" pitchFamily="34" charset="0"/>
+                <a:ea typeface="Calibri" pitchFamily="34" charset="-122"/>
+                <a:cs typeface="Calibri" pitchFamily="34" charset="-120"/>
+              </a:rPr>
+              <a:t>RECOMMENDATION</a:t>
+            </a:r>
+            <a:endParaRPr lang="en-US" sz="1000" dirty="0"/>
+          </a:p>
+        </p:txBody>
+      </p:sp>
+      <p:sp>
+        <p:nvSpPr>
+          <p:cNvPr id="18" name="Text 16"/>
+          <p:cNvSpPr/>
+          <p:nvPr/>
+        </p:nvSpPr>
+        <p:spPr>
+          <a:xfrm>
+            <a:off x="822960" y="5440680"/>
+            <a:ext cx="10545775" cy="548640"/>
+          </a:xfrm>
+          <a:prstGeom prst="rect">
+            <a:avLst/>
+          </a:prstGeom>
+          <a:noFill/>
+          <a:ln/>
+        </p:spPr>
+        <p:txBody>
+          <a:bodyPr wrap="square" lIns="0" tIns="0" rIns="0" bIns="0" rtlCol="0" anchor="ctr"/>
+          <a:lstStyle/>
+          <a:p>
+            <a:pPr indent="0" marL="0">
+              <a:lnSpc>
+                <a:spcPct val="110000"/>
+              </a:lnSpc>
+              <a:buNone/>
+            </a:pPr>
+            <a:r>
+              <a:rPr lang="en-US" sz="1000" dirty="0">
+                <a:solidFill>
+                  <a:srgbClr val="FFFFFF"/>
+                </a:solidFill>
+                <a:latin typeface="Calibri" pitchFamily="34" charset="0"/>
+                <a:ea typeface="Calibri" pitchFamily="34" charset="-122"/>
+                <a:cs typeface="Calibri" pitchFamily="34" charset="-120"/>
+              </a:rPr>
+              <a:t>Negotiate on earnings capacity plus a named strategic premium, not on net-asset value of 30-year-old machinery. A thin pool of qualified buyers is a sale-process problem, solved with a targeted and patient process — not a reason to discount enterprise value to book.</a:t>
+            </a:r>
+            <a:endParaRPr lang="en-US" sz="1000" dirty="0"/>
+          </a:p>
+        </p:txBody>
+      </p:sp>
+      <p:sp>
+        <p:nvSpPr>
+          <p:cNvPr id="19" name="Text 17"/>
+          <p:cNvSpPr/>
+          <p:nvPr/>
+        </p:nvSpPr>
+        <p:spPr>
+          <a:xfrm>
+            <a:off x="548640" y="6144768"/>
+            <a:ext cx="11094415" cy="320040"/>
+          </a:xfrm>
+          <a:prstGeom prst="rect">
+            <a:avLst/>
+          </a:prstGeom>
+          <a:noFill/>
+          <a:ln/>
+        </p:spPr>
+        <p:txBody>
+          <a:bodyPr wrap="square" lIns="0" tIns="0" rIns="0" bIns="0" rtlCol="0" anchor="ctr"/>
+          <a:lstStyle/>
+          <a:p>
+            <a:pPr indent="0" marL="0">
+              <a:lnSpc>
+                <a:spcPct val="110000"/>
+              </a:lnSpc>
+              <a:buNone/>
+            </a:pPr>
+            <a:r>
               <a:rPr lang="en-US" sz="850" i="1" dirty="0">
                 <a:solidFill>
-                  <a:srgbClr val="7A828E"/>
-                </a:solidFill>
-                <a:latin typeface="Calibri" pitchFamily="34" charset="0"/>
-                <a:ea typeface="Calibri" pitchFamily="34" charset="-122"/>
-                <a:cs typeface="Calibri" pitchFamily="34" charset="-120"/>
-              </a:rPr>
-              <a:t>This document consolidates the company's own financial statements, management information system reports and internal analyses. Figures are sourced and dated throughout; where audited and unaudited data diverge, both are shown. Confidential — prepared for internal investor discussion only.</a:t>
+                  <a:srgbClr val="9AA2AD"/>
+                </a:solidFill>
+                <a:latin typeface="Calibri" pitchFamily="34" charset="0"/>
+                <a:ea typeface="Calibri" pitchFamily="34" charset="-122"/>
+                <a:cs typeface="Calibri" pitchFamily="34" charset="-120"/>
+              </a:rPr>
+              <a:t>This framework uses Datre's own audited and internal records for the asset and earnings figures; the FMV multiples and the existence/identity of a strategic buyer are illustrative and unverified. Recommend a formal valuation (registered valuer / IBBI standards) before using this for negotiation.</a:t>
             </a:r>
             <a:endParaRPr lang="en-US" sz="850" dirty="0"/>
           </a:p>
@@ -24705,7 +25203,46 @@
       </p:sp>
       <p:sp>
         <p:nvSpPr>
-          <p:cNvPr id="13" name="Text 11"/>
+          <p:cNvPr id="20" name="Text 18"/>
+          <p:cNvSpPr/>
+          <p:nvPr/>
+        </p:nvSpPr>
+        <p:spPr>
+          <a:xfrm>
+            <a:off x="548640" y="6473952"/>
+            <a:ext cx="11094415" cy="274320"/>
+          </a:xfrm>
+          <a:prstGeom prst="rect">
+            <a:avLst/>
+          </a:prstGeom>
+          <a:noFill/>
+          <a:ln/>
+        </p:spPr>
+        <p:txBody>
+          <a:bodyPr wrap="square" lIns="0" tIns="0" rIns="0" bIns="0" rtlCol="0" anchor="ctr"/>
+          <a:lstStyle/>
+          <a:p>
+            <a:pPr algn="l" indent="0" marL="0">
+              <a:buNone/>
+            </a:pPr>
+            <a:r>
+              <a:rPr lang="en-US" sz="800" dirty="0">
+                <a:solidFill>
+                  <a:srgbClr val="8B93A0"/>
+                </a:solidFill>
+                <a:latin typeface="Calibri" pitchFamily="34" charset="0"/>
+                <a:ea typeface="Calibri" pitchFamily="34" charset="-122"/>
+                <a:cs typeface="Calibri" pitchFamily="34" charset="-120"/>
+              </a:rPr>
+              <a:t>DATRE CORPORATION LIMITED  |  CONFIDENTIAL — PREPARED FOR INVESTOR DISCUSSION</a:t>
+            </a:r>
+            <a:endParaRPr lang="en-US" sz="800" dirty="0"/>
+          </a:p>
+        </p:txBody>
+      </p:sp>
+      <p:sp>
+        <p:nvSpPr>
+          <p:cNvPr id="21" name="Text 19"/>
           <p:cNvSpPr/>
           <p:nvPr/>
         </p:nvSpPr>
@@ -24737,6 +25274,729 @@
                 <a:cs typeface="Calibri" pitchFamily="34" charset="-120"/>
               </a:rPr>
               <a:t>28</a:t>
+            </a:r>
+            <a:endParaRPr lang="en-US" sz="800" dirty="0"/>
+          </a:p>
+        </p:txBody>
+      </p:sp>
+    </p:spTree>
+  </p:cSld>
+  <p:clrMapOvr>
+    <a:masterClrMapping/>
+  </p:clrMapOvr>
+</p:sld>
+</file>
+
+<file path=ppt/slides/slide29.xml><?xml version="1.0" encoding="utf-8"?>
+<p:sld xmlns:a="http://schemas.openxmlformats.org/drawingml/2006/main" xmlns:r="http://schemas.openxmlformats.org/officeDocument/2006/relationships" xmlns:p="http://schemas.openxmlformats.org/presentationml/2006/main">
+  <p:cSld name="Slide 29">
+    <p:bg>
+      <p:bgPr>
+        <a:solidFill>
+          <a:srgbClr val="1C1F26"/>
+        </a:solidFill>
+      </p:bgPr>
+    </p:bg>
+    <p:spTree>
+      <p:nvGrpSpPr>
+        <p:cNvPr id="1" name=""/>
+        <p:cNvGrpSpPr/>
+        <p:nvPr/>
+      </p:nvGrpSpPr>
+      <p:grpSpPr>
+        <a:xfrm>
+          <a:off x="0" y="0"/>
+          <a:ext cx="0" cy="0"/>
+          <a:chOff x="0" y="0"/>
+          <a:chExt cx="0" cy="0"/>
+        </a:xfrm>
+      </p:grpSpPr>
+      <p:sp>
+        <p:nvSpPr>
+          <p:cNvPr id="2" name="Text 0"/>
+          <p:cNvSpPr/>
+          <p:nvPr/>
+        </p:nvSpPr>
+        <p:spPr>
+          <a:xfrm>
+            <a:off x="548640" y="457200"/>
+            <a:ext cx="4572000" cy="274320"/>
+          </a:xfrm>
+          <a:prstGeom prst="rect">
+            <a:avLst/>
+          </a:prstGeom>
+          <a:noFill/>
+          <a:ln/>
+        </p:spPr>
+        <p:txBody>
+          <a:bodyPr wrap="square" lIns="0" tIns="0" rIns="0" bIns="0" rtlCol="0" anchor="ctr"/>
+          <a:lstStyle/>
+          <a:p>
+            <a:pPr indent="0" marL="0">
+              <a:buNone/>
+            </a:pPr>
+            <a:r>
+              <a:rPr lang="en-US" sz="1100" b="1" spc="200" kern="0" dirty="0">
+                <a:solidFill>
+                  <a:srgbClr val="D9622B"/>
+                </a:solidFill>
+                <a:latin typeface="Calibri" pitchFamily="34" charset="0"/>
+                <a:ea typeface="Calibri" pitchFamily="34" charset="-122"/>
+                <a:cs typeface="Calibri" pitchFamily="34" charset="-120"/>
+              </a:rPr>
+              <a:t>INVESTMENT CONSIDERATIONS</a:t>
+            </a:r>
+            <a:endParaRPr lang="en-US" sz="1100" dirty="0"/>
+          </a:p>
+        </p:txBody>
+      </p:sp>
+      <p:sp>
+        <p:nvSpPr>
+          <p:cNvPr id="3" name="Text 1"/>
+          <p:cNvSpPr/>
+          <p:nvPr/>
+        </p:nvSpPr>
+        <p:spPr>
+          <a:xfrm>
+            <a:off x="548640" y="841248"/>
+            <a:ext cx="11094415" cy="685800"/>
+          </a:xfrm>
+          <a:prstGeom prst="rect">
+            <a:avLst/>
+          </a:prstGeom>
+          <a:noFill/>
+          <a:ln/>
+        </p:spPr>
+        <p:txBody>
+          <a:bodyPr wrap="square" lIns="0" tIns="0" rIns="0" bIns="0" rtlCol="0" anchor="ctr"/>
+          <a:lstStyle/>
+          <a:p>
+            <a:pPr algn="l" indent="0" marL="0">
+              <a:buNone/>
+            </a:pPr>
+            <a:r>
+              <a:rPr lang="en-US" sz="3000" b="1" dirty="0">
+                <a:solidFill>
+                  <a:srgbClr val="FFFFFF"/>
+                </a:solidFill>
+                <a:latin typeface="Cambria" pitchFamily="34" charset="0"/>
+                <a:ea typeface="Cambria" pitchFamily="34" charset="-122"/>
+                <a:cs typeface="Cambria" pitchFamily="34" charset="-120"/>
+              </a:rPr>
+              <a:t>A framework for the ask — terms to be finalized with management</a:t>
+            </a:r>
+            <a:endParaRPr lang="en-US" sz="3000" dirty="0"/>
+          </a:p>
+        </p:txBody>
+      </p:sp>
+      <p:sp>
+        <p:nvSpPr>
+          <p:cNvPr id="4" name="Shape 2"/>
+          <p:cNvSpPr/>
+          <p:nvPr/>
+        </p:nvSpPr>
+        <p:spPr>
+          <a:xfrm>
+            <a:off x="548640" y="1783080"/>
+            <a:ext cx="11094415" cy="685800"/>
+          </a:xfrm>
+          <a:prstGeom prst="roundRect">
+            <a:avLst>
+              <a:gd name="adj" fmla="val 8000"/>
+            </a:avLst>
+          </a:prstGeom>
+          <a:solidFill>
+            <a:srgbClr val="262B34"/>
+          </a:solidFill>
+          <a:ln/>
+        </p:spPr>
+      </p:sp>
+      <p:sp>
+        <p:nvSpPr>
+          <p:cNvPr id="5" name="Text 3"/>
+          <p:cNvSpPr/>
+          <p:nvPr/>
+        </p:nvSpPr>
+        <p:spPr>
+          <a:xfrm>
+            <a:off x="777240" y="1783080"/>
+            <a:ext cx="10637215" cy="685800"/>
+          </a:xfrm>
+          <a:prstGeom prst="rect">
+            <a:avLst/>
+          </a:prstGeom>
+          <a:noFill/>
+          <a:ln/>
+        </p:spPr>
+        <p:txBody>
+          <a:bodyPr wrap="square" lIns="0" tIns="0" rIns="0" bIns="0" rtlCol="0" anchor="ctr"/>
+          <a:lstStyle/>
+          <a:p>
+            <a:pPr indent="0" marL="0">
+              <a:lnSpc>
+                <a:spcPct val="110000"/>
+              </a:lnSpc>
+              <a:buNone/>
+            </a:pPr>
+            <a:r>
+              <a:rPr lang="en-US" sz="1030" i="1" dirty="0">
+                <a:solidFill>
+                  <a:srgbClr val="E8B84B"/>
+                </a:solidFill>
+                <a:latin typeface="Calibri" pitchFamily="34" charset="0"/>
+                <a:ea typeface="Calibri" pitchFamily="34" charset="-122"/>
+                <a:cs typeface="Calibri" pitchFamily="34" charset="-120"/>
+              </a:rPr>
+              <a:t>The materials reviewed do not specify a funding quantum, instrument, valuation or use-of-proceeds. What follows is a suggested framework, derived from the financial and operational analysis in this deck — not a management-approved ask.</a:t>
+            </a:r>
+            <a:endParaRPr lang="en-US" sz="1030" dirty="0"/>
+          </a:p>
+        </p:txBody>
+      </p:sp>
+      <p:sp>
+        <p:nvSpPr>
+          <p:cNvPr id="6" name="Shape 4"/>
+          <p:cNvSpPr/>
+          <p:nvPr/>
+        </p:nvSpPr>
+        <p:spPr>
+          <a:xfrm>
+            <a:off x="548640" y="2788920"/>
+            <a:ext cx="457200" cy="457200"/>
+          </a:xfrm>
+          <a:prstGeom prst="ellipse">
+            <a:avLst/>
+          </a:prstGeom>
+          <a:solidFill>
+            <a:srgbClr val="D9622B"/>
+          </a:solidFill>
+          <a:ln/>
+        </p:spPr>
+      </p:sp>
+      <p:sp>
+        <p:nvSpPr>
+          <p:cNvPr id="7" name="Text 5"/>
+          <p:cNvSpPr/>
+          <p:nvPr/>
+        </p:nvSpPr>
+        <p:spPr>
+          <a:xfrm>
+            <a:off x="548640" y="2788920"/>
+            <a:ext cx="457200" cy="457200"/>
+          </a:xfrm>
+          <a:prstGeom prst="rect">
+            <a:avLst/>
+          </a:prstGeom>
+          <a:noFill/>
+          <a:ln/>
+        </p:spPr>
+        <p:txBody>
+          <a:bodyPr wrap="square" lIns="0" tIns="0" rIns="0" bIns="0" rtlCol="0" anchor="ctr"/>
+          <a:lstStyle/>
+          <a:p>
+            <a:pPr algn="ctr" indent="0" marL="0">
+              <a:buNone/>
+            </a:pPr>
+            <a:r>
+              <a:rPr lang="en-US" sz="1300" b="1" dirty="0">
+                <a:solidFill>
+                  <a:srgbClr val="FFFFFF"/>
+                </a:solidFill>
+                <a:latin typeface="Calibri" pitchFamily="34" charset="0"/>
+                <a:ea typeface="Calibri" pitchFamily="34" charset="-122"/>
+                <a:cs typeface="Calibri" pitchFamily="34" charset="-120"/>
+              </a:rPr>
+              <a:t>1</a:t>
+            </a:r>
+            <a:endParaRPr lang="en-US" sz="1300" dirty="0"/>
+          </a:p>
+        </p:txBody>
+      </p:sp>
+      <p:sp>
+        <p:nvSpPr>
+          <p:cNvPr id="8" name="Text 6"/>
+          <p:cNvSpPr/>
+          <p:nvPr/>
+        </p:nvSpPr>
+        <p:spPr>
+          <a:xfrm>
+            <a:off x="1234440" y="2770632"/>
+            <a:ext cx="2926080" cy="502920"/>
+          </a:xfrm>
+          <a:prstGeom prst="rect">
+            <a:avLst/>
+          </a:prstGeom>
+          <a:noFill/>
+          <a:ln/>
+        </p:spPr>
+        <p:txBody>
+          <a:bodyPr wrap="square" lIns="0" tIns="0" rIns="0" bIns="0" rtlCol="0" anchor="ctr"/>
+          <a:lstStyle/>
+          <a:p>
+            <a:pPr indent="0" marL="0">
+              <a:lnSpc>
+                <a:spcPct val="100000"/>
+              </a:lnSpc>
+              <a:buNone/>
+            </a:pPr>
+            <a:r>
+              <a:rPr lang="en-US" sz="1300" b="1" dirty="0">
+                <a:solidFill>
+                  <a:srgbClr val="FFFFFF"/>
+                </a:solidFill>
+                <a:latin typeface="Calibri" pitchFamily="34" charset="0"/>
+                <a:ea typeface="Calibri" pitchFamily="34" charset="-122"/>
+                <a:cs typeface="Calibri" pitchFamily="34" charset="-120"/>
+              </a:rPr>
+              <a:t>Balance-sheet repair</a:t>
+            </a:r>
+            <a:endParaRPr lang="en-US" sz="1300" dirty="0"/>
+          </a:p>
+        </p:txBody>
+      </p:sp>
+      <p:sp>
+        <p:nvSpPr>
+          <p:cNvPr id="9" name="Text 7"/>
+          <p:cNvSpPr/>
+          <p:nvPr/>
+        </p:nvSpPr>
+        <p:spPr>
+          <a:xfrm>
+            <a:off x="4297680" y="2743200"/>
+            <a:ext cx="7345375" cy="731520"/>
+          </a:xfrm>
+          <a:prstGeom prst="rect">
+            <a:avLst/>
+          </a:prstGeom>
+          <a:noFill/>
+          <a:ln/>
+        </p:spPr>
+        <p:txBody>
+          <a:bodyPr wrap="square" lIns="0" tIns="0" rIns="0" bIns="0" rtlCol="0" anchor="t"/>
+          <a:lstStyle/>
+          <a:p>
+            <a:pPr indent="0" marL="0">
+              <a:lnSpc>
+                <a:spcPct val="115000"/>
+              </a:lnSpc>
+              <a:buNone/>
+            </a:pPr>
+            <a:r>
+              <a:rPr lang="en-US" sz="1030" dirty="0">
+                <a:solidFill>
+                  <a:srgbClr val="CBD3DC"/>
+                </a:solidFill>
+                <a:latin typeface="Calibri" pitchFamily="34" charset="0"/>
+                <a:ea typeface="Calibri" pitchFamily="34" charset="-122"/>
+                <a:cs typeface="Calibri" pitchFamily="34" charset="-120"/>
+              </a:rPr>
+              <a:t>Equity infusion or a structured plan to accelerate net worth from -₹1.54 Cr (FY25) to positive, rather than relying solely on ~₹1.4 Cr/yr retained earnings.</a:t>
+            </a:r>
+            <a:endParaRPr lang="en-US" sz="1030" dirty="0"/>
+          </a:p>
+        </p:txBody>
+      </p:sp>
+      <p:sp>
+        <p:nvSpPr>
+          <p:cNvPr id="10" name="Shape 8"/>
+          <p:cNvSpPr/>
+          <p:nvPr/>
+        </p:nvSpPr>
+        <p:spPr>
+          <a:xfrm>
+            <a:off x="548640" y="3840480"/>
+            <a:ext cx="457200" cy="457200"/>
+          </a:xfrm>
+          <a:prstGeom prst="ellipse">
+            <a:avLst/>
+          </a:prstGeom>
+          <a:solidFill>
+            <a:srgbClr val="D9622B"/>
+          </a:solidFill>
+          <a:ln/>
+        </p:spPr>
+      </p:sp>
+      <p:sp>
+        <p:nvSpPr>
+          <p:cNvPr id="11" name="Text 9"/>
+          <p:cNvSpPr/>
+          <p:nvPr/>
+        </p:nvSpPr>
+        <p:spPr>
+          <a:xfrm>
+            <a:off x="548640" y="3840480"/>
+            <a:ext cx="457200" cy="457200"/>
+          </a:xfrm>
+          <a:prstGeom prst="rect">
+            <a:avLst/>
+          </a:prstGeom>
+          <a:noFill/>
+          <a:ln/>
+        </p:spPr>
+        <p:txBody>
+          <a:bodyPr wrap="square" lIns="0" tIns="0" rIns="0" bIns="0" rtlCol="0" anchor="ctr"/>
+          <a:lstStyle/>
+          <a:p>
+            <a:pPr algn="ctr" indent="0" marL="0">
+              <a:buNone/>
+            </a:pPr>
+            <a:r>
+              <a:rPr lang="en-US" sz="1300" b="1" dirty="0">
+                <a:solidFill>
+                  <a:srgbClr val="FFFFFF"/>
+                </a:solidFill>
+                <a:latin typeface="Calibri" pitchFamily="34" charset="0"/>
+                <a:ea typeface="Calibri" pitchFamily="34" charset="-122"/>
+                <a:cs typeface="Calibri" pitchFamily="34" charset="-120"/>
+              </a:rPr>
+              <a:t>2</a:t>
+            </a:r>
+            <a:endParaRPr lang="en-US" sz="1300" dirty="0"/>
+          </a:p>
+        </p:txBody>
+      </p:sp>
+      <p:sp>
+        <p:nvSpPr>
+          <p:cNvPr id="12" name="Text 10"/>
+          <p:cNvSpPr/>
+          <p:nvPr/>
+        </p:nvSpPr>
+        <p:spPr>
+          <a:xfrm>
+            <a:off x="1234440" y="3822192"/>
+            <a:ext cx="2926080" cy="502920"/>
+          </a:xfrm>
+          <a:prstGeom prst="rect">
+            <a:avLst/>
+          </a:prstGeom>
+          <a:noFill/>
+          <a:ln/>
+        </p:spPr>
+        <p:txBody>
+          <a:bodyPr wrap="square" lIns="0" tIns="0" rIns="0" bIns="0" rtlCol="0" anchor="ctr"/>
+          <a:lstStyle/>
+          <a:p>
+            <a:pPr indent="0" marL="0">
+              <a:lnSpc>
+                <a:spcPct val="100000"/>
+              </a:lnSpc>
+              <a:buNone/>
+            </a:pPr>
+            <a:r>
+              <a:rPr lang="en-US" sz="1300" b="1" dirty="0">
+                <a:solidFill>
+                  <a:srgbClr val="FFFFFF"/>
+                </a:solidFill>
+                <a:latin typeface="Calibri" pitchFamily="34" charset="0"/>
+                <a:ea typeface="Calibri" pitchFamily="34" charset="-122"/>
+                <a:cs typeface="Calibri" pitchFamily="34" charset="-120"/>
+              </a:rPr>
+              <a:t>Working-capital bridge</a:t>
+            </a:r>
+            <a:endParaRPr lang="en-US" sz="1300" dirty="0"/>
+          </a:p>
+        </p:txBody>
+      </p:sp>
+      <p:sp>
+        <p:nvSpPr>
+          <p:cNvPr id="13" name="Text 11"/>
+          <p:cNvSpPr/>
+          <p:nvPr/>
+        </p:nvSpPr>
+        <p:spPr>
+          <a:xfrm>
+            <a:off x="4297680" y="3794760"/>
+            <a:ext cx="7345375" cy="731520"/>
+          </a:xfrm>
+          <a:prstGeom prst="rect">
+            <a:avLst/>
+          </a:prstGeom>
+          <a:noFill/>
+          <a:ln/>
+        </p:spPr>
+        <p:txBody>
+          <a:bodyPr wrap="square" lIns="0" tIns="0" rIns="0" bIns="0" rtlCol="0" anchor="t"/>
+          <a:lstStyle/>
+          <a:p>
+            <a:pPr indent="0" marL="0">
+              <a:lnSpc>
+                <a:spcPct val="115000"/>
+              </a:lnSpc>
+              <a:buNone/>
+            </a:pPr>
+            <a:r>
+              <a:rPr lang="en-US" sz="1030" dirty="0">
+                <a:solidFill>
+                  <a:srgbClr val="CBD3DC"/>
+                </a:solidFill>
+                <a:latin typeface="Calibri" pitchFamily="34" charset="0"/>
+                <a:ea typeface="Calibri" pitchFamily="34" charset="-122"/>
+                <a:cs typeface="Calibri" pitchFamily="34" charset="-120"/>
+              </a:rPr>
+              <a:t>Support the Tega/Escorts receivable cycle at the ₹25-30 Cr revenue range Datre has now demonstrated it can reach.</a:t>
+            </a:r>
+            <a:endParaRPr lang="en-US" sz="1030" dirty="0"/>
+          </a:p>
+        </p:txBody>
+      </p:sp>
+      <p:sp>
+        <p:nvSpPr>
+          <p:cNvPr id="14" name="Shape 12"/>
+          <p:cNvSpPr/>
+          <p:nvPr/>
+        </p:nvSpPr>
+        <p:spPr>
+          <a:xfrm>
+            <a:off x="548640" y="4892040"/>
+            <a:ext cx="457200" cy="457200"/>
+          </a:xfrm>
+          <a:prstGeom prst="ellipse">
+            <a:avLst/>
+          </a:prstGeom>
+          <a:solidFill>
+            <a:srgbClr val="D9622B"/>
+          </a:solidFill>
+          <a:ln/>
+        </p:spPr>
+      </p:sp>
+      <p:sp>
+        <p:nvSpPr>
+          <p:cNvPr id="15" name="Text 13"/>
+          <p:cNvSpPr/>
+          <p:nvPr/>
+        </p:nvSpPr>
+        <p:spPr>
+          <a:xfrm>
+            <a:off x="548640" y="4892040"/>
+            <a:ext cx="457200" cy="457200"/>
+          </a:xfrm>
+          <a:prstGeom prst="rect">
+            <a:avLst/>
+          </a:prstGeom>
+          <a:noFill/>
+          <a:ln/>
+        </p:spPr>
+        <p:txBody>
+          <a:bodyPr wrap="square" lIns="0" tIns="0" rIns="0" bIns="0" rtlCol="0" anchor="ctr"/>
+          <a:lstStyle/>
+          <a:p>
+            <a:pPr algn="ctr" indent="0" marL="0">
+              <a:buNone/>
+            </a:pPr>
+            <a:r>
+              <a:rPr lang="en-US" sz="1300" b="1" dirty="0">
+                <a:solidFill>
+                  <a:srgbClr val="FFFFFF"/>
+                </a:solidFill>
+                <a:latin typeface="Calibri" pitchFamily="34" charset="0"/>
+                <a:ea typeface="Calibri" pitchFamily="34" charset="-122"/>
+                <a:cs typeface="Calibri" pitchFamily="34" charset="-120"/>
+              </a:rPr>
+              <a:t>3</a:t>
+            </a:r>
+            <a:endParaRPr lang="en-US" sz="1300" dirty="0"/>
+          </a:p>
+        </p:txBody>
+      </p:sp>
+      <p:sp>
+        <p:nvSpPr>
+          <p:cNvPr id="16" name="Text 14"/>
+          <p:cNvSpPr/>
+          <p:nvPr/>
+        </p:nvSpPr>
+        <p:spPr>
+          <a:xfrm>
+            <a:off x="1234440" y="4873752"/>
+            <a:ext cx="2926080" cy="502920"/>
+          </a:xfrm>
+          <a:prstGeom prst="rect">
+            <a:avLst/>
+          </a:prstGeom>
+          <a:noFill/>
+          <a:ln/>
+        </p:spPr>
+        <p:txBody>
+          <a:bodyPr wrap="square" lIns="0" tIns="0" rIns="0" bIns="0" rtlCol="0" anchor="ctr"/>
+          <a:lstStyle/>
+          <a:p>
+            <a:pPr indent="0" marL="0">
+              <a:lnSpc>
+                <a:spcPct val="100000"/>
+              </a:lnSpc>
+              <a:buNone/>
+            </a:pPr>
+            <a:r>
+              <a:rPr lang="en-US" sz="1300" b="1" dirty="0">
+                <a:solidFill>
+                  <a:srgbClr val="FFFFFF"/>
+                </a:solidFill>
+                <a:latin typeface="Calibri" pitchFamily="34" charset="0"/>
+                <a:ea typeface="Calibri" pitchFamily="34" charset="-122"/>
+                <a:cs typeface="Calibri" pitchFamily="34" charset="-120"/>
+              </a:rPr>
+              <a:t>Quality-systems investment</a:t>
+            </a:r>
+            <a:endParaRPr lang="en-US" sz="1300" dirty="0"/>
+          </a:p>
+        </p:txBody>
+      </p:sp>
+      <p:sp>
+        <p:nvSpPr>
+          <p:cNvPr id="17" name="Text 15"/>
+          <p:cNvSpPr/>
+          <p:nvPr/>
+        </p:nvSpPr>
+        <p:spPr>
+          <a:xfrm>
+            <a:off x="4297680" y="4846320"/>
+            <a:ext cx="7345375" cy="731520"/>
+          </a:xfrm>
+          <a:prstGeom prst="rect">
+            <a:avLst/>
+          </a:prstGeom>
+          <a:noFill/>
+          <a:ln/>
+        </p:spPr>
+        <p:txBody>
+          <a:bodyPr wrap="square" lIns="0" tIns="0" rIns="0" bIns="0" rtlCol="0" anchor="t"/>
+          <a:lstStyle/>
+          <a:p>
+            <a:pPr indent="0" marL="0">
+              <a:lnSpc>
+                <a:spcPct val="115000"/>
+              </a:lnSpc>
+              <a:buNone/>
+            </a:pPr>
+            <a:r>
+              <a:rPr lang="en-US" sz="1030" dirty="0">
+                <a:solidFill>
+                  <a:srgbClr val="CBD3DC"/>
+                </a:solidFill>
+                <a:latin typeface="Calibri" pitchFamily="34" charset="0"/>
+                <a:ea typeface="Calibri" pitchFamily="34" charset="-122"/>
+                <a:cs typeface="Calibri" pitchFamily="34" charset="-120"/>
+              </a:rPr>
+              <a:t>Targeted spend to bring the rejection rate back toward its FY22-23 low (~2.6%) — scrap-cost savings alone should fund a meaningful share of this.</a:t>
+            </a:r>
+            <a:endParaRPr lang="en-US" sz="1030" dirty="0"/>
+          </a:p>
+        </p:txBody>
+      </p:sp>
+      <p:sp>
+        <p:nvSpPr>
+          <p:cNvPr id="18" name="Text 16"/>
+          <p:cNvSpPr/>
+          <p:nvPr/>
+        </p:nvSpPr>
+        <p:spPr>
+          <a:xfrm>
+            <a:off x="548640" y="5989320"/>
+            <a:ext cx="11094415" cy="457200"/>
+          </a:xfrm>
+          <a:prstGeom prst="rect">
+            <a:avLst/>
+          </a:prstGeom>
+          <a:noFill/>
+          <a:ln/>
+        </p:spPr>
+        <p:txBody>
+          <a:bodyPr wrap="square" lIns="0" tIns="0" rIns="0" bIns="0" rtlCol="0" anchor="ctr"/>
+          <a:lstStyle/>
+          <a:p>
+            <a:pPr indent="0" marL="0">
+              <a:lnSpc>
+                <a:spcPct val="110000"/>
+              </a:lnSpc>
+              <a:buNone/>
+            </a:pPr>
+            <a:r>
+              <a:rPr lang="en-US" sz="950" i="1" dirty="0">
+                <a:solidFill>
+                  <a:srgbClr val="9AA2AD"/>
+                </a:solidFill>
+                <a:latin typeface="Calibri" pitchFamily="34" charset="0"/>
+                <a:ea typeface="Calibri" pitchFamily="34" charset="-122"/>
+                <a:cs typeface="Calibri" pitchFamily="34" charset="-120"/>
+              </a:rPr>
+              <a:t>Any of the three should be sized against audited FY25 and FY25-26 management accounts, not the figures in this deck alone — and against resolution of the governance flags on slide 14.</a:t>
+            </a:r>
+            <a:endParaRPr lang="en-US" sz="950" dirty="0"/>
+          </a:p>
+        </p:txBody>
+      </p:sp>
+      <p:sp>
+        <p:nvSpPr>
+          <p:cNvPr id="19" name="Text 17"/>
+          <p:cNvSpPr/>
+          <p:nvPr/>
+        </p:nvSpPr>
+        <p:spPr>
+          <a:xfrm>
+            <a:off x="548640" y="6473952"/>
+            <a:ext cx="11094415" cy="274320"/>
+          </a:xfrm>
+          <a:prstGeom prst="rect">
+            <a:avLst/>
+          </a:prstGeom>
+          <a:noFill/>
+          <a:ln/>
+        </p:spPr>
+        <p:txBody>
+          <a:bodyPr wrap="square" lIns="0" tIns="0" rIns="0" bIns="0" rtlCol="0" anchor="ctr"/>
+          <a:lstStyle/>
+          <a:p>
+            <a:pPr algn="l" indent="0" marL="0">
+              <a:buNone/>
+            </a:pPr>
+            <a:r>
+              <a:rPr lang="en-US" sz="800" dirty="0">
+                <a:solidFill>
+                  <a:srgbClr val="8B93A0"/>
+                </a:solidFill>
+                <a:latin typeface="Calibri" pitchFamily="34" charset="0"/>
+                <a:ea typeface="Calibri" pitchFamily="34" charset="-122"/>
+                <a:cs typeface="Calibri" pitchFamily="34" charset="-120"/>
+              </a:rPr>
+              <a:t>DATRE CORPORATION LIMITED  |  CONFIDENTIAL — PREPARED FOR INVESTOR DISCUSSION</a:t>
+            </a:r>
+            <a:endParaRPr lang="en-US" sz="800" dirty="0"/>
+          </a:p>
+        </p:txBody>
+      </p:sp>
+      <p:sp>
+        <p:nvSpPr>
+          <p:cNvPr id="20" name="Text 18"/>
+          <p:cNvSpPr/>
+          <p:nvPr/>
+        </p:nvSpPr>
+        <p:spPr>
+          <a:xfrm>
+            <a:off x="11277295" y="6473952"/>
+            <a:ext cx="457200" cy="274320"/>
+          </a:xfrm>
+          <a:prstGeom prst="rect">
+            <a:avLst/>
+          </a:prstGeom>
+          <a:noFill/>
+          <a:ln/>
+        </p:spPr>
+        <p:txBody>
+          <a:bodyPr wrap="square" lIns="0" tIns="0" rIns="0" bIns="0" rtlCol="0" anchor="ctr"/>
+          <a:lstStyle/>
+          <a:p>
+            <a:pPr algn="r" indent="0" marL="0">
+              <a:buNone/>
+            </a:pPr>
+            <a:r>
+              <a:rPr lang="en-US" sz="800" dirty="0">
+                <a:solidFill>
+                  <a:srgbClr val="8B93A0"/>
+                </a:solidFill>
+                <a:latin typeface="Calibri" pitchFamily="34" charset="0"/>
+                <a:ea typeface="Calibri" pitchFamily="34" charset="-122"/>
+                <a:cs typeface="Calibri" pitchFamily="34" charset="-120"/>
+              </a:rPr>
+              <a:t>29</a:t>
             </a:r>
             <a:endParaRPr lang="en-US" sz="800" dirty="0"/>
           </a:p>
@@ -25653,6 +26913,471 @@
                 <a:cs typeface="Calibri" pitchFamily="34" charset="-120"/>
               </a:rPr>
               <a:t>3</a:t>
+            </a:r>
+            <a:endParaRPr lang="en-US" sz="800" dirty="0"/>
+          </a:p>
+        </p:txBody>
+      </p:sp>
+    </p:spTree>
+  </p:cSld>
+  <p:clrMapOvr>
+    <a:masterClrMapping/>
+  </p:clrMapOvr>
+</p:sld>
+</file>
+
+<file path=ppt/slides/slide30.xml><?xml version="1.0" encoding="utf-8"?>
+<p:sld xmlns:a="http://schemas.openxmlformats.org/drawingml/2006/main" xmlns:r="http://schemas.openxmlformats.org/officeDocument/2006/relationships" xmlns:p="http://schemas.openxmlformats.org/presentationml/2006/main">
+  <p:cSld name="Slide 30">
+    <p:bg>
+      <p:bgPr>
+        <a:solidFill>
+          <a:srgbClr val="1C1F26"/>
+        </a:solidFill>
+      </p:bgPr>
+    </p:bg>
+    <p:spTree>
+      <p:nvGrpSpPr>
+        <p:cNvPr id="1" name=""/>
+        <p:cNvGrpSpPr/>
+        <p:nvPr/>
+      </p:nvGrpSpPr>
+      <p:grpSpPr>
+        <a:xfrm>
+          <a:off x="0" y="0"/>
+          <a:ext cx="0" cy="0"/>
+          <a:chOff x="0" y="0"/>
+          <a:chExt cx="0" cy="0"/>
+        </a:xfrm>
+      </p:grpSpPr>
+      <p:sp>
+        <p:nvSpPr>
+          <p:cNvPr id="2" name="Shape 0"/>
+          <p:cNvSpPr/>
+          <p:nvPr/>
+        </p:nvSpPr>
+        <p:spPr>
+          <a:xfrm>
+            <a:off x="9692640" y="-1280160"/>
+            <a:ext cx="4754880" cy="4754880"/>
+          </a:xfrm>
+          <a:prstGeom prst="ellipse">
+            <a:avLst/>
+          </a:prstGeom>
+          <a:solidFill>
+            <a:srgbClr val="262B34"/>
+          </a:solidFill>
+          <a:ln/>
+        </p:spPr>
+      </p:sp>
+      <p:sp>
+        <p:nvSpPr>
+          <p:cNvPr id="3" name="Shape 1"/>
+          <p:cNvSpPr/>
+          <p:nvPr/>
+        </p:nvSpPr>
+        <p:spPr>
+          <a:xfrm>
+            <a:off x="-1463040" y="4572000"/>
+            <a:ext cx="3657600" cy="3657600"/>
+          </a:xfrm>
+          <a:prstGeom prst="ellipse">
+            <a:avLst/>
+          </a:prstGeom>
+          <a:solidFill>
+            <a:srgbClr val="262B34"/>
+          </a:solidFill>
+          <a:ln/>
+        </p:spPr>
+      </p:sp>
+      <p:sp>
+        <p:nvSpPr>
+          <p:cNvPr id="4" name="Text 2"/>
+          <p:cNvSpPr/>
+          <p:nvPr/>
+        </p:nvSpPr>
+        <p:spPr>
+          <a:xfrm>
+            <a:off x="548640" y="2286000"/>
+            <a:ext cx="9144000" cy="731520"/>
+          </a:xfrm>
+          <a:prstGeom prst="rect">
+            <a:avLst/>
+          </a:prstGeom>
+          <a:noFill/>
+          <a:ln/>
+        </p:spPr>
+        <p:txBody>
+          <a:bodyPr wrap="square" lIns="0" tIns="0" rIns="0" bIns="0" rtlCol="0" anchor="ctr"/>
+          <a:lstStyle/>
+          <a:p>
+            <a:pPr indent="0" marL="0">
+              <a:buNone/>
+            </a:pPr>
+            <a:r>
+              <a:rPr lang="en-US" sz="3400" b="1" dirty="0">
+                <a:solidFill>
+                  <a:srgbClr val="FFFFFF"/>
+                </a:solidFill>
+                <a:latin typeface="Cambria" pitchFamily="34" charset="0"/>
+                <a:ea typeface="Cambria" pitchFamily="34" charset="-122"/>
+                <a:cs typeface="Cambria" pitchFamily="34" charset="-120"/>
+              </a:rPr>
+              <a:t>Datre Corporation Limited</a:t>
+            </a:r>
+            <a:endParaRPr lang="en-US" sz="3400" dirty="0"/>
+          </a:p>
+        </p:txBody>
+      </p:sp>
+      <p:sp>
+        <p:nvSpPr>
+          <p:cNvPr id="5" name="Text 3"/>
+          <p:cNvSpPr/>
+          <p:nvPr/>
+        </p:nvSpPr>
+        <p:spPr>
+          <a:xfrm>
+            <a:off x="548640" y="2971800"/>
+            <a:ext cx="9144000" cy="457200"/>
+          </a:xfrm>
+          <a:prstGeom prst="rect">
+            <a:avLst/>
+          </a:prstGeom>
+          <a:noFill/>
+          <a:ln/>
+        </p:spPr>
+        <p:txBody>
+          <a:bodyPr wrap="square" lIns="0" tIns="0" rIns="0" bIns="0" rtlCol="0" anchor="ctr"/>
+          <a:lstStyle/>
+          <a:p>
+            <a:pPr indent="0" marL="0">
+              <a:buNone/>
+            </a:pPr>
+            <a:r>
+              <a:rPr lang="en-US" sz="1500" i="1" dirty="0">
+                <a:solidFill>
+                  <a:srgbClr val="CBD3DC"/>
+                </a:solidFill>
+                <a:latin typeface="Calibri" pitchFamily="34" charset="0"/>
+                <a:ea typeface="Calibri" pitchFamily="34" charset="-122"/>
+                <a:cs typeface="Calibri" pitchFamily="34" charset="-120"/>
+              </a:rPr>
+              <a:t>Engineering Essence, Manufacturing Personified</a:t>
+            </a:r>
+            <a:endParaRPr lang="en-US" sz="1500" dirty="0"/>
+          </a:p>
+        </p:txBody>
+      </p:sp>
+      <p:sp>
+        <p:nvSpPr>
+          <p:cNvPr id="6" name="Text 4"/>
+          <p:cNvSpPr/>
+          <p:nvPr/>
+        </p:nvSpPr>
+        <p:spPr>
+          <a:xfrm>
+            <a:off x="548640" y="4023360"/>
+            <a:ext cx="2743200" cy="274320"/>
+          </a:xfrm>
+          <a:prstGeom prst="rect">
+            <a:avLst/>
+          </a:prstGeom>
+          <a:noFill/>
+          <a:ln/>
+        </p:spPr>
+        <p:txBody>
+          <a:bodyPr wrap="square" lIns="0" tIns="0" rIns="0" bIns="0" rtlCol="0" anchor="ctr"/>
+          <a:lstStyle/>
+          <a:p>
+            <a:pPr indent="0" marL="0">
+              <a:buNone/>
+            </a:pPr>
+            <a:r>
+              <a:rPr lang="en-US" sz="950" b="1" spc="100" kern="0" dirty="0">
+                <a:solidFill>
+                  <a:srgbClr val="D9622B"/>
+                </a:solidFill>
+                <a:latin typeface="Calibri" pitchFamily="34" charset="0"/>
+                <a:ea typeface="Calibri" pitchFamily="34" charset="-122"/>
+                <a:cs typeface="Calibri" pitchFamily="34" charset="-120"/>
+              </a:rPr>
+              <a:t>REGISTERED OFFICE</a:t>
+            </a:r>
+            <a:endParaRPr lang="en-US" sz="950" dirty="0"/>
+          </a:p>
+        </p:txBody>
+      </p:sp>
+      <p:sp>
+        <p:nvSpPr>
+          <p:cNvPr id="7" name="Text 5"/>
+          <p:cNvSpPr/>
+          <p:nvPr/>
+        </p:nvSpPr>
+        <p:spPr>
+          <a:xfrm>
+            <a:off x="548640" y="4279392"/>
+            <a:ext cx="9144000" cy="365760"/>
+          </a:xfrm>
+          <a:prstGeom prst="rect">
+            <a:avLst/>
+          </a:prstGeom>
+          <a:noFill/>
+          <a:ln/>
+        </p:spPr>
+        <p:txBody>
+          <a:bodyPr wrap="square" lIns="0" tIns="0" rIns="0" bIns="0" rtlCol="0" anchor="ctr"/>
+          <a:lstStyle/>
+          <a:p>
+            <a:pPr indent="0" marL="0">
+              <a:buNone/>
+            </a:pPr>
+            <a:r>
+              <a:rPr lang="en-US" sz="1200" dirty="0">
+                <a:solidFill>
+                  <a:srgbClr val="FFFFFF"/>
+                </a:solidFill>
+                <a:latin typeface="Calibri" pitchFamily="34" charset="0"/>
+                <a:ea typeface="Calibri" pitchFamily="34" charset="-122"/>
+                <a:cs typeface="Calibri" pitchFamily="34" charset="-120"/>
+              </a:rPr>
+              <a:t>Sector-III, Falta Industrial Growth Centre, South 24 Parganas, West Bengal 743504, India</a:t>
+            </a:r>
+            <a:endParaRPr lang="en-US" sz="1200" dirty="0"/>
+          </a:p>
+        </p:txBody>
+      </p:sp>
+      <p:sp>
+        <p:nvSpPr>
+          <p:cNvPr id="8" name="Text 6"/>
+          <p:cNvSpPr/>
+          <p:nvPr/>
+        </p:nvSpPr>
+        <p:spPr>
+          <a:xfrm>
+            <a:off x="548640" y="4681728"/>
+            <a:ext cx="2743200" cy="274320"/>
+          </a:xfrm>
+          <a:prstGeom prst="rect">
+            <a:avLst/>
+          </a:prstGeom>
+          <a:noFill/>
+          <a:ln/>
+        </p:spPr>
+        <p:txBody>
+          <a:bodyPr wrap="square" lIns="0" tIns="0" rIns="0" bIns="0" rtlCol="0" anchor="ctr"/>
+          <a:lstStyle/>
+          <a:p>
+            <a:pPr indent="0" marL="0">
+              <a:buNone/>
+            </a:pPr>
+            <a:r>
+              <a:rPr lang="en-US" sz="950" b="1" spc="100" kern="0" dirty="0">
+                <a:solidFill>
+                  <a:srgbClr val="D9622B"/>
+                </a:solidFill>
+                <a:latin typeface="Calibri" pitchFamily="34" charset="0"/>
+                <a:ea typeface="Calibri" pitchFamily="34" charset="-122"/>
+                <a:cs typeface="Calibri" pitchFamily="34" charset="-120"/>
+              </a:rPr>
+              <a:t>CONTACT</a:t>
+            </a:r>
+            <a:endParaRPr lang="en-US" sz="950" dirty="0"/>
+          </a:p>
+        </p:txBody>
+      </p:sp>
+      <p:sp>
+        <p:nvSpPr>
+          <p:cNvPr id="9" name="Text 7"/>
+          <p:cNvSpPr/>
+          <p:nvPr/>
+        </p:nvSpPr>
+        <p:spPr>
+          <a:xfrm>
+            <a:off x="548640" y="4937760"/>
+            <a:ext cx="9144000" cy="365760"/>
+          </a:xfrm>
+          <a:prstGeom prst="rect">
+            <a:avLst/>
+          </a:prstGeom>
+          <a:noFill/>
+          <a:ln/>
+        </p:spPr>
+        <p:txBody>
+          <a:bodyPr wrap="square" lIns="0" tIns="0" rIns="0" bIns="0" rtlCol="0" anchor="ctr"/>
+          <a:lstStyle/>
+          <a:p>
+            <a:pPr indent="0" marL="0">
+              <a:buNone/>
+            </a:pPr>
+            <a:r>
+              <a:rPr lang="en-US" sz="1200" dirty="0">
+                <a:solidFill>
+                  <a:srgbClr val="FFFFFF"/>
+                </a:solidFill>
+                <a:latin typeface="Calibri" pitchFamily="34" charset="0"/>
+                <a:ea typeface="Calibri" pitchFamily="34" charset="-122"/>
+                <a:cs typeface="Calibri" pitchFamily="34" charset="-120"/>
+              </a:rPr>
+              <a:t>sales@datre.com  ·  hr@datre.com  ·  www.datre.in</a:t>
+            </a:r>
+            <a:endParaRPr lang="en-US" sz="1200" dirty="0"/>
+          </a:p>
+        </p:txBody>
+      </p:sp>
+      <p:sp>
+        <p:nvSpPr>
+          <p:cNvPr id="10" name="Text 8"/>
+          <p:cNvSpPr/>
+          <p:nvPr/>
+        </p:nvSpPr>
+        <p:spPr>
+          <a:xfrm>
+            <a:off x="548640" y="5340096"/>
+            <a:ext cx="2743200" cy="274320"/>
+          </a:xfrm>
+          <a:prstGeom prst="rect">
+            <a:avLst/>
+          </a:prstGeom>
+          <a:noFill/>
+          <a:ln/>
+        </p:spPr>
+        <p:txBody>
+          <a:bodyPr wrap="square" lIns="0" tIns="0" rIns="0" bIns="0" rtlCol="0" anchor="ctr"/>
+          <a:lstStyle/>
+          <a:p>
+            <a:pPr indent="0" marL="0">
+              <a:buNone/>
+            </a:pPr>
+            <a:r>
+              <a:rPr lang="en-US" sz="950" b="1" spc="100" kern="0" dirty="0">
+                <a:solidFill>
+                  <a:srgbClr val="D9622B"/>
+                </a:solidFill>
+                <a:latin typeface="Calibri" pitchFamily="34" charset="0"/>
+                <a:ea typeface="Calibri" pitchFamily="34" charset="-122"/>
+                <a:cs typeface="Calibri" pitchFamily="34" charset="-120"/>
+              </a:rPr>
+              <a:t>PREPARED FOR</a:t>
+            </a:r>
+            <a:endParaRPr lang="en-US" sz="950" dirty="0"/>
+          </a:p>
+        </p:txBody>
+      </p:sp>
+      <p:sp>
+        <p:nvSpPr>
+          <p:cNvPr id="11" name="Text 9"/>
+          <p:cNvSpPr/>
+          <p:nvPr/>
+        </p:nvSpPr>
+        <p:spPr>
+          <a:xfrm>
+            <a:off x="548640" y="5596128"/>
+            <a:ext cx="9144000" cy="365760"/>
+          </a:xfrm>
+          <a:prstGeom prst="rect">
+            <a:avLst/>
+          </a:prstGeom>
+          <a:noFill/>
+          <a:ln/>
+        </p:spPr>
+        <p:txBody>
+          <a:bodyPr wrap="square" lIns="0" tIns="0" rIns="0" bIns="0" rtlCol="0" anchor="ctr"/>
+          <a:lstStyle/>
+          <a:p>
+            <a:pPr indent="0" marL="0">
+              <a:buNone/>
+            </a:pPr>
+            <a:r>
+              <a:rPr lang="en-US" sz="1200" dirty="0">
+                <a:solidFill>
+                  <a:srgbClr val="FFFFFF"/>
+                </a:solidFill>
+                <a:latin typeface="Calibri" pitchFamily="34" charset="0"/>
+                <a:ea typeface="Calibri" pitchFamily="34" charset="-122"/>
+                <a:cs typeface="Calibri" pitchFamily="34" charset="-120"/>
+              </a:rPr>
+              <a:t>Investor discussion — Indranil Dutta, Chief Executive Officer</a:t>
+            </a:r>
+            <a:endParaRPr lang="en-US" sz="1200" dirty="0"/>
+          </a:p>
+        </p:txBody>
+      </p:sp>
+      <p:sp>
+        <p:nvSpPr>
+          <p:cNvPr id="12" name="Text 10"/>
+          <p:cNvSpPr/>
+          <p:nvPr/>
+        </p:nvSpPr>
+        <p:spPr>
+          <a:xfrm>
+            <a:off x="548640" y="5943600"/>
+            <a:ext cx="11094415" cy="640080"/>
+          </a:xfrm>
+          <a:prstGeom prst="rect">
+            <a:avLst/>
+          </a:prstGeom>
+          <a:noFill/>
+          <a:ln/>
+        </p:spPr>
+        <p:txBody>
+          <a:bodyPr wrap="square" lIns="0" tIns="0" rIns="0" bIns="0" rtlCol="0" anchor="ctr"/>
+          <a:lstStyle/>
+          <a:p>
+            <a:pPr indent="0" marL="0">
+              <a:lnSpc>
+                <a:spcPct val="115000"/>
+              </a:lnSpc>
+              <a:buNone/>
+            </a:pPr>
+            <a:r>
+              <a:rPr lang="en-US" sz="850" i="1" dirty="0">
+                <a:solidFill>
+                  <a:srgbClr val="7A828E"/>
+                </a:solidFill>
+                <a:latin typeface="Calibri" pitchFamily="34" charset="0"/>
+                <a:ea typeface="Calibri" pitchFamily="34" charset="-122"/>
+                <a:cs typeface="Calibri" pitchFamily="34" charset="-120"/>
+              </a:rPr>
+              <a:t>This document consolidates the company's own financial statements, management information system reports and internal analyses. Figures are sourced and dated throughout; where audited and unaudited data diverge, both are shown. Confidential — prepared for internal investor discussion only.</a:t>
+            </a:r>
+            <a:endParaRPr lang="en-US" sz="850" dirty="0"/>
+          </a:p>
+        </p:txBody>
+      </p:sp>
+      <p:sp>
+        <p:nvSpPr>
+          <p:cNvPr id="13" name="Text 11"/>
+          <p:cNvSpPr/>
+          <p:nvPr/>
+        </p:nvSpPr>
+        <p:spPr>
+          <a:xfrm>
+            <a:off x="11277295" y="6473952"/>
+            <a:ext cx="457200" cy="274320"/>
+          </a:xfrm>
+          <a:prstGeom prst="rect">
+            <a:avLst/>
+          </a:prstGeom>
+          <a:noFill/>
+          <a:ln/>
+        </p:spPr>
+        <p:txBody>
+          <a:bodyPr wrap="square" lIns="0" tIns="0" rIns="0" bIns="0" rtlCol="0" anchor="ctr"/>
+          <a:lstStyle/>
+          <a:p>
+            <a:pPr algn="r" indent="0" marL="0">
+              <a:buNone/>
+            </a:pPr>
+            <a:r>
+              <a:rPr lang="en-US" sz="800" dirty="0">
+                <a:solidFill>
+                  <a:srgbClr val="8B93A0"/>
+                </a:solidFill>
+                <a:latin typeface="Calibri" pitchFamily="34" charset="0"/>
+                <a:ea typeface="Calibri" pitchFamily="34" charset="-122"/>
+                <a:cs typeface="Calibri" pitchFamily="34" charset="-120"/>
+              </a:rPr>
+              <a:t>30</a:t>
             </a:r>
             <a:endParaRPr lang="en-US" sz="800" dirty="0"/>
           </a:p>

--- a/investor-pitch/Datre_Corporation_Investor_Pitch.pptx
+++ b/investor-pitch/Datre_Corporation_Investor_Pitch.pptx
@@ -22190,7 +22190,7 @@
                 <a:ea typeface="Calibri" pitchFamily="34" charset="-122"/>
                 <a:cs typeface="Calibri" pitchFamily="34" charset="-120"/>
               </a:rPr>
-              <a:t>Carbon intensity is arriving as a new compliance layer on top of accreditation: the EU's CBAM applies a 38.8% levy above 1.5 tCO2/t since Jan 2026, against an Indian foundry baseline of 1.8-2.2 tCO2/t. Not yet a direct hit for Datre's Japan/Australia/North America-leaning exports, but increasingly an OEM supplier-audit question.</a:t>
+              <a:t>Two trade shocks now compound the compliance layer: CBAM's 50-tonne/year de-minimis gives ‘no real relief’ to most Indian exporters (EEPC India, Aug 2025), and a fresh US tariff stack — 25% reciprocal + 25% punitive atop an existing 50% Section 232 steel duty — took effect 27 Aug 2025. Datre's own direct or Tega-mediated US exposure is unconfirmed in the materials reviewed.</a:t>
             </a:r>
             <a:endParaRPr lang="en-US" sz="980" dirty="0"/>
           </a:p>
@@ -22232,7 +22232,7 @@
                 <a:ea typeface="Calibri" pitchFamily="34" charset="-122"/>
                 <a:cs typeface="Calibri" pitchFamily="34" charset="-120"/>
               </a:rPr>
-              <a:t>Sector figures (unit counts, coke pricing, CBAM threshold, consumption growth) are from an external industry briefing, not independently verified against Drive records — attributed as market context, not audited fact.</a:t>
+              <a:t>Unit counts, coke pricing and consumption growth are from an external industry briefing, unverified against Drive. The CBAM and US-tariff figures are sourced to an EEPC India Panel 20/21 export-council agenda (18 Aug 2025) found in Drive.</a:t>
             </a:r>
             <a:endParaRPr lang="en-US" sz="800" dirty="0"/>
           </a:p>
